--- a/lendet/2026-2027/mobile/lectures/ligjerata-07-kontrolli-mvp-rideshare-2026.pptx
+++ b/lendet/2026-2027/mobile/lectures/ligjerata-07-kontrolli-mvp-rideshare-2026.pptx
@@ -2,27 +2,27 @@
 <file path=ppt/presentation.xml><?xml version="1.0" encoding="utf-8"?>
 <p:presentation xmlns:p="http://schemas.openxmlformats.org/presentationml/2006/main">
   <p:sldMasterIdLst>
-    <p:sldMasterId xmlns:r="http://schemas.openxmlformats.org/officeDocument/2006/relationships" id="2147483648" r:id="R5d135ca1a0984155"/>
+    <p:sldMasterId xmlns:r="http://schemas.openxmlformats.org/officeDocument/2006/relationships" id="2147483648" r:id="R3139c077fa664670"/>
   </p:sldMasterIdLst>
   <p:sldIdLst>
-    <p:sldId xmlns:r="http://schemas.openxmlformats.org/officeDocument/2006/relationships" id="256" r:id="Re08db337b4c94301"/>
-    <p:sldId xmlns:r="http://schemas.openxmlformats.org/officeDocument/2006/relationships" id="257" r:id="Rbe74d985c05041c7"/>
-    <p:sldId xmlns:r="http://schemas.openxmlformats.org/officeDocument/2006/relationships" id="258" r:id="R263c826d26c74446"/>
-    <p:sldId xmlns:r="http://schemas.openxmlformats.org/officeDocument/2006/relationships" id="259" r:id="R269f5b8e8f004639"/>
-    <p:sldId xmlns:r="http://schemas.openxmlformats.org/officeDocument/2006/relationships" id="260" r:id="Rc91da2b986994fa0"/>
-    <p:sldId xmlns:r="http://schemas.openxmlformats.org/officeDocument/2006/relationships" id="261" r:id="Rbb3b18922d7f4d82"/>
-    <p:sldId xmlns:r="http://schemas.openxmlformats.org/officeDocument/2006/relationships" id="262" r:id="Rc981dababfc0421a"/>
-    <p:sldId xmlns:r="http://schemas.openxmlformats.org/officeDocument/2006/relationships" id="263" r:id="R3e63953822214575"/>
-    <p:sldId xmlns:r="http://schemas.openxmlformats.org/officeDocument/2006/relationships" id="264" r:id="Rb42f9ae8896e4544"/>
-    <p:sldId xmlns:r="http://schemas.openxmlformats.org/officeDocument/2006/relationships" id="265" r:id="Rbe0fb7fb23bc4cfc"/>
-    <p:sldId xmlns:r="http://schemas.openxmlformats.org/officeDocument/2006/relationships" id="266" r:id="Ra307d64205454fc6"/>
-    <p:sldId xmlns:r="http://schemas.openxmlformats.org/officeDocument/2006/relationships" id="267" r:id="R09dd1184c2a242e0"/>
-    <p:sldId xmlns:r="http://schemas.openxmlformats.org/officeDocument/2006/relationships" id="268" r:id="Raf5a425c13fa4d9a"/>
-    <p:sldId xmlns:r="http://schemas.openxmlformats.org/officeDocument/2006/relationships" id="269" r:id="Rd42d69bac1fd4a1e"/>
-    <p:sldId xmlns:r="http://schemas.openxmlformats.org/officeDocument/2006/relationships" id="270" r:id="R3920b3eb0e834072"/>
-    <p:sldId xmlns:r="http://schemas.openxmlformats.org/officeDocument/2006/relationships" id="271" r:id="R5dc7a80ff4284d4e"/>
-    <p:sldId xmlns:r="http://schemas.openxmlformats.org/officeDocument/2006/relationships" id="272" r:id="R4a1dd100ca144073"/>
-    <p:sldId xmlns:r="http://schemas.openxmlformats.org/officeDocument/2006/relationships" id="273" r:id="Rcf6fabb189b64b91"/>
+    <p:sldId xmlns:r="http://schemas.openxmlformats.org/officeDocument/2006/relationships" id="256" r:id="R9dd59cefbc594cec"/>
+    <p:sldId xmlns:r="http://schemas.openxmlformats.org/officeDocument/2006/relationships" id="257" r:id="R08a3fe49ccdb42e2"/>
+    <p:sldId xmlns:r="http://schemas.openxmlformats.org/officeDocument/2006/relationships" id="258" r:id="R5b31383fb9f04207"/>
+    <p:sldId xmlns:r="http://schemas.openxmlformats.org/officeDocument/2006/relationships" id="259" r:id="Rea22b91b552d4003"/>
+    <p:sldId xmlns:r="http://schemas.openxmlformats.org/officeDocument/2006/relationships" id="260" r:id="Re60326bbf14549a1"/>
+    <p:sldId xmlns:r="http://schemas.openxmlformats.org/officeDocument/2006/relationships" id="261" r:id="R557ef4afd8a84533"/>
+    <p:sldId xmlns:r="http://schemas.openxmlformats.org/officeDocument/2006/relationships" id="262" r:id="R1c70b289079846b3"/>
+    <p:sldId xmlns:r="http://schemas.openxmlformats.org/officeDocument/2006/relationships" id="263" r:id="R93ea9ea005e74f44"/>
+    <p:sldId xmlns:r="http://schemas.openxmlformats.org/officeDocument/2006/relationships" id="264" r:id="Re1e9ca26d86243bd"/>
+    <p:sldId xmlns:r="http://schemas.openxmlformats.org/officeDocument/2006/relationships" id="265" r:id="Ra7b82f1def82495d"/>
+    <p:sldId xmlns:r="http://schemas.openxmlformats.org/officeDocument/2006/relationships" id="266" r:id="Rd0d7b1b81c0e4216"/>
+    <p:sldId xmlns:r="http://schemas.openxmlformats.org/officeDocument/2006/relationships" id="267" r:id="R5e7121a8e3f64ffd"/>
+    <p:sldId xmlns:r="http://schemas.openxmlformats.org/officeDocument/2006/relationships" id="268" r:id="Rf92a60a010d7408e"/>
+    <p:sldId xmlns:r="http://schemas.openxmlformats.org/officeDocument/2006/relationships" id="269" r:id="R1eff110ad57846a2"/>
+    <p:sldId xmlns:r="http://schemas.openxmlformats.org/officeDocument/2006/relationships" id="270" r:id="R0bdc9d44a34441b5"/>
+    <p:sldId xmlns:r="http://schemas.openxmlformats.org/officeDocument/2006/relationships" id="271" r:id="R7b29edc815ae419d"/>
+    <p:sldId xmlns:r="http://schemas.openxmlformats.org/officeDocument/2006/relationships" id="272" r:id="R28267e2e0cc2406f"/>
+    <p:sldId xmlns:r="http://schemas.openxmlformats.org/officeDocument/2006/relationships" id="273" r:id="Rf9289252ee504eae"/>
   </p:sldIdLst>
   <p:sldSz cx="12192000" cy="6858000"/>
   <p:notesSz cx="6858000" cy="9144000"/>
@@ -46,7 +46,7 @@
           <p:cNvPr id="3" name="Title">
             <a:extLst xmlns:a="http://schemas.openxmlformats.org/drawingml/2006/main">
               <a:ext uri="{FF2B5EF4-FFF2-40B4-BE49-F238E27FC236}">
-                <a16:creationId xmlns:a16="http://schemas.microsoft.com/office/drawing/2014/main" id="{6E36BD56-D4D6-42A0-A11B-93888EE31140}"/>
+                <a16:creationId xmlns:a16="http://schemas.microsoft.com/office/drawing/2014/main" id="{D42227B1-23BF-4A8C-A36E-F65714D8022E}"/>
               </a:ext>
             </a:extLst>
           </p:cNvPr>
@@ -275,7 +275,7 @@
           <p:cNvPr id="2" name="Subtitle">
             <a:extLst xmlns:a="http://schemas.openxmlformats.org/drawingml/2006/main">
               <a:ext uri="{FF2B5EF4-FFF2-40B4-BE49-F238E27FC236}">
-                <a16:creationId xmlns:a16="http://schemas.microsoft.com/office/drawing/2014/main" id="{F3CCCE2B-1A0F-4443-8B66-31023B40E288}"/>
+                <a16:creationId xmlns:a16="http://schemas.microsoft.com/office/drawing/2014/main" id="{BB7C38C1-D08F-48C3-9D37-955DCEB60383}"/>
               </a:ext>
             </a:extLst>
           </p:cNvPr>
@@ -521,7 +521,7 @@
           <p:cNvPr id="2" name="Section title">
             <a:extLst xmlns:a="http://schemas.openxmlformats.org/drawingml/2006/main">
               <a:ext uri="{FF2B5EF4-FFF2-40B4-BE49-F238E27FC236}">
-                <a16:creationId xmlns:a16="http://schemas.microsoft.com/office/drawing/2014/main" id="{F42BB268-962D-4A4A-A36F-414E93C8AF79}"/>
+                <a16:creationId xmlns:a16="http://schemas.microsoft.com/office/drawing/2014/main" id="{43AD3D19-B2A5-4FC2-8321-C688ACE60C50}"/>
               </a:ext>
             </a:extLst>
           </p:cNvPr>
@@ -767,7 +767,7 @@
           <p:cNvPr id="3" name="Title">
             <a:extLst xmlns:a="http://schemas.openxmlformats.org/drawingml/2006/main">
               <a:ext uri="{FF2B5EF4-FFF2-40B4-BE49-F238E27FC236}">
-                <a16:creationId xmlns:a16="http://schemas.microsoft.com/office/drawing/2014/main" id="{22868CC3-7522-4FC5-9B4E-8DFC7083C4C6}"/>
+                <a16:creationId xmlns:a16="http://schemas.microsoft.com/office/drawing/2014/main" id="{A253451B-DA6A-4EFB-BF17-050261519107}"/>
               </a:ext>
             </a:extLst>
           </p:cNvPr>
@@ -996,7 +996,7 @@
           <p:cNvPr id="2" name="Body">
             <a:extLst xmlns:a="http://schemas.openxmlformats.org/drawingml/2006/main">
               <a:ext uri="{FF2B5EF4-FFF2-40B4-BE49-F238E27FC236}">
-                <a16:creationId xmlns:a16="http://schemas.microsoft.com/office/drawing/2014/main" id="{43C7679B-C69A-4A3F-B1A7-09103BF9F8F7}"/>
+                <a16:creationId xmlns:a16="http://schemas.microsoft.com/office/drawing/2014/main" id="{08EC6A38-8952-4557-9E08-F68366C703C2}"/>
               </a:ext>
             </a:extLst>
           </p:cNvPr>
@@ -1242,7 +1242,7 @@
           <p:cNvPr id="4" name="Title">
             <a:extLst xmlns:a="http://schemas.openxmlformats.org/drawingml/2006/main">
               <a:ext uri="{FF2B5EF4-FFF2-40B4-BE49-F238E27FC236}">
-                <a16:creationId xmlns:a16="http://schemas.microsoft.com/office/drawing/2014/main" id="{8F8CCA6A-4D7A-4CB3-BC2D-EB3E663B5382}"/>
+                <a16:creationId xmlns:a16="http://schemas.microsoft.com/office/drawing/2014/main" id="{37960D93-3972-4945-AB05-8C81286B7EBE}"/>
               </a:ext>
             </a:extLst>
           </p:cNvPr>
@@ -1471,7 +1471,7 @@
           <p:cNvPr id="2" name="Left column">
             <a:extLst xmlns:a="http://schemas.openxmlformats.org/drawingml/2006/main">
               <a:ext uri="{FF2B5EF4-FFF2-40B4-BE49-F238E27FC236}">
-                <a16:creationId xmlns:a16="http://schemas.microsoft.com/office/drawing/2014/main" id="{B2483A1C-CD43-45BB-88E8-8BFF45CE6144}"/>
+                <a16:creationId xmlns:a16="http://schemas.microsoft.com/office/drawing/2014/main" id="{D885CCF8-6742-4671-8E87-92C0EBE2FDD3}"/>
               </a:ext>
             </a:extLst>
           </p:cNvPr>
@@ -1700,7 +1700,7 @@
           <p:cNvPr id="3" name="Right column">
             <a:extLst xmlns:a="http://schemas.openxmlformats.org/drawingml/2006/main">
               <a:ext uri="{FF2B5EF4-FFF2-40B4-BE49-F238E27FC236}">
-                <a16:creationId xmlns:a16="http://schemas.microsoft.com/office/drawing/2014/main" id="{AFC43F2F-1DBD-4559-9B26-921EEB965F80}"/>
+                <a16:creationId xmlns:a16="http://schemas.microsoft.com/office/drawing/2014/main" id="{B963392F-4BC1-4F54-AA89-68B2567E35E4}"/>
               </a:ext>
             </a:extLst>
           </p:cNvPr>
@@ -1946,7 +1946,7 @@
           <p:cNvPr id="3" name="Title">
             <a:extLst xmlns:a="http://schemas.openxmlformats.org/drawingml/2006/main">
               <a:ext uri="{FF2B5EF4-FFF2-40B4-BE49-F238E27FC236}">
-                <a16:creationId xmlns:a16="http://schemas.microsoft.com/office/drawing/2014/main" id="{AF04AD57-A62C-4573-BF1C-F51FC263851C}"/>
+                <a16:creationId xmlns:a16="http://schemas.microsoft.com/office/drawing/2014/main" id="{C1A1F216-BDE3-416F-B13D-9BD2028338F2}"/>
               </a:ext>
             </a:extLst>
           </p:cNvPr>
@@ -2175,7 +2175,7 @@
           <p:cNvPr id="2" name="Left column">
             <a:extLst xmlns:a="http://schemas.openxmlformats.org/drawingml/2006/main">
               <a:ext uri="{FF2B5EF4-FFF2-40B4-BE49-F238E27FC236}">
-                <a16:creationId xmlns:a16="http://schemas.microsoft.com/office/drawing/2014/main" id="{9CB469D4-184D-48FC-A3E5-274613155F13}"/>
+                <a16:creationId xmlns:a16="http://schemas.microsoft.com/office/drawing/2014/main" id="{DF055F8C-56D1-490F-A93E-EDB560EACF18}"/>
               </a:ext>
             </a:extLst>
           </p:cNvPr>
@@ -2442,12 +2442,12 @@
   </p:cSld>
   <p:clrMap bg1="lt1" tx1="dk1" bg2="lt2" tx2="dk2" accent1="accent1" accent2="accent2" accent3="accent3" accent4="accent4" accent5="accent5" accent6="accent6" hlink="hlink" folHlink="folHlink"/>
   <p:sldLayoutIdLst>
-    <p:sldLayoutId xmlns:r="http://schemas.openxmlformats.org/officeDocument/2006/relationships" id="2147483649" r:id="R6928c59dcab4460b"/>
-    <p:sldLayoutId xmlns:r="http://schemas.openxmlformats.org/officeDocument/2006/relationships" id="2147483650" r:id="Rbb150280d6f14d63"/>
-    <p:sldLayoutId xmlns:r="http://schemas.openxmlformats.org/officeDocument/2006/relationships" id="2147483651" r:id="R9328b11cb18c459c"/>
-    <p:sldLayoutId xmlns:r="http://schemas.openxmlformats.org/officeDocument/2006/relationships" id="2147483652" r:id="R631c62e9da934778"/>
-    <p:sldLayoutId xmlns:r="http://schemas.openxmlformats.org/officeDocument/2006/relationships" id="2147483653" r:id="Rb747c62b15bf4e52"/>
-    <p:sldLayoutId xmlns:r="http://schemas.openxmlformats.org/officeDocument/2006/relationships" id="2147483654" r:id="R3edf7588833d43d8"/>
+    <p:sldLayoutId xmlns:r="http://schemas.openxmlformats.org/officeDocument/2006/relationships" id="2147483649" r:id="R248e36c36c024aec"/>
+    <p:sldLayoutId xmlns:r="http://schemas.openxmlformats.org/officeDocument/2006/relationships" id="2147483650" r:id="R88d21ff2b2b945ac"/>
+    <p:sldLayoutId xmlns:r="http://schemas.openxmlformats.org/officeDocument/2006/relationships" id="2147483651" r:id="R5e726ddb9ab84868"/>
+    <p:sldLayoutId xmlns:r="http://schemas.openxmlformats.org/officeDocument/2006/relationships" id="2147483652" r:id="R5d27c16274354d91"/>
+    <p:sldLayoutId xmlns:r="http://schemas.openxmlformats.org/officeDocument/2006/relationships" id="2147483653" r:id="Re670eb337fe54968"/>
+    <p:sldLayoutId xmlns:r="http://schemas.openxmlformats.org/officeDocument/2006/relationships" id="2147483654" r:id="R662d74552dfc4cb0"/>
   </p:sldLayoutIdLst>
   <p:txStyles>
     <p:titleStyle>
@@ -2995,10 +2995,10 @@
       </p:grpSpPr>
       <p:sp>
         <p:nvSpPr>
-          <p:cNvPr id="12" name="">
+          <p:cNvPr id="15" name="">
             <a:extLst xmlns:a="http://schemas.openxmlformats.org/drawingml/2006/main">
               <a:ext uri="{FF2B5EF4-FFF2-40B4-BE49-F238E27FC236}">
-                <a16:creationId xmlns:a16="http://schemas.microsoft.com/office/drawing/2014/main" id="{D9FAD897-5F10-452A-8E39-C38E3B9FD0DC}"/>
+                <a16:creationId xmlns:a16="http://schemas.microsoft.com/office/drawing/2014/main" id="{66ED5C00-70B0-47CF-B037-9C3E0A707696}"/>
               </a:ext>
             </a:extLst>
           </p:cNvPr>
@@ -3156,7 +3156,7 @@
           <p:cNvPr id="2" name="">
             <a:extLst xmlns:a="http://schemas.openxmlformats.org/drawingml/2006/main">
               <a:ext uri="{FF2B5EF4-FFF2-40B4-BE49-F238E27FC236}">
-                <a16:creationId xmlns:a16="http://schemas.microsoft.com/office/drawing/2014/main" id="{C1DAAA2E-00F3-47D8-83BF-8F5073E4708B}"/>
+                <a16:creationId xmlns:a16="http://schemas.microsoft.com/office/drawing/2014/main" id="{F7514E19-880B-4547-9E99-86199F03DB54}"/>
               </a:ext>
             </a:extLst>
           </p:cNvPr>
@@ -3314,7 +3314,7 @@
           <p:cNvPr id="3" name="">
             <a:extLst xmlns:a="http://schemas.openxmlformats.org/drawingml/2006/main">
               <a:ext uri="{FF2B5EF4-FFF2-40B4-BE49-F238E27FC236}">
-                <a16:creationId xmlns:a16="http://schemas.microsoft.com/office/drawing/2014/main" id="{B8148EF5-6D56-4FD2-9BE8-B86C8D47A1AC}"/>
+                <a16:creationId xmlns:a16="http://schemas.microsoft.com/office/drawing/2014/main" id="{5407464A-DC0E-4E7B-B0C5-33F60FFAD276}"/>
               </a:ext>
             </a:extLst>
           </p:cNvPr>
@@ -3324,7 +3324,7 @@
           <p:nvPr/>
         </p:nvPicPr>
         <p:blipFill>
-          <a:blip xmlns:r="http://schemas.openxmlformats.org/officeDocument/2006/relationships" xmlns:a="http://schemas.openxmlformats.org/drawingml/2006/main" r:embed="R4c9d0e4ed40746a7"/>
+          <a:blip xmlns:r="http://schemas.openxmlformats.org/officeDocument/2006/relationships" xmlns:a="http://schemas.openxmlformats.org/drawingml/2006/main" r:embed="R094029139d5b4448"/>
           <a:stretch xmlns:a="http://schemas.openxmlformats.org/drawingml/2006/main"/>
         </p:blipFill>
         <p:spPr>
@@ -3342,7 +3342,7 @@
           <p:cNvPr id="4" name="">
             <a:extLst xmlns:a="http://schemas.openxmlformats.org/drawingml/2006/main">
               <a:ext uri="{FF2B5EF4-FFF2-40B4-BE49-F238E27FC236}">
-                <a16:creationId xmlns:a16="http://schemas.microsoft.com/office/drawing/2014/main" id="{E4A46018-40D6-4917-8C4D-6D0CB66D71EF}"/>
+                <a16:creationId xmlns:a16="http://schemas.microsoft.com/office/drawing/2014/main" id="{99CCA8A0-C54D-4076-88E5-99D396BB231A}"/>
               </a:ext>
             </a:extLst>
           </p:cNvPr>
@@ -3490,7 +3490,7 @@
                 <a:ea typeface="Arial"/>
                 <a:cs typeface="Arial"/>
               </a:rPr>
-              <a:t>A do t’ia besoje udhëtimin këtij app-i?</a:t>
+              <a:t>Kontrolli i MVP-së së RideShare</a:t>
             </a:r>
           </a:p>
         </p:txBody>
@@ -3500,7 +3500,7 @@
           <p:cNvPr id="5" name="">
             <a:extLst xmlns:a="http://schemas.openxmlformats.org/drawingml/2006/main">
               <a:ext uri="{FF2B5EF4-FFF2-40B4-BE49-F238E27FC236}">
-                <a16:creationId xmlns:a16="http://schemas.microsoft.com/office/drawing/2014/main" id="{53F60BC4-F036-43B1-94A7-C5602B7B2F17}"/>
+                <a16:creationId xmlns:a16="http://schemas.microsoft.com/office/drawing/2014/main" id="{6C12C3EA-F2AF-42FF-94D0-7F7B797469BF}"/>
               </a:ext>
             </a:extLst>
           </p:cNvPr>
@@ -3510,7 +3510,7 @@
           <p:nvPr/>
         </p:nvPicPr>
         <p:blipFill>
-          <a:blip xmlns:r="http://schemas.openxmlformats.org/officeDocument/2006/relationships" xmlns:a="http://schemas.openxmlformats.org/drawingml/2006/main" r:embed="R7d17743fd1ea4380"/>
+          <a:blip xmlns:r="http://schemas.openxmlformats.org/officeDocument/2006/relationships" xmlns:a="http://schemas.openxmlformats.org/drawingml/2006/main" r:embed="R83b885e017b54235"/>
           <a:stretch xmlns:a="http://schemas.openxmlformats.org/drawingml/2006/main"/>
         </p:blipFill>
         <p:spPr>
@@ -3528,7 +3528,7 @@
           <p:cNvPr id="6" name="">
             <a:extLst xmlns:a="http://schemas.openxmlformats.org/drawingml/2006/main">
               <a:ext uri="{FF2B5EF4-FFF2-40B4-BE49-F238E27FC236}">
-                <a16:creationId xmlns:a16="http://schemas.microsoft.com/office/drawing/2014/main" id="{37B565E9-8751-442C-93B2-0C3954AE20DB}"/>
+                <a16:creationId xmlns:a16="http://schemas.microsoft.com/office/drawing/2014/main" id="{772E12DC-AB08-4C04-B5F1-74F229B833B5}"/>
               </a:ext>
             </a:extLst>
           </p:cNvPr>
@@ -3540,7 +3540,7 @@
         <p:spPr>
           <a:xfrm xmlns:a="http://schemas.openxmlformats.org/drawingml/2006/main">
             <a:off x="609600" y="2667000"/>
-            <a:ext cx="5295900" cy="495300"/>
+            <a:ext cx="3409950" cy="495300"/>
           </a:xfrm>
           <a:prstGeom xmlns:a="http://schemas.openxmlformats.org/drawingml/2006/main" prst="rect">
             <a:avLst/>
@@ -3676,7 +3676,7 @@
                 <a:ea typeface="Arial"/>
                 <a:cs typeface="Arial"/>
               </a:rPr>
-              <a:t>Dritoni</a:t>
+              <a:t>Tema e sotme</a:t>
             </a:r>
           </a:p>
         </p:txBody>
@@ -3686,7 +3686,7 @@
           <p:cNvPr id="7" name="">
             <a:extLst xmlns:a="http://schemas.openxmlformats.org/drawingml/2006/main">
               <a:ext uri="{FF2B5EF4-FFF2-40B4-BE49-F238E27FC236}">
-                <a16:creationId xmlns:a16="http://schemas.microsoft.com/office/drawing/2014/main" id="{55A184BC-1498-4691-8011-8F38A0B64DF5}"/>
+                <a16:creationId xmlns:a16="http://schemas.microsoft.com/office/drawing/2014/main" id="{C6B76879-42F3-42A4-B2CE-79654841C91E}"/>
               </a:ext>
             </a:extLst>
           </p:cNvPr>
@@ -3698,7 +3698,7 @@
         <p:spPr>
           <a:xfrm xmlns:a="http://schemas.openxmlformats.org/drawingml/2006/main">
             <a:off x="609600" y="3219450"/>
-            <a:ext cx="5295900" cy="571500"/>
+            <a:ext cx="3409950" cy="571500"/>
           </a:xfrm>
           <a:prstGeom xmlns:a="http://schemas.openxmlformats.org/drawingml/2006/main" prst="rect">
             <a:avLst/>
@@ -3834,7 +3834,7 @@
                 <a:ea typeface="Arial"/>
                 <a:cs typeface="Arial"/>
               </a:rPr>
-              <a:t>Shoferi dhe pronari i udhëtimit</a:t>
+              <a:t>Ekranet, të dhënat dhe lejet</a:t>
             </a:r>
           </a:p>
         </p:txBody>
@@ -3844,7 +3844,7 @@
           <p:cNvPr id="8" name="">
             <a:extLst xmlns:a="http://schemas.openxmlformats.org/drawingml/2006/main">
               <a:ext uri="{FF2B5EF4-FFF2-40B4-BE49-F238E27FC236}">
-                <a16:creationId xmlns:a16="http://schemas.microsoft.com/office/drawing/2014/main" id="{6A93CD08-DB19-4521-A699-B7435DB7BC7F}"/>
+                <a16:creationId xmlns:a16="http://schemas.microsoft.com/office/drawing/2014/main" id="{8ECD087C-4FD0-42D3-A2A1-6C63997972A9}"/>
               </a:ext>
             </a:extLst>
           </p:cNvPr>
@@ -3854,12 +3854,12 @@
           <p:nvPr/>
         </p:nvPicPr>
         <p:blipFill>
-          <a:blip xmlns:r="http://schemas.openxmlformats.org/officeDocument/2006/relationships" xmlns:a="http://schemas.openxmlformats.org/drawingml/2006/main" r:embed="R249921616e9c4f07"/>
+          <a:blip xmlns:r="http://schemas.openxmlformats.org/officeDocument/2006/relationships" xmlns:a="http://schemas.openxmlformats.org/drawingml/2006/main" r:embed="R8bb8bf5600394c40"/>
           <a:stretch xmlns:a="http://schemas.openxmlformats.org/drawingml/2006/main"/>
         </p:blipFill>
         <p:spPr>
           <a:xfrm xmlns:a="http://schemas.openxmlformats.org/drawingml/2006/main">
-            <a:off x="6267450" y="1952625"/>
+            <a:off x="4381500" y="1952625"/>
             <a:ext cx="571500" cy="571500"/>
           </a:xfrm>
           <a:prstGeom xmlns:a="http://schemas.openxmlformats.org/drawingml/2006/main" prst="rect">
@@ -3872,7 +3872,7 @@
           <p:cNvPr id="9" name="">
             <a:extLst xmlns:a="http://schemas.openxmlformats.org/drawingml/2006/main">
               <a:ext uri="{FF2B5EF4-FFF2-40B4-BE49-F238E27FC236}">
-                <a16:creationId xmlns:a16="http://schemas.microsoft.com/office/drawing/2014/main" id="{32A5297E-3970-44D6-829A-6E5FAB5E1C4C}"/>
+                <a16:creationId xmlns:a16="http://schemas.microsoft.com/office/drawing/2014/main" id="{015E85DE-0997-41A9-B869-C2C1AD1DB91F}"/>
               </a:ext>
             </a:extLst>
           </p:cNvPr>
@@ -3883,8 +3883,8 @@
         </p:nvSpPr>
         <p:spPr>
           <a:xfrm xmlns:a="http://schemas.openxmlformats.org/drawingml/2006/main">
-            <a:off x="6267450" y="2667000"/>
-            <a:ext cx="5295900" cy="495300"/>
+            <a:off x="4381500" y="2667000"/>
+            <a:ext cx="3409950" cy="495300"/>
           </a:xfrm>
           <a:prstGeom xmlns:a="http://schemas.openxmlformats.org/drawingml/2006/main" prst="rect">
             <a:avLst/>
@@ -4020,7 +4020,7 @@
                 <a:ea typeface="Arial"/>
                 <a:cs typeface="Arial"/>
               </a:rPr>
-              <a:t>Arta</a:t>
+              <a:t>Si do ta zbërthejmë</a:t>
             </a:r>
           </a:p>
         </p:txBody>
@@ -4030,7 +4030,7 @@
           <p:cNvPr id="10" name="">
             <a:extLst xmlns:a="http://schemas.openxmlformats.org/drawingml/2006/main">
               <a:ext uri="{FF2B5EF4-FFF2-40B4-BE49-F238E27FC236}">
-                <a16:creationId xmlns:a16="http://schemas.microsoft.com/office/drawing/2014/main" id="{E594C630-C950-4FB7-8714-ADFDEC3D6F25}"/>
+                <a16:creationId xmlns:a16="http://schemas.microsoft.com/office/drawing/2014/main" id="{31F781DE-AECD-4977-94A8-AD8047CDCF92}"/>
               </a:ext>
             </a:extLst>
           </p:cNvPr>
@@ -4041,8 +4041,8 @@
         </p:nvSpPr>
         <p:spPr>
           <a:xfrm xmlns:a="http://schemas.openxmlformats.org/drawingml/2006/main">
-            <a:off x="6267450" y="3219450"/>
-            <a:ext cx="5295900" cy="571500"/>
+            <a:off x="4381500" y="3219450"/>
+            <a:ext cx="3409950" cy="571500"/>
           </a:xfrm>
           <a:prstGeom xmlns:a="http://schemas.openxmlformats.org/drawingml/2006/main" prst="rect">
             <a:avLst/>
@@ -4178,17 +4178,361 @@
                 <a:ea typeface="Arial"/>
                 <a:cs typeface="Arial"/>
               </a:rPr>
-              <a:t>Udhëtarja që kërkon vend</a:t>
+              <a:t>Demonstrim, votime dhe prova</a:t>
+            </a:r>
+          </a:p>
+        </p:txBody>
+      </p:sp>
+      <p:pic>
+        <p:nvPicPr>
+          <p:cNvPr id="11" name="">
+            <a:extLst xmlns:a="http://schemas.openxmlformats.org/drawingml/2006/main">
+              <a:ext uri="{FF2B5EF4-FFF2-40B4-BE49-F238E27FC236}">
+                <a16:creationId xmlns:a16="http://schemas.microsoft.com/office/drawing/2014/main" id="{90EED3A6-4644-4F9B-BB2B-0B6E97E1E204}"/>
+              </a:ext>
+            </a:extLst>
+          </p:cNvPr>
+          <p:cNvPicPr>
+            <a:picLocks xmlns:a="http://schemas.openxmlformats.org/drawingml/2006/main" noChangeAspect="1"/>
+          </p:cNvPicPr>
+          <p:nvPr/>
+        </p:nvPicPr>
+        <p:blipFill>
+          <a:blip xmlns:r="http://schemas.openxmlformats.org/officeDocument/2006/relationships" xmlns:a="http://schemas.openxmlformats.org/drawingml/2006/main" r:embed="Rf567afa41db943fb"/>
+          <a:stretch xmlns:a="http://schemas.openxmlformats.org/drawingml/2006/main"/>
+        </p:blipFill>
+        <p:spPr>
+          <a:xfrm xmlns:a="http://schemas.openxmlformats.org/drawingml/2006/main">
+            <a:off x="8153400" y="1952625"/>
+            <a:ext cx="571500" cy="571500"/>
+          </a:xfrm>
+          <a:prstGeom xmlns:a="http://schemas.openxmlformats.org/drawingml/2006/main" prst="rect">
+            <a:avLst/>
+          </a:prstGeom>
+        </p:spPr>
+      </p:pic>
+      <p:sp>
+        <p:nvSpPr>
+          <p:cNvPr id="12" name="">
+            <a:extLst xmlns:a="http://schemas.openxmlformats.org/drawingml/2006/main">
+              <a:ext uri="{FF2B5EF4-FFF2-40B4-BE49-F238E27FC236}">
+                <a16:creationId xmlns:a16="http://schemas.microsoft.com/office/drawing/2014/main" id="{E6C765A6-D1C3-4D7D-BB4B-6ADB8FE8A69F}"/>
+              </a:ext>
+            </a:extLst>
+          </p:cNvPr>
+          <p:cNvSpPr>
+            <a:spLocks xmlns:a="http://schemas.openxmlformats.org/drawingml/2006/main" noGrp="1"/>
+          </p:cNvSpPr>
+          <p:nvPr/>
+        </p:nvSpPr>
+        <p:spPr>
+          <a:xfrm xmlns:a="http://schemas.openxmlformats.org/drawingml/2006/main">
+            <a:off x="8153400" y="2667000"/>
+            <a:ext cx="3409950" cy="495300"/>
+          </a:xfrm>
+          <a:prstGeom xmlns:a="http://schemas.openxmlformats.org/drawingml/2006/main" prst="rect">
+            <a:avLst/>
+          </a:prstGeom>
+          <a:noFill xmlns:a="http://schemas.openxmlformats.org/drawingml/2006/main"/>
+          <a:ln xmlns:a="http://schemas.openxmlformats.org/drawingml/2006/main" w="0">
+            <a:noFill/>
+          </a:ln>
+        </p:spPr>
+        <p:txBody>
+          <a:bodyPr xmlns:a="http://schemas.openxmlformats.org/drawingml/2006/main">
+            <a:noAutofit/>
+          </a:bodyPr>
+          <a:lstStyle xmlns:a="http://schemas.openxmlformats.org/drawingml/2006/main">
+            <a:defPPr>
+              <a:defRPr sz="2025" b="1">
+                <a:solidFill>
+                  <a:srgbClr val="FFFFFF"/>
+                </a:solidFill>
+                <a:latin typeface="Arial"/>
+                <a:ea typeface="Arial"/>
+                <a:cs typeface="Arial"/>
+              </a:defRPr>
+            </a:defPPr>
+            <a:lvl1pPr>
+              <a:defRPr sz="2025" b="1">
+                <a:solidFill>
+                  <a:srgbClr val="FFFFFF"/>
+                </a:solidFill>
+                <a:latin typeface="Arial"/>
+                <a:ea typeface="Arial"/>
+                <a:cs typeface="Arial"/>
+              </a:defRPr>
+            </a:lvl1pPr>
+            <a:lvl2pPr>
+              <a:defRPr sz="2025" b="1">
+                <a:solidFill>
+                  <a:srgbClr val="FFFFFF"/>
+                </a:solidFill>
+                <a:latin typeface="Arial"/>
+                <a:ea typeface="Arial"/>
+                <a:cs typeface="Arial"/>
+              </a:defRPr>
+            </a:lvl2pPr>
+            <a:lvl3pPr>
+              <a:defRPr sz="2025" b="1">
+                <a:solidFill>
+                  <a:srgbClr val="FFFFFF"/>
+                </a:solidFill>
+                <a:latin typeface="Arial"/>
+                <a:ea typeface="Arial"/>
+                <a:cs typeface="Arial"/>
+              </a:defRPr>
+            </a:lvl3pPr>
+            <a:lvl4pPr>
+              <a:defRPr sz="2025" b="1">
+                <a:solidFill>
+                  <a:srgbClr val="FFFFFF"/>
+                </a:solidFill>
+                <a:latin typeface="Arial"/>
+                <a:ea typeface="Arial"/>
+                <a:cs typeface="Arial"/>
+              </a:defRPr>
+            </a:lvl4pPr>
+            <a:lvl5pPr>
+              <a:defRPr sz="2025" b="1">
+                <a:solidFill>
+                  <a:srgbClr val="FFFFFF"/>
+                </a:solidFill>
+                <a:latin typeface="Arial"/>
+                <a:ea typeface="Arial"/>
+                <a:cs typeface="Arial"/>
+              </a:defRPr>
+            </a:lvl5pPr>
+            <a:lvl6pPr>
+              <a:defRPr sz="2025" b="1">
+                <a:solidFill>
+                  <a:srgbClr val="FFFFFF"/>
+                </a:solidFill>
+                <a:latin typeface="Arial"/>
+                <a:ea typeface="Arial"/>
+                <a:cs typeface="Arial"/>
+              </a:defRPr>
+            </a:lvl6pPr>
+            <a:lvl7pPr>
+              <a:defRPr sz="2025" b="1">
+                <a:solidFill>
+                  <a:srgbClr val="FFFFFF"/>
+                </a:solidFill>
+                <a:latin typeface="Arial"/>
+                <a:ea typeface="Arial"/>
+                <a:cs typeface="Arial"/>
+              </a:defRPr>
+            </a:lvl7pPr>
+            <a:lvl8pPr>
+              <a:defRPr sz="2025" b="1">
+                <a:solidFill>
+                  <a:srgbClr val="FFFFFF"/>
+                </a:solidFill>
+                <a:latin typeface="Arial"/>
+                <a:ea typeface="Arial"/>
+                <a:cs typeface="Arial"/>
+              </a:defRPr>
+            </a:lvl8pPr>
+            <a:lvl9pPr>
+              <a:defRPr sz="2025" b="1">
+                <a:solidFill>
+                  <a:srgbClr val="FFFFFF"/>
+                </a:solidFill>
+                <a:latin typeface="Arial"/>
+                <a:ea typeface="Arial"/>
+                <a:cs typeface="Arial"/>
+              </a:defRPr>
+            </a:lvl9pPr>
+          </a:lstStyle>
+          <a:p xmlns:a="http://schemas.openxmlformats.org/drawingml/2006/main">
+            <a:pPr>
+              <a:defRPr sz="2025" b="1">
+                <a:solidFill>
+                  <a:srgbClr val="FFFFFF"/>
+                </a:solidFill>
+                <a:latin typeface="Arial"/>
+                <a:ea typeface="Arial"/>
+                <a:cs typeface="Arial"/>
+              </a:defRPr>
+            </a:pPr>
+            <a:r>
+              <a:rPr sz="2025" b="1">
+                <a:solidFill>
+                  <a:srgbClr val="FFFFFF"/>
+                </a:solidFill>
+                <a:latin typeface="Arial"/>
+                <a:ea typeface="Arial"/>
+                <a:cs typeface="Arial"/>
+              </a:rPr>
+              <a:t>Në fund do të mundesh</a:t>
             </a:r>
           </a:p>
         </p:txBody>
       </p:sp>
       <p:sp>
         <p:nvSpPr>
-          <p:cNvPr id="11" name="">
+          <p:cNvPr id="13" name="">
             <a:extLst xmlns:a="http://schemas.openxmlformats.org/drawingml/2006/main">
               <a:ext uri="{FF2B5EF4-FFF2-40B4-BE49-F238E27FC236}">
-                <a16:creationId xmlns:a16="http://schemas.microsoft.com/office/drawing/2014/main" id="{BB92DCF5-4E9E-4E58-B8BB-445D837C3B96}"/>
+                <a16:creationId xmlns:a16="http://schemas.microsoft.com/office/drawing/2014/main" id="{7B934DF7-C621-49E6-A6B9-6FF8E02A8371}"/>
+              </a:ext>
+            </a:extLst>
+          </p:cNvPr>
+          <p:cNvSpPr>
+            <a:spLocks xmlns:a="http://schemas.openxmlformats.org/drawingml/2006/main" noGrp="1"/>
+          </p:cNvSpPr>
+          <p:nvPr/>
+        </p:nvSpPr>
+        <p:spPr>
+          <a:xfrm xmlns:a="http://schemas.openxmlformats.org/drawingml/2006/main">
+            <a:off x="8153400" y="3219450"/>
+            <a:ext cx="3409950" cy="571500"/>
+          </a:xfrm>
+          <a:prstGeom xmlns:a="http://schemas.openxmlformats.org/drawingml/2006/main" prst="rect">
+            <a:avLst/>
+          </a:prstGeom>
+          <a:noFill xmlns:a="http://schemas.openxmlformats.org/drawingml/2006/main"/>
+          <a:ln xmlns:a="http://schemas.openxmlformats.org/drawingml/2006/main" w="0">
+            <a:noFill/>
+          </a:ln>
+        </p:spPr>
+        <p:txBody>
+          <a:bodyPr xmlns:a="http://schemas.openxmlformats.org/drawingml/2006/main">
+            <a:noAutofit/>
+          </a:bodyPr>
+          <a:lstStyle xmlns:a="http://schemas.openxmlformats.org/drawingml/2006/main">
+            <a:defPPr>
+              <a:defRPr sz="1650" b="0">
+                <a:solidFill>
+                  <a:srgbClr val="C8D3E6"/>
+                </a:solidFill>
+                <a:latin typeface="Arial"/>
+                <a:ea typeface="Arial"/>
+                <a:cs typeface="Arial"/>
+              </a:defRPr>
+            </a:defPPr>
+            <a:lvl1pPr>
+              <a:defRPr sz="1650" b="0">
+                <a:solidFill>
+                  <a:srgbClr val="C8D3E6"/>
+                </a:solidFill>
+                <a:latin typeface="Arial"/>
+                <a:ea typeface="Arial"/>
+                <a:cs typeface="Arial"/>
+              </a:defRPr>
+            </a:lvl1pPr>
+            <a:lvl2pPr>
+              <a:defRPr sz="1650" b="0">
+                <a:solidFill>
+                  <a:srgbClr val="C8D3E6"/>
+                </a:solidFill>
+                <a:latin typeface="Arial"/>
+                <a:ea typeface="Arial"/>
+                <a:cs typeface="Arial"/>
+              </a:defRPr>
+            </a:lvl2pPr>
+            <a:lvl3pPr>
+              <a:defRPr sz="1650" b="0">
+                <a:solidFill>
+                  <a:srgbClr val="C8D3E6"/>
+                </a:solidFill>
+                <a:latin typeface="Arial"/>
+                <a:ea typeface="Arial"/>
+                <a:cs typeface="Arial"/>
+              </a:defRPr>
+            </a:lvl3pPr>
+            <a:lvl4pPr>
+              <a:defRPr sz="1650" b="0">
+                <a:solidFill>
+                  <a:srgbClr val="C8D3E6"/>
+                </a:solidFill>
+                <a:latin typeface="Arial"/>
+                <a:ea typeface="Arial"/>
+                <a:cs typeface="Arial"/>
+              </a:defRPr>
+            </a:lvl4pPr>
+            <a:lvl5pPr>
+              <a:defRPr sz="1650" b="0">
+                <a:solidFill>
+                  <a:srgbClr val="C8D3E6"/>
+                </a:solidFill>
+                <a:latin typeface="Arial"/>
+                <a:ea typeface="Arial"/>
+                <a:cs typeface="Arial"/>
+              </a:defRPr>
+            </a:lvl5pPr>
+            <a:lvl6pPr>
+              <a:defRPr sz="1650" b="0">
+                <a:solidFill>
+                  <a:srgbClr val="C8D3E6"/>
+                </a:solidFill>
+                <a:latin typeface="Arial"/>
+                <a:ea typeface="Arial"/>
+                <a:cs typeface="Arial"/>
+              </a:defRPr>
+            </a:lvl6pPr>
+            <a:lvl7pPr>
+              <a:defRPr sz="1650" b="0">
+                <a:solidFill>
+                  <a:srgbClr val="C8D3E6"/>
+                </a:solidFill>
+                <a:latin typeface="Arial"/>
+                <a:ea typeface="Arial"/>
+                <a:cs typeface="Arial"/>
+              </a:defRPr>
+            </a:lvl7pPr>
+            <a:lvl8pPr>
+              <a:defRPr sz="1650" b="0">
+                <a:solidFill>
+                  <a:srgbClr val="C8D3E6"/>
+                </a:solidFill>
+                <a:latin typeface="Arial"/>
+                <a:ea typeface="Arial"/>
+                <a:cs typeface="Arial"/>
+              </a:defRPr>
+            </a:lvl8pPr>
+            <a:lvl9pPr>
+              <a:defRPr sz="1650" b="0">
+                <a:solidFill>
+                  <a:srgbClr val="C8D3E6"/>
+                </a:solidFill>
+                <a:latin typeface="Arial"/>
+                <a:ea typeface="Arial"/>
+                <a:cs typeface="Arial"/>
+              </a:defRPr>
+            </a:lvl9pPr>
+          </a:lstStyle>
+          <a:p xmlns:a="http://schemas.openxmlformats.org/drawingml/2006/main">
+            <a:pPr>
+              <a:defRPr sz="1650" b="0">
+                <a:solidFill>
+                  <a:srgbClr val="C8D3E6"/>
+                </a:solidFill>
+                <a:latin typeface="Arial"/>
+                <a:ea typeface="Arial"/>
+                <a:cs typeface="Arial"/>
+              </a:defRPr>
+            </a:pPr>
+            <a:r>
+              <a:rPr sz="1650" b="0">
+                <a:solidFill>
+                  <a:srgbClr val="C8D3E6"/>
+                </a:solidFill>
+                <a:latin typeface="Arial"/>
+                <a:ea typeface="Arial"/>
+                <a:cs typeface="Arial"/>
+              </a:rPr>
+              <a:t>Të shpjegosh e të provosh një korrigjim</a:t>
+            </a:r>
+          </a:p>
+        </p:txBody>
+      </p:sp>
+      <p:sp>
+        <p:nvSpPr>
+          <p:cNvPr id="14" name="">
+            <a:extLst xmlns:a="http://schemas.openxmlformats.org/drawingml/2006/main">
+              <a:ext uri="{FF2B5EF4-FFF2-40B4-BE49-F238E27FC236}">
+                <a16:creationId xmlns:a16="http://schemas.microsoft.com/office/drawing/2014/main" id="{0646C069-DC53-4EF3-A84B-7BBB980A3429}"/>
               </a:ext>
             </a:extLst>
           </p:cNvPr>
@@ -4336,7 +4680,7 @@
                 <a:ea typeface="Arial"/>
                 <a:cs typeface="Arial"/>
               </a:rPr>
-              <a:t>Dritoni ofron 2 vende në veturë drejt AAB-së. Arta hap RideShare për të kërkuar njërin.</a:t>
+              <a:t>MVP (Minimum Viable Product) do të thotë produkti minimal i përdorshëm.</a:t>
             </a:r>
           </a:p>
           <a:p xmlns:a="http://schemas.openxmlformats.org/drawingml/2006/main">
@@ -4364,7 +4708,7 @@
                 <a:ea typeface="Arial"/>
                 <a:cs typeface="Arial"/>
               </a:rPr>
-              <a:t>Sot luajmë rolin e përdoruesit dhe provojmë produktin që kemi ndërtuar.</a:t>
+              <a:t>Në fund do të shpjegosh rrjedhën e aplikacionit, të dallosh një problem dhe të provosh korrigjimin.</a:t>
             </a:r>
           </a:p>
         </p:txBody>
@@ -4372,7 +4716,7 @@
     </p:spTree>
     <p:extLst>
       <p:ext uri="{BB962C8B-B14F-4D97-AF65-F5344CB8AC3E}">
-        <p14:creationId xmlns:p14="http://schemas.microsoft.com/office/powerpoint/2010/main" val="2058590411"/>
+        <p14:creationId xmlns:p14="http://schemas.microsoft.com/office/powerpoint/2010/main" val="1750868273"/>
       </p:ext>
     </p:extLst>
   </p:cSld>
@@ -4403,7 +4747,7 @@
           <p:cNvPr id="14" name="">
             <a:extLst xmlns:a="http://schemas.openxmlformats.org/drawingml/2006/main">
               <a:ext uri="{FF2B5EF4-FFF2-40B4-BE49-F238E27FC236}">
-                <a16:creationId xmlns:a16="http://schemas.microsoft.com/office/drawing/2014/main" id="{BB61E350-5DD1-4BB5-B966-8169A8BC60AE}"/>
+                <a16:creationId xmlns:a16="http://schemas.microsoft.com/office/drawing/2014/main" id="{3FF1ACFE-E853-4C21-AB5C-1CE7825CF5A7}"/>
               </a:ext>
             </a:extLst>
           </p:cNvPr>
@@ -4561,7 +4905,7 @@
           <p:cNvPr id="2" name="">
             <a:extLst xmlns:a="http://schemas.openxmlformats.org/drawingml/2006/main">
               <a:ext uri="{FF2B5EF4-FFF2-40B4-BE49-F238E27FC236}">
-                <a16:creationId xmlns:a16="http://schemas.microsoft.com/office/drawing/2014/main" id="{F68C6B2A-437A-4AB6-AA57-E4533C13091F}"/>
+                <a16:creationId xmlns:a16="http://schemas.microsoft.com/office/drawing/2014/main" id="{D30E70B0-9A44-4371-B3AE-BDE1D83A2BDB}"/>
               </a:ext>
             </a:extLst>
           </p:cNvPr>
@@ -4719,7 +5063,7 @@
           <p:cNvPr id="3" name="">
             <a:extLst xmlns:a="http://schemas.openxmlformats.org/drawingml/2006/main">
               <a:ext uri="{FF2B5EF4-FFF2-40B4-BE49-F238E27FC236}">
-                <a16:creationId xmlns:a16="http://schemas.microsoft.com/office/drawing/2014/main" id="{4A2C534C-F209-44FF-B6EB-EE781C0BDA48}"/>
+                <a16:creationId xmlns:a16="http://schemas.microsoft.com/office/drawing/2014/main" id="{5A09D370-068E-430E-B9FF-040990C23D3C}"/>
               </a:ext>
             </a:extLst>
           </p:cNvPr>
@@ -4877,7 +5221,7 @@
           <p:cNvPr id="4" name="">
             <a:extLst xmlns:a="http://schemas.openxmlformats.org/drawingml/2006/main">
               <a:ext uri="{FF2B5EF4-FFF2-40B4-BE49-F238E27FC236}">
-                <a16:creationId xmlns:a16="http://schemas.microsoft.com/office/drawing/2014/main" id="{E50CA957-4A09-402F-BF3A-C694C97CFD8D}"/>
+                <a16:creationId xmlns:a16="http://schemas.microsoft.com/office/drawing/2014/main" id="{2CC5647F-A998-4FDA-9385-E6E53CE6310D}"/>
               </a:ext>
             </a:extLst>
           </p:cNvPr>
@@ -4887,7 +5231,7 @@
           <p:nvPr/>
         </p:nvPicPr>
         <p:blipFill>
-          <a:blip xmlns:r="http://schemas.openxmlformats.org/officeDocument/2006/relationships" xmlns:a="http://schemas.openxmlformats.org/drawingml/2006/main" r:embed="R5bd72ec2fe5a4f0e"/>
+          <a:blip xmlns:r="http://schemas.openxmlformats.org/officeDocument/2006/relationships" xmlns:a="http://schemas.openxmlformats.org/drawingml/2006/main" r:embed="Rdac3d0151e4a44d8"/>
           <a:stretch xmlns:a="http://schemas.openxmlformats.org/drawingml/2006/main"/>
         </p:blipFill>
         <p:spPr>
@@ -4905,7 +5249,7 @@
           <p:cNvPr id="5" name="">
             <a:extLst xmlns:a="http://schemas.openxmlformats.org/drawingml/2006/main">
               <a:ext uri="{FF2B5EF4-FFF2-40B4-BE49-F238E27FC236}">
-                <a16:creationId xmlns:a16="http://schemas.microsoft.com/office/drawing/2014/main" id="{A1A64D7F-BAE3-49F8-9E72-C7B84939D24F}"/>
+                <a16:creationId xmlns:a16="http://schemas.microsoft.com/office/drawing/2014/main" id="{33454821-EDFE-4C8E-BD0B-69966178AEA5}"/>
               </a:ext>
             </a:extLst>
           </p:cNvPr>
@@ -5063,7 +5407,7 @@
           <p:cNvPr id="6" name="">
             <a:extLst xmlns:a="http://schemas.openxmlformats.org/drawingml/2006/main">
               <a:ext uri="{FF2B5EF4-FFF2-40B4-BE49-F238E27FC236}">
-                <a16:creationId xmlns:a16="http://schemas.microsoft.com/office/drawing/2014/main" id="{6D45D747-6E34-46DB-A51F-121AECF846BC}"/>
+                <a16:creationId xmlns:a16="http://schemas.microsoft.com/office/drawing/2014/main" id="{1DF7A7D0-A9E2-4146-8E4B-53085F35A6A4}"/>
               </a:ext>
             </a:extLst>
           </p:cNvPr>
@@ -5221,7 +5565,7 @@
           <p:cNvPr id="7" name="">
             <a:extLst xmlns:a="http://schemas.openxmlformats.org/drawingml/2006/main">
               <a:ext uri="{FF2B5EF4-FFF2-40B4-BE49-F238E27FC236}">
-                <a16:creationId xmlns:a16="http://schemas.microsoft.com/office/drawing/2014/main" id="{8E7162A1-0C07-40E0-B1BD-10423D57628C}"/>
+                <a16:creationId xmlns:a16="http://schemas.microsoft.com/office/drawing/2014/main" id="{C5193A2F-8707-4EBD-9513-6F495B51F11C}"/>
               </a:ext>
             </a:extLst>
           </p:cNvPr>
@@ -5231,7 +5575,7 @@
           <p:nvPr/>
         </p:nvPicPr>
         <p:blipFill>
-          <a:blip xmlns:r="http://schemas.openxmlformats.org/officeDocument/2006/relationships" xmlns:a="http://schemas.openxmlformats.org/drawingml/2006/main" r:embed="Rf2dc154f7da14362"/>
+          <a:blip xmlns:r="http://schemas.openxmlformats.org/officeDocument/2006/relationships" xmlns:a="http://schemas.openxmlformats.org/drawingml/2006/main" r:embed="R4d21bca71db84785"/>
           <a:stretch xmlns:a="http://schemas.openxmlformats.org/drawingml/2006/main"/>
         </p:blipFill>
         <p:spPr>
@@ -5249,7 +5593,7 @@
           <p:cNvPr id="8" name="">
             <a:extLst xmlns:a="http://schemas.openxmlformats.org/drawingml/2006/main">
               <a:ext uri="{FF2B5EF4-FFF2-40B4-BE49-F238E27FC236}">
-                <a16:creationId xmlns:a16="http://schemas.microsoft.com/office/drawing/2014/main" id="{56D61B21-B80F-483C-8D9F-D558D25EC35E}"/>
+                <a16:creationId xmlns:a16="http://schemas.microsoft.com/office/drawing/2014/main" id="{222A4C1B-6825-4DE7-9D7C-DC57F23D4CB4}"/>
               </a:ext>
             </a:extLst>
           </p:cNvPr>
@@ -5407,7 +5751,7 @@
           <p:cNvPr id="9" name="">
             <a:extLst xmlns:a="http://schemas.openxmlformats.org/drawingml/2006/main">
               <a:ext uri="{FF2B5EF4-FFF2-40B4-BE49-F238E27FC236}">
-                <a16:creationId xmlns:a16="http://schemas.microsoft.com/office/drawing/2014/main" id="{E74738F7-DEAF-4C24-BCD9-0B9A00DB5DF7}"/>
+                <a16:creationId xmlns:a16="http://schemas.microsoft.com/office/drawing/2014/main" id="{3E7A66F8-5362-4303-8C9D-7295058B96A4}"/>
               </a:ext>
             </a:extLst>
           </p:cNvPr>
@@ -5565,7 +5909,7 @@
           <p:cNvPr id="10" name="">
             <a:extLst xmlns:a="http://schemas.openxmlformats.org/drawingml/2006/main">
               <a:ext uri="{FF2B5EF4-FFF2-40B4-BE49-F238E27FC236}">
-                <a16:creationId xmlns:a16="http://schemas.microsoft.com/office/drawing/2014/main" id="{239FEF52-E870-4625-BBED-D56E9A9C148F}"/>
+                <a16:creationId xmlns:a16="http://schemas.microsoft.com/office/drawing/2014/main" id="{E88A4C2E-AB0D-45BD-A636-A296F3EE7B45}"/>
               </a:ext>
             </a:extLst>
           </p:cNvPr>
@@ -5723,7 +6067,7 @@
           <p:cNvPr id="11" name="">
             <a:extLst xmlns:a="http://schemas.openxmlformats.org/drawingml/2006/main">
               <a:ext uri="{FF2B5EF4-FFF2-40B4-BE49-F238E27FC236}">
-                <a16:creationId xmlns:a16="http://schemas.microsoft.com/office/drawing/2014/main" id="{8B93499F-8D5B-4AFA-8D3A-21E9872AA831}"/>
+                <a16:creationId xmlns:a16="http://schemas.microsoft.com/office/drawing/2014/main" id="{01F2E7EC-2CF9-4065-8C88-7406F920A7FE}"/>
               </a:ext>
             </a:extLst>
           </p:cNvPr>
@@ -5881,7 +6225,7 @@
           <p:cNvPr id="12" name="">
             <a:extLst xmlns:a="http://schemas.openxmlformats.org/drawingml/2006/main">
               <a:ext uri="{FF2B5EF4-FFF2-40B4-BE49-F238E27FC236}">
-                <a16:creationId xmlns:a16="http://schemas.microsoft.com/office/drawing/2014/main" id="{4856AC6E-A51A-4B93-91AF-9F52BDAAB806}"/>
+                <a16:creationId xmlns:a16="http://schemas.microsoft.com/office/drawing/2014/main" id="{8458DF67-8B9A-47DF-B001-E8477CD8D96A}"/>
               </a:ext>
             </a:extLst>
           </p:cNvPr>
@@ -6085,7 +6429,7 @@
           <p:cNvPr id="13" name="">
             <a:extLst xmlns:a="http://schemas.openxmlformats.org/drawingml/2006/main">
               <a:ext uri="{FF2B5EF4-FFF2-40B4-BE49-F238E27FC236}">
-                <a16:creationId xmlns:a16="http://schemas.microsoft.com/office/drawing/2014/main" id="{AE65A8AE-3FA7-4493-81B8-3E82352C9E82}"/>
+                <a16:creationId xmlns:a16="http://schemas.microsoft.com/office/drawing/2014/main" id="{B185FFAC-F278-41E8-837F-2E5F34AA3892}"/>
               </a:ext>
             </a:extLst>
           </p:cNvPr>
@@ -6241,7 +6585,7 @@
     </p:spTree>
     <p:extLst>
       <p:ext uri="{BB962C8B-B14F-4D97-AF65-F5344CB8AC3E}">
-        <p14:creationId xmlns:p14="http://schemas.microsoft.com/office/powerpoint/2010/main" val="666698916"/>
+        <p14:creationId xmlns:p14="http://schemas.microsoft.com/office/powerpoint/2010/main" val="559790647"/>
       </p:ext>
     </p:extLst>
   </p:cSld>
@@ -6272,7 +6616,7 @@
           <p:cNvPr id="14" name="">
             <a:extLst xmlns:a="http://schemas.openxmlformats.org/drawingml/2006/main">
               <a:ext uri="{FF2B5EF4-FFF2-40B4-BE49-F238E27FC236}">
-                <a16:creationId xmlns:a16="http://schemas.microsoft.com/office/drawing/2014/main" id="{E5671B4C-3E18-4A44-9522-BF789FE2CE1E}"/>
+                <a16:creationId xmlns:a16="http://schemas.microsoft.com/office/drawing/2014/main" id="{181620A3-F1F4-4347-9F30-62C2449F7ADE}"/>
               </a:ext>
             </a:extLst>
           </p:cNvPr>
@@ -6430,7 +6774,7 @@
           <p:cNvPr id="2" name="">
             <a:extLst xmlns:a="http://schemas.openxmlformats.org/drawingml/2006/main">
               <a:ext uri="{FF2B5EF4-FFF2-40B4-BE49-F238E27FC236}">
-                <a16:creationId xmlns:a16="http://schemas.microsoft.com/office/drawing/2014/main" id="{77D5B974-4F6B-4870-82EF-80C941C0861D}"/>
+                <a16:creationId xmlns:a16="http://schemas.microsoft.com/office/drawing/2014/main" id="{DF2ADDE0-2B60-43DF-844B-C6CA77EADB56}"/>
               </a:ext>
             </a:extLst>
           </p:cNvPr>
@@ -6588,7 +6932,7 @@
           <p:cNvPr id="3" name="">
             <a:extLst xmlns:a="http://schemas.openxmlformats.org/drawingml/2006/main">
               <a:ext uri="{FF2B5EF4-FFF2-40B4-BE49-F238E27FC236}">
-                <a16:creationId xmlns:a16="http://schemas.microsoft.com/office/drawing/2014/main" id="{251AF38C-61BC-478C-8D22-B31218A63944}"/>
+                <a16:creationId xmlns:a16="http://schemas.microsoft.com/office/drawing/2014/main" id="{F1898D7A-99E2-4883-9AEC-0413F7C03FB5}"/>
               </a:ext>
             </a:extLst>
           </p:cNvPr>
@@ -6746,7 +7090,7 @@
           <p:cNvPr id="4" name="">
             <a:extLst xmlns:a="http://schemas.openxmlformats.org/drawingml/2006/main">
               <a:ext uri="{FF2B5EF4-FFF2-40B4-BE49-F238E27FC236}">
-                <a16:creationId xmlns:a16="http://schemas.microsoft.com/office/drawing/2014/main" id="{23B28475-99AA-4953-8B63-CB4AD5A919C2}"/>
+                <a16:creationId xmlns:a16="http://schemas.microsoft.com/office/drawing/2014/main" id="{5070A864-2578-4B0D-B462-DEDC8E836BDE}"/>
               </a:ext>
             </a:extLst>
           </p:cNvPr>
@@ -6756,7 +7100,7 @@
           <p:nvPr/>
         </p:nvPicPr>
         <p:blipFill>
-          <a:blip xmlns:r="http://schemas.openxmlformats.org/officeDocument/2006/relationships" xmlns:a="http://schemas.openxmlformats.org/drawingml/2006/main" r:embed="Rf5b6a4520a5d425c"/>
+          <a:blip xmlns:r="http://schemas.openxmlformats.org/officeDocument/2006/relationships" xmlns:a="http://schemas.openxmlformats.org/drawingml/2006/main" r:embed="Rbef2aa66ac064616"/>
           <a:stretch xmlns:a="http://schemas.openxmlformats.org/drawingml/2006/main"/>
         </p:blipFill>
         <p:spPr>
@@ -6774,7 +7118,7 @@
           <p:cNvPr id="5" name="">
             <a:extLst xmlns:a="http://schemas.openxmlformats.org/drawingml/2006/main">
               <a:ext uri="{FF2B5EF4-FFF2-40B4-BE49-F238E27FC236}">
-                <a16:creationId xmlns:a16="http://schemas.microsoft.com/office/drawing/2014/main" id="{4B8CCA39-9D3E-4A07-87D9-9AD1A85B2A71}"/>
+                <a16:creationId xmlns:a16="http://schemas.microsoft.com/office/drawing/2014/main" id="{BD09134F-0BD9-49A4-A648-21B635F68FD9}"/>
               </a:ext>
             </a:extLst>
           </p:cNvPr>
@@ -6932,7 +7276,7 @@
           <p:cNvPr id="6" name="">
             <a:extLst xmlns:a="http://schemas.openxmlformats.org/drawingml/2006/main">
               <a:ext uri="{FF2B5EF4-FFF2-40B4-BE49-F238E27FC236}">
-                <a16:creationId xmlns:a16="http://schemas.microsoft.com/office/drawing/2014/main" id="{AE25FB77-E37A-4972-930D-CCFB2D9C7FD1}"/>
+                <a16:creationId xmlns:a16="http://schemas.microsoft.com/office/drawing/2014/main" id="{10D997DC-E2A3-435D-8C50-2A7681CB8C52}"/>
               </a:ext>
             </a:extLst>
           </p:cNvPr>
@@ -7090,7 +7434,7 @@
           <p:cNvPr id="7" name="">
             <a:extLst xmlns:a="http://schemas.openxmlformats.org/drawingml/2006/main">
               <a:ext uri="{FF2B5EF4-FFF2-40B4-BE49-F238E27FC236}">
-                <a16:creationId xmlns:a16="http://schemas.microsoft.com/office/drawing/2014/main" id="{4E6EBCDD-9281-48BB-9C8A-E1ED76ED417A}"/>
+                <a16:creationId xmlns:a16="http://schemas.microsoft.com/office/drawing/2014/main" id="{3300B78C-18E1-45AE-AA00-B23D6200852F}"/>
               </a:ext>
             </a:extLst>
           </p:cNvPr>
@@ -7100,7 +7444,7 @@
           <p:nvPr/>
         </p:nvPicPr>
         <p:blipFill>
-          <a:blip xmlns:r="http://schemas.openxmlformats.org/officeDocument/2006/relationships" xmlns:a="http://schemas.openxmlformats.org/drawingml/2006/main" r:embed="R8d29232ebb8e4b4b"/>
+          <a:blip xmlns:r="http://schemas.openxmlformats.org/officeDocument/2006/relationships" xmlns:a="http://schemas.openxmlformats.org/drawingml/2006/main" r:embed="R06e03070a8874315"/>
           <a:stretch xmlns:a="http://schemas.openxmlformats.org/drawingml/2006/main"/>
         </p:blipFill>
         <p:spPr>
@@ -7118,7 +7462,7 @@
           <p:cNvPr id="8" name="">
             <a:extLst xmlns:a="http://schemas.openxmlformats.org/drawingml/2006/main">
               <a:ext uri="{FF2B5EF4-FFF2-40B4-BE49-F238E27FC236}">
-                <a16:creationId xmlns:a16="http://schemas.microsoft.com/office/drawing/2014/main" id="{DDCFD9B7-56D0-40E1-9011-ABEBBCFFF92C}"/>
+                <a16:creationId xmlns:a16="http://schemas.microsoft.com/office/drawing/2014/main" id="{1FECC0BB-AC70-49DB-85B3-669C3E02D00F}"/>
               </a:ext>
             </a:extLst>
           </p:cNvPr>
@@ -7276,7 +7620,7 @@
           <p:cNvPr id="9" name="">
             <a:extLst xmlns:a="http://schemas.openxmlformats.org/drawingml/2006/main">
               <a:ext uri="{FF2B5EF4-FFF2-40B4-BE49-F238E27FC236}">
-                <a16:creationId xmlns:a16="http://schemas.microsoft.com/office/drawing/2014/main" id="{D176E789-064D-41E3-9F97-8170F4577ABC}"/>
+                <a16:creationId xmlns:a16="http://schemas.microsoft.com/office/drawing/2014/main" id="{22357D2D-6DE6-4E2C-AFF8-2899568142E4}"/>
               </a:ext>
             </a:extLst>
           </p:cNvPr>
@@ -7434,7 +7778,7 @@
           <p:cNvPr id="10" name="">
             <a:extLst xmlns:a="http://schemas.openxmlformats.org/drawingml/2006/main">
               <a:ext uri="{FF2B5EF4-FFF2-40B4-BE49-F238E27FC236}">
-                <a16:creationId xmlns:a16="http://schemas.microsoft.com/office/drawing/2014/main" id="{0AE635FE-B72C-4993-8A0C-6A4176BE6294}"/>
+                <a16:creationId xmlns:a16="http://schemas.microsoft.com/office/drawing/2014/main" id="{30E5CC10-63D6-4C6C-A7FC-A098625ABF1E}"/>
               </a:ext>
             </a:extLst>
           </p:cNvPr>
@@ -7620,7 +7964,7 @@
           <p:cNvPr id="11" name="">
             <a:extLst xmlns:a="http://schemas.openxmlformats.org/drawingml/2006/main">
               <a:ext uri="{FF2B5EF4-FFF2-40B4-BE49-F238E27FC236}">
-                <a16:creationId xmlns:a16="http://schemas.microsoft.com/office/drawing/2014/main" id="{B32DE860-D73B-4966-A707-5AD9114EBB6B}"/>
+                <a16:creationId xmlns:a16="http://schemas.microsoft.com/office/drawing/2014/main" id="{F59EC297-E148-4783-94DD-1EB7E01D8A9A}"/>
               </a:ext>
             </a:extLst>
           </p:cNvPr>
@@ -7778,7 +8122,7 @@
           <p:cNvPr id="12" name="">
             <a:extLst xmlns:a="http://schemas.openxmlformats.org/drawingml/2006/main">
               <a:ext uri="{FF2B5EF4-FFF2-40B4-BE49-F238E27FC236}">
-                <a16:creationId xmlns:a16="http://schemas.microsoft.com/office/drawing/2014/main" id="{E4A73190-12D6-4ED4-A154-7AC18592E6B0}"/>
+                <a16:creationId xmlns:a16="http://schemas.microsoft.com/office/drawing/2014/main" id="{FFFFEFED-EC9E-40EB-B981-661C44BC370A}"/>
               </a:ext>
             </a:extLst>
           </p:cNvPr>
@@ -7936,7 +8280,7 @@
           <p:cNvPr id="13" name="">
             <a:extLst xmlns:a="http://schemas.openxmlformats.org/drawingml/2006/main">
               <a:ext uri="{FF2B5EF4-FFF2-40B4-BE49-F238E27FC236}">
-                <a16:creationId xmlns:a16="http://schemas.microsoft.com/office/drawing/2014/main" id="{46ADEF17-5A31-4379-9723-BE8ACD86E7D5}"/>
+                <a16:creationId xmlns:a16="http://schemas.microsoft.com/office/drawing/2014/main" id="{89016BD4-8AB0-4CAD-A535-17CD2E4DE80B}"/>
               </a:ext>
             </a:extLst>
           </p:cNvPr>
@@ -8092,7 +8436,7 @@
     </p:spTree>
     <p:extLst>
       <p:ext uri="{BB962C8B-B14F-4D97-AF65-F5344CB8AC3E}">
-        <p14:creationId xmlns:p14="http://schemas.microsoft.com/office/powerpoint/2010/main" val="266479531"/>
+        <p14:creationId xmlns:p14="http://schemas.microsoft.com/office/powerpoint/2010/main" val="283187825"/>
       </p:ext>
     </p:extLst>
   </p:cSld>
@@ -8123,7 +8467,7 @@
           <p:cNvPr id="13" name="">
             <a:extLst xmlns:a="http://schemas.openxmlformats.org/drawingml/2006/main">
               <a:ext uri="{FF2B5EF4-FFF2-40B4-BE49-F238E27FC236}">
-                <a16:creationId xmlns:a16="http://schemas.microsoft.com/office/drawing/2014/main" id="{278345EB-2694-4892-8398-25347DA77CFA}"/>
+                <a16:creationId xmlns:a16="http://schemas.microsoft.com/office/drawing/2014/main" id="{F9DFB8CE-E8EF-4691-8A72-A65F57F3C3BC}"/>
               </a:ext>
             </a:extLst>
           </p:cNvPr>
@@ -8281,7 +8625,7 @@
           <p:cNvPr id="2" name="">
             <a:extLst xmlns:a="http://schemas.openxmlformats.org/drawingml/2006/main">
               <a:ext uri="{FF2B5EF4-FFF2-40B4-BE49-F238E27FC236}">
-                <a16:creationId xmlns:a16="http://schemas.microsoft.com/office/drawing/2014/main" id="{7228D105-FEC4-4A22-B3AC-BFA495603B75}"/>
+                <a16:creationId xmlns:a16="http://schemas.microsoft.com/office/drawing/2014/main" id="{1BBAF590-6B6C-47CC-8FDC-C1BFBC2A760E}"/>
               </a:ext>
             </a:extLst>
           </p:cNvPr>
@@ -8439,7 +8783,7 @@
           <p:cNvPr id="3" name="">
             <a:extLst xmlns:a="http://schemas.openxmlformats.org/drawingml/2006/main">
               <a:ext uri="{FF2B5EF4-FFF2-40B4-BE49-F238E27FC236}">
-                <a16:creationId xmlns:a16="http://schemas.microsoft.com/office/drawing/2014/main" id="{5BDB591B-7FBF-4C0B-AAA6-D86392614878}"/>
+                <a16:creationId xmlns:a16="http://schemas.microsoft.com/office/drawing/2014/main" id="{09D630F3-5D2C-4E4E-878E-815694BD0C76}"/>
               </a:ext>
             </a:extLst>
           </p:cNvPr>
@@ -8597,7 +8941,7 @@
           <p:cNvPr id="4" name="">
             <a:extLst xmlns:a="http://schemas.openxmlformats.org/drawingml/2006/main">
               <a:ext uri="{FF2B5EF4-FFF2-40B4-BE49-F238E27FC236}">
-                <a16:creationId xmlns:a16="http://schemas.microsoft.com/office/drawing/2014/main" id="{DFD74F67-B422-4B5D-BC32-9B7308791D6B}"/>
+                <a16:creationId xmlns:a16="http://schemas.microsoft.com/office/drawing/2014/main" id="{E922BFD8-A144-46B6-929A-86A5B2F3BC1A}"/>
               </a:ext>
             </a:extLst>
           </p:cNvPr>
@@ -8607,7 +8951,7 @@
           <p:nvPr/>
         </p:nvPicPr>
         <p:blipFill>
-          <a:blip xmlns:r="http://schemas.openxmlformats.org/officeDocument/2006/relationships" xmlns:a="http://schemas.openxmlformats.org/drawingml/2006/main" r:embed="R0f79f87ee43a4857"/>
+          <a:blip xmlns:r="http://schemas.openxmlformats.org/officeDocument/2006/relationships" xmlns:a="http://schemas.openxmlformats.org/drawingml/2006/main" r:embed="R9455e6d6e7764cbc"/>
           <a:stretch xmlns:a="http://schemas.openxmlformats.org/drawingml/2006/main"/>
         </p:blipFill>
         <p:spPr>
@@ -8625,7 +8969,7 @@
           <p:cNvPr id="5" name="">
             <a:extLst xmlns:a="http://schemas.openxmlformats.org/drawingml/2006/main">
               <a:ext uri="{FF2B5EF4-FFF2-40B4-BE49-F238E27FC236}">
-                <a16:creationId xmlns:a16="http://schemas.microsoft.com/office/drawing/2014/main" id="{080F0A98-522C-48DA-B9C0-8BCC80D65A21}"/>
+                <a16:creationId xmlns:a16="http://schemas.microsoft.com/office/drawing/2014/main" id="{B01EDC5E-04E5-41AA-A940-B08C12DA169D}"/>
               </a:ext>
             </a:extLst>
           </p:cNvPr>
@@ -8783,7 +9127,7 @@
           <p:cNvPr id="6" name="">
             <a:extLst xmlns:a="http://schemas.openxmlformats.org/drawingml/2006/main">
               <a:ext uri="{FF2B5EF4-FFF2-40B4-BE49-F238E27FC236}">
-                <a16:creationId xmlns:a16="http://schemas.microsoft.com/office/drawing/2014/main" id="{9A9F3AA0-EF1A-49FF-802B-6BC2A09A44CD}"/>
+                <a16:creationId xmlns:a16="http://schemas.microsoft.com/office/drawing/2014/main" id="{C8DBE1A0-6717-4AFA-B24F-B3161273604A}"/>
               </a:ext>
             </a:extLst>
           </p:cNvPr>
@@ -8941,7 +9285,7 @@
           <p:cNvPr id="7" name="">
             <a:extLst xmlns:a="http://schemas.openxmlformats.org/drawingml/2006/main">
               <a:ext uri="{FF2B5EF4-FFF2-40B4-BE49-F238E27FC236}">
-                <a16:creationId xmlns:a16="http://schemas.microsoft.com/office/drawing/2014/main" id="{A837E246-636E-4573-A8FC-1796FB35C174}"/>
+                <a16:creationId xmlns:a16="http://schemas.microsoft.com/office/drawing/2014/main" id="{86F89EDE-2AB8-494E-8B7F-2E6A2D44770C}"/>
               </a:ext>
             </a:extLst>
           </p:cNvPr>
@@ -8951,7 +9295,7 @@
           <p:nvPr/>
         </p:nvPicPr>
         <p:blipFill>
-          <a:blip xmlns:r="http://schemas.openxmlformats.org/officeDocument/2006/relationships" xmlns:a="http://schemas.openxmlformats.org/drawingml/2006/main" r:embed="R55c6111561bb447f"/>
+          <a:blip xmlns:r="http://schemas.openxmlformats.org/officeDocument/2006/relationships" xmlns:a="http://schemas.openxmlformats.org/drawingml/2006/main" r:embed="R12c9155b12754665"/>
           <a:stretch xmlns:a="http://schemas.openxmlformats.org/drawingml/2006/main"/>
         </p:blipFill>
         <p:spPr>
@@ -8969,7 +9313,7 @@
           <p:cNvPr id="8" name="">
             <a:extLst xmlns:a="http://schemas.openxmlformats.org/drawingml/2006/main">
               <a:ext uri="{FF2B5EF4-FFF2-40B4-BE49-F238E27FC236}">
-                <a16:creationId xmlns:a16="http://schemas.microsoft.com/office/drawing/2014/main" id="{251F2A48-B33E-49D3-B49C-632E6D5B53AB}"/>
+                <a16:creationId xmlns:a16="http://schemas.microsoft.com/office/drawing/2014/main" id="{AF470BDC-9C73-4672-8C14-487B21D37C9E}"/>
               </a:ext>
             </a:extLst>
           </p:cNvPr>
@@ -9127,7 +9471,7 @@
           <p:cNvPr id="9" name="">
             <a:extLst xmlns:a="http://schemas.openxmlformats.org/drawingml/2006/main">
               <a:ext uri="{FF2B5EF4-FFF2-40B4-BE49-F238E27FC236}">
-                <a16:creationId xmlns:a16="http://schemas.microsoft.com/office/drawing/2014/main" id="{F6B1FA4E-66DE-49E1-B0B8-FB6A2305B083}"/>
+                <a16:creationId xmlns:a16="http://schemas.microsoft.com/office/drawing/2014/main" id="{0320F5A6-5415-44E9-AFD1-57E8E9B94264}"/>
               </a:ext>
             </a:extLst>
           </p:cNvPr>
@@ -9285,7 +9629,7 @@
           <p:cNvPr id="10" name="">
             <a:extLst xmlns:a="http://schemas.openxmlformats.org/drawingml/2006/main">
               <a:ext uri="{FF2B5EF4-FFF2-40B4-BE49-F238E27FC236}">
-                <a16:creationId xmlns:a16="http://schemas.microsoft.com/office/drawing/2014/main" id="{9A7102A0-0AD6-426C-8DAE-B26D7090628A}"/>
+                <a16:creationId xmlns:a16="http://schemas.microsoft.com/office/drawing/2014/main" id="{4CE72DA5-D69F-4BF7-ADF0-C04A91C47B6E}"/>
               </a:ext>
             </a:extLst>
           </p:cNvPr>
@@ -9471,7 +9815,7 @@
           <p:cNvPr id="11" name="">
             <a:extLst xmlns:a="http://schemas.openxmlformats.org/drawingml/2006/main">
               <a:ext uri="{FF2B5EF4-FFF2-40B4-BE49-F238E27FC236}">
-                <a16:creationId xmlns:a16="http://schemas.microsoft.com/office/drawing/2014/main" id="{8841E591-377F-4344-9609-18C73D36CE28}"/>
+                <a16:creationId xmlns:a16="http://schemas.microsoft.com/office/drawing/2014/main" id="{AED2C757-9ACB-4C4D-BF0F-861E1519EE99}"/>
               </a:ext>
             </a:extLst>
           </p:cNvPr>
@@ -9629,7 +9973,7 @@
           <p:cNvPr id="12" name="">
             <a:extLst xmlns:a="http://schemas.openxmlformats.org/drawingml/2006/main">
               <a:ext uri="{FF2B5EF4-FFF2-40B4-BE49-F238E27FC236}">
-                <a16:creationId xmlns:a16="http://schemas.microsoft.com/office/drawing/2014/main" id="{77CF8605-4649-4E52-9D4F-D2F8FE1793AA}"/>
+                <a16:creationId xmlns:a16="http://schemas.microsoft.com/office/drawing/2014/main" id="{5A430046-9AC2-4DD7-AAFB-3C5FA65780D9}"/>
               </a:ext>
             </a:extLst>
           </p:cNvPr>
@@ -9785,7 +10129,7 @@
     </p:spTree>
     <p:extLst>
       <p:ext uri="{BB962C8B-B14F-4D97-AF65-F5344CB8AC3E}">
-        <p14:creationId xmlns:p14="http://schemas.microsoft.com/office/powerpoint/2010/main" val="1132015317"/>
+        <p14:creationId xmlns:p14="http://schemas.microsoft.com/office/powerpoint/2010/main" val="1618491042"/>
       </p:ext>
     </p:extLst>
   </p:cSld>
@@ -9816,7 +10160,7 @@
           <p:cNvPr id="13" name="">
             <a:extLst xmlns:a="http://schemas.openxmlformats.org/drawingml/2006/main">
               <a:ext uri="{FF2B5EF4-FFF2-40B4-BE49-F238E27FC236}">
-                <a16:creationId xmlns:a16="http://schemas.microsoft.com/office/drawing/2014/main" id="{B5878124-772A-4599-9C20-5943938B3AEB}"/>
+                <a16:creationId xmlns:a16="http://schemas.microsoft.com/office/drawing/2014/main" id="{D3E351A1-7C2C-4A7A-B075-B89B3A5CDA07}"/>
               </a:ext>
             </a:extLst>
           </p:cNvPr>
@@ -9974,7 +10318,7 @@
           <p:cNvPr id="2" name="">
             <a:extLst xmlns:a="http://schemas.openxmlformats.org/drawingml/2006/main">
               <a:ext uri="{FF2B5EF4-FFF2-40B4-BE49-F238E27FC236}">
-                <a16:creationId xmlns:a16="http://schemas.microsoft.com/office/drawing/2014/main" id="{B2C0B875-6465-4687-BE5A-FD55F5A91E73}"/>
+                <a16:creationId xmlns:a16="http://schemas.microsoft.com/office/drawing/2014/main" id="{C990A4F0-59C8-48F9-A6AF-09135490DDFB}"/>
               </a:ext>
             </a:extLst>
           </p:cNvPr>
@@ -10132,7 +10476,7 @@
           <p:cNvPr id="3" name="">
             <a:extLst xmlns:a="http://schemas.openxmlformats.org/drawingml/2006/main">
               <a:ext uri="{FF2B5EF4-FFF2-40B4-BE49-F238E27FC236}">
-                <a16:creationId xmlns:a16="http://schemas.microsoft.com/office/drawing/2014/main" id="{02F5C312-C75D-4468-B38B-5AEF0C8F766E}"/>
+                <a16:creationId xmlns:a16="http://schemas.microsoft.com/office/drawing/2014/main" id="{8FEB37D4-A5CB-4BFA-89F3-E46D5D832182}"/>
               </a:ext>
             </a:extLst>
           </p:cNvPr>
@@ -10290,7 +10634,7 @@
           <p:cNvPr id="4" name="">
             <a:extLst xmlns:a="http://schemas.openxmlformats.org/drawingml/2006/main">
               <a:ext uri="{FF2B5EF4-FFF2-40B4-BE49-F238E27FC236}">
-                <a16:creationId xmlns:a16="http://schemas.microsoft.com/office/drawing/2014/main" id="{F7250C3B-D207-485F-906B-8240969175ED}"/>
+                <a16:creationId xmlns:a16="http://schemas.microsoft.com/office/drawing/2014/main" id="{40C87433-B1C7-4805-A54A-47C2FCC16DD9}"/>
               </a:ext>
             </a:extLst>
           </p:cNvPr>
@@ -10300,7 +10644,7 @@
           <p:nvPr/>
         </p:nvPicPr>
         <p:blipFill>
-          <a:blip xmlns:r="http://schemas.openxmlformats.org/officeDocument/2006/relationships" xmlns:a="http://schemas.openxmlformats.org/drawingml/2006/main" r:embed="R6c35107f631949c1"/>
+          <a:blip xmlns:r="http://schemas.openxmlformats.org/officeDocument/2006/relationships" xmlns:a="http://schemas.openxmlformats.org/drawingml/2006/main" r:embed="Rfb09209f2a3b42e0"/>
           <a:stretch xmlns:a="http://schemas.openxmlformats.org/drawingml/2006/main"/>
         </p:blipFill>
         <p:spPr>
@@ -10318,7 +10662,7 @@
           <p:cNvPr id="5" name="">
             <a:extLst xmlns:a="http://schemas.openxmlformats.org/drawingml/2006/main">
               <a:ext uri="{FF2B5EF4-FFF2-40B4-BE49-F238E27FC236}">
-                <a16:creationId xmlns:a16="http://schemas.microsoft.com/office/drawing/2014/main" id="{332EB539-0BB7-4F42-B5B2-02553A9DC181}"/>
+                <a16:creationId xmlns:a16="http://schemas.microsoft.com/office/drawing/2014/main" id="{429D5F00-AC5D-4D18-B6E3-45BCBA09F329}"/>
               </a:ext>
             </a:extLst>
           </p:cNvPr>
@@ -10476,7 +10820,7 @@
           <p:cNvPr id="6" name="">
             <a:extLst xmlns:a="http://schemas.openxmlformats.org/drawingml/2006/main">
               <a:ext uri="{FF2B5EF4-FFF2-40B4-BE49-F238E27FC236}">
-                <a16:creationId xmlns:a16="http://schemas.microsoft.com/office/drawing/2014/main" id="{318B99A6-90F7-4C70-8554-342757D8FE79}"/>
+                <a16:creationId xmlns:a16="http://schemas.microsoft.com/office/drawing/2014/main" id="{F0EA44F7-E21A-429B-91C1-A2B5E1E12C5C}"/>
               </a:ext>
             </a:extLst>
           </p:cNvPr>
@@ -10634,7 +10978,7 @@
           <p:cNvPr id="7" name="">
             <a:extLst xmlns:a="http://schemas.openxmlformats.org/drawingml/2006/main">
               <a:ext uri="{FF2B5EF4-FFF2-40B4-BE49-F238E27FC236}">
-                <a16:creationId xmlns:a16="http://schemas.microsoft.com/office/drawing/2014/main" id="{AD2B2893-F647-4997-AB2A-A939199070A6}"/>
+                <a16:creationId xmlns:a16="http://schemas.microsoft.com/office/drawing/2014/main" id="{5C3C4DEE-8C83-4ED0-A541-7AD459A7ACE2}"/>
               </a:ext>
             </a:extLst>
           </p:cNvPr>
@@ -10644,7 +10988,7 @@
           <p:nvPr/>
         </p:nvPicPr>
         <p:blipFill>
-          <a:blip xmlns:r="http://schemas.openxmlformats.org/officeDocument/2006/relationships" xmlns:a="http://schemas.openxmlformats.org/drawingml/2006/main" r:embed="Re58697e3f21e401a"/>
+          <a:blip xmlns:r="http://schemas.openxmlformats.org/officeDocument/2006/relationships" xmlns:a="http://schemas.openxmlformats.org/drawingml/2006/main" r:embed="R72c57aad513842cf"/>
           <a:stretch xmlns:a="http://schemas.openxmlformats.org/drawingml/2006/main"/>
         </p:blipFill>
         <p:spPr>
@@ -10662,7 +11006,7 @@
           <p:cNvPr id="8" name="">
             <a:extLst xmlns:a="http://schemas.openxmlformats.org/drawingml/2006/main">
               <a:ext uri="{FF2B5EF4-FFF2-40B4-BE49-F238E27FC236}">
-                <a16:creationId xmlns:a16="http://schemas.microsoft.com/office/drawing/2014/main" id="{55630C51-C469-4DFF-978C-4AB47977BA11}"/>
+                <a16:creationId xmlns:a16="http://schemas.microsoft.com/office/drawing/2014/main" id="{038DB508-E555-4557-93B7-27C90C316F94}"/>
               </a:ext>
             </a:extLst>
           </p:cNvPr>
@@ -10820,7 +11164,7 @@
           <p:cNvPr id="9" name="">
             <a:extLst xmlns:a="http://schemas.openxmlformats.org/drawingml/2006/main">
               <a:ext uri="{FF2B5EF4-FFF2-40B4-BE49-F238E27FC236}">
-                <a16:creationId xmlns:a16="http://schemas.microsoft.com/office/drawing/2014/main" id="{FE1D2DBA-7BC8-4691-BB2A-3C09F4676F9E}"/>
+                <a16:creationId xmlns:a16="http://schemas.microsoft.com/office/drawing/2014/main" id="{E4D5BED5-3CC8-42A6-B171-CF5A0BAD14A7}"/>
               </a:ext>
             </a:extLst>
           </p:cNvPr>
@@ -10978,7 +11322,7 @@
           <p:cNvPr id="10" name="">
             <a:extLst xmlns:a="http://schemas.openxmlformats.org/drawingml/2006/main">
               <a:ext uri="{FF2B5EF4-FFF2-40B4-BE49-F238E27FC236}">
-                <a16:creationId xmlns:a16="http://schemas.microsoft.com/office/drawing/2014/main" id="{34DF9505-E431-4750-98C9-8130E2DC32AE}"/>
+                <a16:creationId xmlns:a16="http://schemas.microsoft.com/office/drawing/2014/main" id="{01FAF6CE-7928-4E0D-BCBD-EA80046AE64C}"/>
               </a:ext>
             </a:extLst>
           </p:cNvPr>
@@ -11164,7 +11508,7 @@
           <p:cNvPr id="11" name="">
             <a:extLst xmlns:a="http://schemas.openxmlformats.org/drawingml/2006/main">
               <a:ext uri="{FF2B5EF4-FFF2-40B4-BE49-F238E27FC236}">
-                <a16:creationId xmlns:a16="http://schemas.microsoft.com/office/drawing/2014/main" id="{8707B4EE-6CEA-4599-9373-E35322C76A77}"/>
+                <a16:creationId xmlns:a16="http://schemas.microsoft.com/office/drawing/2014/main" id="{D8AEF6B0-209F-4772-9033-A420892044FB}"/>
               </a:ext>
             </a:extLst>
           </p:cNvPr>
@@ -11322,7 +11666,7 @@
           <p:cNvPr id="12" name="">
             <a:extLst xmlns:a="http://schemas.openxmlformats.org/drawingml/2006/main">
               <a:ext uri="{FF2B5EF4-FFF2-40B4-BE49-F238E27FC236}">
-                <a16:creationId xmlns:a16="http://schemas.microsoft.com/office/drawing/2014/main" id="{D6B0E26D-2C2B-45A5-98C3-E28B8C9E3197}"/>
+                <a16:creationId xmlns:a16="http://schemas.microsoft.com/office/drawing/2014/main" id="{5C36A15F-6AA9-4234-A5DE-CA55F74CDA60}"/>
               </a:ext>
             </a:extLst>
           </p:cNvPr>
@@ -11478,7 +11822,7 @@
     </p:spTree>
     <p:extLst>
       <p:ext uri="{BB962C8B-B14F-4D97-AF65-F5344CB8AC3E}">
-        <p14:creationId xmlns:p14="http://schemas.microsoft.com/office/powerpoint/2010/main" val="199283342"/>
+        <p14:creationId xmlns:p14="http://schemas.microsoft.com/office/powerpoint/2010/main" val="1615466016"/>
       </p:ext>
     </p:extLst>
   </p:cSld>
@@ -11509,7 +11853,7 @@
           <p:cNvPr id="14" name="">
             <a:extLst xmlns:a="http://schemas.openxmlformats.org/drawingml/2006/main">
               <a:ext uri="{FF2B5EF4-FFF2-40B4-BE49-F238E27FC236}">
-                <a16:creationId xmlns:a16="http://schemas.microsoft.com/office/drawing/2014/main" id="{73B34376-495A-4E37-A03A-FA22CD099BB1}"/>
+                <a16:creationId xmlns:a16="http://schemas.microsoft.com/office/drawing/2014/main" id="{76710A2C-6B35-4C8F-95E0-CEAB6084F17E}"/>
               </a:ext>
             </a:extLst>
           </p:cNvPr>
@@ -11667,7 +12011,7 @@
           <p:cNvPr id="2" name="">
             <a:extLst xmlns:a="http://schemas.openxmlformats.org/drawingml/2006/main">
               <a:ext uri="{FF2B5EF4-FFF2-40B4-BE49-F238E27FC236}">
-                <a16:creationId xmlns:a16="http://schemas.microsoft.com/office/drawing/2014/main" id="{9A510B27-DA42-4374-83C8-6871C068F415}"/>
+                <a16:creationId xmlns:a16="http://schemas.microsoft.com/office/drawing/2014/main" id="{A7F9119A-F19A-44A0-9015-525DF10F3A26}"/>
               </a:ext>
             </a:extLst>
           </p:cNvPr>
@@ -11825,7 +12169,7 @@
           <p:cNvPr id="3" name="">
             <a:extLst xmlns:a="http://schemas.openxmlformats.org/drawingml/2006/main">
               <a:ext uri="{FF2B5EF4-FFF2-40B4-BE49-F238E27FC236}">
-                <a16:creationId xmlns:a16="http://schemas.microsoft.com/office/drawing/2014/main" id="{881CDE45-16C3-48F8-AEAF-C2B0F87AF6BA}"/>
+                <a16:creationId xmlns:a16="http://schemas.microsoft.com/office/drawing/2014/main" id="{CA5C35FA-B318-4B1D-837C-88BCCF278646}"/>
               </a:ext>
             </a:extLst>
           </p:cNvPr>
@@ -11983,7 +12327,7 @@
           <p:cNvPr id="4" name="">
             <a:extLst xmlns:a="http://schemas.openxmlformats.org/drawingml/2006/main">
               <a:ext uri="{FF2B5EF4-FFF2-40B4-BE49-F238E27FC236}">
-                <a16:creationId xmlns:a16="http://schemas.microsoft.com/office/drawing/2014/main" id="{4C56EB6E-34EB-438B-9011-441843AED708}"/>
+                <a16:creationId xmlns:a16="http://schemas.microsoft.com/office/drawing/2014/main" id="{A2C50A8E-8E67-480A-9B86-1029701FBA55}"/>
               </a:ext>
             </a:extLst>
           </p:cNvPr>
@@ -11993,7 +12337,7 @@
           <p:nvPr/>
         </p:nvPicPr>
         <p:blipFill>
-          <a:blip xmlns:r="http://schemas.openxmlformats.org/officeDocument/2006/relationships" xmlns:a="http://schemas.openxmlformats.org/drawingml/2006/main" r:embed="Rc78b377e80624d1b"/>
+          <a:blip xmlns:r="http://schemas.openxmlformats.org/officeDocument/2006/relationships" xmlns:a="http://schemas.openxmlformats.org/drawingml/2006/main" r:embed="Rbe10d9cc76bd4692"/>
           <a:stretch xmlns:a="http://schemas.openxmlformats.org/drawingml/2006/main"/>
         </p:blipFill>
         <p:spPr>
@@ -12011,7 +12355,7 @@
           <p:cNvPr id="5" name="">
             <a:extLst xmlns:a="http://schemas.openxmlformats.org/drawingml/2006/main">
               <a:ext uri="{FF2B5EF4-FFF2-40B4-BE49-F238E27FC236}">
-                <a16:creationId xmlns:a16="http://schemas.microsoft.com/office/drawing/2014/main" id="{7C145D27-A829-40D7-9FBE-654D2FC7C176}"/>
+                <a16:creationId xmlns:a16="http://schemas.microsoft.com/office/drawing/2014/main" id="{07D6D3D3-AD15-472C-A7F8-891BA6E21AD2}"/>
               </a:ext>
             </a:extLst>
           </p:cNvPr>
@@ -12169,7 +12513,7 @@
           <p:cNvPr id="6" name="">
             <a:extLst xmlns:a="http://schemas.openxmlformats.org/drawingml/2006/main">
               <a:ext uri="{FF2B5EF4-FFF2-40B4-BE49-F238E27FC236}">
-                <a16:creationId xmlns:a16="http://schemas.microsoft.com/office/drawing/2014/main" id="{6F42FC7E-4639-48A7-A820-4D59520D3073}"/>
+                <a16:creationId xmlns:a16="http://schemas.microsoft.com/office/drawing/2014/main" id="{39685565-AA6A-4195-9039-73D0F046C58A}"/>
               </a:ext>
             </a:extLst>
           </p:cNvPr>
@@ -12327,7 +12671,7 @@
           <p:cNvPr id="7" name="">
             <a:extLst xmlns:a="http://schemas.openxmlformats.org/drawingml/2006/main">
               <a:ext uri="{FF2B5EF4-FFF2-40B4-BE49-F238E27FC236}">
-                <a16:creationId xmlns:a16="http://schemas.microsoft.com/office/drawing/2014/main" id="{D92FC52E-3FA7-4537-9B33-DA68623A97BE}"/>
+                <a16:creationId xmlns:a16="http://schemas.microsoft.com/office/drawing/2014/main" id="{1F06370D-AC39-4FF7-9E8A-0F6A453D0524}"/>
               </a:ext>
             </a:extLst>
           </p:cNvPr>
@@ -12337,7 +12681,7 @@
           <p:nvPr/>
         </p:nvPicPr>
         <p:blipFill>
-          <a:blip xmlns:r="http://schemas.openxmlformats.org/officeDocument/2006/relationships" xmlns:a="http://schemas.openxmlformats.org/drawingml/2006/main" r:embed="R26bf9d87c7294b2c"/>
+          <a:blip xmlns:r="http://schemas.openxmlformats.org/officeDocument/2006/relationships" xmlns:a="http://schemas.openxmlformats.org/drawingml/2006/main" r:embed="Rbc0550a26f3949f0"/>
           <a:stretch xmlns:a="http://schemas.openxmlformats.org/drawingml/2006/main"/>
         </p:blipFill>
         <p:spPr>
@@ -12355,7 +12699,7 @@
           <p:cNvPr id="8" name="">
             <a:extLst xmlns:a="http://schemas.openxmlformats.org/drawingml/2006/main">
               <a:ext uri="{FF2B5EF4-FFF2-40B4-BE49-F238E27FC236}">
-                <a16:creationId xmlns:a16="http://schemas.microsoft.com/office/drawing/2014/main" id="{A34DEEB3-A81D-4FA3-A305-FA69FC631187}"/>
+                <a16:creationId xmlns:a16="http://schemas.microsoft.com/office/drawing/2014/main" id="{A2906B72-1C50-4D01-A74D-1C3F2BF06BC3}"/>
               </a:ext>
             </a:extLst>
           </p:cNvPr>
@@ -12513,7 +12857,7 @@
           <p:cNvPr id="9" name="">
             <a:extLst xmlns:a="http://schemas.openxmlformats.org/drawingml/2006/main">
               <a:ext uri="{FF2B5EF4-FFF2-40B4-BE49-F238E27FC236}">
-                <a16:creationId xmlns:a16="http://schemas.microsoft.com/office/drawing/2014/main" id="{345D09E5-A86F-4D3F-B4FD-B68B765432A7}"/>
+                <a16:creationId xmlns:a16="http://schemas.microsoft.com/office/drawing/2014/main" id="{4232690B-2CCA-4B1D-BD98-3373F5636C83}"/>
               </a:ext>
             </a:extLst>
           </p:cNvPr>
@@ -12671,7 +13015,7 @@
           <p:cNvPr id="10" name="">
             <a:extLst xmlns:a="http://schemas.openxmlformats.org/drawingml/2006/main">
               <a:ext uri="{FF2B5EF4-FFF2-40B4-BE49-F238E27FC236}">
-                <a16:creationId xmlns:a16="http://schemas.microsoft.com/office/drawing/2014/main" id="{D0944788-044C-4CB1-BEAD-600434BAACF9}"/>
+                <a16:creationId xmlns:a16="http://schemas.microsoft.com/office/drawing/2014/main" id="{E265E73D-DD0A-4911-A0B4-546399476DCC}"/>
               </a:ext>
             </a:extLst>
           </p:cNvPr>
@@ -12829,7 +13173,7 @@
           <p:cNvPr id="11" name="">
             <a:extLst xmlns:a="http://schemas.openxmlformats.org/drawingml/2006/main">
               <a:ext uri="{FF2B5EF4-FFF2-40B4-BE49-F238E27FC236}">
-                <a16:creationId xmlns:a16="http://schemas.microsoft.com/office/drawing/2014/main" id="{FE2E6436-928D-4CAF-8E82-8995319D10E2}"/>
+                <a16:creationId xmlns:a16="http://schemas.microsoft.com/office/drawing/2014/main" id="{866F8612-0BAE-4344-936B-33DABA8F2BED}"/>
               </a:ext>
             </a:extLst>
           </p:cNvPr>
@@ -12987,7 +13331,7 @@
           <p:cNvPr id="12" name="">
             <a:extLst xmlns:a="http://schemas.openxmlformats.org/drawingml/2006/main">
               <a:ext uri="{FF2B5EF4-FFF2-40B4-BE49-F238E27FC236}">
-                <a16:creationId xmlns:a16="http://schemas.microsoft.com/office/drawing/2014/main" id="{88A4AC34-5D4D-4277-8F8F-EACB70245DE7}"/>
+                <a16:creationId xmlns:a16="http://schemas.microsoft.com/office/drawing/2014/main" id="{13DD615E-5F91-4E71-8B23-9A49BC831361}"/>
               </a:ext>
             </a:extLst>
           </p:cNvPr>
@@ -13191,7 +13535,7 @@
           <p:cNvPr id="13" name="">
             <a:extLst xmlns:a="http://schemas.openxmlformats.org/drawingml/2006/main">
               <a:ext uri="{FF2B5EF4-FFF2-40B4-BE49-F238E27FC236}">
-                <a16:creationId xmlns:a16="http://schemas.microsoft.com/office/drawing/2014/main" id="{D6B8F967-F664-4BB7-9A2E-399DEBFED6FC}"/>
+                <a16:creationId xmlns:a16="http://schemas.microsoft.com/office/drawing/2014/main" id="{36794062-5029-48AF-9AF3-293BE01FDB4D}"/>
               </a:ext>
             </a:extLst>
           </p:cNvPr>
@@ -13347,7 +13691,7 @@
     </p:spTree>
     <p:extLst>
       <p:ext uri="{BB962C8B-B14F-4D97-AF65-F5344CB8AC3E}">
-        <p14:creationId xmlns:p14="http://schemas.microsoft.com/office/powerpoint/2010/main" val="324625335"/>
+        <p14:creationId xmlns:p14="http://schemas.microsoft.com/office/powerpoint/2010/main" val="200428823"/>
       </p:ext>
     </p:extLst>
   </p:cSld>
@@ -13378,7 +13722,7 @@
           <p:cNvPr id="14" name="">
             <a:extLst xmlns:a="http://schemas.openxmlformats.org/drawingml/2006/main">
               <a:ext uri="{FF2B5EF4-FFF2-40B4-BE49-F238E27FC236}">
-                <a16:creationId xmlns:a16="http://schemas.microsoft.com/office/drawing/2014/main" id="{19FD63E0-251A-4A23-8E8A-D693C3F10162}"/>
+                <a16:creationId xmlns:a16="http://schemas.microsoft.com/office/drawing/2014/main" id="{11606A85-011D-4E29-91CC-6EDEFB824DC9}"/>
               </a:ext>
             </a:extLst>
           </p:cNvPr>
@@ -13536,7 +13880,7 @@
           <p:cNvPr id="2" name="">
             <a:extLst xmlns:a="http://schemas.openxmlformats.org/drawingml/2006/main">
               <a:ext uri="{FF2B5EF4-FFF2-40B4-BE49-F238E27FC236}">
-                <a16:creationId xmlns:a16="http://schemas.microsoft.com/office/drawing/2014/main" id="{86DCA77C-02A2-4719-B6A1-4E1F7E94DADD}"/>
+                <a16:creationId xmlns:a16="http://schemas.microsoft.com/office/drawing/2014/main" id="{AC38E052-7A05-418B-BF44-B32EE48A8AEA}"/>
               </a:ext>
             </a:extLst>
           </p:cNvPr>
@@ -13694,7 +14038,7 @@
           <p:cNvPr id="3" name="">
             <a:extLst xmlns:a="http://schemas.openxmlformats.org/drawingml/2006/main">
               <a:ext uri="{FF2B5EF4-FFF2-40B4-BE49-F238E27FC236}">
-                <a16:creationId xmlns:a16="http://schemas.microsoft.com/office/drawing/2014/main" id="{DF8A1C73-649F-4FE2-9116-E762439E7024}"/>
+                <a16:creationId xmlns:a16="http://schemas.microsoft.com/office/drawing/2014/main" id="{898CA833-C7A9-47AF-A991-1DAD203F92EC}"/>
               </a:ext>
             </a:extLst>
           </p:cNvPr>
@@ -13852,7 +14196,7 @@
           <p:cNvPr id="4" name="">
             <a:extLst xmlns:a="http://schemas.openxmlformats.org/drawingml/2006/main">
               <a:ext uri="{FF2B5EF4-FFF2-40B4-BE49-F238E27FC236}">
-                <a16:creationId xmlns:a16="http://schemas.microsoft.com/office/drawing/2014/main" id="{6DDDB569-6F9D-49F0-B126-98E62CAEAAB0}"/>
+                <a16:creationId xmlns:a16="http://schemas.microsoft.com/office/drawing/2014/main" id="{7F3D39EC-CD06-4984-AF61-04F40FB3DFE0}"/>
               </a:ext>
             </a:extLst>
           </p:cNvPr>
@@ -13862,7 +14206,7 @@
           <p:nvPr/>
         </p:nvPicPr>
         <p:blipFill>
-          <a:blip xmlns:r="http://schemas.openxmlformats.org/officeDocument/2006/relationships" xmlns:a="http://schemas.openxmlformats.org/drawingml/2006/main" r:embed="Rb7dcf12365e7426c"/>
+          <a:blip xmlns:r="http://schemas.openxmlformats.org/officeDocument/2006/relationships" xmlns:a="http://schemas.openxmlformats.org/drawingml/2006/main" r:embed="R6a122b6e318e460a"/>
           <a:stretch xmlns:a="http://schemas.openxmlformats.org/drawingml/2006/main"/>
         </p:blipFill>
         <p:spPr>
@@ -13880,7 +14224,7 @@
           <p:cNvPr id="5" name="">
             <a:extLst xmlns:a="http://schemas.openxmlformats.org/drawingml/2006/main">
               <a:ext uri="{FF2B5EF4-FFF2-40B4-BE49-F238E27FC236}">
-                <a16:creationId xmlns:a16="http://schemas.microsoft.com/office/drawing/2014/main" id="{90F332F2-6D50-4677-B257-94C4524777A3}"/>
+                <a16:creationId xmlns:a16="http://schemas.microsoft.com/office/drawing/2014/main" id="{BF204C26-EF1D-4D4F-976F-64D256A2AA46}"/>
               </a:ext>
             </a:extLst>
           </p:cNvPr>
@@ -14038,7 +14382,7 @@
           <p:cNvPr id="6" name="">
             <a:extLst xmlns:a="http://schemas.openxmlformats.org/drawingml/2006/main">
               <a:ext uri="{FF2B5EF4-FFF2-40B4-BE49-F238E27FC236}">
-                <a16:creationId xmlns:a16="http://schemas.microsoft.com/office/drawing/2014/main" id="{F2550A80-3CB3-407E-A03B-2149B04BFD93}"/>
+                <a16:creationId xmlns:a16="http://schemas.microsoft.com/office/drawing/2014/main" id="{2F1B7A4B-2710-40BB-8E85-EF1E8CB5D434}"/>
               </a:ext>
             </a:extLst>
           </p:cNvPr>
@@ -14196,7 +14540,7 @@
           <p:cNvPr id="7" name="">
             <a:extLst xmlns:a="http://schemas.openxmlformats.org/drawingml/2006/main">
               <a:ext uri="{FF2B5EF4-FFF2-40B4-BE49-F238E27FC236}">
-                <a16:creationId xmlns:a16="http://schemas.microsoft.com/office/drawing/2014/main" id="{8A71D67F-FF4A-4E2E-9A60-0132768BE1FC}"/>
+                <a16:creationId xmlns:a16="http://schemas.microsoft.com/office/drawing/2014/main" id="{C7A5C8FB-5D53-4FE5-91A2-39FA1F17DA0F}"/>
               </a:ext>
             </a:extLst>
           </p:cNvPr>
@@ -14206,7 +14550,7 @@
           <p:nvPr/>
         </p:nvPicPr>
         <p:blipFill>
-          <a:blip xmlns:r="http://schemas.openxmlformats.org/officeDocument/2006/relationships" xmlns:a="http://schemas.openxmlformats.org/drawingml/2006/main" r:embed="R69e67f2ac25e4e67"/>
+          <a:blip xmlns:r="http://schemas.openxmlformats.org/officeDocument/2006/relationships" xmlns:a="http://schemas.openxmlformats.org/drawingml/2006/main" r:embed="R26b464f9721b4df0"/>
           <a:stretch xmlns:a="http://schemas.openxmlformats.org/drawingml/2006/main"/>
         </p:blipFill>
         <p:spPr>
@@ -14224,7 +14568,7 @@
           <p:cNvPr id="8" name="">
             <a:extLst xmlns:a="http://schemas.openxmlformats.org/drawingml/2006/main">
               <a:ext uri="{FF2B5EF4-FFF2-40B4-BE49-F238E27FC236}">
-                <a16:creationId xmlns:a16="http://schemas.microsoft.com/office/drawing/2014/main" id="{74EE73F5-A13F-40C6-AE8A-7FF9C478FB32}"/>
+                <a16:creationId xmlns:a16="http://schemas.microsoft.com/office/drawing/2014/main" id="{29B6501C-2E95-400C-A519-1109295A671A}"/>
               </a:ext>
             </a:extLst>
           </p:cNvPr>
@@ -14382,7 +14726,7 @@
           <p:cNvPr id="9" name="">
             <a:extLst xmlns:a="http://schemas.openxmlformats.org/drawingml/2006/main">
               <a:ext uri="{FF2B5EF4-FFF2-40B4-BE49-F238E27FC236}">
-                <a16:creationId xmlns:a16="http://schemas.microsoft.com/office/drawing/2014/main" id="{E0DB4163-3FF1-446C-9BC6-7BDC59EB25F1}"/>
+                <a16:creationId xmlns:a16="http://schemas.microsoft.com/office/drawing/2014/main" id="{AC57A070-C702-4A73-9D70-7463A5C1FC3A}"/>
               </a:ext>
             </a:extLst>
           </p:cNvPr>
@@ -14540,7 +14884,7 @@
           <p:cNvPr id="10" name="">
             <a:extLst xmlns:a="http://schemas.openxmlformats.org/drawingml/2006/main">
               <a:ext uri="{FF2B5EF4-FFF2-40B4-BE49-F238E27FC236}">
-                <a16:creationId xmlns:a16="http://schemas.microsoft.com/office/drawing/2014/main" id="{DD028906-530C-4FB2-AA30-C0E032D8A786}"/>
+                <a16:creationId xmlns:a16="http://schemas.microsoft.com/office/drawing/2014/main" id="{942638EF-C9D2-41D9-95DC-C22314DA2B8B}"/>
               </a:ext>
             </a:extLst>
           </p:cNvPr>
@@ -14726,7 +15070,7 @@
           <p:cNvPr id="11" name="">
             <a:extLst xmlns:a="http://schemas.openxmlformats.org/drawingml/2006/main">
               <a:ext uri="{FF2B5EF4-FFF2-40B4-BE49-F238E27FC236}">
-                <a16:creationId xmlns:a16="http://schemas.microsoft.com/office/drawing/2014/main" id="{5AEB9EFE-2454-4D21-A26E-524820DB7666}"/>
+                <a16:creationId xmlns:a16="http://schemas.microsoft.com/office/drawing/2014/main" id="{F0348B27-EF40-4DE2-9BF1-D761572E2711}"/>
               </a:ext>
             </a:extLst>
           </p:cNvPr>
@@ -14884,7 +15228,7 @@
           <p:cNvPr id="12" name="">
             <a:extLst xmlns:a="http://schemas.openxmlformats.org/drawingml/2006/main">
               <a:ext uri="{FF2B5EF4-FFF2-40B4-BE49-F238E27FC236}">
-                <a16:creationId xmlns:a16="http://schemas.microsoft.com/office/drawing/2014/main" id="{17A2A083-D5DC-43EB-BA5C-78C86BA4DC20}"/>
+                <a16:creationId xmlns:a16="http://schemas.microsoft.com/office/drawing/2014/main" id="{7C5A6907-C1F6-45B8-9DB5-1F2770EFCA33}"/>
               </a:ext>
             </a:extLst>
           </p:cNvPr>
@@ -15042,7 +15386,7 @@
           <p:cNvPr id="13" name="">
             <a:extLst xmlns:a="http://schemas.openxmlformats.org/drawingml/2006/main">
               <a:ext uri="{FF2B5EF4-FFF2-40B4-BE49-F238E27FC236}">
-                <a16:creationId xmlns:a16="http://schemas.microsoft.com/office/drawing/2014/main" id="{1256DBF0-28CB-4A71-9420-D6A03A3E2312}"/>
+                <a16:creationId xmlns:a16="http://schemas.microsoft.com/office/drawing/2014/main" id="{B5CF9574-5C95-4358-AA5A-88CF8727DD07}"/>
               </a:ext>
             </a:extLst>
           </p:cNvPr>
@@ -15198,7 +15542,7 @@
     </p:spTree>
     <p:extLst>
       <p:ext uri="{BB962C8B-B14F-4D97-AF65-F5344CB8AC3E}">
-        <p14:creationId xmlns:p14="http://schemas.microsoft.com/office/powerpoint/2010/main" val="991612742"/>
+        <p14:creationId xmlns:p14="http://schemas.microsoft.com/office/powerpoint/2010/main" val="1262496321"/>
       </p:ext>
     </p:extLst>
   </p:cSld>
@@ -15229,7 +15573,7 @@
           <p:cNvPr id="13" name="">
             <a:extLst xmlns:a="http://schemas.openxmlformats.org/drawingml/2006/main">
               <a:ext uri="{FF2B5EF4-FFF2-40B4-BE49-F238E27FC236}">
-                <a16:creationId xmlns:a16="http://schemas.microsoft.com/office/drawing/2014/main" id="{41D2DB5E-83D0-4CE9-826F-3B4B22CF40DD}"/>
+                <a16:creationId xmlns:a16="http://schemas.microsoft.com/office/drawing/2014/main" id="{1CCF7843-B561-4C56-9B0C-FAF37B38A191}"/>
               </a:ext>
             </a:extLst>
           </p:cNvPr>
@@ -15387,7 +15731,7 @@
           <p:cNvPr id="2" name="">
             <a:extLst xmlns:a="http://schemas.openxmlformats.org/drawingml/2006/main">
               <a:ext uri="{FF2B5EF4-FFF2-40B4-BE49-F238E27FC236}">
-                <a16:creationId xmlns:a16="http://schemas.microsoft.com/office/drawing/2014/main" id="{592E412D-F56A-4921-B51A-AB2F7052B396}"/>
+                <a16:creationId xmlns:a16="http://schemas.microsoft.com/office/drawing/2014/main" id="{34912685-233F-49AD-AA21-923B43C0CABE}"/>
               </a:ext>
             </a:extLst>
           </p:cNvPr>
@@ -15545,7 +15889,7 @@
           <p:cNvPr id="3" name="">
             <a:extLst xmlns:a="http://schemas.openxmlformats.org/drawingml/2006/main">
               <a:ext uri="{FF2B5EF4-FFF2-40B4-BE49-F238E27FC236}">
-                <a16:creationId xmlns:a16="http://schemas.microsoft.com/office/drawing/2014/main" id="{9DB89CB2-56EE-4D40-9568-5DEC4BB30E79}"/>
+                <a16:creationId xmlns:a16="http://schemas.microsoft.com/office/drawing/2014/main" id="{7AFA2F1C-E3A1-451E-8D45-DE9A3E3E7E1F}"/>
               </a:ext>
             </a:extLst>
           </p:cNvPr>
@@ -15703,7 +16047,7 @@
           <p:cNvPr id="4" name="">
             <a:extLst xmlns:a="http://schemas.openxmlformats.org/drawingml/2006/main">
               <a:ext uri="{FF2B5EF4-FFF2-40B4-BE49-F238E27FC236}">
-                <a16:creationId xmlns:a16="http://schemas.microsoft.com/office/drawing/2014/main" id="{AF275505-BA7D-47D4-AB2B-BEAB2003256E}"/>
+                <a16:creationId xmlns:a16="http://schemas.microsoft.com/office/drawing/2014/main" id="{6927F0B7-3D38-4A1D-8351-CC9823CE7355}"/>
               </a:ext>
             </a:extLst>
           </p:cNvPr>
@@ -15713,7 +16057,7 @@
           <p:nvPr/>
         </p:nvPicPr>
         <p:blipFill>
-          <a:blip xmlns:r="http://schemas.openxmlformats.org/officeDocument/2006/relationships" xmlns:a="http://schemas.openxmlformats.org/drawingml/2006/main" r:embed="R30ca40c33f5248b0"/>
+          <a:blip xmlns:r="http://schemas.openxmlformats.org/officeDocument/2006/relationships" xmlns:a="http://schemas.openxmlformats.org/drawingml/2006/main" r:embed="R0054615e4f8349b7"/>
           <a:stretch xmlns:a="http://schemas.openxmlformats.org/drawingml/2006/main"/>
         </p:blipFill>
         <p:spPr>
@@ -15731,7 +16075,7 @@
           <p:cNvPr id="5" name="">
             <a:extLst xmlns:a="http://schemas.openxmlformats.org/drawingml/2006/main">
               <a:ext uri="{FF2B5EF4-FFF2-40B4-BE49-F238E27FC236}">
-                <a16:creationId xmlns:a16="http://schemas.microsoft.com/office/drawing/2014/main" id="{6C25D400-88FB-42E6-BE42-F5AE68FB9584}"/>
+                <a16:creationId xmlns:a16="http://schemas.microsoft.com/office/drawing/2014/main" id="{6BD5FDD3-D2EC-4237-A5EA-3FF983CE235A}"/>
               </a:ext>
             </a:extLst>
           </p:cNvPr>
@@ -15889,7 +16233,7 @@
           <p:cNvPr id="6" name="">
             <a:extLst xmlns:a="http://schemas.openxmlformats.org/drawingml/2006/main">
               <a:ext uri="{FF2B5EF4-FFF2-40B4-BE49-F238E27FC236}">
-                <a16:creationId xmlns:a16="http://schemas.microsoft.com/office/drawing/2014/main" id="{0785496B-2558-47E1-A23D-15E5E5E9CE79}"/>
+                <a16:creationId xmlns:a16="http://schemas.microsoft.com/office/drawing/2014/main" id="{615DA0D6-6E10-4AC7-A92F-FFFD422B0441}"/>
               </a:ext>
             </a:extLst>
           </p:cNvPr>
@@ -16047,7 +16391,7 @@
           <p:cNvPr id="7" name="">
             <a:extLst xmlns:a="http://schemas.openxmlformats.org/drawingml/2006/main">
               <a:ext uri="{FF2B5EF4-FFF2-40B4-BE49-F238E27FC236}">
-                <a16:creationId xmlns:a16="http://schemas.microsoft.com/office/drawing/2014/main" id="{062AC3DD-30D0-402E-99E5-374909C8F349}"/>
+                <a16:creationId xmlns:a16="http://schemas.microsoft.com/office/drawing/2014/main" id="{6BF2A3C0-5477-41B5-8F58-C14F44D99BD6}"/>
               </a:ext>
             </a:extLst>
           </p:cNvPr>
@@ -16057,7 +16401,7 @@
           <p:nvPr/>
         </p:nvPicPr>
         <p:blipFill>
-          <a:blip xmlns:r="http://schemas.openxmlformats.org/officeDocument/2006/relationships" xmlns:a="http://schemas.openxmlformats.org/drawingml/2006/main" r:embed="Rf77c12dd2444417c"/>
+          <a:blip xmlns:r="http://schemas.openxmlformats.org/officeDocument/2006/relationships" xmlns:a="http://schemas.openxmlformats.org/drawingml/2006/main" r:embed="R0253bda067f44dd6"/>
           <a:stretch xmlns:a="http://schemas.openxmlformats.org/drawingml/2006/main"/>
         </p:blipFill>
         <p:spPr>
@@ -16075,7 +16419,7 @@
           <p:cNvPr id="8" name="">
             <a:extLst xmlns:a="http://schemas.openxmlformats.org/drawingml/2006/main">
               <a:ext uri="{FF2B5EF4-FFF2-40B4-BE49-F238E27FC236}">
-                <a16:creationId xmlns:a16="http://schemas.microsoft.com/office/drawing/2014/main" id="{91212224-BD5F-484B-8A53-7B700C9B36E7}"/>
+                <a16:creationId xmlns:a16="http://schemas.microsoft.com/office/drawing/2014/main" id="{BB129EB8-3CFF-4C76-B00F-754B1791A564}"/>
               </a:ext>
             </a:extLst>
           </p:cNvPr>
@@ -16233,7 +16577,7 @@
           <p:cNvPr id="9" name="">
             <a:extLst xmlns:a="http://schemas.openxmlformats.org/drawingml/2006/main">
               <a:ext uri="{FF2B5EF4-FFF2-40B4-BE49-F238E27FC236}">
-                <a16:creationId xmlns:a16="http://schemas.microsoft.com/office/drawing/2014/main" id="{090CA5D5-4DB4-4159-BE88-FF0C784DBD09}"/>
+                <a16:creationId xmlns:a16="http://schemas.microsoft.com/office/drawing/2014/main" id="{7BA512E5-5440-4197-A9F1-4F26616472BE}"/>
               </a:ext>
             </a:extLst>
           </p:cNvPr>
@@ -16391,7 +16735,7 @@
           <p:cNvPr id="10" name="">
             <a:extLst xmlns:a="http://schemas.openxmlformats.org/drawingml/2006/main">
               <a:ext uri="{FF2B5EF4-FFF2-40B4-BE49-F238E27FC236}">
-                <a16:creationId xmlns:a16="http://schemas.microsoft.com/office/drawing/2014/main" id="{02920705-0655-4546-8FA0-62F068D38274}"/>
+                <a16:creationId xmlns:a16="http://schemas.microsoft.com/office/drawing/2014/main" id="{B9597863-396B-4289-906B-3B8AB67E2406}"/>
               </a:ext>
             </a:extLst>
           </p:cNvPr>
@@ -16577,7 +16921,7 @@
           <p:cNvPr id="11" name="">
             <a:extLst xmlns:a="http://schemas.openxmlformats.org/drawingml/2006/main">
               <a:ext uri="{FF2B5EF4-FFF2-40B4-BE49-F238E27FC236}">
-                <a16:creationId xmlns:a16="http://schemas.microsoft.com/office/drawing/2014/main" id="{CB20EBE8-87F8-4083-A485-391073185A33}"/>
+                <a16:creationId xmlns:a16="http://schemas.microsoft.com/office/drawing/2014/main" id="{CEF0BB40-A138-4B82-9CA1-667990CE1A89}"/>
               </a:ext>
             </a:extLst>
           </p:cNvPr>
@@ -16735,7 +17079,7 @@
           <p:cNvPr id="12" name="">
             <a:extLst xmlns:a="http://schemas.openxmlformats.org/drawingml/2006/main">
               <a:ext uri="{FF2B5EF4-FFF2-40B4-BE49-F238E27FC236}">
-                <a16:creationId xmlns:a16="http://schemas.microsoft.com/office/drawing/2014/main" id="{9526D5CE-3C19-4141-90E6-7B697047F003}"/>
+                <a16:creationId xmlns:a16="http://schemas.microsoft.com/office/drawing/2014/main" id="{F4073244-68D6-4DE5-922B-A7DDB32B2CBD}"/>
               </a:ext>
             </a:extLst>
           </p:cNvPr>
@@ -16892,7 +17236,7 @@
     </p:spTree>
     <p:extLst>
       <p:ext uri="{BB962C8B-B14F-4D97-AF65-F5344CB8AC3E}">
-        <p14:creationId xmlns:p14="http://schemas.microsoft.com/office/powerpoint/2010/main" val="104967007"/>
+        <p14:creationId xmlns:p14="http://schemas.microsoft.com/office/powerpoint/2010/main" val="125880501"/>
       </p:ext>
     </p:extLst>
   </p:cSld>
@@ -16923,7 +17267,7 @@
           <p:cNvPr id="13" name="">
             <a:extLst xmlns:a="http://schemas.openxmlformats.org/drawingml/2006/main">
               <a:ext uri="{FF2B5EF4-FFF2-40B4-BE49-F238E27FC236}">
-                <a16:creationId xmlns:a16="http://schemas.microsoft.com/office/drawing/2014/main" id="{20454FE1-4A00-4E58-BCE4-622B83E1DE4C}"/>
+                <a16:creationId xmlns:a16="http://schemas.microsoft.com/office/drawing/2014/main" id="{87CCB663-AA63-44F3-813A-7F44848FAE9F}"/>
               </a:ext>
             </a:extLst>
           </p:cNvPr>
@@ -17081,7 +17425,7 @@
           <p:cNvPr id="2" name="">
             <a:extLst xmlns:a="http://schemas.openxmlformats.org/drawingml/2006/main">
               <a:ext uri="{FF2B5EF4-FFF2-40B4-BE49-F238E27FC236}">
-                <a16:creationId xmlns:a16="http://schemas.microsoft.com/office/drawing/2014/main" id="{B123B2C2-4026-48F0-9FB3-FCCB8D92FE90}"/>
+                <a16:creationId xmlns:a16="http://schemas.microsoft.com/office/drawing/2014/main" id="{DDA90A20-DA0A-4270-B9D7-EEBDDABBC0A8}"/>
               </a:ext>
             </a:extLst>
           </p:cNvPr>
@@ -17239,7 +17583,7 @@
           <p:cNvPr id="3" name="">
             <a:extLst xmlns:a="http://schemas.openxmlformats.org/drawingml/2006/main">
               <a:ext uri="{FF2B5EF4-FFF2-40B4-BE49-F238E27FC236}">
-                <a16:creationId xmlns:a16="http://schemas.microsoft.com/office/drawing/2014/main" id="{02B8D559-B05B-4A23-A7F2-DBBD919C0C84}"/>
+                <a16:creationId xmlns:a16="http://schemas.microsoft.com/office/drawing/2014/main" id="{1674B27C-4B95-4D83-947F-27B797B62411}"/>
               </a:ext>
             </a:extLst>
           </p:cNvPr>
@@ -17397,7 +17741,7 @@
           <p:cNvPr id="4" name="">
             <a:extLst xmlns:a="http://schemas.openxmlformats.org/drawingml/2006/main">
               <a:ext uri="{FF2B5EF4-FFF2-40B4-BE49-F238E27FC236}">
-                <a16:creationId xmlns:a16="http://schemas.microsoft.com/office/drawing/2014/main" id="{808DB78E-C43F-463A-8153-03AAF6CCD961}"/>
+                <a16:creationId xmlns:a16="http://schemas.microsoft.com/office/drawing/2014/main" id="{7BA6F795-9743-4F21-B465-FE0F4296F9A5}"/>
               </a:ext>
             </a:extLst>
           </p:cNvPr>
@@ -17407,7 +17751,7 @@
           <p:nvPr/>
         </p:nvPicPr>
         <p:blipFill>
-          <a:blip xmlns:r="http://schemas.openxmlformats.org/officeDocument/2006/relationships" xmlns:a="http://schemas.openxmlformats.org/drawingml/2006/main" r:embed="R2d62b307d3cf4021"/>
+          <a:blip xmlns:r="http://schemas.openxmlformats.org/officeDocument/2006/relationships" xmlns:a="http://schemas.openxmlformats.org/drawingml/2006/main" r:embed="R1dd66f6501874e78"/>
           <a:stretch xmlns:a="http://schemas.openxmlformats.org/drawingml/2006/main"/>
         </p:blipFill>
         <p:spPr>
@@ -17425,7 +17769,7 @@
           <p:cNvPr id="5" name="">
             <a:extLst xmlns:a="http://schemas.openxmlformats.org/drawingml/2006/main">
               <a:ext uri="{FF2B5EF4-FFF2-40B4-BE49-F238E27FC236}">
-                <a16:creationId xmlns:a16="http://schemas.microsoft.com/office/drawing/2014/main" id="{102F7757-80EC-4230-9247-0158AEC0DE52}"/>
+                <a16:creationId xmlns:a16="http://schemas.microsoft.com/office/drawing/2014/main" id="{D3E02F88-D48A-4AAC-B9E8-0CD2CBEB8CEF}"/>
               </a:ext>
             </a:extLst>
           </p:cNvPr>
@@ -17583,7 +17927,7 @@
           <p:cNvPr id="6" name="">
             <a:extLst xmlns:a="http://schemas.openxmlformats.org/drawingml/2006/main">
               <a:ext uri="{FF2B5EF4-FFF2-40B4-BE49-F238E27FC236}">
-                <a16:creationId xmlns:a16="http://schemas.microsoft.com/office/drawing/2014/main" id="{4330A5FE-4FBE-449E-A9B9-5DE8BEE3D07E}"/>
+                <a16:creationId xmlns:a16="http://schemas.microsoft.com/office/drawing/2014/main" id="{76BDF96F-4F51-4328-84B8-E785D086BBD3}"/>
               </a:ext>
             </a:extLst>
           </p:cNvPr>
@@ -17741,7 +18085,7 @@
           <p:cNvPr id="7" name="">
             <a:extLst xmlns:a="http://schemas.openxmlformats.org/drawingml/2006/main">
               <a:ext uri="{FF2B5EF4-FFF2-40B4-BE49-F238E27FC236}">
-                <a16:creationId xmlns:a16="http://schemas.microsoft.com/office/drawing/2014/main" id="{AC5072F6-4ECB-4899-81B8-01BB3F6BF928}"/>
+                <a16:creationId xmlns:a16="http://schemas.microsoft.com/office/drawing/2014/main" id="{5997947A-567D-4E3F-ACF1-17C5284D718F}"/>
               </a:ext>
             </a:extLst>
           </p:cNvPr>
@@ -17751,7 +18095,7 @@
           <p:nvPr/>
         </p:nvPicPr>
         <p:blipFill>
-          <a:blip xmlns:r="http://schemas.openxmlformats.org/officeDocument/2006/relationships" xmlns:a="http://schemas.openxmlformats.org/drawingml/2006/main" r:embed="R97b53706e1834b13"/>
+          <a:blip xmlns:r="http://schemas.openxmlformats.org/officeDocument/2006/relationships" xmlns:a="http://schemas.openxmlformats.org/drawingml/2006/main" r:embed="R93278c7b0fa04a30"/>
           <a:stretch xmlns:a="http://schemas.openxmlformats.org/drawingml/2006/main"/>
         </p:blipFill>
         <p:spPr>
@@ -17769,7 +18113,7 @@
           <p:cNvPr id="8" name="">
             <a:extLst xmlns:a="http://schemas.openxmlformats.org/drawingml/2006/main">
               <a:ext uri="{FF2B5EF4-FFF2-40B4-BE49-F238E27FC236}">
-                <a16:creationId xmlns:a16="http://schemas.microsoft.com/office/drawing/2014/main" id="{8D75DC64-1ABF-44FC-9E7A-475546A8229B}"/>
+                <a16:creationId xmlns:a16="http://schemas.microsoft.com/office/drawing/2014/main" id="{133CCB0C-D4E7-4B0A-9257-DD21ED6443C0}"/>
               </a:ext>
             </a:extLst>
           </p:cNvPr>
@@ -17927,7 +18271,7 @@
           <p:cNvPr id="9" name="">
             <a:extLst xmlns:a="http://schemas.openxmlformats.org/drawingml/2006/main">
               <a:ext uri="{FF2B5EF4-FFF2-40B4-BE49-F238E27FC236}">
-                <a16:creationId xmlns:a16="http://schemas.microsoft.com/office/drawing/2014/main" id="{3E4FE19C-5E5C-45E3-A2E9-A2D236199938}"/>
+                <a16:creationId xmlns:a16="http://schemas.microsoft.com/office/drawing/2014/main" id="{9E2D51C7-5120-4C3A-8A59-C6F30DEFF753}"/>
               </a:ext>
             </a:extLst>
           </p:cNvPr>
@@ -18085,7 +18429,7 @@
           <p:cNvPr id="10" name="">
             <a:extLst xmlns:a="http://schemas.openxmlformats.org/drawingml/2006/main">
               <a:ext uri="{FF2B5EF4-FFF2-40B4-BE49-F238E27FC236}">
-                <a16:creationId xmlns:a16="http://schemas.microsoft.com/office/drawing/2014/main" id="{92202CE9-DC6B-4B02-AB9C-67B98C619EEF}"/>
+                <a16:creationId xmlns:a16="http://schemas.microsoft.com/office/drawing/2014/main" id="{23770ACC-181B-4A4B-ADDD-EDF00A06CE97}"/>
               </a:ext>
             </a:extLst>
           </p:cNvPr>
@@ -18271,7 +18615,7 @@
           <p:cNvPr id="11" name="">
             <a:extLst xmlns:a="http://schemas.openxmlformats.org/drawingml/2006/main">
               <a:ext uri="{FF2B5EF4-FFF2-40B4-BE49-F238E27FC236}">
-                <a16:creationId xmlns:a16="http://schemas.microsoft.com/office/drawing/2014/main" id="{CF25D554-A871-4F51-BF11-61CC71767F3B}"/>
+                <a16:creationId xmlns:a16="http://schemas.microsoft.com/office/drawing/2014/main" id="{F9721D05-D763-4A37-B6AE-5DD8007C8846}"/>
               </a:ext>
             </a:extLst>
           </p:cNvPr>
@@ -18429,7 +18773,7 @@
           <p:cNvPr id="12" name="">
             <a:extLst xmlns:a="http://schemas.openxmlformats.org/drawingml/2006/main">
               <a:ext uri="{FF2B5EF4-FFF2-40B4-BE49-F238E27FC236}">
-                <a16:creationId xmlns:a16="http://schemas.microsoft.com/office/drawing/2014/main" id="{67F42C7C-B7FF-4BB5-B56E-9F34CE7DDF75}"/>
+                <a16:creationId xmlns:a16="http://schemas.microsoft.com/office/drawing/2014/main" id="{58D1B518-C1E8-44E5-BDDE-869E3C95CD36}"/>
               </a:ext>
             </a:extLst>
           </p:cNvPr>
@@ -18585,7 +18929,7 @@
     </p:spTree>
     <p:extLst>
       <p:ext uri="{BB962C8B-B14F-4D97-AF65-F5344CB8AC3E}">
-        <p14:creationId xmlns:p14="http://schemas.microsoft.com/office/powerpoint/2010/main" val="1196811467"/>
+        <p14:creationId xmlns:p14="http://schemas.microsoft.com/office/powerpoint/2010/main" val="180938520"/>
       </p:ext>
     </p:extLst>
   </p:cSld>
@@ -18616,7 +18960,7 @@
           <p:cNvPr id="13" name="">
             <a:extLst xmlns:a="http://schemas.openxmlformats.org/drawingml/2006/main">
               <a:ext uri="{FF2B5EF4-FFF2-40B4-BE49-F238E27FC236}">
-                <a16:creationId xmlns:a16="http://schemas.microsoft.com/office/drawing/2014/main" id="{89996B3C-70D0-4F76-82E4-5149B800EEC7}"/>
+                <a16:creationId xmlns:a16="http://schemas.microsoft.com/office/drawing/2014/main" id="{414D659B-3BE7-4C2A-B5B7-7C155E6D1FD1}"/>
               </a:ext>
             </a:extLst>
           </p:cNvPr>
@@ -18774,7 +19118,7 @@
           <p:cNvPr id="2" name="">
             <a:extLst xmlns:a="http://schemas.openxmlformats.org/drawingml/2006/main">
               <a:ext uri="{FF2B5EF4-FFF2-40B4-BE49-F238E27FC236}">
-                <a16:creationId xmlns:a16="http://schemas.microsoft.com/office/drawing/2014/main" id="{D41E9E27-4A09-4612-AF55-3487731585CE}"/>
+                <a16:creationId xmlns:a16="http://schemas.microsoft.com/office/drawing/2014/main" id="{7F26D2E6-A8D9-4A95-B7D4-0AFBF233C637}"/>
               </a:ext>
             </a:extLst>
           </p:cNvPr>
@@ -18932,7 +19276,7 @@
           <p:cNvPr id="3" name="">
             <a:extLst xmlns:a="http://schemas.openxmlformats.org/drawingml/2006/main">
               <a:ext uri="{FF2B5EF4-FFF2-40B4-BE49-F238E27FC236}">
-                <a16:creationId xmlns:a16="http://schemas.microsoft.com/office/drawing/2014/main" id="{443F643A-773A-4C45-8100-18C0D9951234}"/>
+                <a16:creationId xmlns:a16="http://schemas.microsoft.com/office/drawing/2014/main" id="{A7C12207-5972-4AEF-A6B2-F16508C41100}"/>
               </a:ext>
             </a:extLst>
           </p:cNvPr>
@@ -19090,7 +19434,7 @@
           <p:cNvPr id="4" name="">
             <a:extLst xmlns:a="http://schemas.openxmlformats.org/drawingml/2006/main">
               <a:ext uri="{FF2B5EF4-FFF2-40B4-BE49-F238E27FC236}">
-                <a16:creationId xmlns:a16="http://schemas.microsoft.com/office/drawing/2014/main" id="{D7924EB1-3EDB-45D7-BB44-07375F9C6F40}"/>
+                <a16:creationId xmlns:a16="http://schemas.microsoft.com/office/drawing/2014/main" id="{C9E82187-DB2A-481A-9AAB-F7CA513B82E7}"/>
               </a:ext>
             </a:extLst>
           </p:cNvPr>
@@ -19100,7 +19444,7 @@
           <p:nvPr/>
         </p:nvPicPr>
         <p:blipFill>
-          <a:blip xmlns:r="http://schemas.openxmlformats.org/officeDocument/2006/relationships" xmlns:a="http://schemas.openxmlformats.org/drawingml/2006/main" r:embed="Rc2caae34f12244b1"/>
+          <a:blip xmlns:r="http://schemas.openxmlformats.org/officeDocument/2006/relationships" xmlns:a="http://schemas.openxmlformats.org/drawingml/2006/main" r:embed="R01b1d6a2929b4a02"/>
           <a:stretch xmlns:a="http://schemas.openxmlformats.org/drawingml/2006/main"/>
         </p:blipFill>
         <p:spPr>
@@ -19118,7 +19462,7 @@
           <p:cNvPr id="5" name="">
             <a:extLst xmlns:a="http://schemas.openxmlformats.org/drawingml/2006/main">
               <a:ext uri="{FF2B5EF4-FFF2-40B4-BE49-F238E27FC236}">
-                <a16:creationId xmlns:a16="http://schemas.microsoft.com/office/drawing/2014/main" id="{77931CEB-EEE3-426E-80D0-82B467D098EA}"/>
+                <a16:creationId xmlns:a16="http://schemas.microsoft.com/office/drawing/2014/main" id="{89A153F2-18A6-4F99-BC1A-1BCC5BD148D7}"/>
               </a:ext>
             </a:extLst>
           </p:cNvPr>
@@ -19276,7 +19620,7 @@
           <p:cNvPr id="6" name="">
             <a:extLst xmlns:a="http://schemas.openxmlformats.org/drawingml/2006/main">
               <a:ext uri="{FF2B5EF4-FFF2-40B4-BE49-F238E27FC236}">
-                <a16:creationId xmlns:a16="http://schemas.microsoft.com/office/drawing/2014/main" id="{6423375F-D577-4A04-BABC-CC7CDEF3CC7C}"/>
+                <a16:creationId xmlns:a16="http://schemas.microsoft.com/office/drawing/2014/main" id="{E93D0954-CD62-4584-B2A7-B090DC5B62BD}"/>
               </a:ext>
             </a:extLst>
           </p:cNvPr>
@@ -19434,7 +19778,7 @@
           <p:cNvPr id="7" name="">
             <a:extLst xmlns:a="http://schemas.openxmlformats.org/drawingml/2006/main">
               <a:ext uri="{FF2B5EF4-FFF2-40B4-BE49-F238E27FC236}">
-                <a16:creationId xmlns:a16="http://schemas.microsoft.com/office/drawing/2014/main" id="{E6C296A1-2F67-4408-84AF-6ECF0E39C109}"/>
+                <a16:creationId xmlns:a16="http://schemas.microsoft.com/office/drawing/2014/main" id="{4327BE45-2431-4127-8CB4-6DE02AC04044}"/>
               </a:ext>
             </a:extLst>
           </p:cNvPr>
@@ -19444,7 +19788,7 @@
           <p:nvPr/>
         </p:nvPicPr>
         <p:blipFill>
-          <a:blip xmlns:r="http://schemas.openxmlformats.org/officeDocument/2006/relationships" xmlns:a="http://schemas.openxmlformats.org/drawingml/2006/main" r:embed="Rc7962c77ffc448c8"/>
+          <a:blip xmlns:r="http://schemas.openxmlformats.org/officeDocument/2006/relationships" xmlns:a="http://schemas.openxmlformats.org/drawingml/2006/main" r:embed="R41f4d9e2c2034ae3"/>
           <a:stretch xmlns:a="http://schemas.openxmlformats.org/drawingml/2006/main"/>
         </p:blipFill>
         <p:spPr>
@@ -19462,7 +19806,7 @@
           <p:cNvPr id="8" name="">
             <a:extLst xmlns:a="http://schemas.openxmlformats.org/drawingml/2006/main">
               <a:ext uri="{FF2B5EF4-FFF2-40B4-BE49-F238E27FC236}">
-                <a16:creationId xmlns:a16="http://schemas.microsoft.com/office/drawing/2014/main" id="{45A6C748-CCB2-4609-A7A9-0F8A013898FF}"/>
+                <a16:creationId xmlns:a16="http://schemas.microsoft.com/office/drawing/2014/main" id="{FA735C1B-B9FF-4392-97F2-5E00ED266C4B}"/>
               </a:ext>
             </a:extLst>
           </p:cNvPr>
@@ -19620,7 +19964,7 @@
           <p:cNvPr id="9" name="">
             <a:extLst xmlns:a="http://schemas.openxmlformats.org/drawingml/2006/main">
               <a:ext uri="{FF2B5EF4-FFF2-40B4-BE49-F238E27FC236}">
-                <a16:creationId xmlns:a16="http://schemas.microsoft.com/office/drawing/2014/main" id="{973722F7-77F9-4DE5-9889-692011C02ABC}"/>
+                <a16:creationId xmlns:a16="http://schemas.microsoft.com/office/drawing/2014/main" id="{5DA7A37C-3D9B-4AEA-853D-DA0D55A609AE}"/>
               </a:ext>
             </a:extLst>
           </p:cNvPr>
@@ -19778,7 +20122,7 @@
           <p:cNvPr id="10" name="">
             <a:extLst xmlns:a="http://schemas.openxmlformats.org/drawingml/2006/main">
               <a:ext uri="{FF2B5EF4-FFF2-40B4-BE49-F238E27FC236}">
-                <a16:creationId xmlns:a16="http://schemas.microsoft.com/office/drawing/2014/main" id="{572FF1CD-9060-480C-BBB2-EA59EE2A3760}"/>
+                <a16:creationId xmlns:a16="http://schemas.microsoft.com/office/drawing/2014/main" id="{8BC588F7-78B8-4ABC-8213-B4B7DE95AFB1}"/>
               </a:ext>
             </a:extLst>
           </p:cNvPr>
@@ -19964,7 +20308,7 @@
           <p:cNvPr id="11" name="">
             <a:extLst xmlns:a="http://schemas.openxmlformats.org/drawingml/2006/main">
               <a:ext uri="{FF2B5EF4-FFF2-40B4-BE49-F238E27FC236}">
-                <a16:creationId xmlns:a16="http://schemas.microsoft.com/office/drawing/2014/main" id="{1675BF57-2EC1-4011-B467-6409721035D5}"/>
+                <a16:creationId xmlns:a16="http://schemas.microsoft.com/office/drawing/2014/main" id="{8F315425-875C-45D2-BD13-72824F356D85}"/>
               </a:ext>
             </a:extLst>
           </p:cNvPr>
@@ -20122,7 +20466,7 @@
           <p:cNvPr id="12" name="">
             <a:extLst xmlns:a="http://schemas.openxmlformats.org/drawingml/2006/main">
               <a:ext uri="{FF2B5EF4-FFF2-40B4-BE49-F238E27FC236}">
-                <a16:creationId xmlns:a16="http://schemas.microsoft.com/office/drawing/2014/main" id="{E79AAF55-8398-403D-8C1A-50C1BC269AA0}"/>
+                <a16:creationId xmlns:a16="http://schemas.microsoft.com/office/drawing/2014/main" id="{7FE06024-179A-495A-B900-509322DCD65B}"/>
               </a:ext>
             </a:extLst>
           </p:cNvPr>
@@ -20278,7 +20622,7 @@
     </p:spTree>
     <p:extLst>
       <p:ext uri="{BB962C8B-B14F-4D97-AF65-F5344CB8AC3E}">
-        <p14:creationId xmlns:p14="http://schemas.microsoft.com/office/powerpoint/2010/main" val="1851701597"/>
+        <p14:creationId xmlns:p14="http://schemas.microsoft.com/office/powerpoint/2010/main" val="1575964576"/>
       </p:ext>
     </p:extLst>
   </p:cSld>
@@ -20309,7 +20653,7 @@
           <p:cNvPr id="14" name="">
             <a:extLst xmlns:a="http://schemas.openxmlformats.org/drawingml/2006/main">
               <a:ext uri="{FF2B5EF4-FFF2-40B4-BE49-F238E27FC236}">
-                <a16:creationId xmlns:a16="http://schemas.microsoft.com/office/drawing/2014/main" id="{6AB5BE40-F74C-48C8-9E70-1F6E9B764F90}"/>
+                <a16:creationId xmlns:a16="http://schemas.microsoft.com/office/drawing/2014/main" id="{B7E0D47F-F1EC-41D6-8B74-EB42B8C6D91B}"/>
               </a:ext>
             </a:extLst>
           </p:cNvPr>
@@ -20467,7 +20811,7 @@
           <p:cNvPr id="2" name="">
             <a:extLst xmlns:a="http://schemas.openxmlformats.org/drawingml/2006/main">
               <a:ext uri="{FF2B5EF4-FFF2-40B4-BE49-F238E27FC236}">
-                <a16:creationId xmlns:a16="http://schemas.microsoft.com/office/drawing/2014/main" id="{9C485713-729C-4E7C-B730-5654E91B4211}"/>
+                <a16:creationId xmlns:a16="http://schemas.microsoft.com/office/drawing/2014/main" id="{94CEF824-33D9-4B9B-92C2-21884F08A035}"/>
               </a:ext>
             </a:extLst>
           </p:cNvPr>
@@ -20625,7 +20969,7 @@
           <p:cNvPr id="3" name="">
             <a:extLst xmlns:a="http://schemas.openxmlformats.org/drawingml/2006/main">
               <a:ext uri="{FF2B5EF4-FFF2-40B4-BE49-F238E27FC236}">
-                <a16:creationId xmlns:a16="http://schemas.microsoft.com/office/drawing/2014/main" id="{84729002-4F5B-4057-B83D-B7D055971D04}"/>
+                <a16:creationId xmlns:a16="http://schemas.microsoft.com/office/drawing/2014/main" id="{F34D98F9-1832-4BEE-B1A4-44684D25D295}"/>
               </a:ext>
             </a:extLst>
           </p:cNvPr>
@@ -20783,7 +21127,7 @@
           <p:cNvPr id="4" name="">
             <a:extLst xmlns:a="http://schemas.openxmlformats.org/drawingml/2006/main">
               <a:ext uri="{FF2B5EF4-FFF2-40B4-BE49-F238E27FC236}">
-                <a16:creationId xmlns:a16="http://schemas.microsoft.com/office/drawing/2014/main" id="{3F96B6FE-7D58-4FFC-8BC9-B3BFF8546127}"/>
+                <a16:creationId xmlns:a16="http://schemas.microsoft.com/office/drawing/2014/main" id="{92B32510-EDC7-4CC0-AE81-14A64A4C1163}"/>
               </a:ext>
             </a:extLst>
           </p:cNvPr>
@@ -20793,7 +21137,7 @@
           <p:nvPr/>
         </p:nvPicPr>
         <p:blipFill>
-          <a:blip xmlns:r="http://schemas.openxmlformats.org/officeDocument/2006/relationships" xmlns:a="http://schemas.openxmlformats.org/drawingml/2006/main" r:embed="Rb89f1209bbc54b7d"/>
+          <a:blip xmlns:r="http://schemas.openxmlformats.org/officeDocument/2006/relationships" xmlns:a="http://schemas.openxmlformats.org/drawingml/2006/main" r:embed="R1622c0210c40447f"/>
           <a:stretch xmlns:a="http://schemas.openxmlformats.org/drawingml/2006/main"/>
         </p:blipFill>
         <p:spPr>
@@ -20811,7 +21155,7 @@
           <p:cNvPr id="5" name="">
             <a:extLst xmlns:a="http://schemas.openxmlformats.org/drawingml/2006/main">
               <a:ext uri="{FF2B5EF4-FFF2-40B4-BE49-F238E27FC236}">
-                <a16:creationId xmlns:a16="http://schemas.microsoft.com/office/drawing/2014/main" id="{4D8C6B44-E9E0-4D6E-9A5F-7210F899827E}"/>
+                <a16:creationId xmlns:a16="http://schemas.microsoft.com/office/drawing/2014/main" id="{9D40182B-D962-42F8-A78B-8086D453C827}"/>
               </a:ext>
             </a:extLst>
           </p:cNvPr>
@@ -20969,7 +21313,7 @@
           <p:cNvPr id="6" name="">
             <a:extLst xmlns:a="http://schemas.openxmlformats.org/drawingml/2006/main">
               <a:ext uri="{FF2B5EF4-FFF2-40B4-BE49-F238E27FC236}">
-                <a16:creationId xmlns:a16="http://schemas.microsoft.com/office/drawing/2014/main" id="{3343FFB5-63A4-4B54-B3A8-5792783F8DDA}"/>
+                <a16:creationId xmlns:a16="http://schemas.microsoft.com/office/drawing/2014/main" id="{E78C7804-EF3D-4DF4-B10C-D36336632ED7}"/>
               </a:ext>
             </a:extLst>
           </p:cNvPr>
@@ -21127,7 +21471,7 @@
           <p:cNvPr id="7" name="">
             <a:extLst xmlns:a="http://schemas.openxmlformats.org/drawingml/2006/main">
               <a:ext uri="{FF2B5EF4-FFF2-40B4-BE49-F238E27FC236}">
-                <a16:creationId xmlns:a16="http://schemas.microsoft.com/office/drawing/2014/main" id="{DBF7E3EB-E9C9-41F0-9D80-16FC7CDC94EF}"/>
+                <a16:creationId xmlns:a16="http://schemas.microsoft.com/office/drawing/2014/main" id="{BA39B946-EAA6-497D-A043-13371F6A0987}"/>
               </a:ext>
             </a:extLst>
           </p:cNvPr>
@@ -21137,7 +21481,7 @@
           <p:nvPr/>
         </p:nvPicPr>
         <p:blipFill>
-          <a:blip xmlns:r="http://schemas.openxmlformats.org/officeDocument/2006/relationships" xmlns:a="http://schemas.openxmlformats.org/drawingml/2006/main" r:embed="R42246fec17b04759"/>
+          <a:blip xmlns:r="http://schemas.openxmlformats.org/officeDocument/2006/relationships" xmlns:a="http://schemas.openxmlformats.org/drawingml/2006/main" r:embed="R3284f576faee4062"/>
           <a:stretch xmlns:a="http://schemas.openxmlformats.org/drawingml/2006/main"/>
         </p:blipFill>
         <p:spPr>
@@ -21155,7 +21499,7 @@
           <p:cNvPr id="8" name="">
             <a:extLst xmlns:a="http://schemas.openxmlformats.org/drawingml/2006/main">
               <a:ext uri="{FF2B5EF4-FFF2-40B4-BE49-F238E27FC236}">
-                <a16:creationId xmlns:a16="http://schemas.microsoft.com/office/drawing/2014/main" id="{1DAC46ED-CE6A-41D5-9825-6DAC381115AB}"/>
+                <a16:creationId xmlns:a16="http://schemas.microsoft.com/office/drawing/2014/main" id="{0017D27D-64E9-4302-9D96-84C35D70AC61}"/>
               </a:ext>
             </a:extLst>
           </p:cNvPr>
@@ -21313,7 +21657,7 @@
           <p:cNvPr id="9" name="">
             <a:extLst xmlns:a="http://schemas.openxmlformats.org/drawingml/2006/main">
               <a:ext uri="{FF2B5EF4-FFF2-40B4-BE49-F238E27FC236}">
-                <a16:creationId xmlns:a16="http://schemas.microsoft.com/office/drawing/2014/main" id="{0660C224-964C-4945-B162-452B4ADAFE39}"/>
+                <a16:creationId xmlns:a16="http://schemas.microsoft.com/office/drawing/2014/main" id="{BA1A0399-C1BA-4D96-B7B0-1C4404A96ACD}"/>
               </a:ext>
             </a:extLst>
           </p:cNvPr>
@@ -21471,7 +21815,7 @@
           <p:cNvPr id="10" name="">
             <a:extLst xmlns:a="http://schemas.openxmlformats.org/drawingml/2006/main">
               <a:ext uri="{FF2B5EF4-FFF2-40B4-BE49-F238E27FC236}">
-                <a16:creationId xmlns:a16="http://schemas.microsoft.com/office/drawing/2014/main" id="{1463C3E3-F245-4C5F-A30B-5DF5E5396F50}"/>
+                <a16:creationId xmlns:a16="http://schemas.microsoft.com/office/drawing/2014/main" id="{8D8B2FBE-AB88-4F35-895A-9DAD05CF4116}"/>
               </a:ext>
             </a:extLst>
           </p:cNvPr>
@@ -21481,7 +21825,7 @@
           <p:nvPr/>
         </p:nvPicPr>
         <p:blipFill>
-          <a:blip xmlns:r="http://schemas.openxmlformats.org/officeDocument/2006/relationships" xmlns:a="http://schemas.openxmlformats.org/drawingml/2006/main" r:embed="Rc04f514a6f3c4a49"/>
+          <a:blip xmlns:r="http://schemas.openxmlformats.org/officeDocument/2006/relationships" xmlns:a="http://schemas.openxmlformats.org/drawingml/2006/main" r:embed="Rfcb028e1ba334eae"/>
           <a:stretch xmlns:a="http://schemas.openxmlformats.org/drawingml/2006/main"/>
         </p:blipFill>
         <p:spPr>
@@ -21499,7 +21843,7 @@
           <p:cNvPr id="11" name="">
             <a:extLst xmlns:a="http://schemas.openxmlformats.org/drawingml/2006/main">
               <a:ext uri="{FF2B5EF4-FFF2-40B4-BE49-F238E27FC236}">
-                <a16:creationId xmlns:a16="http://schemas.microsoft.com/office/drawing/2014/main" id="{24D87A34-46FE-4628-B5CF-FB80342404AC}"/>
+                <a16:creationId xmlns:a16="http://schemas.microsoft.com/office/drawing/2014/main" id="{BC19CF98-5995-44FE-B251-D6872DF989FA}"/>
               </a:ext>
             </a:extLst>
           </p:cNvPr>
@@ -21657,7 +22001,7 @@
           <p:cNvPr id="12" name="">
             <a:extLst xmlns:a="http://schemas.openxmlformats.org/drawingml/2006/main">
               <a:ext uri="{FF2B5EF4-FFF2-40B4-BE49-F238E27FC236}">
-                <a16:creationId xmlns:a16="http://schemas.microsoft.com/office/drawing/2014/main" id="{43A95E57-782A-4B6A-AFE9-C5AE7C48AEE3}"/>
+                <a16:creationId xmlns:a16="http://schemas.microsoft.com/office/drawing/2014/main" id="{665E202F-7E77-42F8-976F-1BA1BE201F8E}"/>
               </a:ext>
             </a:extLst>
           </p:cNvPr>
@@ -21815,7 +22159,7 @@
           <p:cNvPr id="13" name="">
             <a:extLst xmlns:a="http://schemas.openxmlformats.org/drawingml/2006/main">
               <a:ext uri="{FF2B5EF4-FFF2-40B4-BE49-F238E27FC236}">
-                <a16:creationId xmlns:a16="http://schemas.microsoft.com/office/drawing/2014/main" id="{11B354B3-838A-44DF-A14B-E408768DA7A6}"/>
+                <a16:creationId xmlns:a16="http://schemas.microsoft.com/office/drawing/2014/main" id="{AFD9CF5A-B5A0-477C-9F51-FC80D188A322}"/>
               </a:ext>
             </a:extLst>
           </p:cNvPr>
@@ -21999,7 +22343,7 @@
     </p:spTree>
     <p:extLst>
       <p:ext uri="{BB962C8B-B14F-4D97-AF65-F5344CB8AC3E}">
-        <p14:creationId xmlns:p14="http://schemas.microsoft.com/office/powerpoint/2010/main" val="649623959"/>
+        <p14:creationId xmlns:p14="http://schemas.microsoft.com/office/powerpoint/2010/main" val="3979251"/>
       </p:ext>
     </p:extLst>
   </p:cSld>
@@ -22030,7 +22374,7 @@
           <p:cNvPr id="14" name="">
             <a:extLst xmlns:a="http://schemas.openxmlformats.org/drawingml/2006/main">
               <a:ext uri="{FF2B5EF4-FFF2-40B4-BE49-F238E27FC236}">
-                <a16:creationId xmlns:a16="http://schemas.microsoft.com/office/drawing/2014/main" id="{1F6442DF-7B24-4694-8CFF-7C6021D8329C}"/>
+                <a16:creationId xmlns:a16="http://schemas.microsoft.com/office/drawing/2014/main" id="{8016DCDB-F6DF-499D-9B25-0B61B369C177}"/>
               </a:ext>
             </a:extLst>
           </p:cNvPr>
@@ -22188,7 +22532,7 @@
           <p:cNvPr id="2" name="">
             <a:extLst xmlns:a="http://schemas.openxmlformats.org/drawingml/2006/main">
               <a:ext uri="{FF2B5EF4-FFF2-40B4-BE49-F238E27FC236}">
-                <a16:creationId xmlns:a16="http://schemas.microsoft.com/office/drawing/2014/main" id="{D8712F61-E1A9-481F-B161-93C79391FFEF}"/>
+                <a16:creationId xmlns:a16="http://schemas.microsoft.com/office/drawing/2014/main" id="{627B8000-72C3-4707-9D8F-F16C3A9F6211}"/>
               </a:ext>
             </a:extLst>
           </p:cNvPr>
@@ -22346,7 +22690,7 @@
           <p:cNvPr id="3" name="">
             <a:extLst xmlns:a="http://schemas.openxmlformats.org/drawingml/2006/main">
               <a:ext uri="{FF2B5EF4-FFF2-40B4-BE49-F238E27FC236}">
-                <a16:creationId xmlns:a16="http://schemas.microsoft.com/office/drawing/2014/main" id="{7619BC1C-39AF-458A-A913-441F73431D1D}"/>
+                <a16:creationId xmlns:a16="http://schemas.microsoft.com/office/drawing/2014/main" id="{0682EE01-C43A-460D-A337-93C066D2BDE1}"/>
               </a:ext>
             </a:extLst>
           </p:cNvPr>
@@ -22504,7 +22848,7 @@
           <p:cNvPr id="4" name="">
             <a:extLst xmlns:a="http://schemas.openxmlformats.org/drawingml/2006/main">
               <a:ext uri="{FF2B5EF4-FFF2-40B4-BE49-F238E27FC236}">
-                <a16:creationId xmlns:a16="http://schemas.microsoft.com/office/drawing/2014/main" id="{60B2A061-558C-469C-9618-1A2356654F5A}"/>
+                <a16:creationId xmlns:a16="http://schemas.microsoft.com/office/drawing/2014/main" id="{5275C64B-F553-494F-AFAE-75B19DE654A1}"/>
               </a:ext>
             </a:extLst>
           </p:cNvPr>
@@ -22514,7 +22858,7 @@
           <p:nvPr/>
         </p:nvPicPr>
         <p:blipFill>
-          <a:blip xmlns:r="http://schemas.openxmlformats.org/officeDocument/2006/relationships" xmlns:a="http://schemas.openxmlformats.org/drawingml/2006/main" r:embed="Re9979cd09bd841a1"/>
+          <a:blip xmlns:r="http://schemas.openxmlformats.org/officeDocument/2006/relationships" xmlns:a="http://schemas.openxmlformats.org/drawingml/2006/main" r:embed="Rfc082bd455cb4995"/>
           <a:stretch xmlns:a="http://schemas.openxmlformats.org/drawingml/2006/main"/>
         </p:blipFill>
         <p:spPr>
@@ -22532,7 +22876,7 @@
           <p:cNvPr id="5" name="">
             <a:extLst xmlns:a="http://schemas.openxmlformats.org/drawingml/2006/main">
               <a:ext uri="{FF2B5EF4-FFF2-40B4-BE49-F238E27FC236}">
-                <a16:creationId xmlns:a16="http://schemas.microsoft.com/office/drawing/2014/main" id="{70FEBEA2-DD5A-4A8F-8FDB-F4350AEE64A7}"/>
+                <a16:creationId xmlns:a16="http://schemas.microsoft.com/office/drawing/2014/main" id="{A4A01892-A952-435E-966C-FCAFFC53358D}"/>
               </a:ext>
             </a:extLst>
           </p:cNvPr>
@@ -22690,7 +23034,7 @@
           <p:cNvPr id="6" name="">
             <a:extLst xmlns:a="http://schemas.openxmlformats.org/drawingml/2006/main">
               <a:ext uri="{FF2B5EF4-FFF2-40B4-BE49-F238E27FC236}">
-                <a16:creationId xmlns:a16="http://schemas.microsoft.com/office/drawing/2014/main" id="{519BCEB2-4829-4A90-AFDC-E5111719D77B}"/>
+                <a16:creationId xmlns:a16="http://schemas.microsoft.com/office/drawing/2014/main" id="{2F2349A6-C52F-4204-A2EF-9CF65FE0A241}"/>
               </a:ext>
             </a:extLst>
           </p:cNvPr>
@@ -22848,7 +23192,7 @@
           <p:cNvPr id="7" name="">
             <a:extLst xmlns:a="http://schemas.openxmlformats.org/drawingml/2006/main">
               <a:ext uri="{FF2B5EF4-FFF2-40B4-BE49-F238E27FC236}">
-                <a16:creationId xmlns:a16="http://schemas.microsoft.com/office/drawing/2014/main" id="{1F05A6E0-C1A5-4E12-B95A-55D15F6580E7}"/>
+                <a16:creationId xmlns:a16="http://schemas.microsoft.com/office/drawing/2014/main" id="{F045B895-2624-4517-A205-1D5D9E224DAF}"/>
               </a:ext>
             </a:extLst>
           </p:cNvPr>
@@ -22858,7 +23202,7 @@
           <p:nvPr/>
         </p:nvPicPr>
         <p:blipFill>
-          <a:blip xmlns:r="http://schemas.openxmlformats.org/officeDocument/2006/relationships" xmlns:a="http://schemas.openxmlformats.org/drawingml/2006/main" r:embed="Rc78de3a64e584f27"/>
+          <a:blip xmlns:r="http://schemas.openxmlformats.org/officeDocument/2006/relationships" xmlns:a="http://schemas.openxmlformats.org/drawingml/2006/main" r:embed="Re77712f8e9af4480"/>
           <a:stretch xmlns:a="http://schemas.openxmlformats.org/drawingml/2006/main"/>
         </p:blipFill>
         <p:spPr>
@@ -22876,7 +23220,7 @@
           <p:cNvPr id="8" name="">
             <a:extLst xmlns:a="http://schemas.openxmlformats.org/drawingml/2006/main">
               <a:ext uri="{FF2B5EF4-FFF2-40B4-BE49-F238E27FC236}">
-                <a16:creationId xmlns:a16="http://schemas.microsoft.com/office/drawing/2014/main" id="{4E450226-414D-493E-A375-735E7B97B568}"/>
+                <a16:creationId xmlns:a16="http://schemas.microsoft.com/office/drawing/2014/main" id="{FDDD8B89-E41A-4B45-BFA5-290206D79C71}"/>
               </a:ext>
             </a:extLst>
           </p:cNvPr>
@@ -23034,7 +23378,7 @@
           <p:cNvPr id="9" name="">
             <a:extLst xmlns:a="http://schemas.openxmlformats.org/drawingml/2006/main">
               <a:ext uri="{FF2B5EF4-FFF2-40B4-BE49-F238E27FC236}">
-                <a16:creationId xmlns:a16="http://schemas.microsoft.com/office/drawing/2014/main" id="{E4278C0E-BCCD-4CA5-A7F8-1D45B58D584D}"/>
+                <a16:creationId xmlns:a16="http://schemas.microsoft.com/office/drawing/2014/main" id="{756340B0-2305-4EBA-96D9-E558732E9D8F}"/>
               </a:ext>
             </a:extLst>
           </p:cNvPr>
@@ -23192,7 +23536,7 @@
           <p:cNvPr id="10" name="">
             <a:extLst xmlns:a="http://schemas.openxmlformats.org/drawingml/2006/main">
               <a:ext uri="{FF2B5EF4-FFF2-40B4-BE49-F238E27FC236}">
-                <a16:creationId xmlns:a16="http://schemas.microsoft.com/office/drawing/2014/main" id="{CFFA0ACC-944E-4D36-BB21-0D28B35DC9C6}"/>
+                <a16:creationId xmlns:a16="http://schemas.microsoft.com/office/drawing/2014/main" id="{122E2E31-D16E-4745-A22B-E70273D56285}"/>
               </a:ext>
             </a:extLst>
           </p:cNvPr>
@@ -23373,7 +23717,7 @@
           <p:cNvPr id="11" name="">
             <a:extLst xmlns:a="http://schemas.openxmlformats.org/drawingml/2006/main">
               <a:ext uri="{FF2B5EF4-FFF2-40B4-BE49-F238E27FC236}">
-                <a16:creationId xmlns:a16="http://schemas.microsoft.com/office/drawing/2014/main" id="{C8BD3872-9D62-46C8-8E98-69D220225A1A}"/>
+                <a16:creationId xmlns:a16="http://schemas.microsoft.com/office/drawing/2014/main" id="{2643D501-9297-4153-8E69-5F7F45EF6949}"/>
               </a:ext>
             </a:extLst>
           </p:cNvPr>
@@ -23531,7 +23875,7 @@
           <p:cNvPr id="12" name="">
             <a:extLst xmlns:a="http://schemas.openxmlformats.org/drawingml/2006/main">
               <a:ext uri="{FF2B5EF4-FFF2-40B4-BE49-F238E27FC236}">
-                <a16:creationId xmlns:a16="http://schemas.microsoft.com/office/drawing/2014/main" id="{55978CFD-F508-406F-ADD5-E62B2BF9B8DF}"/>
+                <a16:creationId xmlns:a16="http://schemas.microsoft.com/office/drawing/2014/main" id="{384D16CD-ADE2-4B31-90C7-D5988204FBDF}"/>
               </a:ext>
             </a:extLst>
           </p:cNvPr>
@@ -23735,7 +24079,7 @@
           <p:cNvPr id="13" name="">
             <a:extLst xmlns:a="http://schemas.openxmlformats.org/drawingml/2006/main">
               <a:ext uri="{FF2B5EF4-FFF2-40B4-BE49-F238E27FC236}">
-                <a16:creationId xmlns:a16="http://schemas.microsoft.com/office/drawing/2014/main" id="{B6B10216-0424-4F72-B96A-ADB8A8FDF8A7}"/>
+                <a16:creationId xmlns:a16="http://schemas.microsoft.com/office/drawing/2014/main" id="{1F5998EE-857C-44C7-8A20-25B35A3E0721}"/>
               </a:ext>
             </a:extLst>
           </p:cNvPr>
@@ -23891,7 +24235,7 @@
     </p:spTree>
     <p:extLst>
       <p:ext uri="{BB962C8B-B14F-4D97-AF65-F5344CB8AC3E}">
-        <p14:creationId xmlns:p14="http://schemas.microsoft.com/office/powerpoint/2010/main" val="748277984"/>
+        <p14:creationId xmlns:p14="http://schemas.microsoft.com/office/powerpoint/2010/main" val="1163149145"/>
       </p:ext>
     </p:extLst>
   </p:cSld>
@@ -23922,7 +24266,7 @@
           <p:cNvPr id="13" name="">
             <a:extLst xmlns:a="http://schemas.openxmlformats.org/drawingml/2006/main">
               <a:ext uri="{FF2B5EF4-FFF2-40B4-BE49-F238E27FC236}">
-                <a16:creationId xmlns:a16="http://schemas.microsoft.com/office/drawing/2014/main" id="{E45FE8C6-4776-4A3D-A9B9-3C60D51E87BA}"/>
+                <a16:creationId xmlns:a16="http://schemas.microsoft.com/office/drawing/2014/main" id="{B2CDC65F-7ACA-4011-9F05-290ACD8C902D}"/>
               </a:ext>
             </a:extLst>
           </p:cNvPr>
@@ -24080,7 +24424,7 @@
           <p:cNvPr id="2" name="">
             <a:extLst xmlns:a="http://schemas.openxmlformats.org/drawingml/2006/main">
               <a:ext uri="{FF2B5EF4-FFF2-40B4-BE49-F238E27FC236}">
-                <a16:creationId xmlns:a16="http://schemas.microsoft.com/office/drawing/2014/main" id="{43EEE813-370A-4DBA-A7F4-3D2A9D7DF7C5}"/>
+                <a16:creationId xmlns:a16="http://schemas.microsoft.com/office/drawing/2014/main" id="{CF8D86F5-3B84-4DA0-BB87-0599F2A35383}"/>
               </a:ext>
             </a:extLst>
           </p:cNvPr>
@@ -24238,7 +24582,7 @@
           <p:cNvPr id="3" name="">
             <a:extLst xmlns:a="http://schemas.openxmlformats.org/drawingml/2006/main">
               <a:ext uri="{FF2B5EF4-FFF2-40B4-BE49-F238E27FC236}">
-                <a16:creationId xmlns:a16="http://schemas.microsoft.com/office/drawing/2014/main" id="{EC9B60DF-FF55-40CA-AB1A-AF52A4919E29}"/>
+                <a16:creationId xmlns:a16="http://schemas.microsoft.com/office/drawing/2014/main" id="{E3F6C1D0-DAC5-456A-84D3-A8F2DB323228}"/>
               </a:ext>
             </a:extLst>
           </p:cNvPr>
@@ -24396,7 +24740,7 @@
           <p:cNvPr id="4" name="">
             <a:extLst xmlns:a="http://schemas.openxmlformats.org/drawingml/2006/main">
               <a:ext uri="{FF2B5EF4-FFF2-40B4-BE49-F238E27FC236}">
-                <a16:creationId xmlns:a16="http://schemas.microsoft.com/office/drawing/2014/main" id="{D64AEA10-2E22-40AF-83F6-12146699736A}"/>
+                <a16:creationId xmlns:a16="http://schemas.microsoft.com/office/drawing/2014/main" id="{88241A2B-A0AB-485D-B5FA-24A403E4F741}"/>
               </a:ext>
             </a:extLst>
           </p:cNvPr>
@@ -24406,7 +24750,7 @@
           <p:nvPr/>
         </p:nvPicPr>
         <p:blipFill>
-          <a:blip xmlns:r="http://schemas.openxmlformats.org/officeDocument/2006/relationships" xmlns:a="http://schemas.openxmlformats.org/drawingml/2006/main" r:embed="R29e9b21fe57747e1"/>
+          <a:blip xmlns:r="http://schemas.openxmlformats.org/officeDocument/2006/relationships" xmlns:a="http://schemas.openxmlformats.org/drawingml/2006/main" r:embed="R3551ed630aa94564"/>
           <a:stretch xmlns:a="http://schemas.openxmlformats.org/drawingml/2006/main"/>
         </p:blipFill>
         <p:spPr>
@@ -24424,7 +24768,7 @@
           <p:cNvPr id="5" name="">
             <a:extLst xmlns:a="http://schemas.openxmlformats.org/drawingml/2006/main">
               <a:ext uri="{FF2B5EF4-FFF2-40B4-BE49-F238E27FC236}">
-                <a16:creationId xmlns:a16="http://schemas.microsoft.com/office/drawing/2014/main" id="{DBC2A461-22A6-4338-BCBD-08AB36C46940}"/>
+                <a16:creationId xmlns:a16="http://schemas.microsoft.com/office/drawing/2014/main" id="{EEB54A54-ED0D-4D8B-BEDB-4EA9D123471A}"/>
               </a:ext>
             </a:extLst>
           </p:cNvPr>
@@ -24582,7 +24926,7 @@
           <p:cNvPr id="6" name="">
             <a:extLst xmlns:a="http://schemas.openxmlformats.org/drawingml/2006/main">
               <a:ext uri="{FF2B5EF4-FFF2-40B4-BE49-F238E27FC236}">
-                <a16:creationId xmlns:a16="http://schemas.microsoft.com/office/drawing/2014/main" id="{4992A790-BB2D-4C72-86AF-36BA7F52FF97}"/>
+                <a16:creationId xmlns:a16="http://schemas.microsoft.com/office/drawing/2014/main" id="{333209B9-1C8F-455F-A85C-F086740A5410}"/>
               </a:ext>
             </a:extLst>
           </p:cNvPr>
@@ -24740,7 +25084,7 @@
           <p:cNvPr id="7" name="">
             <a:extLst xmlns:a="http://schemas.openxmlformats.org/drawingml/2006/main">
               <a:ext uri="{FF2B5EF4-FFF2-40B4-BE49-F238E27FC236}">
-                <a16:creationId xmlns:a16="http://schemas.microsoft.com/office/drawing/2014/main" id="{6D71BD7C-FB59-40D4-AF2D-91DF5ED8E8E6}"/>
+                <a16:creationId xmlns:a16="http://schemas.microsoft.com/office/drawing/2014/main" id="{56092E0C-0C20-4075-BFE9-C3D96D9E8F4E}"/>
               </a:ext>
             </a:extLst>
           </p:cNvPr>
@@ -24750,7 +25094,7 @@
           <p:nvPr/>
         </p:nvPicPr>
         <p:blipFill>
-          <a:blip xmlns:r="http://schemas.openxmlformats.org/officeDocument/2006/relationships" xmlns:a="http://schemas.openxmlformats.org/drawingml/2006/main" r:embed="R2fa2aa3cbe8f4080"/>
+          <a:blip xmlns:r="http://schemas.openxmlformats.org/officeDocument/2006/relationships" xmlns:a="http://schemas.openxmlformats.org/drawingml/2006/main" r:embed="R7d91dd60087a4e57"/>
           <a:stretch xmlns:a="http://schemas.openxmlformats.org/drawingml/2006/main"/>
         </p:blipFill>
         <p:spPr>
@@ -24768,7 +25112,7 @@
           <p:cNvPr id="8" name="">
             <a:extLst xmlns:a="http://schemas.openxmlformats.org/drawingml/2006/main">
               <a:ext uri="{FF2B5EF4-FFF2-40B4-BE49-F238E27FC236}">
-                <a16:creationId xmlns:a16="http://schemas.microsoft.com/office/drawing/2014/main" id="{4E5D3A4B-B4BB-490E-A4F1-614173A542FB}"/>
+                <a16:creationId xmlns:a16="http://schemas.microsoft.com/office/drawing/2014/main" id="{4F5CE6DA-625A-4CD3-BC81-11DEB4815745}"/>
               </a:ext>
             </a:extLst>
           </p:cNvPr>
@@ -24926,7 +25270,7 @@
           <p:cNvPr id="9" name="">
             <a:extLst xmlns:a="http://schemas.openxmlformats.org/drawingml/2006/main">
               <a:ext uri="{FF2B5EF4-FFF2-40B4-BE49-F238E27FC236}">
-                <a16:creationId xmlns:a16="http://schemas.microsoft.com/office/drawing/2014/main" id="{7F52FA5B-FDDD-4A2D-95C5-B862E1126436}"/>
+                <a16:creationId xmlns:a16="http://schemas.microsoft.com/office/drawing/2014/main" id="{BB0A75F7-FC98-4703-8357-CBB0EFB15F40}"/>
               </a:ext>
             </a:extLst>
           </p:cNvPr>
@@ -25084,7 +25428,7 @@
           <p:cNvPr id="10" name="">
             <a:extLst xmlns:a="http://schemas.openxmlformats.org/drawingml/2006/main">
               <a:ext uri="{FF2B5EF4-FFF2-40B4-BE49-F238E27FC236}">
-                <a16:creationId xmlns:a16="http://schemas.microsoft.com/office/drawing/2014/main" id="{4B2E0AC8-1B2C-47E6-B37F-DE5AE7CCAD13}"/>
+                <a16:creationId xmlns:a16="http://schemas.microsoft.com/office/drawing/2014/main" id="{826AF48F-4096-458A-B221-BF9B5CF7EFDF}"/>
               </a:ext>
             </a:extLst>
           </p:cNvPr>
@@ -25270,7 +25614,7 @@
           <p:cNvPr id="11" name="">
             <a:extLst xmlns:a="http://schemas.openxmlformats.org/drawingml/2006/main">
               <a:ext uri="{FF2B5EF4-FFF2-40B4-BE49-F238E27FC236}">
-                <a16:creationId xmlns:a16="http://schemas.microsoft.com/office/drawing/2014/main" id="{BB90F6F7-4922-4E49-B904-843F52220C9A}"/>
+                <a16:creationId xmlns:a16="http://schemas.microsoft.com/office/drawing/2014/main" id="{EEC0C84D-2EE5-42A4-BF77-C9410ED56379}"/>
               </a:ext>
             </a:extLst>
           </p:cNvPr>
@@ -25428,7 +25772,7 @@
           <p:cNvPr id="12" name="">
             <a:extLst xmlns:a="http://schemas.openxmlformats.org/drawingml/2006/main">
               <a:ext uri="{FF2B5EF4-FFF2-40B4-BE49-F238E27FC236}">
-                <a16:creationId xmlns:a16="http://schemas.microsoft.com/office/drawing/2014/main" id="{713B176D-132F-42CB-B093-861DF62BBBBD}"/>
+                <a16:creationId xmlns:a16="http://schemas.microsoft.com/office/drawing/2014/main" id="{095D4AE2-A946-41DB-AFA0-42659756AFEC}"/>
               </a:ext>
             </a:extLst>
           </p:cNvPr>
@@ -25584,7 +25928,7 @@
     </p:spTree>
     <p:extLst>
       <p:ext uri="{BB962C8B-B14F-4D97-AF65-F5344CB8AC3E}">
-        <p14:creationId xmlns:p14="http://schemas.microsoft.com/office/powerpoint/2010/main" val="1226709893"/>
+        <p14:creationId xmlns:p14="http://schemas.microsoft.com/office/powerpoint/2010/main" val="40241806"/>
       </p:ext>
     </p:extLst>
   </p:cSld>
@@ -25615,7 +25959,7 @@
           <p:cNvPr id="11" name="">
             <a:extLst xmlns:a="http://schemas.openxmlformats.org/drawingml/2006/main">
               <a:ext uri="{FF2B5EF4-FFF2-40B4-BE49-F238E27FC236}">
-                <a16:creationId xmlns:a16="http://schemas.microsoft.com/office/drawing/2014/main" id="{0712E668-1881-4AD6-9FAE-4712DA8305F5}"/>
+                <a16:creationId xmlns:a16="http://schemas.microsoft.com/office/drawing/2014/main" id="{200BDF9F-68FB-4F0C-AEEE-D5F201A55411}"/>
               </a:ext>
             </a:extLst>
           </p:cNvPr>
@@ -25773,7 +26117,7 @@
           <p:cNvPr id="2" name="">
             <a:extLst xmlns:a="http://schemas.openxmlformats.org/drawingml/2006/main">
               <a:ext uri="{FF2B5EF4-FFF2-40B4-BE49-F238E27FC236}">
-                <a16:creationId xmlns:a16="http://schemas.microsoft.com/office/drawing/2014/main" id="{E2EEA86F-C50B-4D39-8CD0-0163E91B8E5F}"/>
+                <a16:creationId xmlns:a16="http://schemas.microsoft.com/office/drawing/2014/main" id="{7C5E5922-CDCF-4AC6-83A6-6ADE24A56CC4}"/>
               </a:ext>
             </a:extLst>
           </p:cNvPr>
@@ -25931,7 +26275,7 @@
           <p:cNvPr id="3" name="">
             <a:extLst xmlns:a="http://schemas.openxmlformats.org/drawingml/2006/main">
               <a:ext uri="{FF2B5EF4-FFF2-40B4-BE49-F238E27FC236}">
-                <a16:creationId xmlns:a16="http://schemas.microsoft.com/office/drawing/2014/main" id="{4405FF4D-E000-4949-8F44-E8DAB4BD9202}"/>
+                <a16:creationId xmlns:a16="http://schemas.microsoft.com/office/drawing/2014/main" id="{E531BDAF-63FA-474F-AB3F-DC8F9BB630DF}"/>
               </a:ext>
             </a:extLst>
           </p:cNvPr>
@@ -26089,7 +26433,7 @@
           <p:cNvPr id="4" name="">
             <a:extLst xmlns:a="http://schemas.openxmlformats.org/drawingml/2006/main">
               <a:ext uri="{FF2B5EF4-FFF2-40B4-BE49-F238E27FC236}">
-                <a16:creationId xmlns:a16="http://schemas.microsoft.com/office/drawing/2014/main" id="{259C0BD1-1D8E-471E-B83B-70694DB365D0}"/>
+                <a16:creationId xmlns:a16="http://schemas.microsoft.com/office/drawing/2014/main" id="{ECBA563F-498A-4E03-A00B-60ED403EEFCC}"/>
               </a:ext>
             </a:extLst>
           </p:cNvPr>
@@ -26247,7 +26591,7 @@
           <p:cNvPr id="5" name="">
             <a:extLst xmlns:a="http://schemas.openxmlformats.org/drawingml/2006/main">
               <a:ext uri="{FF2B5EF4-FFF2-40B4-BE49-F238E27FC236}">
-                <a16:creationId xmlns:a16="http://schemas.microsoft.com/office/drawing/2014/main" id="{6FD7A884-801C-43B8-97E2-BC55DC964DF2}"/>
+                <a16:creationId xmlns:a16="http://schemas.microsoft.com/office/drawing/2014/main" id="{3A301333-CDD6-4F07-A7E9-778BB2BEC701}"/>
               </a:ext>
             </a:extLst>
           </p:cNvPr>
@@ -26405,7 +26749,7 @@
           <p:cNvPr id="6" name="">
             <a:extLst xmlns:a="http://schemas.openxmlformats.org/drawingml/2006/main">
               <a:ext uri="{FF2B5EF4-FFF2-40B4-BE49-F238E27FC236}">
-                <a16:creationId xmlns:a16="http://schemas.microsoft.com/office/drawing/2014/main" id="{529DFDFC-DAEA-431D-B27A-6ABFAF471622}"/>
+                <a16:creationId xmlns:a16="http://schemas.microsoft.com/office/drawing/2014/main" id="{37B5F8FD-0F11-4902-9A2D-C8FAEAF492DD}"/>
               </a:ext>
             </a:extLst>
           </p:cNvPr>
@@ -26563,7 +26907,7 @@
           <p:cNvPr id="7" name="">
             <a:extLst xmlns:a="http://schemas.openxmlformats.org/drawingml/2006/main">
               <a:ext uri="{FF2B5EF4-FFF2-40B4-BE49-F238E27FC236}">
-                <a16:creationId xmlns:a16="http://schemas.microsoft.com/office/drawing/2014/main" id="{5364BB4D-9D21-4686-B102-7D6541C0646A}"/>
+                <a16:creationId xmlns:a16="http://schemas.microsoft.com/office/drawing/2014/main" id="{8071B7A1-491F-40CD-9F68-C46A0D47D0DC}"/>
               </a:ext>
             </a:extLst>
           </p:cNvPr>
@@ -26721,7 +27065,7 @@
           <p:cNvPr id="8" name="">
             <a:extLst xmlns:a="http://schemas.openxmlformats.org/drawingml/2006/main">
               <a:ext uri="{FF2B5EF4-FFF2-40B4-BE49-F238E27FC236}">
-                <a16:creationId xmlns:a16="http://schemas.microsoft.com/office/drawing/2014/main" id="{BB6BEB04-C087-4BBE-9462-C2BF07C2D59B}"/>
+                <a16:creationId xmlns:a16="http://schemas.microsoft.com/office/drawing/2014/main" id="{656AF0AF-3C49-4315-AE7E-4511CEEE704A}"/>
               </a:ext>
             </a:extLst>
           </p:cNvPr>
@@ -26879,7 +27223,7 @@
           <p:cNvPr id="9" name="">
             <a:extLst xmlns:a="http://schemas.openxmlformats.org/drawingml/2006/main">
               <a:ext uri="{FF2B5EF4-FFF2-40B4-BE49-F238E27FC236}">
-                <a16:creationId xmlns:a16="http://schemas.microsoft.com/office/drawing/2014/main" id="{98DAE4D9-3ADD-40C3-BB3D-20DEB24F4E0B}"/>
+                <a16:creationId xmlns:a16="http://schemas.microsoft.com/office/drawing/2014/main" id="{9A66D640-3C3F-4B0B-9003-AB593FD670DE}"/>
               </a:ext>
             </a:extLst>
           </p:cNvPr>
@@ -27065,7 +27409,7 @@
           <p:cNvPr id="10" name="">
             <a:extLst xmlns:a="http://schemas.openxmlformats.org/drawingml/2006/main">
               <a:ext uri="{FF2B5EF4-FFF2-40B4-BE49-F238E27FC236}">
-                <a16:creationId xmlns:a16="http://schemas.microsoft.com/office/drawing/2014/main" id="{7C9A3CB1-1C43-4080-9E16-B580949C1443}"/>
+                <a16:creationId xmlns:a16="http://schemas.microsoft.com/office/drawing/2014/main" id="{332F2F52-0D0F-47A6-8A66-ADE1624BB864}"/>
               </a:ext>
             </a:extLst>
           </p:cNvPr>
@@ -27221,7 +27565,7 @@
     </p:spTree>
     <p:extLst>
       <p:ext uri="{BB962C8B-B14F-4D97-AF65-F5344CB8AC3E}">
-        <p14:creationId xmlns:p14="http://schemas.microsoft.com/office/powerpoint/2010/main" val="1949204258"/>
+        <p14:creationId xmlns:p14="http://schemas.microsoft.com/office/powerpoint/2010/main" val="1633491276"/>
       </p:ext>
     </p:extLst>
   </p:cSld>
@@ -27252,7 +27596,7 @@
           <p:cNvPr id="13" name="">
             <a:extLst xmlns:a="http://schemas.openxmlformats.org/drawingml/2006/main">
               <a:ext uri="{FF2B5EF4-FFF2-40B4-BE49-F238E27FC236}">
-                <a16:creationId xmlns:a16="http://schemas.microsoft.com/office/drawing/2014/main" id="{59980C8C-787E-4FD0-A6E4-E908F3845126}"/>
+                <a16:creationId xmlns:a16="http://schemas.microsoft.com/office/drawing/2014/main" id="{89BEDC3D-2177-42A2-AB75-CB5E08DED673}"/>
               </a:ext>
             </a:extLst>
           </p:cNvPr>
@@ -27410,7 +27754,7 @@
           <p:cNvPr id="2" name="">
             <a:extLst xmlns:a="http://schemas.openxmlformats.org/drawingml/2006/main">
               <a:ext uri="{FF2B5EF4-FFF2-40B4-BE49-F238E27FC236}">
-                <a16:creationId xmlns:a16="http://schemas.microsoft.com/office/drawing/2014/main" id="{5040CA98-43D0-4CCC-9E75-233D58940EBF}"/>
+                <a16:creationId xmlns:a16="http://schemas.microsoft.com/office/drawing/2014/main" id="{F75A3537-8FDF-44F6-9858-C4B15EF8386A}"/>
               </a:ext>
             </a:extLst>
           </p:cNvPr>
@@ -27568,7 +27912,7 @@
           <p:cNvPr id="3" name="">
             <a:extLst xmlns:a="http://schemas.openxmlformats.org/drawingml/2006/main">
               <a:ext uri="{FF2B5EF4-FFF2-40B4-BE49-F238E27FC236}">
-                <a16:creationId xmlns:a16="http://schemas.microsoft.com/office/drawing/2014/main" id="{82751409-214F-450F-9F4E-FFEAC026B136}"/>
+                <a16:creationId xmlns:a16="http://schemas.microsoft.com/office/drawing/2014/main" id="{2FBF5D04-70D2-44BE-A1D1-136107975AFE}"/>
               </a:ext>
             </a:extLst>
           </p:cNvPr>
@@ -27726,7 +28070,7 @@
           <p:cNvPr id="4" name="">
             <a:extLst xmlns:a="http://schemas.openxmlformats.org/drawingml/2006/main">
               <a:ext uri="{FF2B5EF4-FFF2-40B4-BE49-F238E27FC236}">
-                <a16:creationId xmlns:a16="http://schemas.microsoft.com/office/drawing/2014/main" id="{90947A29-208B-4843-ADDD-CD42F4D26BEA}"/>
+                <a16:creationId xmlns:a16="http://schemas.microsoft.com/office/drawing/2014/main" id="{24493716-6F05-4ADD-A305-DFA7DE10B968}"/>
               </a:ext>
             </a:extLst>
           </p:cNvPr>
@@ -27736,7 +28080,7 @@
           <p:nvPr/>
         </p:nvPicPr>
         <p:blipFill>
-          <a:blip xmlns:r="http://schemas.openxmlformats.org/officeDocument/2006/relationships" xmlns:a="http://schemas.openxmlformats.org/drawingml/2006/main" r:embed="R7f09050fd892484e"/>
+          <a:blip xmlns:r="http://schemas.openxmlformats.org/officeDocument/2006/relationships" xmlns:a="http://schemas.openxmlformats.org/drawingml/2006/main" r:embed="Rea3c801441e9433a"/>
           <a:stretch xmlns:a="http://schemas.openxmlformats.org/drawingml/2006/main"/>
         </p:blipFill>
         <p:spPr>
@@ -27754,7 +28098,7 @@
           <p:cNvPr id="5" name="">
             <a:extLst xmlns:a="http://schemas.openxmlformats.org/drawingml/2006/main">
               <a:ext uri="{FF2B5EF4-FFF2-40B4-BE49-F238E27FC236}">
-                <a16:creationId xmlns:a16="http://schemas.microsoft.com/office/drawing/2014/main" id="{9CF0CA58-4D59-4F8A-ACFA-ED114A0DC258}"/>
+                <a16:creationId xmlns:a16="http://schemas.microsoft.com/office/drawing/2014/main" id="{418CDF5D-F619-49BF-ACAA-256CDD0CDABB}"/>
               </a:ext>
             </a:extLst>
           </p:cNvPr>
@@ -27912,7 +28256,7 @@
           <p:cNvPr id="6" name="">
             <a:extLst xmlns:a="http://schemas.openxmlformats.org/drawingml/2006/main">
               <a:ext uri="{FF2B5EF4-FFF2-40B4-BE49-F238E27FC236}">
-                <a16:creationId xmlns:a16="http://schemas.microsoft.com/office/drawing/2014/main" id="{077DF06E-99F6-4310-9265-9AE8C2EA3576}"/>
+                <a16:creationId xmlns:a16="http://schemas.microsoft.com/office/drawing/2014/main" id="{317B665C-F4F3-46C7-8C1A-7D6920C97D7A}"/>
               </a:ext>
             </a:extLst>
           </p:cNvPr>
@@ -28070,7 +28414,7 @@
           <p:cNvPr id="7" name="">
             <a:extLst xmlns:a="http://schemas.openxmlformats.org/drawingml/2006/main">
               <a:ext uri="{FF2B5EF4-FFF2-40B4-BE49-F238E27FC236}">
-                <a16:creationId xmlns:a16="http://schemas.microsoft.com/office/drawing/2014/main" id="{09321971-6227-4342-987D-F9D149EE0A75}"/>
+                <a16:creationId xmlns:a16="http://schemas.microsoft.com/office/drawing/2014/main" id="{C7728334-9611-4913-B970-3AEE4D269410}"/>
               </a:ext>
             </a:extLst>
           </p:cNvPr>
@@ -28080,7 +28424,7 @@
           <p:nvPr/>
         </p:nvPicPr>
         <p:blipFill>
-          <a:blip xmlns:r="http://schemas.openxmlformats.org/officeDocument/2006/relationships" xmlns:a="http://schemas.openxmlformats.org/drawingml/2006/main" r:embed="Raa32430b854f4451"/>
+          <a:blip xmlns:r="http://schemas.openxmlformats.org/officeDocument/2006/relationships" xmlns:a="http://schemas.openxmlformats.org/drawingml/2006/main" r:embed="R9658980daf314548"/>
           <a:stretch xmlns:a="http://schemas.openxmlformats.org/drawingml/2006/main"/>
         </p:blipFill>
         <p:spPr>
@@ -28098,7 +28442,7 @@
           <p:cNvPr id="8" name="">
             <a:extLst xmlns:a="http://schemas.openxmlformats.org/drawingml/2006/main">
               <a:ext uri="{FF2B5EF4-FFF2-40B4-BE49-F238E27FC236}">
-                <a16:creationId xmlns:a16="http://schemas.microsoft.com/office/drawing/2014/main" id="{31CE2F97-870E-4F09-B437-34B2DC09B198}"/>
+                <a16:creationId xmlns:a16="http://schemas.microsoft.com/office/drawing/2014/main" id="{3038C5D2-A879-4DA4-9FEB-D7E2EC6A9888}"/>
               </a:ext>
             </a:extLst>
           </p:cNvPr>
@@ -28256,7 +28600,7 @@
           <p:cNvPr id="9" name="">
             <a:extLst xmlns:a="http://schemas.openxmlformats.org/drawingml/2006/main">
               <a:ext uri="{FF2B5EF4-FFF2-40B4-BE49-F238E27FC236}">
-                <a16:creationId xmlns:a16="http://schemas.microsoft.com/office/drawing/2014/main" id="{130F5953-8A9C-4DE3-A703-0E09191FEAD7}"/>
+                <a16:creationId xmlns:a16="http://schemas.microsoft.com/office/drawing/2014/main" id="{399EDF1D-5611-4C00-A36A-43BAA5B751CA}"/>
               </a:ext>
             </a:extLst>
           </p:cNvPr>
@@ -28414,7 +28758,7 @@
           <p:cNvPr id="10" name="">
             <a:extLst xmlns:a="http://schemas.openxmlformats.org/drawingml/2006/main">
               <a:ext uri="{FF2B5EF4-FFF2-40B4-BE49-F238E27FC236}">
-                <a16:creationId xmlns:a16="http://schemas.microsoft.com/office/drawing/2014/main" id="{7622AB0B-6573-4145-8CC7-272E1B28ADF1}"/>
+                <a16:creationId xmlns:a16="http://schemas.microsoft.com/office/drawing/2014/main" id="{9239747B-30AC-491F-9580-9CD0F12EF3F8}"/>
               </a:ext>
             </a:extLst>
           </p:cNvPr>
@@ -28600,7 +28944,7 @@
           <p:cNvPr id="11" name="">
             <a:extLst xmlns:a="http://schemas.openxmlformats.org/drawingml/2006/main">
               <a:ext uri="{FF2B5EF4-FFF2-40B4-BE49-F238E27FC236}">
-                <a16:creationId xmlns:a16="http://schemas.microsoft.com/office/drawing/2014/main" id="{E0DAE5A5-10F5-4D3D-8427-E5CB685E0DEB}"/>
+                <a16:creationId xmlns:a16="http://schemas.microsoft.com/office/drawing/2014/main" id="{EC3CE22B-780D-460B-87B1-DD5FF0243A36}"/>
               </a:ext>
             </a:extLst>
           </p:cNvPr>
@@ -28758,7 +29102,7 @@
           <p:cNvPr id="12" name="">
             <a:extLst xmlns:a="http://schemas.openxmlformats.org/drawingml/2006/main">
               <a:ext uri="{FF2B5EF4-FFF2-40B4-BE49-F238E27FC236}">
-                <a16:creationId xmlns:a16="http://schemas.microsoft.com/office/drawing/2014/main" id="{8A070441-3EA9-4E9E-AC81-D73ED40796FF}"/>
+                <a16:creationId xmlns:a16="http://schemas.microsoft.com/office/drawing/2014/main" id="{903D6B3D-7339-493D-AA23-DCB242E0199F}"/>
               </a:ext>
             </a:extLst>
           </p:cNvPr>
@@ -28915,7 +29259,7 @@
     </p:spTree>
     <p:extLst>
       <p:ext uri="{BB962C8B-B14F-4D97-AF65-F5344CB8AC3E}">
-        <p14:creationId xmlns:p14="http://schemas.microsoft.com/office/powerpoint/2010/main" val="1665035451"/>
+        <p14:creationId xmlns:p14="http://schemas.microsoft.com/office/powerpoint/2010/main" val="1970757419"/>
       </p:ext>
     </p:extLst>
   </p:cSld>
@@ -28946,7 +29290,7 @@
           <p:cNvPr id="14" name="">
             <a:extLst xmlns:a="http://schemas.openxmlformats.org/drawingml/2006/main">
               <a:ext uri="{FF2B5EF4-FFF2-40B4-BE49-F238E27FC236}">
-                <a16:creationId xmlns:a16="http://schemas.microsoft.com/office/drawing/2014/main" id="{41E89FD6-C5AF-4553-8E50-D6C3A2F11017}"/>
+                <a16:creationId xmlns:a16="http://schemas.microsoft.com/office/drawing/2014/main" id="{AEFB64BE-6A61-4558-95BB-509486863BCF}"/>
               </a:ext>
             </a:extLst>
           </p:cNvPr>
@@ -29104,7 +29448,7 @@
           <p:cNvPr id="2" name="">
             <a:extLst xmlns:a="http://schemas.openxmlformats.org/drawingml/2006/main">
               <a:ext uri="{FF2B5EF4-FFF2-40B4-BE49-F238E27FC236}">
-                <a16:creationId xmlns:a16="http://schemas.microsoft.com/office/drawing/2014/main" id="{1A153A86-9523-41E5-9E21-27A82680B47A}"/>
+                <a16:creationId xmlns:a16="http://schemas.microsoft.com/office/drawing/2014/main" id="{ED06F4F1-E41A-4B3A-92E7-64F96964DB26}"/>
               </a:ext>
             </a:extLst>
           </p:cNvPr>
@@ -29262,7 +29606,7 @@
           <p:cNvPr id="3" name="">
             <a:extLst xmlns:a="http://schemas.openxmlformats.org/drawingml/2006/main">
               <a:ext uri="{FF2B5EF4-FFF2-40B4-BE49-F238E27FC236}">
-                <a16:creationId xmlns:a16="http://schemas.microsoft.com/office/drawing/2014/main" id="{C9B079DD-F237-4735-9D7A-7FF09B3EC939}"/>
+                <a16:creationId xmlns:a16="http://schemas.microsoft.com/office/drawing/2014/main" id="{46C4ABD3-9F79-4BD3-82ED-C7321FE9D575}"/>
               </a:ext>
             </a:extLst>
           </p:cNvPr>
@@ -29420,7 +29764,7 @@
           <p:cNvPr id="4" name="">
             <a:extLst xmlns:a="http://schemas.openxmlformats.org/drawingml/2006/main">
               <a:ext uri="{FF2B5EF4-FFF2-40B4-BE49-F238E27FC236}">
-                <a16:creationId xmlns:a16="http://schemas.microsoft.com/office/drawing/2014/main" id="{0896FA01-A88B-4881-8D6A-4D4C846BD61C}"/>
+                <a16:creationId xmlns:a16="http://schemas.microsoft.com/office/drawing/2014/main" id="{95D3FF6B-EF3B-4B75-B3F9-7F05366D23D1}"/>
               </a:ext>
             </a:extLst>
           </p:cNvPr>
@@ -29430,7 +29774,7 @@
           <p:nvPr/>
         </p:nvPicPr>
         <p:blipFill>
-          <a:blip xmlns:r="http://schemas.openxmlformats.org/officeDocument/2006/relationships" xmlns:a="http://schemas.openxmlformats.org/drawingml/2006/main" r:embed="Rf89f7ff5915843fd"/>
+          <a:blip xmlns:r="http://schemas.openxmlformats.org/officeDocument/2006/relationships" xmlns:a="http://schemas.openxmlformats.org/drawingml/2006/main" r:embed="Rf9030b1b56674c9f"/>
           <a:stretch xmlns:a="http://schemas.openxmlformats.org/drawingml/2006/main"/>
         </p:blipFill>
         <p:spPr>
@@ -29448,7 +29792,7 @@
           <p:cNvPr id="5" name="">
             <a:extLst xmlns:a="http://schemas.openxmlformats.org/drawingml/2006/main">
               <a:ext uri="{FF2B5EF4-FFF2-40B4-BE49-F238E27FC236}">
-                <a16:creationId xmlns:a16="http://schemas.microsoft.com/office/drawing/2014/main" id="{4232F6FE-2134-4952-A14D-68193A3B4BAF}"/>
+                <a16:creationId xmlns:a16="http://schemas.microsoft.com/office/drawing/2014/main" id="{B473D521-9F45-4720-A071-E706F5C1BD1A}"/>
               </a:ext>
             </a:extLst>
           </p:cNvPr>
@@ -29606,7 +29950,7 @@
           <p:cNvPr id="6" name="">
             <a:extLst xmlns:a="http://schemas.openxmlformats.org/drawingml/2006/main">
               <a:ext uri="{FF2B5EF4-FFF2-40B4-BE49-F238E27FC236}">
-                <a16:creationId xmlns:a16="http://schemas.microsoft.com/office/drawing/2014/main" id="{5D800F05-2684-4D70-A8AA-A9191BA315DA}"/>
+                <a16:creationId xmlns:a16="http://schemas.microsoft.com/office/drawing/2014/main" id="{F63C6A4D-3D32-4DA0-9174-06A8DC97AA9C}"/>
               </a:ext>
             </a:extLst>
           </p:cNvPr>
@@ -29764,7 +30108,7 @@
           <p:cNvPr id="7" name="">
             <a:extLst xmlns:a="http://schemas.openxmlformats.org/drawingml/2006/main">
               <a:ext uri="{FF2B5EF4-FFF2-40B4-BE49-F238E27FC236}">
-                <a16:creationId xmlns:a16="http://schemas.microsoft.com/office/drawing/2014/main" id="{507FFD8C-9C86-49CF-AD70-3B96A8549DF7}"/>
+                <a16:creationId xmlns:a16="http://schemas.microsoft.com/office/drawing/2014/main" id="{A709698E-C4AC-47CC-81AB-21AD8A950745}"/>
               </a:ext>
             </a:extLst>
           </p:cNvPr>
@@ -29774,7 +30118,7 @@
           <p:nvPr/>
         </p:nvPicPr>
         <p:blipFill>
-          <a:blip xmlns:r="http://schemas.openxmlformats.org/officeDocument/2006/relationships" xmlns:a="http://schemas.openxmlformats.org/drawingml/2006/main" r:embed="R9f1b1363295c417f"/>
+          <a:blip xmlns:r="http://schemas.openxmlformats.org/officeDocument/2006/relationships" xmlns:a="http://schemas.openxmlformats.org/drawingml/2006/main" r:embed="Rb00c50cb77fd4463"/>
           <a:stretch xmlns:a="http://schemas.openxmlformats.org/drawingml/2006/main"/>
         </p:blipFill>
         <p:spPr>
@@ -29792,7 +30136,7 @@
           <p:cNvPr id="8" name="">
             <a:extLst xmlns:a="http://schemas.openxmlformats.org/drawingml/2006/main">
               <a:ext uri="{FF2B5EF4-FFF2-40B4-BE49-F238E27FC236}">
-                <a16:creationId xmlns:a16="http://schemas.microsoft.com/office/drawing/2014/main" id="{B5265873-44CF-4175-9D7B-55A6B6CFD0B8}"/>
+                <a16:creationId xmlns:a16="http://schemas.microsoft.com/office/drawing/2014/main" id="{1F0788B4-2529-45C4-A809-0EF7A268B177}"/>
               </a:ext>
             </a:extLst>
           </p:cNvPr>
@@ -29950,7 +30294,7 @@
           <p:cNvPr id="9" name="">
             <a:extLst xmlns:a="http://schemas.openxmlformats.org/drawingml/2006/main">
               <a:ext uri="{FF2B5EF4-FFF2-40B4-BE49-F238E27FC236}">
-                <a16:creationId xmlns:a16="http://schemas.microsoft.com/office/drawing/2014/main" id="{C07588C7-DA0F-4361-950B-C7D495DC4106}"/>
+                <a16:creationId xmlns:a16="http://schemas.microsoft.com/office/drawing/2014/main" id="{2FB465CD-F3F6-4356-A385-DD1B6C615FC6}"/>
               </a:ext>
             </a:extLst>
           </p:cNvPr>
@@ -30108,7 +30452,7 @@
           <p:cNvPr id="10" name="">
             <a:extLst xmlns:a="http://schemas.openxmlformats.org/drawingml/2006/main">
               <a:ext uri="{FF2B5EF4-FFF2-40B4-BE49-F238E27FC236}">
-                <a16:creationId xmlns:a16="http://schemas.microsoft.com/office/drawing/2014/main" id="{A4AF8AB5-817F-47A4-BB1C-ED0C42DA9D47}"/>
+                <a16:creationId xmlns:a16="http://schemas.microsoft.com/office/drawing/2014/main" id="{D9C9330C-E800-42F2-A772-FC1401FB62BD}"/>
               </a:ext>
             </a:extLst>
           </p:cNvPr>
@@ -30266,7 +30610,7 @@
           <p:cNvPr id="11" name="">
             <a:extLst xmlns:a="http://schemas.openxmlformats.org/drawingml/2006/main">
               <a:ext uri="{FF2B5EF4-FFF2-40B4-BE49-F238E27FC236}">
-                <a16:creationId xmlns:a16="http://schemas.microsoft.com/office/drawing/2014/main" id="{64CF60BB-28A3-4C99-8FDC-690E3B0C9BDC}"/>
+                <a16:creationId xmlns:a16="http://schemas.microsoft.com/office/drawing/2014/main" id="{69C618A7-85EC-4A7C-90AD-D8E0CD1EFCA7}"/>
               </a:ext>
             </a:extLst>
           </p:cNvPr>
@@ -30424,7 +30768,7 @@
           <p:cNvPr id="12" name="">
             <a:extLst xmlns:a="http://schemas.openxmlformats.org/drawingml/2006/main">
               <a:ext uri="{FF2B5EF4-FFF2-40B4-BE49-F238E27FC236}">
-                <a16:creationId xmlns:a16="http://schemas.microsoft.com/office/drawing/2014/main" id="{6CA8D17C-876F-40E0-A492-09C3CA139676}"/>
+                <a16:creationId xmlns:a16="http://schemas.microsoft.com/office/drawing/2014/main" id="{4160B996-7951-4526-8794-C27DE3928706}"/>
               </a:ext>
             </a:extLst>
           </p:cNvPr>
@@ -30628,7 +30972,7 @@
           <p:cNvPr id="13" name="">
             <a:extLst xmlns:a="http://schemas.openxmlformats.org/drawingml/2006/main">
               <a:ext uri="{FF2B5EF4-FFF2-40B4-BE49-F238E27FC236}">
-                <a16:creationId xmlns:a16="http://schemas.microsoft.com/office/drawing/2014/main" id="{9E6EA92E-6D9E-408E-B552-EC2EA120072C}"/>
+                <a16:creationId xmlns:a16="http://schemas.microsoft.com/office/drawing/2014/main" id="{D87632F5-696F-4A54-9A66-F1CF91B6E8E2}"/>
               </a:ext>
             </a:extLst>
           </p:cNvPr>
@@ -30784,7 +31128,7 @@
     </p:spTree>
     <p:extLst>
       <p:ext uri="{BB962C8B-B14F-4D97-AF65-F5344CB8AC3E}">
-        <p14:creationId xmlns:p14="http://schemas.microsoft.com/office/powerpoint/2010/main" val="777709170"/>
+        <p14:creationId xmlns:p14="http://schemas.microsoft.com/office/powerpoint/2010/main" val="1611608039"/>
       </p:ext>
     </p:extLst>
   </p:cSld>
@@ -30815,7 +31159,7 @@
           <p:cNvPr id="13" name="">
             <a:extLst xmlns:a="http://schemas.openxmlformats.org/drawingml/2006/main">
               <a:ext uri="{FF2B5EF4-FFF2-40B4-BE49-F238E27FC236}">
-                <a16:creationId xmlns:a16="http://schemas.microsoft.com/office/drawing/2014/main" id="{4A89A4C7-46E4-43CD-9334-2B16701FB9AD}"/>
+                <a16:creationId xmlns:a16="http://schemas.microsoft.com/office/drawing/2014/main" id="{D98EDDC9-78FC-4A53-B7B6-698077B2E72D}"/>
               </a:ext>
             </a:extLst>
           </p:cNvPr>
@@ -30973,7 +31317,7 @@
           <p:cNvPr id="2" name="">
             <a:extLst xmlns:a="http://schemas.openxmlformats.org/drawingml/2006/main">
               <a:ext uri="{FF2B5EF4-FFF2-40B4-BE49-F238E27FC236}">
-                <a16:creationId xmlns:a16="http://schemas.microsoft.com/office/drawing/2014/main" id="{788A75B1-FFEE-4D01-B1E5-43D4F7210A6C}"/>
+                <a16:creationId xmlns:a16="http://schemas.microsoft.com/office/drawing/2014/main" id="{6C34E62B-DBB2-4CF2-B154-57CB6857B56A}"/>
               </a:ext>
             </a:extLst>
           </p:cNvPr>
@@ -31131,7 +31475,7 @@
           <p:cNvPr id="3" name="">
             <a:extLst xmlns:a="http://schemas.openxmlformats.org/drawingml/2006/main">
               <a:ext uri="{FF2B5EF4-FFF2-40B4-BE49-F238E27FC236}">
-                <a16:creationId xmlns:a16="http://schemas.microsoft.com/office/drawing/2014/main" id="{F449EBC8-505A-403E-A367-4D384867995E}"/>
+                <a16:creationId xmlns:a16="http://schemas.microsoft.com/office/drawing/2014/main" id="{4964B2F2-A93A-49B1-BCC6-0BFB58EDC222}"/>
               </a:ext>
             </a:extLst>
           </p:cNvPr>
@@ -31289,7 +31633,7 @@
           <p:cNvPr id="4" name="">
             <a:extLst xmlns:a="http://schemas.openxmlformats.org/drawingml/2006/main">
               <a:ext uri="{FF2B5EF4-FFF2-40B4-BE49-F238E27FC236}">
-                <a16:creationId xmlns:a16="http://schemas.microsoft.com/office/drawing/2014/main" id="{6A1DC4DD-3FED-49A0-B995-92FE402D1F8E}"/>
+                <a16:creationId xmlns:a16="http://schemas.microsoft.com/office/drawing/2014/main" id="{2E19B841-C9C3-4534-9BE4-53270C0B5F30}"/>
               </a:ext>
             </a:extLst>
           </p:cNvPr>
@@ -31299,7 +31643,7 @@
           <p:nvPr/>
         </p:nvPicPr>
         <p:blipFill>
-          <a:blip xmlns:r="http://schemas.openxmlformats.org/officeDocument/2006/relationships" xmlns:a="http://schemas.openxmlformats.org/drawingml/2006/main" r:embed="R0181269b5b0d4f77"/>
+          <a:blip xmlns:r="http://schemas.openxmlformats.org/officeDocument/2006/relationships" xmlns:a="http://schemas.openxmlformats.org/drawingml/2006/main" r:embed="R07fe27c83cbc4d99"/>
           <a:stretch xmlns:a="http://schemas.openxmlformats.org/drawingml/2006/main"/>
         </p:blipFill>
         <p:spPr>
@@ -31317,7 +31661,7 @@
           <p:cNvPr id="5" name="">
             <a:extLst xmlns:a="http://schemas.openxmlformats.org/drawingml/2006/main">
               <a:ext uri="{FF2B5EF4-FFF2-40B4-BE49-F238E27FC236}">
-                <a16:creationId xmlns:a16="http://schemas.microsoft.com/office/drawing/2014/main" id="{B608A12E-E0FB-4BEF-806A-CC2D876CAE29}"/>
+                <a16:creationId xmlns:a16="http://schemas.microsoft.com/office/drawing/2014/main" id="{9BB2FD4E-F4B3-40A9-9C45-9CC02413ED85}"/>
               </a:ext>
             </a:extLst>
           </p:cNvPr>
@@ -31475,7 +31819,7 @@
           <p:cNvPr id="6" name="">
             <a:extLst xmlns:a="http://schemas.openxmlformats.org/drawingml/2006/main">
               <a:ext uri="{FF2B5EF4-FFF2-40B4-BE49-F238E27FC236}">
-                <a16:creationId xmlns:a16="http://schemas.microsoft.com/office/drawing/2014/main" id="{CDC02FE8-0282-4127-8C27-38487D1BFE41}"/>
+                <a16:creationId xmlns:a16="http://schemas.microsoft.com/office/drawing/2014/main" id="{B2674D2C-40BC-4E2E-BF34-AC8342CF49F0}"/>
               </a:ext>
             </a:extLst>
           </p:cNvPr>
@@ -31633,7 +31977,7 @@
           <p:cNvPr id="7" name="">
             <a:extLst xmlns:a="http://schemas.openxmlformats.org/drawingml/2006/main">
               <a:ext uri="{FF2B5EF4-FFF2-40B4-BE49-F238E27FC236}">
-                <a16:creationId xmlns:a16="http://schemas.microsoft.com/office/drawing/2014/main" id="{705A7290-9093-4A26-A6E7-B2322455EC95}"/>
+                <a16:creationId xmlns:a16="http://schemas.microsoft.com/office/drawing/2014/main" id="{971E869F-804E-42E8-B70E-6E98F01FCE3C}"/>
               </a:ext>
             </a:extLst>
           </p:cNvPr>
@@ -31643,7 +31987,7 @@
           <p:nvPr/>
         </p:nvPicPr>
         <p:blipFill>
-          <a:blip xmlns:r="http://schemas.openxmlformats.org/officeDocument/2006/relationships" xmlns:a="http://schemas.openxmlformats.org/drawingml/2006/main" r:embed="Re3bd5aee034c4d2a"/>
+          <a:blip xmlns:r="http://schemas.openxmlformats.org/officeDocument/2006/relationships" xmlns:a="http://schemas.openxmlformats.org/drawingml/2006/main" r:embed="R37df77b5a9004cd0"/>
           <a:stretch xmlns:a="http://schemas.openxmlformats.org/drawingml/2006/main"/>
         </p:blipFill>
         <p:spPr>
@@ -31661,7 +32005,7 @@
           <p:cNvPr id="8" name="">
             <a:extLst xmlns:a="http://schemas.openxmlformats.org/drawingml/2006/main">
               <a:ext uri="{FF2B5EF4-FFF2-40B4-BE49-F238E27FC236}">
-                <a16:creationId xmlns:a16="http://schemas.microsoft.com/office/drawing/2014/main" id="{A34856C2-1468-46C8-8D78-5DD443CDDC00}"/>
+                <a16:creationId xmlns:a16="http://schemas.microsoft.com/office/drawing/2014/main" id="{138FBD24-5D20-4094-BE2C-20BA885115C1}"/>
               </a:ext>
             </a:extLst>
           </p:cNvPr>
@@ -31819,7 +32163,7 @@
           <p:cNvPr id="9" name="">
             <a:extLst xmlns:a="http://schemas.openxmlformats.org/drawingml/2006/main">
               <a:ext uri="{FF2B5EF4-FFF2-40B4-BE49-F238E27FC236}">
-                <a16:creationId xmlns:a16="http://schemas.microsoft.com/office/drawing/2014/main" id="{06C97D5F-94B3-42C0-A87D-CFA9858F64F0}"/>
+                <a16:creationId xmlns:a16="http://schemas.microsoft.com/office/drawing/2014/main" id="{DA8C4A1F-85E3-4780-9779-693DD4D69510}"/>
               </a:ext>
             </a:extLst>
           </p:cNvPr>
@@ -31977,7 +32321,7 @@
           <p:cNvPr id="10" name="">
             <a:extLst xmlns:a="http://schemas.openxmlformats.org/drawingml/2006/main">
               <a:ext uri="{FF2B5EF4-FFF2-40B4-BE49-F238E27FC236}">
-                <a16:creationId xmlns:a16="http://schemas.microsoft.com/office/drawing/2014/main" id="{E8E01FB1-BBDE-48CC-B468-8D49955442D7}"/>
+                <a16:creationId xmlns:a16="http://schemas.microsoft.com/office/drawing/2014/main" id="{DEF70EE2-9FBA-4113-A592-A07A17D3BD0E}"/>
               </a:ext>
             </a:extLst>
           </p:cNvPr>
@@ -32163,7 +32507,7 @@
           <p:cNvPr id="11" name="">
             <a:extLst xmlns:a="http://schemas.openxmlformats.org/drawingml/2006/main">
               <a:ext uri="{FF2B5EF4-FFF2-40B4-BE49-F238E27FC236}">
-                <a16:creationId xmlns:a16="http://schemas.microsoft.com/office/drawing/2014/main" id="{833A6B81-25E9-413F-ABA9-91A8E3FB075C}"/>
+                <a16:creationId xmlns:a16="http://schemas.microsoft.com/office/drawing/2014/main" id="{1684EBFA-4A1F-4AC9-83AE-630C3B090325}"/>
               </a:ext>
             </a:extLst>
           </p:cNvPr>
@@ -32321,7 +32665,7 @@
           <p:cNvPr id="12" name="">
             <a:extLst xmlns:a="http://schemas.openxmlformats.org/drawingml/2006/main">
               <a:ext uri="{FF2B5EF4-FFF2-40B4-BE49-F238E27FC236}">
-                <a16:creationId xmlns:a16="http://schemas.microsoft.com/office/drawing/2014/main" id="{FCFDA231-1D07-4212-90CC-3A59D9E84BCA}"/>
+                <a16:creationId xmlns:a16="http://schemas.microsoft.com/office/drawing/2014/main" id="{C29310AF-24C5-45A9-8F05-43AEB3D37509}"/>
               </a:ext>
             </a:extLst>
           </p:cNvPr>
@@ -32477,7 +32821,7 @@
     </p:spTree>
     <p:extLst>
       <p:ext uri="{BB962C8B-B14F-4D97-AF65-F5344CB8AC3E}">
-        <p14:creationId xmlns:p14="http://schemas.microsoft.com/office/powerpoint/2010/main" val="139257226"/>
+        <p14:creationId xmlns:p14="http://schemas.microsoft.com/office/powerpoint/2010/main" val="870807884"/>
       </p:ext>
     </p:extLst>
   </p:cSld>
@@ -32508,7 +32852,7 @@
           <p:cNvPr id="14" name="">
             <a:extLst xmlns:a="http://schemas.openxmlformats.org/drawingml/2006/main">
               <a:ext uri="{FF2B5EF4-FFF2-40B4-BE49-F238E27FC236}">
-                <a16:creationId xmlns:a16="http://schemas.microsoft.com/office/drawing/2014/main" id="{D2096DBB-6AF0-4FC5-BFF7-E7634E8E7F3E}"/>
+                <a16:creationId xmlns:a16="http://schemas.microsoft.com/office/drawing/2014/main" id="{D21EF80B-576E-408A-B5AE-F7632AED9742}"/>
               </a:ext>
             </a:extLst>
           </p:cNvPr>
@@ -32666,7 +33010,7 @@
           <p:cNvPr id="2" name="">
             <a:extLst xmlns:a="http://schemas.openxmlformats.org/drawingml/2006/main">
               <a:ext uri="{FF2B5EF4-FFF2-40B4-BE49-F238E27FC236}">
-                <a16:creationId xmlns:a16="http://schemas.microsoft.com/office/drawing/2014/main" id="{F4919C8B-21C9-45AF-A9E2-527DEF6473F2}"/>
+                <a16:creationId xmlns:a16="http://schemas.microsoft.com/office/drawing/2014/main" id="{150C0012-669C-4DBC-9AFE-277EC6477B0E}"/>
               </a:ext>
             </a:extLst>
           </p:cNvPr>
@@ -32824,7 +33168,7 @@
           <p:cNvPr id="3" name="">
             <a:extLst xmlns:a="http://schemas.openxmlformats.org/drawingml/2006/main">
               <a:ext uri="{FF2B5EF4-FFF2-40B4-BE49-F238E27FC236}">
-                <a16:creationId xmlns:a16="http://schemas.microsoft.com/office/drawing/2014/main" id="{E2533364-001C-415E-BBBE-B019FBBC6A56}"/>
+                <a16:creationId xmlns:a16="http://schemas.microsoft.com/office/drawing/2014/main" id="{9CD3BD4A-2716-4C46-9452-DA16C5CC6490}"/>
               </a:ext>
             </a:extLst>
           </p:cNvPr>
@@ -32982,7 +33326,7 @@
           <p:cNvPr id="4" name="">
             <a:extLst xmlns:a="http://schemas.openxmlformats.org/drawingml/2006/main">
               <a:ext uri="{FF2B5EF4-FFF2-40B4-BE49-F238E27FC236}">
-                <a16:creationId xmlns:a16="http://schemas.microsoft.com/office/drawing/2014/main" id="{B69ABCCC-5D90-4243-A129-729B657D109F}"/>
+                <a16:creationId xmlns:a16="http://schemas.microsoft.com/office/drawing/2014/main" id="{AF5B00D8-8F5A-4588-89B5-F15595FE8035}"/>
               </a:ext>
             </a:extLst>
           </p:cNvPr>
@@ -32992,7 +33336,7 @@
           <p:nvPr/>
         </p:nvPicPr>
         <p:blipFill>
-          <a:blip xmlns:r="http://schemas.openxmlformats.org/officeDocument/2006/relationships" xmlns:a="http://schemas.openxmlformats.org/drawingml/2006/main" r:embed="R3e3e7a1fee8041c9"/>
+          <a:blip xmlns:r="http://schemas.openxmlformats.org/officeDocument/2006/relationships" xmlns:a="http://schemas.openxmlformats.org/drawingml/2006/main" r:embed="Rdf1214cdbdcd453d"/>
           <a:stretch xmlns:a="http://schemas.openxmlformats.org/drawingml/2006/main"/>
         </p:blipFill>
         <p:spPr>
@@ -33010,7 +33354,7 @@
           <p:cNvPr id="5" name="">
             <a:extLst xmlns:a="http://schemas.openxmlformats.org/drawingml/2006/main">
               <a:ext uri="{FF2B5EF4-FFF2-40B4-BE49-F238E27FC236}">
-                <a16:creationId xmlns:a16="http://schemas.microsoft.com/office/drawing/2014/main" id="{816E4A98-8D31-4AF7-88CC-C27AEA5BCE0A}"/>
+                <a16:creationId xmlns:a16="http://schemas.microsoft.com/office/drawing/2014/main" id="{0F33EC1F-385E-4871-AD9E-A24496EE3E4B}"/>
               </a:ext>
             </a:extLst>
           </p:cNvPr>
@@ -33168,7 +33512,7 @@
           <p:cNvPr id="6" name="">
             <a:extLst xmlns:a="http://schemas.openxmlformats.org/drawingml/2006/main">
               <a:ext uri="{FF2B5EF4-FFF2-40B4-BE49-F238E27FC236}">
-                <a16:creationId xmlns:a16="http://schemas.microsoft.com/office/drawing/2014/main" id="{CDAC7606-4BC1-41AA-B82D-FFC74B2C5C78}"/>
+                <a16:creationId xmlns:a16="http://schemas.microsoft.com/office/drawing/2014/main" id="{5C47943D-F4BF-4413-AE01-1C1992C3D409}"/>
               </a:ext>
             </a:extLst>
           </p:cNvPr>
@@ -33326,7 +33670,7 @@
           <p:cNvPr id="7" name="">
             <a:extLst xmlns:a="http://schemas.openxmlformats.org/drawingml/2006/main">
               <a:ext uri="{FF2B5EF4-FFF2-40B4-BE49-F238E27FC236}">
-                <a16:creationId xmlns:a16="http://schemas.microsoft.com/office/drawing/2014/main" id="{77877777-1559-4DDB-BBED-95F12AF97434}"/>
+                <a16:creationId xmlns:a16="http://schemas.microsoft.com/office/drawing/2014/main" id="{916212A3-EA4B-4FF8-9DFB-FFAA4D226396}"/>
               </a:ext>
             </a:extLst>
           </p:cNvPr>
@@ -33336,7 +33680,7 @@
           <p:nvPr/>
         </p:nvPicPr>
         <p:blipFill>
-          <a:blip xmlns:r="http://schemas.openxmlformats.org/officeDocument/2006/relationships" xmlns:a="http://schemas.openxmlformats.org/drawingml/2006/main" r:embed="R035f99866893477f"/>
+          <a:blip xmlns:r="http://schemas.openxmlformats.org/officeDocument/2006/relationships" xmlns:a="http://schemas.openxmlformats.org/drawingml/2006/main" r:embed="R2aca734347aa4483"/>
           <a:stretch xmlns:a="http://schemas.openxmlformats.org/drawingml/2006/main"/>
         </p:blipFill>
         <p:spPr>
@@ -33354,7 +33698,7 @@
           <p:cNvPr id="8" name="">
             <a:extLst xmlns:a="http://schemas.openxmlformats.org/drawingml/2006/main">
               <a:ext uri="{FF2B5EF4-FFF2-40B4-BE49-F238E27FC236}">
-                <a16:creationId xmlns:a16="http://schemas.microsoft.com/office/drawing/2014/main" id="{A6036EA2-9C2B-40A4-B50D-0B6F0A5A5451}"/>
+                <a16:creationId xmlns:a16="http://schemas.microsoft.com/office/drawing/2014/main" id="{C946FD60-215B-4D25-9FF8-D647EA7961A3}"/>
               </a:ext>
             </a:extLst>
           </p:cNvPr>
@@ -33512,7 +33856,7 @@
           <p:cNvPr id="9" name="">
             <a:extLst xmlns:a="http://schemas.openxmlformats.org/drawingml/2006/main">
               <a:ext uri="{FF2B5EF4-FFF2-40B4-BE49-F238E27FC236}">
-                <a16:creationId xmlns:a16="http://schemas.microsoft.com/office/drawing/2014/main" id="{A1DB8ED4-8B0F-4441-AE3C-62100F8CC9FC}"/>
+                <a16:creationId xmlns:a16="http://schemas.microsoft.com/office/drawing/2014/main" id="{3FD06E1B-7777-42D1-AEEF-637702ABFA7D}"/>
               </a:ext>
             </a:extLst>
           </p:cNvPr>
@@ -33670,7 +34014,7 @@
           <p:cNvPr id="10" name="">
             <a:extLst xmlns:a="http://schemas.openxmlformats.org/drawingml/2006/main">
               <a:ext uri="{FF2B5EF4-FFF2-40B4-BE49-F238E27FC236}">
-                <a16:creationId xmlns:a16="http://schemas.microsoft.com/office/drawing/2014/main" id="{1FFB7092-0B38-44CE-BC63-19C625C570C1}"/>
+                <a16:creationId xmlns:a16="http://schemas.microsoft.com/office/drawing/2014/main" id="{C32FE250-AD9C-4ED2-9464-F5E26A8209E6}"/>
               </a:ext>
             </a:extLst>
           </p:cNvPr>
@@ -33680,7 +34024,7 @@
           <p:nvPr/>
         </p:nvPicPr>
         <p:blipFill>
-          <a:blip xmlns:r="http://schemas.openxmlformats.org/officeDocument/2006/relationships" xmlns:a="http://schemas.openxmlformats.org/drawingml/2006/main" r:embed="R3457891adbce469b"/>
+          <a:blip xmlns:r="http://schemas.openxmlformats.org/officeDocument/2006/relationships" xmlns:a="http://schemas.openxmlformats.org/drawingml/2006/main" r:embed="R24464d35f7114461"/>
           <a:stretch xmlns:a="http://schemas.openxmlformats.org/drawingml/2006/main"/>
         </p:blipFill>
         <p:spPr>
@@ -33698,7 +34042,7 @@
           <p:cNvPr id="11" name="">
             <a:extLst xmlns:a="http://schemas.openxmlformats.org/drawingml/2006/main">
               <a:ext uri="{FF2B5EF4-FFF2-40B4-BE49-F238E27FC236}">
-                <a16:creationId xmlns:a16="http://schemas.microsoft.com/office/drawing/2014/main" id="{A4E4BA28-A449-42BB-A176-9B5CFDA88DBB}"/>
+                <a16:creationId xmlns:a16="http://schemas.microsoft.com/office/drawing/2014/main" id="{D47289DD-0801-48F5-B1F1-D8DA33EB5EA8}"/>
               </a:ext>
             </a:extLst>
           </p:cNvPr>
@@ -33856,7 +34200,7 @@
           <p:cNvPr id="12" name="">
             <a:extLst xmlns:a="http://schemas.openxmlformats.org/drawingml/2006/main">
               <a:ext uri="{FF2B5EF4-FFF2-40B4-BE49-F238E27FC236}">
-                <a16:creationId xmlns:a16="http://schemas.microsoft.com/office/drawing/2014/main" id="{F94CEE58-2ECB-4F97-B07E-7FBE198040B6}"/>
+                <a16:creationId xmlns:a16="http://schemas.microsoft.com/office/drawing/2014/main" id="{99A96A6A-F282-4436-849A-4B5D5D5B35E1}"/>
               </a:ext>
             </a:extLst>
           </p:cNvPr>
@@ -34014,7 +34358,7 @@
           <p:cNvPr id="13" name="">
             <a:extLst xmlns:a="http://schemas.openxmlformats.org/drawingml/2006/main">
               <a:ext uri="{FF2B5EF4-FFF2-40B4-BE49-F238E27FC236}">
-                <a16:creationId xmlns:a16="http://schemas.microsoft.com/office/drawing/2014/main" id="{C50CEB4A-807D-40B6-AD93-DEEA28C71768}"/>
+                <a16:creationId xmlns:a16="http://schemas.microsoft.com/office/drawing/2014/main" id="{D9D07CA0-6BA8-4B83-843A-F114319B961B}"/>
               </a:ext>
             </a:extLst>
           </p:cNvPr>
@@ -34198,7 +34542,7 @@
     </p:spTree>
     <p:extLst>
       <p:ext uri="{BB962C8B-B14F-4D97-AF65-F5344CB8AC3E}">
-        <p14:creationId xmlns:p14="http://schemas.microsoft.com/office/powerpoint/2010/main" val="2107213750"/>
+        <p14:creationId xmlns:p14="http://schemas.microsoft.com/office/powerpoint/2010/main" val="157706165"/>
       </p:ext>
     </p:extLst>
   </p:cSld>

--- a/lendet/2026-2027/mobile/lectures/ligjerata-07-kontrolli-mvp-rideshare-2026.pptx
+++ b/lendet/2026-2027/mobile/lectures/ligjerata-07-kontrolli-mvp-rideshare-2026.pptx
@@ -2,27 +2,27 @@
 <file path=ppt/presentation.xml><?xml version="1.0" encoding="utf-8"?>
 <p:presentation xmlns:p="http://schemas.openxmlformats.org/presentationml/2006/main">
   <p:sldMasterIdLst>
-    <p:sldMasterId xmlns:r="http://schemas.openxmlformats.org/officeDocument/2006/relationships" id="2147483648" r:id="R3139c077fa664670"/>
+    <p:sldMasterId xmlns:r="http://schemas.openxmlformats.org/officeDocument/2006/relationships" id="2147483648" r:id="R55b7d5e986234db6"/>
   </p:sldMasterIdLst>
   <p:sldIdLst>
-    <p:sldId xmlns:r="http://schemas.openxmlformats.org/officeDocument/2006/relationships" id="256" r:id="R9dd59cefbc594cec"/>
-    <p:sldId xmlns:r="http://schemas.openxmlformats.org/officeDocument/2006/relationships" id="257" r:id="R08a3fe49ccdb42e2"/>
-    <p:sldId xmlns:r="http://schemas.openxmlformats.org/officeDocument/2006/relationships" id="258" r:id="R5b31383fb9f04207"/>
-    <p:sldId xmlns:r="http://schemas.openxmlformats.org/officeDocument/2006/relationships" id="259" r:id="Rea22b91b552d4003"/>
-    <p:sldId xmlns:r="http://schemas.openxmlformats.org/officeDocument/2006/relationships" id="260" r:id="Re60326bbf14549a1"/>
-    <p:sldId xmlns:r="http://schemas.openxmlformats.org/officeDocument/2006/relationships" id="261" r:id="R557ef4afd8a84533"/>
-    <p:sldId xmlns:r="http://schemas.openxmlformats.org/officeDocument/2006/relationships" id="262" r:id="R1c70b289079846b3"/>
-    <p:sldId xmlns:r="http://schemas.openxmlformats.org/officeDocument/2006/relationships" id="263" r:id="R93ea9ea005e74f44"/>
-    <p:sldId xmlns:r="http://schemas.openxmlformats.org/officeDocument/2006/relationships" id="264" r:id="Re1e9ca26d86243bd"/>
-    <p:sldId xmlns:r="http://schemas.openxmlformats.org/officeDocument/2006/relationships" id="265" r:id="Ra7b82f1def82495d"/>
-    <p:sldId xmlns:r="http://schemas.openxmlformats.org/officeDocument/2006/relationships" id="266" r:id="Rd0d7b1b81c0e4216"/>
-    <p:sldId xmlns:r="http://schemas.openxmlformats.org/officeDocument/2006/relationships" id="267" r:id="R5e7121a8e3f64ffd"/>
-    <p:sldId xmlns:r="http://schemas.openxmlformats.org/officeDocument/2006/relationships" id="268" r:id="Rf92a60a010d7408e"/>
-    <p:sldId xmlns:r="http://schemas.openxmlformats.org/officeDocument/2006/relationships" id="269" r:id="R1eff110ad57846a2"/>
-    <p:sldId xmlns:r="http://schemas.openxmlformats.org/officeDocument/2006/relationships" id="270" r:id="R0bdc9d44a34441b5"/>
-    <p:sldId xmlns:r="http://schemas.openxmlformats.org/officeDocument/2006/relationships" id="271" r:id="R7b29edc815ae419d"/>
-    <p:sldId xmlns:r="http://schemas.openxmlformats.org/officeDocument/2006/relationships" id="272" r:id="R28267e2e0cc2406f"/>
-    <p:sldId xmlns:r="http://schemas.openxmlformats.org/officeDocument/2006/relationships" id="273" r:id="Rf9289252ee504eae"/>
+    <p:sldId xmlns:r="http://schemas.openxmlformats.org/officeDocument/2006/relationships" id="256" r:id="R1cab7e3beb30467d"/>
+    <p:sldId xmlns:r="http://schemas.openxmlformats.org/officeDocument/2006/relationships" id="257" r:id="Rf5b5afebb4ce4c88"/>
+    <p:sldId xmlns:r="http://schemas.openxmlformats.org/officeDocument/2006/relationships" id="258" r:id="R14cbd63e7f9a4fac"/>
+    <p:sldId xmlns:r="http://schemas.openxmlformats.org/officeDocument/2006/relationships" id="259" r:id="Reecd302f86734e0d"/>
+    <p:sldId xmlns:r="http://schemas.openxmlformats.org/officeDocument/2006/relationships" id="260" r:id="R2087357213614b58"/>
+    <p:sldId xmlns:r="http://schemas.openxmlformats.org/officeDocument/2006/relationships" id="261" r:id="Rcbe970fcd3f344ce"/>
+    <p:sldId xmlns:r="http://schemas.openxmlformats.org/officeDocument/2006/relationships" id="262" r:id="R2618a3a2fa3b452b"/>
+    <p:sldId xmlns:r="http://schemas.openxmlformats.org/officeDocument/2006/relationships" id="263" r:id="R1ad3b7e0a778403f"/>
+    <p:sldId xmlns:r="http://schemas.openxmlformats.org/officeDocument/2006/relationships" id="264" r:id="R2b75f9889a2c4692"/>
+    <p:sldId xmlns:r="http://schemas.openxmlformats.org/officeDocument/2006/relationships" id="265" r:id="R088967c558614e3f"/>
+    <p:sldId xmlns:r="http://schemas.openxmlformats.org/officeDocument/2006/relationships" id="266" r:id="Rf838e7fc7f314530"/>
+    <p:sldId xmlns:r="http://schemas.openxmlformats.org/officeDocument/2006/relationships" id="267" r:id="R22e1d88ae05e4028"/>
+    <p:sldId xmlns:r="http://schemas.openxmlformats.org/officeDocument/2006/relationships" id="268" r:id="Rb61e8e90d5c3425e"/>
+    <p:sldId xmlns:r="http://schemas.openxmlformats.org/officeDocument/2006/relationships" id="269" r:id="R837ecfb44d45462d"/>
+    <p:sldId xmlns:r="http://schemas.openxmlformats.org/officeDocument/2006/relationships" id="270" r:id="R1032228c430c4fca"/>
+    <p:sldId xmlns:r="http://schemas.openxmlformats.org/officeDocument/2006/relationships" id="271" r:id="R13d893a3816e4198"/>
+    <p:sldId xmlns:r="http://schemas.openxmlformats.org/officeDocument/2006/relationships" id="272" r:id="R06a5bfd3b4eb457d"/>
+    <p:sldId xmlns:r="http://schemas.openxmlformats.org/officeDocument/2006/relationships" id="273" r:id="Rde2b3bda241347c5"/>
   </p:sldIdLst>
   <p:sldSz cx="12192000" cy="6858000"/>
   <p:notesSz cx="6858000" cy="9144000"/>
@@ -46,7 +46,7 @@
           <p:cNvPr id="3" name="Title">
             <a:extLst xmlns:a="http://schemas.openxmlformats.org/drawingml/2006/main">
               <a:ext uri="{FF2B5EF4-FFF2-40B4-BE49-F238E27FC236}">
-                <a16:creationId xmlns:a16="http://schemas.microsoft.com/office/drawing/2014/main" id="{D42227B1-23BF-4A8C-A36E-F65714D8022E}"/>
+                <a16:creationId xmlns:a16="http://schemas.microsoft.com/office/drawing/2014/main" id="{1B86E982-0BDF-4788-9386-8CFEE63972F8}"/>
               </a:ext>
             </a:extLst>
           </p:cNvPr>
@@ -275,7 +275,7 @@
           <p:cNvPr id="2" name="Subtitle">
             <a:extLst xmlns:a="http://schemas.openxmlformats.org/drawingml/2006/main">
               <a:ext uri="{FF2B5EF4-FFF2-40B4-BE49-F238E27FC236}">
-                <a16:creationId xmlns:a16="http://schemas.microsoft.com/office/drawing/2014/main" id="{BB7C38C1-D08F-48C3-9D37-955DCEB60383}"/>
+                <a16:creationId xmlns:a16="http://schemas.microsoft.com/office/drawing/2014/main" id="{9D11204B-5BD0-4837-994C-BBE756C6D442}"/>
               </a:ext>
             </a:extLst>
           </p:cNvPr>
@@ -521,7 +521,7 @@
           <p:cNvPr id="2" name="Section title">
             <a:extLst xmlns:a="http://schemas.openxmlformats.org/drawingml/2006/main">
               <a:ext uri="{FF2B5EF4-FFF2-40B4-BE49-F238E27FC236}">
-                <a16:creationId xmlns:a16="http://schemas.microsoft.com/office/drawing/2014/main" id="{43AD3D19-B2A5-4FC2-8321-C688ACE60C50}"/>
+                <a16:creationId xmlns:a16="http://schemas.microsoft.com/office/drawing/2014/main" id="{81A0B677-A512-40AB-B0F1-42C26F0D4405}"/>
               </a:ext>
             </a:extLst>
           </p:cNvPr>
@@ -767,7 +767,7 @@
           <p:cNvPr id="3" name="Title">
             <a:extLst xmlns:a="http://schemas.openxmlformats.org/drawingml/2006/main">
               <a:ext uri="{FF2B5EF4-FFF2-40B4-BE49-F238E27FC236}">
-                <a16:creationId xmlns:a16="http://schemas.microsoft.com/office/drawing/2014/main" id="{A253451B-DA6A-4EFB-BF17-050261519107}"/>
+                <a16:creationId xmlns:a16="http://schemas.microsoft.com/office/drawing/2014/main" id="{61C79878-4C94-4D84-BBF8-0E628E2E9B29}"/>
               </a:ext>
             </a:extLst>
           </p:cNvPr>
@@ -996,7 +996,7 @@
           <p:cNvPr id="2" name="Body">
             <a:extLst xmlns:a="http://schemas.openxmlformats.org/drawingml/2006/main">
               <a:ext uri="{FF2B5EF4-FFF2-40B4-BE49-F238E27FC236}">
-                <a16:creationId xmlns:a16="http://schemas.microsoft.com/office/drawing/2014/main" id="{08EC6A38-8952-4557-9E08-F68366C703C2}"/>
+                <a16:creationId xmlns:a16="http://schemas.microsoft.com/office/drawing/2014/main" id="{1960479F-A58D-4A64-A3D9-3617CE2ABF6C}"/>
               </a:ext>
             </a:extLst>
           </p:cNvPr>
@@ -1242,7 +1242,7 @@
           <p:cNvPr id="4" name="Title">
             <a:extLst xmlns:a="http://schemas.openxmlformats.org/drawingml/2006/main">
               <a:ext uri="{FF2B5EF4-FFF2-40B4-BE49-F238E27FC236}">
-                <a16:creationId xmlns:a16="http://schemas.microsoft.com/office/drawing/2014/main" id="{37960D93-3972-4945-AB05-8C81286B7EBE}"/>
+                <a16:creationId xmlns:a16="http://schemas.microsoft.com/office/drawing/2014/main" id="{9D6D8315-057A-4560-AA71-646FC7C13C4E}"/>
               </a:ext>
             </a:extLst>
           </p:cNvPr>
@@ -1471,7 +1471,7 @@
           <p:cNvPr id="2" name="Left column">
             <a:extLst xmlns:a="http://schemas.openxmlformats.org/drawingml/2006/main">
               <a:ext uri="{FF2B5EF4-FFF2-40B4-BE49-F238E27FC236}">
-                <a16:creationId xmlns:a16="http://schemas.microsoft.com/office/drawing/2014/main" id="{D885CCF8-6742-4671-8E87-92C0EBE2FDD3}"/>
+                <a16:creationId xmlns:a16="http://schemas.microsoft.com/office/drawing/2014/main" id="{CCAB68D6-EBCE-4527-A5C8-4169163CA7DE}"/>
               </a:ext>
             </a:extLst>
           </p:cNvPr>
@@ -1700,7 +1700,7 @@
           <p:cNvPr id="3" name="Right column">
             <a:extLst xmlns:a="http://schemas.openxmlformats.org/drawingml/2006/main">
               <a:ext uri="{FF2B5EF4-FFF2-40B4-BE49-F238E27FC236}">
-                <a16:creationId xmlns:a16="http://schemas.microsoft.com/office/drawing/2014/main" id="{B963392F-4BC1-4F54-AA89-68B2567E35E4}"/>
+                <a16:creationId xmlns:a16="http://schemas.microsoft.com/office/drawing/2014/main" id="{B69F3518-D7A7-4494-B257-E13059EB5CB7}"/>
               </a:ext>
             </a:extLst>
           </p:cNvPr>
@@ -1946,7 +1946,7 @@
           <p:cNvPr id="3" name="Title">
             <a:extLst xmlns:a="http://schemas.openxmlformats.org/drawingml/2006/main">
               <a:ext uri="{FF2B5EF4-FFF2-40B4-BE49-F238E27FC236}">
-                <a16:creationId xmlns:a16="http://schemas.microsoft.com/office/drawing/2014/main" id="{C1A1F216-BDE3-416F-B13D-9BD2028338F2}"/>
+                <a16:creationId xmlns:a16="http://schemas.microsoft.com/office/drawing/2014/main" id="{7D02D9B3-2570-4D37-BE9B-CD4C798D1AAD}"/>
               </a:ext>
             </a:extLst>
           </p:cNvPr>
@@ -2175,7 +2175,7 @@
           <p:cNvPr id="2" name="Left column">
             <a:extLst xmlns:a="http://schemas.openxmlformats.org/drawingml/2006/main">
               <a:ext uri="{FF2B5EF4-FFF2-40B4-BE49-F238E27FC236}">
-                <a16:creationId xmlns:a16="http://schemas.microsoft.com/office/drawing/2014/main" id="{DF055F8C-56D1-490F-A93E-EDB560EACF18}"/>
+                <a16:creationId xmlns:a16="http://schemas.microsoft.com/office/drawing/2014/main" id="{88011F38-7A92-41E5-8EC1-6030F015408F}"/>
               </a:ext>
             </a:extLst>
           </p:cNvPr>
@@ -2442,12 +2442,12 @@
   </p:cSld>
   <p:clrMap bg1="lt1" tx1="dk1" bg2="lt2" tx2="dk2" accent1="accent1" accent2="accent2" accent3="accent3" accent4="accent4" accent5="accent5" accent6="accent6" hlink="hlink" folHlink="folHlink"/>
   <p:sldLayoutIdLst>
-    <p:sldLayoutId xmlns:r="http://schemas.openxmlformats.org/officeDocument/2006/relationships" id="2147483649" r:id="R248e36c36c024aec"/>
-    <p:sldLayoutId xmlns:r="http://schemas.openxmlformats.org/officeDocument/2006/relationships" id="2147483650" r:id="R88d21ff2b2b945ac"/>
-    <p:sldLayoutId xmlns:r="http://schemas.openxmlformats.org/officeDocument/2006/relationships" id="2147483651" r:id="R5e726ddb9ab84868"/>
-    <p:sldLayoutId xmlns:r="http://schemas.openxmlformats.org/officeDocument/2006/relationships" id="2147483652" r:id="R5d27c16274354d91"/>
-    <p:sldLayoutId xmlns:r="http://schemas.openxmlformats.org/officeDocument/2006/relationships" id="2147483653" r:id="Re670eb337fe54968"/>
-    <p:sldLayoutId xmlns:r="http://schemas.openxmlformats.org/officeDocument/2006/relationships" id="2147483654" r:id="R662d74552dfc4cb0"/>
+    <p:sldLayoutId xmlns:r="http://schemas.openxmlformats.org/officeDocument/2006/relationships" id="2147483649" r:id="Rcc208ed050524b89"/>
+    <p:sldLayoutId xmlns:r="http://schemas.openxmlformats.org/officeDocument/2006/relationships" id="2147483650" r:id="R4861d92f5f2047c2"/>
+    <p:sldLayoutId xmlns:r="http://schemas.openxmlformats.org/officeDocument/2006/relationships" id="2147483651" r:id="Rfbd39e3c284d4fd2"/>
+    <p:sldLayoutId xmlns:r="http://schemas.openxmlformats.org/officeDocument/2006/relationships" id="2147483652" r:id="R99241679d4f44c55"/>
+    <p:sldLayoutId xmlns:r="http://schemas.openxmlformats.org/officeDocument/2006/relationships" id="2147483653" r:id="R306cfc80a26343cd"/>
+    <p:sldLayoutId xmlns:r="http://schemas.openxmlformats.org/officeDocument/2006/relationships" id="2147483654" r:id="Rbbf2d6dc45f04206"/>
   </p:sldLayoutIdLst>
   <p:txStyles>
     <p:titleStyle>
@@ -2998,7 +2998,7 @@
           <p:cNvPr id="15" name="">
             <a:extLst xmlns:a="http://schemas.openxmlformats.org/drawingml/2006/main">
               <a:ext uri="{FF2B5EF4-FFF2-40B4-BE49-F238E27FC236}">
-                <a16:creationId xmlns:a16="http://schemas.microsoft.com/office/drawing/2014/main" id="{66ED5C00-70B0-47CF-B037-9C3E0A707696}"/>
+                <a16:creationId xmlns:a16="http://schemas.microsoft.com/office/drawing/2014/main" id="{1A75FC12-1636-4B7B-9EBC-05CB224B1F0F}"/>
               </a:ext>
             </a:extLst>
           </p:cNvPr>
@@ -3156,7 +3156,7 @@
           <p:cNvPr id="2" name="">
             <a:extLst xmlns:a="http://schemas.openxmlformats.org/drawingml/2006/main">
               <a:ext uri="{FF2B5EF4-FFF2-40B4-BE49-F238E27FC236}">
-                <a16:creationId xmlns:a16="http://schemas.microsoft.com/office/drawing/2014/main" id="{F7514E19-880B-4547-9E99-86199F03DB54}"/>
+                <a16:creationId xmlns:a16="http://schemas.microsoft.com/office/drawing/2014/main" id="{6B8394CC-F32D-473C-B6C7-A518F634307A}"/>
               </a:ext>
             </a:extLst>
           </p:cNvPr>
@@ -3314,7 +3314,7 @@
           <p:cNvPr id="3" name="">
             <a:extLst xmlns:a="http://schemas.openxmlformats.org/drawingml/2006/main">
               <a:ext uri="{FF2B5EF4-FFF2-40B4-BE49-F238E27FC236}">
-                <a16:creationId xmlns:a16="http://schemas.microsoft.com/office/drawing/2014/main" id="{5407464A-DC0E-4E7B-B0C5-33F60FFAD276}"/>
+                <a16:creationId xmlns:a16="http://schemas.microsoft.com/office/drawing/2014/main" id="{F6ACCACB-693B-4A8D-AA36-8F51C5147227}"/>
               </a:ext>
             </a:extLst>
           </p:cNvPr>
@@ -3324,7 +3324,7 @@
           <p:nvPr/>
         </p:nvPicPr>
         <p:blipFill>
-          <a:blip xmlns:r="http://schemas.openxmlformats.org/officeDocument/2006/relationships" xmlns:a="http://schemas.openxmlformats.org/drawingml/2006/main" r:embed="R094029139d5b4448"/>
+          <a:blip xmlns:r="http://schemas.openxmlformats.org/officeDocument/2006/relationships" xmlns:a="http://schemas.openxmlformats.org/drawingml/2006/main" r:embed="R9b36af31560640c3"/>
           <a:stretch xmlns:a="http://schemas.openxmlformats.org/drawingml/2006/main"/>
         </p:blipFill>
         <p:spPr>
@@ -3342,7 +3342,7 @@
           <p:cNvPr id="4" name="">
             <a:extLst xmlns:a="http://schemas.openxmlformats.org/drawingml/2006/main">
               <a:ext uri="{FF2B5EF4-FFF2-40B4-BE49-F238E27FC236}">
-                <a16:creationId xmlns:a16="http://schemas.microsoft.com/office/drawing/2014/main" id="{99CCA8A0-C54D-4076-88E5-99D396BB231A}"/>
+                <a16:creationId xmlns:a16="http://schemas.microsoft.com/office/drawing/2014/main" id="{B53265E0-9503-4F1A-853E-B4435E2F32F0}"/>
               </a:ext>
             </a:extLst>
           </p:cNvPr>
@@ -3500,7 +3500,7 @@
           <p:cNvPr id="5" name="">
             <a:extLst xmlns:a="http://schemas.openxmlformats.org/drawingml/2006/main">
               <a:ext uri="{FF2B5EF4-FFF2-40B4-BE49-F238E27FC236}">
-                <a16:creationId xmlns:a16="http://schemas.microsoft.com/office/drawing/2014/main" id="{6C12C3EA-F2AF-42FF-94D0-7F7B797469BF}"/>
+                <a16:creationId xmlns:a16="http://schemas.microsoft.com/office/drawing/2014/main" id="{21E1D198-C987-4A3D-B0F6-6D26A35351A9}"/>
               </a:ext>
             </a:extLst>
           </p:cNvPr>
@@ -3510,7 +3510,7 @@
           <p:nvPr/>
         </p:nvPicPr>
         <p:blipFill>
-          <a:blip xmlns:r="http://schemas.openxmlformats.org/officeDocument/2006/relationships" xmlns:a="http://schemas.openxmlformats.org/drawingml/2006/main" r:embed="R83b885e017b54235"/>
+          <a:blip xmlns:r="http://schemas.openxmlformats.org/officeDocument/2006/relationships" xmlns:a="http://schemas.openxmlformats.org/drawingml/2006/main" r:embed="R65ff6ec8c49047f4"/>
           <a:stretch xmlns:a="http://schemas.openxmlformats.org/drawingml/2006/main"/>
         </p:blipFill>
         <p:spPr>
@@ -3528,7 +3528,7 @@
           <p:cNvPr id="6" name="">
             <a:extLst xmlns:a="http://schemas.openxmlformats.org/drawingml/2006/main">
               <a:ext uri="{FF2B5EF4-FFF2-40B4-BE49-F238E27FC236}">
-                <a16:creationId xmlns:a16="http://schemas.microsoft.com/office/drawing/2014/main" id="{772E12DC-AB08-4C04-B5F1-74F229B833B5}"/>
+                <a16:creationId xmlns:a16="http://schemas.microsoft.com/office/drawing/2014/main" id="{1E529F7E-6B03-4595-BB76-A27FBF80E48C}"/>
               </a:ext>
             </a:extLst>
           </p:cNvPr>
@@ -3686,7 +3686,7 @@
           <p:cNvPr id="7" name="">
             <a:extLst xmlns:a="http://schemas.openxmlformats.org/drawingml/2006/main">
               <a:ext uri="{FF2B5EF4-FFF2-40B4-BE49-F238E27FC236}">
-                <a16:creationId xmlns:a16="http://schemas.microsoft.com/office/drawing/2014/main" id="{C6B76879-42F3-42A4-B2CE-79654841C91E}"/>
+                <a16:creationId xmlns:a16="http://schemas.microsoft.com/office/drawing/2014/main" id="{119036D2-C2DB-49FF-9728-D25FEF4FD6D4}"/>
               </a:ext>
             </a:extLst>
           </p:cNvPr>
@@ -3844,7 +3844,7 @@
           <p:cNvPr id="8" name="">
             <a:extLst xmlns:a="http://schemas.openxmlformats.org/drawingml/2006/main">
               <a:ext uri="{FF2B5EF4-FFF2-40B4-BE49-F238E27FC236}">
-                <a16:creationId xmlns:a16="http://schemas.microsoft.com/office/drawing/2014/main" id="{8ECD087C-4FD0-42D3-A2A1-6C63997972A9}"/>
+                <a16:creationId xmlns:a16="http://schemas.microsoft.com/office/drawing/2014/main" id="{4F8E8E4A-A532-4318-92C8-4EF7C11A3E1E}"/>
               </a:ext>
             </a:extLst>
           </p:cNvPr>
@@ -3854,7 +3854,7 @@
           <p:nvPr/>
         </p:nvPicPr>
         <p:blipFill>
-          <a:blip xmlns:r="http://schemas.openxmlformats.org/officeDocument/2006/relationships" xmlns:a="http://schemas.openxmlformats.org/drawingml/2006/main" r:embed="R8bb8bf5600394c40"/>
+          <a:blip xmlns:r="http://schemas.openxmlformats.org/officeDocument/2006/relationships" xmlns:a="http://schemas.openxmlformats.org/drawingml/2006/main" r:embed="R80133937467441bb"/>
           <a:stretch xmlns:a="http://schemas.openxmlformats.org/drawingml/2006/main"/>
         </p:blipFill>
         <p:spPr>
@@ -3872,7 +3872,7 @@
           <p:cNvPr id="9" name="">
             <a:extLst xmlns:a="http://schemas.openxmlformats.org/drawingml/2006/main">
               <a:ext uri="{FF2B5EF4-FFF2-40B4-BE49-F238E27FC236}">
-                <a16:creationId xmlns:a16="http://schemas.microsoft.com/office/drawing/2014/main" id="{015E85DE-0997-41A9-B869-C2C1AD1DB91F}"/>
+                <a16:creationId xmlns:a16="http://schemas.microsoft.com/office/drawing/2014/main" id="{C9365177-3766-4F12-8705-16850F05E873}"/>
               </a:ext>
             </a:extLst>
           </p:cNvPr>
@@ -4030,7 +4030,7 @@
           <p:cNvPr id="10" name="">
             <a:extLst xmlns:a="http://schemas.openxmlformats.org/drawingml/2006/main">
               <a:ext uri="{FF2B5EF4-FFF2-40B4-BE49-F238E27FC236}">
-                <a16:creationId xmlns:a16="http://schemas.microsoft.com/office/drawing/2014/main" id="{31F781DE-AECD-4977-94A8-AD8047CDCF92}"/>
+                <a16:creationId xmlns:a16="http://schemas.microsoft.com/office/drawing/2014/main" id="{675EA985-C05F-4DA1-B797-F8CD1DCB9C25}"/>
               </a:ext>
             </a:extLst>
           </p:cNvPr>
@@ -4188,7 +4188,7 @@
           <p:cNvPr id="11" name="">
             <a:extLst xmlns:a="http://schemas.openxmlformats.org/drawingml/2006/main">
               <a:ext uri="{FF2B5EF4-FFF2-40B4-BE49-F238E27FC236}">
-                <a16:creationId xmlns:a16="http://schemas.microsoft.com/office/drawing/2014/main" id="{90EED3A6-4644-4F9B-BB2B-0B6E97E1E204}"/>
+                <a16:creationId xmlns:a16="http://schemas.microsoft.com/office/drawing/2014/main" id="{FA5062AA-7019-474B-864E-A9B2A00D7AA0}"/>
               </a:ext>
             </a:extLst>
           </p:cNvPr>
@@ -4198,7 +4198,7 @@
           <p:nvPr/>
         </p:nvPicPr>
         <p:blipFill>
-          <a:blip xmlns:r="http://schemas.openxmlformats.org/officeDocument/2006/relationships" xmlns:a="http://schemas.openxmlformats.org/drawingml/2006/main" r:embed="Rf567afa41db943fb"/>
+          <a:blip xmlns:r="http://schemas.openxmlformats.org/officeDocument/2006/relationships" xmlns:a="http://schemas.openxmlformats.org/drawingml/2006/main" r:embed="Rf86a4515296d4f49"/>
           <a:stretch xmlns:a="http://schemas.openxmlformats.org/drawingml/2006/main"/>
         </p:blipFill>
         <p:spPr>
@@ -4216,7 +4216,7 @@
           <p:cNvPr id="12" name="">
             <a:extLst xmlns:a="http://schemas.openxmlformats.org/drawingml/2006/main">
               <a:ext uri="{FF2B5EF4-FFF2-40B4-BE49-F238E27FC236}">
-                <a16:creationId xmlns:a16="http://schemas.microsoft.com/office/drawing/2014/main" id="{E6C765A6-D1C3-4D7D-BB4B-6ADB8FE8A69F}"/>
+                <a16:creationId xmlns:a16="http://schemas.microsoft.com/office/drawing/2014/main" id="{29CB0C9A-F5CA-4BD0-9D0D-FBEF65199ADC}"/>
               </a:ext>
             </a:extLst>
           </p:cNvPr>
@@ -4374,7 +4374,7 @@
           <p:cNvPr id="13" name="">
             <a:extLst xmlns:a="http://schemas.openxmlformats.org/drawingml/2006/main">
               <a:ext uri="{FF2B5EF4-FFF2-40B4-BE49-F238E27FC236}">
-                <a16:creationId xmlns:a16="http://schemas.microsoft.com/office/drawing/2014/main" id="{7B934DF7-C621-49E6-A6B9-6FF8E02A8371}"/>
+                <a16:creationId xmlns:a16="http://schemas.microsoft.com/office/drawing/2014/main" id="{F94778C9-900A-4116-8516-5EB0B8212FD7}"/>
               </a:ext>
             </a:extLst>
           </p:cNvPr>
@@ -4532,7 +4532,7 @@
           <p:cNvPr id="14" name="">
             <a:extLst xmlns:a="http://schemas.openxmlformats.org/drawingml/2006/main">
               <a:ext uri="{FF2B5EF4-FFF2-40B4-BE49-F238E27FC236}">
-                <a16:creationId xmlns:a16="http://schemas.microsoft.com/office/drawing/2014/main" id="{0646C069-DC53-4EF3-A84B-7BBB980A3429}"/>
+                <a16:creationId xmlns:a16="http://schemas.microsoft.com/office/drawing/2014/main" id="{D38186F0-D4EC-47F8-8338-874B1B444888}"/>
               </a:ext>
             </a:extLst>
           </p:cNvPr>
@@ -4716,7 +4716,7 @@
     </p:spTree>
     <p:extLst>
       <p:ext uri="{BB962C8B-B14F-4D97-AF65-F5344CB8AC3E}">
-        <p14:creationId xmlns:p14="http://schemas.microsoft.com/office/powerpoint/2010/main" val="1750868273"/>
+        <p14:creationId xmlns:p14="http://schemas.microsoft.com/office/powerpoint/2010/main" val="1750514019"/>
       </p:ext>
     </p:extLst>
   </p:cSld>
@@ -4744,10 +4744,10 @@
       </p:grpSpPr>
       <p:sp>
         <p:nvSpPr>
-          <p:cNvPr id="14" name="">
+          <p:cNvPr id="10" name="">
             <a:extLst xmlns:a="http://schemas.openxmlformats.org/drawingml/2006/main">
               <a:ext uri="{FF2B5EF4-FFF2-40B4-BE49-F238E27FC236}">
-                <a16:creationId xmlns:a16="http://schemas.microsoft.com/office/drawing/2014/main" id="{3FF1ACFE-E853-4C21-AB5C-1CE7825CF5A7}"/>
+                <a16:creationId xmlns:a16="http://schemas.microsoft.com/office/drawing/2014/main" id="{7052CB65-2532-4FF3-B352-E0F1DC3F6019}"/>
               </a:ext>
             </a:extLst>
           </p:cNvPr>
@@ -4905,7 +4905,7 @@
           <p:cNvPr id="2" name="">
             <a:extLst xmlns:a="http://schemas.openxmlformats.org/drawingml/2006/main">
               <a:ext uri="{FF2B5EF4-FFF2-40B4-BE49-F238E27FC236}">
-                <a16:creationId xmlns:a16="http://schemas.microsoft.com/office/drawing/2014/main" id="{D30E70B0-9A44-4371-B3AE-BDE1D83A2BDB}"/>
+                <a16:creationId xmlns:a16="http://schemas.microsoft.com/office/drawing/2014/main" id="{1FF2500D-B9A5-498A-993F-22061EB54233}"/>
               </a:ext>
             </a:extLst>
           </p:cNvPr>
@@ -5063,7 +5063,7 @@
           <p:cNvPr id="3" name="">
             <a:extLst xmlns:a="http://schemas.openxmlformats.org/drawingml/2006/main">
               <a:ext uri="{FF2B5EF4-FFF2-40B4-BE49-F238E27FC236}">
-                <a16:creationId xmlns:a16="http://schemas.microsoft.com/office/drawing/2014/main" id="{5A09D370-068E-430E-B9FF-040990C23D3C}"/>
+                <a16:creationId xmlns:a16="http://schemas.microsoft.com/office/drawing/2014/main" id="{68AFA0E2-8A1B-450E-BC61-ED5C99039C8A}"/>
               </a:ext>
             </a:extLst>
           </p:cNvPr>
@@ -5216,40 +5216,12 @@
           </a:p>
         </p:txBody>
       </p:sp>
-      <p:pic>
-        <p:nvPicPr>
+      <p:sp>
+        <p:nvSpPr>
           <p:cNvPr id="4" name="">
             <a:extLst xmlns:a="http://schemas.openxmlformats.org/drawingml/2006/main">
               <a:ext uri="{FF2B5EF4-FFF2-40B4-BE49-F238E27FC236}">
-                <a16:creationId xmlns:a16="http://schemas.microsoft.com/office/drawing/2014/main" id="{2CC5647F-A998-4FDA-9385-E6E53CE6310D}"/>
-              </a:ext>
-            </a:extLst>
-          </p:cNvPr>
-          <p:cNvPicPr>
-            <a:picLocks xmlns:a="http://schemas.openxmlformats.org/drawingml/2006/main" noChangeAspect="1"/>
-          </p:cNvPicPr>
-          <p:nvPr/>
-        </p:nvPicPr>
-        <p:blipFill>
-          <a:blip xmlns:r="http://schemas.openxmlformats.org/officeDocument/2006/relationships" xmlns:a="http://schemas.openxmlformats.org/drawingml/2006/main" r:embed="Rdac3d0151e4a44d8"/>
-          <a:stretch xmlns:a="http://schemas.openxmlformats.org/drawingml/2006/main"/>
-        </p:blipFill>
-        <p:spPr>
-          <a:xfrm xmlns:a="http://schemas.openxmlformats.org/drawingml/2006/main">
-            <a:off x="609600" y="1952625"/>
-            <a:ext cx="457200" cy="457200"/>
-          </a:xfrm>
-          <a:prstGeom xmlns:a="http://schemas.openxmlformats.org/drawingml/2006/main" prst="rect">
-            <a:avLst/>
-          </a:prstGeom>
-        </p:spPr>
-      </p:pic>
-      <p:sp>
-        <p:nvSpPr>
-          <p:cNvPr id="5" name="">
-            <a:extLst xmlns:a="http://schemas.openxmlformats.org/drawingml/2006/main">
-              <a:ext uri="{FF2B5EF4-FFF2-40B4-BE49-F238E27FC236}">
-                <a16:creationId xmlns:a16="http://schemas.microsoft.com/office/drawing/2014/main" id="{33454821-EDFE-4C8E-BD0B-69966178AEA5}"/>
+                <a16:creationId xmlns:a16="http://schemas.microsoft.com/office/drawing/2014/main" id="{7C613CE4-3876-4F0F-8D47-945E4A7D30BA}"/>
               </a:ext>
             </a:extLst>
           </p:cNvPr>
@@ -5260,668 +5232,8 @@
         </p:nvSpPr>
         <p:spPr>
           <a:xfrm xmlns:a="http://schemas.openxmlformats.org/drawingml/2006/main">
-            <a:off x="609600" y="2667000"/>
-            <a:ext cx="5295900" cy="495300"/>
-          </a:xfrm>
-          <a:prstGeom xmlns:a="http://schemas.openxmlformats.org/drawingml/2006/main" prst="rect">
-            <a:avLst/>
-          </a:prstGeom>
-          <a:noFill xmlns:a="http://schemas.openxmlformats.org/drawingml/2006/main"/>
-          <a:ln xmlns:a="http://schemas.openxmlformats.org/drawingml/2006/main" w="0">
-            <a:noFill/>
-          </a:ln>
-        </p:spPr>
-        <p:txBody>
-          <a:bodyPr xmlns:a="http://schemas.openxmlformats.org/drawingml/2006/main">
-            <a:noAutofit/>
-          </a:bodyPr>
-          <a:lstStyle xmlns:a="http://schemas.openxmlformats.org/drawingml/2006/main">
-            <a:defPPr>
-              <a:defRPr sz="2025" b="1">
-                <a:solidFill>
-                  <a:srgbClr val="FFFFFF"/>
-                </a:solidFill>
-                <a:latin typeface="Arial"/>
-                <a:ea typeface="Arial"/>
-                <a:cs typeface="Arial"/>
-              </a:defRPr>
-            </a:defPPr>
-            <a:lvl1pPr>
-              <a:defRPr sz="2025" b="1">
-                <a:solidFill>
-                  <a:srgbClr val="FFFFFF"/>
-                </a:solidFill>
-                <a:latin typeface="Arial"/>
-                <a:ea typeface="Arial"/>
-                <a:cs typeface="Arial"/>
-              </a:defRPr>
-            </a:lvl1pPr>
-            <a:lvl2pPr>
-              <a:defRPr sz="2025" b="1">
-                <a:solidFill>
-                  <a:srgbClr val="FFFFFF"/>
-                </a:solidFill>
-                <a:latin typeface="Arial"/>
-                <a:ea typeface="Arial"/>
-                <a:cs typeface="Arial"/>
-              </a:defRPr>
-            </a:lvl2pPr>
-            <a:lvl3pPr>
-              <a:defRPr sz="2025" b="1">
-                <a:solidFill>
-                  <a:srgbClr val="FFFFFF"/>
-                </a:solidFill>
-                <a:latin typeface="Arial"/>
-                <a:ea typeface="Arial"/>
-                <a:cs typeface="Arial"/>
-              </a:defRPr>
-            </a:lvl3pPr>
-            <a:lvl4pPr>
-              <a:defRPr sz="2025" b="1">
-                <a:solidFill>
-                  <a:srgbClr val="FFFFFF"/>
-                </a:solidFill>
-                <a:latin typeface="Arial"/>
-                <a:ea typeface="Arial"/>
-                <a:cs typeface="Arial"/>
-              </a:defRPr>
-            </a:lvl4pPr>
-            <a:lvl5pPr>
-              <a:defRPr sz="2025" b="1">
-                <a:solidFill>
-                  <a:srgbClr val="FFFFFF"/>
-                </a:solidFill>
-                <a:latin typeface="Arial"/>
-                <a:ea typeface="Arial"/>
-                <a:cs typeface="Arial"/>
-              </a:defRPr>
-            </a:lvl5pPr>
-            <a:lvl6pPr>
-              <a:defRPr sz="2025" b="1">
-                <a:solidFill>
-                  <a:srgbClr val="FFFFFF"/>
-                </a:solidFill>
-                <a:latin typeface="Arial"/>
-                <a:ea typeface="Arial"/>
-                <a:cs typeface="Arial"/>
-              </a:defRPr>
-            </a:lvl6pPr>
-            <a:lvl7pPr>
-              <a:defRPr sz="2025" b="1">
-                <a:solidFill>
-                  <a:srgbClr val="FFFFFF"/>
-                </a:solidFill>
-                <a:latin typeface="Arial"/>
-                <a:ea typeface="Arial"/>
-                <a:cs typeface="Arial"/>
-              </a:defRPr>
-            </a:lvl7pPr>
-            <a:lvl8pPr>
-              <a:defRPr sz="2025" b="1">
-                <a:solidFill>
-                  <a:srgbClr val="FFFFFF"/>
-                </a:solidFill>
-                <a:latin typeface="Arial"/>
-                <a:ea typeface="Arial"/>
-                <a:cs typeface="Arial"/>
-              </a:defRPr>
-            </a:lvl8pPr>
-            <a:lvl9pPr>
-              <a:defRPr sz="2025" b="1">
-                <a:solidFill>
-                  <a:srgbClr val="FFFFFF"/>
-                </a:solidFill>
-                <a:latin typeface="Arial"/>
-                <a:ea typeface="Arial"/>
-                <a:cs typeface="Arial"/>
-              </a:defRPr>
-            </a:lvl9pPr>
-          </a:lstStyle>
-          <a:p xmlns:a="http://schemas.openxmlformats.org/drawingml/2006/main">
-            <a:pPr>
-              <a:defRPr sz="2025" b="1">
-                <a:solidFill>
-                  <a:srgbClr val="FFFFFF"/>
-                </a:solidFill>
-                <a:latin typeface="Arial"/>
-                <a:ea typeface="Arial"/>
-                <a:cs typeface="Arial"/>
-              </a:defRPr>
-            </a:pPr>
-            <a:r>
-              <a:rPr sz="2025" b="1">
-                <a:solidFill>
-                  <a:srgbClr val="FFFFFF"/>
-                </a:solidFill>
-                <a:latin typeface="Arial"/>
-                <a:ea typeface="Arial"/>
-                <a:cs typeface="Arial"/>
-              </a:rPr>
-              <a:t>Lidhja</a:t>
-            </a:r>
-          </a:p>
-        </p:txBody>
-      </p:sp>
-      <p:sp>
-        <p:nvSpPr>
-          <p:cNvPr id="6" name="">
-            <a:extLst xmlns:a="http://schemas.openxmlformats.org/drawingml/2006/main">
-              <a:ext uri="{FF2B5EF4-FFF2-40B4-BE49-F238E27FC236}">
-                <a16:creationId xmlns:a16="http://schemas.microsoft.com/office/drawing/2014/main" id="{1DF7A7D0-A9E2-4146-8E4B-53085F35A6A4}"/>
-              </a:ext>
-            </a:extLst>
-          </p:cNvPr>
-          <p:cNvSpPr>
-            <a:spLocks xmlns:a="http://schemas.openxmlformats.org/drawingml/2006/main" noGrp="1"/>
-          </p:cNvSpPr>
-          <p:nvPr/>
-        </p:nvSpPr>
-        <p:spPr>
-          <a:xfrm xmlns:a="http://schemas.openxmlformats.org/drawingml/2006/main">
-            <a:off x="609600" y="3219450"/>
-            <a:ext cx="5295900" cy="571500"/>
-          </a:xfrm>
-          <a:prstGeom xmlns:a="http://schemas.openxmlformats.org/drawingml/2006/main" prst="rect">
-            <a:avLst/>
-          </a:prstGeom>
-          <a:noFill xmlns:a="http://schemas.openxmlformats.org/drawingml/2006/main"/>
-          <a:ln xmlns:a="http://schemas.openxmlformats.org/drawingml/2006/main" w="0">
-            <a:noFill/>
-          </a:ln>
-        </p:spPr>
-        <p:txBody>
-          <a:bodyPr xmlns:a="http://schemas.openxmlformats.org/drawingml/2006/main">
-            <a:noAutofit/>
-          </a:bodyPr>
-          <a:lstStyle xmlns:a="http://schemas.openxmlformats.org/drawingml/2006/main">
-            <a:defPPr>
-              <a:defRPr sz="1650" b="0">
-                <a:solidFill>
-                  <a:srgbClr val="C8D3E6"/>
-                </a:solidFill>
-                <a:latin typeface="Arial"/>
-                <a:ea typeface="Arial"/>
-                <a:cs typeface="Arial"/>
-              </a:defRPr>
-            </a:defPPr>
-            <a:lvl1pPr>
-              <a:defRPr sz="1650" b="0">
-                <a:solidFill>
-                  <a:srgbClr val="C8D3E6"/>
-                </a:solidFill>
-                <a:latin typeface="Arial"/>
-                <a:ea typeface="Arial"/>
-                <a:cs typeface="Arial"/>
-              </a:defRPr>
-            </a:lvl1pPr>
-            <a:lvl2pPr>
-              <a:defRPr sz="1650" b="0">
-                <a:solidFill>
-                  <a:srgbClr val="C8D3E6"/>
-                </a:solidFill>
-                <a:latin typeface="Arial"/>
-                <a:ea typeface="Arial"/>
-                <a:cs typeface="Arial"/>
-              </a:defRPr>
-            </a:lvl2pPr>
-            <a:lvl3pPr>
-              <a:defRPr sz="1650" b="0">
-                <a:solidFill>
-                  <a:srgbClr val="C8D3E6"/>
-                </a:solidFill>
-                <a:latin typeface="Arial"/>
-                <a:ea typeface="Arial"/>
-                <a:cs typeface="Arial"/>
-              </a:defRPr>
-            </a:lvl3pPr>
-            <a:lvl4pPr>
-              <a:defRPr sz="1650" b="0">
-                <a:solidFill>
-                  <a:srgbClr val="C8D3E6"/>
-                </a:solidFill>
-                <a:latin typeface="Arial"/>
-                <a:ea typeface="Arial"/>
-                <a:cs typeface="Arial"/>
-              </a:defRPr>
-            </a:lvl4pPr>
-            <a:lvl5pPr>
-              <a:defRPr sz="1650" b="0">
-                <a:solidFill>
-                  <a:srgbClr val="C8D3E6"/>
-                </a:solidFill>
-                <a:latin typeface="Arial"/>
-                <a:ea typeface="Arial"/>
-                <a:cs typeface="Arial"/>
-              </a:defRPr>
-            </a:lvl5pPr>
-            <a:lvl6pPr>
-              <a:defRPr sz="1650" b="0">
-                <a:solidFill>
-                  <a:srgbClr val="C8D3E6"/>
-                </a:solidFill>
-                <a:latin typeface="Arial"/>
-                <a:ea typeface="Arial"/>
-                <a:cs typeface="Arial"/>
-              </a:defRPr>
-            </a:lvl6pPr>
-            <a:lvl7pPr>
-              <a:defRPr sz="1650" b="0">
-                <a:solidFill>
-                  <a:srgbClr val="C8D3E6"/>
-                </a:solidFill>
-                <a:latin typeface="Arial"/>
-                <a:ea typeface="Arial"/>
-                <a:cs typeface="Arial"/>
-              </a:defRPr>
-            </a:lvl7pPr>
-            <a:lvl8pPr>
-              <a:defRPr sz="1650" b="0">
-                <a:solidFill>
-                  <a:srgbClr val="C8D3E6"/>
-                </a:solidFill>
-                <a:latin typeface="Arial"/>
-                <a:ea typeface="Arial"/>
-                <a:cs typeface="Arial"/>
-              </a:defRPr>
-            </a:lvl8pPr>
-            <a:lvl9pPr>
-              <a:defRPr sz="1650" b="0">
-                <a:solidFill>
-                  <a:srgbClr val="C8D3E6"/>
-                </a:solidFill>
-                <a:latin typeface="Arial"/>
-                <a:ea typeface="Arial"/>
-                <a:cs typeface="Arial"/>
-              </a:defRPr>
-            </a:lvl9pPr>
-          </a:lstStyle>
-          <a:p xmlns:a="http://schemas.openxmlformats.org/drawingml/2006/main">
-            <a:pPr>
-              <a:defRPr sz="1650" b="0">
-                <a:solidFill>
-                  <a:srgbClr val="C8D3E6"/>
-                </a:solidFill>
-                <a:latin typeface="Arial"/>
-                <a:ea typeface="Arial"/>
-                <a:cs typeface="Arial"/>
-              </a:defRPr>
-            </a:pPr>
-            <a:r>
-              <a:rPr sz="1650" b="0">
-                <a:solidFill>
-                  <a:srgbClr val="C8D3E6"/>
-                </a:solidFill>
-                <a:latin typeface="Arial"/>
-                <a:ea typeface="Arial"/>
-                <a:cs typeface="Arial"/>
-              </a:rPr>
-              <a:t>Duket aktive</a:t>
-            </a:r>
-          </a:p>
-        </p:txBody>
-      </p:sp>
-      <p:pic>
-        <p:nvPicPr>
-          <p:cNvPr id="7" name="">
-            <a:extLst xmlns:a="http://schemas.openxmlformats.org/drawingml/2006/main">
-              <a:ext uri="{FF2B5EF4-FFF2-40B4-BE49-F238E27FC236}">
-                <a16:creationId xmlns:a16="http://schemas.microsoft.com/office/drawing/2014/main" id="{C5193A2F-8707-4EBD-9513-6F495B51F11C}"/>
-              </a:ext>
-            </a:extLst>
-          </p:cNvPr>
-          <p:cNvPicPr>
-            <a:picLocks xmlns:a="http://schemas.openxmlformats.org/drawingml/2006/main" noChangeAspect="1"/>
-          </p:cNvPicPr>
-          <p:nvPr/>
-        </p:nvPicPr>
-        <p:blipFill>
-          <a:blip xmlns:r="http://schemas.openxmlformats.org/officeDocument/2006/relationships" xmlns:a="http://schemas.openxmlformats.org/drawingml/2006/main" r:embed="R4d21bca71db84785"/>
-          <a:stretch xmlns:a="http://schemas.openxmlformats.org/drawingml/2006/main"/>
-        </p:blipFill>
-        <p:spPr>
-          <a:xfrm xmlns:a="http://schemas.openxmlformats.org/drawingml/2006/main">
-            <a:off x="6267450" y="1952625"/>
-            <a:ext cx="457200" cy="457200"/>
-          </a:xfrm>
-          <a:prstGeom xmlns:a="http://schemas.openxmlformats.org/drawingml/2006/main" prst="rect">
-            <a:avLst/>
-          </a:prstGeom>
-        </p:spPr>
-      </p:pic>
-      <p:sp>
-        <p:nvSpPr>
-          <p:cNvPr id="8" name="">
-            <a:extLst xmlns:a="http://schemas.openxmlformats.org/drawingml/2006/main">
-              <a:ext uri="{FF2B5EF4-FFF2-40B4-BE49-F238E27FC236}">
-                <a16:creationId xmlns:a16="http://schemas.microsoft.com/office/drawing/2014/main" id="{222A4C1B-6825-4DE7-9D7C-DC57F23D4CB4}"/>
-              </a:ext>
-            </a:extLst>
-          </p:cNvPr>
-          <p:cNvSpPr>
-            <a:spLocks xmlns:a="http://schemas.openxmlformats.org/drawingml/2006/main" noGrp="1"/>
-          </p:cNvSpPr>
-          <p:nvPr/>
-        </p:nvSpPr>
-        <p:spPr>
-          <a:xfrm xmlns:a="http://schemas.openxmlformats.org/drawingml/2006/main">
-            <a:off x="6267450" y="2667000"/>
-            <a:ext cx="5295900" cy="495300"/>
-          </a:xfrm>
-          <a:prstGeom xmlns:a="http://schemas.openxmlformats.org/drawingml/2006/main" prst="rect">
-            <a:avLst/>
-          </a:prstGeom>
-          <a:noFill xmlns:a="http://schemas.openxmlformats.org/drawingml/2006/main"/>
-          <a:ln xmlns:a="http://schemas.openxmlformats.org/drawingml/2006/main" w="0">
-            <a:noFill/>
-          </a:ln>
-        </p:spPr>
-        <p:txBody>
-          <a:bodyPr xmlns:a="http://schemas.openxmlformats.org/drawingml/2006/main">
-            <a:noAutofit/>
-          </a:bodyPr>
-          <a:lstStyle xmlns:a="http://schemas.openxmlformats.org/drawingml/2006/main">
-            <a:defPPr>
-              <a:defRPr sz="2025" b="1">
-                <a:solidFill>
-                  <a:srgbClr val="FFFFFF"/>
-                </a:solidFill>
-                <a:latin typeface="Arial"/>
-                <a:ea typeface="Arial"/>
-                <a:cs typeface="Arial"/>
-              </a:defRPr>
-            </a:defPPr>
-            <a:lvl1pPr>
-              <a:defRPr sz="2025" b="1">
-                <a:solidFill>
-                  <a:srgbClr val="FFFFFF"/>
-                </a:solidFill>
-                <a:latin typeface="Arial"/>
-                <a:ea typeface="Arial"/>
-                <a:cs typeface="Arial"/>
-              </a:defRPr>
-            </a:lvl1pPr>
-            <a:lvl2pPr>
-              <a:defRPr sz="2025" b="1">
-                <a:solidFill>
-                  <a:srgbClr val="FFFFFF"/>
-                </a:solidFill>
-                <a:latin typeface="Arial"/>
-                <a:ea typeface="Arial"/>
-                <a:cs typeface="Arial"/>
-              </a:defRPr>
-            </a:lvl2pPr>
-            <a:lvl3pPr>
-              <a:defRPr sz="2025" b="1">
-                <a:solidFill>
-                  <a:srgbClr val="FFFFFF"/>
-                </a:solidFill>
-                <a:latin typeface="Arial"/>
-                <a:ea typeface="Arial"/>
-                <a:cs typeface="Arial"/>
-              </a:defRPr>
-            </a:lvl3pPr>
-            <a:lvl4pPr>
-              <a:defRPr sz="2025" b="1">
-                <a:solidFill>
-                  <a:srgbClr val="FFFFFF"/>
-                </a:solidFill>
-                <a:latin typeface="Arial"/>
-                <a:ea typeface="Arial"/>
-                <a:cs typeface="Arial"/>
-              </a:defRPr>
-            </a:lvl4pPr>
-            <a:lvl5pPr>
-              <a:defRPr sz="2025" b="1">
-                <a:solidFill>
-                  <a:srgbClr val="FFFFFF"/>
-                </a:solidFill>
-                <a:latin typeface="Arial"/>
-                <a:ea typeface="Arial"/>
-                <a:cs typeface="Arial"/>
-              </a:defRPr>
-            </a:lvl5pPr>
-            <a:lvl6pPr>
-              <a:defRPr sz="2025" b="1">
-                <a:solidFill>
-                  <a:srgbClr val="FFFFFF"/>
-                </a:solidFill>
-                <a:latin typeface="Arial"/>
-                <a:ea typeface="Arial"/>
-                <a:cs typeface="Arial"/>
-              </a:defRPr>
-            </a:lvl6pPr>
-            <a:lvl7pPr>
-              <a:defRPr sz="2025" b="1">
-                <a:solidFill>
-                  <a:srgbClr val="FFFFFF"/>
-                </a:solidFill>
-                <a:latin typeface="Arial"/>
-                <a:ea typeface="Arial"/>
-                <a:cs typeface="Arial"/>
-              </a:defRPr>
-            </a:lvl7pPr>
-            <a:lvl8pPr>
-              <a:defRPr sz="2025" b="1">
-                <a:solidFill>
-                  <a:srgbClr val="FFFFFF"/>
-                </a:solidFill>
-                <a:latin typeface="Arial"/>
-                <a:ea typeface="Arial"/>
-                <a:cs typeface="Arial"/>
-              </a:defRPr>
-            </a:lvl8pPr>
-            <a:lvl9pPr>
-              <a:defRPr sz="2025" b="1">
-                <a:solidFill>
-                  <a:srgbClr val="FFFFFF"/>
-                </a:solidFill>
-                <a:latin typeface="Arial"/>
-                <a:ea typeface="Arial"/>
-                <a:cs typeface="Arial"/>
-              </a:defRPr>
-            </a:lvl9pPr>
-          </a:lstStyle>
-          <a:p xmlns:a="http://schemas.openxmlformats.org/drawingml/2006/main">
-            <a:pPr>
-              <a:defRPr sz="2025" b="1">
-                <a:solidFill>
-                  <a:srgbClr val="FFFFFF"/>
-                </a:solidFill>
-                <a:latin typeface="Arial"/>
-                <a:ea typeface="Arial"/>
-                <a:cs typeface="Arial"/>
-              </a:defRPr>
-            </a:pPr>
-            <a:r>
-              <a:rPr sz="2025" b="1">
-                <a:solidFill>
-                  <a:srgbClr val="FFFFFF"/>
-                </a:solidFill>
-                <a:latin typeface="Arial"/>
-                <a:ea typeface="Arial"/>
-                <a:cs typeface="Arial"/>
-              </a:rPr>
-              <a:t>Serveri</a:t>
-            </a:r>
-          </a:p>
-        </p:txBody>
-      </p:sp>
-      <p:sp>
-        <p:nvSpPr>
-          <p:cNvPr id="9" name="">
-            <a:extLst xmlns:a="http://schemas.openxmlformats.org/drawingml/2006/main">
-              <a:ext uri="{FF2B5EF4-FFF2-40B4-BE49-F238E27FC236}">
-                <a16:creationId xmlns:a16="http://schemas.microsoft.com/office/drawing/2014/main" id="{3E7A66F8-5362-4303-8C9D-7295058B96A4}"/>
-              </a:ext>
-            </a:extLst>
-          </p:cNvPr>
-          <p:cNvSpPr>
-            <a:spLocks xmlns:a="http://schemas.openxmlformats.org/drawingml/2006/main" noGrp="1"/>
-          </p:cNvSpPr>
-          <p:nvPr/>
-        </p:nvSpPr>
-        <p:spPr>
-          <a:xfrm xmlns:a="http://schemas.openxmlformats.org/drawingml/2006/main">
-            <a:off x="6267450" y="3219450"/>
-            <a:ext cx="5295900" cy="571500"/>
-          </a:xfrm>
-          <a:prstGeom xmlns:a="http://schemas.openxmlformats.org/drawingml/2006/main" prst="rect">
-            <a:avLst/>
-          </a:prstGeom>
-          <a:noFill xmlns:a="http://schemas.openxmlformats.org/drawingml/2006/main"/>
-          <a:ln xmlns:a="http://schemas.openxmlformats.org/drawingml/2006/main" w="0">
-            <a:noFill/>
-          </a:ln>
-        </p:spPr>
-        <p:txBody>
-          <a:bodyPr xmlns:a="http://schemas.openxmlformats.org/drawingml/2006/main">
-            <a:noAutofit/>
-          </a:bodyPr>
-          <a:lstStyle xmlns:a="http://schemas.openxmlformats.org/drawingml/2006/main">
-            <a:defPPr>
-              <a:defRPr sz="1650" b="0">
-                <a:solidFill>
-                  <a:srgbClr val="C8D3E6"/>
-                </a:solidFill>
-                <a:latin typeface="Arial"/>
-                <a:ea typeface="Arial"/>
-                <a:cs typeface="Arial"/>
-              </a:defRPr>
-            </a:defPPr>
-            <a:lvl1pPr>
-              <a:defRPr sz="1650" b="0">
-                <a:solidFill>
-                  <a:srgbClr val="C8D3E6"/>
-                </a:solidFill>
-                <a:latin typeface="Arial"/>
-                <a:ea typeface="Arial"/>
-                <a:cs typeface="Arial"/>
-              </a:defRPr>
-            </a:lvl1pPr>
-            <a:lvl2pPr>
-              <a:defRPr sz="1650" b="0">
-                <a:solidFill>
-                  <a:srgbClr val="C8D3E6"/>
-                </a:solidFill>
-                <a:latin typeface="Arial"/>
-                <a:ea typeface="Arial"/>
-                <a:cs typeface="Arial"/>
-              </a:defRPr>
-            </a:lvl2pPr>
-            <a:lvl3pPr>
-              <a:defRPr sz="1650" b="0">
-                <a:solidFill>
-                  <a:srgbClr val="C8D3E6"/>
-                </a:solidFill>
-                <a:latin typeface="Arial"/>
-                <a:ea typeface="Arial"/>
-                <a:cs typeface="Arial"/>
-              </a:defRPr>
-            </a:lvl3pPr>
-            <a:lvl4pPr>
-              <a:defRPr sz="1650" b="0">
-                <a:solidFill>
-                  <a:srgbClr val="C8D3E6"/>
-                </a:solidFill>
-                <a:latin typeface="Arial"/>
-                <a:ea typeface="Arial"/>
-                <a:cs typeface="Arial"/>
-              </a:defRPr>
-            </a:lvl4pPr>
-            <a:lvl5pPr>
-              <a:defRPr sz="1650" b="0">
-                <a:solidFill>
-                  <a:srgbClr val="C8D3E6"/>
-                </a:solidFill>
-                <a:latin typeface="Arial"/>
-                <a:ea typeface="Arial"/>
-                <a:cs typeface="Arial"/>
-              </a:defRPr>
-            </a:lvl5pPr>
-            <a:lvl6pPr>
-              <a:defRPr sz="1650" b="0">
-                <a:solidFill>
-                  <a:srgbClr val="C8D3E6"/>
-                </a:solidFill>
-                <a:latin typeface="Arial"/>
-                <a:ea typeface="Arial"/>
-                <a:cs typeface="Arial"/>
-              </a:defRPr>
-            </a:lvl6pPr>
-            <a:lvl7pPr>
-              <a:defRPr sz="1650" b="0">
-                <a:solidFill>
-                  <a:srgbClr val="C8D3E6"/>
-                </a:solidFill>
-                <a:latin typeface="Arial"/>
-                <a:ea typeface="Arial"/>
-                <a:cs typeface="Arial"/>
-              </a:defRPr>
-            </a:lvl7pPr>
-            <a:lvl8pPr>
-              <a:defRPr sz="1650" b="0">
-                <a:solidFill>
-                  <a:srgbClr val="C8D3E6"/>
-                </a:solidFill>
-                <a:latin typeface="Arial"/>
-                <a:ea typeface="Arial"/>
-                <a:cs typeface="Arial"/>
-              </a:defRPr>
-            </a:lvl8pPr>
-            <a:lvl9pPr>
-              <a:defRPr sz="1650" b="0">
-                <a:solidFill>
-                  <a:srgbClr val="C8D3E6"/>
-                </a:solidFill>
-                <a:latin typeface="Arial"/>
-                <a:ea typeface="Arial"/>
-                <a:cs typeface="Arial"/>
-              </a:defRPr>
-            </a:lvl9pPr>
-          </a:lstStyle>
-          <a:p xmlns:a="http://schemas.openxmlformats.org/drawingml/2006/main">
-            <a:pPr>
-              <a:defRPr sz="1650" b="0">
-                <a:solidFill>
-                  <a:srgbClr val="C8D3E6"/>
-                </a:solidFill>
-                <a:latin typeface="Arial"/>
-                <a:ea typeface="Arial"/>
-                <a:cs typeface="Arial"/>
-              </a:defRPr>
-            </a:pPr>
-            <a:r>
-              <a:rPr sz="1650" b="0">
-                <a:solidFill>
-                  <a:srgbClr val="C8D3E6"/>
-                </a:solidFill>
-                <a:latin typeface="Arial"/>
-                <a:ea typeface="Arial"/>
-                <a:cs typeface="Arial"/>
-              </a:rPr>
-              <a:t>Nuk kthen përgjigje</a:t>
-            </a:r>
-          </a:p>
-        </p:txBody>
-      </p:sp>
-      <p:sp>
-        <p:nvSpPr>
-          <p:cNvPr id="10" name="">
-            <a:extLst xmlns:a="http://schemas.openxmlformats.org/drawingml/2006/main">
-              <a:ext uri="{FF2B5EF4-FFF2-40B4-BE49-F238E27FC236}">
-                <a16:creationId xmlns:a16="http://schemas.microsoft.com/office/drawing/2014/main" id="{E88A4C2E-AB0D-45BD-A636-A296F3EE7B45}"/>
-              </a:ext>
-            </a:extLst>
-          </p:cNvPr>
-          <p:cNvSpPr>
-            <a:spLocks xmlns:a="http://schemas.openxmlformats.org/drawingml/2006/main" noGrp="1"/>
-          </p:cNvSpPr>
-          <p:nvPr/>
-        </p:nvSpPr>
-        <p:spPr>
-          <a:xfrm xmlns:a="http://schemas.openxmlformats.org/drawingml/2006/main">
-            <a:off x="609600" y="3924300"/>
-            <a:ext cx="10953750" cy="809625"/>
+            <a:off x="609600" y="1952625"/>
+            <a:ext cx="5334000" cy="1381125"/>
           </a:xfrm>
           <a:prstGeom xmlns:a="http://schemas.openxmlformats.org/drawingml/2006/main" prst="rect">
             <a:avLst/>
@@ -6062,12 +5374,68 @@
           </a:p>
         </p:txBody>
       </p:sp>
+      <p:pic>
+        <p:nvPicPr>
+          <p:cNvPr id="5" name="">
+            <a:extLst xmlns:a="http://schemas.openxmlformats.org/drawingml/2006/main">
+              <a:ext uri="{FF2B5EF4-FFF2-40B4-BE49-F238E27FC236}">
+                <a16:creationId xmlns:a16="http://schemas.microsoft.com/office/drawing/2014/main" id="{0228ADCB-DA9B-4CF9-98B4-54998ED6A2AF}"/>
+              </a:ext>
+            </a:extLst>
+          </p:cNvPr>
+          <p:cNvPicPr>
+            <a:picLocks xmlns:a="http://schemas.openxmlformats.org/drawingml/2006/main" noChangeAspect="1"/>
+          </p:cNvPicPr>
+          <p:nvPr/>
+        </p:nvPicPr>
+        <p:blipFill>
+          <a:blip xmlns:r="http://schemas.openxmlformats.org/officeDocument/2006/relationships" xmlns:a="http://schemas.openxmlformats.org/drawingml/2006/main" r:embed="Re7272a5865494a1a"/>
+          <a:stretch xmlns:a="http://schemas.openxmlformats.org/drawingml/2006/main"/>
+        </p:blipFill>
+        <p:spPr>
+          <a:xfrm xmlns:a="http://schemas.openxmlformats.org/drawingml/2006/main">
+            <a:off x="6334125" y="1952625"/>
+            <a:ext cx="2190750" cy="3409950"/>
+          </a:xfrm>
+          <a:prstGeom xmlns:a="http://schemas.openxmlformats.org/drawingml/2006/main" prst="rect">
+            <a:avLst/>
+          </a:prstGeom>
+        </p:spPr>
+      </p:pic>
+      <p:pic>
+        <p:nvPicPr>
+          <p:cNvPr id="6" name="">
+            <a:extLst xmlns:a="http://schemas.openxmlformats.org/drawingml/2006/main">
+              <a:ext uri="{FF2B5EF4-FFF2-40B4-BE49-F238E27FC236}">
+                <a16:creationId xmlns:a16="http://schemas.microsoft.com/office/drawing/2014/main" id="{7F3CDF2D-C3C6-41D7-A8D2-BAAF57926DE7}"/>
+              </a:ext>
+            </a:extLst>
+          </p:cNvPr>
+          <p:cNvPicPr>
+            <a:picLocks xmlns:a="http://schemas.openxmlformats.org/drawingml/2006/main" noChangeAspect="1"/>
+          </p:cNvPicPr>
+          <p:nvPr/>
+        </p:nvPicPr>
+        <p:blipFill>
+          <a:blip xmlns:r="http://schemas.openxmlformats.org/officeDocument/2006/relationships" xmlns:a="http://schemas.openxmlformats.org/drawingml/2006/main" r:embed="Rceeab2134b004df3"/>
+          <a:stretch xmlns:a="http://schemas.openxmlformats.org/drawingml/2006/main"/>
+        </p:blipFill>
+        <p:spPr>
+          <a:xfrm xmlns:a="http://schemas.openxmlformats.org/drawingml/2006/main">
+            <a:off x="9001125" y="1952625"/>
+            <a:ext cx="2190750" cy="3409950"/>
+          </a:xfrm>
+          <a:prstGeom xmlns:a="http://schemas.openxmlformats.org/drawingml/2006/main" prst="rect">
+            <a:avLst/>
+          </a:prstGeom>
+        </p:spPr>
+      </p:pic>
       <p:sp>
         <p:nvSpPr>
-          <p:cNvPr id="11" name="">
+          <p:cNvPr id="7" name="">
             <a:extLst xmlns:a="http://schemas.openxmlformats.org/drawingml/2006/main">
               <a:ext uri="{FF2B5EF4-FFF2-40B4-BE49-F238E27FC236}">
-                <a16:creationId xmlns:a16="http://schemas.microsoft.com/office/drawing/2014/main" id="{01F2E7EC-2CF9-4065-8C88-7406F920A7FE}"/>
+                <a16:creationId xmlns:a16="http://schemas.microsoft.com/office/drawing/2014/main" id="{A61C2753-3AC0-498C-B4B9-06B97AC7561D}"/>
               </a:ext>
             </a:extLst>
           </p:cNvPr>
@@ -6078,8 +5446,8 @@
         </p:nvSpPr>
         <p:spPr>
           <a:xfrm xmlns:a="http://schemas.openxmlformats.org/drawingml/2006/main">
-            <a:off x="609600" y="4857750"/>
-            <a:ext cx="10953750" cy="495300"/>
+            <a:off x="609600" y="3571875"/>
+            <a:ext cx="5334000" cy="609600"/>
           </a:xfrm>
           <a:prstGeom xmlns:a="http://schemas.openxmlformats.org/drawingml/2006/main" prst="rect">
             <a:avLst/>
@@ -6222,10 +5590,10 @@
       </p:sp>
       <p:sp>
         <p:nvSpPr>
-          <p:cNvPr id="12" name="">
+          <p:cNvPr id="8" name="">
             <a:extLst xmlns:a="http://schemas.openxmlformats.org/drawingml/2006/main">
               <a:ext uri="{FF2B5EF4-FFF2-40B4-BE49-F238E27FC236}">
-                <a16:creationId xmlns:a16="http://schemas.microsoft.com/office/drawing/2014/main" id="{8458DF67-8B9A-47DF-B001-E8477CD8D96A}"/>
+                <a16:creationId xmlns:a16="http://schemas.microsoft.com/office/drawing/2014/main" id="{14EC3C82-2647-4AC6-A8D9-C2E92CFC3EFD}"/>
               </a:ext>
             </a:extLst>
           </p:cNvPr>
@@ -6236,8 +5604,8 @@
         </p:nvSpPr>
         <p:spPr>
           <a:xfrm xmlns:a="http://schemas.openxmlformats.org/drawingml/2006/main">
-            <a:off x="609600" y="5457825"/>
-            <a:ext cx="10953750" cy="971550"/>
+            <a:off x="609600" y="4295775"/>
+            <a:ext cx="5334000" cy="1381125"/>
           </a:xfrm>
           <a:prstGeom xmlns:a="http://schemas.openxmlformats.org/drawingml/2006/main" prst="rect">
             <a:avLst/>
@@ -6253,7 +5621,7 @@
           </a:bodyPr>
           <a:lstStyle xmlns:a="http://schemas.openxmlformats.org/drawingml/2006/main">
             <a:defPPr>
-              <a:defRPr sz="1800" b="0">
+              <a:defRPr sz="1725" b="0">
                 <a:solidFill>
                   <a:srgbClr val="EDF2FF"/>
                 </a:solidFill>
@@ -6263,7 +5631,7 @@
               </a:defRPr>
             </a:defPPr>
             <a:lvl1pPr>
-              <a:defRPr sz="1800" b="0">
+              <a:defRPr sz="1725" b="0">
                 <a:solidFill>
                   <a:srgbClr val="EDF2FF"/>
                 </a:solidFill>
@@ -6273,7 +5641,7 @@
               </a:defRPr>
             </a:lvl1pPr>
             <a:lvl2pPr>
-              <a:defRPr sz="1800" b="0">
+              <a:defRPr sz="1725" b="0">
                 <a:solidFill>
                   <a:srgbClr val="EDF2FF"/>
                 </a:solidFill>
@@ -6283,7 +5651,7 @@
               </a:defRPr>
             </a:lvl2pPr>
             <a:lvl3pPr>
-              <a:defRPr sz="1800" b="0">
+              <a:defRPr sz="1725" b="0">
                 <a:solidFill>
                   <a:srgbClr val="EDF2FF"/>
                 </a:solidFill>
@@ -6293,7 +5661,7 @@
               </a:defRPr>
             </a:lvl3pPr>
             <a:lvl4pPr>
-              <a:defRPr sz="1800" b="0">
+              <a:defRPr sz="1725" b="0">
                 <a:solidFill>
                   <a:srgbClr val="EDF2FF"/>
                 </a:solidFill>
@@ -6303,7 +5671,7 @@
               </a:defRPr>
             </a:lvl4pPr>
             <a:lvl5pPr>
-              <a:defRPr sz="1800" b="0">
+              <a:defRPr sz="1725" b="0">
                 <a:solidFill>
                   <a:srgbClr val="EDF2FF"/>
                 </a:solidFill>
@@ -6313,7 +5681,7 @@
               </a:defRPr>
             </a:lvl5pPr>
             <a:lvl6pPr>
-              <a:defRPr sz="1800" b="0">
+              <a:defRPr sz="1725" b="0">
                 <a:solidFill>
                   <a:srgbClr val="EDF2FF"/>
                 </a:solidFill>
@@ -6323,7 +5691,7 @@
               </a:defRPr>
             </a:lvl6pPr>
             <a:lvl7pPr>
-              <a:defRPr sz="1800" b="0">
+              <a:defRPr sz="1725" b="0">
                 <a:solidFill>
                   <a:srgbClr val="EDF2FF"/>
                 </a:solidFill>
@@ -6333,7 +5701,7 @@
               </a:defRPr>
             </a:lvl7pPr>
             <a:lvl8pPr>
-              <a:defRPr sz="1800" b="0">
+              <a:defRPr sz="1725" b="0">
                 <a:solidFill>
                   <a:srgbClr val="EDF2FF"/>
                 </a:solidFill>
@@ -6343,7 +5711,7 @@
               </a:defRPr>
             </a:lvl8pPr>
             <a:lvl9pPr>
-              <a:defRPr sz="1800" b="0">
+              <a:defRPr sz="1725" b="0">
                 <a:solidFill>
                   <a:srgbClr val="EDF2FF"/>
                 </a:solidFill>
@@ -6355,7 +5723,7 @@
           </a:lstStyle>
           <a:p xmlns:a="http://schemas.openxmlformats.org/drawingml/2006/main">
             <a:pPr>
-              <a:defRPr sz="1800" b="0">
+              <a:defRPr sz="1725" b="0">
                 <a:solidFill>
                   <a:srgbClr val="EDF2FF"/>
                 </a:solidFill>
@@ -6365,7 +5733,7 @@
               </a:defRPr>
             </a:pPr>
             <a:r>
-              <a:rPr sz="1800" b="0">
+              <a:rPr sz="1725" b="0">
                 <a:solidFill>
                   <a:srgbClr val="EDF2FF"/>
                 </a:solidFill>
@@ -6378,7 +5746,7 @@
           </a:p>
           <a:p xmlns:a="http://schemas.openxmlformats.org/drawingml/2006/main">
             <a:pPr>
-              <a:defRPr sz="1800" b="0">
+              <a:defRPr sz="1725" b="0">
                 <a:solidFill>
                   <a:srgbClr val="EDF2FF"/>
                 </a:solidFill>
@@ -6388,7 +5756,7 @@
               </a:defRPr>
             </a:pPr>
             <a:r>
-              <a:rPr sz="1800" b="0">
+              <a:rPr sz="1725" b="0">
                 <a:solidFill>
                   <a:srgbClr val="EDF2FF"/>
                 </a:solidFill>
@@ -6401,7 +5769,7 @@
           </a:p>
           <a:p xmlns:a="http://schemas.openxmlformats.org/drawingml/2006/main">
             <a:pPr>
-              <a:defRPr sz="1800" b="0">
+              <a:defRPr sz="1725" b="0">
                 <a:solidFill>
                   <a:srgbClr val="EDF2FF"/>
                 </a:solidFill>
@@ -6411,7 +5779,7 @@
               </a:defRPr>
             </a:pPr>
             <a:r>
-              <a:rPr sz="1800" b="0">
+              <a:rPr sz="1725" b="0">
                 <a:solidFill>
                   <a:srgbClr val="EDF2FF"/>
                 </a:solidFill>
@@ -6426,10 +5794,10 @@
       </p:sp>
       <p:sp>
         <p:nvSpPr>
-          <p:cNvPr id="13" name="">
+          <p:cNvPr id="9" name="">
             <a:extLst xmlns:a="http://schemas.openxmlformats.org/drawingml/2006/main">
               <a:ext uri="{FF2B5EF4-FFF2-40B4-BE49-F238E27FC236}">
-                <a16:creationId xmlns:a16="http://schemas.microsoft.com/office/drawing/2014/main" id="{B185FFAC-F278-41E8-837F-2E5F34AA3892}"/>
+                <a16:creationId xmlns:a16="http://schemas.microsoft.com/office/drawing/2014/main" id="{93395070-4223-4172-B07D-A85F2F7A2A3C}"/>
               </a:ext>
             </a:extLst>
           </p:cNvPr>
@@ -6440,8 +5808,8 @@
         </p:nvSpPr>
         <p:spPr>
           <a:xfrm xmlns:a="http://schemas.openxmlformats.org/drawingml/2006/main">
-            <a:off x="609600" y="6553200"/>
-            <a:ext cx="10953750" cy="219075"/>
+            <a:off x="609600" y="6191250"/>
+            <a:ext cx="10953750" cy="304800"/>
           </a:xfrm>
           <a:prstGeom xmlns:a="http://schemas.openxmlformats.org/drawingml/2006/main" prst="rect">
             <a:avLst/>
@@ -6457,9 +5825,9 @@
           </a:bodyPr>
           <a:lstStyle xmlns:a="http://schemas.openxmlformats.org/drawingml/2006/main">
             <a:defPPr>
-              <a:defRPr sz="1275" b="0">
-                <a:solidFill>
-                  <a:srgbClr val="C8D3E6"/>
+              <a:defRPr sz="1650" b="0">
+                <a:solidFill>
+                  <a:srgbClr val="FDBA74"/>
                 </a:solidFill>
                 <a:latin typeface="Arial"/>
                 <a:ea typeface="Arial"/>
@@ -6467,9 +5835,9 @@
               </a:defRPr>
             </a:defPPr>
             <a:lvl1pPr>
-              <a:defRPr sz="1275" b="0">
-                <a:solidFill>
-                  <a:srgbClr val="C8D3E6"/>
+              <a:defRPr sz="1650" b="0">
+                <a:solidFill>
+                  <a:srgbClr val="FDBA74"/>
                 </a:solidFill>
                 <a:latin typeface="Arial"/>
                 <a:ea typeface="Arial"/>
@@ -6477,9 +5845,9 @@
               </a:defRPr>
             </a:lvl1pPr>
             <a:lvl2pPr>
-              <a:defRPr sz="1275" b="0">
-                <a:solidFill>
-                  <a:srgbClr val="C8D3E6"/>
+              <a:defRPr sz="1650" b="0">
+                <a:solidFill>
+                  <a:srgbClr val="FDBA74"/>
                 </a:solidFill>
                 <a:latin typeface="Arial"/>
                 <a:ea typeface="Arial"/>
@@ -6487,9 +5855,9 @@
               </a:defRPr>
             </a:lvl2pPr>
             <a:lvl3pPr>
-              <a:defRPr sz="1275" b="0">
-                <a:solidFill>
-                  <a:srgbClr val="C8D3E6"/>
+              <a:defRPr sz="1650" b="0">
+                <a:solidFill>
+                  <a:srgbClr val="FDBA74"/>
                 </a:solidFill>
                 <a:latin typeface="Arial"/>
                 <a:ea typeface="Arial"/>
@@ -6497,9 +5865,9 @@
               </a:defRPr>
             </a:lvl3pPr>
             <a:lvl4pPr>
-              <a:defRPr sz="1275" b="0">
-                <a:solidFill>
-                  <a:srgbClr val="C8D3E6"/>
+              <a:defRPr sz="1650" b="0">
+                <a:solidFill>
+                  <a:srgbClr val="FDBA74"/>
                 </a:solidFill>
                 <a:latin typeface="Arial"/>
                 <a:ea typeface="Arial"/>
@@ -6507,9 +5875,9 @@
               </a:defRPr>
             </a:lvl4pPr>
             <a:lvl5pPr>
-              <a:defRPr sz="1275" b="0">
-                <a:solidFill>
-                  <a:srgbClr val="C8D3E6"/>
+              <a:defRPr sz="1650" b="0">
+                <a:solidFill>
+                  <a:srgbClr val="FDBA74"/>
                 </a:solidFill>
                 <a:latin typeface="Arial"/>
                 <a:ea typeface="Arial"/>
@@ -6517,9 +5885,9 @@
               </a:defRPr>
             </a:lvl5pPr>
             <a:lvl6pPr>
-              <a:defRPr sz="1275" b="0">
-                <a:solidFill>
-                  <a:srgbClr val="C8D3E6"/>
+              <a:defRPr sz="1650" b="0">
+                <a:solidFill>
+                  <a:srgbClr val="FDBA74"/>
                 </a:solidFill>
                 <a:latin typeface="Arial"/>
                 <a:ea typeface="Arial"/>
@@ -6527,9 +5895,9 @@
               </a:defRPr>
             </a:lvl6pPr>
             <a:lvl7pPr>
-              <a:defRPr sz="1275" b="0">
-                <a:solidFill>
-                  <a:srgbClr val="C8D3E6"/>
+              <a:defRPr sz="1650" b="0">
+                <a:solidFill>
+                  <a:srgbClr val="FDBA74"/>
                 </a:solidFill>
                 <a:latin typeface="Arial"/>
                 <a:ea typeface="Arial"/>
@@ -6537,9 +5905,9 @@
               </a:defRPr>
             </a:lvl7pPr>
             <a:lvl8pPr>
-              <a:defRPr sz="1275" b="0">
-                <a:solidFill>
-                  <a:srgbClr val="C8D3E6"/>
+              <a:defRPr sz="1650" b="0">
+                <a:solidFill>
+                  <a:srgbClr val="FDBA74"/>
                 </a:solidFill>
                 <a:latin typeface="Arial"/>
                 <a:ea typeface="Arial"/>
@@ -6547,9 +5915,9 @@
               </a:defRPr>
             </a:lvl8pPr>
             <a:lvl9pPr>
-              <a:defRPr sz="1275" b="0">
-                <a:solidFill>
-                  <a:srgbClr val="C8D3E6"/>
+              <a:defRPr sz="1650" b="0">
+                <a:solidFill>
+                  <a:srgbClr val="FDBA74"/>
                 </a:solidFill>
                 <a:latin typeface="Arial"/>
                 <a:ea typeface="Arial"/>
@@ -6559,9 +5927,9 @@
           </a:lstStyle>
           <a:p xmlns:a="http://schemas.openxmlformats.org/drawingml/2006/main">
             <a:pPr>
-              <a:defRPr sz="1275" b="0">
-                <a:solidFill>
-                  <a:srgbClr val="C8D3E6"/>
+              <a:defRPr sz="1650" b="0">
+                <a:solidFill>
+                  <a:srgbClr val="FDBA74"/>
                 </a:solidFill>
                 <a:latin typeface="Arial"/>
                 <a:ea typeface="Arial"/>
@@ -6569,15 +5937,15 @@
               </a:defRPr>
             </a:pPr>
             <a:r>
-              <a:rPr sz="1275" b="0">
-                <a:solidFill>
-                  <a:srgbClr val="C8D3E6"/>
+              <a:rPr sz="1650" b="0">
+                <a:solidFill>
+                  <a:srgbClr val="FDBA74"/>
                 </a:solidFill>
                 <a:latin typeface="Arial"/>
                 <a:ea typeface="Arial"/>
                 <a:cs typeface="Arial"/>
               </a:rPr>
-              <a:t>Votoni, shpjegoni arsyen dhe pastaj kaloni te slajdi vijues</a:t>
+              <a:t>Votoni dhe diskutoni arsyen përpara përgjigjes.</a:t>
             </a:r>
           </a:p>
         </p:txBody>
@@ -6585,7 +5953,7 @@
     </p:spTree>
     <p:extLst>
       <p:ext uri="{BB962C8B-B14F-4D97-AF65-F5344CB8AC3E}">
-        <p14:creationId xmlns:p14="http://schemas.microsoft.com/office/powerpoint/2010/main" val="559790647"/>
+        <p14:creationId xmlns:p14="http://schemas.microsoft.com/office/powerpoint/2010/main" val="1303676201"/>
       </p:ext>
     </p:extLst>
   </p:cSld>
@@ -6616,7 +5984,7 @@
           <p:cNvPr id="14" name="">
             <a:extLst xmlns:a="http://schemas.openxmlformats.org/drawingml/2006/main">
               <a:ext uri="{FF2B5EF4-FFF2-40B4-BE49-F238E27FC236}">
-                <a16:creationId xmlns:a16="http://schemas.microsoft.com/office/drawing/2014/main" id="{181620A3-F1F4-4347-9F30-62C2449F7ADE}"/>
+                <a16:creationId xmlns:a16="http://schemas.microsoft.com/office/drawing/2014/main" id="{B4FC2CD8-BBE3-4679-BDE4-5C5098E053DD}"/>
               </a:ext>
             </a:extLst>
           </p:cNvPr>
@@ -6774,7 +6142,7 @@
           <p:cNvPr id="2" name="">
             <a:extLst xmlns:a="http://schemas.openxmlformats.org/drawingml/2006/main">
               <a:ext uri="{FF2B5EF4-FFF2-40B4-BE49-F238E27FC236}">
-                <a16:creationId xmlns:a16="http://schemas.microsoft.com/office/drawing/2014/main" id="{DF2ADDE0-2B60-43DF-844B-C6CA77EADB56}"/>
+                <a16:creationId xmlns:a16="http://schemas.microsoft.com/office/drawing/2014/main" id="{8B172B28-FEB4-41FD-ACC5-54070AC57BE3}"/>
               </a:ext>
             </a:extLst>
           </p:cNvPr>
@@ -6932,7 +6300,7 @@
           <p:cNvPr id="3" name="">
             <a:extLst xmlns:a="http://schemas.openxmlformats.org/drawingml/2006/main">
               <a:ext uri="{FF2B5EF4-FFF2-40B4-BE49-F238E27FC236}">
-                <a16:creationId xmlns:a16="http://schemas.microsoft.com/office/drawing/2014/main" id="{F1898D7A-99E2-4883-9AEC-0413F7C03FB5}"/>
+                <a16:creationId xmlns:a16="http://schemas.microsoft.com/office/drawing/2014/main" id="{A5B85F38-BE11-4507-B6CC-30B43916ACF7}"/>
               </a:ext>
             </a:extLst>
           </p:cNvPr>
@@ -7090,7 +6458,7 @@
           <p:cNvPr id="4" name="">
             <a:extLst xmlns:a="http://schemas.openxmlformats.org/drawingml/2006/main">
               <a:ext uri="{FF2B5EF4-FFF2-40B4-BE49-F238E27FC236}">
-                <a16:creationId xmlns:a16="http://schemas.microsoft.com/office/drawing/2014/main" id="{5070A864-2578-4B0D-B462-DEDC8E836BDE}"/>
+                <a16:creationId xmlns:a16="http://schemas.microsoft.com/office/drawing/2014/main" id="{F96F211A-AA59-456A-B010-9385796463F5}"/>
               </a:ext>
             </a:extLst>
           </p:cNvPr>
@@ -7100,7 +6468,7 @@
           <p:nvPr/>
         </p:nvPicPr>
         <p:blipFill>
-          <a:blip xmlns:r="http://schemas.openxmlformats.org/officeDocument/2006/relationships" xmlns:a="http://schemas.openxmlformats.org/drawingml/2006/main" r:embed="Rbef2aa66ac064616"/>
+          <a:blip xmlns:r="http://schemas.openxmlformats.org/officeDocument/2006/relationships" xmlns:a="http://schemas.openxmlformats.org/drawingml/2006/main" r:embed="Ra9c5a14e710841b4"/>
           <a:stretch xmlns:a="http://schemas.openxmlformats.org/drawingml/2006/main"/>
         </p:blipFill>
         <p:spPr>
@@ -7118,7 +6486,7 @@
           <p:cNvPr id="5" name="">
             <a:extLst xmlns:a="http://schemas.openxmlformats.org/drawingml/2006/main">
               <a:ext uri="{FF2B5EF4-FFF2-40B4-BE49-F238E27FC236}">
-                <a16:creationId xmlns:a16="http://schemas.microsoft.com/office/drawing/2014/main" id="{BD09134F-0BD9-49A4-A648-21B635F68FD9}"/>
+                <a16:creationId xmlns:a16="http://schemas.microsoft.com/office/drawing/2014/main" id="{38A72FDB-21A0-43E6-811A-76737745C56A}"/>
               </a:ext>
             </a:extLst>
           </p:cNvPr>
@@ -7276,7 +6644,7 @@
           <p:cNvPr id="6" name="">
             <a:extLst xmlns:a="http://schemas.openxmlformats.org/drawingml/2006/main">
               <a:ext uri="{FF2B5EF4-FFF2-40B4-BE49-F238E27FC236}">
-                <a16:creationId xmlns:a16="http://schemas.microsoft.com/office/drawing/2014/main" id="{10D997DC-E2A3-435D-8C50-2A7681CB8C52}"/>
+                <a16:creationId xmlns:a16="http://schemas.microsoft.com/office/drawing/2014/main" id="{66FF4A8A-BA17-44DE-B2E9-F029ABD0DA08}"/>
               </a:ext>
             </a:extLst>
           </p:cNvPr>
@@ -7434,7 +6802,7 @@
           <p:cNvPr id="7" name="">
             <a:extLst xmlns:a="http://schemas.openxmlformats.org/drawingml/2006/main">
               <a:ext uri="{FF2B5EF4-FFF2-40B4-BE49-F238E27FC236}">
-                <a16:creationId xmlns:a16="http://schemas.microsoft.com/office/drawing/2014/main" id="{3300B78C-18E1-45AE-AA00-B23D6200852F}"/>
+                <a16:creationId xmlns:a16="http://schemas.microsoft.com/office/drawing/2014/main" id="{F3AF3787-90C5-4A5F-96B4-D19B4A3A7A04}"/>
               </a:ext>
             </a:extLst>
           </p:cNvPr>
@@ -7444,7 +6812,7 @@
           <p:nvPr/>
         </p:nvPicPr>
         <p:blipFill>
-          <a:blip xmlns:r="http://schemas.openxmlformats.org/officeDocument/2006/relationships" xmlns:a="http://schemas.openxmlformats.org/drawingml/2006/main" r:embed="R06e03070a8874315"/>
+          <a:blip xmlns:r="http://schemas.openxmlformats.org/officeDocument/2006/relationships" xmlns:a="http://schemas.openxmlformats.org/drawingml/2006/main" r:embed="Rcf4bb897c7a14a20"/>
           <a:stretch xmlns:a="http://schemas.openxmlformats.org/drawingml/2006/main"/>
         </p:blipFill>
         <p:spPr>
@@ -7462,7 +6830,7 @@
           <p:cNvPr id="8" name="">
             <a:extLst xmlns:a="http://schemas.openxmlformats.org/drawingml/2006/main">
               <a:ext uri="{FF2B5EF4-FFF2-40B4-BE49-F238E27FC236}">
-                <a16:creationId xmlns:a16="http://schemas.microsoft.com/office/drawing/2014/main" id="{1FECC0BB-AC70-49DB-85B3-669C3E02D00F}"/>
+                <a16:creationId xmlns:a16="http://schemas.microsoft.com/office/drawing/2014/main" id="{3673935B-9C08-454C-B0AF-777A1B87BB95}"/>
               </a:ext>
             </a:extLst>
           </p:cNvPr>
@@ -7620,7 +6988,7 @@
           <p:cNvPr id="9" name="">
             <a:extLst xmlns:a="http://schemas.openxmlformats.org/drawingml/2006/main">
               <a:ext uri="{FF2B5EF4-FFF2-40B4-BE49-F238E27FC236}">
-                <a16:creationId xmlns:a16="http://schemas.microsoft.com/office/drawing/2014/main" id="{22357D2D-6DE6-4E2C-AFF8-2899568142E4}"/>
+                <a16:creationId xmlns:a16="http://schemas.microsoft.com/office/drawing/2014/main" id="{B0C35524-E4A1-4AF4-8D4B-FA19CA5E219A}"/>
               </a:ext>
             </a:extLst>
           </p:cNvPr>
@@ -7778,7 +7146,7 @@
           <p:cNvPr id="10" name="">
             <a:extLst xmlns:a="http://schemas.openxmlformats.org/drawingml/2006/main">
               <a:ext uri="{FF2B5EF4-FFF2-40B4-BE49-F238E27FC236}">
-                <a16:creationId xmlns:a16="http://schemas.microsoft.com/office/drawing/2014/main" id="{30E5CC10-63D6-4C6C-A7FC-A098625ABF1E}"/>
+                <a16:creationId xmlns:a16="http://schemas.microsoft.com/office/drawing/2014/main" id="{2473F068-B114-429A-95AE-B9C59AEC087A}"/>
               </a:ext>
             </a:extLst>
           </p:cNvPr>
@@ -7964,7 +7332,7 @@
           <p:cNvPr id="11" name="">
             <a:extLst xmlns:a="http://schemas.openxmlformats.org/drawingml/2006/main">
               <a:ext uri="{FF2B5EF4-FFF2-40B4-BE49-F238E27FC236}">
-                <a16:creationId xmlns:a16="http://schemas.microsoft.com/office/drawing/2014/main" id="{F59EC297-E148-4783-94DD-1EB7E01D8A9A}"/>
+                <a16:creationId xmlns:a16="http://schemas.microsoft.com/office/drawing/2014/main" id="{D6B5C24A-CCF4-41CD-BAC4-C1DC11388C5A}"/>
               </a:ext>
             </a:extLst>
           </p:cNvPr>
@@ -8122,7 +7490,7 @@
           <p:cNvPr id="12" name="">
             <a:extLst xmlns:a="http://schemas.openxmlformats.org/drawingml/2006/main">
               <a:ext uri="{FF2B5EF4-FFF2-40B4-BE49-F238E27FC236}">
-                <a16:creationId xmlns:a16="http://schemas.microsoft.com/office/drawing/2014/main" id="{FFFFEFED-EC9E-40EB-B981-661C44BC370A}"/>
+                <a16:creationId xmlns:a16="http://schemas.microsoft.com/office/drawing/2014/main" id="{C275CF0E-3168-4C57-A9AC-982ADF21A52B}"/>
               </a:ext>
             </a:extLst>
           </p:cNvPr>
@@ -8280,7 +7648,7 @@
           <p:cNvPr id="13" name="">
             <a:extLst xmlns:a="http://schemas.openxmlformats.org/drawingml/2006/main">
               <a:ext uri="{FF2B5EF4-FFF2-40B4-BE49-F238E27FC236}">
-                <a16:creationId xmlns:a16="http://schemas.microsoft.com/office/drawing/2014/main" id="{89016BD4-8AB0-4CAD-A535-17CD2E4DE80B}"/>
+                <a16:creationId xmlns:a16="http://schemas.microsoft.com/office/drawing/2014/main" id="{28D11825-E9F7-4A0C-888C-ED4C1473EB83}"/>
               </a:ext>
             </a:extLst>
           </p:cNvPr>
@@ -8436,7 +7804,7 @@
     </p:spTree>
     <p:extLst>
       <p:ext uri="{BB962C8B-B14F-4D97-AF65-F5344CB8AC3E}">
-        <p14:creationId xmlns:p14="http://schemas.microsoft.com/office/powerpoint/2010/main" val="283187825"/>
+        <p14:creationId xmlns:p14="http://schemas.microsoft.com/office/powerpoint/2010/main" val="1969063402"/>
       </p:ext>
     </p:extLst>
   </p:cSld>
@@ -8467,7 +7835,7 @@
           <p:cNvPr id="13" name="">
             <a:extLst xmlns:a="http://schemas.openxmlformats.org/drawingml/2006/main">
               <a:ext uri="{FF2B5EF4-FFF2-40B4-BE49-F238E27FC236}">
-                <a16:creationId xmlns:a16="http://schemas.microsoft.com/office/drawing/2014/main" id="{F9DFB8CE-E8EF-4691-8A72-A65F57F3C3BC}"/>
+                <a16:creationId xmlns:a16="http://schemas.microsoft.com/office/drawing/2014/main" id="{37B33C92-7F94-43BA-A024-D1307956E3E8}"/>
               </a:ext>
             </a:extLst>
           </p:cNvPr>
@@ -8625,7 +7993,7 @@
           <p:cNvPr id="2" name="">
             <a:extLst xmlns:a="http://schemas.openxmlformats.org/drawingml/2006/main">
               <a:ext uri="{FF2B5EF4-FFF2-40B4-BE49-F238E27FC236}">
-                <a16:creationId xmlns:a16="http://schemas.microsoft.com/office/drawing/2014/main" id="{1BBAF590-6B6C-47CC-8FDC-C1BFBC2A760E}"/>
+                <a16:creationId xmlns:a16="http://schemas.microsoft.com/office/drawing/2014/main" id="{39861252-E2A5-491C-BA3B-8E9630DC127F}"/>
               </a:ext>
             </a:extLst>
           </p:cNvPr>
@@ -8783,7 +8151,7 @@
           <p:cNvPr id="3" name="">
             <a:extLst xmlns:a="http://schemas.openxmlformats.org/drawingml/2006/main">
               <a:ext uri="{FF2B5EF4-FFF2-40B4-BE49-F238E27FC236}">
-                <a16:creationId xmlns:a16="http://schemas.microsoft.com/office/drawing/2014/main" id="{09D630F3-5D2C-4E4E-878E-815694BD0C76}"/>
+                <a16:creationId xmlns:a16="http://schemas.microsoft.com/office/drawing/2014/main" id="{59E8BF84-8DB9-4280-8845-EFADF8B3E3A4}"/>
               </a:ext>
             </a:extLst>
           </p:cNvPr>
@@ -8941,7 +8309,7 @@
           <p:cNvPr id="4" name="">
             <a:extLst xmlns:a="http://schemas.openxmlformats.org/drawingml/2006/main">
               <a:ext uri="{FF2B5EF4-FFF2-40B4-BE49-F238E27FC236}">
-                <a16:creationId xmlns:a16="http://schemas.microsoft.com/office/drawing/2014/main" id="{E922BFD8-A144-46B6-929A-86A5B2F3BC1A}"/>
+                <a16:creationId xmlns:a16="http://schemas.microsoft.com/office/drawing/2014/main" id="{E7178608-0EAA-4804-BF0A-DA1FA3D7CE4D}"/>
               </a:ext>
             </a:extLst>
           </p:cNvPr>
@@ -8951,7 +8319,7 @@
           <p:nvPr/>
         </p:nvPicPr>
         <p:blipFill>
-          <a:blip xmlns:r="http://schemas.openxmlformats.org/officeDocument/2006/relationships" xmlns:a="http://schemas.openxmlformats.org/drawingml/2006/main" r:embed="R9455e6d6e7764cbc"/>
+          <a:blip xmlns:r="http://schemas.openxmlformats.org/officeDocument/2006/relationships" xmlns:a="http://schemas.openxmlformats.org/drawingml/2006/main" r:embed="R6a2877c896b844b4"/>
           <a:stretch xmlns:a="http://schemas.openxmlformats.org/drawingml/2006/main"/>
         </p:blipFill>
         <p:spPr>
@@ -8969,7 +8337,7 @@
           <p:cNvPr id="5" name="">
             <a:extLst xmlns:a="http://schemas.openxmlformats.org/drawingml/2006/main">
               <a:ext uri="{FF2B5EF4-FFF2-40B4-BE49-F238E27FC236}">
-                <a16:creationId xmlns:a16="http://schemas.microsoft.com/office/drawing/2014/main" id="{B01EDC5E-04E5-41AA-A940-B08C12DA169D}"/>
+                <a16:creationId xmlns:a16="http://schemas.microsoft.com/office/drawing/2014/main" id="{C867258B-2A2E-43AC-B061-89B07B2EE2AA}"/>
               </a:ext>
             </a:extLst>
           </p:cNvPr>
@@ -9127,7 +8495,7 @@
           <p:cNvPr id="6" name="">
             <a:extLst xmlns:a="http://schemas.openxmlformats.org/drawingml/2006/main">
               <a:ext uri="{FF2B5EF4-FFF2-40B4-BE49-F238E27FC236}">
-                <a16:creationId xmlns:a16="http://schemas.microsoft.com/office/drawing/2014/main" id="{C8DBE1A0-6717-4AFA-B24F-B3161273604A}"/>
+                <a16:creationId xmlns:a16="http://schemas.microsoft.com/office/drawing/2014/main" id="{4E8E6301-7468-4513-A4EB-6F6E2848D183}"/>
               </a:ext>
             </a:extLst>
           </p:cNvPr>
@@ -9285,7 +8653,7 @@
           <p:cNvPr id="7" name="">
             <a:extLst xmlns:a="http://schemas.openxmlformats.org/drawingml/2006/main">
               <a:ext uri="{FF2B5EF4-FFF2-40B4-BE49-F238E27FC236}">
-                <a16:creationId xmlns:a16="http://schemas.microsoft.com/office/drawing/2014/main" id="{86F89EDE-2AB8-494E-8B7F-2E6A2D44770C}"/>
+                <a16:creationId xmlns:a16="http://schemas.microsoft.com/office/drawing/2014/main" id="{5E6CD694-6375-49A6-A67C-66878908D2B3}"/>
               </a:ext>
             </a:extLst>
           </p:cNvPr>
@@ -9295,7 +8663,7 @@
           <p:nvPr/>
         </p:nvPicPr>
         <p:blipFill>
-          <a:blip xmlns:r="http://schemas.openxmlformats.org/officeDocument/2006/relationships" xmlns:a="http://schemas.openxmlformats.org/drawingml/2006/main" r:embed="R12c9155b12754665"/>
+          <a:blip xmlns:r="http://schemas.openxmlformats.org/officeDocument/2006/relationships" xmlns:a="http://schemas.openxmlformats.org/drawingml/2006/main" r:embed="Rd529660a275b4327"/>
           <a:stretch xmlns:a="http://schemas.openxmlformats.org/drawingml/2006/main"/>
         </p:blipFill>
         <p:spPr>
@@ -9313,7 +8681,7 @@
           <p:cNvPr id="8" name="">
             <a:extLst xmlns:a="http://schemas.openxmlformats.org/drawingml/2006/main">
               <a:ext uri="{FF2B5EF4-FFF2-40B4-BE49-F238E27FC236}">
-                <a16:creationId xmlns:a16="http://schemas.microsoft.com/office/drawing/2014/main" id="{AF470BDC-9C73-4672-8C14-487B21D37C9E}"/>
+                <a16:creationId xmlns:a16="http://schemas.microsoft.com/office/drawing/2014/main" id="{1333238B-7B91-44F9-B69C-AA7FE044D2A6}"/>
               </a:ext>
             </a:extLst>
           </p:cNvPr>
@@ -9471,7 +8839,7 @@
           <p:cNvPr id="9" name="">
             <a:extLst xmlns:a="http://schemas.openxmlformats.org/drawingml/2006/main">
               <a:ext uri="{FF2B5EF4-FFF2-40B4-BE49-F238E27FC236}">
-                <a16:creationId xmlns:a16="http://schemas.microsoft.com/office/drawing/2014/main" id="{0320F5A6-5415-44E9-AFD1-57E8E9B94264}"/>
+                <a16:creationId xmlns:a16="http://schemas.microsoft.com/office/drawing/2014/main" id="{56C92A5B-0A12-46C1-A1FF-5BFECC9BBE25}"/>
               </a:ext>
             </a:extLst>
           </p:cNvPr>
@@ -9629,7 +8997,7 @@
           <p:cNvPr id="10" name="">
             <a:extLst xmlns:a="http://schemas.openxmlformats.org/drawingml/2006/main">
               <a:ext uri="{FF2B5EF4-FFF2-40B4-BE49-F238E27FC236}">
-                <a16:creationId xmlns:a16="http://schemas.microsoft.com/office/drawing/2014/main" id="{4CE72DA5-D69F-4BF7-ADF0-C04A91C47B6E}"/>
+                <a16:creationId xmlns:a16="http://schemas.microsoft.com/office/drawing/2014/main" id="{249ACFAB-D152-4ACE-8456-C293DE86E3F1}"/>
               </a:ext>
             </a:extLst>
           </p:cNvPr>
@@ -9815,7 +9183,7 @@
           <p:cNvPr id="11" name="">
             <a:extLst xmlns:a="http://schemas.openxmlformats.org/drawingml/2006/main">
               <a:ext uri="{FF2B5EF4-FFF2-40B4-BE49-F238E27FC236}">
-                <a16:creationId xmlns:a16="http://schemas.microsoft.com/office/drawing/2014/main" id="{AED2C757-9ACB-4C4D-BF0F-861E1519EE99}"/>
+                <a16:creationId xmlns:a16="http://schemas.microsoft.com/office/drawing/2014/main" id="{4461BD9F-4A93-45BB-BEF6-8FF01659C3DE}"/>
               </a:ext>
             </a:extLst>
           </p:cNvPr>
@@ -9973,7 +9341,7 @@
           <p:cNvPr id="12" name="">
             <a:extLst xmlns:a="http://schemas.openxmlformats.org/drawingml/2006/main">
               <a:ext uri="{FF2B5EF4-FFF2-40B4-BE49-F238E27FC236}">
-                <a16:creationId xmlns:a16="http://schemas.microsoft.com/office/drawing/2014/main" id="{5A430046-9AC2-4DD7-AAFB-3C5FA65780D9}"/>
+                <a16:creationId xmlns:a16="http://schemas.microsoft.com/office/drawing/2014/main" id="{03F0AAF3-3785-44F3-8623-2624191E257E}"/>
               </a:ext>
             </a:extLst>
           </p:cNvPr>
@@ -10129,7 +9497,7 @@
     </p:spTree>
     <p:extLst>
       <p:ext uri="{BB962C8B-B14F-4D97-AF65-F5344CB8AC3E}">
-        <p14:creationId xmlns:p14="http://schemas.microsoft.com/office/powerpoint/2010/main" val="1618491042"/>
+        <p14:creationId xmlns:p14="http://schemas.microsoft.com/office/powerpoint/2010/main" val="1770764705"/>
       </p:ext>
     </p:extLst>
   </p:cSld>
@@ -10160,7 +9528,7 @@
           <p:cNvPr id="13" name="">
             <a:extLst xmlns:a="http://schemas.openxmlformats.org/drawingml/2006/main">
               <a:ext uri="{FF2B5EF4-FFF2-40B4-BE49-F238E27FC236}">
-                <a16:creationId xmlns:a16="http://schemas.microsoft.com/office/drawing/2014/main" id="{D3E351A1-7C2C-4A7A-B075-B89B3A5CDA07}"/>
+                <a16:creationId xmlns:a16="http://schemas.microsoft.com/office/drawing/2014/main" id="{01A76FF2-D911-4BF3-820B-6B36A7C6A354}"/>
               </a:ext>
             </a:extLst>
           </p:cNvPr>
@@ -10318,7 +9686,7 @@
           <p:cNvPr id="2" name="">
             <a:extLst xmlns:a="http://schemas.openxmlformats.org/drawingml/2006/main">
               <a:ext uri="{FF2B5EF4-FFF2-40B4-BE49-F238E27FC236}">
-                <a16:creationId xmlns:a16="http://schemas.microsoft.com/office/drawing/2014/main" id="{C990A4F0-59C8-48F9-A6AF-09135490DDFB}"/>
+                <a16:creationId xmlns:a16="http://schemas.microsoft.com/office/drawing/2014/main" id="{2372A9FE-5FF2-45D9-A554-29020D501BBC}"/>
               </a:ext>
             </a:extLst>
           </p:cNvPr>
@@ -10476,7 +9844,7 @@
           <p:cNvPr id="3" name="">
             <a:extLst xmlns:a="http://schemas.openxmlformats.org/drawingml/2006/main">
               <a:ext uri="{FF2B5EF4-FFF2-40B4-BE49-F238E27FC236}">
-                <a16:creationId xmlns:a16="http://schemas.microsoft.com/office/drawing/2014/main" id="{8FEB37D4-A5CB-4BFA-89F3-E46D5D832182}"/>
+                <a16:creationId xmlns:a16="http://schemas.microsoft.com/office/drawing/2014/main" id="{8B484FF4-E92C-4223-85D8-A1D1DC5A41DC}"/>
               </a:ext>
             </a:extLst>
           </p:cNvPr>
@@ -10634,7 +10002,7 @@
           <p:cNvPr id="4" name="">
             <a:extLst xmlns:a="http://schemas.openxmlformats.org/drawingml/2006/main">
               <a:ext uri="{FF2B5EF4-FFF2-40B4-BE49-F238E27FC236}">
-                <a16:creationId xmlns:a16="http://schemas.microsoft.com/office/drawing/2014/main" id="{40C87433-B1C7-4805-A54A-47C2FCC16DD9}"/>
+                <a16:creationId xmlns:a16="http://schemas.microsoft.com/office/drawing/2014/main" id="{74A8C9F9-AAFF-4860-8C9F-E91BED694CCE}"/>
               </a:ext>
             </a:extLst>
           </p:cNvPr>
@@ -10644,7 +10012,7 @@
           <p:nvPr/>
         </p:nvPicPr>
         <p:blipFill>
-          <a:blip xmlns:r="http://schemas.openxmlformats.org/officeDocument/2006/relationships" xmlns:a="http://schemas.openxmlformats.org/drawingml/2006/main" r:embed="Rfb09209f2a3b42e0"/>
+          <a:blip xmlns:r="http://schemas.openxmlformats.org/officeDocument/2006/relationships" xmlns:a="http://schemas.openxmlformats.org/drawingml/2006/main" r:embed="R70a1361415124aef"/>
           <a:stretch xmlns:a="http://schemas.openxmlformats.org/drawingml/2006/main"/>
         </p:blipFill>
         <p:spPr>
@@ -10662,7 +10030,7 @@
           <p:cNvPr id="5" name="">
             <a:extLst xmlns:a="http://schemas.openxmlformats.org/drawingml/2006/main">
               <a:ext uri="{FF2B5EF4-FFF2-40B4-BE49-F238E27FC236}">
-                <a16:creationId xmlns:a16="http://schemas.microsoft.com/office/drawing/2014/main" id="{429D5F00-AC5D-4D18-B6E3-45BCBA09F329}"/>
+                <a16:creationId xmlns:a16="http://schemas.microsoft.com/office/drawing/2014/main" id="{B30CAE36-89B5-40CB-980E-5EC9347E380C}"/>
               </a:ext>
             </a:extLst>
           </p:cNvPr>
@@ -10820,7 +10188,7 @@
           <p:cNvPr id="6" name="">
             <a:extLst xmlns:a="http://schemas.openxmlformats.org/drawingml/2006/main">
               <a:ext uri="{FF2B5EF4-FFF2-40B4-BE49-F238E27FC236}">
-                <a16:creationId xmlns:a16="http://schemas.microsoft.com/office/drawing/2014/main" id="{F0EA44F7-E21A-429B-91C1-A2B5E1E12C5C}"/>
+                <a16:creationId xmlns:a16="http://schemas.microsoft.com/office/drawing/2014/main" id="{9FE09978-8E8B-4823-A2D9-5C9ED1F2A9E2}"/>
               </a:ext>
             </a:extLst>
           </p:cNvPr>
@@ -10978,7 +10346,7 @@
           <p:cNvPr id="7" name="">
             <a:extLst xmlns:a="http://schemas.openxmlformats.org/drawingml/2006/main">
               <a:ext uri="{FF2B5EF4-FFF2-40B4-BE49-F238E27FC236}">
-                <a16:creationId xmlns:a16="http://schemas.microsoft.com/office/drawing/2014/main" id="{5C3C4DEE-8C83-4ED0-A541-7AD459A7ACE2}"/>
+                <a16:creationId xmlns:a16="http://schemas.microsoft.com/office/drawing/2014/main" id="{1150D088-CEB5-454E-AC83-E8A7CB9DB55C}"/>
               </a:ext>
             </a:extLst>
           </p:cNvPr>
@@ -10988,7 +10356,7 @@
           <p:nvPr/>
         </p:nvPicPr>
         <p:blipFill>
-          <a:blip xmlns:r="http://schemas.openxmlformats.org/officeDocument/2006/relationships" xmlns:a="http://schemas.openxmlformats.org/drawingml/2006/main" r:embed="R72c57aad513842cf"/>
+          <a:blip xmlns:r="http://schemas.openxmlformats.org/officeDocument/2006/relationships" xmlns:a="http://schemas.openxmlformats.org/drawingml/2006/main" r:embed="R3a113cd0605f482e"/>
           <a:stretch xmlns:a="http://schemas.openxmlformats.org/drawingml/2006/main"/>
         </p:blipFill>
         <p:spPr>
@@ -11006,7 +10374,7 @@
           <p:cNvPr id="8" name="">
             <a:extLst xmlns:a="http://schemas.openxmlformats.org/drawingml/2006/main">
               <a:ext uri="{FF2B5EF4-FFF2-40B4-BE49-F238E27FC236}">
-                <a16:creationId xmlns:a16="http://schemas.microsoft.com/office/drawing/2014/main" id="{038DB508-E555-4557-93B7-27C90C316F94}"/>
+                <a16:creationId xmlns:a16="http://schemas.microsoft.com/office/drawing/2014/main" id="{55665E43-5B30-4543-B040-FB4045CE0D94}"/>
               </a:ext>
             </a:extLst>
           </p:cNvPr>
@@ -11164,7 +10532,7 @@
           <p:cNvPr id="9" name="">
             <a:extLst xmlns:a="http://schemas.openxmlformats.org/drawingml/2006/main">
               <a:ext uri="{FF2B5EF4-FFF2-40B4-BE49-F238E27FC236}">
-                <a16:creationId xmlns:a16="http://schemas.microsoft.com/office/drawing/2014/main" id="{E4D5BED5-3CC8-42A6-B171-CF5A0BAD14A7}"/>
+                <a16:creationId xmlns:a16="http://schemas.microsoft.com/office/drawing/2014/main" id="{C2EA75DE-62B2-4C94-AFB4-5A0992A278E1}"/>
               </a:ext>
             </a:extLst>
           </p:cNvPr>
@@ -11322,7 +10690,7 @@
           <p:cNvPr id="10" name="">
             <a:extLst xmlns:a="http://schemas.openxmlformats.org/drawingml/2006/main">
               <a:ext uri="{FF2B5EF4-FFF2-40B4-BE49-F238E27FC236}">
-                <a16:creationId xmlns:a16="http://schemas.microsoft.com/office/drawing/2014/main" id="{01FAF6CE-7928-4E0D-BCBD-EA80046AE64C}"/>
+                <a16:creationId xmlns:a16="http://schemas.microsoft.com/office/drawing/2014/main" id="{AFDA7A82-52B8-42AC-A05E-830026457905}"/>
               </a:ext>
             </a:extLst>
           </p:cNvPr>
@@ -11508,7 +10876,7 @@
           <p:cNvPr id="11" name="">
             <a:extLst xmlns:a="http://schemas.openxmlformats.org/drawingml/2006/main">
               <a:ext uri="{FF2B5EF4-FFF2-40B4-BE49-F238E27FC236}">
-                <a16:creationId xmlns:a16="http://schemas.microsoft.com/office/drawing/2014/main" id="{D8AEF6B0-209F-4772-9033-A420892044FB}"/>
+                <a16:creationId xmlns:a16="http://schemas.microsoft.com/office/drawing/2014/main" id="{DF70BF5B-399E-482F-9D5A-C2CA1559517C}"/>
               </a:ext>
             </a:extLst>
           </p:cNvPr>
@@ -11666,7 +11034,7 @@
           <p:cNvPr id="12" name="">
             <a:extLst xmlns:a="http://schemas.openxmlformats.org/drawingml/2006/main">
               <a:ext uri="{FF2B5EF4-FFF2-40B4-BE49-F238E27FC236}">
-                <a16:creationId xmlns:a16="http://schemas.microsoft.com/office/drawing/2014/main" id="{5C36A15F-6AA9-4234-A5DE-CA55F74CDA60}"/>
+                <a16:creationId xmlns:a16="http://schemas.microsoft.com/office/drawing/2014/main" id="{DF458E39-94CB-4D42-B2B8-9C0087CA5698}"/>
               </a:ext>
             </a:extLst>
           </p:cNvPr>
@@ -11822,7 +11190,7 @@
     </p:spTree>
     <p:extLst>
       <p:ext uri="{BB962C8B-B14F-4D97-AF65-F5344CB8AC3E}">
-        <p14:creationId xmlns:p14="http://schemas.microsoft.com/office/powerpoint/2010/main" val="1615466016"/>
+        <p14:creationId xmlns:p14="http://schemas.microsoft.com/office/powerpoint/2010/main" val="201527073"/>
       </p:ext>
     </p:extLst>
   </p:cSld>
@@ -11850,10 +11218,10 @@
       </p:grpSpPr>
       <p:sp>
         <p:nvSpPr>
-          <p:cNvPr id="14" name="">
+          <p:cNvPr id="10" name="">
             <a:extLst xmlns:a="http://schemas.openxmlformats.org/drawingml/2006/main">
               <a:ext uri="{FF2B5EF4-FFF2-40B4-BE49-F238E27FC236}">
-                <a16:creationId xmlns:a16="http://schemas.microsoft.com/office/drawing/2014/main" id="{76710A2C-6B35-4C8F-95E0-CEAB6084F17E}"/>
+                <a16:creationId xmlns:a16="http://schemas.microsoft.com/office/drawing/2014/main" id="{5D27D41A-F062-4539-8D88-329502AB15EE}"/>
               </a:ext>
             </a:extLst>
           </p:cNvPr>
@@ -12011,7 +11379,7 @@
           <p:cNvPr id="2" name="">
             <a:extLst xmlns:a="http://schemas.openxmlformats.org/drawingml/2006/main">
               <a:ext uri="{FF2B5EF4-FFF2-40B4-BE49-F238E27FC236}">
-                <a16:creationId xmlns:a16="http://schemas.microsoft.com/office/drawing/2014/main" id="{A7F9119A-F19A-44A0-9015-525DF10F3A26}"/>
+                <a16:creationId xmlns:a16="http://schemas.microsoft.com/office/drawing/2014/main" id="{4E72C8B3-A5F6-4609-BDE7-325C0979B00A}"/>
               </a:ext>
             </a:extLst>
           </p:cNvPr>
@@ -12169,7 +11537,7 @@
           <p:cNvPr id="3" name="">
             <a:extLst xmlns:a="http://schemas.openxmlformats.org/drawingml/2006/main">
               <a:ext uri="{FF2B5EF4-FFF2-40B4-BE49-F238E27FC236}">
-                <a16:creationId xmlns:a16="http://schemas.microsoft.com/office/drawing/2014/main" id="{CA5C35FA-B318-4B1D-837C-88BCCF278646}"/>
+                <a16:creationId xmlns:a16="http://schemas.microsoft.com/office/drawing/2014/main" id="{11FFF5A4-23AB-4652-9E6B-FEF066EE9E73}"/>
               </a:ext>
             </a:extLst>
           </p:cNvPr>
@@ -12322,40 +11690,12 @@
           </a:p>
         </p:txBody>
       </p:sp>
-      <p:pic>
-        <p:nvPicPr>
+      <p:sp>
+        <p:nvSpPr>
           <p:cNvPr id="4" name="">
             <a:extLst xmlns:a="http://schemas.openxmlformats.org/drawingml/2006/main">
               <a:ext uri="{FF2B5EF4-FFF2-40B4-BE49-F238E27FC236}">
-                <a16:creationId xmlns:a16="http://schemas.microsoft.com/office/drawing/2014/main" id="{A2C50A8E-8E67-480A-9B86-1029701FBA55}"/>
-              </a:ext>
-            </a:extLst>
-          </p:cNvPr>
-          <p:cNvPicPr>
-            <a:picLocks xmlns:a="http://schemas.openxmlformats.org/drawingml/2006/main" noChangeAspect="1"/>
-          </p:cNvPicPr>
-          <p:nvPr/>
-        </p:nvPicPr>
-        <p:blipFill>
-          <a:blip xmlns:r="http://schemas.openxmlformats.org/officeDocument/2006/relationships" xmlns:a="http://schemas.openxmlformats.org/drawingml/2006/main" r:embed="Rbe10d9cc76bd4692"/>
-          <a:stretch xmlns:a="http://schemas.openxmlformats.org/drawingml/2006/main"/>
-        </p:blipFill>
-        <p:spPr>
-          <a:xfrm xmlns:a="http://schemas.openxmlformats.org/drawingml/2006/main">
-            <a:off x="609600" y="1952625"/>
-            <a:ext cx="457200" cy="457200"/>
-          </a:xfrm>
-          <a:prstGeom xmlns:a="http://schemas.openxmlformats.org/drawingml/2006/main" prst="rect">
-            <a:avLst/>
-          </a:prstGeom>
-        </p:spPr>
-      </p:pic>
-      <p:sp>
-        <p:nvSpPr>
-          <p:cNvPr id="5" name="">
-            <a:extLst xmlns:a="http://schemas.openxmlformats.org/drawingml/2006/main">
-              <a:ext uri="{FF2B5EF4-FFF2-40B4-BE49-F238E27FC236}">
-                <a16:creationId xmlns:a16="http://schemas.microsoft.com/office/drawing/2014/main" id="{07D6D3D3-AD15-472C-A7F8-891BA6E21AD2}"/>
+                <a16:creationId xmlns:a16="http://schemas.microsoft.com/office/drawing/2014/main" id="{D008DA88-0EDF-42CE-9C70-DC50113BD908}"/>
               </a:ext>
             </a:extLst>
           </p:cNvPr>
@@ -12366,668 +11706,8 @@
         </p:nvSpPr>
         <p:spPr>
           <a:xfrm xmlns:a="http://schemas.openxmlformats.org/drawingml/2006/main">
-            <a:off x="609600" y="2667000"/>
-            <a:ext cx="5295900" cy="495300"/>
-          </a:xfrm>
-          <a:prstGeom xmlns:a="http://schemas.openxmlformats.org/drawingml/2006/main" prst="rect">
-            <a:avLst/>
-          </a:prstGeom>
-          <a:noFill xmlns:a="http://schemas.openxmlformats.org/drawingml/2006/main"/>
-          <a:ln xmlns:a="http://schemas.openxmlformats.org/drawingml/2006/main" w="0">
-            <a:noFill/>
-          </a:ln>
-        </p:spPr>
-        <p:txBody>
-          <a:bodyPr xmlns:a="http://schemas.openxmlformats.org/drawingml/2006/main">
-            <a:noAutofit/>
-          </a:bodyPr>
-          <a:lstStyle xmlns:a="http://schemas.openxmlformats.org/drawingml/2006/main">
-            <a:defPPr>
-              <a:defRPr sz="2025" b="1">
-                <a:solidFill>
-                  <a:srgbClr val="FFFFFF"/>
-                </a:solidFill>
-                <a:latin typeface="Arial"/>
-                <a:ea typeface="Arial"/>
-                <a:cs typeface="Arial"/>
-              </a:defRPr>
-            </a:defPPr>
-            <a:lvl1pPr>
-              <a:defRPr sz="2025" b="1">
-                <a:solidFill>
-                  <a:srgbClr val="FFFFFF"/>
-                </a:solidFill>
-                <a:latin typeface="Arial"/>
-                <a:ea typeface="Arial"/>
-                <a:cs typeface="Arial"/>
-              </a:defRPr>
-            </a:lvl1pPr>
-            <a:lvl2pPr>
-              <a:defRPr sz="2025" b="1">
-                <a:solidFill>
-                  <a:srgbClr val="FFFFFF"/>
-                </a:solidFill>
-                <a:latin typeface="Arial"/>
-                <a:ea typeface="Arial"/>
-                <a:cs typeface="Arial"/>
-              </a:defRPr>
-            </a:lvl2pPr>
-            <a:lvl3pPr>
-              <a:defRPr sz="2025" b="1">
-                <a:solidFill>
-                  <a:srgbClr val="FFFFFF"/>
-                </a:solidFill>
-                <a:latin typeface="Arial"/>
-                <a:ea typeface="Arial"/>
-                <a:cs typeface="Arial"/>
-              </a:defRPr>
-            </a:lvl3pPr>
-            <a:lvl4pPr>
-              <a:defRPr sz="2025" b="1">
-                <a:solidFill>
-                  <a:srgbClr val="FFFFFF"/>
-                </a:solidFill>
-                <a:latin typeface="Arial"/>
-                <a:ea typeface="Arial"/>
-                <a:cs typeface="Arial"/>
-              </a:defRPr>
-            </a:lvl4pPr>
-            <a:lvl5pPr>
-              <a:defRPr sz="2025" b="1">
-                <a:solidFill>
-                  <a:srgbClr val="FFFFFF"/>
-                </a:solidFill>
-                <a:latin typeface="Arial"/>
-                <a:ea typeface="Arial"/>
-                <a:cs typeface="Arial"/>
-              </a:defRPr>
-            </a:lvl5pPr>
-            <a:lvl6pPr>
-              <a:defRPr sz="2025" b="1">
-                <a:solidFill>
-                  <a:srgbClr val="FFFFFF"/>
-                </a:solidFill>
-                <a:latin typeface="Arial"/>
-                <a:ea typeface="Arial"/>
-                <a:cs typeface="Arial"/>
-              </a:defRPr>
-            </a:lvl6pPr>
-            <a:lvl7pPr>
-              <a:defRPr sz="2025" b="1">
-                <a:solidFill>
-                  <a:srgbClr val="FFFFFF"/>
-                </a:solidFill>
-                <a:latin typeface="Arial"/>
-                <a:ea typeface="Arial"/>
-                <a:cs typeface="Arial"/>
-              </a:defRPr>
-            </a:lvl7pPr>
-            <a:lvl8pPr>
-              <a:defRPr sz="2025" b="1">
-                <a:solidFill>
-                  <a:srgbClr val="FFFFFF"/>
-                </a:solidFill>
-                <a:latin typeface="Arial"/>
-                <a:ea typeface="Arial"/>
-                <a:cs typeface="Arial"/>
-              </a:defRPr>
-            </a:lvl8pPr>
-            <a:lvl9pPr>
-              <a:defRPr sz="2025" b="1">
-                <a:solidFill>
-                  <a:srgbClr val="FFFFFF"/>
-                </a:solidFill>
-                <a:latin typeface="Arial"/>
-                <a:ea typeface="Arial"/>
-                <a:cs typeface="Arial"/>
-              </a:defRPr>
-            </a:lvl9pPr>
-          </a:lstStyle>
-          <a:p xmlns:a="http://schemas.openxmlformats.org/drawingml/2006/main">
-            <a:pPr>
-              <a:defRPr sz="2025" b="1">
-                <a:solidFill>
-                  <a:srgbClr val="FFFFFF"/>
-                </a:solidFill>
-                <a:latin typeface="Arial"/>
-                <a:ea typeface="Arial"/>
-                <a:cs typeface="Arial"/>
-              </a:defRPr>
-            </a:pPr>
-            <a:r>
-              <a:rPr sz="2025" b="1">
-                <a:solidFill>
-                  <a:srgbClr val="FFFFFF"/>
-                </a:solidFill>
-                <a:latin typeface="Arial"/>
-                <a:ea typeface="Arial"/>
-                <a:cs typeface="Arial"/>
-              </a:rPr>
-              <a:t>Ndërfaqja</a:t>
-            </a:r>
-          </a:p>
-        </p:txBody>
-      </p:sp>
-      <p:sp>
-        <p:nvSpPr>
-          <p:cNvPr id="6" name="">
-            <a:extLst xmlns:a="http://schemas.openxmlformats.org/drawingml/2006/main">
-              <a:ext uri="{FF2B5EF4-FFF2-40B4-BE49-F238E27FC236}">
-                <a16:creationId xmlns:a16="http://schemas.microsoft.com/office/drawing/2014/main" id="{39685565-AA6A-4195-9039-73D0F046C58A}"/>
-              </a:ext>
-            </a:extLst>
-          </p:cNvPr>
-          <p:cNvSpPr>
-            <a:spLocks xmlns:a="http://schemas.openxmlformats.org/drawingml/2006/main" noGrp="1"/>
-          </p:cNvSpPr>
-          <p:nvPr/>
-        </p:nvSpPr>
-        <p:spPr>
-          <a:xfrm xmlns:a="http://schemas.openxmlformats.org/drawingml/2006/main">
-            <a:off x="609600" y="3219450"/>
-            <a:ext cx="5295900" cy="571500"/>
-          </a:xfrm>
-          <a:prstGeom xmlns:a="http://schemas.openxmlformats.org/drawingml/2006/main" prst="rect">
-            <a:avLst/>
-          </a:prstGeom>
-          <a:noFill xmlns:a="http://schemas.openxmlformats.org/drawingml/2006/main"/>
-          <a:ln xmlns:a="http://schemas.openxmlformats.org/drawingml/2006/main" w="0">
-            <a:noFill/>
-          </a:ln>
-        </p:spPr>
-        <p:txBody>
-          <a:bodyPr xmlns:a="http://schemas.openxmlformats.org/drawingml/2006/main">
-            <a:noAutofit/>
-          </a:bodyPr>
-          <a:lstStyle xmlns:a="http://schemas.openxmlformats.org/drawingml/2006/main">
-            <a:defPPr>
-              <a:defRPr sz="1650" b="0">
-                <a:solidFill>
-                  <a:srgbClr val="C8D3E6"/>
-                </a:solidFill>
-                <a:latin typeface="Arial"/>
-                <a:ea typeface="Arial"/>
-                <a:cs typeface="Arial"/>
-              </a:defRPr>
-            </a:defPPr>
-            <a:lvl1pPr>
-              <a:defRPr sz="1650" b="0">
-                <a:solidFill>
-                  <a:srgbClr val="C8D3E6"/>
-                </a:solidFill>
-                <a:latin typeface="Arial"/>
-                <a:ea typeface="Arial"/>
-                <a:cs typeface="Arial"/>
-              </a:defRPr>
-            </a:lvl1pPr>
-            <a:lvl2pPr>
-              <a:defRPr sz="1650" b="0">
-                <a:solidFill>
-                  <a:srgbClr val="C8D3E6"/>
-                </a:solidFill>
-                <a:latin typeface="Arial"/>
-                <a:ea typeface="Arial"/>
-                <a:cs typeface="Arial"/>
-              </a:defRPr>
-            </a:lvl2pPr>
-            <a:lvl3pPr>
-              <a:defRPr sz="1650" b="0">
-                <a:solidFill>
-                  <a:srgbClr val="C8D3E6"/>
-                </a:solidFill>
-                <a:latin typeface="Arial"/>
-                <a:ea typeface="Arial"/>
-                <a:cs typeface="Arial"/>
-              </a:defRPr>
-            </a:lvl3pPr>
-            <a:lvl4pPr>
-              <a:defRPr sz="1650" b="0">
-                <a:solidFill>
-                  <a:srgbClr val="C8D3E6"/>
-                </a:solidFill>
-                <a:latin typeface="Arial"/>
-                <a:ea typeface="Arial"/>
-                <a:cs typeface="Arial"/>
-              </a:defRPr>
-            </a:lvl4pPr>
-            <a:lvl5pPr>
-              <a:defRPr sz="1650" b="0">
-                <a:solidFill>
-                  <a:srgbClr val="C8D3E6"/>
-                </a:solidFill>
-                <a:latin typeface="Arial"/>
-                <a:ea typeface="Arial"/>
-                <a:cs typeface="Arial"/>
-              </a:defRPr>
-            </a:lvl5pPr>
-            <a:lvl6pPr>
-              <a:defRPr sz="1650" b="0">
-                <a:solidFill>
-                  <a:srgbClr val="C8D3E6"/>
-                </a:solidFill>
-                <a:latin typeface="Arial"/>
-                <a:ea typeface="Arial"/>
-                <a:cs typeface="Arial"/>
-              </a:defRPr>
-            </a:lvl6pPr>
-            <a:lvl7pPr>
-              <a:defRPr sz="1650" b="0">
-                <a:solidFill>
-                  <a:srgbClr val="C8D3E6"/>
-                </a:solidFill>
-                <a:latin typeface="Arial"/>
-                <a:ea typeface="Arial"/>
-                <a:cs typeface="Arial"/>
-              </a:defRPr>
-            </a:lvl7pPr>
-            <a:lvl8pPr>
-              <a:defRPr sz="1650" b="0">
-                <a:solidFill>
-                  <a:srgbClr val="C8D3E6"/>
-                </a:solidFill>
-                <a:latin typeface="Arial"/>
-                <a:ea typeface="Arial"/>
-                <a:cs typeface="Arial"/>
-              </a:defRPr>
-            </a:lvl8pPr>
-            <a:lvl9pPr>
-              <a:defRPr sz="1650" b="0">
-                <a:solidFill>
-                  <a:srgbClr val="C8D3E6"/>
-                </a:solidFill>
-                <a:latin typeface="Arial"/>
-                <a:ea typeface="Arial"/>
-                <a:cs typeface="Arial"/>
-              </a:defRPr>
-            </a:lvl9pPr>
-          </a:lstStyle>
-          <a:p xmlns:a="http://schemas.openxmlformats.org/drawingml/2006/main">
-            <a:pPr>
-              <a:defRPr sz="1650" b="0">
-                <a:solidFill>
-                  <a:srgbClr val="C8D3E6"/>
-                </a:solidFill>
-                <a:latin typeface="Arial"/>
-                <a:ea typeface="Arial"/>
-                <a:cs typeface="Arial"/>
-              </a:defRPr>
-            </a:pPr>
-            <a:r>
-              <a:rPr sz="1650" b="0">
-                <a:solidFill>
-                  <a:srgbClr val="C8D3E6"/>
-                </a:solidFill>
-                <a:latin typeface="Arial"/>
-                <a:ea typeface="Arial"/>
-                <a:cs typeface="Arial"/>
-              </a:rPr>
-              <a:t>Ndihmon përdoruesin</a:t>
-            </a:r>
-          </a:p>
-        </p:txBody>
-      </p:sp>
-      <p:pic>
-        <p:nvPicPr>
-          <p:cNvPr id="7" name="">
-            <a:extLst xmlns:a="http://schemas.openxmlformats.org/drawingml/2006/main">
-              <a:ext uri="{FF2B5EF4-FFF2-40B4-BE49-F238E27FC236}">
-                <a16:creationId xmlns:a16="http://schemas.microsoft.com/office/drawing/2014/main" id="{1F06370D-AC39-4FF7-9E8A-0F6A453D0524}"/>
-              </a:ext>
-            </a:extLst>
-          </p:cNvPr>
-          <p:cNvPicPr>
-            <a:picLocks xmlns:a="http://schemas.openxmlformats.org/drawingml/2006/main" noChangeAspect="1"/>
-          </p:cNvPicPr>
-          <p:nvPr/>
-        </p:nvPicPr>
-        <p:blipFill>
-          <a:blip xmlns:r="http://schemas.openxmlformats.org/officeDocument/2006/relationships" xmlns:a="http://schemas.openxmlformats.org/drawingml/2006/main" r:embed="Rbc0550a26f3949f0"/>
-          <a:stretch xmlns:a="http://schemas.openxmlformats.org/drawingml/2006/main"/>
-        </p:blipFill>
-        <p:spPr>
-          <a:xfrm xmlns:a="http://schemas.openxmlformats.org/drawingml/2006/main">
-            <a:off x="6267450" y="1952625"/>
-            <a:ext cx="457200" cy="457200"/>
-          </a:xfrm>
-          <a:prstGeom xmlns:a="http://schemas.openxmlformats.org/drawingml/2006/main" prst="rect">
-            <a:avLst/>
-          </a:prstGeom>
-        </p:spPr>
-      </p:pic>
-      <p:sp>
-        <p:nvSpPr>
-          <p:cNvPr id="8" name="">
-            <a:extLst xmlns:a="http://schemas.openxmlformats.org/drawingml/2006/main">
-              <a:ext uri="{FF2B5EF4-FFF2-40B4-BE49-F238E27FC236}">
-                <a16:creationId xmlns:a16="http://schemas.microsoft.com/office/drawing/2014/main" id="{A2906B72-1C50-4D01-A74D-1C3F2BF06BC3}"/>
-              </a:ext>
-            </a:extLst>
-          </p:cNvPr>
-          <p:cNvSpPr>
-            <a:spLocks xmlns:a="http://schemas.openxmlformats.org/drawingml/2006/main" noGrp="1"/>
-          </p:cNvSpPr>
-          <p:nvPr/>
-        </p:nvSpPr>
-        <p:spPr>
-          <a:xfrm xmlns:a="http://schemas.openxmlformats.org/drawingml/2006/main">
-            <a:off x="6267450" y="2667000"/>
-            <a:ext cx="5295900" cy="495300"/>
-          </a:xfrm>
-          <a:prstGeom xmlns:a="http://schemas.openxmlformats.org/drawingml/2006/main" prst="rect">
-            <a:avLst/>
-          </a:prstGeom>
-          <a:noFill xmlns:a="http://schemas.openxmlformats.org/drawingml/2006/main"/>
-          <a:ln xmlns:a="http://schemas.openxmlformats.org/drawingml/2006/main" w="0">
-            <a:noFill/>
-          </a:ln>
-        </p:spPr>
-        <p:txBody>
-          <a:bodyPr xmlns:a="http://schemas.openxmlformats.org/drawingml/2006/main">
-            <a:noAutofit/>
-          </a:bodyPr>
-          <a:lstStyle xmlns:a="http://schemas.openxmlformats.org/drawingml/2006/main">
-            <a:defPPr>
-              <a:defRPr sz="2025" b="1">
-                <a:solidFill>
-                  <a:srgbClr val="FFFFFF"/>
-                </a:solidFill>
-                <a:latin typeface="Arial"/>
-                <a:ea typeface="Arial"/>
-                <a:cs typeface="Arial"/>
-              </a:defRPr>
-            </a:defPPr>
-            <a:lvl1pPr>
-              <a:defRPr sz="2025" b="1">
-                <a:solidFill>
-                  <a:srgbClr val="FFFFFF"/>
-                </a:solidFill>
-                <a:latin typeface="Arial"/>
-                <a:ea typeface="Arial"/>
-                <a:cs typeface="Arial"/>
-              </a:defRPr>
-            </a:lvl1pPr>
-            <a:lvl2pPr>
-              <a:defRPr sz="2025" b="1">
-                <a:solidFill>
-                  <a:srgbClr val="FFFFFF"/>
-                </a:solidFill>
-                <a:latin typeface="Arial"/>
-                <a:ea typeface="Arial"/>
-                <a:cs typeface="Arial"/>
-              </a:defRPr>
-            </a:lvl2pPr>
-            <a:lvl3pPr>
-              <a:defRPr sz="2025" b="1">
-                <a:solidFill>
-                  <a:srgbClr val="FFFFFF"/>
-                </a:solidFill>
-                <a:latin typeface="Arial"/>
-                <a:ea typeface="Arial"/>
-                <a:cs typeface="Arial"/>
-              </a:defRPr>
-            </a:lvl3pPr>
-            <a:lvl4pPr>
-              <a:defRPr sz="2025" b="1">
-                <a:solidFill>
-                  <a:srgbClr val="FFFFFF"/>
-                </a:solidFill>
-                <a:latin typeface="Arial"/>
-                <a:ea typeface="Arial"/>
-                <a:cs typeface="Arial"/>
-              </a:defRPr>
-            </a:lvl4pPr>
-            <a:lvl5pPr>
-              <a:defRPr sz="2025" b="1">
-                <a:solidFill>
-                  <a:srgbClr val="FFFFFF"/>
-                </a:solidFill>
-                <a:latin typeface="Arial"/>
-                <a:ea typeface="Arial"/>
-                <a:cs typeface="Arial"/>
-              </a:defRPr>
-            </a:lvl5pPr>
-            <a:lvl6pPr>
-              <a:defRPr sz="2025" b="1">
-                <a:solidFill>
-                  <a:srgbClr val="FFFFFF"/>
-                </a:solidFill>
-                <a:latin typeface="Arial"/>
-                <a:ea typeface="Arial"/>
-                <a:cs typeface="Arial"/>
-              </a:defRPr>
-            </a:lvl6pPr>
-            <a:lvl7pPr>
-              <a:defRPr sz="2025" b="1">
-                <a:solidFill>
-                  <a:srgbClr val="FFFFFF"/>
-                </a:solidFill>
-                <a:latin typeface="Arial"/>
-                <a:ea typeface="Arial"/>
-                <a:cs typeface="Arial"/>
-              </a:defRPr>
-            </a:lvl7pPr>
-            <a:lvl8pPr>
-              <a:defRPr sz="2025" b="1">
-                <a:solidFill>
-                  <a:srgbClr val="FFFFFF"/>
-                </a:solidFill>
-                <a:latin typeface="Arial"/>
-                <a:ea typeface="Arial"/>
-                <a:cs typeface="Arial"/>
-              </a:defRPr>
-            </a:lvl8pPr>
-            <a:lvl9pPr>
-              <a:defRPr sz="2025" b="1">
-                <a:solidFill>
-                  <a:srgbClr val="FFFFFF"/>
-                </a:solidFill>
-                <a:latin typeface="Arial"/>
-                <a:ea typeface="Arial"/>
-                <a:cs typeface="Arial"/>
-              </a:defRPr>
-            </a:lvl9pPr>
-          </a:lstStyle>
-          <a:p xmlns:a="http://schemas.openxmlformats.org/drawingml/2006/main">
-            <a:pPr>
-              <a:defRPr sz="2025" b="1">
-                <a:solidFill>
-                  <a:srgbClr val="FFFFFF"/>
-                </a:solidFill>
-                <a:latin typeface="Arial"/>
-                <a:ea typeface="Arial"/>
-                <a:cs typeface="Arial"/>
-              </a:defRPr>
-            </a:pPr>
-            <a:r>
-              <a:rPr sz="2025" b="1">
-                <a:solidFill>
-                  <a:srgbClr val="FFFFFF"/>
-                </a:solidFill>
-                <a:latin typeface="Arial"/>
-                <a:ea typeface="Arial"/>
-                <a:cs typeface="Arial"/>
-              </a:rPr>
-              <a:t>Serveri</a:t>
-            </a:r>
-          </a:p>
-        </p:txBody>
-      </p:sp>
-      <p:sp>
-        <p:nvSpPr>
-          <p:cNvPr id="9" name="">
-            <a:extLst xmlns:a="http://schemas.openxmlformats.org/drawingml/2006/main">
-              <a:ext uri="{FF2B5EF4-FFF2-40B4-BE49-F238E27FC236}">
-                <a16:creationId xmlns:a16="http://schemas.microsoft.com/office/drawing/2014/main" id="{4232690B-2CCA-4B1D-BD98-3373F5636C83}"/>
-              </a:ext>
-            </a:extLst>
-          </p:cNvPr>
-          <p:cNvSpPr>
-            <a:spLocks xmlns:a="http://schemas.openxmlformats.org/drawingml/2006/main" noGrp="1"/>
-          </p:cNvSpPr>
-          <p:nvPr/>
-        </p:nvSpPr>
-        <p:spPr>
-          <a:xfrm xmlns:a="http://schemas.openxmlformats.org/drawingml/2006/main">
-            <a:off x="6267450" y="3219450"/>
-            <a:ext cx="5295900" cy="571500"/>
-          </a:xfrm>
-          <a:prstGeom xmlns:a="http://schemas.openxmlformats.org/drawingml/2006/main" prst="rect">
-            <a:avLst/>
-          </a:prstGeom>
-          <a:noFill xmlns:a="http://schemas.openxmlformats.org/drawingml/2006/main"/>
-          <a:ln xmlns:a="http://schemas.openxmlformats.org/drawingml/2006/main" w="0">
-            <a:noFill/>
-          </a:ln>
-        </p:spPr>
-        <p:txBody>
-          <a:bodyPr xmlns:a="http://schemas.openxmlformats.org/drawingml/2006/main">
-            <a:noAutofit/>
-          </a:bodyPr>
-          <a:lstStyle xmlns:a="http://schemas.openxmlformats.org/drawingml/2006/main">
-            <a:defPPr>
-              <a:defRPr sz="1650" b="0">
-                <a:solidFill>
-                  <a:srgbClr val="C8D3E6"/>
-                </a:solidFill>
-                <a:latin typeface="Arial"/>
-                <a:ea typeface="Arial"/>
-                <a:cs typeface="Arial"/>
-              </a:defRPr>
-            </a:defPPr>
-            <a:lvl1pPr>
-              <a:defRPr sz="1650" b="0">
-                <a:solidFill>
-                  <a:srgbClr val="C8D3E6"/>
-                </a:solidFill>
-                <a:latin typeface="Arial"/>
-                <a:ea typeface="Arial"/>
-                <a:cs typeface="Arial"/>
-              </a:defRPr>
-            </a:lvl1pPr>
-            <a:lvl2pPr>
-              <a:defRPr sz="1650" b="0">
-                <a:solidFill>
-                  <a:srgbClr val="C8D3E6"/>
-                </a:solidFill>
-                <a:latin typeface="Arial"/>
-                <a:ea typeface="Arial"/>
-                <a:cs typeface="Arial"/>
-              </a:defRPr>
-            </a:lvl2pPr>
-            <a:lvl3pPr>
-              <a:defRPr sz="1650" b="0">
-                <a:solidFill>
-                  <a:srgbClr val="C8D3E6"/>
-                </a:solidFill>
-                <a:latin typeface="Arial"/>
-                <a:ea typeface="Arial"/>
-                <a:cs typeface="Arial"/>
-              </a:defRPr>
-            </a:lvl3pPr>
-            <a:lvl4pPr>
-              <a:defRPr sz="1650" b="0">
-                <a:solidFill>
-                  <a:srgbClr val="C8D3E6"/>
-                </a:solidFill>
-                <a:latin typeface="Arial"/>
-                <a:ea typeface="Arial"/>
-                <a:cs typeface="Arial"/>
-              </a:defRPr>
-            </a:lvl4pPr>
-            <a:lvl5pPr>
-              <a:defRPr sz="1650" b="0">
-                <a:solidFill>
-                  <a:srgbClr val="C8D3E6"/>
-                </a:solidFill>
-                <a:latin typeface="Arial"/>
-                <a:ea typeface="Arial"/>
-                <a:cs typeface="Arial"/>
-              </a:defRPr>
-            </a:lvl5pPr>
-            <a:lvl6pPr>
-              <a:defRPr sz="1650" b="0">
-                <a:solidFill>
-                  <a:srgbClr val="C8D3E6"/>
-                </a:solidFill>
-                <a:latin typeface="Arial"/>
-                <a:ea typeface="Arial"/>
-                <a:cs typeface="Arial"/>
-              </a:defRPr>
-            </a:lvl6pPr>
-            <a:lvl7pPr>
-              <a:defRPr sz="1650" b="0">
-                <a:solidFill>
-                  <a:srgbClr val="C8D3E6"/>
-                </a:solidFill>
-                <a:latin typeface="Arial"/>
-                <a:ea typeface="Arial"/>
-                <a:cs typeface="Arial"/>
-              </a:defRPr>
-            </a:lvl7pPr>
-            <a:lvl8pPr>
-              <a:defRPr sz="1650" b="0">
-                <a:solidFill>
-                  <a:srgbClr val="C8D3E6"/>
-                </a:solidFill>
-                <a:latin typeface="Arial"/>
-                <a:ea typeface="Arial"/>
-                <a:cs typeface="Arial"/>
-              </a:defRPr>
-            </a:lvl8pPr>
-            <a:lvl9pPr>
-              <a:defRPr sz="1650" b="0">
-                <a:solidFill>
-                  <a:srgbClr val="C8D3E6"/>
-                </a:solidFill>
-                <a:latin typeface="Arial"/>
-                <a:ea typeface="Arial"/>
-                <a:cs typeface="Arial"/>
-              </a:defRPr>
-            </a:lvl9pPr>
-          </a:lstStyle>
-          <a:p xmlns:a="http://schemas.openxmlformats.org/drawingml/2006/main">
-            <a:pPr>
-              <a:defRPr sz="1650" b="0">
-                <a:solidFill>
-                  <a:srgbClr val="C8D3E6"/>
-                </a:solidFill>
-                <a:latin typeface="Arial"/>
-                <a:ea typeface="Arial"/>
-                <a:cs typeface="Arial"/>
-              </a:defRPr>
-            </a:pPr>
-            <a:r>
-              <a:rPr sz="1650" b="0">
-                <a:solidFill>
-                  <a:srgbClr val="C8D3E6"/>
-                </a:solidFill>
-                <a:latin typeface="Arial"/>
-                <a:ea typeface="Arial"/>
-                <a:cs typeface="Arial"/>
-              </a:rPr>
-              <a:t>Verifikon sesionin dhe pronarin</a:t>
-            </a:r>
-          </a:p>
-        </p:txBody>
-      </p:sp>
-      <p:sp>
-        <p:nvSpPr>
-          <p:cNvPr id="10" name="">
-            <a:extLst xmlns:a="http://schemas.openxmlformats.org/drawingml/2006/main">
-              <a:ext uri="{FF2B5EF4-FFF2-40B4-BE49-F238E27FC236}">
-                <a16:creationId xmlns:a16="http://schemas.microsoft.com/office/drawing/2014/main" id="{E265E73D-DD0A-4911-A0B4-546399476DCC}"/>
-              </a:ext>
-            </a:extLst>
-          </p:cNvPr>
-          <p:cNvSpPr>
-            <a:spLocks xmlns:a="http://schemas.openxmlformats.org/drawingml/2006/main" noGrp="1"/>
-          </p:cNvSpPr>
-          <p:nvPr/>
-        </p:nvSpPr>
-        <p:spPr>
-          <a:xfrm xmlns:a="http://schemas.openxmlformats.org/drawingml/2006/main">
-            <a:off x="609600" y="3924300"/>
-            <a:ext cx="10953750" cy="809625"/>
+            <a:off x="609600" y="1952625"/>
+            <a:ext cx="5334000" cy="1381125"/>
           </a:xfrm>
           <a:prstGeom xmlns:a="http://schemas.openxmlformats.org/drawingml/2006/main" prst="rect">
             <a:avLst/>
@@ -13168,12 +11848,68 @@
           </a:p>
         </p:txBody>
       </p:sp>
+      <p:pic>
+        <p:nvPicPr>
+          <p:cNvPr id="5" name="">
+            <a:extLst xmlns:a="http://schemas.openxmlformats.org/drawingml/2006/main">
+              <a:ext uri="{FF2B5EF4-FFF2-40B4-BE49-F238E27FC236}">
+                <a16:creationId xmlns:a16="http://schemas.microsoft.com/office/drawing/2014/main" id="{F9FD5921-836F-43DC-B81F-3B5D2DDBA164}"/>
+              </a:ext>
+            </a:extLst>
+          </p:cNvPr>
+          <p:cNvPicPr>
+            <a:picLocks xmlns:a="http://schemas.openxmlformats.org/drawingml/2006/main" noChangeAspect="1"/>
+          </p:cNvPicPr>
+          <p:nvPr/>
+        </p:nvPicPr>
+        <p:blipFill>
+          <a:blip xmlns:r="http://schemas.openxmlformats.org/officeDocument/2006/relationships" xmlns:a="http://schemas.openxmlformats.org/drawingml/2006/main" r:embed="Rb4854627dea54cee"/>
+          <a:stretch xmlns:a="http://schemas.openxmlformats.org/drawingml/2006/main"/>
+        </p:blipFill>
+        <p:spPr>
+          <a:xfrm xmlns:a="http://schemas.openxmlformats.org/drawingml/2006/main">
+            <a:off x="6334125" y="1952625"/>
+            <a:ext cx="2190750" cy="3409950"/>
+          </a:xfrm>
+          <a:prstGeom xmlns:a="http://schemas.openxmlformats.org/drawingml/2006/main" prst="rect">
+            <a:avLst/>
+          </a:prstGeom>
+        </p:spPr>
+      </p:pic>
+      <p:pic>
+        <p:nvPicPr>
+          <p:cNvPr id="6" name="">
+            <a:extLst xmlns:a="http://schemas.openxmlformats.org/drawingml/2006/main">
+              <a:ext uri="{FF2B5EF4-FFF2-40B4-BE49-F238E27FC236}">
+                <a16:creationId xmlns:a16="http://schemas.microsoft.com/office/drawing/2014/main" id="{F93E7324-7271-4C62-94A2-23872CBFDF6D}"/>
+              </a:ext>
+            </a:extLst>
+          </p:cNvPr>
+          <p:cNvPicPr>
+            <a:picLocks xmlns:a="http://schemas.openxmlformats.org/drawingml/2006/main" noChangeAspect="1"/>
+          </p:cNvPicPr>
+          <p:nvPr/>
+        </p:nvPicPr>
+        <p:blipFill>
+          <a:blip xmlns:r="http://schemas.openxmlformats.org/officeDocument/2006/relationships" xmlns:a="http://schemas.openxmlformats.org/drawingml/2006/main" r:embed="R3d1518911d2c42c5"/>
+          <a:stretch xmlns:a="http://schemas.openxmlformats.org/drawingml/2006/main"/>
+        </p:blipFill>
+        <p:spPr>
+          <a:xfrm xmlns:a="http://schemas.openxmlformats.org/drawingml/2006/main">
+            <a:off x="9001125" y="1952625"/>
+            <a:ext cx="2190750" cy="3409950"/>
+          </a:xfrm>
+          <a:prstGeom xmlns:a="http://schemas.openxmlformats.org/drawingml/2006/main" prst="rect">
+            <a:avLst/>
+          </a:prstGeom>
+        </p:spPr>
+      </p:pic>
       <p:sp>
         <p:nvSpPr>
-          <p:cNvPr id="11" name="">
+          <p:cNvPr id="7" name="">
             <a:extLst xmlns:a="http://schemas.openxmlformats.org/drawingml/2006/main">
               <a:ext uri="{FF2B5EF4-FFF2-40B4-BE49-F238E27FC236}">
-                <a16:creationId xmlns:a16="http://schemas.microsoft.com/office/drawing/2014/main" id="{866F8612-0BAE-4344-936B-33DABA8F2BED}"/>
+                <a16:creationId xmlns:a16="http://schemas.microsoft.com/office/drawing/2014/main" id="{BAAFD6B9-AD5F-404F-B66B-4810CFB69A83}"/>
               </a:ext>
             </a:extLst>
           </p:cNvPr>
@@ -13184,8 +11920,8 @@
         </p:nvSpPr>
         <p:spPr>
           <a:xfrm xmlns:a="http://schemas.openxmlformats.org/drawingml/2006/main">
-            <a:off x="609600" y="4857750"/>
-            <a:ext cx="10953750" cy="495300"/>
+            <a:off x="609600" y="3571875"/>
+            <a:ext cx="5334000" cy="609600"/>
           </a:xfrm>
           <a:prstGeom xmlns:a="http://schemas.openxmlformats.org/drawingml/2006/main" prst="rect">
             <a:avLst/>
@@ -13328,10 +12064,10 @@
       </p:sp>
       <p:sp>
         <p:nvSpPr>
-          <p:cNvPr id="12" name="">
+          <p:cNvPr id="8" name="">
             <a:extLst xmlns:a="http://schemas.openxmlformats.org/drawingml/2006/main">
               <a:ext uri="{FF2B5EF4-FFF2-40B4-BE49-F238E27FC236}">
-                <a16:creationId xmlns:a16="http://schemas.microsoft.com/office/drawing/2014/main" id="{13DD615E-5F91-4E71-8B23-9A49BC831361}"/>
+                <a16:creationId xmlns:a16="http://schemas.microsoft.com/office/drawing/2014/main" id="{E6A07BB6-3F56-445D-8D13-6DB301793B75}"/>
               </a:ext>
             </a:extLst>
           </p:cNvPr>
@@ -13342,8 +12078,8 @@
         </p:nvSpPr>
         <p:spPr>
           <a:xfrm xmlns:a="http://schemas.openxmlformats.org/drawingml/2006/main">
-            <a:off x="609600" y="5457825"/>
-            <a:ext cx="10953750" cy="971550"/>
+            <a:off x="609600" y="4295775"/>
+            <a:ext cx="5334000" cy="1381125"/>
           </a:xfrm>
           <a:prstGeom xmlns:a="http://schemas.openxmlformats.org/drawingml/2006/main" prst="rect">
             <a:avLst/>
@@ -13359,7 +12095,7 @@
           </a:bodyPr>
           <a:lstStyle xmlns:a="http://schemas.openxmlformats.org/drawingml/2006/main">
             <a:defPPr>
-              <a:defRPr sz="1800" b="0">
+              <a:defRPr sz="1725" b="0">
                 <a:solidFill>
                   <a:srgbClr val="EDF2FF"/>
                 </a:solidFill>
@@ -13369,7 +12105,7 @@
               </a:defRPr>
             </a:defPPr>
             <a:lvl1pPr>
-              <a:defRPr sz="1800" b="0">
+              <a:defRPr sz="1725" b="0">
                 <a:solidFill>
                   <a:srgbClr val="EDF2FF"/>
                 </a:solidFill>
@@ -13379,7 +12115,7 @@
               </a:defRPr>
             </a:lvl1pPr>
             <a:lvl2pPr>
-              <a:defRPr sz="1800" b="0">
+              <a:defRPr sz="1725" b="0">
                 <a:solidFill>
                   <a:srgbClr val="EDF2FF"/>
                 </a:solidFill>
@@ -13389,7 +12125,7 @@
               </a:defRPr>
             </a:lvl2pPr>
             <a:lvl3pPr>
-              <a:defRPr sz="1800" b="0">
+              <a:defRPr sz="1725" b="0">
                 <a:solidFill>
                   <a:srgbClr val="EDF2FF"/>
                 </a:solidFill>
@@ -13399,7 +12135,7 @@
               </a:defRPr>
             </a:lvl3pPr>
             <a:lvl4pPr>
-              <a:defRPr sz="1800" b="0">
+              <a:defRPr sz="1725" b="0">
                 <a:solidFill>
                   <a:srgbClr val="EDF2FF"/>
                 </a:solidFill>
@@ -13409,7 +12145,7 @@
               </a:defRPr>
             </a:lvl4pPr>
             <a:lvl5pPr>
-              <a:defRPr sz="1800" b="0">
+              <a:defRPr sz="1725" b="0">
                 <a:solidFill>
                   <a:srgbClr val="EDF2FF"/>
                 </a:solidFill>
@@ -13419,7 +12155,7 @@
               </a:defRPr>
             </a:lvl5pPr>
             <a:lvl6pPr>
-              <a:defRPr sz="1800" b="0">
+              <a:defRPr sz="1725" b="0">
                 <a:solidFill>
                   <a:srgbClr val="EDF2FF"/>
                 </a:solidFill>
@@ -13429,7 +12165,7 @@
               </a:defRPr>
             </a:lvl6pPr>
             <a:lvl7pPr>
-              <a:defRPr sz="1800" b="0">
+              <a:defRPr sz="1725" b="0">
                 <a:solidFill>
                   <a:srgbClr val="EDF2FF"/>
                 </a:solidFill>
@@ -13439,7 +12175,7 @@
               </a:defRPr>
             </a:lvl7pPr>
             <a:lvl8pPr>
-              <a:defRPr sz="1800" b="0">
+              <a:defRPr sz="1725" b="0">
                 <a:solidFill>
                   <a:srgbClr val="EDF2FF"/>
                 </a:solidFill>
@@ -13449,7 +12185,7 @@
               </a:defRPr>
             </a:lvl8pPr>
             <a:lvl9pPr>
-              <a:defRPr sz="1800" b="0">
+              <a:defRPr sz="1725" b="0">
                 <a:solidFill>
                   <a:srgbClr val="EDF2FF"/>
                 </a:solidFill>
@@ -13461,7 +12197,7 @@
           </a:lstStyle>
           <a:p xmlns:a="http://schemas.openxmlformats.org/drawingml/2006/main">
             <a:pPr>
-              <a:defRPr sz="1800" b="0">
+              <a:defRPr sz="1725" b="0">
                 <a:solidFill>
                   <a:srgbClr val="EDF2FF"/>
                 </a:solidFill>
@@ -13471,7 +12207,7 @@
               </a:defRPr>
             </a:pPr>
             <a:r>
-              <a:rPr sz="1800" b="0">
+              <a:rPr sz="1725" b="0">
                 <a:solidFill>
                   <a:srgbClr val="EDF2FF"/>
                 </a:solidFill>
@@ -13484,7 +12220,7 @@
           </a:p>
           <a:p xmlns:a="http://schemas.openxmlformats.org/drawingml/2006/main">
             <a:pPr>
-              <a:defRPr sz="1800" b="0">
+              <a:defRPr sz="1725" b="0">
                 <a:solidFill>
                   <a:srgbClr val="EDF2FF"/>
                 </a:solidFill>
@@ -13494,7 +12230,7 @@
               </a:defRPr>
             </a:pPr>
             <a:r>
-              <a:rPr sz="1800" b="0">
+              <a:rPr sz="1725" b="0">
                 <a:solidFill>
                   <a:srgbClr val="EDF2FF"/>
                 </a:solidFill>
@@ -13507,7 +12243,7 @@
           </a:p>
           <a:p xmlns:a="http://schemas.openxmlformats.org/drawingml/2006/main">
             <a:pPr>
-              <a:defRPr sz="1800" b="0">
+              <a:defRPr sz="1725" b="0">
                 <a:solidFill>
                   <a:srgbClr val="EDF2FF"/>
                 </a:solidFill>
@@ -13517,7 +12253,7 @@
               </a:defRPr>
             </a:pPr>
             <a:r>
-              <a:rPr sz="1800" b="0">
+              <a:rPr sz="1725" b="0">
                 <a:solidFill>
                   <a:srgbClr val="EDF2FF"/>
                 </a:solidFill>
@@ -13532,10 +12268,10 @@
       </p:sp>
       <p:sp>
         <p:nvSpPr>
-          <p:cNvPr id="13" name="">
+          <p:cNvPr id="9" name="">
             <a:extLst xmlns:a="http://schemas.openxmlformats.org/drawingml/2006/main">
               <a:ext uri="{FF2B5EF4-FFF2-40B4-BE49-F238E27FC236}">
-                <a16:creationId xmlns:a16="http://schemas.microsoft.com/office/drawing/2014/main" id="{36794062-5029-48AF-9AF3-293BE01FDB4D}"/>
+                <a16:creationId xmlns:a16="http://schemas.microsoft.com/office/drawing/2014/main" id="{A741F224-283B-46AD-87C0-6B20E026CDF7}"/>
               </a:ext>
             </a:extLst>
           </p:cNvPr>
@@ -13546,8 +12282,8 @@
         </p:nvSpPr>
         <p:spPr>
           <a:xfrm xmlns:a="http://schemas.openxmlformats.org/drawingml/2006/main">
-            <a:off x="609600" y="6553200"/>
-            <a:ext cx="10953750" cy="219075"/>
+            <a:off x="609600" y="6191250"/>
+            <a:ext cx="10953750" cy="304800"/>
           </a:xfrm>
           <a:prstGeom xmlns:a="http://schemas.openxmlformats.org/drawingml/2006/main" prst="rect">
             <a:avLst/>
@@ -13563,9 +12299,9 @@
           </a:bodyPr>
           <a:lstStyle xmlns:a="http://schemas.openxmlformats.org/drawingml/2006/main">
             <a:defPPr>
-              <a:defRPr sz="1275" b="0">
-                <a:solidFill>
-                  <a:srgbClr val="C8D3E6"/>
+              <a:defRPr sz="1650" b="0">
+                <a:solidFill>
+                  <a:srgbClr val="FDBA74"/>
                 </a:solidFill>
                 <a:latin typeface="Arial"/>
                 <a:ea typeface="Arial"/>
@@ -13573,9 +12309,9 @@
               </a:defRPr>
             </a:defPPr>
             <a:lvl1pPr>
-              <a:defRPr sz="1275" b="0">
-                <a:solidFill>
-                  <a:srgbClr val="C8D3E6"/>
+              <a:defRPr sz="1650" b="0">
+                <a:solidFill>
+                  <a:srgbClr val="FDBA74"/>
                 </a:solidFill>
                 <a:latin typeface="Arial"/>
                 <a:ea typeface="Arial"/>
@@ -13583,9 +12319,9 @@
               </a:defRPr>
             </a:lvl1pPr>
             <a:lvl2pPr>
-              <a:defRPr sz="1275" b="0">
-                <a:solidFill>
-                  <a:srgbClr val="C8D3E6"/>
+              <a:defRPr sz="1650" b="0">
+                <a:solidFill>
+                  <a:srgbClr val="FDBA74"/>
                 </a:solidFill>
                 <a:latin typeface="Arial"/>
                 <a:ea typeface="Arial"/>
@@ -13593,9 +12329,9 @@
               </a:defRPr>
             </a:lvl2pPr>
             <a:lvl3pPr>
-              <a:defRPr sz="1275" b="0">
-                <a:solidFill>
-                  <a:srgbClr val="C8D3E6"/>
+              <a:defRPr sz="1650" b="0">
+                <a:solidFill>
+                  <a:srgbClr val="FDBA74"/>
                 </a:solidFill>
                 <a:latin typeface="Arial"/>
                 <a:ea typeface="Arial"/>
@@ -13603,9 +12339,9 @@
               </a:defRPr>
             </a:lvl3pPr>
             <a:lvl4pPr>
-              <a:defRPr sz="1275" b="0">
-                <a:solidFill>
-                  <a:srgbClr val="C8D3E6"/>
+              <a:defRPr sz="1650" b="0">
+                <a:solidFill>
+                  <a:srgbClr val="FDBA74"/>
                 </a:solidFill>
                 <a:latin typeface="Arial"/>
                 <a:ea typeface="Arial"/>
@@ -13613,9 +12349,9 @@
               </a:defRPr>
             </a:lvl4pPr>
             <a:lvl5pPr>
-              <a:defRPr sz="1275" b="0">
-                <a:solidFill>
-                  <a:srgbClr val="C8D3E6"/>
+              <a:defRPr sz="1650" b="0">
+                <a:solidFill>
+                  <a:srgbClr val="FDBA74"/>
                 </a:solidFill>
                 <a:latin typeface="Arial"/>
                 <a:ea typeface="Arial"/>
@@ -13623,9 +12359,9 @@
               </a:defRPr>
             </a:lvl5pPr>
             <a:lvl6pPr>
-              <a:defRPr sz="1275" b="0">
-                <a:solidFill>
-                  <a:srgbClr val="C8D3E6"/>
+              <a:defRPr sz="1650" b="0">
+                <a:solidFill>
+                  <a:srgbClr val="FDBA74"/>
                 </a:solidFill>
                 <a:latin typeface="Arial"/>
                 <a:ea typeface="Arial"/>
@@ -13633,9 +12369,9 @@
               </a:defRPr>
             </a:lvl6pPr>
             <a:lvl7pPr>
-              <a:defRPr sz="1275" b="0">
-                <a:solidFill>
-                  <a:srgbClr val="C8D3E6"/>
+              <a:defRPr sz="1650" b="0">
+                <a:solidFill>
+                  <a:srgbClr val="FDBA74"/>
                 </a:solidFill>
                 <a:latin typeface="Arial"/>
                 <a:ea typeface="Arial"/>
@@ -13643,9 +12379,9 @@
               </a:defRPr>
             </a:lvl7pPr>
             <a:lvl8pPr>
-              <a:defRPr sz="1275" b="0">
-                <a:solidFill>
-                  <a:srgbClr val="C8D3E6"/>
+              <a:defRPr sz="1650" b="0">
+                <a:solidFill>
+                  <a:srgbClr val="FDBA74"/>
                 </a:solidFill>
                 <a:latin typeface="Arial"/>
                 <a:ea typeface="Arial"/>
@@ -13653,9 +12389,9 @@
               </a:defRPr>
             </a:lvl8pPr>
             <a:lvl9pPr>
-              <a:defRPr sz="1275" b="0">
-                <a:solidFill>
-                  <a:srgbClr val="C8D3E6"/>
+              <a:defRPr sz="1650" b="0">
+                <a:solidFill>
+                  <a:srgbClr val="FDBA74"/>
                 </a:solidFill>
                 <a:latin typeface="Arial"/>
                 <a:ea typeface="Arial"/>
@@ -13665,9 +12401,9 @@
           </a:lstStyle>
           <a:p xmlns:a="http://schemas.openxmlformats.org/drawingml/2006/main">
             <a:pPr>
-              <a:defRPr sz="1275" b="0">
-                <a:solidFill>
-                  <a:srgbClr val="C8D3E6"/>
+              <a:defRPr sz="1650" b="0">
+                <a:solidFill>
+                  <a:srgbClr val="FDBA74"/>
                 </a:solidFill>
                 <a:latin typeface="Arial"/>
                 <a:ea typeface="Arial"/>
@@ -13675,15 +12411,15 @@
               </a:defRPr>
             </a:pPr>
             <a:r>
-              <a:rPr sz="1275" b="0">
-                <a:solidFill>
-                  <a:srgbClr val="C8D3E6"/>
+              <a:rPr sz="1650" b="0">
+                <a:solidFill>
+                  <a:srgbClr val="FDBA74"/>
                 </a:solidFill>
                 <a:latin typeface="Arial"/>
                 <a:ea typeface="Arial"/>
                 <a:cs typeface="Arial"/>
               </a:rPr>
-              <a:t>Votoni, shpjegoni arsyen dhe pastaj kaloni te slajdi vijues</a:t>
+              <a:t>Votoni dhe diskutoni arsyen përpara përgjigjes.</a:t>
             </a:r>
           </a:p>
         </p:txBody>
@@ -13691,7 +12427,7 @@
     </p:spTree>
     <p:extLst>
       <p:ext uri="{BB962C8B-B14F-4D97-AF65-F5344CB8AC3E}">
-        <p14:creationId xmlns:p14="http://schemas.microsoft.com/office/powerpoint/2010/main" val="200428823"/>
+        <p14:creationId xmlns:p14="http://schemas.microsoft.com/office/powerpoint/2010/main" val="944450747"/>
       </p:ext>
     </p:extLst>
   </p:cSld>
@@ -13722,7 +12458,7 @@
           <p:cNvPr id="14" name="">
             <a:extLst xmlns:a="http://schemas.openxmlformats.org/drawingml/2006/main">
               <a:ext uri="{FF2B5EF4-FFF2-40B4-BE49-F238E27FC236}">
-                <a16:creationId xmlns:a16="http://schemas.microsoft.com/office/drawing/2014/main" id="{11606A85-011D-4E29-91CC-6EDEFB824DC9}"/>
+                <a16:creationId xmlns:a16="http://schemas.microsoft.com/office/drawing/2014/main" id="{CE636814-B9D6-47B9-BB74-B603C47E7FEE}"/>
               </a:ext>
             </a:extLst>
           </p:cNvPr>
@@ -13880,7 +12616,7 @@
           <p:cNvPr id="2" name="">
             <a:extLst xmlns:a="http://schemas.openxmlformats.org/drawingml/2006/main">
               <a:ext uri="{FF2B5EF4-FFF2-40B4-BE49-F238E27FC236}">
-                <a16:creationId xmlns:a16="http://schemas.microsoft.com/office/drawing/2014/main" id="{AC38E052-7A05-418B-BF44-B32EE48A8AEA}"/>
+                <a16:creationId xmlns:a16="http://schemas.microsoft.com/office/drawing/2014/main" id="{8B1317E7-7AA2-417C-BED6-89ADE39773B1}"/>
               </a:ext>
             </a:extLst>
           </p:cNvPr>
@@ -14038,7 +12774,7 @@
           <p:cNvPr id="3" name="">
             <a:extLst xmlns:a="http://schemas.openxmlformats.org/drawingml/2006/main">
               <a:ext uri="{FF2B5EF4-FFF2-40B4-BE49-F238E27FC236}">
-                <a16:creationId xmlns:a16="http://schemas.microsoft.com/office/drawing/2014/main" id="{898CA833-C7A9-47AF-A991-1DAD203F92EC}"/>
+                <a16:creationId xmlns:a16="http://schemas.microsoft.com/office/drawing/2014/main" id="{6FA1FEE7-4318-4C80-B6ED-6290FC514E94}"/>
               </a:ext>
             </a:extLst>
           </p:cNvPr>
@@ -14196,7 +12932,7 @@
           <p:cNvPr id="4" name="">
             <a:extLst xmlns:a="http://schemas.openxmlformats.org/drawingml/2006/main">
               <a:ext uri="{FF2B5EF4-FFF2-40B4-BE49-F238E27FC236}">
-                <a16:creationId xmlns:a16="http://schemas.microsoft.com/office/drawing/2014/main" id="{7F3D39EC-CD06-4984-AF61-04F40FB3DFE0}"/>
+                <a16:creationId xmlns:a16="http://schemas.microsoft.com/office/drawing/2014/main" id="{DA8540C3-1377-4BCC-9A62-B5283BD8C830}"/>
               </a:ext>
             </a:extLst>
           </p:cNvPr>
@@ -14206,7 +12942,7 @@
           <p:nvPr/>
         </p:nvPicPr>
         <p:blipFill>
-          <a:blip xmlns:r="http://schemas.openxmlformats.org/officeDocument/2006/relationships" xmlns:a="http://schemas.openxmlformats.org/drawingml/2006/main" r:embed="R6a122b6e318e460a"/>
+          <a:blip xmlns:r="http://schemas.openxmlformats.org/officeDocument/2006/relationships" xmlns:a="http://schemas.openxmlformats.org/drawingml/2006/main" r:embed="R2f65232128cc4f50"/>
           <a:stretch xmlns:a="http://schemas.openxmlformats.org/drawingml/2006/main"/>
         </p:blipFill>
         <p:spPr>
@@ -14224,7 +12960,7 @@
           <p:cNvPr id="5" name="">
             <a:extLst xmlns:a="http://schemas.openxmlformats.org/drawingml/2006/main">
               <a:ext uri="{FF2B5EF4-FFF2-40B4-BE49-F238E27FC236}">
-                <a16:creationId xmlns:a16="http://schemas.microsoft.com/office/drawing/2014/main" id="{BF204C26-EF1D-4D4F-976F-64D256A2AA46}"/>
+                <a16:creationId xmlns:a16="http://schemas.microsoft.com/office/drawing/2014/main" id="{1C11B7E0-3E0E-42F4-B5CE-2176CFFFED9A}"/>
               </a:ext>
             </a:extLst>
           </p:cNvPr>
@@ -14382,7 +13118,7 @@
           <p:cNvPr id="6" name="">
             <a:extLst xmlns:a="http://schemas.openxmlformats.org/drawingml/2006/main">
               <a:ext uri="{FF2B5EF4-FFF2-40B4-BE49-F238E27FC236}">
-                <a16:creationId xmlns:a16="http://schemas.microsoft.com/office/drawing/2014/main" id="{2F1B7A4B-2710-40BB-8E85-EF1E8CB5D434}"/>
+                <a16:creationId xmlns:a16="http://schemas.microsoft.com/office/drawing/2014/main" id="{8A5CEBBC-5382-4383-8083-2258FDCB2139}"/>
               </a:ext>
             </a:extLst>
           </p:cNvPr>
@@ -14540,7 +13276,7 @@
           <p:cNvPr id="7" name="">
             <a:extLst xmlns:a="http://schemas.openxmlformats.org/drawingml/2006/main">
               <a:ext uri="{FF2B5EF4-FFF2-40B4-BE49-F238E27FC236}">
-                <a16:creationId xmlns:a16="http://schemas.microsoft.com/office/drawing/2014/main" id="{C7A5C8FB-5D53-4FE5-91A2-39FA1F17DA0F}"/>
+                <a16:creationId xmlns:a16="http://schemas.microsoft.com/office/drawing/2014/main" id="{39CA0AF4-D9C7-48C1-9D36-992B3F766C93}"/>
               </a:ext>
             </a:extLst>
           </p:cNvPr>
@@ -14550,7 +13286,7 @@
           <p:nvPr/>
         </p:nvPicPr>
         <p:blipFill>
-          <a:blip xmlns:r="http://schemas.openxmlformats.org/officeDocument/2006/relationships" xmlns:a="http://schemas.openxmlformats.org/drawingml/2006/main" r:embed="R26b464f9721b4df0"/>
+          <a:blip xmlns:r="http://schemas.openxmlformats.org/officeDocument/2006/relationships" xmlns:a="http://schemas.openxmlformats.org/drawingml/2006/main" r:embed="R0823635bf50c45b5"/>
           <a:stretch xmlns:a="http://schemas.openxmlformats.org/drawingml/2006/main"/>
         </p:blipFill>
         <p:spPr>
@@ -14568,7 +13304,7 @@
           <p:cNvPr id="8" name="">
             <a:extLst xmlns:a="http://schemas.openxmlformats.org/drawingml/2006/main">
               <a:ext uri="{FF2B5EF4-FFF2-40B4-BE49-F238E27FC236}">
-                <a16:creationId xmlns:a16="http://schemas.microsoft.com/office/drawing/2014/main" id="{29B6501C-2E95-400C-A519-1109295A671A}"/>
+                <a16:creationId xmlns:a16="http://schemas.microsoft.com/office/drawing/2014/main" id="{4FFBDEEC-ACAF-4B48-8880-4A9165370DE6}"/>
               </a:ext>
             </a:extLst>
           </p:cNvPr>
@@ -14726,7 +13462,7 @@
           <p:cNvPr id="9" name="">
             <a:extLst xmlns:a="http://schemas.openxmlformats.org/drawingml/2006/main">
               <a:ext uri="{FF2B5EF4-FFF2-40B4-BE49-F238E27FC236}">
-                <a16:creationId xmlns:a16="http://schemas.microsoft.com/office/drawing/2014/main" id="{AC57A070-C702-4A73-9D70-7463A5C1FC3A}"/>
+                <a16:creationId xmlns:a16="http://schemas.microsoft.com/office/drawing/2014/main" id="{6C4452A7-A1F5-4C39-9377-6E43AA6EBE90}"/>
               </a:ext>
             </a:extLst>
           </p:cNvPr>
@@ -14884,7 +13620,7 @@
           <p:cNvPr id="10" name="">
             <a:extLst xmlns:a="http://schemas.openxmlformats.org/drawingml/2006/main">
               <a:ext uri="{FF2B5EF4-FFF2-40B4-BE49-F238E27FC236}">
-                <a16:creationId xmlns:a16="http://schemas.microsoft.com/office/drawing/2014/main" id="{942638EF-C9D2-41D9-95DC-C22314DA2B8B}"/>
+                <a16:creationId xmlns:a16="http://schemas.microsoft.com/office/drawing/2014/main" id="{BF57947C-6635-4C44-87DB-13B1FF4CEC03}"/>
               </a:ext>
             </a:extLst>
           </p:cNvPr>
@@ -15070,7 +13806,7 @@
           <p:cNvPr id="11" name="">
             <a:extLst xmlns:a="http://schemas.openxmlformats.org/drawingml/2006/main">
               <a:ext uri="{FF2B5EF4-FFF2-40B4-BE49-F238E27FC236}">
-                <a16:creationId xmlns:a16="http://schemas.microsoft.com/office/drawing/2014/main" id="{F0348B27-EF40-4DE2-9BF1-D761572E2711}"/>
+                <a16:creationId xmlns:a16="http://schemas.microsoft.com/office/drawing/2014/main" id="{EC9B2287-5792-4B1D-9385-D31982CEC3A7}"/>
               </a:ext>
             </a:extLst>
           </p:cNvPr>
@@ -15228,7 +13964,7 @@
           <p:cNvPr id="12" name="">
             <a:extLst xmlns:a="http://schemas.openxmlformats.org/drawingml/2006/main">
               <a:ext uri="{FF2B5EF4-FFF2-40B4-BE49-F238E27FC236}">
-                <a16:creationId xmlns:a16="http://schemas.microsoft.com/office/drawing/2014/main" id="{7C5A6907-C1F6-45B8-9DB5-1F2770EFCA33}"/>
+                <a16:creationId xmlns:a16="http://schemas.microsoft.com/office/drawing/2014/main" id="{9AE71FEA-AF76-4696-87D4-645D8DFC5EEF}"/>
               </a:ext>
             </a:extLst>
           </p:cNvPr>
@@ -15386,7 +14122,7 @@
           <p:cNvPr id="13" name="">
             <a:extLst xmlns:a="http://schemas.openxmlformats.org/drawingml/2006/main">
               <a:ext uri="{FF2B5EF4-FFF2-40B4-BE49-F238E27FC236}">
-                <a16:creationId xmlns:a16="http://schemas.microsoft.com/office/drawing/2014/main" id="{B5CF9574-5C95-4358-AA5A-88CF8727DD07}"/>
+                <a16:creationId xmlns:a16="http://schemas.microsoft.com/office/drawing/2014/main" id="{9C46A0FE-E82A-48E5-A191-351072F2A4C2}"/>
               </a:ext>
             </a:extLst>
           </p:cNvPr>
@@ -15542,7 +14278,7 @@
     </p:spTree>
     <p:extLst>
       <p:ext uri="{BB962C8B-B14F-4D97-AF65-F5344CB8AC3E}">
-        <p14:creationId xmlns:p14="http://schemas.microsoft.com/office/powerpoint/2010/main" val="1262496321"/>
+        <p14:creationId xmlns:p14="http://schemas.microsoft.com/office/powerpoint/2010/main" val="1357071816"/>
       </p:ext>
     </p:extLst>
   </p:cSld>
@@ -15573,7 +14309,7 @@
           <p:cNvPr id="13" name="">
             <a:extLst xmlns:a="http://schemas.openxmlformats.org/drawingml/2006/main">
               <a:ext uri="{FF2B5EF4-FFF2-40B4-BE49-F238E27FC236}">
-                <a16:creationId xmlns:a16="http://schemas.microsoft.com/office/drawing/2014/main" id="{1CCF7843-B561-4C56-9B0C-FAF37B38A191}"/>
+                <a16:creationId xmlns:a16="http://schemas.microsoft.com/office/drawing/2014/main" id="{61AFAF13-B886-47E4-89E8-BE42DED2A784}"/>
               </a:ext>
             </a:extLst>
           </p:cNvPr>
@@ -15731,7 +14467,7 @@
           <p:cNvPr id="2" name="">
             <a:extLst xmlns:a="http://schemas.openxmlformats.org/drawingml/2006/main">
               <a:ext uri="{FF2B5EF4-FFF2-40B4-BE49-F238E27FC236}">
-                <a16:creationId xmlns:a16="http://schemas.microsoft.com/office/drawing/2014/main" id="{34912685-233F-49AD-AA21-923B43C0CABE}"/>
+                <a16:creationId xmlns:a16="http://schemas.microsoft.com/office/drawing/2014/main" id="{94C652F5-AC27-46FE-96B9-8B5FD25B3F80}"/>
               </a:ext>
             </a:extLst>
           </p:cNvPr>
@@ -15889,7 +14625,7 @@
           <p:cNvPr id="3" name="">
             <a:extLst xmlns:a="http://schemas.openxmlformats.org/drawingml/2006/main">
               <a:ext uri="{FF2B5EF4-FFF2-40B4-BE49-F238E27FC236}">
-                <a16:creationId xmlns:a16="http://schemas.microsoft.com/office/drawing/2014/main" id="{7AFA2F1C-E3A1-451E-8D45-DE9A3E3E7E1F}"/>
+                <a16:creationId xmlns:a16="http://schemas.microsoft.com/office/drawing/2014/main" id="{B4C63A71-9BA8-4F37-A8BF-303BB17CFA6B}"/>
               </a:ext>
             </a:extLst>
           </p:cNvPr>
@@ -16047,7 +14783,7 @@
           <p:cNvPr id="4" name="">
             <a:extLst xmlns:a="http://schemas.openxmlformats.org/drawingml/2006/main">
               <a:ext uri="{FF2B5EF4-FFF2-40B4-BE49-F238E27FC236}">
-                <a16:creationId xmlns:a16="http://schemas.microsoft.com/office/drawing/2014/main" id="{6927F0B7-3D38-4A1D-8351-CC9823CE7355}"/>
+                <a16:creationId xmlns:a16="http://schemas.microsoft.com/office/drawing/2014/main" id="{69E7390F-A4BB-4B94-9FB5-E76858D0AB0A}"/>
               </a:ext>
             </a:extLst>
           </p:cNvPr>
@@ -16057,7 +14793,7 @@
           <p:nvPr/>
         </p:nvPicPr>
         <p:blipFill>
-          <a:blip xmlns:r="http://schemas.openxmlformats.org/officeDocument/2006/relationships" xmlns:a="http://schemas.openxmlformats.org/drawingml/2006/main" r:embed="R0054615e4f8349b7"/>
+          <a:blip xmlns:r="http://schemas.openxmlformats.org/officeDocument/2006/relationships" xmlns:a="http://schemas.openxmlformats.org/drawingml/2006/main" r:embed="R7dc473053574498e"/>
           <a:stretch xmlns:a="http://schemas.openxmlformats.org/drawingml/2006/main"/>
         </p:blipFill>
         <p:spPr>
@@ -16075,7 +14811,7 @@
           <p:cNvPr id="5" name="">
             <a:extLst xmlns:a="http://schemas.openxmlformats.org/drawingml/2006/main">
               <a:ext uri="{FF2B5EF4-FFF2-40B4-BE49-F238E27FC236}">
-                <a16:creationId xmlns:a16="http://schemas.microsoft.com/office/drawing/2014/main" id="{6BD5FDD3-D2EC-4237-A5EA-3FF983CE235A}"/>
+                <a16:creationId xmlns:a16="http://schemas.microsoft.com/office/drawing/2014/main" id="{5AF3F270-6FEA-4E2E-A3DA-A49D46944C4A}"/>
               </a:ext>
             </a:extLst>
           </p:cNvPr>
@@ -16233,7 +14969,7 @@
           <p:cNvPr id="6" name="">
             <a:extLst xmlns:a="http://schemas.openxmlformats.org/drawingml/2006/main">
               <a:ext uri="{FF2B5EF4-FFF2-40B4-BE49-F238E27FC236}">
-                <a16:creationId xmlns:a16="http://schemas.microsoft.com/office/drawing/2014/main" id="{615DA0D6-6E10-4AC7-A92F-FFFD422B0441}"/>
+                <a16:creationId xmlns:a16="http://schemas.microsoft.com/office/drawing/2014/main" id="{BAE1AD48-E4B4-41DB-BB48-94568C93E995}"/>
               </a:ext>
             </a:extLst>
           </p:cNvPr>
@@ -16391,7 +15127,7 @@
           <p:cNvPr id="7" name="">
             <a:extLst xmlns:a="http://schemas.openxmlformats.org/drawingml/2006/main">
               <a:ext uri="{FF2B5EF4-FFF2-40B4-BE49-F238E27FC236}">
-                <a16:creationId xmlns:a16="http://schemas.microsoft.com/office/drawing/2014/main" id="{6BF2A3C0-5477-41B5-8F58-C14F44D99BD6}"/>
+                <a16:creationId xmlns:a16="http://schemas.microsoft.com/office/drawing/2014/main" id="{E8A103F8-C89E-4DAA-B8BA-A16FEBC04F7F}"/>
               </a:ext>
             </a:extLst>
           </p:cNvPr>
@@ -16401,7 +15137,7 @@
           <p:nvPr/>
         </p:nvPicPr>
         <p:blipFill>
-          <a:blip xmlns:r="http://schemas.openxmlformats.org/officeDocument/2006/relationships" xmlns:a="http://schemas.openxmlformats.org/drawingml/2006/main" r:embed="R0253bda067f44dd6"/>
+          <a:blip xmlns:r="http://schemas.openxmlformats.org/officeDocument/2006/relationships" xmlns:a="http://schemas.openxmlformats.org/drawingml/2006/main" r:embed="R04e83ad082a14367"/>
           <a:stretch xmlns:a="http://schemas.openxmlformats.org/drawingml/2006/main"/>
         </p:blipFill>
         <p:spPr>
@@ -16419,7 +15155,7 @@
           <p:cNvPr id="8" name="">
             <a:extLst xmlns:a="http://schemas.openxmlformats.org/drawingml/2006/main">
               <a:ext uri="{FF2B5EF4-FFF2-40B4-BE49-F238E27FC236}">
-                <a16:creationId xmlns:a16="http://schemas.microsoft.com/office/drawing/2014/main" id="{BB129EB8-3CFF-4C76-B00F-754B1791A564}"/>
+                <a16:creationId xmlns:a16="http://schemas.microsoft.com/office/drawing/2014/main" id="{11995259-CC31-4A6E-9817-9DAB2C5D3447}"/>
               </a:ext>
             </a:extLst>
           </p:cNvPr>
@@ -16577,7 +15313,7 @@
           <p:cNvPr id="9" name="">
             <a:extLst xmlns:a="http://schemas.openxmlformats.org/drawingml/2006/main">
               <a:ext uri="{FF2B5EF4-FFF2-40B4-BE49-F238E27FC236}">
-                <a16:creationId xmlns:a16="http://schemas.microsoft.com/office/drawing/2014/main" id="{7BA512E5-5440-4197-A9F1-4F26616472BE}"/>
+                <a16:creationId xmlns:a16="http://schemas.microsoft.com/office/drawing/2014/main" id="{5CC746B2-FF85-42B3-86D4-1241D619337C}"/>
               </a:ext>
             </a:extLst>
           </p:cNvPr>
@@ -16735,7 +15471,7 @@
           <p:cNvPr id="10" name="">
             <a:extLst xmlns:a="http://schemas.openxmlformats.org/drawingml/2006/main">
               <a:ext uri="{FF2B5EF4-FFF2-40B4-BE49-F238E27FC236}">
-                <a16:creationId xmlns:a16="http://schemas.microsoft.com/office/drawing/2014/main" id="{B9597863-396B-4289-906B-3B8AB67E2406}"/>
+                <a16:creationId xmlns:a16="http://schemas.microsoft.com/office/drawing/2014/main" id="{E17DAC38-ED01-4775-B974-3043ED561C33}"/>
               </a:ext>
             </a:extLst>
           </p:cNvPr>
@@ -16921,7 +15657,7 @@
           <p:cNvPr id="11" name="">
             <a:extLst xmlns:a="http://schemas.openxmlformats.org/drawingml/2006/main">
               <a:ext uri="{FF2B5EF4-FFF2-40B4-BE49-F238E27FC236}">
-                <a16:creationId xmlns:a16="http://schemas.microsoft.com/office/drawing/2014/main" id="{CEF0BB40-A138-4B82-9CA1-667990CE1A89}"/>
+                <a16:creationId xmlns:a16="http://schemas.microsoft.com/office/drawing/2014/main" id="{0AE9BD00-0241-4E9E-A599-29641F0C0B1F}"/>
               </a:ext>
             </a:extLst>
           </p:cNvPr>
@@ -17079,7 +15815,7 @@
           <p:cNvPr id="12" name="">
             <a:extLst xmlns:a="http://schemas.openxmlformats.org/drawingml/2006/main">
               <a:ext uri="{FF2B5EF4-FFF2-40B4-BE49-F238E27FC236}">
-                <a16:creationId xmlns:a16="http://schemas.microsoft.com/office/drawing/2014/main" id="{F4073244-68D6-4DE5-922B-A7DDB32B2CBD}"/>
+                <a16:creationId xmlns:a16="http://schemas.microsoft.com/office/drawing/2014/main" id="{36E7220E-8EF8-4C2D-834A-3AC50C7F7B50}"/>
               </a:ext>
             </a:extLst>
           </p:cNvPr>
@@ -17236,7 +15972,7 @@
     </p:spTree>
     <p:extLst>
       <p:ext uri="{BB962C8B-B14F-4D97-AF65-F5344CB8AC3E}">
-        <p14:creationId xmlns:p14="http://schemas.microsoft.com/office/powerpoint/2010/main" val="125880501"/>
+        <p14:creationId xmlns:p14="http://schemas.microsoft.com/office/powerpoint/2010/main" val="919424444"/>
       </p:ext>
     </p:extLst>
   </p:cSld>
@@ -17267,7 +16003,7 @@
           <p:cNvPr id="13" name="">
             <a:extLst xmlns:a="http://schemas.openxmlformats.org/drawingml/2006/main">
               <a:ext uri="{FF2B5EF4-FFF2-40B4-BE49-F238E27FC236}">
-                <a16:creationId xmlns:a16="http://schemas.microsoft.com/office/drawing/2014/main" id="{87CCB663-AA63-44F3-813A-7F44848FAE9F}"/>
+                <a16:creationId xmlns:a16="http://schemas.microsoft.com/office/drawing/2014/main" id="{67E806E7-C2C4-4D67-A57C-1FE0C3F0673B}"/>
               </a:ext>
             </a:extLst>
           </p:cNvPr>
@@ -17425,7 +16161,7 @@
           <p:cNvPr id="2" name="">
             <a:extLst xmlns:a="http://schemas.openxmlformats.org/drawingml/2006/main">
               <a:ext uri="{FF2B5EF4-FFF2-40B4-BE49-F238E27FC236}">
-                <a16:creationId xmlns:a16="http://schemas.microsoft.com/office/drawing/2014/main" id="{DDA90A20-DA0A-4270-B9D7-EEBDDABBC0A8}"/>
+                <a16:creationId xmlns:a16="http://schemas.microsoft.com/office/drawing/2014/main" id="{3CACA5A5-738B-464C-AD52-B40350D50F6E}"/>
               </a:ext>
             </a:extLst>
           </p:cNvPr>
@@ -17583,7 +16319,7 @@
           <p:cNvPr id="3" name="">
             <a:extLst xmlns:a="http://schemas.openxmlformats.org/drawingml/2006/main">
               <a:ext uri="{FF2B5EF4-FFF2-40B4-BE49-F238E27FC236}">
-                <a16:creationId xmlns:a16="http://schemas.microsoft.com/office/drawing/2014/main" id="{1674B27C-4B95-4D83-947F-27B797B62411}"/>
+                <a16:creationId xmlns:a16="http://schemas.microsoft.com/office/drawing/2014/main" id="{7A952A8B-9CB6-4BD4-B584-2C4C34811C56}"/>
               </a:ext>
             </a:extLst>
           </p:cNvPr>
@@ -17741,7 +16477,7 @@
           <p:cNvPr id="4" name="">
             <a:extLst xmlns:a="http://schemas.openxmlformats.org/drawingml/2006/main">
               <a:ext uri="{FF2B5EF4-FFF2-40B4-BE49-F238E27FC236}">
-                <a16:creationId xmlns:a16="http://schemas.microsoft.com/office/drawing/2014/main" id="{7BA6F795-9743-4F21-B465-FE0F4296F9A5}"/>
+                <a16:creationId xmlns:a16="http://schemas.microsoft.com/office/drawing/2014/main" id="{A1413BCB-18D0-4F54-A1FE-EB0AD783A1CE}"/>
               </a:ext>
             </a:extLst>
           </p:cNvPr>
@@ -17751,7 +16487,7 @@
           <p:nvPr/>
         </p:nvPicPr>
         <p:blipFill>
-          <a:blip xmlns:r="http://schemas.openxmlformats.org/officeDocument/2006/relationships" xmlns:a="http://schemas.openxmlformats.org/drawingml/2006/main" r:embed="R1dd66f6501874e78"/>
+          <a:blip xmlns:r="http://schemas.openxmlformats.org/officeDocument/2006/relationships" xmlns:a="http://schemas.openxmlformats.org/drawingml/2006/main" r:embed="R8e1d7aed0fb74c79"/>
           <a:stretch xmlns:a="http://schemas.openxmlformats.org/drawingml/2006/main"/>
         </p:blipFill>
         <p:spPr>
@@ -17769,7 +16505,7 @@
           <p:cNvPr id="5" name="">
             <a:extLst xmlns:a="http://schemas.openxmlformats.org/drawingml/2006/main">
               <a:ext uri="{FF2B5EF4-FFF2-40B4-BE49-F238E27FC236}">
-                <a16:creationId xmlns:a16="http://schemas.microsoft.com/office/drawing/2014/main" id="{D3E02F88-D48A-4AAC-B9E8-0CD2CBEB8CEF}"/>
+                <a16:creationId xmlns:a16="http://schemas.microsoft.com/office/drawing/2014/main" id="{9F7EA0AC-191F-42D8-A3B5-E36EDBF45915}"/>
               </a:ext>
             </a:extLst>
           </p:cNvPr>
@@ -17927,7 +16663,7 @@
           <p:cNvPr id="6" name="">
             <a:extLst xmlns:a="http://schemas.openxmlformats.org/drawingml/2006/main">
               <a:ext uri="{FF2B5EF4-FFF2-40B4-BE49-F238E27FC236}">
-                <a16:creationId xmlns:a16="http://schemas.microsoft.com/office/drawing/2014/main" id="{76BDF96F-4F51-4328-84B8-E785D086BBD3}"/>
+                <a16:creationId xmlns:a16="http://schemas.microsoft.com/office/drawing/2014/main" id="{CE8680B6-3F4A-469C-BEAA-90C6EDF2A48F}"/>
               </a:ext>
             </a:extLst>
           </p:cNvPr>
@@ -18085,7 +16821,7 @@
           <p:cNvPr id="7" name="">
             <a:extLst xmlns:a="http://schemas.openxmlformats.org/drawingml/2006/main">
               <a:ext uri="{FF2B5EF4-FFF2-40B4-BE49-F238E27FC236}">
-                <a16:creationId xmlns:a16="http://schemas.microsoft.com/office/drawing/2014/main" id="{5997947A-567D-4E3F-ACF1-17C5284D718F}"/>
+                <a16:creationId xmlns:a16="http://schemas.microsoft.com/office/drawing/2014/main" id="{CD9F79EE-6535-43DC-AB05-01F9601827C2}"/>
               </a:ext>
             </a:extLst>
           </p:cNvPr>
@@ -18095,7 +16831,7 @@
           <p:nvPr/>
         </p:nvPicPr>
         <p:blipFill>
-          <a:blip xmlns:r="http://schemas.openxmlformats.org/officeDocument/2006/relationships" xmlns:a="http://schemas.openxmlformats.org/drawingml/2006/main" r:embed="R93278c7b0fa04a30"/>
+          <a:blip xmlns:r="http://schemas.openxmlformats.org/officeDocument/2006/relationships" xmlns:a="http://schemas.openxmlformats.org/drawingml/2006/main" r:embed="R8ac9bf62b4074557"/>
           <a:stretch xmlns:a="http://schemas.openxmlformats.org/drawingml/2006/main"/>
         </p:blipFill>
         <p:spPr>
@@ -18113,7 +16849,7 @@
           <p:cNvPr id="8" name="">
             <a:extLst xmlns:a="http://schemas.openxmlformats.org/drawingml/2006/main">
               <a:ext uri="{FF2B5EF4-FFF2-40B4-BE49-F238E27FC236}">
-                <a16:creationId xmlns:a16="http://schemas.microsoft.com/office/drawing/2014/main" id="{133CCB0C-D4E7-4B0A-9257-DD21ED6443C0}"/>
+                <a16:creationId xmlns:a16="http://schemas.microsoft.com/office/drawing/2014/main" id="{3CDDC66F-9048-4BF3-B83A-9F5F3BC03F6E}"/>
               </a:ext>
             </a:extLst>
           </p:cNvPr>
@@ -18271,7 +17007,7 @@
           <p:cNvPr id="9" name="">
             <a:extLst xmlns:a="http://schemas.openxmlformats.org/drawingml/2006/main">
               <a:ext uri="{FF2B5EF4-FFF2-40B4-BE49-F238E27FC236}">
-                <a16:creationId xmlns:a16="http://schemas.microsoft.com/office/drawing/2014/main" id="{9E2D51C7-5120-4C3A-8A59-C6F30DEFF753}"/>
+                <a16:creationId xmlns:a16="http://schemas.microsoft.com/office/drawing/2014/main" id="{9C8BCA0B-DE96-4A3F-BE6C-19E223C5D4A7}"/>
               </a:ext>
             </a:extLst>
           </p:cNvPr>
@@ -18429,7 +17165,7 @@
           <p:cNvPr id="10" name="">
             <a:extLst xmlns:a="http://schemas.openxmlformats.org/drawingml/2006/main">
               <a:ext uri="{FF2B5EF4-FFF2-40B4-BE49-F238E27FC236}">
-                <a16:creationId xmlns:a16="http://schemas.microsoft.com/office/drawing/2014/main" id="{23770ACC-181B-4A4B-ADDD-EDF00A06CE97}"/>
+                <a16:creationId xmlns:a16="http://schemas.microsoft.com/office/drawing/2014/main" id="{4BA3346B-7E2A-40E9-AEE5-3AF7328ACB99}"/>
               </a:ext>
             </a:extLst>
           </p:cNvPr>
@@ -18615,7 +17351,7 @@
           <p:cNvPr id="11" name="">
             <a:extLst xmlns:a="http://schemas.openxmlformats.org/drawingml/2006/main">
               <a:ext uri="{FF2B5EF4-FFF2-40B4-BE49-F238E27FC236}">
-                <a16:creationId xmlns:a16="http://schemas.microsoft.com/office/drawing/2014/main" id="{F9721D05-D763-4A37-B6AE-5DD8007C8846}"/>
+                <a16:creationId xmlns:a16="http://schemas.microsoft.com/office/drawing/2014/main" id="{AB4A31C7-8F9B-4CF1-BDE4-B4CC0F64510B}"/>
               </a:ext>
             </a:extLst>
           </p:cNvPr>
@@ -18773,7 +17509,7 @@
           <p:cNvPr id="12" name="">
             <a:extLst xmlns:a="http://schemas.openxmlformats.org/drawingml/2006/main">
               <a:ext uri="{FF2B5EF4-FFF2-40B4-BE49-F238E27FC236}">
-                <a16:creationId xmlns:a16="http://schemas.microsoft.com/office/drawing/2014/main" id="{58D1B518-C1E8-44E5-BDDE-869E3C95CD36}"/>
+                <a16:creationId xmlns:a16="http://schemas.microsoft.com/office/drawing/2014/main" id="{E157023E-90AC-433E-9CAF-91D9314E6617}"/>
               </a:ext>
             </a:extLst>
           </p:cNvPr>
@@ -18929,7 +17665,7 @@
     </p:spTree>
     <p:extLst>
       <p:ext uri="{BB962C8B-B14F-4D97-AF65-F5344CB8AC3E}">
-        <p14:creationId xmlns:p14="http://schemas.microsoft.com/office/powerpoint/2010/main" val="180938520"/>
+        <p14:creationId xmlns:p14="http://schemas.microsoft.com/office/powerpoint/2010/main" val="394274275"/>
       </p:ext>
     </p:extLst>
   </p:cSld>
@@ -18960,7 +17696,7 @@
           <p:cNvPr id="13" name="">
             <a:extLst xmlns:a="http://schemas.openxmlformats.org/drawingml/2006/main">
               <a:ext uri="{FF2B5EF4-FFF2-40B4-BE49-F238E27FC236}">
-                <a16:creationId xmlns:a16="http://schemas.microsoft.com/office/drawing/2014/main" id="{414D659B-3BE7-4C2A-B5B7-7C155E6D1FD1}"/>
+                <a16:creationId xmlns:a16="http://schemas.microsoft.com/office/drawing/2014/main" id="{EC2C3574-01F5-40E6-8C98-F7FFF260ECED}"/>
               </a:ext>
             </a:extLst>
           </p:cNvPr>
@@ -19118,7 +17854,7 @@
           <p:cNvPr id="2" name="">
             <a:extLst xmlns:a="http://schemas.openxmlformats.org/drawingml/2006/main">
               <a:ext uri="{FF2B5EF4-FFF2-40B4-BE49-F238E27FC236}">
-                <a16:creationId xmlns:a16="http://schemas.microsoft.com/office/drawing/2014/main" id="{7F26D2E6-A8D9-4A95-B7D4-0AFBF233C637}"/>
+                <a16:creationId xmlns:a16="http://schemas.microsoft.com/office/drawing/2014/main" id="{9A98E256-DBB7-4DBD-B99B-C080750C2B16}"/>
               </a:ext>
             </a:extLst>
           </p:cNvPr>
@@ -19276,7 +18012,7 @@
           <p:cNvPr id="3" name="">
             <a:extLst xmlns:a="http://schemas.openxmlformats.org/drawingml/2006/main">
               <a:ext uri="{FF2B5EF4-FFF2-40B4-BE49-F238E27FC236}">
-                <a16:creationId xmlns:a16="http://schemas.microsoft.com/office/drawing/2014/main" id="{A7C12207-5972-4AEF-A6B2-F16508C41100}"/>
+                <a16:creationId xmlns:a16="http://schemas.microsoft.com/office/drawing/2014/main" id="{0919DFF7-2E21-4903-B412-5D86D3956FA8}"/>
               </a:ext>
             </a:extLst>
           </p:cNvPr>
@@ -19434,7 +18170,7 @@
           <p:cNvPr id="4" name="">
             <a:extLst xmlns:a="http://schemas.openxmlformats.org/drawingml/2006/main">
               <a:ext uri="{FF2B5EF4-FFF2-40B4-BE49-F238E27FC236}">
-                <a16:creationId xmlns:a16="http://schemas.microsoft.com/office/drawing/2014/main" id="{C9E82187-DB2A-481A-9AAB-F7CA513B82E7}"/>
+                <a16:creationId xmlns:a16="http://schemas.microsoft.com/office/drawing/2014/main" id="{D5965427-30F8-4771-918F-058777153C72}"/>
               </a:ext>
             </a:extLst>
           </p:cNvPr>
@@ -19444,7 +18180,7 @@
           <p:nvPr/>
         </p:nvPicPr>
         <p:blipFill>
-          <a:blip xmlns:r="http://schemas.openxmlformats.org/officeDocument/2006/relationships" xmlns:a="http://schemas.openxmlformats.org/drawingml/2006/main" r:embed="R01b1d6a2929b4a02"/>
+          <a:blip xmlns:r="http://schemas.openxmlformats.org/officeDocument/2006/relationships" xmlns:a="http://schemas.openxmlformats.org/drawingml/2006/main" r:embed="Re44d6e0ec74843d6"/>
           <a:stretch xmlns:a="http://schemas.openxmlformats.org/drawingml/2006/main"/>
         </p:blipFill>
         <p:spPr>
@@ -19462,7 +18198,7 @@
           <p:cNvPr id="5" name="">
             <a:extLst xmlns:a="http://schemas.openxmlformats.org/drawingml/2006/main">
               <a:ext uri="{FF2B5EF4-FFF2-40B4-BE49-F238E27FC236}">
-                <a16:creationId xmlns:a16="http://schemas.microsoft.com/office/drawing/2014/main" id="{89A153F2-18A6-4F99-BC1A-1BCC5BD148D7}"/>
+                <a16:creationId xmlns:a16="http://schemas.microsoft.com/office/drawing/2014/main" id="{055F0F16-CD3A-4989-9FE4-F9A90137E370}"/>
               </a:ext>
             </a:extLst>
           </p:cNvPr>
@@ -19620,7 +18356,7 @@
           <p:cNvPr id="6" name="">
             <a:extLst xmlns:a="http://schemas.openxmlformats.org/drawingml/2006/main">
               <a:ext uri="{FF2B5EF4-FFF2-40B4-BE49-F238E27FC236}">
-                <a16:creationId xmlns:a16="http://schemas.microsoft.com/office/drawing/2014/main" id="{E93D0954-CD62-4584-B2A7-B090DC5B62BD}"/>
+                <a16:creationId xmlns:a16="http://schemas.microsoft.com/office/drawing/2014/main" id="{B06281E7-8B99-4B31-85BB-B8B621CFB73B}"/>
               </a:ext>
             </a:extLst>
           </p:cNvPr>
@@ -19778,7 +18514,7 @@
           <p:cNvPr id="7" name="">
             <a:extLst xmlns:a="http://schemas.openxmlformats.org/drawingml/2006/main">
               <a:ext uri="{FF2B5EF4-FFF2-40B4-BE49-F238E27FC236}">
-                <a16:creationId xmlns:a16="http://schemas.microsoft.com/office/drawing/2014/main" id="{4327BE45-2431-4127-8CB4-6DE02AC04044}"/>
+                <a16:creationId xmlns:a16="http://schemas.microsoft.com/office/drawing/2014/main" id="{2E0CD15C-D8DC-4221-A4D7-FAB804516BC1}"/>
               </a:ext>
             </a:extLst>
           </p:cNvPr>
@@ -19788,7 +18524,7 @@
           <p:nvPr/>
         </p:nvPicPr>
         <p:blipFill>
-          <a:blip xmlns:r="http://schemas.openxmlformats.org/officeDocument/2006/relationships" xmlns:a="http://schemas.openxmlformats.org/drawingml/2006/main" r:embed="R41f4d9e2c2034ae3"/>
+          <a:blip xmlns:r="http://schemas.openxmlformats.org/officeDocument/2006/relationships" xmlns:a="http://schemas.openxmlformats.org/drawingml/2006/main" r:embed="R357f89e2d7134760"/>
           <a:stretch xmlns:a="http://schemas.openxmlformats.org/drawingml/2006/main"/>
         </p:blipFill>
         <p:spPr>
@@ -19806,7 +18542,7 @@
           <p:cNvPr id="8" name="">
             <a:extLst xmlns:a="http://schemas.openxmlformats.org/drawingml/2006/main">
               <a:ext uri="{FF2B5EF4-FFF2-40B4-BE49-F238E27FC236}">
-                <a16:creationId xmlns:a16="http://schemas.microsoft.com/office/drawing/2014/main" id="{FA735C1B-B9FF-4392-97F2-5E00ED266C4B}"/>
+                <a16:creationId xmlns:a16="http://schemas.microsoft.com/office/drawing/2014/main" id="{50CEDA92-89D0-4A9F-813E-8B7DD38F65CD}"/>
               </a:ext>
             </a:extLst>
           </p:cNvPr>
@@ -19964,7 +18700,7 @@
           <p:cNvPr id="9" name="">
             <a:extLst xmlns:a="http://schemas.openxmlformats.org/drawingml/2006/main">
               <a:ext uri="{FF2B5EF4-FFF2-40B4-BE49-F238E27FC236}">
-                <a16:creationId xmlns:a16="http://schemas.microsoft.com/office/drawing/2014/main" id="{5DA7A37C-3D9B-4AEA-853D-DA0D55A609AE}"/>
+                <a16:creationId xmlns:a16="http://schemas.microsoft.com/office/drawing/2014/main" id="{3C433CF3-4C38-4576-B5EF-EA05ABCF8B69}"/>
               </a:ext>
             </a:extLst>
           </p:cNvPr>
@@ -20122,7 +18858,7 @@
           <p:cNvPr id="10" name="">
             <a:extLst xmlns:a="http://schemas.openxmlformats.org/drawingml/2006/main">
               <a:ext uri="{FF2B5EF4-FFF2-40B4-BE49-F238E27FC236}">
-                <a16:creationId xmlns:a16="http://schemas.microsoft.com/office/drawing/2014/main" id="{8BC588F7-78B8-4ABC-8213-B4B7DE95AFB1}"/>
+                <a16:creationId xmlns:a16="http://schemas.microsoft.com/office/drawing/2014/main" id="{478D11AA-7E90-41FF-89F6-3B544DEAA061}"/>
               </a:ext>
             </a:extLst>
           </p:cNvPr>
@@ -20308,7 +19044,7 @@
           <p:cNvPr id="11" name="">
             <a:extLst xmlns:a="http://schemas.openxmlformats.org/drawingml/2006/main">
               <a:ext uri="{FF2B5EF4-FFF2-40B4-BE49-F238E27FC236}">
-                <a16:creationId xmlns:a16="http://schemas.microsoft.com/office/drawing/2014/main" id="{8F315425-875C-45D2-BD13-72824F356D85}"/>
+                <a16:creationId xmlns:a16="http://schemas.microsoft.com/office/drawing/2014/main" id="{E75D8168-88FB-4083-AEE4-09AD57D3CFC0}"/>
               </a:ext>
             </a:extLst>
           </p:cNvPr>
@@ -20466,7 +19202,7 @@
           <p:cNvPr id="12" name="">
             <a:extLst xmlns:a="http://schemas.openxmlformats.org/drawingml/2006/main">
               <a:ext uri="{FF2B5EF4-FFF2-40B4-BE49-F238E27FC236}">
-                <a16:creationId xmlns:a16="http://schemas.microsoft.com/office/drawing/2014/main" id="{7FE06024-179A-495A-B900-509322DCD65B}"/>
+                <a16:creationId xmlns:a16="http://schemas.microsoft.com/office/drawing/2014/main" id="{75D17FDA-76C9-4ACA-9DE3-0ABC1325065A}"/>
               </a:ext>
             </a:extLst>
           </p:cNvPr>
@@ -20622,7 +19358,7 @@
     </p:spTree>
     <p:extLst>
       <p:ext uri="{BB962C8B-B14F-4D97-AF65-F5344CB8AC3E}">
-        <p14:creationId xmlns:p14="http://schemas.microsoft.com/office/powerpoint/2010/main" val="1575964576"/>
+        <p14:creationId xmlns:p14="http://schemas.microsoft.com/office/powerpoint/2010/main" val="425790832"/>
       </p:ext>
     </p:extLst>
   </p:cSld>
@@ -20653,7 +19389,7 @@
           <p:cNvPr id="14" name="">
             <a:extLst xmlns:a="http://schemas.openxmlformats.org/drawingml/2006/main">
               <a:ext uri="{FF2B5EF4-FFF2-40B4-BE49-F238E27FC236}">
-                <a16:creationId xmlns:a16="http://schemas.microsoft.com/office/drawing/2014/main" id="{B7E0D47F-F1EC-41D6-8B74-EB42B8C6D91B}"/>
+                <a16:creationId xmlns:a16="http://schemas.microsoft.com/office/drawing/2014/main" id="{CB25F8B7-E772-4EC8-94C7-CAEF75759B8E}"/>
               </a:ext>
             </a:extLst>
           </p:cNvPr>
@@ -20811,7 +19547,7 @@
           <p:cNvPr id="2" name="">
             <a:extLst xmlns:a="http://schemas.openxmlformats.org/drawingml/2006/main">
               <a:ext uri="{FF2B5EF4-FFF2-40B4-BE49-F238E27FC236}">
-                <a16:creationId xmlns:a16="http://schemas.microsoft.com/office/drawing/2014/main" id="{94CEF824-33D9-4B9B-92C2-21884F08A035}"/>
+                <a16:creationId xmlns:a16="http://schemas.microsoft.com/office/drawing/2014/main" id="{4C06EB1B-80AF-405A-A064-B61FF36082BA}"/>
               </a:ext>
             </a:extLst>
           </p:cNvPr>
@@ -20969,7 +19705,7 @@
           <p:cNvPr id="3" name="">
             <a:extLst xmlns:a="http://schemas.openxmlformats.org/drawingml/2006/main">
               <a:ext uri="{FF2B5EF4-FFF2-40B4-BE49-F238E27FC236}">
-                <a16:creationId xmlns:a16="http://schemas.microsoft.com/office/drawing/2014/main" id="{F34D98F9-1832-4BEE-B1A4-44684D25D295}"/>
+                <a16:creationId xmlns:a16="http://schemas.microsoft.com/office/drawing/2014/main" id="{31D02F2F-392C-4C50-BCA0-8CEC17A80BB2}"/>
               </a:ext>
             </a:extLst>
           </p:cNvPr>
@@ -21127,7 +19863,7 @@
           <p:cNvPr id="4" name="">
             <a:extLst xmlns:a="http://schemas.openxmlformats.org/drawingml/2006/main">
               <a:ext uri="{FF2B5EF4-FFF2-40B4-BE49-F238E27FC236}">
-                <a16:creationId xmlns:a16="http://schemas.microsoft.com/office/drawing/2014/main" id="{92B32510-EDC7-4CC0-AE81-14A64A4C1163}"/>
+                <a16:creationId xmlns:a16="http://schemas.microsoft.com/office/drawing/2014/main" id="{C97EEF62-C004-4E3E-AEDC-17BD329F4AE4}"/>
               </a:ext>
             </a:extLst>
           </p:cNvPr>
@@ -21137,7 +19873,7 @@
           <p:nvPr/>
         </p:nvPicPr>
         <p:blipFill>
-          <a:blip xmlns:r="http://schemas.openxmlformats.org/officeDocument/2006/relationships" xmlns:a="http://schemas.openxmlformats.org/drawingml/2006/main" r:embed="R1622c0210c40447f"/>
+          <a:blip xmlns:r="http://schemas.openxmlformats.org/officeDocument/2006/relationships" xmlns:a="http://schemas.openxmlformats.org/drawingml/2006/main" r:embed="R3fa5258458414a79"/>
           <a:stretch xmlns:a="http://schemas.openxmlformats.org/drawingml/2006/main"/>
         </p:blipFill>
         <p:spPr>
@@ -21155,7 +19891,7 @@
           <p:cNvPr id="5" name="">
             <a:extLst xmlns:a="http://schemas.openxmlformats.org/drawingml/2006/main">
               <a:ext uri="{FF2B5EF4-FFF2-40B4-BE49-F238E27FC236}">
-                <a16:creationId xmlns:a16="http://schemas.microsoft.com/office/drawing/2014/main" id="{9D40182B-D962-42F8-A78B-8086D453C827}"/>
+                <a16:creationId xmlns:a16="http://schemas.microsoft.com/office/drawing/2014/main" id="{E94CAD5F-36D7-4E9B-9FF9-600329EAC1AD}"/>
               </a:ext>
             </a:extLst>
           </p:cNvPr>
@@ -21313,7 +20049,7 @@
           <p:cNvPr id="6" name="">
             <a:extLst xmlns:a="http://schemas.openxmlformats.org/drawingml/2006/main">
               <a:ext uri="{FF2B5EF4-FFF2-40B4-BE49-F238E27FC236}">
-                <a16:creationId xmlns:a16="http://schemas.microsoft.com/office/drawing/2014/main" id="{E78C7804-EF3D-4DF4-B10C-D36336632ED7}"/>
+                <a16:creationId xmlns:a16="http://schemas.microsoft.com/office/drawing/2014/main" id="{44BAD9F7-14A0-40FE-8E7D-A19887022972}"/>
               </a:ext>
             </a:extLst>
           </p:cNvPr>
@@ -21471,7 +20207,7 @@
           <p:cNvPr id="7" name="">
             <a:extLst xmlns:a="http://schemas.openxmlformats.org/drawingml/2006/main">
               <a:ext uri="{FF2B5EF4-FFF2-40B4-BE49-F238E27FC236}">
-                <a16:creationId xmlns:a16="http://schemas.microsoft.com/office/drawing/2014/main" id="{BA39B946-EAA6-497D-A043-13371F6A0987}"/>
+                <a16:creationId xmlns:a16="http://schemas.microsoft.com/office/drawing/2014/main" id="{DA5FF1C5-F66E-4D82-9728-DF059A7E1488}"/>
               </a:ext>
             </a:extLst>
           </p:cNvPr>
@@ -21481,7 +20217,7 @@
           <p:nvPr/>
         </p:nvPicPr>
         <p:blipFill>
-          <a:blip xmlns:r="http://schemas.openxmlformats.org/officeDocument/2006/relationships" xmlns:a="http://schemas.openxmlformats.org/drawingml/2006/main" r:embed="R3284f576faee4062"/>
+          <a:blip xmlns:r="http://schemas.openxmlformats.org/officeDocument/2006/relationships" xmlns:a="http://schemas.openxmlformats.org/drawingml/2006/main" r:embed="R39c24e98151d47e2"/>
           <a:stretch xmlns:a="http://schemas.openxmlformats.org/drawingml/2006/main"/>
         </p:blipFill>
         <p:spPr>
@@ -21499,7 +20235,7 @@
           <p:cNvPr id="8" name="">
             <a:extLst xmlns:a="http://schemas.openxmlformats.org/drawingml/2006/main">
               <a:ext uri="{FF2B5EF4-FFF2-40B4-BE49-F238E27FC236}">
-                <a16:creationId xmlns:a16="http://schemas.microsoft.com/office/drawing/2014/main" id="{0017D27D-64E9-4302-9D96-84C35D70AC61}"/>
+                <a16:creationId xmlns:a16="http://schemas.microsoft.com/office/drawing/2014/main" id="{4BDCAA9C-2C20-421F-802D-C0CD8AE22E84}"/>
               </a:ext>
             </a:extLst>
           </p:cNvPr>
@@ -21657,7 +20393,7 @@
           <p:cNvPr id="9" name="">
             <a:extLst xmlns:a="http://schemas.openxmlformats.org/drawingml/2006/main">
               <a:ext uri="{FF2B5EF4-FFF2-40B4-BE49-F238E27FC236}">
-                <a16:creationId xmlns:a16="http://schemas.microsoft.com/office/drawing/2014/main" id="{BA1A0399-C1BA-4D96-B7B0-1C4404A96ACD}"/>
+                <a16:creationId xmlns:a16="http://schemas.microsoft.com/office/drawing/2014/main" id="{8B223E60-8164-4CB2-A7FA-6CDD66DD4920}"/>
               </a:ext>
             </a:extLst>
           </p:cNvPr>
@@ -21815,7 +20551,7 @@
           <p:cNvPr id="10" name="">
             <a:extLst xmlns:a="http://schemas.openxmlformats.org/drawingml/2006/main">
               <a:ext uri="{FF2B5EF4-FFF2-40B4-BE49-F238E27FC236}">
-                <a16:creationId xmlns:a16="http://schemas.microsoft.com/office/drawing/2014/main" id="{8D8B2FBE-AB88-4F35-895A-9DAD05CF4116}"/>
+                <a16:creationId xmlns:a16="http://schemas.microsoft.com/office/drawing/2014/main" id="{1DD092EF-4F24-45A2-91CA-EB85D2AFDABA}"/>
               </a:ext>
             </a:extLst>
           </p:cNvPr>
@@ -21825,7 +20561,7 @@
           <p:nvPr/>
         </p:nvPicPr>
         <p:blipFill>
-          <a:blip xmlns:r="http://schemas.openxmlformats.org/officeDocument/2006/relationships" xmlns:a="http://schemas.openxmlformats.org/drawingml/2006/main" r:embed="Rfcb028e1ba334eae"/>
+          <a:blip xmlns:r="http://schemas.openxmlformats.org/officeDocument/2006/relationships" xmlns:a="http://schemas.openxmlformats.org/drawingml/2006/main" r:embed="R9370980915024c50"/>
           <a:stretch xmlns:a="http://schemas.openxmlformats.org/drawingml/2006/main"/>
         </p:blipFill>
         <p:spPr>
@@ -21843,7 +20579,7 @@
           <p:cNvPr id="11" name="">
             <a:extLst xmlns:a="http://schemas.openxmlformats.org/drawingml/2006/main">
               <a:ext uri="{FF2B5EF4-FFF2-40B4-BE49-F238E27FC236}">
-                <a16:creationId xmlns:a16="http://schemas.microsoft.com/office/drawing/2014/main" id="{BC19CF98-5995-44FE-B251-D6872DF989FA}"/>
+                <a16:creationId xmlns:a16="http://schemas.microsoft.com/office/drawing/2014/main" id="{A9BEEEA7-FB4E-488E-AAE3-13A094FAC0B7}"/>
               </a:ext>
             </a:extLst>
           </p:cNvPr>
@@ -22001,7 +20737,7 @@
           <p:cNvPr id="12" name="">
             <a:extLst xmlns:a="http://schemas.openxmlformats.org/drawingml/2006/main">
               <a:ext uri="{FF2B5EF4-FFF2-40B4-BE49-F238E27FC236}">
-                <a16:creationId xmlns:a16="http://schemas.microsoft.com/office/drawing/2014/main" id="{665E202F-7E77-42F8-976F-1BA1BE201F8E}"/>
+                <a16:creationId xmlns:a16="http://schemas.microsoft.com/office/drawing/2014/main" id="{655AC3A0-4EE6-4E9D-BBFE-2FCB624A81F8}"/>
               </a:ext>
             </a:extLst>
           </p:cNvPr>
@@ -22159,7 +20895,7 @@
           <p:cNvPr id="13" name="">
             <a:extLst xmlns:a="http://schemas.openxmlformats.org/drawingml/2006/main">
               <a:ext uri="{FF2B5EF4-FFF2-40B4-BE49-F238E27FC236}">
-                <a16:creationId xmlns:a16="http://schemas.microsoft.com/office/drawing/2014/main" id="{AFD9CF5A-B5A0-477C-9F51-FC80D188A322}"/>
+                <a16:creationId xmlns:a16="http://schemas.microsoft.com/office/drawing/2014/main" id="{9AA8F709-E441-4ADE-90A8-3304726ADC8E}"/>
               </a:ext>
             </a:extLst>
           </p:cNvPr>
@@ -22343,7 +21079,7 @@
     </p:spTree>
     <p:extLst>
       <p:ext uri="{BB962C8B-B14F-4D97-AF65-F5344CB8AC3E}">
-        <p14:creationId xmlns:p14="http://schemas.microsoft.com/office/powerpoint/2010/main" val="3979251"/>
+        <p14:creationId xmlns:p14="http://schemas.microsoft.com/office/powerpoint/2010/main" val="433502841"/>
       </p:ext>
     </p:extLst>
   </p:cSld>
@@ -22371,10 +21107,10 @@
       </p:grpSpPr>
       <p:sp>
         <p:nvSpPr>
-          <p:cNvPr id="14" name="">
+          <p:cNvPr id="10" name="">
             <a:extLst xmlns:a="http://schemas.openxmlformats.org/drawingml/2006/main">
               <a:ext uri="{FF2B5EF4-FFF2-40B4-BE49-F238E27FC236}">
-                <a16:creationId xmlns:a16="http://schemas.microsoft.com/office/drawing/2014/main" id="{8016DCDB-F6DF-499D-9B25-0B61B369C177}"/>
+                <a16:creationId xmlns:a16="http://schemas.microsoft.com/office/drawing/2014/main" id="{5E9FBB86-1B4F-4CD9-88B6-FD0A73366AB1}"/>
               </a:ext>
             </a:extLst>
           </p:cNvPr>
@@ -22532,7 +21268,7 @@
           <p:cNvPr id="2" name="">
             <a:extLst xmlns:a="http://schemas.openxmlformats.org/drawingml/2006/main">
               <a:ext uri="{FF2B5EF4-FFF2-40B4-BE49-F238E27FC236}">
-                <a16:creationId xmlns:a16="http://schemas.microsoft.com/office/drawing/2014/main" id="{627B8000-72C3-4707-9D8F-F16C3A9F6211}"/>
+                <a16:creationId xmlns:a16="http://schemas.microsoft.com/office/drawing/2014/main" id="{EF89D4AD-6A48-4840-B15F-6B885745CA45}"/>
               </a:ext>
             </a:extLst>
           </p:cNvPr>
@@ -22690,7 +21426,7 @@
           <p:cNvPr id="3" name="">
             <a:extLst xmlns:a="http://schemas.openxmlformats.org/drawingml/2006/main">
               <a:ext uri="{FF2B5EF4-FFF2-40B4-BE49-F238E27FC236}">
-                <a16:creationId xmlns:a16="http://schemas.microsoft.com/office/drawing/2014/main" id="{0682EE01-C43A-460D-A337-93C066D2BDE1}"/>
+                <a16:creationId xmlns:a16="http://schemas.microsoft.com/office/drawing/2014/main" id="{BD276FB7-9D79-442E-9100-8E532441B7D2}"/>
               </a:ext>
             </a:extLst>
           </p:cNvPr>
@@ -22843,40 +21579,12 @@
           </a:p>
         </p:txBody>
       </p:sp>
-      <p:pic>
-        <p:nvPicPr>
+      <p:sp>
+        <p:nvSpPr>
           <p:cNvPr id="4" name="">
             <a:extLst xmlns:a="http://schemas.openxmlformats.org/drawingml/2006/main">
               <a:ext uri="{FF2B5EF4-FFF2-40B4-BE49-F238E27FC236}">
-                <a16:creationId xmlns:a16="http://schemas.microsoft.com/office/drawing/2014/main" id="{5275C64B-F553-494F-AFAE-75B19DE654A1}"/>
-              </a:ext>
-            </a:extLst>
-          </p:cNvPr>
-          <p:cNvPicPr>
-            <a:picLocks xmlns:a="http://schemas.openxmlformats.org/drawingml/2006/main" noChangeAspect="1"/>
-          </p:cNvPicPr>
-          <p:nvPr/>
-        </p:nvPicPr>
-        <p:blipFill>
-          <a:blip xmlns:r="http://schemas.openxmlformats.org/officeDocument/2006/relationships" xmlns:a="http://schemas.openxmlformats.org/drawingml/2006/main" r:embed="Rfc082bd455cb4995"/>
-          <a:stretch xmlns:a="http://schemas.openxmlformats.org/drawingml/2006/main"/>
-        </p:blipFill>
-        <p:spPr>
-          <a:xfrm xmlns:a="http://schemas.openxmlformats.org/drawingml/2006/main">
-            <a:off x="609600" y="1952625"/>
-            <a:ext cx="457200" cy="457200"/>
-          </a:xfrm>
-          <a:prstGeom xmlns:a="http://schemas.openxmlformats.org/drawingml/2006/main" prst="rect">
-            <a:avLst/>
-          </a:prstGeom>
-        </p:spPr>
-      </p:pic>
-      <p:sp>
-        <p:nvSpPr>
-          <p:cNvPr id="5" name="">
-            <a:extLst xmlns:a="http://schemas.openxmlformats.org/drawingml/2006/main">
-              <a:ext uri="{FF2B5EF4-FFF2-40B4-BE49-F238E27FC236}">
-                <a16:creationId xmlns:a16="http://schemas.microsoft.com/office/drawing/2014/main" id="{A4A01892-A952-435E-966C-FCAFFC53358D}"/>
+                <a16:creationId xmlns:a16="http://schemas.microsoft.com/office/drawing/2014/main" id="{BC847A68-4D58-42E8-8867-5082A97527A0}"/>
               </a:ext>
             </a:extLst>
           </p:cNvPr>
@@ -22887,668 +21595,8 @@
         </p:nvSpPr>
         <p:spPr>
           <a:xfrm xmlns:a="http://schemas.openxmlformats.org/drawingml/2006/main">
-            <a:off x="609600" y="2667000"/>
-            <a:ext cx="5295900" cy="495300"/>
-          </a:xfrm>
-          <a:prstGeom xmlns:a="http://schemas.openxmlformats.org/drawingml/2006/main" prst="rect">
-            <a:avLst/>
-          </a:prstGeom>
-          <a:noFill xmlns:a="http://schemas.openxmlformats.org/drawingml/2006/main"/>
-          <a:ln xmlns:a="http://schemas.openxmlformats.org/drawingml/2006/main" w="0">
-            <a:noFill/>
-          </a:ln>
-        </p:spPr>
-        <p:txBody>
-          <a:bodyPr xmlns:a="http://schemas.openxmlformats.org/drawingml/2006/main">
-            <a:noAutofit/>
-          </a:bodyPr>
-          <a:lstStyle xmlns:a="http://schemas.openxmlformats.org/drawingml/2006/main">
-            <a:defPPr>
-              <a:defRPr sz="2025" b="1">
-                <a:solidFill>
-                  <a:srgbClr val="FFFFFF"/>
-                </a:solidFill>
-                <a:latin typeface="Arial"/>
-                <a:ea typeface="Arial"/>
-                <a:cs typeface="Arial"/>
-              </a:defRPr>
-            </a:defPPr>
-            <a:lvl1pPr>
-              <a:defRPr sz="2025" b="1">
-                <a:solidFill>
-                  <a:srgbClr val="FFFFFF"/>
-                </a:solidFill>
-                <a:latin typeface="Arial"/>
-                <a:ea typeface="Arial"/>
-                <a:cs typeface="Arial"/>
-              </a:defRPr>
-            </a:lvl1pPr>
-            <a:lvl2pPr>
-              <a:defRPr sz="2025" b="1">
-                <a:solidFill>
-                  <a:srgbClr val="FFFFFF"/>
-                </a:solidFill>
-                <a:latin typeface="Arial"/>
-                <a:ea typeface="Arial"/>
-                <a:cs typeface="Arial"/>
-              </a:defRPr>
-            </a:lvl2pPr>
-            <a:lvl3pPr>
-              <a:defRPr sz="2025" b="1">
-                <a:solidFill>
-                  <a:srgbClr val="FFFFFF"/>
-                </a:solidFill>
-                <a:latin typeface="Arial"/>
-                <a:ea typeface="Arial"/>
-                <a:cs typeface="Arial"/>
-              </a:defRPr>
-            </a:lvl3pPr>
-            <a:lvl4pPr>
-              <a:defRPr sz="2025" b="1">
-                <a:solidFill>
-                  <a:srgbClr val="FFFFFF"/>
-                </a:solidFill>
-                <a:latin typeface="Arial"/>
-                <a:ea typeface="Arial"/>
-                <a:cs typeface="Arial"/>
-              </a:defRPr>
-            </a:lvl4pPr>
-            <a:lvl5pPr>
-              <a:defRPr sz="2025" b="1">
-                <a:solidFill>
-                  <a:srgbClr val="FFFFFF"/>
-                </a:solidFill>
-                <a:latin typeface="Arial"/>
-                <a:ea typeface="Arial"/>
-                <a:cs typeface="Arial"/>
-              </a:defRPr>
-            </a:lvl5pPr>
-            <a:lvl6pPr>
-              <a:defRPr sz="2025" b="1">
-                <a:solidFill>
-                  <a:srgbClr val="FFFFFF"/>
-                </a:solidFill>
-                <a:latin typeface="Arial"/>
-                <a:ea typeface="Arial"/>
-                <a:cs typeface="Arial"/>
-              </a:defRPr>
-            </a:lvl6pPr>
-            <a:lvl7pPr>
-              <a:defRPr sz="2025" b="1">
-                <a:solidFill>
-                  <a:srgbClr val="FFFFFF"/>
-                </a:solidFill>
-                <a:latin typeface="Arial"/>
-                <a:ea typeface="Arial"/>
-                <a:cs typeface="Arial"/>
-              </a:defRPr>
-            </a:lvl7pPr>
-            <a:lvl8pPr>
-              <a:defRPr sz="2025" b="1">
-                <a:solidFill>
-                  <a:srgbClr val="FFFFFF"/>
-                </a:solidFill>
-                <a:latin typeface="Arial"/>
-                <a:ea typeface="Arial"/>
-                <a:cs typeface="Arial"/>
-              </a:defRPr>
-            </a:lvl8pPr>
-            <a:lvl9pPr>
-              <a:defRPr sz="2025" b="1">
-                <a:solidFill>
-                  <a:srgbClr val="FFFFFF"/>
-                </a:solidFill>
-                <a:latin typeface="Arial"/>
-                <a:ea typeface="Arial"/>
-                <a:cs typeface="Arial"/>
-              </a:defRPr>
-            </a:lvl9pPr>
-          </a:lstStyle>
-          <a:p xmlns:a="http://schemas.openxmlformats.org/drawingml/2006/main">
-            <a:pPr>
-              <a:defRPr sz="2025" b="1">
-                <a:solidFill>
-                  <a:srgbClr val="FFFFFF"/>
-                </a:solidFill>
-                <a:latin typeface="Arial"/>
-                <a:ea typeface="Arial"/>
-                <a:cs typeface="Arial"/>
-              </a:defRPr>
-            </a:pPr>
-            <a:r>
-              <a:rPr sz="2025" b="1">
-                <a:solidFill>
-                  <a:srgbClr val="FFFFFF"/>
-                </a:solidFill>
-                <a:latin typeface="Arial"/>
-                <a:ea typeface="Arial"/>
-                <a:cs typeface="Arial"/>
-              </a:rPr>
-              <a:t>Lista: 08:15</a:t>
-            </a:r>
-          </a:p>
-        </p:txBody>
-      </p:sp>
-      <p:sp>
-        <p:nvSpPr>
-          <p:cNvPr id="6" name="">
-            <a:extLst xmlns:a="http://schemas.openxmlformats.org/drawingml/2006/main">
-              <a:ext uri="{FF2B5EF4-FFF2-40B4-BE49-F238E27FC236}">
-                <a16:creationId xmlns:a16="http://schemas.microsoft.com/office/drawing/2014/main" id="{2F2349A6-C52F-4204-A2EF-9CF65FE0A241}"/>
-              </a:ext>
-            </a:extLst>
-          </p:cNvPr>
-          <p:cNvSpPr>
-            <a:spLocks xmlns:a="http://schemas.openxmlformats.org/drawingml/2006/main" noGrp="1"/>
-          </p:cNvSpPr>
-          <p:nvPr/>
-        </p:nvSpPr>
-        <p:spPr>
-          <a:xfrm xmlns:a="http://schemas.openxmlformats.org/drawingml/2006/main">
-            <a:off x="609600" y="3219450"/>
-            <a:ext cx="5295900" cy="571500"/>
-          </a:xfrm>
-          <a:prstGeom xmlns:a="http://schemas.openxmlformats.org/drawingml/2006/main" prst="rect">
-            <a:avLst/>
-          </a:prstGeom>
-          <a:noFill xmlns:a="http://schemas.openxmlformats.org/drawingml/2006/main"/>
-          <a:ln xmlns:a="http://schemas.openxmlformats.org/drawingml/2006/main" w="0">
-            <a:noFill/>
-          </a:ln>
-        </p:spPr>
-        <p:txBody>
-          <a:bodyPr xmlns:a="http://schemas.openxmlformats.org/drawingml/2006/main">
-            <a:noAutofit/>
-          </a:bodyPr>
-          <a:lstStyle xmlns:a="http://schemas.openxmlformats.org/drawingml/2006/main">
-            <a:defPPr>
-              <a:defRPr sz="1650" b="0">
-                <a:solidFill>
-                  <a:srgbClr val="C8D3E6"/>
-                </a:solidFill>
-                <a:latin typeface="Arial"/>
-                <a:ea typeface="Arial"/>
-                <a:cs typeface="Arial"/>
-              </a:defRPr>
-            </a:defPPr>
-            <a:lvl1pPr>
-              <a:defRPr sz="1650" b="0">
-                <a:solidFill>
-                  <a:srgbClr val="C8D3E6"/>
-                </a:solidFill>
-                <a:latin typeface="Arial"/>
-                <a:ea typeface="Arial"/>
-                <a:cs typeface="Arial"/>
-              </a:defRPr>
-            </a:lvl1pPr>
-            <a:lvl2pPr>
-              <a:defRPr sz="1650" b="0">
-                <a:solidFill>
-                  <a:srgbClr val="C8D3E6"/>
-                </a:solidFill>
-                <a:latin typeface="Arial"/>
-                <a:ea typeface="Arial"/>
-                <a:cs typeface="Arial"/>
-              </a:defRPr>
-            </a:lvl2pPr>
-            <a:lvl3pPr>
-              <a:defRPr sz="1650" b="0">
-                <a:solidFill>
-                  <a:srgbClr val="C8D3E6"/>
-                </a:solidFill>
-                <a:latin typeface="Arial"/>
-                <a:ea typeface="Arial"/>
-                <a:cs typeface="Arial"/>
-              </a:defRPr>
-            </a:lvl3pPr>
-            <a:lvl4pPr>
-              <a:defRPr sz="1650" b="0">
-                <a:solidFill>
-                  <a:srgbClr val="C8D3E6"/>
-                </a:solidFill>
-                <a:latin typeface="Arial"/>
-                <a:ea typeface="Arial"/>
-                <a:cs typeface="Arial"/>
-              </a:defRPr>
-            </a:lvl4pPr>
-            <a:lvl5pPr>
-              <a:defRPr sz="1650" b="0">
-                <a:solidFill>
-                  <a:srgbClr val="C8D3E6"/>
-                </a:solidFill>
-                <a:latin typeface="Arial"/>
-                <a:ea typeface="Arial"/>
-                <a:cs typeface="Arial"/>
-              </a:defRPr>
-            </a:lvl5pPr>
-            <a:lvl6pPr>
-              <a:defRPr sz="1650" b="0">
-                <a:solidFill>
-                  <a:srgbClr val="C8D3E6"/>
-                </a:solidFill>
-                <a:latin typeface="Arial"/>
-                <a:ea typeface="Arial"/>
-                <a:cs typeface="Arial"/>
-              </a:defRPr>
-            </a:lvl6pPr>
-            <a:lvl7pPr>
-              <a:defRPr sz="1650" b="0">
-                <a:solidFill>
-                  <a:srgbClr val="C8D3E6"/>
-                </a:solidFill>
-                <a:latin typeface="Arial"/>
-                <a:ea typeface="Arial"/>
-                <a:cs typeface="Arial"/>
-              </a:defRPr>
-            </a:lvl7pPr>
-            <a:lvl8pPr>
-              <a:defRPr sz="1650" b="0">
-                <a:solidFill>
-                  <a:srgbClr val="C8D3E6"/>
-                </a:solidFill>
-                <a:latin typeface="Arial"/>
-                <a:ea typeface="Arial"/>
-                <a:cs typeface="Arial"/>
-              </a:defRPr>
-            </a:lvl8pPr>
-            <a:lvl9pPr>
-              <a:defRPr sz="1650" b="0">
-                <a:solidFill>
-                  <a:srgbClr val="C8D3E6"/>
-                </a:solidFill>
-                <a:latin typeface="Arial"/>
-                <a:ea typeface="Arial"/>
-                <a:cs typeface="Arial"/>
-              </a:defRPr>
-            </a:lvl9pPr>
-          </a:lstStyle>
-          <a:p xmlns:a="http://schemas.openxmlformats.org/drawingml/2006/main">
-            <a:pPr>
-              <a:defRPr sz="1650" b="0">
-                <a:solidFill>
-                  <a:srgbClr val="C8D3E6"/>
-                </a:solidFill>
-                <a:latin typeface="Arial"/>
-                <a:ea typeface="Arial"/>
-                <a:cs typeface="Arial"/>
-              </a:defRPr>
-            </a:pPr>
-            <a:r>
-              <a:rPr sz="1650" b="0">
-                <a:solidFill>
-                  <a:srgbClr val="C8D3E6"/>
-                </a:solidFill>
-                <a:latin typeface="Arial"/>
-                <a:ea typeface="Arial"/>
-                <a:cs typeface="Arial"/>
-              </a:rPr>
-              <a:t>Udhëtimi 2</a:t>
-            </a:r>
-          </a:p>
-        </p:txBody>
-      </p:sp>
-      <p:pic>
-        <p:nvPicPr>
-          <p:cNvPr id="7" name="">
-            <a:extLst xmlns:a="http://schemas.openxmlformats.org/drawingml/2006/main">
-              <a:ext uri="{FF2B5EF4-FFF2-40B4-BE49-F238E27FC236}">
-                <a16:creationId xmlns:a16="http://schemas.microsoft.com/office/drawing/2014/main" id="{F045B895-2624-4517-A205-1D5D9E224DAF}"/>
-              </a:ext>
-            </a:extLst>
-          </p:cNvPr>
-          <p:cNvPicPr>
-            <a:picLocks xmlns:a="http://schemas.openxmlformats.org/drawingml/2006/main" noChangeAspect="1"/>
-          </p:cNvPicPr>
-          <p:nvPr/>
-        </p:nvPicPr>
-        <p:blipFill>
-          <a:blip xmlns:r="http://schemas.openxmlformats.org/officeDocument/2006/relationships" xmlns:a="http://schemas.openxmlformats.org/drawingml/2006/main" r:embed="Re77712f8e9af4480"/>
-          <a:stretch xmlns:a="http://schemas.openxmlformats.org/drawingml/2006/main"/>
-        </p:blipFill>
-        <p:spPr>
-          <a:xfrm xmlns:a="http://schemas.openxmlformats.org/drawingml/2006/main">
-            <a:off x="6267450" y="1952625"/>
-            <a:ext cx="457200" cy="457200"/>
-          </a:xfrm>
-          <a:prstGeom xmlns:a="http://schemas.openxmlformats.org/drawingml/2006/main" prst="rect">
-            <a:avLst/>
-          </a:prstGeom>
-        </p:spPr>
-      </p:pic>
-      <p:sp>
-        <p:nvSpPr>
-          <p:cNvPr id="8" name="">
-            <a:extLst xmlns:a="http://schemas.openxmlformats.org/drawingml/2006/main">
-              <a:ext uri="{FF2B5EF4-FFF2-40B4-BE49-F238E27FC236}">
-                <a16:creationId xmlns:a16="http://schemas.microsoft.com/office/drawing/2014/main" id="{FDDD8B89-E41A-4B45-BFA5-290206D79C71}"/>
-              </a:ext>
-            </a:extLst>
-          </p:cNvPr>
-          <p:cNvSpPr>
-            <a:spLocks xmlns:a="http://schemas.openxmlformats.org/drawingml/2006/main" noGrp="1"/>
-          </p:cNvSpPr>
-          <p:nvPr/>
-        </p:nvSpPr>
-        <p:spPr>
-          <a:xfrm xmlns:a="http://schemas.openxmlformats.org/drawingml/2006/main">
-            <a:off x="6267450" y="2667000"/>
-            <a:ext cx="5295900" cy="495300"/>
-          </a:xfrm>
-          <a:prstGeom xmlns:a="http://schemas.openxmlformats.org/drawingml/2006/main" prst="rect">
-            <a:avLst/>
-          </a:prstGeom>
-          <a:noFill xmlns:a="http://schemas.openxmlformats.org/drawingml/2006/main"/>
-          <a:ln xmlns:a="http://schemas.openxmlformats.org/drawingml/2006/main" w="0">
-            <a:noFill/>
-          </a:ln>
-        </p:spPr>
-        <p:txBody>
-          <a:bodyPr xmlns:a="http://schemas.openxmlformats.org/drawingml/2006/main">
-            <a:noAutofit/>
-          </a:bodyPr>
-          <a:lstStyle xmlns:a="http://schemas.openxmlformats.org/drawingml/2006/main">
-            <a:defPPr>
-              <a:defRPr sz="2025" b="1">
-                <a:solidFill>
-                  <a:srgbClr val="FFFFFF"/>
-                </a:solidFill>
-                <a:latin typeface="Arial"/>
-                <a:ea typeface="Arial"/>
-                <a:cs typeface="Arial"/>
-              </a:defRPr>
-            </a:defPPr>
-            <a:lvl1pPr>
-              <a:defRPr sz="2025" b="1">
-                <a:solidFill>
-                  <a:srgbClr val="FFFFFF"/>
-                </a:solidFill>
-                <a:latin typeface="Arial"/>
-                <a:ea typeface="Arial"/>
-                <a:cs typeface="Arial"/>
-              </a:defRPr>
-            </a:lvl1pPr>
-            <a:lvl2pPr>
-              <a:defRPr sz="2025" b="1">
-                <a:solidFill>
-                  <a:srgbClr val="FFFFFF"/>
-                </a:solidFill>
-                <a:latin typeface="Arial"/>
-                <a:ea typeface="Arial"/>
-                <a:cs typeface="Arial"/>
-              </a:defRPr>
-            </a:lvl2pPr>
-            <a:lvl3pPr>
-              <a:defRPr sz="2025" b="1">
-                <a:solidFill>
-                  <a:srgbClr val="FFFFFF"/>
-                </a:solidFill>
-                <a:latin typeface="Arial"/>
-                <a:ea typeface="Arial"/>
-                <a:cs typeface="Arial"/>
-              </a:defRPr>
-            </a:lvl3pPr>
-            <a:lvl4pPr>
-              <a:defRPr sz="2025" b="1">
-                <a:solidFill>
-                  <a:srgbClr val="FFFFFF"/>
-                </a:solidFill>
-                <a:latin typeface="Arial"/>
-                <a:ea typeface="Arial"/>
-                <a:cs typeface="Arial"/>
-              </a:defRPr>
-            </a:lvl4pPr>
-            <a:lvl5pPr>
-              <a:defRPr sz="2025" b="1">
-                <a:solidFill>
-                  <a:srgbClr val="FFFFFF"/>
-                </a:solidFill>
-                <a:latin typeface="Arial"/>
-                <a:ea typeface="Arial"/>
-                <a:cs typeface="Arial"/>
-              </a:defRPr>
-            </a:lvl5pPr>
-            <a:lvl6pPr>
-              <a:defRPr sz="2025" b="1">
-                <a:solidFill>
-                  <a:srgbClr val="FFFFFF"/>
-                </a:solidFill>
-                <a:latin typeface="Arial"/>
-                <a:ea typeface="Arial"/>
-                <a:cs typeface="Arial"/>
-              </a:defRPr>
-            </a:lvl6pPr>
-            <a:lvl7pPr>
-              <a:defRPr sz="2025" b="1">
-                <a:solidFill>
-                  <a:srgbClr val="FFFFFF"/>
-                </a:solidFill>
-                <a:latin typeface="Arial"/>
-                <a:ea typeface="Arial"/>
-                <a:cs typeface="Arial"/>
-              </a:defRPr>
-            </a:lvl7pPr>
-            <a:lvl8pPr>
-              <a:defRPr sz="2025" b="1">
-                <a:solidFill>
-                  <a:srgbClr val="FFFFFF"/>
-                </a:solidFill>
-                <a:latin typeface="Arial"/>
-                <a:ea typeface="Arial"/>
-                <a:cs typeface="Arial"/>
-              </a:defRPr>
-            </a:lvl8pPr>
-            <a:lvl9pPr>
-              <a:defRPr sz="2025" b="1">
-                <a:solidFill>
-                  <a:srgbClr val="FFFFFF"/>
-                </a:solidFill>
-                <a:latin typeface="Arial"/>
-                <a:ea typeface="Arial"/>
-                <a:cs typeface="Arial"/>
-              </a:defRPr>
-            </a:lvl9pPr>
-          </a:lstStyle>
-          <a:p xmlns:a="http://schemas.openxmlformats.org/drawingml/2006/main">
-            <a:pPr>
-              <a:defRPr sz="2025" b="1">
-                <a:solidFill>
-                  <a:srgbClr val="FFFFFF"/>
-                </a:solidFill>
-                <a:latin typeface="Arial"/>
-                <a:ea typeface="Arial"/>
-                <a:cs typeface="Arial"/>
-              </a:defRPr>
-            </a:pPr>
-            <a:r>
-              <a:rPr sz="2025" b="1">
-                <a:solidFill>
-                  <a:srgbClr val="FFFFFF"/>
-                </a:solidFill>
-                <a:latin typeface="Arial"/>
-                <a:ea typeface="Arial"/>
-                <a:cs typeface="Arial"/>
-              </a:rPr>
-              <a:t>Detajet: 08:40</a:t>
-            </a:r>
-          </a:p>
-        </p:txBody>
-      </p:sp>
-      <p:sp>
-        <p:nvSpPr>
-          <p:cNvPr id="9" name="">
-            <a:extLst xmlns:a="http://schemas.openxmlformats.org/drawingml/2006/main">
-              <a:ext uri="{FF2B5EF4-FFF2-40B4-BE49-F238E27FC236}">
-                <a16:creationId xmlns:a16="http://schemas.microsoft.com/office/drawing/2014/main" id="{756340B0-2305-4EBA-96D9-E558732E9D8F}"/>
-              </a:ext>
-            </a:extLst>
-          </p:cNvPr>
-          <p:cNvSpPr>
-            <a:spLocks xmlns:a="http://schemas.openxmlformats.org/drawingml/2006/main" noGrp="1"/>
-          </p:cNvSpPr>
-          <p:nvPr/>
-        </p:nvSpPr>
-        <p:spPr>
-          <a:xfrm xmlns:a="http://schemas.openxmlformats.org/drawingml/2006/main">
-            <a:off x="6267450" y="3219450"/>
-            <a:ext cx="5295900" cy="571500"/>
-          </a:xfrm>
-          <a:prstGeom xmlns:a="http://schemas.openxmlformats.org/drawingml/2006/main" prst="rect">
-            <a:avLst/>
-          </a:prstGeom>
-          <a:noFill xmlns:a="http://schemas.openxmlformats.org/drawingml/2006/main"/>
-          <a:ln xmlns:a="http://schemas.openxmlformats.org/drawingml/2006/main" w="0">
-            <a:noFill/>
-          </a:ln>
-        </p:spPr>
-        <p:txBody>
-          <a:bodyPr xmlns:a="http://schemas.openxmlformats.org/drawingml/2006/main">
-            <a:noAutofit/>
-          </a:bodyPr>
-          <a:lstStyle xmlns:a="http://schemas.openxmlformats.org/drawingml/2006/main">
-            <a:defPPr>
-              <a:defRPr sz="1650" b="0">
-                <a:solidFill>
-                  <a:srgbClr val="C8D3E6"/>
-                </a:solidFill>
-                <a:latin typeface="Arial"/>
-                <a:ea typeface="Arial"/>
-                <a:cs typeface="Arial"/>
-              </a:defRPr>
-            </a:defPPr>
-            <a:lvl1pPr>
-              <a:defRPr sz="1650" b="0">
-                <a:solidFill>
-                  <a:srgbClr val="C8D3E6"/>
-                </a:solidFill>
-                <a:latin typeface="Arial"/>
-                <a:ea typeface="Arial"/>
-                <a:cs typeface="Arial"/>
-              </a:defRPr>
-            </a:lvl1pPr>
-            <a:lvl2pPr>
-              <a:defRPr sz="1650" b="0">
-                <a:solidFill>
-                  <a:srgbClr val="C8D3E6"/>
-                </a:solidFill>
-                <a:latin typeface="Arial"/>
-                <a:ea typeface="Arial"/>
-                <a:cs typeface="Arial"/>
-              </a:defRPr>
-            </a:lvl2pPr>
-            <a:lvl3pPr>
-              <a:defRPr sz="1650" b="0">
-                <a:solidFill>
-                  <a:srgbClr val="C8D3E6"/>
-                </a:solidFill>
-                <a:latin typeface="Arial"/>
-                <a:ea typeface="Arial"/>
-                <a:cs typeface="Arial"/>
-              </a:defRPr>
-            </a:lvl3pPr>
-            <a:lvl4pPr>
-              <a:defRPr sz="1650" b="0">
-                <a:solidFill>
-                  <a:srgbClr val="C8D3E6"/>
-                </a:solidFill>
-                <a:latin typeface="Arial"/>
-                <a:ea typeface="Arial"/>
-                <a:cs typeface="Arial"/>
-              </a:defRPr>
-            </a:lvl4pPr>
-            <a:lvl5pPr>
-              <a:defRPr sz="1650" b="0">
-                <a:solidFill>
-                  <a:srgbClr val="C8D3E6"/>
-                </a:solidFill>
-                <a:latin typeface="Arial"/>
-                <a:ea typeface="Arial"/>
-                <a:cs typeface="Arial"/>
-              </a:defRPr>
-            </a:lvl5pPr>
-            <a:lvl6pPr>
-              <a:defRPr sz="1650" b="0">
-                <a:solidFill>
-                  <a:srgbClr val="C8D3E6"/>
-                </a:solidFill>
-                <a:latin typeface="Arial"/>
-                <a:ea typeface="Arial"/>
-                <a:cs typeface="Arial"/>
-              </a:defRPr>
-            </a:lvl6pPr>
-            <a:lvl7pPr>
-              <a:defRPr sz="1650" b="0">
-                <a:solidFill>
-                  <a:srgbClr val="C8D3E6"/>
-                </a:solidFill>
-                <a:latin typeface="Arial"/>
-                <a:ea typeface="Arial"/>
-                <a:cs typeface="Arial"/>
-              </a:defRPr>
-            </a:lvl7pPr>
-            <a:lvl8pPr>
-              <a:defRPr sz="1650" b="0">
-                <a:solidFill>
-                  <a:srgbClr val="C8D3E6"/>
-                </a:solidFill>
-                <a:latin typeface="Arial"/>
-                <a:ea typeface="Arial"/>
-                <a:cs typeface="Arial"/>
-              </a:defRPr>
-            </a:lvl8pPr>
-            <a:lvl9pPr>
-              <a:defRPr sz="1650" b="0">
-                <a:solidFill>
-                  <a:srgbClr val="C8D3E6"/>
-                </a:solidFill>
-                <a:latin typeface="Arial"/>
-                <a:ea typeface="Arial"/>
-                <a:cs typeface="Arial"/>
-              </a:defRPr>
-            </a:lvl9pPr>
-          </a:lstStyle>
-          <a:p xmlns:a="http://schemas.openxmlformats.org/drawingml/2006/main">
-            <a:pPr>
-              <a:defRPr sz="1650" b="0">
-                <a:solidFill>
-                  <a:srgbClr val="C8D3E6"/>
-                </a:solidFill>
-                <a:latin typeface="Arial"/>
-                <a:ea typeface="Arial"/>
-                <a:cs typeface="Arial"/>
-              </a:defRPr>
-            </a:pPr>
-            <a:r>
-              <a:rPr sz="1650" b="0">
-                <a:solidFill>
-                  <a:srgbClr val="C8D3E6"/>
-                </a:solidFill>
-                <a:latin typeface="Arial"/>
-                <a:ea typeface="Arial"/>
-                <a:cs typeface="Arial"/>
-              </a:rPr>
-              <a:t>Po i njëjti udhëtim?</a:t>
-            </a:r>
-          </a:p>
-        </p:txBody>
-      </p:sp>
-      <p:sp>
-        <p:nvSpPr>
-          <p:cNvPr id="10" name="">
-            <a:extLst xmlns:a="http://schemas.openxmlformats.org/drawingml/2006/main">
-              <a:ext uri="{FF2B5EF4-FFF2-40B4-BE49-F238E27FC236}">
-                <a16:creationId xmlns:a16="http://schemas.microsoft.com/office/drawing/2014/main" id="{122E2E31-D16E-4745-A22B-E70273D56285}"/>
-              </a:ext>
-            </a:extLst>
-          </p:cNvPr>
-          <p:cNvSpPr>
-            <a:spLocks xmlns:a="http://schemas.openxmlformats.org/drawingml/2006/main" noGrp="1"/>
-          </p:cNvSpPr>
-          <p:nvPr/>
-        </p:nvSpPr>
-        <p:spPr>
-          <a:xfrm xmlns:a="http://schemas.openxmlformats.org/drawingml/2006/main">
-            <a:off x="609600" y="3924300"/>
-            <a:ext cx="10953750" cy="809625"/>
+            <a:off x="609600" y="1952625"/>
+            <a:ext cx="5334000" cy="1381125"/>
           </a:xfrm>
           <a:prstGeom xmlns:a="http://schemas.openxmlformats.org/drawingml/2006/main" prst="rect">
             <a:avLst/>
@@ -23688,6 +21736,11 @@
             </a:r>
           </a:p>
           <a:p xmlns:a="http://schemas.openxmlformats.org/drawingml/2006/main">
+            <a:r>
+              <a:t/>
+            </a:r>
+          </a:p>
+          <a:p xmlns:a="http://schemas.openxmlformats.org/drawingml/2006/main">
             <a:pPr>
               <a:defRPr sz="1800" b="0">
                 <a:solidFill>
@@ -23712,12 +21765,68 @@
           </a:p>
         </p:txBody>
       </p:sp>
+      <p:pic>
+        <p:nvPicPr>
+          <p:cNvPr id="5" name="">
+            <a:extLst xmlns:a="http://schemas.openxmlformats.org/drawingml/2006/main">
+              <a:ext uri="{FF2B5EF4-FFF2-40B4-BE49-F238E27FC236}">
+                <a16:creationId xmlns:a16="http://schemas.microsoft.com/office/drawing/2014/main" id="{B10A0577-D3B9-4AC1-930A-AC152F9FA0A6}"/>
+              </a:ext>
+            </a:extLst>
+          </p:cNvPr>
+          <p:cNvPicPr>
+            <a:picLocks xmlns:a="http://schemas.openxmlformats.org/drawingml/2006/main" noChangeAspect="1"/>
+          </p:cNvPicPr>
+          <p:nvPr/>
+        </p:nvPicPr>
+        <p:blipFill>
+          <a:blip xmlns:r="http://schemas.openxmlformats.org/officeDocument/2006/relationships" xmlns:a="http://schemas.openxmlformats.org/drawingml/2006/main" r:embed="R54db7e1acb7046c8"/>
+          <a:stretch xmlns:a="http://schemas.openxmlformats.org/drawingml/2006/main"/>
+        </p:blipFill>
+        <p:spPr>
+          <a:xfrm xmlns:a="http://schemas.openxmlformats.org/drawingml/2006/main">
+            <a:off x="6334125" y="1952625"/>
+            <a:ext cx="2190750" cy="3409950"/>
+          </a:xfrm>
+          <a:prstGeom xmlns:a="http://schemas.openxmlformats.org/drawingml/2006/main" prst="rect">
+            <a:avLst/>
+          </a:prstGeom>
+        </p:spPr>
+      </p:pic>
+      <p:pic>
+        <p:nvPicPr>
+          <p:cNvPr id="6" name="">
+            <a:extLst xmlns:a="http://schemas.openxmlformats.org/drawingml/2006/main">
+              <a:ext uri="{FF2B5EF4-FFF2-40B4-BE49-F238E27FC236}">
+                <a16:creationId xmlns:a16="http://schemas.microsoft.com/office/drawing/2014/main" id="{E8A01005-DCDC-4EAC-B963-02AFA700B11E}"/>
+              </a:ext>
+            </a:extLst>
+          </p:cNvPr>
+          <p:cNvPicPr>
+            <a:picLocks xmlns:a="http://schemas.openxmlformats.org/drawingml/2006/main" noChangeAspect="1"/>
+          </p:cNvPicPr>
+          <p:nvPr/>
+        </p:nvPicPr>
+        <p:blipFill>
+          <a:blip xmlns:r="http://schemas.openxmlformats.org/officeDocument/2006/relationships" xmlns:a="http://schemas.openxmlformats.org/drawingml/2006/main" r:embed="Rbfbbf6eb41624716"/>
+          <a:stretch xmlns:a="http://schemas.openxmlformats.org/drawingml/2006/main"/>
+        </p:blipFill>
+        <p:spPr>
+          <a:xfrm xmlns:a="http://schemas.openxmlformats.org/drawingml/2006/main">
+            <a:off x="9001125" y="1952625"/>
+            <a:ext cx="2190750" cy="3409950"/>
+          </a:xfrm>
+          <a:prstGeom xmlns:a="http://schemas.openxmlformats.org/drawingml/2006/main" prst="rect">
+            <a:avLst/>
+          </a:prstGeom>
+        </p:spPr>
+      </p:pic>
       <p:sp>
         <p:nvSpPr>
-          <p:cNvPr id="11" name="">
+          <p:cNvPr id="7" name="">
             <a:extLst xmlns:a="http://schemas.openxmlformats.org/drawingml/2006/main">
               <a:ext uri="{FF2B5EF4-FFF2-40B4-BE49-F238E27FC236}">
-                <a16:creationId xmlns:a16="http://schemas.microsoft.com/office/drawing/2014/main" id="{2643D501-9297-4153-8E69-5F7F45EF6949}"/>
+                <a16:creationId xmlns:a16="http://schemas.microsoft.com/office/drawing/2014/main" id="{028D8C18-8D7D-4EA6-90E1-B60DAF3DE3C1}"/>
               </a:ext>
             </a:extLst>
           </p:cNvPr>
@@ -23728,8 +21837,8 @@
         </p:nvSpPr>
         <p:spPr>
           <a:xfrm xmlns:a="http://schemas.openxmlformats.org/drawingml/2006/main">
-            <a:off x="609600" y="4857750"/>
-            <a:ext cx="10953750" cy="495300"/>
+            <a:off x="609600" y="3571875"/>
+            <a:ext cx="5334000" cy="609600"/>
           </a:xfrm>
           <a:prstGeom xmlns:a="http://schemas.openxmlformats.org/drawingml/2006/main" prst="rect">
             <a:avLst/>
@@ -23872,10 +21981,10 @@
       </p:sp>
       <p:sp>
         <p:nvSpPr>
-          <p:cNvPr id="12" name="">
+          <p:cNvPr id="8" name="">
             <a:extLst xmlns:a="http://schemas.openxmlformats.org/drawingml/2006/main">
               <a:ext uri="{FF2B5EF4-FFF2-40B4-BE49-F238E27FC236}">
-                <a16:creationId xmlns:a16="http://schemas.microsoft.com/office/drawing/2014/main" id="{384D16CD-ADE2-4B31-90C7-D5988204FBDF}"/>
+                <a16:creationId xmlns:a16="http://schemas.microsoft.com/office/drawing/2014/main" id="{2AE2D34A-F7B2-49BC-87A4-90B5568DEB05}"/>
               </a:ext>
             </a:extLst>
           </p:cNvPr>
@@ -23886,8 +21995,8 @@
         </p:nvSpPr>
         <p:spPr>
           <a:xfrm xmlns:a="http://schemas.openxmlformats.org/drawingml/2006/main">
-            <a:off x="609600" y="5457825"/>
-            <a:ext cx="10953750" cy="971550"/>
+            <a:off x="609600" y="4295775"/>
+            <a:ext cx="5334000" cy="1381125"/>
           </a:xfrm>
           <a:prstGeom xmlns:a="http://schemas.openxmlformats.org/drawingml/2006/main" prst="rect">
             <a:avLst/>
@@ -23903,7 +22012,7 @@
           </a:bodyPr>
           <a:lstStyle xmlns:a="http://schemas.openxmlformats.org/drawingml/2006/main">
             <a:defPPr>
-              <a:defRPr sz="1800" b="0">
+              <a:defRPr sz="1725" b="0">
                 <a:solidFill>
                   <a:srgbClr val="EDF2FF"/>
                 </a:solidFill>
@@ -23913,7 +22022,7 @@
               </a:defRPr>
             </a:defPPr>
             <a:lvl1pPr>
-              <a:defRPr sz="1800" b="0">
+              <a:defRPr sz="1725" b="0">
                 <a:solidFill>
                   <a:srgbClr val="EDF2FF"/>
                 </a:solidFill>
@@ -23923,7 +22032,7 @@
               </a:defRPr>
             </a:lvl1pPr>
             <a:lvl2pPr>
-              <a:defRPr sz="1800" b="0">
+              <a:defRPr sz="1725" b="0">
                 <a:solidFill>
                   <a:srgbClr val="EDF2FF"/>
                 </a:solidFill>
@@ -23933,7 +22042,7 @@
               </a:defRPr>
             </a:lvl2pPr>
             <a:lvl3pPr>
-              <a:defRPr sz="1800" b="0">
+              <a:defRPr sz="1725" b="0">
                 <a:solidFill>
                   <a:srgbClr val="EDF2FF"/>
                 </a:solidFill>
@@ -23943,7 +22052,7 @@
               </a:defRPr>
             </a:lvl3pPr>
             <a:lvl4pPr>
-              <a:defRPr sz="1800" b="0">
+              <a:defRPr sz="1725" b="0">
                 <a:solidFill>
                   <a:srgbClr val="EDF2FF"/>
                 </a:solidFill>
@@ -23953,7 +22062,7 @@
               </a:defRPr>
             </a:lvl4pPr>
             <a:lvl5pPr>
-              <a:defRPr sz="1800" b="0">
+              <a:defRPr sz="1725" b="0">
                 <a:solidFill>
                   <a:srgbClr val="EDF2FF"/>
                 </a:solidFill>
@@ -23963,7 +22072,7 @@
               </a:defRPr>
             </a:lvl5pPr>
             <a:lvl6pPr>
-              <a:defRPr sz="1800" b="0">
+              <a:defRPr sz="1725" b="0">
                 <a:solidFill>
                   <a:srgbClr val="EDF2FF"/>
                 </a:solidFill>
@@ -23973,7 +22082,7 @@
               </a:defRPr>
             </a:lvl6pPr>
             <a:lvl7pPr>
-              <a:defRPr sz="1800" b="0">
+              <a:defRPr sz="1725" b="0">
                 <a:solidFill>
                   <a:srgbClr val="EDF2FF"/>
                 </a:solidFill>
@@ -23983,7 +22092,7 @@
               </a:defRPr>
             </a:lvl7pPr>
             <a:lvl8pPr>
-              <a:defRPr sz="1800" b="0">
+              <a:defRPr sz="1725" b="0">
                 <a:solidFill>
                   <a:srgbClr val="EDF2FF"/>
                 </a:solidFill>
@@ -23993,7 +22102,7 @@
               </a:defRPr>
             </a:lvl8pPr>
             <a:lvl9pPr>
-              <a:defRPr sz="1800" b="0">
+              <a:defRPr sz="1725" b="0">
                 <a:solidFill>
                   <a:srgbClr val="EDF2FF"/>
                 </a:solidFill>
@@ -24005,7 +22114,7 @@
           </a:lstStyle>
           <a:p xmlns:a="http://schemas.openxmlformats.org/drawingml/2006/main">
             <a:pPr>
-              <a:defRPr sz="1800" b="0">
+              <a:defRPr sz="1725" b="0">
                 <a:solidFill>
                   <a:srgbClr val="EDF2FF"/>
                 </a:solidFill>
@@ -24015,7 +22124,7 @@
               </a:defRPr>
             </a:pPr>
             <a:r>
-              <a:rPr sz="1800" b="0">
+              <a:rPr sz="1725" b="0">
                 <a:solidFill>
                   <a:srgbClr val="EDF2FF"/>
                 </a:solidFill>
@@ -24028,7 +22137,7 @@
           </a:p>
           <a:p xmlns:a="http://schemas.openxmlformats.org/drawingml/2006/main">
             <a:pPr>
-              <a:defRPr sz="1800" b="0">
+              <a:defRPr sz="1725" b="0">
                 <a:solidFill>
                   <a:srgbClr val="EDF2FF"/>
                 </a:solidFill>
@@ -24038,7 +22147,7 @@
               </a:defRPr>
             </a:pPr>
             <a:r>
-              <a:rPr sz="1800" b="0">
+              <a:rPr sz="1725" b="0">
                 <a:solidFill>
                   <a:srgbClr val="EDF2FF"/>
                 </a:solidFill>
@@ -24051,7 +22160,7 @@
           </a:p>
           <a:p xmlns:a="http://schemas.openxmlformats.org/drawingml/2006/main">
             <a:pPr>
-              <a:defRPr sz="1800" b="0">
+              <a:defRPr sz="1725" b="0">
                 <a:solidFill>
                   <a:srgbClr val="EDF2FF"/>
                 </a:solidFill>
@@ -24061,7 +22170,7 @@
               </a:defRPr>
             </a:pPr>
             <a:r>
-              <a:rPr sz="1800" b="0">
+              <a:rPr sz="1725" b="0">
                 <a:solidFill>
                   <a:srgbClr val="EDF2FF"/>
                 </a:solidFill>
@@ -24076,10 +22185,10 @@
       </p:sp>
       <p:sp>
         <p:nvSpPr>
-          <p:cNvPr id="13" name="">
+          <p:cNvPr id="9" name="">
             <a:extLst xmlns:a="http://schemas.openxmlformats.org/drawingml/2006/main">
               <a:ext uri="{FF2B5EF4-FFF2-40B4-BE49-F238E27FC236}">
-                <a16:creationId xmlns:a16="http://schemas.microsoft.com/office/drawing/2014/main" id="{1F5998EE-857C-44C7-8A20-25B35A3E0721}"/>
+                <a16:creationId xmlns:a16="http://schemas.microsoft.com/office/drawing/2014/main" id="{BDB2FC04-D895-4C99-9EBF-CDE5C2B5A24C}"/>
               </a:ext>
             </a:extLst>
           </p:cNvPr>
@@ -24090,8 +22199,8 @@
         </p:nvSpPr>
         <p:spPr>
           <a:xfrm xmlns:a="http://schemas.openxmlformats.org/drawingml/2006/main">
-            <a:off x="609600" y="6553200"/>
-            <a:ext cx="10953750" cy="219075"/>
+            <a:off x="609600" y="6191250"/>
+            <a:ext cx="10953750" cy="304800"/>
           </a:xfrm>
           <a:prstGeom xmlns:a="http://schemas.openxmlformats.org/drawingml/2006/main" prst="rect">
             <a:avLst/>
@@ -24107,9 +22216,9 @@
           </a:bodyPr>
           <a:lstStyle xmlns:a="http://schemas.openxmlformats.org/drawingml/2006/main">
             <a:defPPr>
-              <a:defRPr sz="1275" b="0">
-                <a:solidFill>
-                  <a:srgbClr val="C8D3E6"/>
+              <a:defRPr sz="1650" b="0">
+                <a:solidFill>
+                  <a:srgbClr val="FDBA74"/>
                 </a:solidFill>
                 <a:latin typeface="Arial"/>
                 <a:ea typeface="Arial"/>
@@ -24117,9 +22226,9 @@
               </a:defRPr>
             </a:defPPr>
             <a:lvl1pPr>
-              <a:defRPr sz="1275" b="0">
-                <a:solidFill>
-                  <a:srgbClr val="C8D3E6"/>
+              <a:defRPr sz="1650" b="0">
+                <a:solidFill>
+                  <a:srgbClr val="FDBA74"/>
                 </a:solidFill>
                 <a:latin typeface="Arial"/>
                 <a:ea typeface="Arial"/>
@@ -24127,9 +22236,9 @@
               </a:defRPr>
             </a:lvl1pPr>
             <a:lvl2pPr>
-              <a:defRPr sz="1275" b="0">
-                <a:solidFill>
-                  <a:srgbClr val="C8D3E6"/>
+              <a:defRPr sz="1650" b="0">
+                <a:solidFill>
+                  <a:srgbClr val="FDBA74"/>
                 </a:solidFill>
                 <a:latin typeface="Arial"/>
                 <a:ea typeface="Arial"/>
@@ -24137,9 +22246,9 @@
               </a:defRPr>
             </a:lvl2pPr>
             <a:lvl3pPr>
-              <a:defRPr sz="1275" b="0">
-                <a:solidFill>
-                  <a:srgbClr val="C8D3E6"/>
+              <a:defRPr sz="1650" b="0">
+                <a:solidFill>
+                  <a:srgbClr val="FDBA74"/>
                 </a:solidFill>
                 <a:latin typeface="Arial"/>
                 <a:ea typeface="Arial"/>
@@ -24147,9 +22256,9 @@
               </a:defRPr>
             </a:lvl3pPr>
             <a:lvl4pPr>
-              <a:defRPr sz="1275" b="0">
-                <a:solidFill>
-                  <a:srgbClr val="C8D3E6"/>
+              <a:defRPr sz="1650" b="0">
+                <a:solidFill>
+                  <a:srgbClr val="FDBA74"/>
                 </a:solidFill>
                 <a:latin typeface="Arial"/>
                 <a:ea typeface="Arial"/>
@@ -24157,9 +22266,9 @@
               </a:defRPr>
             </a:lvl4pPr>
             <a:lvl5pPr>
-              <a:defRPr sz="1275" b="0">
-                <a:solidFill>
-                  <a:srgbClr val="C8D3E6"/>
+              <a:defRPr sz="1650" b="0">
+                <a:solidFill>
+                  <a:srgbClr val="FDBA74"/>
                 </a:solidFill>
                 <a:latin typeface="Arial"/>
                 <a:ea typeface="Arial"/>
@@ -24167,9 +22276,9 @@
               </a:defRPr>
             </a:lvl5pPr>
             <a:lvl6pPr>
-              <a:defRPr sz="1275" b="0">
-                <a:solidFill>
-                  <a:srgbClr val="C8D3E6"/>
+              <a:defRPr sz="1650" b="0">
+                <a:solidFill>
+                  <a:srgbClr val="FDBA74"/>
                 </a:solidFill>
                 <a:latin typeface="Arial"/>
                 <a:ea typeface="Arial"/>
@@ -24177,9 +22286,9 @@
               </a:defRPr>
             </a:lvl6pPr>
             <a:lvl7pPr>
-              <a:defRPr sz="1275" b="0">
-                <a:solidFill>
-                  <a:srgbClr val="C8D3E6"/>
+              <a:defRPr sz="1650" b="0">
+                <a:solidFill>
+                  <a:srgbClr val="FDBA74"/>
                 </a:solidFill>
                 <a:latin typeface="Arial"/>
                 <a:ea typeface="Arial"/>
@@ -24187,9 +22296,9 @@
               </a:defRPr>
             </a:lvl7pPr>
             <a:lvl8pPr>
-              <a:defRPr sz="1275" b="0">
-                <a:solidFill>
-                  <a:srgbClr val="C8D3E6"/>
+              <a:defRPr sz="1650" b="0">
+                <a:solidFill>
+                  <a:srgbClr val="FDBA74"/>
                 </a:solidFill>
                 <a:latin typeface="Arial"/>
                 <a:ea typeface="Arial"/>
@@ -24197,9 +22306,9 @@
               </a:defRPr>
             </a:lvl8pPr>
             <a:lvl9pPr>
-              <a:defRPr sz="1275" b="0">
-                <a:solidFill>
-                  <a:srgbClr val="C8D3E6"/>
+              <a:defRPr sz="1650" b="0">
+                <a:solidFill>
+                  <a:srgbClr val="FDBA74"/>
                 </a:solidFill>
                 <a:latin typeface="Arial"/>
                 <a:ea typeface="Arial"/>
@@ -24209,9 +22318,9 @@
           </a:lstStyle>
           <a:p xmlns:a="http://schemas.openxmlformats.org/drawingml/2006/main">
             <a:pPr>
-              <a:defRPr sz="1275" b="0">
-                <a:solidFill>
-                  <a:srgbClr val="C8D3E6"/>
+              <a:defRPr sz="1650" b="0">
+                <a:solidFill>
+                  <a:srgbClr val="FDBA74"/>
                 </a:solidFill>
                 <a:latin typeface="Arial"/>
                 <a:ea typeface="Arial"/>
@@ -24219,15 +22328,15 @@
               </a:defRPr>
             </a:pPr>
             <a:r>
-              <a:rPr sz="1275" b="0">
-                <a:solidFill>
-                  <a:srgbClr val="C8D3E6"/>
+              <a:rPr sz="1650" b="0">
+                <a:solidFill>
+                  <a:srgbClr val="FDBA74"/>
                 </a:solidFill>
                 <a:latin typeface="Arial"/>
                 <a:ea typeface="Arial"/>
                 <a:cs typeface="Arial"/>
               </a:rPr>
-              <a:t>Votoni, shpjegoni arsyen dhe pastaj kaloni te slajdi vijues</a:t>
+              <a:t>Votoni dhe diskutoni arsyen përpara përgjigjes.</a:t>
             </a:r>
           </a:p>
         </p:txBody>
@@ -24235,7 +22344,7 @@
     </p:spTree>
     <p:extLst>
       <p:ext uri="{BB962C8B-B14F-4D97-AF65-F5344CB8AC3E}">
-        <p14:creationId xmlns:p14="http://schemas.microsoft.com/office/powerpoint/2010/main" val="1163149145"/>
+        <p14:creationId xmlns:p14="http://schemas.microsoft.com/office/powerpoint/2010/main" val="1298616953"/>
       </p:ext>
     </p:extLst>
   </p:cSld>
@@ -24266,7 +22375,7 @@
           <p:cNvPr id="13" name="">
             <a:extLst xmlns:a="http://schemas.openxmlformats.org/drawingml/2006/main">
               <a:ext uri="{FF2B5EF4-FFF2-40B4-BE49-F238E27FC236}">
-                <a16:creationId xmlns:a16="http://schemas.microsoft.com/office/drawing/2014/main" id="{B2CDC65F-7ACA-4011-9F05-290ACD8C902D}"/>
+                <a16:creationId xmlns:a16="http://schemas.microsoft.com/office/drawing/2014/main" id="{2C6BADC4-2443-48F5-9C56-69A9D612FB36}"/>
               </a:ext>
             </a:extLst>
           </p:cNvPr>
@@ -24424,7 +22533,7 @@
           <p:cNvPr id="2" name="">
             <a:extLst xmlns:a="http://schemas.openxmlformats.org/drawingml/2006/main">
               <a:ext uri="{FF2B5EF4-FFF2-40B4-BE49-F238E27FC236}">
-                <a16:creationId xmlns:a16="http://schemas.microsoft.com/office/drawing/2014/main" id="{CF8D86F5-3B84-4DA0-BB87-0599F2A35383}"/>
+                <a16:creationId xmlns:a16="http://schemas.microsoft.com/office/drawing/2014/main" id="{C807CB6C-A35A-4E22-9580-48F5C1E75EBF}"/>
               </a:ext>
             </a:extLst>
           </p:cNvPr>
@@ -24582,7 +22691,7 @@
           <p:cNvPr id="3" name="">
             <a:extLst xmlns:a="http://schemas.openxmlformats.org/drawingml/2006/main">
               <a:ext uri="{FF2B5EF4-FFF2-40B4-BE49-F238E27FC236}">
-                <a16:creationId xmlns:a16="http://schemas.microsoft.com/office/drawing/2014/main" id="{E3F6C1D0-DAC5-456A-84D3-A8F2DB323228}"/>
+                <a16:creationId xmlns:a16="http://schemas.microsoft.com/office/drawing/2014/main" id="{3010B56C-B832-42B5-B58C-BA4780947655}"/>
               </a:ext>
             </a:extLst>
           </p:cNvPr>
@@ -24740,7 +22849,7 @@
           <p:cNvPr id="4" name="">
             <a:extLst xmlns:a="http://schemas.openxmlformats.org/drawingml/2006/main">
               <a:ext uri="{FF2B5EF4-FFF2-40B4-BE49-F238E27FC236}">
-                <a16:creationId xmlns:a16="http://schemas.microsoft.com/office/drawing/2014/main" id="{88241A2B-A0AB-485D-B5FA-24A403E4F741}"/>
+                <a16:creationId xmlns:a16="http://schemas.microsoft.com/office/drawing/2014/main" id="{3D56956A-DF1E-4E87-9AA4-8CA0CF9BAB39}"/>
               </a:ext>
             </a:extLst>
           </p:cNvPr>
@@ -24750,7 +22859,7 @@
           <p:nvPr/>
         </p:nvPicPr>
         <p:blipFill>
-          <a:blip xmlns:r="http://schemas.openxmlformats.org/officeDocument/2006/relationships" xmlns:a="http://schemas.openxmlformats.org/drawingml/2006/main" r:embed="R3551ed630aa94564"/>
+          <a:blip xmlns:r="http://schemas.openxmlformats.org/officeDocument/2006/relationships" xmlns:a="http://schemas.openxmlformats.org/drawingml/2006/main" r:embed="R52ca7d475d1d43bb"/>
           <a:stretch xmlns:a="http://schemas.openxmlformats.org/drawingml/2006/main"/>
         </p:blipFill>
         <p:spPr>
@@ -24768,7 +22877,7 @@
           <p:cNvPr id="5" name="">
             <a:extLst xmlns:a="http://schemas.openxmlformats.org/drawingml/2006/main">
               <a:ext uri="{FF2B5EF4-FFF2-40B4-BE49-F238E27FC236}">
-                <a16:creationId xmlns:a16="http://schemas.microsoft.com/office/drawing/2014/main" id="{EEB54A54-ED0D-4D8B-BEDB-4EA9D123471A}"/>
+                <a16:creationId xmlns:a16="http://schemas.microsoft.com/office/drawing/2014/main" id="{3D5942F2-E328-4D12-AC59-2BB45AB69172}"/>
               </a:ext>
             </a:extLst>
           </p:cNvPr>
@@ -24926,7 +23035,7 @@
           <p:cNvPr id="6" name="">
             <a:extLst xmlns:a="http://schemas.openxmlformats.org/drawingml/2006/main">
               <a:ext uri="{FF2B5EF4-FFF2-40B4-BE49-F238E27FC236}">
-                <a16:creationId xmlns:a16="http://schemas.microsoft.com/office/drawing/2014/main" id="{333209B9-1C8F-455F-A85C-F086740A5410}"/>
+                <a16:creationId xmlns:a16="http://schemas.microsoft.com/office/drawing/2014/main" id="{E78B8A7E-3065-4790-A7A1-82771A40D2E4}"/>
               </a:ext>
             </a:extLst>
           </p:cNvPr>
@@ -25084,7 +23193,7 @@
           <p:cNvPr id="7" name="">
             <a:extLst xmlns:a="http://schemas.openxmlformats.org/drawingml/2006/main">
               <a:ext uri="{FF2B5EF4-FFF2-40B4-BE49-F238E27FC236}">
-                <a16:creationId xmlns:a16="http://schemas.microsoft.com/office/drawing/2014/main" id="{56092E0C-0C20-4075-BFE9-C3D96D9E8F4E}"/>
+                <a16:creationId xmlns:a16="http://schemas.microsoft.com/office/drawing/2014/main" id="{F2767061-5E5C-481D-9CD5-5B8ED684E354}"/>
               </a:ext>
             </a:extLst>
           </p:cNvPr>
@@ -25094,7 +23203,7 @@
           <p:nvPr/>
         </p:nvPicPr>
         <p:blipFill>
-          <a:blip xmlns:r="http://schemas.openxmlformats.org/officeDocument/2006/relationships" xmlns:a="http://schemas.openxmlformats.org/drawingml/2006/main" r:embed="R7d91dd60087a4e57"/>
+          <a:blip xmlns:r="http://schemas.openxmlformats.org/officeDocument/2006/relationships" xmlns:a="http://schemas.openxmlformats.org/drawingml/2006/main" r:embed="Rd0bbf56e801c45f5"/>
           <a:stretch xmlns:a="http://schemas.openxmlformats.org/drawingml/2006/main"/>
         </p:blipFill>
         <p:spPr>
@@ -25112,7 +23221,7 @@
           <p:cNvPr id="8" name="">
             <a:extLst xmlns:a="http://schemas.openxmlformats.org/drawingml/2006/main">
               <a:ext uri="{FF2B5EF4-FFF2-40B4-BE49-F238E27FC236}">
-                <a16:creationId xmlns:a16="http://schemas.microsoft.com/office/drawing/2014/main" id="{4F5CE6DA-625A-4CD3-BC81-11DEB4815745}"/>
+                <a16:creationId xmlns:a16="http://schemas.microsoft.com/office/drawing/2014/main" id="{8604B460-8293-4E37-BDF2-57663DD117FD}"/>
               </a:ext>
             </a:extLst>
           </p:cNvPr>
@@ -25270,7 +23379,7 @@
           <p:cNvPr id="9" name="">
             <a:extLst xmlns:a="http://schemas.openxmlformats.org/drawingml/2006/main">
               <a:ext uri="{FF2B5EF4-FFF2-40B4-BE49-F238E27FC236}">
-                <a16:creationId xmlns:a16="http://schemas.microsoft.com/office/drawing/2014/main" id="{BB0A75F7-FC98-4703-8357-CBB0EFB15F40}"/>
+                <a16:creationId xmlns:a16="http://schemas.microsoft.com/office/drawing/2014/main" id="{9D54F2A3-F34F-4989-A397-564E9C4E3472}"/>
               </a:ext>
             </a:extLst>
           </p:cNvPr>
@@ -25428,7 +23537,7 @@
           <p:cNvPr id="10" name="">
             <a:extLst xmlns:a="http://schemas.openxmlformats.org/drawingml/2006/main">
               <a:ext uri="{FF2B5EF4-FFF2-40B4-BE49-F238E27FC236}">
-                <a16:creationId xmlns:a16="http://schemas.microsoft.com/office/drawing/2014/main" id="{826AF48F-4096-458A-B221-BF9B5CF7EFDF}"/>
+                <a16:creationId xmlns:a16="http://schemas.microsoft.com/office/drawing/2014/main" id="{A4442072-A7C1-473A-94E2-ED28E9489061}"/>
               </a:ext>
             </a:extLst>
           </p:cNvPr>
@@ -25614,7 +23723,7 @@
           <p:cNvPr id="11" name="">
             <a:extLst xmlns:a="http://schemas.openxmlformats.org/drawingml/2006/main">
               <a:ext uri="{FF2B5EF4-FFF2-40B4-BE49-F238E27FC236}">
-                <a16:creationId xmlns:a16="http://schemas.microsoft.com/office/drawing/2014/main" id="{EEC0C84D-2EE5-42A4-BF77-C9410ED56379}"/>
+                <a16:creationId xmlns:a16="http://schemas.microsoft.com/office/drawing/2014/main" id="{EB5F8053-0EC7-4B79-AF59-C4358F7A7E85}"/>
               </a:ext>
             </a:extLst>
           </p:cNvPr>
@@ -25772,7 +23881,7 @@
           <p:cNvPr id="12" name="">
             <a:extLst xmlns:a="http://schemas.openxmlformats.org/drawingml/2006/main">
               <a:ext uri="{FF2B5EF4-FFF2-40B4-BE49-F238E27FC236}">
-                <a16:creationId xmlns:a16="http://schemas.microsoft.com/office/drawing/2014/main" id="{095D4AE2-A946-41DB-AFA0-42659756AFEC}"/>
+                <a16:creationId xmlns:a16="http://schemas.microsoft.com/office/drawing/2014/main" id="{5308CB70-6B68-4CB3-ACB8-28B5B054410B}"/>
               </a:ext>
             </a:extLst>
           </p:cNvPr>
@@ -25928,7 +24037,7 @@
     </p:spTree>
     <p:extLst>
       <p:ext uri="{BB962C8B-B14F-4D97-AF65-F5344CB8AC3E}">
-        <p14:creationId xmlns:p14="http://schemas.microsoft.com/office/powerpoint/2010/main" val="40241806"/>
+        <p14:creationId xmlns:p14="http://schemas.microsoft.com/office/powerpoint/2010/main" val="1920255052"/>
       </p:ext>
     </p:extLst>
   </p:cSld>
@@ -25959,7 +24068,7 @@
           <p:cNvPr id="11" name="">
             <a:extLst xmlns:a="http://schemas.openxmlformats.org/drawingml/2006/main">
               <a:ext uri="{FF2B5EF4-FFF2-40B4-BE49-F238E27FC236}">
-                <a16:creationId xmlns:a16="http://schemas.microsoft.com/office/drawing/2014/main" id="{200BDF9F-68FB-4F0C-AEEE-D5F201A55411}"/>
+                <a16:creationId xmlns:a16="http://schemas.microsoft.com/office/drawing/2014/main" id="{92393EA3-6BDA-46B4-898E-760601E6A3B7}"/>
               </a:ext>
             </a:extLst>
           </p:cNvPr>
@@ -26117,7 +24226,7 @@
           <p:cNvPr id="2" name="">
             <a:extLst xmlns:a="http://schemas.openxmlformats.org/drawingml/2006/main">
               <a:ext uri="{FF2B5EF4-FFF2-40B4-BE49-F238E27FC236}">
-                <a16:creationId xmlns:a16="http://schemas.microsoft.com/office/drawing/2014/main" id="{7C5E5922-CDCF-4AC6-83A6-6ADE24A56CC4}"/>
+                <a16:creationId xmlns:a16="http://schemas.microsoft.com/office/drawing/2014/main" id="{EFAEE19C-96ED-49EB-A2DA-32B6BE936D22}"/>
               </a:ext>
             </a:extLst>
           </p:cNvPr>
@@ -26275,7 +24384,7 @@
           <p:cNvPr id="3" name="">
             <a:extLst xmlns:a="http://schemas.openxmlformats.org/drawingml/2006/main">
               <a:ext uri="{FF2B5EF4-FFF2-40B4-BE49-F238E27FC236}">
-                <a16:creationId xmlns:a16="http://schemas.microsoft.com/office/drawing/2014/main" id="{E531BDAF-63FA-474F-AB3F-DC8F9BB630DF}"/>
+                <a16:creationId xmlns:a16="http://schemas.microsoft.com/office/drawing/2014/main" id="{1C724A41-E5CA-4313-B334-49A7C6510426}"/>
               </a:ext>
             </a:extLst>
           </p:cNvPr>
@@ -26433,7 +24542,7 @@
           <p:cNvPr id="4" name="">
             <a:extLst xmlns:a="http://schemas.openxmlformats.org/drawingml/2006/main">
               <a:ext uri="{FF2B5EF4-FFF2-40B4-BE49-F238E27FC236}">
-                <a16:creationId xmlns:a16="http://schemas.microsoft.com/office/drawing/2014/main" id="{ECBA563F-498A-4E03-A00B-60ED403EEFCC}"/>
+                <a16:creationId xmlns:a16="http://schemas.microsoft.com/office/drawing/2014/main" id="{3C631BEE-EBF2-4E49-85D0-00C22F52AD54}"/>
               </a:ext>
             </a:extLst>
           </p:cNvPr>
@@ -26591,7 +24700,7 @@
           <p:cNvPr id="5" name="">
             <a:extLst xmlns:a="http://schemas.openxmlformats.org/drawingml/2006/main">
               <a:ext uri="{FF2B5EF4-FFF2-40B4-BE49-F238E27FC236}">
-                <a16:creationId xmlns:a16="http://schemas.microsoft.com/office/drawing/2014/main" id="{3A301333-CDD6-4F07-A7E9-778BB2BEC701}"/>
+                <a16:creationId xmlns:a16="http://schemas.microsoft.com/office/drawing/2014/main" id="{1D60F6D6-01EB-4616-9BF6-68895B565B43}"/>
               </a:ext>
             </a:extLst>
           </p:cNvPr>
@@ -26749,7 +24858,7 @@
           <p:cNvPr id="6" name="">
             <a:extLst xmlns:a="http://schemas.openxmlformats.org/drawingml/2006/main">
               <a:ext uri="{FF2B5EF4-FFF2-40B4-BE49-F238E27FC236}">
-                <a16:creationId xmlns:a16="http://schemas.microsoft.com/office/drawing/2014/main" id="{37B5F8FD-0F11-4902-9A2D-C8FAEAF492DD}"/>
+                <a16:creationId xmlns:a16="http://schemas.microsoft.com/office/drawing/2014/main" id="{3EC936F6-B040-4FEF-A717-5830876E83C0}"/>
               </a:ext>
             </a:extLst>
           </p:cNvPr>
@@ -26907,7 +25016,7 @@
           <p:cNvPr id="7" name="">
             <a:extLst xmlns:a="http://schemas.openxmlformats.org/drawingml/2006/main">
               <a:ext uri="{FF2B5EF4-FFF2-40B4-BE49-F238E27FC236}">
-                <a16:creationId xmlns:a16="http://schemas.microsoft.com/office/drawing/2014/main" id="{8071B7A1-491F-40CD-9F68-C46A0D47D0DC}"/>
+                <a16:creationId xmlns:a16="http://schemas.microsoft.com/office/drawing/2014/main" id="{0ABF312A-DFE0-49B0-BF04-9B82C77CF438}"/>
               </a:ext>
             </a:extLst>
           </p:cNvPr>
@@ -27065,7 +25174,7 @@
           <p:cNvPr id="8" name="">
             <a:extLst xmlns:a="http://schemas.openxmlformats.org/drawingml/2006/main">
               <a:ext uri="{FF2B5EF4-FFF2-40B4-BE49-F238E27FC236}">
-                <a16:creationId xmlns:a16="http://schemas.microsoft.com/office/drawing/2014/main" id="{656AF0AF-3C49-4315-AE7E-4511CEEE704A}"/>
+                <a16:creationId xmlns:a16="http://schemas.microsoft.com/office/drawing/2014/main" id="{2EF03191-FCA2-4FAB-8645-DDB191F45D0D}"/>
               </a:ext>
             </a:extLst>
           </p:cNvPr>
@@ -27223,7 +25332,7 @@
           <p:cNvPr id="9" name="">
             <a:extLst xmlns:a="http://schemas.openxmlformats.org/drawingml/2006/main">
               <a:ext uri="{FF2B5EF4-FFF2-40B4-BE49-F238E27FC236}">
-                <a16:creationId xmlns:a16="http://schemas.microsoft.com/office/drawing/2014/main" id="{9A66D640-3C3F-4B0B-9003-AB593FD670DE}"/>
+                <a16:creationId xmlns:a16="http://schemas.microsoft.com/office/drawing/2014/main" id="{D616CB1C-B17C-450F-96AA-62540CA8483B}"/>
               </a:ext>
             </a:extLst>
           </p:cNvPr>
@@ -27409,7 +25518,7 @@
           <p:cNvPr id="10" name="">
             <a:extLst xmlns:a="http://schemas.openxmlformats.org/drawingml/2006/main">
               <a:ext uri="{FF2B5EF4-FFF2-40B4-BE49-F238E27FC236}">
-                <a16:creationId xmlns:a16="http://schemas.microsoft.com/office/drawing/2014/main" id="{332F2F52-0D0F-47A6-8A66-ADE1624BB864}"/>
+                <a16:creationId xmlns:a16="http://schemas.microsoft.com/office/drawing/2014/main" id="{683AD0E5-0107-468E-A88E-78A0206B1074}"/>
               </a:ext>
             </a:extLst>
           </p:cNvPr>
@@ -27565,7 +25674,7 @@
     </p:spTree>
     <p:extLst>
       <p:ext uri="{BB962C8B-B14F-4D97-AF65-F5344CB8AC3E}">
-        <p14:creationId xmlns:p14="http://schemas.microsoft.com/office/powerpoint/2010/main" val="1633491276"/>
+        <p14:creationId xmlns:p14="http://schemas.microsoft.com/office/powerpoint/2010/main" val="1525094091"/>
       </p:ext>
     </p:extLst>
   </p:cSld>
@@ -27596,7 +25705,7 @@
           <p:cNvPr id="13" name="">
             <a:extLst xmlns:a="http://schemas.openxmlformats.org/drawingml/2006/main">
               <a:ext uri="{FF2B5EF4-FFF2-40B4-BE49-F238E27FC236}">
-                <a16:creationId xmlns:a16="http://schemas.microsoft.com/office/drawing/2014/main" id="{89BEDC3D-2177-42A2-AB75-CB5E08DED673}"/>
+                <a16:creationId xmlns:a16="http://schemas.microsoft.com/office/drawing/2014/main" id="{9CC35609-36C8-450B-99F5-4B654BD26020}"/>
               </a:ext>
             </a:extLst>
           </p:cNvPr>
@@ -27754,7 +25863,7 @@
           <p:cNvPr id="2" name="">
             <a:extLst xmlns:a="http://schemas.openxmlformats.org/drawingml/2006/main">
               <a:ext uri="{FF2B5EF4-FFF2-40B4-BE49-F238E27FC236}">
-                <a16:creationId xmlns:a16="http://schemas.microsoft.com/office/drawing/2014/main" id="{F75A3537-8FDF-44F6-9858-C4B15EF8386A}"/>
+                <a16:creationId xmlns:a16="http://schemas.microsoft.com/office/drawing/2014/main" id="{0FD859BF-AE0B-4D64-8E2D-1FA3A49DDAD4}"/>
               </a:ext>
             </a:extLst>
           </p:cNvPr>
@@ -27912,7 +26021,7 @@
           <p:cNvPr id="3" name="">
             <a:extLst xmlns:a="http://schemas.openxmlformats.org/drawingml/2006/main">
               <a:ext uri="{FF2B5EF4-FFF2-40B4-BE49-F238E27FC236}">
-                <a16:creationId xmlns:a16="http://schemas.microsoft.com/office/drawing/2014/main" id="{2FBF5D04-70D2-44BE-A1D1-136107975AFE}"/>
+                <a16:creationId xmlns:a16="http://schemas.microsoft.com/office/drawing/2014/main" id="{624D6AFE-FB30-4B2B-80C4-09910C037C73}"/>
               </a:ext>
             </a:extLst>
           </p:cNvPr>
@@ -28070,7 +26179,7 @@
           <p:cNvPr id="4" name="">
             <a:extLst xmlns:a="http://schemas.openxmlformats.org/drawingml/2006/main">
               <a:ext uri="{FF2B5EF4-FFF2-40B4-BE49-F238E27FC236}">
-                <a16:creationId xmlns:a16="http://schemas.microsoft.com/office/drawing/2014/main" id="{24493716-6F05-4ADD-A305-DFA7DE10B968}"/>
+                <a16:creationId xmlns:a16="http://schemas.microsoft.com/office/drawing/2014/main" id="{F5AFABBC-6095-44F2-90F7-FD9B19373D77}"/>
               </a:ext>
             </a:extLst>
           </p:cNvPr>
@@ -28080,7 +26189,7 @@
           <p:nvPr/>
         </p:nvPicPr>
         <p:blipFill>
-          <a:blip xmlns:r="http://schemas.openxmlformats.org/officeDocument/2006/relationships" xmlns:a="http://schemas.openxmlformats.org/drawingml/2006/main" r:embed="Rea3c801441e9433a"/>
+          <a:blip xmlns:r="http://schemas.openxmlformats.org/officeDocument/2006/relationships" xmlns:a="http://schemas.openxmlformats.org/drawingml/2006/main" r:embed="Rfd554550cdeb4fe6"/>
           <a:stretch xmlns:a="http://schemas.openxmlformats.org/drawingml/2006/main"/>
         </p:blipFill>
         <p:spPr>
@@ -28098,7 +26207,7 @@
           <p:cNvPr id="5" name="">
             <a:extLst xmlns:a="http://schemas.openxmlformats.org/drawingml/2006/main">
               <a:ext uri="{FF2B5EF4-FFF2-40B4-BE49-F238E27FC236}">
-                <a16:creationId xmlns:a16="http://schemas.microsoft.com/office/drawing/2014/main" id="{418CDF5D-F619-49BF-ACAA-256CDD0CDABB}"/>
+                <a16:creationId xmlns:a16="http://schemas.microsoft.com/office/drawing/2014/main" id="{03D21216-04F3-44BC-B9EF-7F022512F1D4}"/>
               </a:ext>
             </a:extLst>
           </p:cNvPr>
@@ -28256,7 +26365,7 @@
           <p:cNvPr id="6" name="">
             <a:extLst xmlns:a="http://schemas.openxmlformats.org/drawingml/2006/main">
               <a:ext uri="{FF2B5EF4-FFF2-40B4-BE49-F238E27FC236}">
-                <a16:creationId xmlns:a16="http://schemas.microsoft.com/office/drawing/2014/main" id="{317B665C-F4F3-46C7-8C1A-7D6920C97D7A}"/>
+                <a16:creationId xmlns:a16="http://schemas.microsoft.com/office/drawing/2014/main" id="{4EA1A6C0-B32C-4BD9-974E-6E9CD14BA001}"/>
               </a:ext>
             </a:extLst>
           </p:cNvPr>
@@ -28414,7 +26523,7 @@
           <p:cNvPr id="7" name="">
             <a:extLst xmlns:a="http://schemas.openxmlformats.org/drawingml/2006/main">
               <a:ext uri="{FF2B5EF4-FFF2-40B4-BE49-F238E27FC236}">
-                <a16:creationId xmlns:a16="http://schemas.microsoft.com/office/drawing/2014/main" id="{C7728334-9611-4913-B970-3AEE4D269410}"/>
+                <a16:creationId xmlns:a16="http://schemas.microsoft.com/office/drawing/2014/main" id="{AB3DB314-2447-4729-95F3-79DC2B083A3E}"/>
               </a:ext>
             </a:extLst>
           </p:cNvPr>
@@ -28424,7 +26533,7 @@
           <p:nvPr/>
         </p:nvPicPr>
         <p:blipFill>
-          <a:blip xmlns:r="http://schemas.openxmlformats.org/officeDocument/2006/relationships" xmlns:a="http://schemas.openxmlformats.org/drawingml/2006/main" r:embed="R9658980daf314548"/>
+          <a:blip xmlns:r="http://schemas.openxmlformats.org/officeDocument/2006/relationships" xmlns:a="http://schemas.openxmlformats.org/drawingml/2006/main" r:embed="R43746576a41f472c"/>
           <a:stretch xmlns:a="http://schemas.openxmlformats.org/drawingml/2006/main"/>
         </p:blipFill>
         <p:spPr>
@@ -28442,7 +26551,7 @@
           <p:cNvPr id="8" name="">
             <a:extLst xmlns:a="http://schemas.openxmlformats.org/drawingml/2006/main">
               <a:ext uri="{FF2B5EF4-FFF2-40B4-BE49-F238E27FC236}">
-                <a16:creationId xmlns:a16="http://schemas.microsoft.com/office/drawing/2014/main" id="{3038C5D2-A879-4DA4-9FEB-D7E2EC6A9888}"/>
+                <a16:creationId xmlns:a16="http://schemas.microsoft.com/office/drawing/2014/main" id="{F5D2477C-8922-4099-9DD6-C83A5966873E}"/>
               </a:ext>
             </a:extLst>
           </p:cNvPr>
@@ -28600,7 +26709,7 @@
           <p:cNvPr id="9" name="">
             <a:extLst xmlns:a="http://schemas.openxmlformats.org/drawingml/2006/main">
               <a:ext uri="{FF2B5EF4-FFF2-40B4-BE49-F238E27FC236}">
-                <a16:creationId xmlns:a16="http://schemas.microsoft.com/office/drawing/2014/main" id="{399EDF1D-5611-4C00-A36A-43BAA5B751CA}"/>
+                <a16:creationId xmlns:a16="http://schemas.microsoft.com/office/drawing/2014/main" id="{639809A9-39D5-482D-A14D-88E9C4DA5076}"/>
               </a:ext>
             </a:extLst>
           </p:cNvPr>
@@ -28758,7 +26867,7 @@
           <p:cNvPr id="10" name="">
             <a:extLst xmlns:a="http://schemas.openxmlformats.org/drawingml/2006/main">
               <a:ext uri="{FF2B5EF4-FFF2-40B4-BE49-F238E27FC236}">
-                <a16:creationId xmlns:a16="http://schemas.microsoft.com/office/drawing/2014/main" id="{9239747B-30AC-491F-9580-9CD0F12EF3F8}"/>
+                <a16:creationId xmlns:a16="http://schemas.microsoft.com/office/drawing/2014/main" id="{59EA859D-56C5-4FC9-8210-5618FAE37011}"/>
               </a:ext>
             </a:extLst>
           </p:cNvPr>
@@ -28944,7 +27053,7 @@
           <p:cNvPr id="11" name="">
             <a:extLst xmlns:a="http://schemas.openxmlformats.org/drawingml/2006/main">
               <a:ext uri="{FF2B5EF4-FFF2-40B4-BE49-F238E27FC236}">
-                <a16:creationId xmlns:a16="http://schemas.microsoft.com/office/drawing/2014/main" id="{EC3CE22B-780D-460B-87B1-DD5FF0243A36}"/>
+                <a16:creationId xmlns:a16="http://schemas.microsoft.com/office/drawing/2014/main" id="{78D05616-B71E-45CE-8E01-4EF8A678621E}"/>
               </a:ext>
             </a:extLst>
           </p:cNvPr>
@@ -29102,7 +27211,7 @@
           <p:cNvPr id="12" name="">
             <a:extLst xmlns:a="http://schemas.openxmlformats.org/drawingml/2006/main">
               <a:ext uri="{FF2B5EF4-FFF2-40B4-BE49-F238E27FC236}">
-                <a16:creationId xmlns:a16="http://schemas.microsoft.com/office/drawing/2014/main" id="{903D6B3D-7339-493D-AA23-DCB242E0199F}"/>
+                <a16:creationId xmlns:a16="http://schemas.microsoft.com/office/drawing/2014/main" id="{72507DA1-8589-4CF4-9FAA-E8F5ECCFD4F1}"/>
               </a:ext>
             </a:extLst>
           </p:cNvPr>
@@ -29259,7 +27368,7 @@
     </p:spTree>
     <p:extLst>
       <p:ext uri="{BB962C8B-B14F-4D97-AF65-F5344CB8AC3E}">
-        <p14:creationId xmlns:p14="http://schemas.microsoft.com/office/powerpoint/2010/main" val="1970757419"/>
+        <p14:creationId xmlns:p14="http://schemas.microsoft.com/office/powerpoint/2010/main" val="972245794"/>
       </p:ext>
     </p:extLst>
   </p:cSld>
@@ -29287,10 +27396,10 @@
       </p:grpSpPr>
       <p:sp>
         <p:nvSpPr>
-          <p:cNvPr id="14" name="">
+          <p:cNvPr id="10" name="">
             <a:extLst xmlns:a="http://schemas.openxmlformats.org/drawingml/2006/main">
               <a:ext uri="{FF2B5EF4-FFF2-40B4-BE49-F238E27FC236}">
-                <a16:creationId xmlns:a16="http://schemas.microsoft.com/office/drawing/2014/main" id="{AEFB64BE-6A61-4558-95BB-509486863BCF}"/>
+                <a16:creationId xmlns:a16="http://schemas.microsoft.com/office/drawing/2014/main" id="{19017C77-7AEA-49A5-9F4E-B94D817325D2}"/>
               </a:ext>
             </a:extLst>
           </p:cNvPr>
@@ -29448,7 +27557,7 @@
           <p:cNvPr id="2" name="">
             <a:extLst xmlns:a="http://schemas.openxmlformats.org/drawingml/2006/main">
               <a:ext uri="{FF2B5EF4-FFF2-40B4-BE49-F238E27FC236}">
-                <a16:creationId xmlns:a16="http://schemas.microsoft.com/office/drawing/2014/main" id="{ED06F4F1-E41A-4B3A-92E7-64F96964DB26}"/>
+                <a16:creationId xmlns:a16="http://schemas.microsoft.com/office/drawing/2014/main" id="{857CA627-DC3F-49FA-B468-5B2FF7504F2D}"/>
               </a:ext>
             </a:extLst>
           </p:cNvPr>
@@ -29606,7 +27715,7 @@
           <p:cNvPr id="3" name="">
             <a:extLst xmlns:a="http://schemas.openxmlformats.org/drawingml/2006/main">
               <a:ext uri="{FF2B5EF4-FFF2-40B4-BE49-F238E27FC236}">
-                <a16:creationId xmlns:a16="http://schemas.microsoft.com/office/drawing/2014/main" id="{46C4ABD3-9F79-4BD3-82ED-C7321FE9D575}"/>
+                <a16:creationId xmlns:a16="http://schemas.microsoft.com/office/drawing/2014/main" id="{E4DA2561-4ECD-49A4-9794-7A1B85A2E463}"/>
               </a:ext>
             </a:extLst>
           </p:cNvPr>
@@ -29759,40 +27868,12 @@
           </a:p>
         </p:txBody>
       </p:sp>
-      <p:pic>
-        <p:nvPicPr>
+      <p:sp>
+        <p:nvSpPr>
           <p:cNvPr id="4" name="">
             <a:extLst xmlns:a="http://schemas.openxmlformats.org/drawingml/2006/main">
               <a:ext uri="{FF2B5EF4-FFF2-40B4-BE49-F238E27FC236}">
-                <a16:creationId xmlns:a16="http://schemas.microsoft.com/office/drawing/2014/main" id="{95D3FF6B-EF3B-4B75-B3F9-7F05366D23D1}"/>
-              </a:ext>
-            </a:extLst>
-          </p:cNvPr>
-          <p:cNvPicPr>
-            <a:picLocks xmlns:a="http://schemas.openxmlformats.org/drawingml/2006/main" noChangeAspect="1"/>
-          </p:cNvPicPr>
-          <p:nvPr/>
-        </p:nvPicPr>
-        <p:blipFill>
-          <a:blip xmlns:r="http://schemas.openxmlformats.org/officeDocument/2006/relationships" xmlns:a="http://schemas.openxmlformats.org/drawingml/2006/main" r:embed="Rf9030b1b56674c9f"/>
-          <a:stretch xmlns:a="http://schemas.openxmlformats.org/drawingml/2006/main"/>
-        </p:blipFill>
-        <p:spPr>
-          <a:xfrm xmlns:a="http://schemas.openxmlformats.org/drawingml/2006/main">
-            <a:off x="609600" y="1952625"/>
-            <a:ext cx="457200" cy="457200"/>
-          </a:xfrm>
-          <a:prstGeom xmlns:a="http://schemas.openxmlformats.org/drawingml/2006/main" prst="rect">
-            <a:avLst/>
-          </a:prstGeom>
-        </p:spPr>
-      </p:pic>
-      <p:sp>
-        <p:nvSpPr>
-          <p:cNvPr id="5" name="">
-            <a:extLst xmlns:a="http://schemas.openxmlformats.org/drawingml/2006/main">
-              <a:ext uri="{FF2B5EF4-FFF2-40B4-BE49-F238E27FC236}">
-                <a16:creationId xmlns:a16="http://schemas.microsoft.com/office/drawing/2014/main" id="{B473D521-9F45-4720-A071-E706F5C1BD1A}"/>
+                <a16:creationId xmlns:a16="http://schemas.microsoft.com/office/drawing/2014/main" id="{92CA9CDC-4BC5-423E-823C-E79A4367E03B}"/>
               </a:ext>
             </a:extLst>
           </p:cNvPr>
@@ -29803,668 +27884,8 @@
         </p:nvSpPr>
         <p:spPr>
           <a:xfrm xmlns:a="http://schemas.openxmlformats.org/drawingml/2006/main">
-            <a:off x="609600" y="2667000"/>
-            <a:ext cx="5295900" cy="495300"/>
-          </a:xfrm>
-          <a:prstGeom xmlns:a="http://schemas.openxmlformats.org/drawingml/2006/main" prst="rect">
-            <a:avLst/>
-          </a:prstGeom>
-          <a:noFill xmlns:a="http://schemas.openxmlformats.org/drawingml/2006/main"/>
-          <a:ln xmlns:a="http://schemas.openxmlformats.org/drawingml/2006/main" w="0">
-            <a:noFill/>
-          </a:ln>
-        </p:spPr>
-        <p:txBody>
-          <a:bodyPr xmlns:a="http://schemas.openxmlformats.org/drawingml/2006/main">
-            <a:noAutofit/>
-          </a:bodyPr>
-          <a:lstStyle xmlns:a="http://schemas.openxmlformats.org/drawingml/2006/main">
-            <a:defPPr>
-              <a:defRPr sz="2025" b="1">
-                <a:solidFill>
-                  <a:srgbClr val="FFFFFF"/>
-                </a:solidFill>
-                <a:latin typeface="Arial"/>
-                <a:ea typeface="Arial"/>
-                <a:cs typeface="Arial"/>
-              </a:defRPr>
-            </a:defPPr>
-            <a:lvl1pPr>
-              <a:defRPr sz="2025" b="1">
-                <a:solidFill>
-                  <a:srgbClr val="FFFFFF"/>
-                </a:solidFill>
-                <a:latin typeface="Arial"/>
-                <a:ea typeface="Arial"/>
-                <a:cs typeface="Arial"/>
-              </a:defRPr>
-            </a:lvl1pPr>
-            <a:lvl2pPr>
-              <a:defRPr sz="2025" b="1">
-                <a:solidFill>
-                  <a:srgbClr val="FFFFFF"/>
-                </a:solidFill>
-                <a:latin typeface="Arial"/>
-                <a:ea typeface="Arial"/>
-                <a:cs typeface="Arial"/>
-              </a:defRPr>
-            </a:lvl2pPr>
-            <a:lvl3pPr>
-              <a:defRPr sz="2025" b="1">
-                <a:solidFill>
-                  <a:srgbClr val="FFFFFF"/>
-                </a:solidFill>
-                <a:latin typeface="Arial"/>
-                <a:ea typeface="Arial"/>
-                <a:cs typeface="Arial"/>
-              </a:defRPr>
-            </a:lvl3pPr>
-            <a:lvl4pPr>
-              <a:defRPr sz="2025" b="1">
-                <a:solidFill>
-                  <a:srgbClr val="FFFFFF"/>
-                </a:solidFill>
-                <a:latin typeface="Arial"/>
-                <a:ea typeface="Arial"/>
-                <a:cs typeface="Arial"/>
-              </a:defRPr>
-            </a:lvl4pPr>
-            <a:lvl5pPr>
-              <a:defRPr sz="2025" b="1">
-                <a:solidFill>
-                  <a:srgbClr val="FFFFFF"/>
-                </a:solidFill>
-                <a:latin typeface="Arial"/>
-                <a:ea typeface="Arial"/>
-                <a:cs typeface="Arial"/>
-              </a:defRPr>
-            </a:lvl5pPr>
-            <a:lvl6pPr>
-              <a:defRPr sz="2025" b="1">
-                <a:solidFill>
-                  <a:srgbClr val="FFFFFF"/>
-                </a:solidFill>
-                <a:latin typeface="Arial"/>
-                <a:ea typeface="Arial"/>
-                <a:cs typeface="Arial"/>
-              </a:defRPr>
-            </a:lvl6pPr>
-            <a:lvl7pPr>
-              <a:defRPr sz="2025" b="1">
-                <a:solidFill>
-                  <a:srgbClr val="FFFFFF"/>
-                </a:solidFill>
-                <a:latin typeface="Arial"/>
-                <a:ea typeface="Arial"/>
-                <a:cs typeface="Arial"/>
-              </a:defRPr>
-            </a:lvl7pPr>
-            <a:lvl8pPr>
-              <a:defRPr sz="2025" b="1">
-                <a:solidFill>
-                  <a:srgbClr val="FFFFFF"/>
-                </a:solidFill>
-                <a:latin typeface="Arial"/>
-                <a:ea typeface="Arial"/>
-                <a:cs typeface="Arial"/>
-              </a:defRPr>
-            </a:lvl8pPr>
-            <a:lvl9pPr>
-              <a:defRPr sz="2025" b="1">
-                <a:solidFill>
-                  <a:srgbClr val="FFFFFF"/>
-                </a:solidFill>
-                <a:latin typeface="Arial"/>
-                <a:ea typeface="Arial"/>
-                <a:cs typeface="Arial"/>
-              </a:defRPr>
-            </a:lvl9pPr>
-          </a:lstStyle>
-          <a:p xmlns:a="http://schemas.openxmlformats.org/drawingml/2006/main">
-            <a:pPr>
-              <a:defRPr sz="2025" b="1">
-                <a:solidFill>
-                  <a:srgbClr val="FFFFFF"/>
-                </a:solidFill>
-                <a:latin typeface="Arial"/>
-                <a:ea typeface="Arial"/>
-                <a:cs typeface="Arial"/>
-              </a:defRPr>
-            </a:pPr>
-            <a:r>
-              <a:rPr sz="2025" b="1">
-                <a:solidFill>
-                  <a:srgbClr val="FFFFFF"/>
-                </a:solidFill>
-                <a:latin typeface="Arial"/>
-                <a:ea typeface="Arial"/>
-                <a:cs typeface="Arial"/>
-              </a:rPr>
-              <a:t>Klikimi</a:t>
-            </a:r>
-          </a:p>
-        </p:txBody>
-      </p:sp>
-      <p:sp>
-        <p:nvSpPr>
-          <p:cNvPr id="6" name="">
-            <a:extLst xmlns:a="http://schemas.openxmlformats.org/drawingml/2006/main">
-              <a:ext uri="{FF2B5EF4-FFF2-40B4-BE49-F238E27FC236}">
-                <a16:creationId xmlns:a16="http://schemas.microsoft.com/office/drawing/2014/main" id="{F63C6A4D-3D32-4DA0-9174-06A8DC97AA9C}"/>
-              </a:ext>
-            </a:extLst>
-          </p:cNvPr>
-          <p:cNvSpPr>
-            <a:spLocks xmlns:a="http://schemas.openxmlformats.org/drawingml/2006/main" noGrp="1"/>
-          </p:cNvSpPr>
-          <p:nvPr/>
-        </p:nvSpPr>
-        <p:spPr>
-          <a:xfrm xmlns:a="http://schemas.openxmlformats.org/drawingml/2006/main">
-            <a:off x="609600" y="3219450"/>
-            <a:ext cx="5295900" cy="571500"/>
-          </a:xfrm>
-          <a:prstGeom xmlns:a="http://schemas.openxmlformats.org/drawingml/2006/main" prst="rect">
-            <a:avLst/>
-          </a:prstGeom>
-          <a:noFill xmlns:a="http://schemas.openxmlformats.org/drawingml/2006/main"/>
-          <a:ln xmlns:a="http://schemas.openxmlformats.org/drawingml/2006/main" w="0">
-            <a:noFill/>
-          </a:ln>
-        </p:spPr>
-        <p:txBody>
-          <a:bodyPr xmlns:a="http://schemas.openxmlformats.org/drawingml/2006/main">
-            <a:noAutofit/>
-          </a:bodyPr>
-          <a:lstStyle xmlns:a="http://schemas.openxmlformats.org/drawingml/2006/main">
-            <a:defPPr>
-              <a:defRPr sz="1650" b="0">
-                <a:solidFill>
-                  <a:srgbClr val="C8D3E6"/>
-                </a:solidFill>
-                <a:latin typeface="Arial"/>
-                <a:ea typeface="Arial"/>
-                <a:cs typeface="Arial"/>
-              </a:defRPr>
-            </a:defPPr>
-            <a:lvl1pPr>
-              <a:defRPr sz="1650" b="0">
-                <a:solidFill>
-                  <a:srgbClr val="C8D3E6"/>
-                </a:solidFill>
-                <a:latin typeface="Arial"/>
-                <a:ea typeface="Arial"/>
-                <a:cs typeface="Arial"/>
-              </a:defRPr>
-            </a:lvl1pPr>
-            <a:lvl2pPr>
-              <a:defRPr sz="1650" b="0">
-                <a:solidFill>
-                  <a:srgbClr val="C8D3E6"/>
-                </a:solidFill>
-                <a:latin typeface="Arial"/>
-                <a:ea typeface="Arial"/>
-                <a:cs typeface="Arial"/>
-              </a:defRPr>
-            </a:lvl2pPr>
-            <a:lvl3pPr>
-              <a:defRPr sz="1650" b="0">
-                <a:solidFill>
-                  <a:srgbClr val="C8D3E6"/>
-                </a:solidFill>
-                <a:latin typeface="Arial"/>
-                <a:ea typeface="Arial"/>
-                <a:cs typeface="Arial"/>
-              </a:defRPr>
-            </a:lvl3pPr>
-            <a:lvl4pPr>
-              <a:defRPr sz="1650" b="0">
-                <a:solidFill>
-                  <a:srgbClr val="C8D3E6"/>
-                </a:solidFill>
-                <a:latin typeface="Arial"/>
-                <a:ea typeface="Arial"/>
-                <a:cs typeface="Arial"/>
-              </a:defRPr>
-            </a:lvl4pPr>
-            <a:lvl5pPr>
-              <a:defRPr sz="1650" b="0">
-                <a:solidFill>
-                  <a:srgbClr val="C8D3E6"/>
-                </a:solidFill>
-                <a:latin typeface="Arial"/>
-                <a:ea typeface="Arial"/>
-                <a:cs typeface="Arial"/>
-              </a:defRPr>
-            </a:lvl5pPr>
-            <a:lvl6pPr>
-              <a:defRPr sz="1650" b="0">
-                <a:solidFill>
-                  <a:srgbClr val="C8D3E6"/>
-                </a:solidFill>
-                <a:latin typeface="Arial"/>
-                <a:ea typeface="Arial"/>
-                <a:cs typeface="Arial"/>
-              </a:defRPr>
-            </a:lvl6pPr>
-            <a:lvl7pPr>
-              <a:defRPr sz="1650" b="0">
-                <a:solidFill>
-                  <a:srgbClr val="C8D3E6"/>
-                </a:solidFill>
-                <a:latin typeface="Arial"/>
-                <a:ea typeface="Arial"/>
-                <a:cs typeface="Arial"/>
-              </a:defRPr>
-            </a:lvl7pPr>
-            <a:lvl8pPr>
-              <a:defRPr sz="1650" b="0">
-                <a:solidFill>
-                  <a:srgbClr val="C8D3E6"/>
-                </a:solidFill>
-                <a:latin typeface="Arial"/>
-                <a:ea typeface="Arial"/>
-                <a:cs typeface="Arial"/>
-              </a:defRPr>
-            </a:lvl8pPr>
-            <a:lvl9pPr>
-              <a:defRPr sz="1650" b="0">
-                <a:solidFill>
-                  <a:srgbClr val="C8D3E6"/>
-                </a:solidFill>
-                <a:latin typeface="Arial"/>
-                <a:ea typeface="Arial"/>
-                <a:cs typeface="Arial"/>
-              </a:defRPr>
-            </a:lvl9pPr>
-          </a:lstStyle>
-          <a:p xmlns:a="http://schemas.openxmlformats.org/drawingml/2006/main">
-            <a:pPr>
-              <a:defRPr sz="1650" b="0">
-                <a:solidFill>
-                  <a:srgbClr val="C8D3E6"/>
-                </a:solidFill>
-                <a:latin typeface="Arial"/>
-                <a:ea typeface="Arial"/>
-                <a:cs typeface="Arial"/>
-              </a:defRPr>
-            </a:pPr>
-            <a:r>
-              <a:rPr sz="1650" b="0">
-                <a:solidFill>
-                  <a:srgbClr val="C8D3E6"/>
-                </a:solidFill>
-                <a:latin typeface="Arial"/>
-                <a:ea typeface="Arial"/>
-                <a:cs typeface="Arial"/>
-              </a:rPr>
-              <a:t>Veprim në ndërfaqe</a:t>
-            </a:r>
-          </a:p>
-        </p:txBody>
-      </p:sp>
-      <p:pic>
-        <p:nvPicPr>
-          <p:cNvPr id="7" name="">
-            <a:extLst xmlns:a="http://schemas.openxmlformats.org/drawingml/2006/main">
-              <a:ext uri="{FF2B5EF4-FFF2-40B4-BE49-F238E27FC236}">
-                <a16:creationId xmlns:a16="http://schemas.microsoft.com/office/drawing/2014/main" id="{A709698E-C4AC-47CC-81AB-21AD8A950745}"/>
-              </a:ext>
-            </a:extLst>
-          </p:cNvPr>
-          <p:cNvPicPr>
-            <a:picLocks xmlns:a="http://schemas.openxmlformats.org/drawingml/2006/main" noChangeAspect="1"/>
-          </p:cNvPicPr>
-          <p:nvPr/>
-        </p:nvPicPr>
-        <p:blipFill>
-          <a:blip xmlns:r="http://schemas.openxmlformats.org/officeDocument/2006/relationships" xmlns:a="http://schemas.openxmlformats.org/drawingml/2006/main" r:embed="Rb00c50cb77fd4463"/>
-          <a:stretch xmlns:a="http://schemas.openxmlformats.org/drawingml/2006/main"/>
-        </p:blipFill>
-        <p:spPr>
-          <a:xfrm xmlns:a="http://schemas.openxmlformats.org/drawingml/2006/main">
-            <a:off x="6267450" y="1952625"/>
-            <a:ext cx="457200" cy="457200"/>
-          </a:xfrm>
-          <a:prstGeom xmlns:a="http://schemas.openxmlformats.org/drawingml/2006/main" prst="rect">
-            <a:avLst/>
-          </a:prstGeom>
-        </p:spPr>
-      </p:pic>
-      <p:sp>
-        <p:nvSpPr>
-          <p:cNvPr id="8" name="">
-            <a:extLst xmlns:a="http://schemas.openxmlformats.org/drawingml/2006/main">
-              <a:ext uri="{FF2B5EF4-FFF2-40B4-BE49-F238E27FC236}">
-                <a16:creationId xmlns:a16="http://schemas.microsoft.com/office/drawing/2014/main" id="{1F0788B4-2529-45C4-A809-0EF7A268B177}"/>
-              </a:ext>
-            </a:extLst>
-          </p:cNvPr>
-          <p:cNvSpPr>
-            <a:spLocks xmlns:a="http://schemas.openxmlformats.org/drawingml/2006/main" noGrp="1"/>
-          </p:cNvSpPr>
-          <p:nvPr/>
-        </p:nvSpPr>
-        <p:spPr>
-          <a:xfrm xmlns:a="http://schemas.openxmlformats.org/drawingml/2006/main">
-            <a:off x="6267450" y="2667000"/>
-            <a:ext cx="5295900" cy="495300"/>
-          </a:xfrm>
-          <a:prstGeom xmlns:a="http://schemas.openxmlformats.org/drawingml/2006/main" prst="rect">
-            <a:avLst/>
-          </a:prstGeom>
-          <a:noFill xmlns:a="http://schemas.openxmlformats.org/drawingml/2006/main"/>
-          <a:ln xmlns:a="http://schemas.openxmlformats.org/drawingml/2006/main" w="0">
-            <a:noFill/>
-          </a:ln>
-        </p:spPr>
-        <p:txBody>
-          <a:bodyPr xmlns:a="http://schemas.openxmlformats.org/drawingml/2006/main">
-            <a:noAutofit/>
-          </a:bodyPr>
-          <a:lstStyle xmlns:a="http://schemas.openxmlformats.org/drawingml/2006/main">
-            <a:defPPr>
-              <a:defRPr sz="2025" b="1">
-                <a:solidFill>
-                  <a:srgbClr val="FFFFFF"/>
-                </a:solidFill>
-                <a:latin typeface="Arial"/>
-                <a:ea typeface="Arial"/>
-                <a:cs typeface="Arial"/>
-              </a:defRPr>
-            </a:defPPr>
-            <a:lvl1pPr>
-              <a:defRPr sz="2025" b="1">
-                <a:solidFill>
-                  <a:srgbClr val="FFFFFF"/>
-                </a:solidFill>
-                <a:latin typeface="Arial"/>
-                <a:ea typeface="Arial"/>
-                <a:cs typeface="Arial"/>
-              </a:defRPr>
-            </a:lvl1pPr>
-            <a:lvl2pPr>
-              <a:defRPr sz="2025" b="1">
-                <a:solidFill>
-                  <a:srgbClr val="FFFFFF"/>
-                </a:solidFill>
-                <a:latin typeface="Arial"/>
-                <a:ea typeface="Arial"/>
-                <a:cs typeface="Arial"/>
-              </a:defRPr>
-            </a:lvl2pPr>
-            <a:lvl3pPr>
-              <a:defRPr sz="2025" b="1">
-                <a:solidFill>
-                  <a:srgbClr val="FFFFFF"/>
-                </a:solidFill>
-                <a:latin typeface="Arial"/>
-                <a:ea typeface="Arial"/>
-                <a:cs typeface="Arial"/>
-              </a:defRPr>
-            </a:lvl3pPr>
-            <a:lvl4pPr>
-              <a:defRPr sz="2025" b="1">
-                <a:solidFill>
-                  <a:srgbClr val="FFFFFF"/>
-                </a:solidFill>
-                <a:latin typeface="Arial"/>
-                <a:ea typeface="Arial"/>
-                <a:cs typeface="Arial"/>
-              </a:defRPr>
-            </a:lvl4pPr>
-            <a:lvl5pPr>
-              <a:defRPr sz="2025" b="1">
-                <a:solidFill>
-                  <a:srgbClr val="FFFFFF"/>
-                </a:solidFill>
-                <a:latin typeface="Arial"/>
-                <a:ea typeface="Arial"/>
-                <a:cs typeface="Arial"/>
-              </a:defRPr>
-            </a:lvl5pPr>
-            <a:lvl6pPr>
-              <a:defRPr sz="2025" b="1">
-                <a:solidFill>
-                  <a:srgbClr val="FFFFFF"/>
-                </a:solidFill>
-                <a:latin typeface="Arial"/>
-                <a:ea typeface="Arial"/>
-                <a:cs typeface="Arial"/>
-              </a:defRPr>
-            </a:lvl6pPr>
-            <a:lvl7pPr>
-              <a:defRPr sz="2025" b="1">
-                <a:solidFill>
-                  <a:srgbClr val="FFFFFF"/>
-                </a:solidFill>
-                <a:latin typeface="Arial"/>
-                <a:ea typeface="Arial"/>
-                <a:cs typeface="Arial"/>
-              </a:defRPr>
-            </a:lvl7pPr>
-            <a:lvl8pPr>
-              <a:defRPr sz="2025" b="1">
-                <a:solidFill>
-                  <a:srgbClr val="FFFFFF"/>
-                </a:solidFill>
-                <a:latin typeface="Arial"/>
-                <a:ea typeface="Arial"/>
-                <a:cs typeface="Arial"/>
-              </a:defRPr>
-            </a:lvl8pPr>
-            <a:lvl9pPr>
-              <a:defRPr sz="2025" b="1">
-                <a:solidFill>
-                  <a:srgbClr val="FFFFFF"/>
-                </a:solidFill>
-                <a:latin typeface="Arial"/>
-                <a:ea typeface="Arial"/>
-                <a:cs typeface="Arial"/>
-              </a:defRPr>
-            </a:lvl9pPr>
-          </a:lstStyle>
-          <a:p xmlns:a="http://schemas.openxmlformats.org/drawingml/2006/main">
-            <a:pPr>
-              <a:defRPr sz="2025" b="1">
-                <a:solidFill>
-                  <a:srgbClr val="FFFFFF"/>
-                </a:solidFill>
-                <a:latin typeface="Arial"/>
-                <a:ea typeface="Arial"/>
-                <a:cs typeface="Arial"/>
-              </a:defRPr>
-            </a:pPr>
-            <a:r>
-              <a:rPr sz="2025" b="1">
-                <a:solidFill>
-                  <a:srgbClr val="FFFFFF"/>
-                </a:solidFill>
-                <a:latin typeface="Arial"/>
-                <a:ea typeface="Arial"/>
-                <a:cs typeface="Arial"/>
-              </a:rPr>
-              <a:t>Ruajtja</a:t>
-            </a:r>
-          </a:p>
-        </p:txBody>
-      </p:sp>
-      <p:sp>
-        <p:nvSpPr>
-          <p:cNvPr id="9" name="">
-            <a:extLst xmlns:a="http://schemas.openxmlformats.org/drawingml/2006/main">
-              <a:ext uri="{FF2B5EF4-FFF2-40B4-BE49-F238E27FC236}">
-                <a16:creationId xmlns:a16="http://schemas.microsoft.com/office/drawing/2014/main" id="{2FB465CD-F3F6-4356-A385-DD1B6C615FC6}"/>
-              </a:ext>
-            </a:extLst>
-          </p:cNvPr>
-          <p:cNvSpPr>
-            <a:spLocks xmlns:a="http://schemas.openxmlformats.org/drawingml/2006/main" noGrp="1"/>
-          </p:cNvSpPr>
-          <p:nvPr/>
-        </p:nvSpPr>
-        <p:spPr>
-          <a:xfrm xmlns:a="http://schemas.openxmlformats.org/drawingml/2006/main">
-            <a:off x="6267450" y="3219450"/>
-            <a:ext cx="5295900" cy="571500"/>
-          </a:xfrm>
-          <a:prstGeom xmlns:a="http://schemas.openxmlformats.org/drawingml/2006/main" prst="rect">
-            <a:avLst/>
-          </a:prstGeom>
-          <a:noFill xmlns:a="http://schemas.openxmlformats.org/drawingml/2006/main"/>
-          <a:ln xmlns:a="http://schemas.openxmlformats.org/drawingml/2006/main" w="0">
-            <a:noFill/>
-          </a:ln>
-        </p:spPr>
-        <p:txBody>
-          <a:bodyPr xmlns:a="http://schemas.openxmlformats.org/drawingml/2006/main">
-            <a:noAutofit/>
-          </a:bodyPr>
-          <a:lstStyle xmlns:a="http://schemas.openxmlformats.org/drawingml/2006/main">
-            <a:defPPr>
-              <a:defRPr sz="1650" b="0">
-                <a:solidFill>
-                  <a:srgbClr val="C8D3E6"/>
-                </a:solidFill>
-                <a:latin typeface="Arial"/>
-                <a:ea typeface="Arial"/>
-                <a:cs typeface="Arial"/>
-              </a:defRPr>
-            </a:defPPr>
-            <a:lvl1pPr>
-              <a:defRPr sz="1650" b="0">
-                <a:solidFill>
-                  <a:srgbClr val="C8D3E6"/>
-                </a:solidFill>
-                <a:latin typeface="Arial"/>
-                <a:ea typeface="Arial"/>
-                <a:cs typeface="Arial"/>
-              </a:defRPr>
-            </a:lvl1pPr>
-            <a:lvl2pPr>
-              <a:defRPr sz="1650" b="0">
-                <a:solidFill>
-                  <a:srgbClr val="C8D3E6"/>
-                </a:solidFill>
-                <a:latin typeface="Arial"/>
-                <a:ea typeface="Arial"/>
-                <a:cs typeface="Arial"/>
-              </a:defRPr>
-            </a:lvl2pPr>
-            <a:lvl3pPr>
-              <a:defRPr sz="1650" b="0">
-                <a:solidFill>
-                  <a:srgbClr val="C8D3E6"/>
-                </a:solidFill>
-                <a:latin typeface="Arial"/>
-                <a:ea typeface="Arial"/>
-                <a:cs typeface="Arial"/>
-              </a:defRPr>
-            </a:lvl3pPr>
-            <a:lvl4pPr>
-              <a:defRPr sz="1650" b="0">
-                <a:solidFill>
-                  <a:srgbClr val="C8D3E6"/>
-                </a:solidFill>
-                <a:latin typeface="Arial"/>
-                <a:ea typeface="Arial"/>
-                <a:cs typeface="Arial"/>
-              </a:defRPr>
-            </a:lvl4pPr>
-            <a:lvl5pPr>
-              <a:defRPr sz="1650" b="0">
-                <a:solidFill>
-                  <a:srgbClr val="C8D3E6"/>
-                </a:solidFill>
-                <a:latin typeface="Arial"/>
-                <a:ea typeface="Arial"/>
-                <a:cs typeface="Arial"/>
-              </a:defRPr>
-            </a:lvl5pPr>
-            <a:lvl6pPr>
-              <a:defRPr sz="1650" b="0">
-                <a:solidFill>
-                  <a:srgbClr val="C8D3E6"/>
-                </a:solidFill>
-                <a:latin typeface="Arial"/>
-                <a:ea typeface="Arial"/>
-                <a:cs typeface="Arial"/>
-              </a:defRPr>
-            </a:lvl6pPr>
-            <a:lvl7pPr>
-              <a:defRPr sz="1650" b="0">
-                <a:solidFill>
-                  <a:srgbClr val="C8D3E6"/>
-                </a:solidFill>
-                <a:latin typeface="Arial"/>
-                <a:ea typeface="Arial"/>
-                <a:cs typeface="Arial"/>
-              </a:defRPr>
-            </a:lvl7pPr>
-            <a:lvl8pPr>
-              <a:defRPr sz="1650" b="0">
-                <a:solidFill>
-                  <a:srgbClr val="C8D3E6"/>
-                </a:solidFill>
-                <a:latin typeface="Arial"/>
-                <a:ea typeface="Arial"/>
-                <a:cs typeface="Arial"/>
-              </a:defRPr>
-            </a:lvl8pPr>
-            <a:lvl9pPr>
-              <a:defRPr sz="1650" b="0">
-                <a:solidFill>
-                  <a:srgbClr val="C8D3E6"/>
-                </a:solidFill>
-                <a:latin typeface="Arial"/>
-                <a:ea typeface="Arial"/>
-                <a:cs typeface="Arial"/>
-              </a:defRPr>
-            </a:lvl9pPr>
-          </a:lstStyle>
-          <a:p xmlns:a="http://schemas.openxmlformats.org/drawingml/2006/main">
-            <a:pPr>
-              <a:defRPr sz="1650" b="0">
-                <a:solidFill>
-                  <a:srgbClr val="C8D3E6"/>
-                </a:solidFill>
-                <a:latin typeface="Arial"/>
-                <a:ea typeface="Arial"/>
-                <a:cs typeface="Arial"/>
-              </a:defRPr>
-            </a:pPr>
-            <a:r>
-              <a:rPr sz="1650" b="0">
-                <a:solidFill>
-                  <a:srgbClr val="C8D3E6"/>
-                </a:solidFill>
-                <a:latin typeface="Arial"/>
-                <a:ea typeface="Arial"/>
-                <a:cs typeface="Arial"/>
-              </a:rPr>
-              <a:t>Duhet provuar veçmas</a:t>
-            </a:r>
-          </a:p>
-        </p:txBody>
-      </p:sp>
-      <p:sp>
-        <p:nvSpPr>
-          <p:cNvPr id="10" name="">
-            <a:extLst xmlns:a="http://schemas.openxmlformats.org/drawingml/2006/main">
-              <a:ext uri="{FF2B5EF4-FFF2-40B4-BE49-F238E27FC236}">
-                <a16:creationId xmlns:a16="http://schemas.microsoft.com/office/drawing/2014/main" id="{D9C9330C-E800-42F2-A772-FC1401FB62BD}"/>
-              </a:ext>
-            </a:extLst>
-          </p:cNvPr>
-          <p:cNvSpPr>
-            <a:spLocks xmlns:a="http://schemas.openxmlformats.org/drawingml/2006/main" noGrp="1"/>
-          </p:cNvSpPr>
-          <p:nvPr/>
-        </p:nvSpPr>
-        <p:spPr>
-          <a:xfrm xmlns:a="http://schemas.openxmlformats.org/drawingml/2006/main">
-            <a:off x="609600" y="3924300"/>
-            <a:ext cx="10953750" cy="809625"/>
+            <a:off x="609600" y="1952625"/>
+            <a:ext cx="5334000" cy="1381125"/>
           </a:xfrm>
           <a:prstGeom xmlns:a="http://schemas.openxmlformats.org/drawingml/2006/main" prst="rect">
             <a:avLst/>
@@ -30605,12 +28026,68 @@
           </a:p>
         </p:txBody>
       </p:sp>
+      <p:pic>
+        <p:nvPicPr>
+          <p:cNvPr id="5" name="">
+            <a:extLst xmlns:a="http://schemas.openxmlformats.org/drawingml/2006/main">
+              <a:ext uri="{FF2B5EF4-FFF2-40B4-BE49-F238E27FC236}">
+                <a16:creationId xmlns:a16="http://schemas.microsoft.com/office/drawing/2014/main" id="{75B028F4-4D43-4BAE-8B66-E9FFCC741594}"/>
+              </a:ext>
+            </a:extLst>
+          </p:cNvPr>
+          <p:cNvPicPr>
+            <a:picLocks xmlns:a="http://schemas.openxmlformats.org/drawingml/2006/main" noChangeAspect="1"/>
+          </p:cNvPicPr>
+          <p:nvPr/>
+        </p:nvPicPr>
+        <p:blipFill>
+          <a:blip xmlns:r="http://schemas.openxmlformats.org/officeDocument/2006/relationships" xmlns:a="http://schemas.openxmlformats.org/drawingml/2006/main" r:embed="R699dd3d0e31d4eab"/>
+          <a:stretch xmlns:a="http://schemas.openxmlformats.org/drawingml/2006/main"/>
+        </p:blipFill>
+        <p:spPr>
+          <a:xfrm xmlns:a="http://schemas.openxmlformats.org/drawingml/2006/main">
+            <a:off x="6334125" y="1952625"/>
+            <a:ext cx="2190750" cy="3409950"/>
+          </a:xfrm>
+          <a:prstGeom xmlns:a="http://schemas.openxmlformats.org/drawingml/2006/main" prst="rect">
+            <a:avLst/>
+          </a:prstGeom>
+        </p:spPr>
+      </p:pic>
+      <p:pic>
+        <p:nvPicPr>
+          <p:cNvPr id="6" name="">
+            <a:extLst xmlns:a="http://schemas.openxmlformats.org/drawingml/2006/main">
+              <a:ext uri="{FF2B5EF4-FFF2-40B4-BE49-F238E27FC236}">
+                <a16:creationId xmlns:a16="http://schemas.microsoft.com/office/drawing/2014/main" id="{ECF1D9E5-3007-4330-B157-020D9FCC429C}"/>
+              </a:ext>
+            </a:extLst>
+          </p:cNvPr>
+          <p:cNvPicPr>
+            <a:picLocks xmlns:a="http://schemas.openxmlformats.org/drawingml/2006/main" noChangeAspect="1"/>
+          </p:cNvPicPr>
+          <p:nvPr/>
+        </p:nvPicPr>
+        <p:blipFill>
+          <a:blip xmlns:r="http://schemas.openxmlformats.org/officeDocument/2006/relationships" xmlns:a="http://schemas.openxmlformats.org/drawingml/2006/main" r:embed="R9ee9d91dc45044bf"/>
+          <a:stretch xmlns:a="http://schemas.openxmlformats.org/drawingml/2006/main"/>
+        </p:blipFill>
+        <p:spPr>
+          <a:xfrm xmlns:a="http://schemas.openxmlformats.org/drawingml/2006/main">
+            <a:off x="9001125" y="1952625"/>
+            <a:ext cx="2190750" cy="3409950"/>
+          </a:xfrm>
+          <a:prstGeom xmlns:a="http://schemas.openxmlformats.org/drawingml/2006/main" prst="rect">
+            <a:avLst/>
+          </a:prstGeom>
+        </p:spPr>
+      </p:pic>
       <p:sp>
         <p:nvSpPr>
-          <p:cNvPr id="11" name="">
+          <p:cNvPr id="7" name="">
             <a:extLst xmlns:a="http://schemas.openxmlformats.org/drawingml/2006/main">
               <a:ext uri="{FF2B5EF4-FFF2-40B4-BE49-F238E27FC236}">
-                <a16:creationId xmlns:a16="http://schemas.microsoft.com/office/drawing/2014/main" id="{69C618A7-85EC-4A7C-90AD-D8E0CD1EFCA7}"/>
+                <a16:creationId xmlns:a16="http://schemas.microsoft.com/office/drawing/2014/main" id="{8CFDD585-A503-460C-9279-48B6767CCC2D}"/>
               </a:ext>
             </a:extLst>
           </p:cNvPr>
@@ -30621,8 +28098,8 @@
         </p:nvSpPr>
         <p:spPr>
           <a:xfrm xmlns:a="http://schemas.openxmlformats.org/drawingml/2006/main">
-            <a:off x="609600" y="4857750"/>
-            <a:ext cx="10953750" cy="495300"/>
+            <a:off x="609600" y="3571875"/>
+            <a:ext cx="5334000" cy="609600"/>
           </a:xfrm>
           <a:prstGeom xmlns:a="http://schemas.openxmlformats.org/drawingml/2006/main" prst="rect">
             <a:avLst/>
@@ -30765,10 +28242,10 @@
       </p:sp>
       <p:sp>
         <p:nvSpPr>
-          <p:cNvPr id="12" name="">
+          <p:cNvPr id="8" name="">
             <a:extLst xmlns:a="http://schemas.openxmlformats.org/drawingml/2006/main">
               <a:ext uri="{FF2B5EF4-FFF2-40B4-BE49-F238E27FC236}">
-                <a16:creationId xmlns:a16="http://schemas.microsoft.com/office/drawing/2014/main" id="{4160B996-7951-4526-8794-C27DE3928706}"/>
+                <a16:creationId xmlns:a16="http://schemas.microsoft.com/office/drawing/2014/main" id="{502769C6-2DD4-46CB-A920-300484942E4C}"/>
               </a:ext>
             </a:extLst>
           </p:cNvPr>
@@ -30779,8 +28256,8 @@
         </p:nvSpPr>
         <p:spPr>
           <a:xfrm xmlns:a="http://schemas.openxmlformats.org/drawingml/2006/main">
-            <a:off x="609600" y="5457825"/>
-            <a:ext cx="10953750" cy="971550"/>
+            <a:off x="609600" y="4295775"/>
+            <a:ext cx="5334000" cy="1381125"/>
           </a:xfrm>
           <a:prstGeom xmlns:a="http://schemas.openxmlformats.org/drawingml/2006/main" prst="rect">
             <a:avLst/>
@@ -30796,7 +28273,7 @@
           </a:bodyPr>
           <a:lstStyle xmlns:a="http://schemas.openxmlformats.org/drawingml/2006/main">
             <a:defPPr>
-              <a:defRPr sz="1800" b="0">
+              <a:defRPr sz="1725" b="0">
                 <a:solidFill>
                   <a:srgbClr val="EDF2FF"/>
                 </a:solidFill>
@@ -30806,7 +28283,7 @@
               </a:defRPr>
             </a:defPPr>
             <a:lvl1pPr>
-              <a:defRPr sz="1800" b="0">
+              <a:defRPr sz="1725" b="0">
                 <a:solidFill>
                   <a:srgbClr val="EDF2FF"/>
                 </a:solidFill>
@@ -30816,7 +28293,7 @@
               </a:defRPr>
             </a:lvl1pPr>
             <a:lvl2pPr>
-              <a:defRPr sz="1800" b="0">
+              <a:defRPr sz="1725" b="0">
                 <a:solidFill>
                   <a:srgbClr val="EDF2FF"/>
                 </a:solidFill>
@@ -30826,7 +28303,7 @@
               </a:defRPr>
             </a:lvl2pPr>
             <a:lvl3pPr>
-              <a:defRPr sz="1800" b="0">
+              <a:defRPr sz="1725" b="0">
                 <a:solidFill>
                   <a:srgbClr val="EDF2FF"/>
                 </a:solidFill>
@@ -30836,7 +28313,7 @@
               </a:defRPr>
             </a:lvl3pPr>
             <a:lvl4pPr>
-              <a:defRPr sz="1800" b="0">
+              <a:defRPr sz="1725" b="0">
                 <a:solidFill>
                   <a:srgbClr val="EDF2FF"/>
                 </a:solidFill>
@@ -30846,7 +28323,7 @@
               </a:defRPr>
             </a:lvl4pPr>
             <a:lvl5pPr>
-              <a:defRPr sz="1800" b="0">
+              <a:defRPr sz="1725" b="0">
                 <a:solidFill>
                   <a:srgbClr val="EDF2FF"/>
                 </a:solidFill>
@@ -30856,7 +28333,7 @@
               </a:defRPr>
             </a:lvl5pPr>
             <a:lvl6pPr>
-              <a:defRPr sz="1800" b="0">
+              <a:defRPr sz="1725" b="0">
                 <a:solidFill>
                   <a:srgbClr val="EDF2FF"/>
                 </a:solidFill>
@@ -30866,7 +28343,7 @@
               </a:defRPr>
             </a:lvl6pPr>
             <a:lvl7pPr>
-              <a:defRPr sz="1800" b="0">
+              <a:defRPr sz="1725" b="0">
                 <a:solidFill>
                   <a:srgbClr val="EDF2FF"/>
                 </a:solidFill>
@@ -30876,7 +28353,7 @@
               </a:defRPr>
             </a:lvl7pPr>
             <a:lvl8pPr>
-              <a:defRPr sz="1800" b="0">
+              <a:defRPr sz="1725" b="0">
                 <a:solidFill>
                   <a:srgbClr val="EDF2FF"/>
                 </a:solidFill>
@@ -30886,7 +28363,7 @@
               </a:defRPr>
             </a:lvl8pPr>
             <a:lvl9pPr>
-              <a:defRPr sz="1800" b="0">
+              <a:defRPr sz="1725" b="0">
                 <a:solidFill>
                   <a:srgbClr val="EDF2FF"/>
                 </a:solidFill>
@@ -30898,7 +28375,7 @@
           </a:lstStyle>
           <a:p xmlns:a="http://schemas.openxmlformats.org/drawingml/2006/main">
             <a:pPr>
-              <a:defRPr sz="1800" b="0">
+              <a:defRPr sz="1725" b="0">
                 <a:solidFill>
                   <a:srgbClr val="EDF2FF"/>
                 </a:solidFill>
@@ -30908,7 +28385,7 @@
               </a:defRPr>
             </a:pPr>
             <a:r>
-              <a:rPr sz="1800" b="0">
+              <a:rPr sz="1725" b="0">
                 <a:solidFill>
                   <a:srgbClr val="EDF2FF"/>
                 </a:solidFill>
@@ -30921,7 +28398,7 @@
           </a:p>
           <a:p xmlns:a="http://schemas.openxmlformats.org/drawingml/2006/main">
             <a:pPr>
-              <a:defRPr sz="1800" b="0">
+              <a:defRPr sz="1725" b="0">
                 <a:solidFill>
                   <a:srgbClr val="EDF2FF"/>
                 </a:solidFill>
@@ -30931,7 +28408,7 @@
               </a:defRPr>
             </a:pPr>
             <a:r>
-              <a:rPr sz="1800" b="0">
+              <a:rPr sz="1725" b="0">
                 <a:solidFill>
                   <a:srgbClr val="EDF2FF"/>
                 </a:solidFill>
@@ -30944,7 +28421,7 @@
           </a:p>
           <a:p xmlns:a="http://schemas.openxmlformats.org/drawingml/2006/main">
             <a:pPr>
-              <a:defRPr sz="1800" b="0">
+              <a:defRPr sz="1725" b="0">
                 <a:solidFill>
                   <a:srgbClr val="EDF2FF"/>
                 </a:solidFill>
@@ -30954,7 +28431,7 @@
               </a:defRPr>
             </a:pPr>
             <a:r>
-              <a:rPr sz="1800" b="0">
+              <a:rPr sz="1725" b="0">
                 <a:solidFill>
                   <a:srgbClr val="EDF2FF"/>
                 </a:solidFill>
@@ -30969,10 +28446,10 @@
       </p:sp>
       <p:sp>
         <p:nvSpPr>
-          <p:cNvPr id="13" name="">
+          <p:cNvPr id="9" name="">
             <a:extLst xmlns:a="http://schemas.openxmlformats.org/drawingml/2006/main">
               <a:ext uri="{FF2B5EF4-FFF2-40B4-BE49-F238E27FC236}">
-                <a16:creationId xmlns:a16="http://schemas.microsoft.com/office/drawing/2014/main" id="{D87632F5-696F-4A54-9A66-F1CF91B6E8E2}"/>
+                <a16:creationId xmlns:a16="http://schemas.microsoft.com/office/drawing/2014/main" id="{0021EB98-E160-4610-AD3F-0BC443BFA3FC}"/>
               </a:ext>
             </a:extLst>
           </p:cNvPr>
@@ -30983,8 +28460,8 @@
         </p:nvSpPr>
         <p:spPr>
           <a:xfrm xmlns:a="http://schemas.openxmlformats.org/drawingml/2006/main">
-            <a:off x="609600" y="6553200"/>
-            <a:ext cx="10953750" cy="219075"/>
+            <a:off x="609600" y="6191250"/>
+            <a:ext cx="10953750" cy="304800"/>
           </a:xfrm>
           <a:prstGeom xmlns:a="http://schemas.openxmlformats.org/drawingml/2006/main" prst="rect">
             <a:avLst/>
@@ -31000,9 +28477,9 @@
           </a:bodyPr>
           <a:lstStyle xmlns:a="http://schemas.openxmlformats.org/drawingml/2006/main">
             <a:defPPr>
-              <a:defRPr sz="1275" b="0">
-                <a:solidFill>
-                  <a:srgbClr val="C8D3E6"/>
+              <a:defRPr sz="1650" b="0">
+                <a:solidFill>
+                  <a:srgbClr val="FDBA74"/>
                 </a:solidFill>
                 <a:latin typeface="Arial"/>
                 <a:ea typeface="Arial"/>
@@ -31010,9 +28487,9 @@
               </a:defRPr>
             </a:defPPr>
             <a:lvl1pPr>
-              <a:defRPr sz="1275" b="0">
-                <a:solidFill>
-                  <a:srgbClr val="C8D3E6"/>
+              <a:defRPr sz="1650" b="0">
+                <a:solidFill>
+                  <a:srgbClr val="FDBA74"/>
                 </a:solidFill>
                 <a:latin typeface="Arial"/>
                 <a:ea typeface="Arial"/>
@@ -31020,9 +28497,9 @@
               </a:defRPr>
             </a:lvl1pPr>
             <a:lvl2pPr>
-              <a:defRPr sz="1275" b="0">
-                <a:solidFill>
-                  <a:srgbClr val="C8D3E6"/>
+              <a:defRPr sz="1650" b="0">
+                <a:solidFill>
+                  <a:srgbClr val="FDBA74"/>
                 </a:solidFill>
                 <a:latin typeface="Arial"/>
                 <a:ea typeface="Arial"/>
@@ -31030,9 +28507,9 @@
               </a:defRPr>
             </a:lvl2pPr>
             <a:lvl3pPr>
-              <a:defRPr sz="1275" b="0">
-                <a:solidFill>
-                  <a:srgbClr val="C8D3E6"/>
+              <a:defRPr sz="1650" b="0">
+                <a:solidFill>
+                  <a:srgbClr val="FDBA74"/>
                 </a:solidFill>
                 <a:latin typeface="Arial"/>
                 <a:ea typeface="Arial"/>
@@ -31040,9 +28517,9 @@
               </a:defRPr>
             </a:lvl3pPr>
             <a:lvl4pPr>
-              <a:defRPr sz="1275" b="0">
-                <a:solidFill>
-                  <a:srgbClr val="C8D3E6"/>
+              <a:defRPr sz="1650" b="0">
+                <a:solidFill>
+                  <a:srgbClr val="FDBA74"/>
                 </a:solidFill>
                 <a:latin typeface="Arial"/>
                 <a:ea typeface="Arial"/>
@@ -31050,9 +28527,9 @@
               </a:defRPr>
             </a:lvl4pPr>
             <a:lvl5pPr>
-              <a:defRPr sz="1275" b="0">
-                <a:solidFill>
-                  <a:srgbClr val="C8D3E6"/>
+              <a:defRPr sz="1650" b="0">
+                <a:solidFill>
+                  <a:srgbClr val="FDBA74"/>
                 </a:solidFill>
                 <a:latin typeface="Arial"/>
                 <a:ea typeface="Arial"/>
@@ -31060,9 +28537,9 @@
               </a:defRPr>
             </a:lvl5pPr>
             <a:lvl6pPr>
-              <a:defRPr sz="1275" b="0">
-                <a:solidFill>
-                  <a:srgbClr val="C8D3E6"/>
+              <a:defRPr sz="1650" b="0">
+                <a:solidFill>
+                  <a:srgbClr val="FDBA74"/>
                 </a:solidFill>
                 <a:latin typeface="Arial"/>
                 <a:ea typeface="Arial"/>
@@ -31070,9 +28547,9 @@
               </a:defRPr>
             </a:lvl6pPr>
             <a:lvl7pPr>
-              <a:defRPr sz="1275" b="0">
-                <a:solidFill>
-                  <a:srgbClr val="C8D3E6"/>
+              <a:defRPr sz="1650" b="0">
+                <a:solidFill>
+                  <a:srgbClr val="FDBA74"/>
                 </a:solidFill>
                 <a:latin typeface="Arial"/>
                 <a:ea typeface="Arial"/>
@@ -31080,9 +28557,9 @@
               </a:defRPr>
             </a:lvl7pPr>
             <a:lvl8pPr>
-              <a:defRPr sz="1275" b="0">
-                <a:solidFill>
-                  <a:srgbClr val="C8D3E6"/>
+              <a:defRPr sz="1650" b="0">
+                <a:solidFill>
+                  <a:srgbClr val="FDBA74"/>
                 </a:solidFill>
                 <a:latin typeface="Arial"/>
                 <a:ea typeface="Arial"/>
@@ -31090,9 +28567,9 @@
               </a:defRPr>
             </a:lvl8pPr>
             <a:lvl9pPr>
-              <a:defRPr sz="1275" b="0">
-                <a:solidFill>
-                  <a:srgbClr val="C8D3E6"/>
+              <a:defRPr sz="1650" b="0">
+                <a:solidFill>
+                  <a:srgbClr val="FDBA74"/>
                 </a:solidFill>
                 <a:latin typeface="Arial"/>
                 <a:ea typeface="Arial"/>
@@ -31102,9 +28579,9 @@
           </a:lstStyle>
           <a:p xmlns:a="http://schemas.openxmlformats.org/drawingml/2006/main">
             <a:pPr>
-              <a:defRPr sz="1275" b="0">
-                <a:solidFill>
-                  <a:srgbClr val="C8D3E6"/>
+              <a:defRPr sz="1650" b="0">
+                <a:solidFill>
+                  <a:srgbClr val="FDBA74"/>
                 </a:solidFill>
                 <a:latin typeface="Arial"/>
                 <a:ea typeface="Arial"/>
@@ -31112,15 +28589,15 @@
               </a:defRPr>
             </a:pPr>
             <a:r>
-              <a:rPr sz="1275" b="0">
-                <a:solidFill>
-                  <a:srgbClr val="C8D3E6"/>
+              <a:rPr sz="1650" b="0">
+                <a:solidFill>
+                  <a:srgbClr val="FDBA74"/>
                 </a:solidFill>
                 <a:latin typeface="Arial"/>
                 <a:ea typeface="Arial"/>
                 <a:cs typeface="Arial"/>
               </a:rPr>
-              <a:t>Votoni, shpjegoni arsyen dhe pastaj kaloni te slajdi vijues</a:t>
+              <a:t>Votoni dhe diskutoni arsyen përpara përgjigjes.</a:t>
             </a:r>
           </a:p>
         </p:txBody>
@@ -31128,7 +28605,7 @@
     </p:spTree>
     <p:extLst>
       <p:ext uri="{BB962C8B-B14F-4D97-AF65-F5344CB8AC3E}">
-        <p14:creationId xmlns:p14="http://schemas.microsoft.com/office/powerpoint/2010/main" val="1611608039"/>
+        <p14:creationId xmlns:p14="http://schemas.microsoft.com/office/powerpoint/2010/main" val="56061120"/>
       </p:ext>
     </p:extLst>
   </p:cSld>
@@ -31159,7 +28636,7 @@
           <p:cNvPr id="13" name="">
             <a:extLst xmlns:a="http://schemas.openxmlformats.org/drawingml/2006/main">
               <a:ext uri="{FF2B5EF4-FFF2-40B4-BE49-F238E27FC236}">
-                <a16:creationId xmlns:a16="http://schemas.microsoft.com/office/drawing/2014/main" id="{D98EDDC9-78FC-4A53-B7B6-698077B2E72D}"/>
+                <a16:creationId xmlns:a16="http://schemas.microsoft.com/office/drawing/2014/main" id="{7A107C4A-A38F-4E51-91E6-F063E2BFD4FE}"/>
               </a:ext>
             </a:extLst>
           </p:cNvPr>
@@ -31317,7 +28794,7 @@
           <p:cNvPr id="2" name="">
             <a:extLst xmlns:a="http://schemas.openxmlformats.org/drawingml/2006/main">
               <a:ext uri="{FF2B5EF4-FFF2-40B4-BE49-F238E27FC236}">
-                <a16:creationId xmlns:a16="http://schemas.microsoft.com/office/drawing/2014/main" id="{6C34E62B-DBB2-4CF2-B154-57CB6857B56A}"/>
+                <a16:creationId xmlns:a16="http://schemas.microsoft.com/office/drawing/2014/main" id="{CA2401FC-307E-48B9-A27B-969AD29864DE}"/>
               </a:ext>
             </a:extLst>
           </p:cNvPr>
@@ -31475,7 +28952,7 @@
           <p:cNvPr id="3" name="">
             <a:extLst xmlns:a="http://schemas.openxmlformats.org/drawingml/2006/main">
               <a:ext uri="{FF2B5EF4-FFF2-40B4-BE49-F238E27FC236}">
-                <a16:creationId xmlns:a16="http://schemas.microsoft.com/office/drawing/2014/main" id="{4964B2F2-A93A-49B1-BCC6-0BFB58EDC222}"/>
+                <a16:creationId xmlns:a16="http://schemas.microsoft.com/office/drawing/2014/main" id="{64A4A990-C7C3-4934-9155-5ED9DFE983D3}"/>
               </a:ext>
             </a:extLst>
           </p:cNvPr>
@@ -31633,7 +29110,7 @@
           <p:cNvPr id="4" name="">
             <a:extLst xmlns:a="http://schemas.openxmlformats.org/drawingml/2006/main">
               <a:ext uri="{FF2B5EF4-FFF2-40B4-BE49-F238E27FC236}">
-                <a16:creationId xmlns:a16="http://schemas.microsoft.com/office/drawing/2014/main" id="{2E19B841-C9C3-4534-9BE4-53270C0B5F30}"/>
+                <a16:creationId xmlns:a16="http://schemas.microsoft.com/office/drawing/2014/main" id="{29AA0586-61D3-4C39-8512-410C7680AF62}"/>
               </a:ext>
             </a:extLst>
           </p:cNvPr>
@@ -31643,7 +29120,7 @@
           <p:nvPr/>
         </p:nvPicPr>
         <p:blipFill>
-          <a:blip xmlns:r="http://schemas.openxmlformats.org/officeDocument/2006/relationships" xmlns:a="http://schemas.openxmlformats.org/drawingml/2006/main" r:embed="R07fe27c83cbc4d99"/>
+          <a:blip xmlns:r="http://schemas.openxmlformats.org/officeDocument/2006/relationships" xmlns:a="http://schemas.openxmlformats.org/drawingml/2006/main" r:embed="R67b0dfd01ed64314"/>
           <a:stretch xmlns:a="http://schemas.openxmlformats.org/drawingml/2006/main"/>
         </p:blipFill>
         <p:spPr>
@@ -31661,7 +29138,7 @@
           <p:cNvPr id="5" name="">
             <a:extLst xmlns:a="http://schemas.openxmlformats.org/drawingml/2006/main">
               <a:ext uri="{FF2B5EF4-FFF2-40B4-BE49-F238E27FC236}">
-                <a16:creationId xmlns:a16="http://schemas.microsoft.com/office/drawing/2014/main" id="{9BB2FD4E-F4B3-40A9-9C45-9CC02413ED85}"/>
+                <a16:creationId xmlns:a16="http://schemas.microsoft.com/office/drawing/2014/main" id="{65699AF5-EC6C-41DF-A56E-2589D6ADA950}"/>
               </a:ext>
             </a:extLst>
           </p:cNvPr>
@@ -31819,7 +29296,7 @@
           <p:cNvPr id="6" name="">
             <a:extLst xmlns:a="http://schemas.openxmlformats.org/drawingml/2006/main">
               <a:ext uri="{FF2B5EF4-FFF2-40B4-BE49-F238E27FC236}">
-                <a16:creationId xmlns:a16="http://schemas.microsoft.com/office/drawing/2014/main" id="{B2674D2C-40BC-4E2E-BF34-AC8342CF49F0}"/>
+                <a16:creationId xmlns:a16="http://schemas.microsoft.com/office/drawing/2014/main" id="{23FDB282-0A15-4C98-AE40-0C9AA14589C3}"/>
               </a:ext>
             </a:extLst>
           </p:cNvPr>
@@ -31977,7 +29454,7 @@
           <p:cNvPr id="7" name="">
             <a:extLst xmlns:a="http://schemas.openxmlformats.org/drawingml/2006/main">
               <a:ext uri="{FF2B5EF4-FFF2-40B4-BE49-F238E27FC236}">
-                <a16:creationId xmlns:a16="http://schemas.microsoft.com/office/drawing/2014/main" id="{971E869F-804E-42E8-B70E-6E98F01FCE3C}"/>
+                <a16:creationId xmlns:a16="http://schemas.microsoft.com/office/drawing/2014/main" id="{7BEC8000-8746-4D12-803C-5078DB35406A}"/>
               </a:ext>
             </a:extLst>
           </p:cNvPr>
@@ -31987,7 +29464,7 @@
           <p:nvPr/>
         </p:nvPicPr>
         <p:blipFill>
-          <a:blip xmlns:r="http://schemas.openxmlformats.org/officeDocument/2006/relationships" xmlns:a="http://schemas.openxmlformats.org/drawingml/2006/main" r:embed="R37df77b5a9004cd0"/>
+          <a:blip xmlns:r="http://schemas.openxmlformats.org/officeDocument/2006/relationships" xmlns:a="http://schemas.openxmlformats.org/drawingml/2006/main" r:embed="Rebdac0d1d01a4ecb"/>
           <a:stretch xmlns:a="http://schemas.openxmlformats.org/drawingml/2006/main"/>
         </p:blipFill>
         <p:spPr>
@@ -32005,7 +29482,7 @@
           <p:cNvPr id="8" name="">
             <a:extLst xmlns:a="http://schemas.openxmlformats.org/drawingml/2006/main">
               <a:ext uri="{FF2B5EF4-FFF2-40B4-BE49-F238E27FC236}">
-                <a16:creationId xmlns:a16="http://schemas.microsoft.com/office/drawing/2014/main" id="{138FBD24-5D20-4094-BE2C-20BA885115C1}"/>
+                <a16:creationId xmlns:a16="http://schemas.microsoft.com/office/drawing/2014/main" id="{613150EA-AD37-42C5-9D4C-A6F1B636FABC}"/>
               </a:ext>
             </a:extLst>
           </p:cNvPr>
@@ -32163,7 +29640,7 @@
           <p:cNvPr id="9" name="">
             <a:extLst xmlns:a="http://schemas.openxmlformats.org/drawingml/2006/main">
               <a:ext uri="{FF2B5EF4-FFF2-40B4-BE49-F238E27FC236}">
-                <a16:creationId xmlns:a16="http://schemas.microsoft.com/office/drawing/2014/main" id="{DA8C4A1F-85E3-4780-9779-693DD4D69510}"/>
+                <a16:creationId xmlns:a16="http://schemas.microsoft.com/office/drawing/2014/main" id="{7E9C7D32-4515-40B7-9BD7-2839E59641B8}"/>
               </a:ext>
             </a:extLst>
           </p:cNvPr>
@@ -32321,7 +29798,7 @@
           <p:cNvPr id="10" name="">
             <a:extLst xmlns:a="http://schemas.openxmlformats.org/drawingml/2006/main">
               <a:ext uri="{FF2B5EF4-FFF2-40B4-BE49-F238E27FC236}">
-                <a16:creationId xmlns:a16="http://schemas.microsoft.com/office/drawing/2014/main" id="{DEF70EE2-9FBA-4113-A592-A07A17D3BD0E}"/>
+                <a16:creationId xmlns:a16="http://schemas.microsoft.com/office/drawing/2014/main" id="{668FACD5-CF94-4BED-A76B-C250FD0ECB6E}"/>
               </a:ext>
             </a:extLst>
           </p:cNvPr>
@@ -32507,7 +29984,7 @@
           <p:cNvPr id="11" name="">
             <a:extLst xmlns:a="http://schemas.openxmlformats.org/drawingml/2006/main">
               <a:ext uri="{FF2B5EF4-FFF2-40B4-BE49-F238E27FC236}">
-                <a16:creationId xmlns:a16="http://schemas.microsoft.com/office/drawing/2014/main" id="{1684EBFA-4A1F-4AC9-83AE-630C3B090325}"/>
+                <a16:creationId xmlns:a16="http://schemas.microsoft.com/office/drawing/2014/main" id="{865BE291-B400-46F0-80EE-CCEB10730EA9}"/>
               </a:ext>
             </a:extLst>
           </p:cNvPr>
@@ -32665,7 +30142,7 @@
           <p:cNvPr id="12" name="">
             <a:extLst xmlns:a="http://schemas.openxmlformats.org/drawingml/2006/main">
               <a:ext uri="{FF2B5EF4-FFF2-40B4-BE49-F238E27FC236}">
-                <a16:creationId xmlns:a16="http://schemas.microsoft.com/office/drawing/2014/main" id="{C29310AF-24C5-45A9-8F05-43AEB3D37509}"/>
+                <a16:creationId xmlns:a16="http://schemas.microsoft.com/office/drawing/2014/main" id="{E666E5BF-2B81-4069-8237-1D468E8309DB}"/>
               </a:ext>
             </a:extLst>
           </p:cNvPr>
@@ -32821,7 +30298,7 @@
     </p:spTree>
     <p:extLst>
       <p:ext uri="{BB962C8B-B14F-4D97-AF65-F5344CB8AC3E}">
-        <p14:creationId xmlns:p14="http://schemas.microsoft.com/office/powerpoint/2010/main" val="870807884"/>
+        <p14:creationId xmlns:p14="http://schemas.microsoft.com/office/powerpoint/2010/main" val="337024605"/>
       </p:ext>
     </p:extLst>
   </p:cSld>
@@ -32852,7 +30329,7 @@
           <p:cNvPr id="14" name="">
             <a:extLst xmlns:a="http://schemas.openxmlformats.org/drawingml/2006/main">
               <a:ext uri="{FF2B5EF4-FFF2-40B4-BE49-F238E27FC236}">
-                <a16:creationId xmlns:a16="http://schemas.microsoft.com/office/drawing/2014/main" id="{D21EF80B-576E-408A-B5AE-F7632AED9742}"/>
+                <a16:creationId xmlns:a16="http://schemas.microsoft.com/office/drawing/2014/main" id="{CC8B803F-72DB-4CD5-9EDD-3CF96B9B9D01}"/>
               </a:ext>
             </a:extLst>
           </p:cNvPr>
@@ -33010,7 +30487,7 @@
           <p:cNvPr id="2" name="">
             <a:extLst xmlns:a="http://schemas.openxmlformats.org/drawingml/2006/main">
               <a:ext uri="{FF2B5EF4-FFF2-40B4-BE49-F238E27FC236}">
-                <a16:creationId xmlns:a16="http://schemas.microsoft.com/office/drawing/2014/main" id="{150C0012-669C-4DBC-9AFE-277EC6477B0E}"/>
+                <a16:creationId xmlns:a16="http://schemas.microsoft.com/office/drawing/2014/main" id="{28C56428-6198-49C2-AB3C-885AC293155D}"/>
               </a:ext>
             </a:extLst>
           </p:cNvPr>
@@ -33168,7 +30645,7 @@
           <p:cNvPr id="3" name="">
             <a:extLst xmlns:a="http://schemas.openxmlformats.org/drawingml/2006/main">
               <a:ext uri="{FF2B5EF4-FFF2-40B4-BE49-F238E27FC236}">
-                <a16:creationId xmlns:a16="http://schemas.microsoft.com/office/drawing/2014/main" id="{9CD3BD4A-2716-4C46-9452-DA16C5CC6490}"/>
+                <a16:creationId xmlns:a16="http://schemas.microsoft.com/office/drawing/2014/main" id="{F6D57A9B-070B-42A2-B75B-AD7024CF7BB6}"/>
               </a:ext>
             </a:extLst>
           </p:cNvPr>
@@ -33326,7 +30803,7 @@
           <p:cNvPr id="4" name="">
             <a:extLst xmlns:a="http://schemas.openxmlformats.org/drawingml/2006/main">
               <a:ext uri="{FF2B5EF4-FFF2-40B4-BE49-F238E27FC236}">
-                <a16:creationId xmlns:a16="http://schemas.microsoft.com/office/drawing/2014/main" id="{AF5B00D8-8F5A-4588-89B5-F15595FE8035}"/>
+                <a16:creationId xmlns:a16="http://schemas.microsoft.com/office/drawing/2014/main" id="{8CA2E7E2-2245-40DF-8764-D8A500E021DC}"/>
               </a:ext>
             </a:extLst>
           </p:cNvPr>
@@ -33336,7 +30813,7 @@
           <p:nvPr/>
         </p:nvPicPr>
         <p:blipFill>
-          <a:blip xmlns:r="http://schemas.openxmlformats.org/officeDocument/2006/relationships" xmlns:a="http://schemas.openxmlformats.org/drawingml/2006/main" r:embed="Rdf1214cdbdcd453d"/>
+          <a:blip xmlns:r="http://schemas.openxmlformats.org/officeDocument/2006/relationships" xmlns:a="http://schemas.openxmlformats.org/drawingml/2006/main" r:embed="R953a957811d5400a"/>
           <a:stretch xmlns:a="http://schemas.openxmlformats.org/drawingml/2006/main"/>
         </p:blipFill>
         <p:spPr>
@@ -33354,7 +30831,7 @@
           <p:cNvPr id="5" name="">
             <a:extLst xmlns:a="http://schemas.openxmlformats.org/drawingml/2006/main">
               <a:ext uri="{FF2B5EF4-FFF2-40B4-BE49-F238E27FC236}">
-                <a16:creationId xmlns:a16="http://schemas.microsoft.com/office/drawing/2014/main" id="{0F33EC1F-385E-4871-AD9E-A24496EE3E4B}"/>
+                <a16:creationId xmlns:a16="http://schemas.microsoft.com/office/drawing/2014/main" id="{21D9951E-6F8D-410F-B2C2-5A2379B67641}"/>
               </a:ext>
             </a:extLst>
           </p:cNvPr>
@@ -33512,7 +30989,7 @@
           <p:cNvPr id="6" name="">
             <a:extLst xmlns:a="http://schemas.openxmlformats.org/drawingml/2006/main">
               <a:ext uri="{FF2B5EF4-FFF2-40B4-BE49-F238E27FC236}">
-                <a16:creationId xmlns:a16="http://schemas.microsoft.com/office/drawing/2014/main" id="{5C47943D-F4BF-4413-AE01-1C1992C3D409}"/>
+                <a16:creationId xmlns:a16="http://schemas.microsoft.com/office/drawing/2014/main" id="{F48C10AD-BBE3-4BD3-B0F2-1EA1E306F56C}"/>
               </a:ext>
             </a:extLst>
           </p:cNvPr>
@@ -33670,7 +31147,7 @@
           <p:cNvPr id="7" name="">
             <a:extLst xmlns:a="http://schemas.openxmlformats.org/drawingml/2006/main">
               <a:ext uri="{FF2B5EF4-FFF2-40B4-BE49-F238E27FC236}">
-                <a16:creationId xmlns:a16="http://schemas.microsoft.com/office/drawing/2014/main" id="{916212A3-EA4B-4FF8-9DFB-FFAA4D226396}"/>
+                <a16:creationId xmlns:a16="http://schemas.microsoft.com/office/drawing/2014/main" id="{398F1E5F-CA37-4300-A97E-23DE9AA4ADEC}"/>
               </a:ext>
             </a:extLst>
           </p:cNvPr>
@@ -33680,7 +31157,7 @@
           <p:nvPr/>
         </p:nvPicPr>
         <p:blipFill>
-          <a:blip xmlns:r="http://schemas.openxmlformats.org/officeDocument/2006/relationships" xmlns:a="http://schemas.openxmlformats.org/drawingml/2006/main" r:embed="R2aca734347aa4483"/>
+          <a:blip xmlns:r="http://schemas.openxmlformats.org/officeDocument/2006/relationships" xmlns:a="http://schemas.openxmlformats.org/drawingml/2006/main" r:embed="R1730752e585b448b"/>
           <a:stretch xmlns:a="http://schemas.openxmlformats.org/drawingml/2006/main"/>
         </p:blipFill>
         <p:spPr>
@@ -33698,7 +31175,7 @@
           <p:cNvPr id="8" name="">
             <a:extLst xmlns:a="http://schemas.openxmlformats.org/drawingml/2006/main">
               <a:ext uri="{FF2B5EF4-FFF2-40B4-BE49-F238E27FC236}">
-                <a16:creationId xmlns:a16="http://schemas.microsoft.com/office/drawing/2014/main" id="{C946FD60-215B-4D25-9FF8-D647EA7961A3}"/>
+                <a16:creationId xmlns:a16="http://schemas.microsoft.com/office/drawing/2014/main" id="{40AFCF63-5BED-45BC-B7B0-388B3A820880}"/>
               </a:ext>
             </a:extLst>
           </p:cNvPr>
@@ -33856,7 +31333,7 @@
           <p:cNvPr id="9" name="">
             <a:extLst xmlns:a="http://schemas.openxmlformats.org/drawingml/2006/main">
               <a:ext uri="{FF2B5EF4-FFF2-40B4-BE49-F238E27FC236}">
-                <a16:creationId xmlns:a16="http://schemas.microsoft.com/office/drawing/2014/main" id="{3FD06E1B-7777-42D1-AEEF-637702ABFA7D}"/>
+                <a16:creationId xmlns:a16="http://schemas.microsoft.com/office/drawing/2014/main" id="{31FF948A-6B68-4786-9EF2-8AF969975FF7}"/>
               </a:ext>
             </a:extLst>
           </p:cNvPr>
@@ -34014,7 +31491,7 @@
           <p:cNvPr id="10" name="">
             <a:extLst xmlns:a="http://schemas.openxmlformats.org/drawingml/2006/main">
               <a:ext uri="{FF2B5EF4-FFF2-40B4-BE49-F238E27FC236}">
-                <a16:creationId xmlns:a16="http://schemas.microsoft.com/office/drawing/2014/main" id="{C32FE250-AD9C-4ED2-9464-F5E26A8209E6}"/>
+                <a16:creationId xmlns:a16="http://schemas.microsoft.com/office/drawing/2014/main" id="{46378D5E-602B-47BA-965D-6442F3B609F0}"/>
               </a:ext>
             </a:extLst>
           </p:cNvPr>
@@ -34024,7 +31501,7 @@
           <p:nvPr/>
         </p:nvPicPr>
         <p:blipFill>
-          <a:blip xmlns:r="http://schemas.openxmlformats.org/officeDocument/2006/relationships" xmlns:a="http://schemas.openxmlformats.org/drawingml/2006/main" r:embed="R24464d35f7114461"/>
+          <a:blip xmlns:r="http://schemas.openxmlformats.org/officeDocument/2006/relationships" xmlns:a="http://schemas.openxmlformats.org/drawingml/2006/main" r:embed="Rddcd06cc7f464158"/>
           <a:stretch xmlns:a="http://schemas.openxmlformats.org/drawingml/2006/main"/>
         </p:blipFill>
         <p:spPr>
@@ -34042,7 +31519,7 @@
           <p:cNvPr id="11" name="">
             <a:extLst xmlns:a="http://schemas.openxmlformats.org/drawingml/2006/main">
               <a:ext uri="{FF2B5EF4-FFF2-40B4-BE49-F238E27FC236}">
-                <a16:creationId xmlns:a16="http://schemas.microsoft.com/office/drawing/2014/main" id="{D47289DD-0801-48F5-B1F1-D8DA33EB5EA8}"/>
+                <a16:creationId xmlns:a16="http://schemas.microsoft.com/office/drawing/2014/main" id="{85EC7536-B732-48C3-AE76-50D634F816F1}"/>
               </a:ext>
             </a:extLst>
           </p:cNvPr>
@@ -34200,7 +31677,7 @@
           <p:cNvPr id="12" name="">
             <a:extLst xmlns:a="http://schemas.openxmlformats.org/drawingml/2006/main">
               <a:ext uri="{FF2B5EF4-FFF2-40B4-BE49-F238E27FC236}">
-                <a16:creationId xmlns:a16="http://schemas.microsoft.com/office/drawing/2014/main" id="{99A96A6A-F282-4436-849A-4B5D5D5B35E1}"/>
+                <a16:creationId xmlns:a16="http://schemas.microsoft.com/office/drawing/2014/main" id="{D64880A7-1994-4B3B-BB0A-B6CEBEBC7DFC}"/>
               </a:ext>
             </a:extLst>
           </p:cNvPr>
@@ -34358,7 +31835,7 @@
           <p:cNvPr id="13" name="">
             <a:extLst xmlns:a="http://schemas.openxmlformats.org/drawingml/2006/main">
               <a:ext uri="{FF2B5EF4-FFF2-40B4-BE49-F238E27FC236}">
-                <a16:creationId xmlns:a16="http://schemas.microsoft.com/office/drawing/2014/main" id="{D9D07CA0-6BA8-4B83-843A-F114319B961B}"/>
+                <a16:creationId xmlns:a16="http://schemas.microsoft.com/office/drawing/2014/main" id="{98B49E62-C337-4FC7-BF8D-054FEA3AE985}"/>
               </a:ext>
             </a:extLst>
           </p:cNvPr>
@@ -34542,7 +32019,7 @@
     </p:spTree>
     <p:extLst>
       <p:ext uri="{BB962C8B-B14F-4D97-AF65-F5344CB8AC3E}">
-        <p14:creationId xmlns:p14="http://schemas.microsoft.com/office/powerpoint/2010/main" val="157706165"/>
+        <p14:creationId xmlns:p14="http://schemas.microsoft.com/office/powerpoint/2010/main" val="1297326515"/>
       </p:ext>
     </p:extLst>
   </p:cSld>

--- a/lendet/2026-2027/mobile/lectures/ligjerata-07-kontrolli-mvp-rideshare-2026.pptx
+++ b/lendet/2026-2027/mobile/lectures/ligjerata-07-kontrolli-mvp-rideshare-2026.pptx
@@ -2,35 +2,35 @@
 <file path=ppt/presentation.xml><?xml version="1.0" encoding="utf-8"?>
 <p:presentation xmlns:p="http://schemas.openxmlformats.org/presentationml/2006/main">
   <p:sldMasterIdLst>
-    <p:sldMasterId xmlns:r="http://schemas.openxmlformats.org/officeDocument/2006/relationships" id="2147483648" r:id="R189d41fa282443af"/>
+    <p:sldMasterId xmlns:r="http://schemas.openxmlformats.org/officeDocument/2006/relationships" id="2147483648" r:id="Reae7f1c8315b4505"/>
   </p:sldMasterIdLst>
   <p:sldIdLst>
-    <p:sldId xmlns:r="http://schemas.openxmlformats.org/officeDocument/2006/relationships" id="256" r:id="Rb256bf022a1a4b7d"/>
-    <p:sldId xmlns:r="http://schemas.openxmlformats.org/officeDocument/2006/relationships" id="257" r:id="R74c508e5a1e14d7a"/>
-    <p:sldId xmlns:r="http://schemas.openxmlformats.org/officeDocument/2006/relationships" id="258" r:id="R80e1b20318ee4318"/>
-    <p:sldId xmlns:r="http://schemas.openxmlformats.org/officeDocument/2006/relationships" id="259" r:id="Rd9295285d7124afd"/>
-    <p:sldId xmlns:r="http://schemas.openxmlformats.org/officeDocument/2006/relationships" id="260" r:id="R78fbe8b04c574630"/>
-    <p:sldId xmlns:r="http://schemas.openxmlformats.org/officeDocument/2006/relationships" id="261" r:id="R72e68d5c68074a4f"/>
-    <p:sldId xmlns:r="http://schemas.openxmlformats.org/officeDocument/2006/relationships" id="262" r:id="R3425a96099064bba"/>
-    <p:sldId xmlns:r="http://schemas.openxmlformats.org/officeDocument/2006/relationships" id="263" r:id="R4a859887c66f4042"/>
-    <p:sldId xmlns:r="http://schemas.openxmlformats.org/officeDocument/2006/relationships" id="264" r:id="R04ec65b1ab8c4e9d"/>
-    <p:sldId xmlns:r="http://schemas.openxmlformats.org/officeDocument/2006/relationships" id="265" r:id="Rda49ee4788a3455e"/>
-    <p:sldId xmlns:r="http://schemas.openxmlformats.org/officeDocument/2006/relationships" id="266" r:id="R5500173d554b409e"/>
-    <p:sldId xmlns:r="http://schemas.openxmlformats.org/officeDocument/2006/relationships" id="267" r:id="R089b82ee2ce749a7"/>
-    <p:sldId xmlns:r="http://schemas.openxmlformats.org/officeDocument/2006/relationships" id="268" r:id="Rfdcb997532c8465f"/>
-    <p:sldId xmlns:r="http://schemas.openxmlformats.org/officeDocument/2006/relationships" id="269" r:id="R06433087591745cb"/>
-    <p:sldId xmlns:r="http://schemas.openxmlformats.org/officeDocument/2006/relationships" id="270" r:id="Rf4b20710329348d9"/>
-    <p:sldId xmlns:r="http://schemas.openxmlformats.org/officeDocument/2006/relationships" id="271" r:id="Rc9e3f65bacaf44c9"/>
-    <p:sldId xmlns:r="http://schemas.openxmlformats.org/officeDocument/2006/relationships" id="272" r:id="R8756db6f9131498e"/>
-    <p:sldId xmlns:r="http://schemas.openxmlformats.org/officeDocument/2006/relationships" id="273" r:id="Re422f4697b914360"/>
-    <p:sldId xmlns:r="http://schemas.openxmlformats.org/officeDocument/2006/relationships" id="274" r:id="R821d476f11774fe5"/>
-    <p:sldId xmlns:r="http://schemas.openxmlformats.org/officeDocument/2006/relationships" id="275" r:id="R36e1b282fe514027"/>
-    <p:sldId xmlns:r="http://schemas.openxmlformats.org/officeDocument/2006/relationships" id="276" r:id="Rf789481c6ca946de"/>
-    <p:sldId xmlns:r="http://schemas.openxmlformats.org/officeDocument/2006/relationships" id="277" r:id="R57e1ccf6835e4343"/>
-    <p:sldId xmlns:r="http://schemas.openxmlformats.org/officeDocument/2006/relationships" id="278" r:id="Rd5c2678427fa4be0"/>
-    <p:sldId xmlns:r="http://schemas.openxmlformats.org/officeDocument/2006/relationships" id="279" r:id="Rae27f0a5434742a8"/>
-    <p:sldId xmlns:r="http://schemas.openxmlformats.org/officeDocument/2006/relationships" id="280" r:id="Ra84c9e6c0e55401a"/>
-    <p:sldId xmlns:r="http://schemas.openxmlformats.org/officeDocument/2006/relationships" id="281" r:id="R315704c009434d44"/>
+    <p:sldId xmlns:r="http://schemas.openxmlformats.org/officeDocument/2006/relationships" id="256" r:id="Rd34778afc006456f"/>
+    <p:sldId xmlns:r="http://schemas.openxmlformats.org/officeDocument/2006/relationships" id="257" r:id="Rcc0b57e9cd6946ee"/>
+    <p:sldId xmlns:r="http://schemas.openxmlformats.org/officeDocument/2006/relationships" id="258" r:id="R45b7a600c6954b67"/>
+    <p:sldId xmlns:r="http://schemas.openxmlformats.org/officeDocument/2006/relationships" id="259" r:id="R690f5f9f27a44b1c"/>
+    <p:sldId xmlns:r="http://schemas.openxmlformats.org/officeDocument/2006/relationships" id="260" r:id="R4b3dd44e1e104d75"/>
+    <p:sldId xmlns:r="http://schemas.openxmlformats.org/officeDocument/2006/relationships" id="261" r:id="R0dd0c3de3dae480e"/>
+    <p:sldId xmlns:r="http://schemas.openxmlformats.org/officeDocument/2006/relationships" id="262" r:id="Rcb9e5146843246ba"/>
+    <p:sldId xmlns:r="http://schemas.openxmlformats.org/officeDocument/2006/relationships" id="263" r:id="R8890a8820dda40e4"/>
+    <p:sldId xmlns:r="http://schemas.openxmlformats.org/officeDocument/2006/relationships" id="264" r:id="Re43c2c8531cb46aa"/>
+    <p:sldId xmlns:r="http://schemas.openxmlformats.org/officeDocument/2006/relationships" id="265" r:id="R088238a11f694369"/>
+    <p:sldId xmlns:r="http://schemas.openxmlformats.org/officeDocument/2006/relationships" id="266" r:id="R7b2b360dce1b43c0"/>
+    <p:sldId xmlns:r="http://schemas.openxmlformats.org/officeDocument/2006/relationships" id="267" r:id="Rd896cf5226664b02"/>
+    <p:sldId xmlns:r="http://schemas.openxmlformats.org/officeDocument/2006/relationships" id="268" r:id="Rba0400967b6c4bc6"/>
+    <p:sldId xmlns:r="http://schemas.openxmlformats.org/officeDocument/2006/relationships" id="269" r:id="R2eacc7c61fac4380"/>
+    <p:sldId xmlns:r="http://schemas.openxmlformats.org/officeDocument/2006/relationships" id="270" r:id="R754469c7ebcb4340"/>
+    <p:sldId xmlns:r="http://schemas.openxmlformats.org/officeDocument/2006/relationships" id="271" r:id="R1da0f65f5be945f8"/>
+    <p:sldId xmlns:r="http://schemas.openxmlformats.org/officeDocument/2006/relationships" id="272" r:id="Re8915cc7f7444e28"/>
+    <p:sldId xmlns:r="http://schemas.openxmlformats.org/officeDocument/2006/relationships" id="273" r:id="R195b89831e994d0c"/>
+    <p:sldId xmlns:r="http://schemas.openxmlformats.org/officeDocument/2006/relationships" id="274" r:id="R29d57445e1c54ad2"/>
+    <p:sldId xmlns:r="http://schemas.openxmlformats.org/officeDocument/2006/relationships" id="275" r:id="R6736ce76eb8745c8"/>
+    <p:sldId xmlns:r="http://schemas.openxmlformats.org/officeDocument/2006/relationships" id="276" r:id="R8f1e0c08fcd64b17"/>
+    <p:sldId xmlns:r="http://schemas.openxmlformats.org/officeDocument/2006/relationships" id="277" r:id="Re660de4f07fb46f6"/>
+    <p:sldId xmlns:r="http://schemas.openxmlformats.org/officeDocument/2006/relationships" id="278" r:id="Reb9b4fce210a477b"/>
+    <p:sldId xmlns:r="http://schemas.openxmlformats.org/officeDocument/2006/relationships" id="279" r:id="Re08d5ac479384f04"/>
+    <p:sldId xmlns:r="http://schemas.openxmlformats.org/officeDocument/2006/relationships" id="280" r:id="Rb7d25723e65f403f"/>
+    <p:sldId xmlns:r="http://schemas.openxmlformats.org/officeDocument/2006/relationships" id="281" r:id="R28432506a38a4c96"/>
   </p:sldIdLst>
   <p:sldSz cx="12192000" cy="6858000"/>
   <p:notesSz cx="6858000" cy="9144000"/>
@@ -54,7 +54,7 @@
           <p:cNvPr id="3" name="Title">
             <a:extLst xmlns:a="http://schemas.openxmlformats.org/drawingml/2006/main">
               <a:ext uri="{FF2B5EF4-FFF2-40B4-BE49-F238E27FC236}">
-                <a16:creationId xmlns:a16="http://schemas.microsoft.com/office/drawing/2014/main" id="{3F180660-3B22-4E44-8ABC-BA00B7DA83A1}"/>
+                <a16:creationId xmlns:a16="http://schemas.microsoft.com/office/drawing/2014/main" id="{13973903-4D62-408D-9CD5-A8CF01598326}"/>
               </a:ext>
             </a:extLst>
           </p:cNvPr>
@@ -283,7 +283,7 @@
           <p:cNvPr id="2" name="Subtitle">
             <a:extLst xmlns:a="http://schemas.openxmlformats.org/drawingml/2006/main">
               <a:ext uri="{FF2B5EF4-FFF2-40B4-BE49-F238E27FC236}">
-                <a16:creationId xmlns:a16="http://schemas.microsoft.com/office/drawing/2014/main" id="{BE221A9F-9600-4344-A2EC-2B5203A32354}"/>
+                <a16:creationId xmlns:a16="http://schemas.microsoft.com/office/drawing/2014/main" id="{471BD2C2-A075-4560-8B06-71AD98C27FDF}"/>
               </a:ext>
             </a:extLst>
           </p:cNvPr>
@@ -529,7 +529,7 @@
           <p:cNvPr id="2" name="Section title">
             <a:extLst xmlns:a="http://schemas.openxmlformats.org/drawingml/2006/main">
               <a:ext uri="{FF2B5EF4-FFF2-40B4-BE49-F238E27FC236}">
-                <a16:creationId xmlns:a16="http://schemas.microsoft.com/office/drawing/2014/main" id="{4E63D231-8EFD-4FAB-BC59-511554F78C61}"/>
+                <a16:creationId xmlns:a16="http://schemas.microsoft.com/office/drawing/2014/main" id="{A857707F-5E5F-4892-BFEE-D0ACDF952EE3}"/>
               </a:ext>
             </a:extLst>
           </p:cNvPr>
@@ -775,7 +775,7 @@
           <p:cNvPr id="3" name="Title">
             <a:extLst xmlns:a="http://schemas.openxmlformats.org/drawingml/2006/main">
               <a:ext uri="{FF2B5EF4-FFF2-40B4-BE49-F238E27FC236}">
-                <a16:creationId xmlns:a16="http://schemas.microsoft.com/office/drawing/2014/main" id="{03143E81-9602-4975-9476-C6D0C9D3859D}"/>
+                <a16:creationId xmlns:a16="http://schemas.microsoft.com/office/drawing/2014/main" id="{A08592CD-8C82-41F5-9DB8-A81979961DDB}"/>
               </a:ext>
             </a:extLst>
           </p:cNvPr>
@@ -1004,7 +1004,7 @@
           <p:cNvPr id="2" name="Body">
             <a:extLst xmlns:a="http://schemas.openxmlformats.org/drawingml/2006/main">
               <a:ext uri="{FF2B5EF4-FFF2-40B4-BE49-F238E27FC236}">
-                <a16:creationId xmlns:a16="http://schemas.microsoft.com/office/drawing/2014/main" id="{DBDCA341-DB3D-459A-BA98-510C99119908}"/>
+                <a16:creationId xmlns:a16="http://schemas.microsoft.com/office/drawing/2014/main" id="{F110BAA1-63EC-4DCD-8D46-19E8A9BE0F11}"/>
               </a:ext>
             </a:extLst>
           </p:cNvPr>
@@ -1250,7 +1250,7 @@
           <p:cNvPr id="4" name="Title">
             <a:extLst xmlns:a="http://schemas.openxmlformats.org/drawingml/2006/main">
               <a:ext uri="{FF2B5EF4-FFF2-40B4-BE49-F238E27FC236}">
-                <a16:creationId xmlns:a16="http://schemas.microsoft.com/office/drawing/2014/main" id="{3FD7C765-E9D0-4B58-BC0A-44757A9144A6}"/>
+                <a16:creationId xmlns:a16="http://schemas.microsoft.com/office/drawing/2014/main" id="{96E19230-E2C4-493A-8434-DB6177897953}"/>
               </a:ext>
             </a:extLst>
           </p:cNvPr>
@@ -1479,7 +1479,7 @@
           <p:cNvPr id="2" name="Left column">
             <a:extLst xmlns:a="http://schemas.openxmlformats.org/drawingml/2006/main">
               <a:ext uri="{FF2B5EF4-FFF2-40B4-BE49-F238E27FC236}">
-                <a16:creationId xmlns:a16="http://schemas.microsoft.com/office/drawing/2014/main" id="{F7D8CBB3-D8E2-4A4A-BC0B-63C9990606DF}"/>
+                <a16:creationId xmlns:a16="http://schemas.microsoft.com/office/drawing/2014/main" id="{5C904A23-6DB9-453D-9C14-0ED374000765}"/>
               </a:ext>
             </a:extLst>
           </p:cNvPr>
@@ -1708,7 +1708,7 @@
           <p:cNvPr id="3" name="Right column">
             <a:extLst xmlns:a="http://schemas.openxmlformats.org/drawingml/2006/main">
               <a:ext uri="{FF2B5EF4-FFF2-40B4-BE49-F238E27FC236}">
-                <a16:creationId xmlns:a16="http://schemas.microsoft.com/office/drawing/2014/main" id="{C707918C-C45D-4539-90B8-88D3969A3ABD}"/>
+                <a16:creationId xmlns:a16="http://schemas.microsoft.com/office/drawing/2014/main" id="{5539DF80-39D7-4C3D-AEBA-3337D7BF1481}"/>
               </a:ext>
             </a:extLst>
           </p:cNvPr>
@@ -1954,7 +1954,7 @@
           <p:cNvPr id="3" name="Title">
             <a:extLst xmlns:a="http://schemas.openxmlformats.org/drawingml/2006/main">
               <a:ext uri="{FF2B5EF4-FFF2-40B4-BE49-F238E27FC236}">
-                <a16:creationId xmlns:a16="http://schemas.microsoft.com/office/drawing/2014/main" id="{CD126AE5-A338-49BC-8912-BE4EFA1AC4FD}"/>
+                <a16:creationId xmlns:a16="http://schemas.microsoft.com/office/drawing/2014/main" id="{A2F92925-1C42-4FD2-85AC-396F8DBD31ED}"/>
               </a:ext>
             </a:extLst>
           </p:cNvPr>
@@ -2183,7 +2183,7 @@
           <p:cNvPr id="2" name="Left column">
             <a:extLst xmlns:a="http://schemas.openxmlformats.org/drawingml/2006/main">
               <a:ext uri="{FF2B5EF4-FFF2-40B4-BE49-F238E27FC236}">
-                <a16:creationId xmlns:a16="http://schemas.microsoft.com/office/drawing/2014/main" id="{DDA0D3AA-8781-491F-8099-8053902491D5}"/>
+                <a16:creationId xmlns:a16="http://schemas.microsoft.com/office/drawing/2014/main" id="{70F9AC71-A005-42E6-B657-061FE014FF54}"/>
               </a:ext>
             </a:extLst>
           </p:cNvPr>
@@ -2450,12 +2450,12 @@
   </p:cSld>
   <p:clrMap bg1="lt1" tx1="dk1" bg2="lt2" tx2="dk2" accent1="accent1" accent2="accent2" accent3="accent3" accent4="accent4" accent5="accent5" accent6="accent6" hlink="hlink" folHlink="folHlink"/>
   <p:sldLayoutIdLst>
-    <p:sldLayoutId xmlns:r="http://schemas.openxmlformats.org/officeDocument/2006/relationships" id="2147483649" r:id="R39096f99326e47a6"/>
-    <p:sldLayoutId xmlns:r="http://schemas.openxmlformats.org/officeDocument/2006/relationships" id="2147483650" r:id="R45b201d856d94676"/>
-    <p:sldLayoutId xmlns:r="http://schemas.openxmlformats.org/officeDocument/2006/relationships" id="2147483651" r:id="R1807c58097e6442f"/>
-    <p:sldLayoutId xmlns:r="http://schemas.openxmlformats.org/officeDocument/2006/relationships" id="2147483652" r:id="Rdf7285fe8d124f37"/>
-    <p:sldLayoutId xmlns:r="http://schemas.openxmlformats.org/officeDocument/2006/relationships" id="2147483653" r:id="R0dd584bf7cd34c28"/>
-    <p:sldLayoutId xmlns:r="http://schemas.openxmlformats.org/officeDocument/2006/relationships" id="2147483654" r:id="Rfdec26d552484d2d"/>
+    <p:sldLayoutId xmlns:r="http://schemas.openxmlformats.org/officeDocument/2006/relationships" id="2147483649" r:id="R13248a3504124b2e"/>
+    <p:sldLayoutId xmlns:r="http://schemas.openxmlformats.org/officeDocument/2006/relationships" id="2147483650" r:id="R6ced2f46f7984d7a"/>
+    <p:sldLayoutId xmlns:r="http://schemas.openxmlformats.org/officeDocument/2006/relationships" id="2147483651" r:id="Rf9cca6914dc74b9e"/>
+    <p:sldLayoutId xmlns:r="http://schemas.openxmlformats.org/officeDocument/2006/relationships" id="2147483652" r:id="Rae7f9a2a75d848a2"/>
+    <p:sldLayoutId xmlns:r="http://schemas.openxmlformats.org/officeDocument/2006/relationships" id="2147483653" r:id="R039413e912e045d8"/>
+    <p:sldLayoutId xmlns:r="http://schemas.openxmlformats.org/officeDocument/2006/relationships" id="2147483654" r:id="R754db82f368d4dac"/>
   </p:sldLayoutIdLst>
   <p:txStyles>
     <p:titleStyle>
@@ -3006,7 +3006,7 @@
           <p:cNvPr id="15" name="">
             <a:extLst xmlns:a="http://schemas.openxmlformats.org/drawingml/2006/main">
               <a:ext uri="{FF2B5EF4-FFF2-40B4-BE49-F238E27FC236}">
-                <a16:creationId xmlns:a16="http://schemas.microsoft.com/office/drawing/2014/main" id="{98CC9BB3-B1CD-44E4-82F1-AA75F101F9EF}"/>
+                <a16:creationId xmlns:a16="http://schemas.microsoft.com/office/drawing/2014/main" id="{F9917A7A-24BC-4FE0-B19B-2E7D2D9D0E85}"/>
               </a:ext>
             </a:extLst>
           </p:cNvPr>
@@ -3164,7 +3164,7 @@
           <p:cNvPr id="2" name="">
             <a:extLst xmlns:a="http://schemas.openxmlformats.org/drawingml/2006/main">
               <a:ext uri="{FF2B5EF4-FFF2-40B4-BE49-F238E27FC236}">
-                <a16:creationId xmlns:a16="http://schemas.microsoft.com/office/drawing/2014/main" id="{13E0BA0D-D7D2-4E5B-9A39-2D0FDE0C3040}"/>
+                <a16:creationId xmlns:a16="http://schemas.microsoft.com/office/drawing/2014/main" id="{52FE4502-35A4-4308-84EF-6070BFB2E404}"/>
               </a:ext>
             </a:extLst>
           </p:cNvPr>
@@ -3322,7 +3322,7 @@
           <p:cNvPr id="3" name="">
             <a:extLst xmlns:a="http://schemas.openxmlformats.org/drawingml/2006/main">
               <a:ext uri="{FF2B5EF4-FFF2-40B4-BE49-F238E27FC236}">
-                <a16:creationId xmlns:a16="http://schemas.microsoft.com/office/drawing/2014/main" id="{07754334-A948-4283-A038-BC64B3E82FA1}"/>
+                <a16:creationId xmlns:a16="http://schemas.microsoft.com/office/drawing/2014/main" id="{CFFE454C-3997-40AA-98E1-A66056B963F1}"/>
               </a:ext>
             </a:extLst>
           </p:cNvPr>
@@ -3332,7 +3332,7 @@
           <p:nvPr/>
         </p:nvPicPr>
         <p:blipFill>
-          <a:blip xmlns:r="http://schemas.openxmlformats.org/officeDocument/2006/relationships" xmlns:a="http://schemas.openxmlformats.org/drawingml/2006/main" r:embed="Ra2e321462a2f4184"/>
+          <a:blip xmlns:r="http://schemas.openxmlformats.org/officeDocument/2006/relationships" xmlns:a="http://schemas.openxmlformats.org/drawingml/2006/main" r:embed="R43ce024a12794811"/>
           <a:stretch xmlns:a="http://schemas.openxmlformats.org/drawingml/2006/main"/>
         </p:blipFill>
         <p:spPr>
@@ -3350,7 +3350,7 @@
           <p:cNvPr id="4" name="">
             <a:extLst xmlns:a="http://schemas.openxmlformats.org/drawingml/2006/main">
               <a:ext uri="{FF2B5EF4-FFF2-40B4-BE49-F238E27FC236}">
-                <a16:creationId xmlns:a16="http://schemas.microsoft.com/office/drawing/2014/main" id="{ACE5D485-F0B7-4720-A3F3-1A053D390290}"/>
+                <a16:creationId xmlns:a16="http://schemas.microsoft.com/office/drawing/2014/main" id="{685A0B36-FF73-4A08-BED8-0C6CE1BA7081}"/>
               </a:ext>
             </a:extLst>
           </p:cNvPr>
@@ -3498,7 +3498,7 @@
                 <a:ea typeface="Arial"/>
                 <a:cs typeface="Arial"/>
               </a:rPr>
-              <a:t>Kontrolli i MVP-së së RideShare</a:t>
+              <a:t>Java 7 · Kur MVP-ja është e përdorshme?</a:t>
             </a:r>
           </a:p>
         </p:txBody>
@@ -3508,7 +3508,7 @@
           <p:cNvPr id="5" name="">
             <a:extLst xmlns:a="http://schemas.openxmlformats.org/drawingml/2006/main">
               <a:ext uri="{FF2B5EF4-FFF2-40B4-BE49-F238E27FC236}">
-                <a16:creationId xmlns:a16="http://schemas.microsoft.com/office/drawing/2014/main" id="{5BED503F-E566-4A7F-871E-D4F46949E62A}"/>
+                <a16:creationId xmlns:a16="http://schemas.microsoft.com/office/drawing/2014/main" id="{BB5C93CC-E2DE-492B-8DC7-1D30DF9898A0}"/>
               </a:ext>
             </a:extLst>
           </p:cNvPr>
@@ -3518,7 +3518,7 @@
           <p:nvPr/>
         </p:nvPicPr>
         <p:blipFill>
-          <a:blip xmlns:r="http://schemas.openxmlformats.org/officeDocument/2006/relationships" xmlns:a="http://schemas.openxmlformats.org/drawingml/2006/main" r:embed="R958858ce461f4117"/>
+          <a:blip xmlns:r="http://schemas.openxmlformats.org/officeDocument/2006/relationships" xmlns:a="http://schemas.openxmlformats.org/drawingml/2006/main" r:embed="R368e0e5634934bc0"/>
           <a:stretch xmlns:a="http://schemas.openxmlformats.org/drawingml/2006/main"/>
         </p:blipFill>
         <p:spPr>
@@ -3536,7 +3536,7 @@
           <p:cNvPr id="6" name="">
             <a:extLst xmlns:a="http://schemas.openxmlformats.org/drawingml/2006/main">
               <a:ext uri="{FF2B5EF4-FFF2-40B4-BE49-F238E27FC236}">
-                <a16:creationId xmlns:a16="http://schemas.microsoft.com/office/drawing/2014/main" id="{35A1C9F8-3619-4E53-A79E-7EB3F8F48CB8}"/>
+                <a16:creationId xmlns:a16="http://schemas.microsoft.com/office/drawing/2014/main" id="{AD001DA1-4630-4378-B128-C05F17C96924}"/>
               </a:ext>
             </a:extLst>
           </p:cNvPr>
@@ -3684,7 +3684,7 @@
                 <a:ea typeface="Arial"/>
                 <a:cs typeface="Arial"/>
               </a:rPr>
-              <a:t>Tema e sotme</a:t>
+              <a:t>Çfarë po lidhim?</a:t>
             </a:r>
           </a:p>
         </p:txBody>
@@ -3694,7 +3694,7 @@
           <p:cNvPr id="7" name="">
             <a:extLst xmlns:a="http://schemas.openxmlformats.org/drawingml/2006/main">
               <a:ext uri="{FF2B5EF4-FFF2-40B4-BE49-F238E27FC236}">
-                <a16:creationId xmlns:a16="http://schemas.microsoft.com/office/drawing/2014/main" id="{B5166716-F8A5-422A-9EE2-47D3239BC978}"/>
+                <a16:creationId xmlns:a16="http://schemas.microsoft.com/office/drawing/2014/main" id="{BA94190F-55C0-45B5-A385-E97D5E2E15B6}"/>
               </a:ext>
             </a:extLst>
           </p:cNvPr>
@@ -3842,7 +3842,7 @@
                 <a:ea typeface="Arial"/>
                 <a:cs typeface="Arial"/>
               </a:rPr>
-              <a:t>Ekranet, të dhënat dhe lejet</a:t>
+              <a:t>Ekranet, të dhënat, hyrjen, offline</a:t>
             </a:r>
           </a:p>
         </p:txBody>
@@ -3852,7 +3852,7 @@
           <p:cNvPr id="8" name="">
             <a:extLst xmlns:a="http://schemas.openxmlformats.org/drawingml/2006/main">
               <a:ext uri="{FF2B5EF4-FFF2-40B4-BE49-F238E27FC236}">
-                <a16:creationId xmlns:a16="http://schemas.microsoft.com/office/drawing/2014/main" id="{17D0329C-94E3-4820-B0FF-B1441FCF0529}"/>
+                <a16:creationId xmlns:a16="http://schemas.microsoft.com/office/drawing/2014/main" id="{C5F9E8C5-1676-4F59-A716-20CEF92A149A}"/>
               </a:ext>
             </a:extLst>
           </p:cNvPr>
@@ -3862,7 +3862,7 @@
           <p:nvPr/>
         </p:nvPicPr>
         <p:blipFill>
-          <a:blip xmlns:r="http://schemas.openxmlformats.org/officeDocument/2006/relationships" xmlns:a="http://schemas.openxmlformats.org/drawingml/2006/main" r:embed="R4d11e9a3ca7f4490"/>
+          <a:blip xmlns:r="http://schemas.openxmlformats.org/officeDocument/2006/relationships" xmlns:a="http://schemas.openxmlformats.org/drawingml/2006/main" r:embed="R6239bf4956154f7d"/>
           <a:stretch xmlns:a="http://schemas.openxmlformats.org/drawingml/2006/main"/>
         </p:blipFill>
         <p:spPr>
@@ -3880,7 +3880,7 @@
           <p:cNvPr id="9" name="">
             <a:extLst xmlns:a="http://schemas.openxmlformats.org/drawingml/2006/main">
               <a:ext uri="{FF2B5EF4-FFF2-40B4-BE49-F238E27FC236}">
-                <a16:creationId xmlns:a16="http://schemas.microsoft.com/office/drawing/2014/main" id="{29F1897A-5830-4CF2-9DC7-B7B6D50F4403}"/>
+                <a16:creationId xmlns:a16="http://schemas.microsoft.com/office/drawing/2014/main" id="{2E1264FA-FCA6-4CC1-BD6C-F11341864AC8}"/>
               </a:ext>
             </a:extLst>
           </p:cNvPr>
@@ -4028,7 +4028,7 @@
                 <a:ea typeface="Arial"/>
                 <a:cs typeface="Arial"/>
               </a:rPr>
-              <a:t>Si do ta zbërthejmë</a:t>
+              <a:t>Si e kuptojmë?</a:t>
             </a:r>
           </a:p>
         </p:txBody>
@@ -4038,7 +4038,7 @@
           <p:cNvPr id="10" name="">
             <a:extLst xmlns:a="http://schemas.openxmlformats.org/drawingml/2006/main">
               <a:ext uri="{FF2B5EF4-FFF2-40B4-BE49-F238E27FC236}">
-                <a16:creationId xmlns:a16="http://schemas.microsoft.com/office/drawing/2014/main" id="{3C56AE74-766C-4FFA-9B66-44483452EF54}"/>
+                <a16:creationId xmlns:a16="http://schemas.microsoft.com/office/drawing/2014/main" id="{95071F7B-FFE3-4FB1-BC51-B3D4B5ACBB54}"/>
               </a:ext>
             </a:extLst>
           </p:cNvPr>
@@ -4186,7 +4186,7 @@
                 <a:ea typeface="Arial"/>
                 <a:cs typeface="Arial"/>
               </a:rPr>
-              <a:t>Demonstrim, votime dhe prova</a:t>
+              <a:t>Katër votime dhe diagnozë në klasë</a:t>
             </a:r>
           </a:p>
         </p:txBody>
@@ -4196,7 +4196,7 @@
           <p:cNvPr id="11" name="">
             <a:extLst xmlns:a="http://schemas.openxmlformats.org/drawingml/2006/main">
               <a:ext uri="{FF2B5EF4-FFF2-40B4-BE49-F238E27FC236}">
-                <a16:creationId xmlns:a16="http://schemas.microsoft.com/office/drawing/2014/main" id="{C9AA9592-214C-4171-B1FC-CBFEA6F64D18}"/>
+                <a16:creationId xmlns:a16="http://schemas.microsoft.com/office/drawing/2014/main" id="{2FFDC33A-FC69-4796-999A-B46DF21A8280}"/>
               </a:ext>
             </a:extLst>
           </p:cNvPr>
@@ -4206,7 +4206,7 @@
           <p:nvPr/>
         </p:nvPicPr>
         <p:blipFill>
-          <a:blip xmlns:r="http://schemas.openxmlformats.org/officeDocument/2006/relationships" xmlns:a="http://schemas.openxmlformats.org/drawingml/2006/main" r:embed="Re647fc29160d4c5e"/>
+          <a:blip xmlns:r="http://schemas.openxmlformats.org/officeDocument/2006/relationships" xmlns:a="http://schemas.openxmlformats.org/drawingml/2006/main" r:embed="R8e21fb55dddf4850"/>
           <a:stretch xmlns:a="http://schemas.openxmlformats.org/drawingml/2006/main"/>
         </p:blipFill>
         <p:spPr>
@@ -4224,7 +4224,7 @@
           <p:cNvPr id="12" name="">
             <a:extLst xmlns:a="http://schemas.openxmlformats.org/drawingml/2006/main">
               <a:ext uri="{FF2B5EF4-FFF2-40B4-BE49-F238E27FC236}">
-                <a16:creationId xmlns:a16="http://schemas.microsoft.com/office/drawing/2014/main" id="{2F5BEB19-D43F-486D-B2C0-FE1573F34CE3}"/>
+                <a16:creationId xmlns:a16="http://schemas.microsoft.com/office/drawing/2014/main" id="{106396E1-BC70-4D38-8DBF-15E824878E78}"/>
               </a:ext>
             </a:extLst>
           </p:cNvPr>
@@ -4372,7 +4372,7 @@
                 <a:ea typeface="Arial"/>
                 <a:cs typeface="Arial"/>
               </a:rPr>
-              <a:t>Në fund do të mundesh</a:t>
+              <a:t>Çfarë do të dish?</a:t>
             </a:r>
           </a:p>
         </p:txBody>
@@ -4382,7 +4382,7 @@
           <p:cNvPr id="13" name="">
             <a:extLst xmlns:a="http://schemas.openxmlformats.org/drawingml/2006/main">
               <a:ext uri="{FF2B5EF4-FFF2-40B4-BE49-F238E27FC236}">
-                <a16:creationId xmlns:a16="http://schemas.microsoft.com/office/drawing/2014/main" id="{F7A695A7-5B1F-43EF-BA47-5C694172211A}"/>
+                <a16:creationId xmlns:a16="http://schemas.microsoft.com/office/drawing/2014/main" id="{68DD2CAF-3236-445E-96C5-CE71AFC90856}"/>
               </a:ext>
             </a:extLst>
           </p:cNvPr>
@@ -4530,7 +4530,7 @@
                 <a:ea typeface="Arial"/>
                 <a:cs typeface="Arial"/>
               </a:rPr>
-              <a:t>Të shpjegosh e të provosh një korrigjim</a:t>
+              <a:t>Pse punon, ku dështon, çfarë premton</a:t>
             </a:r>
           </a:p>
         </p:txBody>
@@ -4540,7 +4540,7 @@
           <p:cNvPr id="14" name="">
             <a:extLst xmlns:a="http://schemas.openxmlformats.org/drawingml/2006/main">
               <a:ext uri="{FF2B5EF4-FFF2-40B4-BE49-F238E27FC236}">
-                <a16:creationId xmlns:a16="http://schemas.microsoft.com/office/drawing/2014/main" id="{4146740C-59DD-4F7F-B8B3-2F55993D6ABB}"/>
+                <a16:creationId xmlns:a16="http://schemas.microsoft.com/office/drawing/2014/main" id="{428DA86F-54FF-4DDE-8580-10290416CAE5}"/>
               </a:ext>
             </a:extLst>
           </p:cNvPr>
@@ -4688,7 +4688,7 @@
                 <a:ea typeface="Arial"/>
                 <a:cs typeface="Arial"/>
               </a:rPr>
-              <a:t>MVP (Minimum Viable Product) do të thotë produkti minimal i përdorshëm.</a:t>
+              <a:t>MVP (Minimum Viable Product) është produkti minimal i përdorshëm: një zgjidhje e vogël që kryen një punë të qartë.</a:t>
             </a:r>
           </a:p>
           <a:p xmlns:a="http://schemas.openxmlformats.org/drawingml/2006/main">
@@ -4716,7 +4716,7 @@
                 <a:ea typeface="Arial"/>
                 <a:cs typeface="Arial"/>
               </a:rPr>
-              <a:t>Në fund do të shpjegosh rrjedhën e aplikacionit, të dallosh një problem dhe të provosh korrigjimin.</a:t>
+              <a:t>Sot lidhim javët 3–6: ndjekim rrjedhën, kuptojmë ku lind problemi dhe arsyetojmë si provohet korrigjimi.</a:t>
             </a:r>
           </a:p>
         </p:txBody>
@@ -4724,7 +4724,7 @@
     </p:spTree>
     <p:extLst>
       <p:ext uri="{BB962C8B-B14F-4D97-AF65-F5344CB8AC3E}">
-        <p14:creationId xmlns:p14="http://schemas.microsoft.com/office/powerpoint/2010/main" val="1988373072"/>
+        <p14:creationId xmlns:p14="http://schemas.microsoft.com/office/powerpoint/2010/main" val="545945583"/>
       </p:ext>
     </p:extLst>
   </p:cSld>
@@ -4755,7 +4755,7 @@
           <p:cNvPr id="14" name="">
             <a:extLst xmlns:a="http://schemas.openxmlformats.org/drawingml/2006/main">
               <a:ext uri="{FF2B5EF4-FFF2-40B4-BE49-F238E27FC236}">
-                <a16:creationId xmlns:a16="http://schemas.microsoft.com/office/drawing/2014/main" id="{83610510-A0D2-4EF7-A901-E6D9BF9BC0C8}"/>
+                <a16:creationId xmlns:a16="http://schemas.microsoft.com/office/drawing/2014/main" id="{8F37770F-D40E-4EBC-91EA-6FC1E2A4BA93}"/>
               </a:ext>
             </a:extLst>
           </p:cNvPr>
@@ -4913,7 +4913,7 @@
           <p:cNvPr id="2" name="">
             <a:extLst xmlns:a="http://schemas.openxmlformats.org/drawingml/2006/main">
               <a:ext uri="{FF2B5EF4-FFF2-40B4-BE49-F238E27FC236}">
-                <a16:creationId xmlns:a16="http://schemas.microsoft.com/office/drawing/2014/main" id="{3E01D8F2-5617-45F6-988D-37A35782237C}"/>
+                <a16:creationId xmlns:a16="http://schemas.microsoft.com/office/drawing/2014/main" id="{9E094D0F-B810-443E-8AA6-4BA1F578812B}"/>
               </a:ext>
             </a:extLst>
           </p:cNvPr>
@@ -5071,7 +5071,7 @@
           <p:cNvPr id="3" name="">
             <a:extLst xmlns:a="http://schemas.openxmlformats.org/drawingml/2006/main">
               <a:ext uri="{FF2B5EF4-FFF2-40B4-BE49-F238E27FC236}">
-                <a16:creationId xmlns:a16="http://schemas.microsoft.com/office/drawing/2014/main" id="{2E8EA2F7-C847-42AF-917D-1F50B5A69A82}"/>
+                <a16:creationId xmlns:a16="http://schemas.microsoft.com/office/drawing/2014/main" id="{1569F632-25AA-4387-829E-DAA23A9A1223}"/>
               </a:ext>
             </a:extLst>
           </p:cNvPr>
@@ -5229,7 +5229,7 @@
           <p:cNvPr id="4" name="">
             <a:extLst xmlns:a="http://schemas.openxmlformats.org/drawingml/2006/main">
               <a:ext uri="{FF2B5EF4-FFF2-40B4-BE49-F238E27FC236}">
-                <a16:creationId xmlns:a16="http://schemas.microsoft.com/office/drawing/2014/main" id="{386C8A8E-8603-47BC-9D77-7471D320E5D0}"/>
+                <a16:creationId xmlns:a16="http://schemas.microsoft.com/office/drawing/2014/main" id="{A2D6B3C4-6FBD-47A9-91F7-D4061DE1ED79}"/>
               </a:ext>
             </a:extLst>
           </p:cNvPr>
@@ -5239,7 +5239,7 @@
           <p:nvPr/>
         </p:nvPicPr>
         <p:blipFill>
-          <a:blip xmlns:r="http://schemas.openxmlformats.org/officeDocument/2006/relationships" xmlns:a="http://schemas.openxmlformats.org/drawingml/2006/main" r:embed="Raeb1bf633601475c"/>
+          <a:blip xmlns:r="http://schemas.openxmlformats.org/officeDocument/2006/relationships" xmlns:a="http://schemas.openxmlformats.org/drawingml/2006/main" r:embed="Rb049be8cca734d19"/>
           <a:stretch xmlns:a="http://schemas.openxmlformats.org/drawingml/2006/main"/>
         </p:blipFill>
         <p:spPr>
@@ -5257,7 +5257,7 @@
           <p:cNvPr id="5" name="">
             <a:extLst xmlns:a="http://schemas.openxmlformats.org/drawingml/2006/main">
               <a:ext uri="{FF2B5EF4-FFF2-40B4-BE49-F238E27FC236}">
-                <a16:creationId xmlns:a16="http://schemas.microsoft.com/office/drawing/2014/main" id="{7A018B85-9B35-4BE7-81B2-6598AAD3BE3B}"/>
+                <a16:creationId xmlns:a16="http://schemas.microsoft.com/office/drawing/2014/main" id="{93A83BBC-11B9-4EBC-AED7-748A82B0F030}"/>
               </a:ext>
             </a:extLst>
           </p:cNvPr>
@@ -5415,7 +5415,7 @@
           <p:cNvPr id="6" name="">
             <a:extLst xmlns:a="http://schemas.openxmlformats.org/drawingml/2006/main">
               <a:ext uri="{FF2B5EF4-FFF2-40B4-BE49-F238E27FC236}">
-                <a16:creationId xmlns:a16="http://schemas.microsoft.com/office/drawing/2014/main" id="{93E014F8-9DD6-4061-83C9-1BAA481F0ADF}"/>
+                <a16:creationId xmlns:a16="http://schemas.microsoft.com/office/drawing/2014/main" id="{91F9CB87-1963-48FF-9697-5CED2A7223FD}"/>
               </a:ext>
             </a:extLst>
           </p:cNvPr>
@@ -5573,7 +5573,7 @@
           <p:cNvPr id="7" name="">
             <a:extLst xmlns:a="http://schemas.openxmlformats.org/drawingml/2006/main">
               <a:ext uri="{FF2B5EF4-FFF2-40B4-BE49-F238E27FC236}">
-                <a16:creationId xmlns:a16="http://schemas.microsoft.com/office/drawing/2014/main" id="{B05432BA-6D8F-4336-AA07-1C96AA3328D0}"/>
+                <a16:creationId xmlns:a16="http://schemas.microsoft.com/office/drawing/2014/main" id="{0C15A295-0C4F-46B3-9BA0-8CECD99BEA02}"/>
               </a:ext>
             </a:extLst>
           </p:cNvPr>
@@ -5731,7 +5731,7 @@
           <p:cNvPr id="8" name="">
             <a:extLst xmlns:a="http://schemas.openxmlformats.org/drawingml/2006/main">
               <a:ext uri="{FF2B5EF4-FFF2-40B4-BE49-F238E27FC236}">
-                <a16:creationId xmlns:a16="http://schemas.microsoft.com/office/drawing/2014/main" id="{8CF9F5BB-983B-4A28-8D6E-456E4FA795D5}"/>
+                <a16:creationId xmlns:a16="http://schemas.microsoft.com/office/drawing/2014/main" id="{C72F7287-D540-4419-977F-A1A6CA9C173D}"/>
               </a:ext>
             </a:extLst>
           </p:cNvPr>
@@ -5889,7 +5889,7 @@
           <p:cNvPr id="9" name="">
             <a:extLst xmlns:a="http://schemas.openxmlformats.org/drawingml/2006/main">
               <a:ext uri="{FF2B5EF4-FFF2-40B4-BE49-F238E27FC236}">
-                <a16:creationId xmlns:a16="http://schemas.microsoft.com/office/drawing/2014/main" id="{C9E8D732-1F02-421F-923C-2265F9CE2300}"/>
+                <a16:creationId xmlns:a16="http://schemas.microsoft.com/office/drawing/2014/main" id="{1C157C36-E8DF-4FF2-B505-9E8F906690A7}"/>
               </a:ext>
             </a:extLst>
           </p:cNvPr>
@@ -6047,7 +6047,7 @@
           <p:cNvPr id="10" name="">
             <a:extLst xmlns:a="http://schemas.openxmlformats.org/drawingml/2006/main">
               <a:ext uri="{FF2B5EF4-FFF2-40B4-BE49-F238E27FC236}">
-                <a16:creationId xmlns:a16="http://schemas.microsoft.com/office/drawing/2014/main" id="{8C1A41F4-67B7-4351-9634-64DC5DF3B285}"/>
+                <a16:creationId xmlns:a16="http://schemas.microsoft.com/office/drawing/2014/main" id="{D48F3AF6-B598-481F-8637-057003ADB779}"/>
               </a:ext>
             </a:extLst>
           </p:cNvPr>
@@ -6205,7 +6205,7 @@
           <p:cNvPr id="11" name="">
             <a:extLst xmlns:a="http://schemas.openxmlformats.org/drawingml/2006/main">
               <a:ext uri="{FF2B5EF4-FFF2-40B4-BE49-F238E27FC236}">
-                <a16:creationId xmlns:a16="http://schemas.microsoft.com/office/drawing/2014/main" id="{4025C489-2D94-4360-9F7F-647C159FA7E7}"/>
+                <a16:creationId xmlns:a16="http://schemas.microsoft.com/office/drawing/2014/main" id="{F92785E3-7DA1-4246-B3D2-BBC2CEC83AE6}"/>
               </a:ext>
             </a:extLst>
           </p:cNvPr>
@@ -6363,7 +6363,7 @@
           <p:cNvPr id="12" name="">
             <a:extLst xmlns:a="http://schemas.openxmlformats.org/drawingml/2006/main">
               <a:ext uri="{FF2B5EF4-FFF2-40B4-BE49-F238E27FC236}">
-                <a16:creationId xmlns:a16="http://schemas.microsoft.com/office/drawing/2014/main" id="{EF13C2CA-98D6-4804-BF68-D34F73B36C81}"/>
+                <a16:creationId xmlns:a16="http://schemas.microsoft.com/office/drawing/2014/main" id="{44B3725E-7D40-480D-A5A4-F700AC5252E9}"/>
               </a:ext>
             </a:extLst>
           </p:cNvPr>
@@ -6521,7 +6521,7 @@
           <p:cNvPr id="13" name="">
             <a:extLst xmlns:a="http://schemas.openxmlformats.org/drawingml/2006/main">
               <a:ext uri="{FF2B5EF4-FFF2-40B4-BE49-F238E27FC236}">
-                <a16:creationId xmlns:a16="http://schemas.microsoft.com/office/drawing/2014/main" id="{E53EB314-AB12-4FB1-B99C-E83044DDA724}"/>
+                <a16:creationId xmlns:a16="http://schemas.microsoft.com/office/drawing/2014/main" id="{CFAE69FD-66E8-4623-A97E-5AAE96CF6D4A}"/>
               </a:ext>
             </a:extLst>
           </p:cNvPr>
@@ -6677,7 +6677,7 @@
     </p:spTree>
     <p:extLst>
       <p:ext uri="{BB962C8B-B14F-4D97-AF65-F5344CB8AC3E}">
-        <p14:creationId xmlns:p14="http://schemas.microsoft.com/office/powerpoint/2010/main" val="999774699"/>
+        <p14:creationId xmlns:p14="http://schemas.microsoft.com/office/powerpoint/2010/main" val="203445185"/>
       </p:ext>
     </p:extLst>
   </p:cSld>
@@ -6708,7 +6708,7 @@
           <p:cNvPr id="14" name="">
             <a:extLst xmlns:a="http://schemas.openxmlformats.org/drawingml/2006/main">
               <a:ext uri="{FF2B5EF4-FFF2-40B4-BE49-F238E27FC236}">
-                <a16:creationId xmlns:a16="http://schemas.microsoft.com/office/drawing/2014/main" id="{C25D895C-158F-4899-A1ED-0FCDAC7458CA}"/>
+                <a16:creationId xmlns:a16="http://schemas.microsoft.com/office/drawing/2014/main" id="{129911DF-F26C-4063-B251-FEC5D8A296BA}"/>
               </a:ext>
             </a:extLst>
           </p:cNvPr>
@@ -6866,7 +6866,7 @@
           <p:cNvPr id="2" name="">
             <a:extLst xmlns:a="http://schemas.openxmlformats.org/drawingml/2006/main">
               <a:ext uri="{FF2B5EF4-FFF2-40B4-BE49-F238E27FC236}">
-                <a16:creationId xmlns:a16="http://schemas.microsoft.com/office/drawing/2014/main" id="{FFEAE9D7-9E94-4F10-83AB-ABCB392B17FB}"/>
+                <a16:creationId xmlns:a16="http://schemas.microsoft.com/office/drawing/2014/main" id="{51AFD2EC-8DAE-4A02-AE36-25A2D84D2BAE}"/>
               </a:ext>
             </a:extLst>
           </p:cNvPr>
@@ -7024,7 +7024,7 @@
           <p:cNvPr id="3" name="">
             <a:extLst xmlns:a="http://schemas.openxmlformats.org/drawingml/2006/main">
               <a:ext uri="{FF2B5EF4-FFF2-40B4-BE49-F238E27FC236}">
-                <a16:creationId xmlns:a16="http://schemas.microsoft.com/office/drawing/2014/main" id="{A433C946-77EE-4AAE-8C35-1475A48ECBC0}"/>
+                <a16:creationId xmlns:a16="http://schemas.microsoft.com/office/drawing/2014/main" id="{BD6C0040-56EB-4CE0-A535-7715E6488E1D}"/>
               </a:ext>
             </a:extLst>
           </p:cNvPr>
@@ -7182,7 +7182,7 @@
           <p:cNvPr id="4" name="">
             <a:extLst xmlns:a="http://schemas.openxmlformats.org/drawingml/2006/main">
               <a:ext uri="{FF2B5EF4-FFF2-40B4-BE49-F238E27FC236}">
-                <a16:creationId xmlns:a16="http://schemas.microsoft.com/office/drawing/2014/main" id="{DE381AB9-3ABF-4B31-BE6F-342FFF023105}"/>
+                <a16:creationId xmlns:a16="http://schemas.microsoft.com/office/drawing/2014/main" id="{4C14607B-2010-4AF5-AD91-9056C2F1D0D6}"/>
               </a:ext>
             </a:extLst>
           </p:cNvPr>
@@ -7192,7 +7192,7 @@
           <p:nvPr/>
         </p:nvPicPr>
         <p:blipFill>
-          <a:blip xmlns:r="http://schemas.openxmlformats.org/officeDocument/2006/relationships" xmlns:a="http://schemas.openxmlformats.org/drawingml/2006/main" r:embed="R084a0927cdf54d1f"/>
+          <a:blip xmlns:r="http://schemas.openxmlformats.org/officeDocument/2006/relationships" xmlns:a="http://schemas.openxmlformats.org/drawingml/2006/main" r:embed="Rb37ce0545aac4b78"/>
           <a:stretch xmlns:a="http://schemas.openxmlformats.org/drawingml/2006/main"/>
         </p:blipFill>
         <p:spPr>
@@ -7210,7 +7210,7 @@
           <p:cNvPr id="5" name="">
             <a:extLst xmlns:a="http://schemas.openxmlformats.org/drawingml/2006/main">
               <a:ext uri="{FF2B5EF4-FFF2-40B4-BE49-F238E27FC236}">
-                <a16:creationId xmlns:a16="http://schemas.microsoft.com/office/drawing/2014/main" id="{4E9F01EE-B04D-46A7-A75E-8CA45F091C97}"/>
+                <a16:creationId xmlns:a16="http://schemas.microsoft.com/office/drawing/2014/main" id="{FAC3F144-D65D-4CD9-9F86-329CC15F5C9A}"/>
               </a:ext>
             </a:extLst>
           </p:cNvPr>
@@ -7368,7 +7368,7 @@
           <p:cNvPr id="6" name="">
             <a:extLst xmlns:a="http://schemas.openxmlformats.org/drawingml/2006/main">
               <a:ext uri="{FF2B5EF4-FFF2-40B4-BE49-F238E27FC236}">
-                <a16:creationId xmlns:a16="http://schemas.microsoft.com/office/drawing/2014/main" id="{A2324465-5367-40AE-AB52-94CC12BC0845}"/>
+                <a16:creationId xmlns:a16="http://schemas.microsoft.com/office/drawing/2014/main" id="{61EA25B2-8C55-4DCA-9016-7D87C4A93FAA}"/>
               </a:ext>
             </a:extLst>
           </p:cNvPr>
@@ -7526,7 +7526,7 @@
           <p:cNvPr id="7" name="">
             <a:extLst xmlns:a="http://schemas.openxmlformats.org/drawingml/2006/main">
               <a:ext uri="{FF2B5EF4-FFF2-40B4-BE49-F238E27FC236}">
-                <a16:creationId xmlns:a16="http://schemas.microsoft.com/office/drawing/2014/main" id="{A9C96524-33DD-42C2-9601-9DF05FFC4F9F}"/>
+                <a16:creationId xmlns:a16="http://schemas.microsoft.com/office/drawing/2014/main" id="{D2D72CBB-173C-4B69-B95B-31AFBC9D9FEA}"/>
               </a:ext>
             </a:extLst>
           </p:cNvPr>
@@ -7536,7 +7536,7 @@
           <p:nvPr/>
         </p:nvPicPr>
         <p:blipFill>
-          <a:blip xmlns:r="http://schemas.openxmlformats.org/officeDocument/2006/relationships" xmlns:a="http://schemas.openxmlformats.org/drawingml/2006/main" r:embed="Rd49f6a9850534d6a"/>
+          <a:blip xmlns:r="http://schemas.openxmlformats.org/officeDocument/2006/relationships" xmlns:a="http://schemas.openxmlformats.org/drawingml/2006/main" r:embed="Ra3acdd5c70b44755"/>
           <a:stretch xmlns:a="http://schemas.openxmlformats.org/drawingml/2006/main"/>
         </p:blipFill>
         <p:spPr>
@@ -7554,7 +7554,7 @@
           <p:cNvPr id="8" name="">
             <a:extLst xmlns:a="http://schemas.openxmlformats.org/drawingml/2006/main">
               <a:ext uri="{FF2B5EF4-FFF2-40B4-BE49-F238E27FC236}">
-                <a16:creationId xmlns:a16="http://schemas.microsoft.com/office/drawing/2014/main" id="{E8051502-8BE4-4AA2-A757-B44A4862A1C4}"/>
+                <a16:creationId xmlns:a16="http://schemas.microsoft.com/office/drawing/2014/main" id="{DC09FD28-D566-49F7-A2F3-DDAE220EA3A4}"/>
               </a:ext>
             </a:extLst>
           </p:cNvPr>
@@ -7712,7 +7712,7 @@
           <p:cNvPr id="9" name="">
             <a:extLst xmlns:a="http://schemas.openxmlformats.org/drawingml/2006/main">
               <a:ext uri="{FF2B5EF4-FFF2-40B4-BE49-F238E27FC236}">
-                <a16:creationId xmlns:a16="http://schemas.microsoft.com/office/drawing/2014/main" id="{BCADDEF0-E44A-4D7A-8009-59BB69807E2C}"/>
+                <a16:creationId xmlns:a16="http://schemas.microsoft.com/office/drawing/2014/main" id="{DACF8CBC-8F61-4D8A-8F67-BC219DB06076}"/>
               </a:ext>
             </a:extLst>
           </p:cNvPr>
@@ -7870,7 +7870,7 @@
           <p:cNvPr id="10" name="">
             <a:extLst xmlns:a="http://schemas.openxmlformats.org/drawingml/2006/main">
               <a:ext uri="{FF2B5EF4-FFF2-40B4-BE49-F238E27FC236}">
-                <a16:creationId xmlns:a16="http://schemas.microsoft.com/office/drawing/2014/main" id="{6D6E2320-45CA-45CA-A7F7-82D7B259DB3F}"/>
+                <a16:creationId xmlns:a16="http://schemas.microsoft.com/office/drawing/2014/main" id="{3FBBEB34-A4E6-47DE-8A45-8056201BEA58}"/>
               </a:ext>
             </a:extLst>
           </p:cNvPr>
@@ -8028,7 +8028,7 @@
           <p:cNvPr id="11" name="">
             <a:extLst xmlns:a="http://schemas.openxmlformats.org/drawingml/2006/main">
               <a:ext uri="{FF2B5EF4-FFF2-40B4-BE49-F238E27FC236}">
-                <a16:creationId xmlns:a16="http://schemas.microsoft.com/office/drawing/2014/main" id="{36219C7D-DEEC-49EB-8D63-05E45393545E}"/>
+                <a16:creationId xmlns:a16="http://schemas.microsoft.com/office/drawing/2014/main" id="{BE1659E6-9EEF-4C4A-B2B0-A70BBAD47DBA}"/>
               </a:ext>
             </a:extLst>
           </p:cNvPr>
@@ -8186,7 +8186,7 @@
           <p:cNvPr id="12" name="">
             <a:extLst xmlns:a="http://schemas.openxmlformats.org/drawingml/2006/main">
               <a:ext uri="{FF2B5EF4-FFF2-40B4-BE49-F238E27FC236}">
-                <a16:creationId xmlns:a16="http://schemas.microsoft.com/office/drawing/2014/main" id="{15F81B4E-35E0-4AC9-8586-F96199858080}"/>
+                <a16:creationId xmlns:a16="http://schemas.microsoft.com/office/drawing/2014/main" id="{1FB80FB7-6770-4E5D-8EF2-5A9A1EBE2E8D}"/>
               </a:ext>
             </a:extLst>
           </p:cNvPr>
@@ -8390,7 +8390,7 @@
           <p:cNvPr id="13" name="">
             <a:extLst xmlns:a="http://schemas.openxmlformats.org/drawingml/2006/main">
               <a:ext uri="{FF2B5EF4-FFF2-40B4-BE49-F238E27FC236}">
-                <a16:creationId xmlns:a16="http://schemas.microsoft.com/office/drawing/2014/main" id="{1178933E-75E9-4B08-B1E0-5D99E19B8D3C}"/>
+                <a16:creationId xmlns:a16="http://schemas.microsoft.com/office/drawing/2014/main" id="{69E35005-3A60-4B93-8500-2A1262ACD519}"/>
               </a:ext>
             </a:extLst>
           </p:cNvPr>
@@ -8546,7 +8546,7 @@
     </p:spTree>
     <p:extLst>
       <p:ext uri="{BB962C8B-B14F-4D97-AF65-F5344CB8AC3E}">
-        <p14:creationId xmlns:p14="http://schemas.microsoft.com/office/powerpoint/2010/main" val="2141105531"/>
+        <p14:creationId xmlns:p14="http://schemas.microsoft.com/office/powerpoint/2010/main" val="1152078858"/>
       </p:ext>
     </p:extLst>
   </p:cSld>
@@ -8574,10 +8574,10 @@
       </p:grpSpPr>
       <p:sp>
         <p:nvSpPr>
-          <p:cNvPr id="13" name="">
+          <p:cNvPr id="16" name="">
             <a:extLst xmlns:a="http://schemas.openxmlformats.org/drawingml/2006/main">
               <a:ext uri="{FF2B5EF4-FFF2-40B4-BE49-F238E27FC236}">
-                <a16:creationId xmlns:a16="http://schemas.microsoft.com/office/drawing/2014/main" id="{79FB9D9E-9922-4A06-80C7-526A6BE95098}"/>
+                <a16:creationId xmlns:a16="http://schemas.microsoft.com/office/drawing/2014/main" id="{3B7F1217-5F5E-4360-9FCC-86FB3BB0C16A}"/>
               </a:ext>
             </a:extLst>
           </p:cNvPr>
@@ -8735,7 +8735,7 @@
           <p:cNvPr id="2" name="">
             <a:extLst xmlns:a="http://schemas.openxmlformats.org/drawingml/2006/main">
               <a:ext uri="{FF2B5EF4-FFF2-40B4-BE49-F238E27FC236}">
-                <a16:creationId xmlns:a16="http://schemas.microsoft.com/office/drawing/2014/main" id="{30CD7AAA-7663-4001-86EE-F78013440965}"/>
+                <a16:creationId xmlns:a16="http://schemas.microsoft.com/office/drawing/2014/main" id="{69E64F46-701F-4B3A-BF8F-6CEEE7B6A9A0}"/>
               </a:ext>
             </a:extLst>
           </p:cNvPr>
@@ -8893,7 +8893,7 @@
           <p:cNvPr id="3" name="">
             <a:extLst xmlns:a="http://schemas.openxmlformats.org/drawingml/2006/main">
               <a:ext uri="{FF2B5EF4-FFF2-40B4-BE49-F238E27FC236}">
-                <a16:creationId xmlns:a16="http://schemas.microsoft.com/office/drawing/2014/main" id="{17F569C7-7439-456F-9079-F42BBEF1EC3C}"/>
+                <a16:creationId xmlns:a16="http://schemas.microsoft.com/office/drawing/2014/main" id="{D7DDCBCD-28F6-4FB8-8746-EBE6C4D1F528}"/>
               </a:ext>
             </a:extLst>
           </p:cNvPr>
@@ -9041,7 +9041,7 @@
                 <a:ea typeface="Arial"/>
                 <a:cs typeface="Arial"/>
               </a:rPr>
-              <a:t>Gjendjet e një kërkese</a:t>
+              <a:t>Një klikim dhe tri kuptime</a:t>
             </a:r>
           </a:p>
         </p:txBody>
@@ -9051,7 +9051,7 @@
           <p:cNvPr id="4" name="">
             <a:extLst xmlns:a="http://schemas.openxmlformats.org/drawingml/2006/main">
               <a:ext uri="{FF2B5EF4-FFF2-40B4-BE49-F238E27FC236}">
-                <a16:creationId xmlns:a16="http://schemas.microsoft.com/office/drawing/2014/main" id="{773E4045-82C7-40AB-96CF-89089BE54009}"/>
+                <a16:creationId xmlns:a16="http://schemas.microsoft.com/office/drawing/2014/main" id="{F25951C5-7A25-4F84-8249-392CE6D798B6}"/>
               </a:ext>
             </a:extLst>
           </p:cNvPr>
@@ -9061,7 +9061,7 @@
           <p:nvPr/>
         </p:nvPicPr>
         <p:blipFill>
-          <a:blip xmlns:r="http://schemas.openxmlformats.org/officeDocument/2006/relationships" xmlns:a="http://schemas.openxmlformats.org/drawingml/2006/main" r:embed="Rac8c096dbe424186"/>
+          <a:blip xmlns:r="http://schemas.openxmlformats.org/officeDocument/2006/relationships" xmlns:a="http://schemas.openxmlformats.org/drawingml/2006/main" r:embed="R7c386e1938ef403f"/>
           <a:stretch xmlns:a="http://schemas.openxmlformats.org/drawingml/2006/main"/>
         </p:blipFill>
         <p:spPr>
@@ -9079,7 +9079,7 @@
           <p:cNvPr id="5" name="">
             <a:extLst xmlns:a="http://schemas.openxmlformats.org/drawingml/2006/main">
               <a:ext uri="{FF2B5EF4-FFF2-40B4-BE49-F238E27FC236}">
-                <a16:creationId xmlns:a16="http://schemas.microsoft.com/office/drawing/2014/main" id="{AE10161D-01D6-4455-81C2-F1BEE7E5083D}"/>
+                <a16:creationId xmlns:a16="http://schemas.microsoft.com/office/drawing/2014/main" id="{0D916325-0874-4F85-9365-F86722601CEB}"/>
               </a:ext>
             </a:extLst>
           </p:cNvPr>
@@ -9091,7 +9091,7 @@
         <p:spPr>
           <a:xfrm xmlns:a="http://schemas.openxmlformats.org/drawingml/2006/main">
             <a:off x="609600" y="2667000"/>
-            <a:ext cx="5295900" cy="495300"/>
+            <a:ext cx="3409950" cy="495300"/>
           </a:xfrm>
           <a:prstGeom xmlns:a="http://schemas.openxmlformats.org/drawingml/2006/main" prst="rect">
             <a:avLst/>
@@ -9227,7 +9227,7 @@
                 <a:ea typeface="Arial"/>
                 <a:cs typeface="Arial"/>
               </a:rPr>
-              <a:t>Në pritje</a:t>
+              <a:t>Veprimi në ekran</a:t>
             </a:r>
           </a:p>
         </p:txBody>
@@ -9237,7 +9237,7 @@
           <p:cNvPr id="6" name="">
             <a:extLst xmlns:a="http://schemas.openxmlformats.org/drawingml/2006/main">
               <a:ext uri="{FF2B5EF4-FFF2-40B4-BE49-F238E27FC236}">
-                <a16:creationId xmlns:a16="http://schemas.microsoft.com/office/drawing/2014/main" id="{1316ABBB-5EA6-4F48-916C-689F2A4F7CA3}"/>
+                <a16:creationId xmlns:a16="http://schemas.microsoft.com/office/drawing/2014/main" id="{ADA65900-1BA4-42FC-805C-DA657525DA2B}"/>
               </a:ext>
             </a:extLst>
           </p:cNvPr>
@@ -9249,7 +9249,7 @@
         <p:spPr>
           <a:xfrm xmlns:a="http://schemas.openxmlformats.org/drawingml/2006/main">
             <a:off x="609600" y="3219450"/>
-            <a:ext cx="5295900" cy="571500"/>
+            <a:ext cx="3409950" cy="571500"/>
           </a:xfrm>
           <a:prstGeom xmlns:a="http://schemas.openxmlformats.org/drawingml/2006/main" prst="rect">
             <a:avLst/>
@@ -9385,7 +9385,7 @@
                 <a:ea typeface="Arial"/>
                 <a:cs typeface="Arial"/>
               </a:rPr>
-              <a:t>Në simulim: shënohet qartë</a:t>
+              <a:t>Butoni reagon</a:t>
             </a:r>
           </a:p>
         </p:txBody>
@@ -9395,7 +9395,7 @@
           <p:cNvPr id="7" name="">
             <a:extLst xmlns:a="http://schemas.openxmlformats.org/drawingml/2006/main">
               <a:ext uri="{FF2B5EF4-FFF2-40B4-BE49-F238E27FC236}">
-                <a16:creationId xmlns:a16="http://schemas.microsoft.com/office/drawing/2014/main" id="{7097E829-5E55-4955-8AA0-95D04D0BD20E}"/>
+                <a16:creationId xmlns:a16="http://schemas.microsoft.com/office/drawing/2014/main" id="{8EA19215-93C4-4223-921D-35C47A7DBA66}"/>
               </a:ext>
             </a:extLst>
           </p:cNvPr>
@@ -9405,12 +9405,12 @@
           <p:nvPr/>
         </p:nvPicPr>
         <p:blipFill>
-          <a:blip xmlns:r="http://schemas.openxmlformats.org/officeDocument/2006/relationships" xmlns:a="http://schemas.openxmlformats.org/drawingml/2006/main" r:embed="R252aa7295f8c4126"/>
+          <a:blip xmlns:r="http://schemas.openxmlformats.org/officeDocument/2006/relationships" xmlns:a="http://schemas.openxmlformats.org/drawingml/2006/main" r:embed="R752fae869f494c4b"/>
           <a:stretch xmlns:a="http://schemas.openxmlformats.org/drawingml/2006/main"/>
         </p:blipFill>
         <p:spPr>
           <a:xfrm xmlns:a="http://schemas.openxmlformats.org/drawingml/2006/main">
-            <a:off x="6267450" y="1952625"/>
+            <a:off x="4381500" y="1952625"/>
             <a:ext cx="571500" cy="571500"/>
           </a:xfrm>
           <a:prstGeom xmlns:a="http://schemas.openxmlformats.org/drawingml/2006/main" prst="rect">
@@ -9423,7 +9423,7 @@
           <p:cNvPr id="8" name="">
             <a:extLst xmlns:a="http://schemas.openxmlformats.org/drawingml/2006/main">
               <a:ext uri="{FF2B5EF4-FFF2-40B4-BE49-F238E27FC236}">
-                <a16:creationId xmlns:a16="http://schemas.microsoft.com/office/drawing/2014/main" id="{F2BBCE9E-27CE-4EE5-A00F-773C4BA48A33}"/>
+                <a16:creationId xmlns:a16="http://schemas.microsoft.com/office/drawing/2014/main" id="{2F9AA48E-5424-47A3-9A13-7FEB47E40F9C}"/>
               </a:ext>
             </a:extLst>
           </p:cNvPr>
@@ -9434,8 +9434,8 @@
         </p:nvSpPr>
         <p:spPr>
           <a:xfrm xmlns:a="http://schemas.openxmlformats.org/drawingml/2006/main">
-            <a:off x="6267450" y="2667000"/>
-            <a:ext cx="5295900" cy="495300"/>
+            <a:off x="4381500" y="2667000"/>
+            <a:ext cx="3409950" cy="495300"/>
           </a:xfrm>
           <a:prstGeom xmlns:a="http://schemas.openxmlformats.org/drawingml/2006/main" prst="rect">
             <a:avLst/>
@@ -9571,7 +9571,7 @@
                 <a:ea typeface="Arial"/>
                 <a:cs typeface="Arial"/>
               </a:rPr>
-              <a:t>E pranuar</a:t>
+              <a:t>Gjendja e kërkesës</a:t>
             </a:r>
           </a:p>
         </p:txBody>
@@ -9581,7 +9581,7 @@
           <p:cNvPr id="9" name="">
             <a:extLst xmlns:a="http://schemas.openxmlformats.org/drawingml/2006/main">
               <a:ext uri="{FF2B5EF4-FFF2-40B4-BE49-F238E27FC236}">
-                <a16:creationId xmlns:a16="http://schemas.microsoft.com/office/drawing/2014/main" id="{D6E6A900-A123-42B8-9654-BA6338D3C545}"/>
+                <a16:creationId xmlns:a16="http://schemas.microsoft.com/office/drawing/2014/main" id="{2B889295-F5D1-453E-9B5E-DEA499F6852F}"/>
               </a:ext>
             </a:extLst>
           </p:cNvPr>
@@ -9592,8 +9592,8 @@
         </p:nvSpPr>
         <p:spPr>
           <a:xfrm xmlns:a="http://schemas.openxmlformats.org/drawingml/2006/main">
-            <a:off x="6267450" y="3219450"/>
-            <a:ext cx="5295900" cy="571500"/>
+            <a:off x="4381500" y="3219450"/>
+            <a:ext cx="3409950" cy="571500"/>
           </a:xfrm>
           <a:prstGeom xmlns:a="http://schemas.openxmlformats.org/drawingml/2006/main" prst="rect">
             <a:avLst/>
@@ -9729,17 +9729,361 @@
                 <a:ea typeface="Arial"/>
                 <a:cs typeface="Arial"/>
               </a:rPr>
-              <a:t>Kërkon proces real konfirmimi</a:t>
+              <a:t>Përdoruesi pret përgjigje</a:t>
+            </a:r>
+          </a:p>
+        </p:txBody>
+      </p:sp>
+      <p:pic>
+        <p:nvPicPr>
+          <p:cNvPr id="10" name="">
+            <a:extLst xmlns:a="http://schemas.openxmlformats.org/drawingml/2006/main">
+              <a:ext uri="{FF2B5EF4-FFF2-40B4-BE49-F238E27FC236}">
+                <a16:creationId xmlns:a16="http://schemas.microsoft.com/office/drawing/2014/main" id="{4A22B751-6B04-452E-A45C-8D6A98A3687E}"/>
+              </a:ext>
+            </a:extLst>
+          </p:cNvPr>
+          <p:cNvPicPr>
+            <a:picLocks xmlns:a="http://schemas.openxmlformats.org/drawingml/2006/main" noChangeAspect="1"/>
+          </p:cNvPicPr>
+          <p:nvPr/>
+        </p:nvPicPr>
+        <p:blipFill>
+          <a:blip xmlns:r="http://schemas.openxmlformats.org/officeDocument/2006/relationships" xmlns:a="http://schemas.openxmlformats.org/drawingml/2006/main" r:embed="Rb5111d6db8d34d85"/>
+          <a:stretch xmlns:a="http://schemas.openxmlformats.org/drawingml/2006/main"/>
+        </p:blipFill>
+        <p:spPr>
+          <a:xfrm xmlns:a="http://schemas.openxmlformats.org/drawingml/2006/main">
+            <a:off x="8153400" y="1952625"/>
+            <a:ext cx="571500" cy="571500"/>
+          </a:xfrm>
+          <a:prstGeom xmlns:a="http://schemas.openxmlformats.org/drawingml/2006/main" prst="rect">
+            <a:avLst/>
+          </a:prstGeom>
+        </p:spPr>
+      </p:pic>
+      <p:sp>
+        <p:nvSpPr>
+          <p:cNvPr id="11" name="">
+            <a:extLst xmlns:a="http://schemas.openxmlformats.org/drawingml/2006/main">
+              <a:ext uri="{FF2B5EF4-FFF2-40B4-BE49-F238E27FC236}">
+                <a16:creationId xmlns:a16="http://schemas.microsoft.com/office/drawing/2014/main" id="{17AB108B-0480-4E9F-A7AB-28D03EBA79CF}"/>
+              </a:ext>
+            </a:extLst>
+          </p:cNvPr>
+          <p:cNvSpPr>
+            <a:spLocks xmlns:a="http://schemas.openxmlformats.org/drawingml/2006/main" noGrp="1"/>
+          </p:cNvSpPr>
+          <p:nvPr/>
+        </p:nvSpPr>
+        <p:spPr>
+          <a:xfrm xmlns:a="http://schemas.openxmlformats.org/drawingml/2006/main">
+            <a:off x="8153400" y="2667000"/>
+            <a:ext cx="3409950" cy="495300"/>
+          </a:xfrm>
+          <a:prstGeom xmlns:a="http://schemas.openxmlformats.org/drawingml/2006/main" prst="rect">
+            <a:avLst/>
+          </a:prstGeom>
+          <a:noFill xmlns:a="http://schemas.openxmlformats.org/drawingml/2006/main"/>
+          <a:ln xmlns:a="http://schemas.openxmlformats.org/drawingml/2006/main" w="0">
+            <a:noFill/>
+          </a:ln>
+        </p:spPr>
+        <p:txBody>
+          <a:bodyPr xmlns:a="http://schemas.openxmlformats.org/drawingml/2006/main">
+            <a:noAutofit/>
+          </a:bodyPr>
+          <a:lstStyle xmlns:a="http://schemas.openxmlformats.org/drawingml/2006/main">
+            <a:defPPr>
+              <a:defRPr sz="2025" b="1">
+                <a:solidFill>
+                  <a:srgbClr val="FFFFFF"/>
+                </a:solidFill>
+                <a:latin typeface="Arial"/>
+                <a:ea typeface="Arial"/>
+                <a:cs typeface="Arial"/>
+              </a:defRPr>
+            </a:defPPr>
+            <a:lvl1pPr>
+              <a:defRPr sz="2025" b="1">
+                <a:solidFill>
+                  <a:srgbClr val="FFFFFF"/>
+                </a:solidFill>
+                <a:latin typeface="Arial"/>
+                <a:ea typeface="Arial"/>
+                <a:cs typeface="Arial"/>
+              </a:defRPr>
+            </a:lvl1pPr>
+            <a:lvl2pPr>
+              <a:defRPr sz="2025" b="1">
+                <a:solidFill>
+                  <a:srgbClr val="FFFFFF"/>
+                </a:solidFill>
+                <a:latin typeface="Arial"/>
+                <a:ea typeface="Arial"/>
+                <a:cs typeface="Arial"/>
+              </a:defRPr>
+            </a:lvl2pPr>
+            <a:lvl3pPr>
+              <a:defRPr sz="2025" b="1">
+                <a:solidFill>
+                  <a:srgbClr val="FFFFFF"/>
+                </a:solidFill>
+                <a:latin typeface="Arial"/>
+                <a:ea typeface="Arial"/>
+                <a:cs typeface="Arial"/>
+              </a:defRPr>
+            </a:lvl3pPr>
+            <a:lvl4pPr>
+              <a:defRPr sz="2025" b="1">
+                <a:solidFill>
+                  <a:srgbClr val="FFFFFF"/>
+                </a:solidFill>
+                <a:latin typeface="Arial"/>
+                <a:ea typeface="Arial"/>
+                <a:cs typeface="Arial"/>
+              </a:defRPr>
+            </a:lvl4pPr>
+            <a:lvl5pPr>
+              <a:defRPr sz="2025" b="1">
+                <a:solidFill>
+                  <a:srgbClr val="FFFFFF"/>
+                </a:solidFill>
+                <a:latin typeface="Arial"/>
+                <a:ea typeface="Arial"/>
+                <a:cs typeface="Arial"/>
+              </a:defRPr>
+            </a:lvl5pPr>
+            <a:lvl6pPr>
+              <a:defRPr sz="2025" b="1">
+                <a:solidFill>
+                  <a:srgbClr val="FFFFFF"/>
+                </a:solidFill>
+                <a:latin typeface="Arial"/>
+                <a:ea typeface="Arial"/>
+                <a:cs typeface="Arial"/>
+              </a:defRPr>
+            </a:lvl6pPr>
+            <a:lvl7pPr>
+              <a:defRPr sz="2025" b="1">
+                <a:solidFill>
+                  <a:srgbClr val="FFFFFF"/>
+                </a:solidFill>
+                <a:latin typeface="Arial"/>
+                <a:ea typeface="Arial"/>
+                <a:cs typeface="Arial"/>
+              </a:defRPr>
+            </a:lvl7pPr>
+            <a:lvl8pPr>
+              <a:defRPr sz="2025" b="1">
+                <a:solidFill>
+                  <a:srgbClr val="FFFFFF"/>
+                </a:solidFill>
+                <a:latin typeface="Arial"/>
+                <a:ea typeface="Arial"/>
+                <a:cs typeface="Arial"/>
+              </a:defRPr>
+            </a:lvl8pPr>
+            <a:lvl9pPr>
+              <a:defRPr sz="2025" b="1">
+                <a:solidFill>
+                  <a:srgbClr val="FFFFFF"/>
+                </a:solidFill>
+                <a:latin typeface="Arial"/>
+                <a:ea typeface="Arial"/>
+                <a:cs typeface="Arial"/>
+              </a:defRPr>
+            </a:lvl9pPr>
+          </a:lstStyle>
+          <a:p xmlns:a="http://schemas.openxmlformats.org/drawingml/2006/main">
+            <a:pPr>
+              <a:defRPr sz="2025" b="1">
+                <a:solidFill>
+                  <a:srgbClr val="FFFFFF"/>
+                </a:solidFill>
+                <a:latin typeface="Arial"/>
+                <a:ea typeface="Arial"/>
+                <a:cs typeface="Arial"/>
+              </a:defRPr>
+            </a:pPr>
+            <a:r>
+              <a:rPr sz="2025" b="1">
+                <a:solidFill>
+                  <a:srgbClr val="FFFFFF"/>
+                </a:solidFill>
+                <a:latin typeface="Arial"/>
+                <a:ea typeface="Arial"/>
+                <a:cs typeface="Arial"/>
+              </a:rPr>
+              <a:t>Konfirmimi real</a:t>
             </a:r>
           </a:p>
         </p:txBody>
       </p:sp>
       <p:sp>
         <p:nvSpPr>
-          <p:cNvPr id="10" name="">
+          <p:cNvPr id="12" name="">
             <a:extLst xmlns:a="http://schemas.openxmlformats.org/drawingml/2006/main">
               <a:ext uri="{FF2B5EF4-FFF2-40B4-BE49-F238E27FC236}">
-                <a16:creationId xmlns:a16="http://schemas.microsoft.com/office/drawing/2014/main" id="{90A02EBC-C48E-4895-9EE3-6B4909D7F016}"/>
+                <a16:creationId xmlns:a16="http://schemas.microsoft.com/office/drawing/2014/main" id="{13F0F4B0-903A-4C9C-9016-1A9DE2E99716}"/>
+              </a:ext>
+            </a:extLst>
+          </p:cNvPr>
+          <p:cNvSpPr>
+            <a:spLocks xmlns:a="http://schemas.openxmlformats.org/drawingml/2006/main" noGrp="1"/>
+          </p:cNvSpPr>
+          <p:nvPr/>
+        </p:nvSpPr>
+        <p:spPr>
+          <a:xfrm xmlns:a="http://schemas.openxmlformats.org/drawingml/2006/main">
+            <a:off x="8153400" y="3219450"/>
+            <a:ext cx="3409950" cy="571500"/>
+          </a:xfrm>
+          <a:prstGeom xmlns:a="http://schemas.openxmlformats.org/drawingml/2006/main" prst="rect">
+            <a:avLst/>
+          </a:prstGeom>
+          <a:noFill xmlns:a="http://schemas.openxmlformats.org/drawingml/2006/main"/>
+          <a:ln xmlns:a="http://schemas.openxmlformats.org/drawingml/2006/main" w="0">
+            <a:noFill/>
+          </a:ln>
+        </p:spPr>
+        <p:txBody>
+          <a:bodyPr xmlns:a="http://schemas.openxmlformats.org/drawingml/2006/main">
+            <a:noAutofit/>
+          </a:bodyPr>
+          <a:lstStyle xmlns:a="http://schemas.openxmlformats.org/drawingml/2006/main">
+            <a:defPPr>
+              <a:defRPr sz="1650" b="0">
+                <a:solidFill>
+                  <a:srgbClr val="C8D3E6"/>
+                </a:solidFill>
+                <a:latin typeface="Arial"/>
+                <a:ea typeface="Arial"/>
+                <a:cs typeface="Arial"/>
+              </a:defRPr>
+            </a:defPPr>
+            <a:lvl1pPr>
+              <a:defRPr sz="1650" b="0">
+                <a:solidFill>
+                  <a:srgbClr val="C8D3E6"/>
+                </a:solidFill>
+                <a:latin typeface="Arial"/>
+                <a:ea typeface="Arial"/>
+                <a:cs typeface="Arial"/>
+              </a:defRPr>
+            </a:lvl1pPr>
+            <a:lvl2pPr>
+              <a:defRPr sz="1650" b="0">
+                <a:solidFill>
+                  <a:srgbClr val="C8D3E6"/>
+                </a:solidFill>
+                <a:latin typeface="Arial"/>
+                <a:ea typeface="Arial"/>
+                <a:cs typeface="Arial"/>
+              </a:defRPr>
+            </a:lvl2pPr>
+            <a:lvl3pPr>
+              <a:defRPr sz="1650" b="0">
+                <a:solidFill>
+                  <a:srgbClr val="C8D3E6"/>
+                </a:solidFill>
+                <a:latin typeface="Arial"/>
+                <a:ea typeface="Arial"/>
+                <a:cs typeface="Arial"/>
+              </a:defRPr>
+            </a:lvl3pPr>
+            <a:lvl4pPr>
+              <a:defRPr sz="1650" b="0">
+                <a:solidFill>
+                  <a:srgbClr val="C8D3E6"/>
+                </a:solidFill>
+                <a:latin typeface="Arial"/>
+                <a:ea typeface="Arial"/>
+                <a:cs typeface="Arial"/>
+              </a:defRPr>
+            </a:lvl4pPr>
+            <a:lvl5pPr>
+              <a:defRPr sz="1650" b="0">
+                <a:solidFill>
+                  <a:srgbClr val="C8D3E6"/>
+                </a:solidFill>
+                <a:latin typeface="Arial"/>
+                <a:ea typeface="Arial"/>
+                <a:cs typeface="Arial"/>
+              </a:defRPr>
+            </a:lvl5pPr>
+            <a:lvl6pPr>
+              <a:defRPr sz="1650" b="0">
+                <a:solidFill>
+                  <a:srgbClr val="C8D3E6"/>
+                </a:solidFill>
+                <a:latin typeface="Arial"/>
+                <a:ea typeface="Arial"/>
+                <a:cs typeface="Arial"/>
+              </a:defRPr>
+            </a:lvl6pPr>
+            <a:lvl7pPr>
+              <a:defRPr sz="1650" b="0">
+                <a:solidFill>
+                  <a:srgbClr val="C8D3E6"/>
+                </a:solidFill>
+                <a:latin typeface="Arial"/>
+                <a:ea typeface="Arial"/>
+                <a:cs typeface="Arial"/>
+              </a:defRPr>
+            </a:lvl7pPr>
+            <a:lvl8pPr>
+              <a:defRPr sz="1650" b="0">
+                <a:solidFill>
+                  <a:srgbClr val="C8D3E6"/>
+                </a:solidFill>
+                <a:latin typeface="Arial"/>
+                <a:ea typeface="Arial"/>
+                <a:cs typeface="Arial"/>
+              </a:defRPr>
+            </a:lvl8pPr>
+            <a:lvl9pPr>
+              <a:defRPr sz="1650" b="0">
+                <a:solidFill>
+                  <a:srgbClr val="C8D3E6"/>
+                </a:solidFill>
+                <a:latin typeface="Arial"/>
+                <a:ea typeface="Arial"/>
+                <a:cs typeface="Arial"/>
+              </a:defRPr>
+            </a:lvl9pPr>
+          </a:lstStyle>
+          <a:p xmlns:a="http://schemas.openxmlformats.org/drawingml/2006/main">
+            <a:pPr>
+              <a:defRPr sz="1650" b="0">
+                <a:solidFill>
+                  <a:srgbClr val="C8D3E6"/>
+                </a:solidFill>
+                <a:latin typeface="Arial"/>
+                <a:ea typeface="Arial"/>
+                <a:cs typeface="Arial"/>
+              </a:defRPr>
+            </a:pPr>
+            <a:r>
+              <a:rPr sz="1650" b="0">
+                <a:solidFill>
+                  <a:srgbClr val="C8D3E6"/>
+                </a:solidFill>
+                <a:latin typeface="Arial"/>
+                <a:ea typeface="Arial"/>
+                <a:cs typeface="Arial"/>
+              </a:rPr>
+              <a:t>Duhet proces i ruajtur</a:t>
+            </a:r>
+          </a:p>
+        </p:txBody>
+      </p:sp>
+      <p:sp>
+        <p:nvSpPr>
+          <p:cNvPr id="13" name="">
+            <a:extLst xmlns:a="http://schemas.openxmlformats.org/drawingml/2006/main">
+              <a:ext uri="{FF2B5EF4-FFF2-40B4-BE49-F238E27FC236}">
+                <a16:creationId xmlns:a16="http://schemas.microsoft.com/office/drawing/2014/main" id="{8BE2765B-4C65-4276-A94B-348067CBF1C5}"/>
               </a:ext>
             </a:extLst>
           </p:cNvPr>
@@ -9887,7 +10231,7 @@
                 <a:ea typeface="Arial"/>
                 <a:cs typeface="Arial"/>
               </a:rPr>
-              <a:t>“E padërguar”, “Në pritje” dhe “E pranuar” përfaqësojnë ngjarje të ndryshme.</a:t>
+              <a:t>Klikova: telefoni mori veprimin. Në pritje: kërkesa ende nuk ka një vendim. E pranuar: procesi real e ka konfirmuar.</a:t>
             </a:r>
           </a:p>
           <a:p xmlns:a="http://schemas.openxmlformats.org/drawingml/2006/main">
@@ -9915,17 +10259,17 @@
                 <a:ea typeface="Arial"/>
                 <a:cs typeface="Arial"/>
               </a:rPr>
-              <a:t>Në MVP-në (Minimum Viable Product – produkti minimal i përdorshëm) të sotme e emërtojmë qartë çfarë kemi provuar realisht.</a:t>
+              <a:t>Në demonstrimin tonë “Në pritje” është vetëm simulim. Nuk ka kërkesë të ruajtur ose vend të rezervuar.</a:t>
             </a:r>
           </a:p>
         </p:txBody>
       </p:sp>
       <p:sp>
         <p:nvSpPr>
-          <p:cNvPr id="11" name="">
+          <p:cNvPr id="14" name="">
             <a:extLst xmlns:a="http://schemas.openxmlformats.org/drawingml/2006/main">
               <a:ext uri="{FF2B5EF4-FFF2-40B4-BE49-F238E27FC236}">
-                <a16:creationId xmlns:a16="http://schemas.microsoft.com/office/drawing/2014/main" id="{B2D77057-3714-4947-999D-BCE8AABEFA13}"/>
+                <a16:creationId xmlns:a16="http://schemas.microsoft.com/office/drawing/2014/main" id="{AD47DB2C-D76F-463B-9CBD-9B94AFC240B4}"/>
               </a:ext>
             </a:extLst>
           </p:cNvPr>
@@ -10073,17 +10417,17 @@
                 <a:ea typeface="Arial"/>
                 <a:cs typeface="Arial"/>
               </a:rPr>
-              <a:t>Çfarë duhet të shkruajë një buton demonstrues?</a:t>
+              <a:t>Pse një mesazh i bukur “Sukses” mund ta mashtrojë Artën?</a:t>
             </a:r>
           </a:p>
         </p:txBody>
       </p:sp>
       <p:sp>
         <p:nvSpPr>
-          <p:cNvPr id="12" name="">
+          <p:cNvPr id="15" name="">
             <a:extLst xmlns:a="http://schemas.openxmlformats.org/drawingml/2006/main">
               <a:ext uri="{FF2B5EF4-FFF2-40B4-BE49-F238E27FC236}">
-                <a16:creationId xmlns:a16="http://schemas.microsoft.com/office/drawing/2014/main" id="{5099CB4E-0DFC-4035-A24C-C052633DEC0E}"/>
+                <a16:creationId xmlns:a16="http://schemas.microsoft.com/office/drawing/2014/main" id="{8BD2511F-4C05-48A8-9DAD-32EFE9DBD600}"/>
               </a:ext>
             </a:extLst>
           </p:cNvPr>
@@ -10231,7 +10575,7 @@
                 <a:ea typeface="Arial"/>
                 <a:cs typeface="Arial"/>
               </a:rPr>
-              <a:t>“Provo kërkesën · simulim”. Pas klikimit: “Në pritje · simulim, pa rezervim real”.</a:t>
+              <a:t>Ajo mund ta kuptojë si vend të siguruar. Mesazhi duhet të tregojë vetëm atë që sistemi ka kryer realisht.</a:t>
             </a:r>
           </a:p>
         </p:txBody>
@@ -10239,7 +10583,7 @@
     </p:spTree>
     <p:extLst>
       <p:ext uri="{BB962C8B-B14F-4D97-AF65-F5344CB8AC3E}">
-        <p14:creationId xmlns:p14="http://schemas.microsoft.com/office/powerpoint/2010/main" val="774221523"/>
+        <p14:creationId xmlns:p14="http://schemas.microsoft.com/office/powerpoint/2010/main" val="89007771"/>
       </p:ext>
     </p:extLst>
   </p:cSld>
@@ -10270,7 +10614,7 @@
           <p:cNvPr id="14" name="">
             <a:extLst xmlns:a="http://schemas.openxmlformats.org/drawingml/2006/main">
               <a:ext uri="{FF2B5EF4-FFF2-40B4-BE49-F238E27FC236}">
-                <a16:creationId xmlns:a16="http://schemas.microsoft.com/office/drawing/2014/main" id="{3F05AF31-FBBF-4C37-949E-1E71E9F3DA5C}"/>
+                <a16:creationId xmlns:a16="http://schemas.microsoft.com/office/drawing/2014/main" id="{A8AC9282-BE6A-4BB7-B03A-5D30A988299F}"/>
               </a:ext>
             </a:extLst>
           </p:cNvPr>
@@ -10428,7 +10772,7 @@
           <p:cNvPr id="2" name="">
             <a:extLst xmlns:a="http://schemas.openxmlformats.org/drawingml/2006/main">
               <a:ext uri="{FF2B5EF4-FFF2-40B4-BE49-F238E27FC236}">
-                <a16:creationId xmlns:a16="http://schemas.microsoft.com/office/drawing/2014/main" id="{A6767231-C36B-4ADE-AB7B-EC3AECFD4749}"/>
+                <a16:creationId xmlns:a16="http://schemas.microsoft.com/office/drawing/2014/main" id="{1F3F8DC2-1B80-433A-BD24-9168973EC3E6}"/>
               </a:ext>
             </a:extLst>
           </p:cNvPr>
@@ -10586,7 +10930,7 @@
           <p:cNvPr id="3" name="">
             <a:extLst xmlns:a="http://schemas.openxmlformats.org/drawingml/2006/main">
               <a:ext uri="{FF2B5EF4-FFF2-40B4-BE49-F238E27FC236}">
-                <a16:creationId xmlns:a16="http://schemas.microsoft.com/office/drawing/2014/main" id="{2C4DAF87-257C-4652-8FDC-F4168034776F}"/>
+                <a16:creationId xmlns:a16="http://schemas.microsoft.com/office/drawing/2014/main" id="{07DA20FF-4628-4C78-9797-878D36331E28}"/>
               </a:ext>
             </a:extLst>
           </p:cNvPr>
@@ -10734,7 +11078,7 @@
                 <a:ea typeface="Arial"/>
                 <a:cs typeface="Arial"/>
               </a:rPr>
-              <a:t>Një provë që mund ta përsërisë kolegu</a:t>
+              <a:t>Nga simptoma te shkaku</a:t>
             </a:r>
           </a:p>
         </p:txBody>
@@ -10744,7 +11088,7 @@
           <p:cNvPr id="4" name="">
             <a:extLst xmlns:a="http://schemas.openxmlformats.org/drawingml/2006/main">
               <a:ext uri="{FF2B5EF4-FFF2-40B4-BE49-F238E27FC236}">
-                <a16:creationId xmlns:a16="http://schemas.microsoft.com/office/drawing/2014/main" id="{37752CD1-326C-42E6-BE67-36456B3D0C80}"/>
+                <a16:creationId xmlns:a16="http://schemas.microsoft.com/office/drawing/2014/main" id="{495B911A-2F1C-45F5-80EF-81F0B28A39B4}"/>
               </a:ext>
             </a:extLst>
           </p:cNvPr>
@@ -10754,7 +11098,7 @@
           <p:nvPr/>
         </p:nvPicPr>
         <p:blipFill>
-          <a:blip xmlns:r="http://schemas.openxmlformats.org/officeDocument/2006/relationships" xmlns:a="http://schemas.openxmlformats.org/drawingml/2006/main" r:embed="Raccbb32fa6c44ca2"/>
+          <a:blip xmlns:r="http://schemas.openxmlformats.org/officeDocument/2006/relationships" xmlns:a="http://schemas.openxmlformats.org/drawingml/2006/main" r:embed="Refa721cfdeaa4214"/>
           <a:stretch xmlns:a="http://schemas.openxmlformats.org/drawingml/2006/main"/>
         </p:blipFill>
         <p:spPr>
@@ -10772,7 +11116,7 @@
           <p:cNvPr id="5" name="">
             <a:extLst xmlns:a="http://schemas.openxmlformats.org/drawingml/2006/main">
               <a:ext uri="{FF2B5EF4-FFF2-40B4-BE49-F238E27FC236}">
-                <a16:creationId xmlns:a16="http://schemas.microsoft.com/office/drawing/2014/main" id="{8132D1C9-3944-4FBB-9026-7ACD77C18042}"/>
+                <a16:creationId xmlns:a16="http://schemas.microsoft.com/office/drawing/2014/main" id="{C853C07C-B86A-4C50-9CE7-24BD57F4F385}"/>
               </a:ext>
             </a:extLst>
           </p:cNvPr>
@@ -10920,7 +11264,7 @@
                 <a:ea typeface="Arial"/>
                 <a:cs typeface="Arial"/>
               </a:rPr>
-              <a:t>Pritshmëria</a:t>
+              <a:t>Çfarë u pa?</a:t>
             </a:r>
           </a:p>
         </p:txBody>
@@ -10930,7 +11274,7 @@
           <p:cNvPr id="6" name="">
             <a:extLst xmlns:a="http://schemas.openxmlformats.org/drawingml/2006/main">
               <a:ext uri="{FF2B5EF4-FFF2-40B4-BE49-F238E27FC236}">
-                <a16:creationId xmlns:a16="http://schemas.microsoft.com/office/drawing/2014/main" id="{56514BA5-DBC4-43B4-8EA7-C40C88313B29}"/>
+                <a16:creationId xmlns:a16="http://schemas.microsoft.com/office/drawing/2014/main" id="{644907D1-8B26-42C2-AC29-068E58E7687F}"/>
               </a:ext>
             </a:extLst>
           </p:cNvPr>
@@ -11078,7 +11422,7 @@
                 <a:ea typeface="Arial"/>
                 <a:cs typeface="Arial"/>
               </a:rPr>
-              <a:t>Çfarë duhet të ndodhë?</a:t>
+              <a:t>Ora ndryshon në ekran</a:t>
             </a:r>
           </a:p>
         </p:txBody>
@@ -11088,7 +11432,7 @@
           <p:cNvPr id="7" name="">
             <a:extLst xmlns:a="http://schemas.openxmlformats.org/drawingml/2006/main">
               <a:ext uri="{FF2B5EF4-FFF2-40B4-BE49-F238E27FC236}">
-                <a16:creationId xmlns:a16="http://schemas.microsoft.com/office/drawing/2014/main" id="{B76579E3-1482-4AE7-9C6A-1E14F297F26C}"/>
+                <a16:creationId xmlns:a16="http://schemas.microsoft.com/office/drawing/2014/main" id="{C932D2DF-6CE9-46C2-960D-72E6DEBF0E6B}"/>
               </a:ext>
             </a:extLst>
           </p:cNvPr>
@@ -11098,7 +11442,7 @@
           <p:nvPr/>
         </p:nvPicPr>
         <p:blipFill>
-          <a:blip xmlns:r="http://schemas.openxmlformats.org/officeDocument/2006/relationships" xmlns:a="http://schemas.openxmlformats.org/drawingml/2006/main" r:embed="R7fdff29c26814c0c"/>
+          <a:blip xmlns:r="http://schemas.openxmlformats.org/officeDocument/2006/relationships" xmlns:a="http://schemas.openxmlformats.org/drawingml/2006/main" r:embed="R41454f69246f4067"/>
           <a:stretch xmlns:a="http://schemas.openxmlformats.org/drawingml/2006/main"/>
         </p:blipFill>
         <p:spPr>
@@ -11116,7 +11460,7 @@
           <p:cNvPr id="8" name="">
             <a:extLst xmlns:a="http://schemas.openxmlformats.org/drawingml/2006/main">
               <a:ext uri="{FF2B5EF4-FFF2-40B4-BE49-F238E27FC236}">
-                <a16:creationId xmlns:a16="http://schemas.microsoft.com/office/drawing/2014/main" id="{8E168D06-778D-4D0B-B106-5BB1A16A5ECF}"/>
+                <a16:creationId xmlns:a16="http://schemas.microsoft.com/office/drawing/2014/main" id="{5DF87871-331D-41E1-9CD0-BB1ED55CA38C}"/>
               </a:ext>
             </a:extLst>
           </p:cNvPr>
@@ -11264,7 +11608,7 @@
                 <a:ea typeface="Arial"/>
                 <a:cs typeface="Arial"/>
               </a:rPr>
-              <a:t>Vëzhgimi</a:t>
+              <a:t>Çfarë e shpjegon?</a:t>
             </a:r>
           </a:p>
         </p:txBody>
@@ -11274,7 +11618,7 @@
           <p:cNvPr id="9" name="">
             <a:extLst xmlns:a="http://schemas.openxmlformats.org/drawingml/2006/main">
               <a:ext uri="{FF2B5EF4-FFF2-40B4-BE49-F238E27FC236}">
-                <a16:creationId xmlns:a16="http://schemas.microsoft.com/office/drawing/2014/main" id="{14707E0A-BCB2-44FD-B1B5-21EBFE800BD0}"/>
+                <a16:creationId xmlns:a16="http://schemas.microsoft.com/office/drawing/2014/main" id="{F63A940E-2C5C-4E90-A0C4-81FC3989A6BB}"/>
               </a:ext>
             </a:extLst>
           </p:cNvPr>
@@ -11422,7 +11766,7 @@
                 <a:ea typeface="Arial"/>
                 <a:cs typeface="Arial"/>
               </a:rPr>
-              <a:t>Çfarë ndodhi realisht?</a:t>
+              <a:t>ID, burimi ose koha e leximit</a:t>
             </a:r>
           </a:p>
         </p:txBody>
@@ -11432,7 +11776,7 @@
           <p:cNvPr id="10" name="">
             <a:extLst xmlns:a="http://schemas.openxmlformats.org/drawingml/2006/main">
               <a:ext uri="{FF2B5EF4-FFF2-40B4-BE49-F238E27FC236}">
-                <a16:creationId xmlns:a16="http://schemas.microsoft.com/office/drawing/2014/main" id="{CDD3D681-8736-4998-81AC-ED04CEC8EBBF}"/>
+                <a16:creationId xmlns:a16="http://schemas.microsoft.com/office/drawing/2014/main" id="{3BF8206E-C40C-458B-8531-57A5C0D5E7D4}"/>
               </a:ext>
             </a:extLst>
           </p:cNvPr>
@@ -11442,7 +11786,7 @@
           <p:nvPr/>
         </p:nvPicPr>
         <p:blipFill>
-          <a:blip xmlns:r="http://schemas.openxmlformats.org/officeDocument/2006/relationships" xmlns:a="http://schemas.openxmlformats.org/drawingml/2006/main" r:embed="R732391ee275d47f6"/>
+          <a:blip xmlns:r="http://schemas.openxmlformats.org/officeDocument/2006/relationships" xmlns:a="http://schemas.openxmlformats.org/drawingml/2006/main" r:embed="R9c2ab4b2c51247b0"/>
           <a:stretch xmlns:a="http://schemas.openxmlformats.org/drawingml/2006/main"/>
         </p:blipFill>
         <p:spPr>
@@ -11460,7 +11804,7 @@
           <p:cNvPr id="11" name="">
             <a:extLst xmlns:a="http://schemas.openxmlformats.org/drawingml/2006/main">
               <a:ext uri="{FF2B5EF4-FFF2-40B4-BE49-F238E27FC236}">
-                <a16:creationId xmlns:a16="http://schemas.microsoft.com/office/drawing/2014/main" id="{D3321807-AFAD-4D5C-8FF5-760B0C6AA8E7}"/>
+                <a16:creationId xmlns:a16="http://schemas.microsoft.com/office/drawing/2014/main" id="{9801C76C-376B-45BA-B7C3-9FEA77495164}"/>
               </a:ext>
             </a:extLst>
           </p:cNvPr>
@@ -11608,7 +11952,7 @@
                 <a:ea typeface="Arial"/>
                 <a:cs typeface="Arial"/>
               </a:rPr>
-              <a:t>Përsëritja</a:t>
+              <a:t>Çfarë prove na duhet?</a:t>
             </a:r>
           </a:p>
         </p:txBody>
@@ -11618,7 +11962,7 @@
           <p:cNvPr id="12" name="">
             <a:extLst xmlns:a="http://schemas.openxmlformats.org/drawingml/2006/main">
               <a:ext uri="{FF2B5EF4-FFF2-40B4-BE49-F238E27FC236}">
-                <a16:creationId xmlns:a16="http://schemas.microsoft.com/office/drawing/2014/main" id="{249BF5A1-F883-41EF-92C4-9EB4576DC1EC}"/>
+                <a16:creationId xmlns:a16="http://schemas.microsoft.com/office/drawing/2014/main" id="{EB0CDA24-AAE4-4FFF-BDB2-0B7064731591}"/>
               </a:ext>
             </a:extLst>
           </p:cNvPr>
@@ -11766,7 +12110,7 @@
                 <a:ea typeface="Arial"/>
                 <a:cs typeface="Arial"/>
               </a:rPr>
-              <a:t>Cilët hapa e prodhojnë?</a:t>
+              <a:t>Krahasojmë të njëjtin udhëtim</a:t>
             </a:r>
           </a:p>
         </p:txBody>
@@ -11776,7 +12120,7 @@
           <p:cNvPr id="13" name="">
             <a:extLst xmlns:a="http://schemas.openxmlformats.org/drawingml/2006/main">
               <a:ext uri="{FF2B5EF4-FFF2-40B4-BE49-F238E27FC236}">
-                <a16:creationId xmlns:a16="http://schemas.microsoft.com/office/drawing/2014/main" id="{A14A1782-65E9-475A-BB2E-DB47DB83FF01}"/>
+                <a16:creationId xmlns:a16="http://schemas.microsoft.com/office/drawing/2014/main" id="{271B2C55-8685-4D24-80C7-C187BE1AB645}"/>
               </a:ext>
             </a:extLst>
           </p:cNvPr>
@@ -11924,7 +12268,7 @@
                 <a:ea typeface="Arial"/>
                 <a:cs typeface="Arial"/>
               </a:rPr>
-              <a:t>Përgatit të dhënat. Shkruaj çfarë pret. Kryej vetëm veprimin që po provon.</a:t>
+              <a:t>Arta thotë: “Zgjodha Dritonin, por shoh orë tjetër”. Ky është vëzhgimi; ende nuk e dimë shkakun.</a:t>
             </a:r>
           </a:p>
           <a:p xmlns:a="http://schemas.openxmlformats.org/drawingml/2006/main">
@@ -11952,7 +12296,7 @@
                 <a:ea typeface="Arial"/>
                 <a:cs typeface="Arial"/>
               </a:rPr>
-              <a:t>Krahaso atë që pe me pritshmërinë. Ruaj rezultatin edhe nëse prova dështoi.</a:t>
+              <a:t>Pyesim: a është i njëjti ID, nga cili burim erdhën të dhënat dhe kur u lexuan? Secila përgjigje ngushton kërkimin.</a:t>
             </a:r>
           </a:p>
         </p:txBody>
@@ -11960,7 +12304,7 @@
     </p:spTree>
     <p:extLst>
       <p:ext uri="{BB962C8B-B14F-4D97-AF65-F5344CB8AC3E}">
-        <p14:creationId xmlns:p14="http://schemas.microsoft.com/office/powerpoint/2010/main" val="1723794541"/>
+        <p14:creationId xmlns:p14="http://schemas.microsoft.com/office/powerpoint/2010/main" val="1789410645"/>
       </p:ext>
     </p:extLst>
   </p:cSld>
@@ -11991,7 +12335,7 @@
           <p:cNvPr id="14" name="">
             <a:extLst xmlns:a="http://schemas.openxmlformats.org/drawingml/2006/main">
               <a:ext uri="{FF2B5EF4-FFF2-40B4-BE49-F238E27FC236}">
-                <a16:creationId xmlns:a16="http://schemas.microsoft.com/office/drawing/2014/main" id="{DB2B6D73-B053-4F13-B458-523A0545C296}"/>
+                <a16:creationId xmlns:a16="http://schemas.microsoft.com/office/drawing/2014/main" id="{A0888FFF-C3A9-4C2E-BCA8-0880BECB49E7}"/>
               </a:ext>
             </a:extLst>
           </p:cNvPr>
@@ -12149,7 +12493,7 @@
           <p:cNvPr id="2" name="">
             <a:extLst xmlns:a="http://schemas.openxmlformats.org/drawingml/2006/main">
               <a:ext uri="{FF2B5EF4-FFF2-40B4-BE49-F238E27FC236}">
-                <a16:creationId xmlns:a16="http://schemas.microsoft.com/office/drawing/2014/main" id="{30CCB09C-7D6A-4FB8-BD2D-FEFF229F80C8}"/>
+                <a16:creationId xmlns:a16="http://schemas.microsoft.com/office/drawing/2014/main" id="{7117CAC7-596F-4D80-8E76-0F28E7E542E8}"/>
               </a:ext>
             </a:extLst>
           </p:cNvPr>
@@ -12307,7 +12651,7 @@
           <p:cNvPr id="3" name="">
             <a:extLst xmlns:a="http://schemas.openxmlformats.org/drawingml/2006/main">
               <a:ext uri="{FF2B5EF4-FFF2-40B4-BE49-F238E27FC236}">
-                <a16:creationId xmlns:a16="http://schemas.microsoft.com/office/drawing/2014/main" id="{BE24E09F-6756-4B0B-A53F-BF8B300651E5}"/>
+                <a16:creationId xmlns:a16="http://schemas.microsoft.com/office/drawing/2014/main" id="{0B9DBBED-3E98-4628-9594-7CD3C182575E}"/>
               </a:ext>
             </a:extLst>
           </p:cNvPr>
@@ -12465,7 +12809,7 @@
           <p:cNvPr id="4" name="">
             <a:extLst xmlns:a="http://schemas.openxmlformats.org/drawingml/2006/main">
               <a:ext uri="{FF2B5EF4-FFF2-40B4-BE49-F238E27FC236}">
-                <a16:creationId xmlns:a16="http://schemas.microsoft.com/office/drawing/2014/main" id="{47D33C74-18CC-4B51-96D6-548C368E3815}"/>
+                <a16:creationId xmlns:a16="http://schemas.microsoft.com/office/drawing/2014/main" id="{8D55725E-26FF-4D74-B47B-C175C64080BA}"/>
               </a:ext>
             </a:extLst>
           </p:cNvPr>
@@ -12475,7 +12819,7 @@
           <p:nvPr/>
         </p:nvPicPr>
         <p:blipFill>
-          <a:blip xmlns:r="http://schemas.openxmlformats.org/officeDocument/2006/relationships" xmlns:a="http://schemas.openxmlformats.org/drawingml/2006/main" r:embed="R37ffab626ff34307"/>
+          <a:blip xmlns:r="http://schemas.openxmlformats.org/officeDocument/2006/relationships" xmlns:a="http://schemas.openxmlformats.org/drawingml/2006/main" r:embed="R91a9b5f16ce340bb"/>
           <a:stretch xmlns:a="http://schemas.openxmlformats.org/drawingml/2006/main"/>
         </p:blipFill>
         <p:spPr>
@@ -12493,7 +12837,7 @@
           <p:cNvPr id="5" name="">
             <a:extLst xmlns:a="http://schemas.openxmlformats.org/drawingml/2006/main">
               <a:ext uri="{FF2B5EF4-FFF2-40B4-BE49-F238E27FC236}">
-                <a16:creationId xmlns:a16="http://schemas.microsoft.com/office/drawing/2014/main" id="{133747D6-F658-44C1-90DB-5D60635EC7CE}"/>
+                <a16:creationId xmlns:a16="http://schemas.microsoft.com/office/drawing/2014/main" id="{C5F2DBF4-DB0A-4E4B-AC24-D8DCA306CB97}"/>
               </a:ext>
             </a:extLst>
           </p:cNvPr>
@@ -12651,7 +12995,7 @@
           <p:cNvPr id="6" name="">
             <a:extLst xmlns:a="http://schemas.openxmlformats.org/drawingml/2006/main">
               <a:ext uri="{FF2B5EF4-FFF2-40B4-BE49-F238E27FC236}">
-                <a16:creationId xmlns:a16="http://schemas.microsoft.com/office/drawing/2014/main" id="{FA9E4129-16F2-48E9-95D1-C9AA8A4CD91B}"/>
+                <a16:creationId xmlns:a16="http://schemas.microsoft.com/office/drawing/2014/main" id="{B6424F7B-CA52-404D-9F4E-001FD9F8C79E}"/>
               </a:ext>
             </a:extLst>
           </p:cNvPr>
@@ -12809,7 +13153,7 @@
           <p:cNvPr id="7" name="">
             <a:extLst xmlns:a="http://schemas.openxmlformats.org/drawingml/2006/main">
               <a:ext uri="{FF2B5EF4-FFF2-40B4-BE49-F238E27FC236}">
-                <a16:creationId xmlns:a16="http://schemas.microsoft.com/office/drawing/2014/main" id="{2ECFAD82-AF9C-4967-B081-0B29800F9313}"/>
+                <a16:creationId xmlns:a16="http://schemas.microsoft.com/office/drawing/2014/main" id="{CFCFD3CB-8FD9-4D92-8C5B-3A5C29CEF905}"/>
               </a:ext>
             </a:extLst>
           </p:cNvPr>
@@ -12967,7 +13311,7 @@
           <p:cNvPr id="8" name="">
             <a:extLst xmlns:a="http://schemas.openxmlformats.org/drawingml/2006/main">
               <a:ext uri="{FF2B5EF4-FFF2-40B4-BE49-F238E27FC236}">
-                <a16:creationId xmlns:a16="http://schemas.microsoft.com/office/drawing/2014/main" id="{DAA33DA9-3859-4C3B-9813-A05AF6B6EC13}"/>
+                <a16:creationId xmlns:a16="http://schemas.microsoft.com/office/drawing/2014/main" id="{62FE5679-FD42-402C-8C51-4E69FB502F30}"/>
               </a:ext>
             </a:extLst>
           </p:cNvPr>
@@ -13125,7 +13469,7 @@
           <p:cNvPr id="9" name="">
             <a:extLst xmlns:a="http://schemas.openxmlformats.org/drawingml/2006/main">
               <a:ext uri="{FF2B5EF4-FFF2-40B4-BE49-F238E27FC236}">
-                <a16:creationId xmlns:a16="http://schemas.microsoft.com/office/drawing/2014/main" id="{DE87FB48-3F59-48C7-8151-E308F7578873}"/>
+                <a16:creationId xmlns:a16="http://schemas.microsoft.com/office/drawing/2014/main" id="{1286AA5E-B8AD-406F-A5AD-2B9237DEFA7F}"/>
               </a:ext>
             </a:extLst>
           </p:cNvPr>
@@ -13283,7 +13627,7 @@
           <p:cNvPr id="10" name="">
             <a:extLst xmlns:a="http://schemas.openxmlformats.org/drawingml/2006/main">
               <a:ext uri="{FF2B5EF4-FFF2-40B4-BE49-F238E27FC236}">
-                <a16:creationId xmlns:a16="http://schemas.microsoft.com/office/drawing/2014/main" id="{B5826545-CC9B-4071-A2D3-233A6A0DB946}"/>
+                <a16:creationId xmlns:a16="http://schemas.microsoft.com/office/drawing/2014/main" id="{1DB562EF-5228-4E6E-AE00-09A7B4073BF1}"/>
               </a:ext>
             </a:extLst>
           </p:cNvPr>
@@ -13441,7 +13785,7 @@
           <p:cNvPr id="11" name="">
             <a:extLst xmlns:a="http://schemas.openxmlformats.org/drawingml/2006/main">
               <a:ext uri="{FF2B5EF4-FFF2-40B4-BE49-F238E27FC236}">
-                <a16:creationId xmlns:a16="http://schemas.microsoft.com/office/drawing/2014/main" id="{FF221BA2-867A-4B73-B15A-0239CE41AC38}"/>
+                <a16:creationId xmlns:a16="http://schemas.microsoft.com/office/drawing/2014/main" id="{79C08952-B675-4573-8D16-9D969449AE74}"/>
               </a:ext>
             </a:extLst>
           </p:cNvPr>
@@ -13599,7 +13943,7 @@
           <p:cNvPr id="12" name="">
             <a:extLst xmlns:a="http://schemas.openxmlformats.org/drawingml/2006/main">
               <a:ext uri="{FF2B5EF4-FFF2-40B4-BE49-F238E27FC236}">
-                <a16:creationId xmlns:a16="http://schemas.microsoft.com/office/drawing/2014/main" id="{B2F94A0B-D011-4435-81E8-E2D8B54927AD}"/>
+                <a16:creationId xmlns:a16="http://schemas.microsoft.com/office/drawing/2014/main" id="{3F1614D8-F8EB-435A-8ACE-95A07CB8F006}"/>
               </a:ext>
             </a:extLst>
           </p:cNvPr>
@@ -13757,7 +14101,7 @@
           <p:cNvPr id="13" name="">
             <a:extLst xmlns:a="http://schemas.openxmlformats.org/drawingml/2006/main">
               <a:ext uri="{FF2B5EF4-FFF2-40B4-BE49-F238E27FC236}">
-                <a16:creationId xmlns:a16="http://schemas.microsoft.com/office/drawing/2014/main" id="{9C2B58C6-5FA5-44E5-BEFD-98D54BF2D4C7}"/>
+                <a16:creationId xmlns:a16="http://schemas.microsoft.com/office/drawing/2014/main" id="{14D849A6-727B-43D7-86D5-33AC3251AA22}"/>
               </a:ext>
             </a:extLst>
           </p:cNvPr>
@@ -13913,7 +14257,7 @@
     </p:spTree>
     <p:extLst>
       <p:ext uri="{BB962C8B-B14F-4D97-AF65-F5344CB8AC3E}">
-        <p14:creationId xmlns:p14="http://schemas.microsoft.com/office/powerpoint/2010/main" val="159638146"/>
+        <p14:creationId xmlns:p14="http://schemas.microsoft.com/office/powerpoint/2010/main" val="625887381"/>
       </p:ext>
     </p:extLst>
   </p:cSld>
@@ -13944,7 +14288,7 @@
           <p:cNvPr id="14" name="">
             <a:extLst xmlns:a="http://schemas.openxmlformats.org/drawingml/2006/main">
               <a:ext uri="{FF2B5EF4-FFF2-40B4-BE49-F238E27FC236}">
-                <a16:creationId xmlns:a16="http://schemas.microsoft.com/office/drawing/2014/main" id="{5E3C361D-9A92-4E73-9BE0-A543E865B00D}"/>
+                <a16:creationId xmlns:a16="http://schemas.microsoft.com/office/drawing/2014/main" id="{29D4B85F-9CE8-41FD-AB03-1899D6DA3179}"/>
               </a:ext>
             </a:extLst>
           </p:cNvPr>
@@ -14102,7 +14446,7 @@
           <p:cNvPr id="2" name="">
             <a:extLst xmlns:a="http://schemas.openxmlformats.org/drawingml/2006/main">
               <a:ext uri="{FF2B5EF4-FFF2-40B4-BE49-F238E27FC236}">
-                <a16:creationId xmlns:a16="http://schemas.microsoft.com/office/drawing/2014/main" id="{3D0E431C-532B-4EF6-9380-A3C511D7597B}"/>
+                <a16:creationId xmlns:a16="http://schemas.microsoft.com/office/drawing/2014/main" id="{DD356299-6B22-4F39-99A4-78DB468556FA}"/>
               </a:ext>
             </a:extLst>
           </p:cNvPr>
@@ -14260,7 +14604,7 @@
           <p:cNvPr id="3" name="">
             <a:extLst xmlns:a="http://schemas.openxmlformats.org/drawingml/2006/main">
               <a:ext uri="{FF2B5EF4-FFF2-40B4-BE49-F238E27FC236}">
-                <a16:creationId xmlns:a16="http://schemas.microsoft.com/office/drawing/2014/main" id="{C1C4C78D-F975-4EA4-A255-B7BF280EE2E9}"/>
+                <a16:creationId xmlns:a16="http://schemas.microsoft.com/office/drawing/2014/main" id="{5BDF7E39-4061-4C1A-B618-1D630D1FFC22}"/>
               </a:ext>
             </a:extLst>
           </p:cNvPr>
@@ -14418,7 +14762,7 @@
           <p:cNvPr id="4" name="">
             <a:extLst xmlns:a="http://schemas.openxmlformats.org/drawingml/2006/main">
               <a:ext uri="{FF2B5EF4-FFF2-40B4-BE49-F238E27FC236}">
-                <a16:creationId xmlns:a16="http://schemas.microsoft.com/office/drawing/2014/main" id="{21097FF9-FBD0-4BDA-9E79-7A91A10965A4}"/>
+                <a16:creationId xmlns:a16="http://schemas.microsoft.com/office/drawing/2014/main" id="{F110FECF-BC2E-49A7-A15A-3D5E3F3C5B23}"/>
               </a:ext>
             </a:extLst>
           </p:cNvPr>
@@ -14428,7 +14772,7 @@
           <p:nvPr/>
         </p:nvPicPr>
         <p:blipFill>
-          <a:blip xmlns:r="http://schemas.openxmlformats.org/officeDocument/2006/relationships" xmlns:a="http://schemas.openxmlformats.org/drawingml/2006/main" r:embed="Red49c53dfbbe461f"/>
+          <a:blip xmlns:r="http://schemas.openxmlformats.org/officeDocument/2006/relationships" xmlns:a="http://schemas.openxmlformats.org/drawingml/2006/main" r:embed="Rd17fa663290d447c"/>
           <a:stretch xmlns:a="http://schemas.openxmlformats.org/drawingml/2006/main"/>
         </p:blipFill>
         <p:spPr>
@@ -14446,7 +14790,7 @@
           <p:cNvPr id="5" name="">
             <a:extLst xmlns:a="http://schemas.openxmlformats.org/drawingml/2006/main">
               <a:ext uri="{FF2B5EF4-FFF2-40B4-BE49-F238E27FC236}">
-                <a16:creationId xmlns:a16="http://schemas.microsoft.com/office/drawing/2014/main" id="{382D7E1E-5D7C-442F-9463-48ECFFF6187A}"/>
+                <a16:creationId xmlns:a16="http://schemas.microsoft.com/office/drawing/2014/main" id="{5A3F8793-6851-44E1-929A-C3F1A9FBFCB0}"/>
               </a:ext>
             </a:extLst>
           </p:cNvPr>
@@ -14604,7 +14948,7 @@
           <p:cNvPr id="6" name="">
             <a:extLst xmlns:a="http://schemas.openxmlformats.org/drawingml/2006/main">
               <a:ext uri="{FF2B5EF4-FFF2-40B4-BE49-F238E27FC236}">
-                <a16:creationId xmlns:a16="http://schemas.microsoft.com/office/drawing/2014/main" id="{BD4A023C-2FDE-45A8-A8E5-B2A4B8A23882}"/>
+                <a16:creationId xmlns:a16="http://schemas.microsoft.com/office/drawing/2014/main" id="{5254C597-C9FA-4CAD-9682-EAF6F69F1661}"/>
               </a:ext>
             </a:extLst>
           </p:cNvPr>
@@ -14762,7 +15106,7 @@
           <p:cNvPr id="7" name="">
             <a:extLst xmlns:a="http://schemas.openxmlformats.org/drawingml/2006/main">
               <a:ext uri="{FF2B5EF4-FFF2-40B4-BE49-F238E27FC236}">
-                <a16:creationId xmlns:a16="http://schemas.microsoft.com/office/drawing/2014/main" id="{0F4624E5-80CA-4996-A510-35C5E9075869}"/>
+                <a16:creationId xmlns:a16="http://schemas.microsoft.com/office/drawing/2014/main" id="{D2982D38-79D0-450A-A275-ABD499413761}"/>
               </a:ext>
             </a:extLst>
           </p:cNvPr>
@@ -14920,7 +15264,7 @@
           <p:cNvPr id="8" name="">
             <a:extLst xmlns:a="http://schemas.openxmlformats.org/drawingml/2006/main">
               <a:ext uri="{FF2B5EF4-FFF2-40B4-BE49-F238E27FC236}">
-                <a16:creationId xmlns:a16="http://schemas.microsoft.com/office/drawing/2014/main" id="{8775F9AD-D306-4C2B-9E26-BAB1589B8AE0}"/>
+                <a16:creationId xmlns:a16="http://schemas.microsoft.com/office/drawing/2014/main" id="{18981F87-2E94-43D3-9C81-517A59BA4F8C}"/>
               </a:ext>
             </a:extLst>
           </p:cNvPr>
@@ -15078,7 +15422,7 @@
           <p:cNvPr id="9" name="">
             <a:extLst xmlns:a="http://schemas.openxmlformats.org/drawingml/2006/main">
               <a:ext uri="{FF2B5EF4-FFF2-40B4-BE49-F238E27FC236}">
-                <a16:creationId xmlns:a16="http://schemas.microsoft.com/office/drawing/2014/main" id="{7A3A3503-6181-4C88-872B-9CAF95D402FE}"/>
+                <a16:creationId xmlns:a16="http://schemas.microsoft.com/office/drawing/2014/main" id="{5816E9D1-DFCF-4AD9-AE6D-71005735CFFC}"/>
               </a:ext>
             </a:extLst>
           </p:cNvPr>
@@ -15236,7 +15580,7 @@
           <p:cNvPr id="10" name="">
             <a:extLst xmlns:a="http://schemas.openxmlformats.org/drawingml/2006/main">
               <a:ext uri="{FF2B5EF4-FFF2-40B4-BE49-F238E27FC236}">
-                <a16:creationId xmlns:a16="http://schemas.microsoft.com/office/drawing/2014/main" id="{AC335BDA-E360-414B-8CC3-3D9CEE39DF6A}"/>
+                <a16:creationId xmlns:a16="http://schemas.microsoft.com/office/drawing/2014/main" id="{16940052-8E66-4983-9180-39F93992E719}"/>
               </a:ext>
             </a:extLst>
           </p:cNvPr>
@@ -15394,7 +15738,7 @@
           <p:cNvPr id="11" name="">
             <a:extLst xmlns:a="http://schemas.openxmlformats.org/drawingml/2006/main">
               <a:ext uri="{FF2B5EF4-FFF2-40B4-BE49-F238E27FC236}">
-                <a16:creationId xmlns:a16="http://schemas.microsoft.com/office/drawing/2014/main" id="{A8482236-7833-47B4-A84C-DF91366F66A9}"/>
+                <a16:creationId xmlns:a16="http://schemas.microsoft.com/office/drawing/2014/main" id="{487A0465-EDBE-4252-8375-9752C889463C}"/>
               </a:ext>
             </a:extLst>
           </p:cNvPr>
@@ -15552,7 +15896,7 @@
           <p:cNvPr id="12" name="">
             <a:extLst xmlns:a="http://schemas.openxmlformats.org/drawingml/2006/main">
               <a:ext uri="{FF2B5EF4-FFF2-40B4-BE49-F238E27FC236}">
-                <a16:creationId xmlns:a16="http://schemas.microsoft.com/office/drawing/2014/main" id="{A8C610A8-8C50-4565-A030-5E63D8B769CB}"/>
+                <a16:creationId xmlns:a16="http://schemas.microsoft.com/office/drawing/2014/main" id="{17ECFA45-9704-4A78-A2E6-324711991C7F}"/>
               </a:ext>
             </a:extLst>
           </p:cNvPr>
@@ -15710,7 +16054,7 @@
           <p:cNvPr id="13" name="">
             <a:extLst xmlns:a="http://schemas.openxmlformats.org/drawingml/2006/main">
               <a:ext uri="{FF2B5EF4-FFF2-40B4-BE49-F238E27FC236}">
-                <a16:creationId xmlns:a16="http://schemas.microsoft.com/office/drawing/2014/main" id="{791A43E6-615A-46DF-89DC-939812033C15}"/>
+                <a16:creationId xmlns:a16="http://schemas.microsoft.com/office/drawing/2014/main" id="{66A161D0-7355-42C3-ABAA-B8DF1FEA5951}"/>
               </a:ext>
             </a:extLst>
           </p:cNvPr>
@@ -15866,7 +16210,7 @@
     </p:spTree>
     <p:extLst>
       <p:ext uri="{BB962C8B-B14F-4D97-AF65-F5344CB8AC3E}">
-        <p14:creationId xmlns:p14="http://schemas.microsoft.com/office/powerpoint/2010/main" val="1192858191"/>
+        <p14:creationId xmlns:p14="http://schemas.microsoft.com/office/powerpoint/2010/main" val="780951234"/>
       </p:ext>
     </p:extLst>
   </p:cSld>
@@ -15897,7 +16241,7 @@
           <p:cNvPr id="14" name="">
             <a:extLst xmlns:a="http://schemas.openxmlformats.org/drawingml/2006/main">
               <a:ext uri="{FF2B5EF4-FFF2-40B4-BE49-F238E27FC236}">
-                <a16:creationId xmlns:a16="http://schemas.microsoft.com/office/drawing/2014/main" id="{D4CDA491-C013-4B0A-9CDE-EB2B1F17E8F2}"/>
+                <a16:creationId xmlns:a16="http://schemas.microsoft.com/office/drawing/2014/main" id="{CAAF476F-922D-486C-B686-A73D13338AAF}"/>
               </a:ext>
             </a:extLst>
           </p:cNvPr>
@@ -16055,7 +16399,7 @@
           <p:cNvPr id="2" name="">
             <a:extLst xmlns:a="http://schemas.openxmlformats.org/drawingml/2006/main">
               <a:ext uri="{FF2B5EF4-FFF2-40B4-BE49-F238E27FC236}">
-                <a16:creationId xmlns:a16="http://schemas.microsoft.com/office/drawing/2014/main" id="{E3DBE227-19E0-4947-A65B-BF2646B42B56}"/>
+                <a16:creationId xmlns:a16="http://schemas.microsoft.com/office/drawing/2014/main" id="{1A05AF06-AABB-4C38-B1E5-974764A573BD}"/>
               </a:ext>
             </a:extLst>
           </p:cNvPr>
@@ -16213,7 +16557,7 @@
           <p:cNvPr id="3" name="">
             <a:extLst xmlns:a="http://schemas.openxmlformats.org/drawingml/2006/main">
               <a:ext uri="{FF2B5EF4-FFF2-40B4-BE49-F238E27FC236}">
-                <a16:creationId xmlns:a16="http://schemas.microsoft.com/office/drawing/2014/main" id="{444254C5-8168-47C0-967A-7CD36BEE3D43}"/>
+                <a16:creationId xmlns:a16="http://schemas.microsoft.com/office/drawing/2014/main" id="{57EA4238-4066-4E0B-A772-8314E44B3E16}"/>
               </a:ext>
             </a:extLst>
           </p:cNvPr>
@@ -16371,7 +16715,7 @@
           <p:cNvPr id="4" name="">
             <a:extLst xmlns:a="http://schemas.openxmlformats.org/drawingml/2006/main">
               <a:ext uri="{FF2B5EF4-FFF2-40B4-BE49-F238E27FC236}">
-                <a16:creationId xmlns:a16="http://schemas.microsoft.com/office/drawing/2014/main" id="{E30612FD-CA3E-4AE5-8946-74CFA14D18CE}"/>
+                <a16:creationId xmlns:a16="http://schemas.microsoft.com/office/drawing/2014/main" id="{0DF07C2B-6DFE-4195-8424-8DF60CE94854}"/>
               </a:ext>
             </a:extLst>
           </p:cNvPr>
@@ -16381,7 +16725,7 @@
           <p:nvPr/>
         </p:nvPicPr>
         <p:blipFill>
-          <a:blip xmlns:r="http://schemas.openxmlformats.org/officeDocument/2006/relationships" xmlns:a="http://schemas.openxmlformats.org/drawingml/2006/main" r:embed="R5f02a6dc89c44b91"/>
+          <a:blip xmlns:r="http://schemas.openxmlformats.org/officeDocument/2006/relationships" xmlns:a="http://schemas.openxmlformats.org/drawingml/2006/main" r:embed="R4fffeb41fb714cea"/>
           <a:stretch xmlns:a="http://schemas.openxmlformats.org/drawingml/2006/main"/>
         </p:blipFill>
         <p:spPr>
@@ -16399,7 +16743,7 @@
           <p:cNvPr id="5" name="">
             <a:extLst xmlns:a="http://schemas.openxmlformats.org/drawingml/2006/main">
               <a:ext uri="{FF2B5EF4-FFF2-40B4-BE49-F238E27FC236}">
-                <a16:creationId xmlns:a16="http://schemas.microsoft.com/office/drawing/2014/main" id="{9910617C-8944-4DA8-8EA8-D19B457FEBB2}"/>
+                <a16:creationId xmlns:a16="http://schemas.microsoft.com/office/drawing/2014/main" id="{DFDF09A2-F8F5-49D2-BCF1-C1526D2B4D14}"/>
               </a:ext>
             </a:extLst>
           </p:cNvPr>
@@ -16557,7 +16901,7 @@
           <p:cNvPr id="6" name="">
             <a:extLst xmlns:a="http://schemas.openxmlformats.org/drawingml/2006/main">
               <a:ext uri="{FF2B5EF4-FFF2-40B4-BE49-F238E27FC236}">
-                <a16:creationId xmlns:a16="http://schemas.microsoft.com/office/drawing/2014/main" id="{53D9C046-3669-45BF-9AB6-F1701690554A}"/>
+                <a16:creationId xmlns:a16="http://schemas.microsoft.com/office/drawing/2014/main" id="{6ED0A91C-A518-4359-A46F-52D614F63F37}"/>
               </a:ext>
             </a:extLst>
           </p:cNvPr>
@@ -16715,7 +17059,7 @@
           <p:cNvPr id="7" name="">
             <a:extLst xmlns:a="http://schemas.openxmlformats.org/drawingml/2006/main">
               <a:ext uri="{FF2B5EF4-FFF2-40B4-BE49-F238E27FC236}">
-                <a16:creationId xmlns:a16="http://schemas.microsoft.com/office/drawing/2014/main" id="{B9CFF8F0-A886-4E9C-B479-AAED5C62F141}"/>
+                <a16:creationId xmlns:a16="http://schemas.microsoft.com/office/drawing/2014/main" id="{1C82FE35-DE83-4E35-995A-A449A43BBD3B}"/>
               </a:ext>
             </a:extLst>
           </p:cNvPr>
@@ -16725,7 +17069,7 @@
           <p:nvPr/>
         </p:nvPicPr>
         <p:blipFill>
-          <a:blip xmlns:r="http://schemas.openxmlformats.org/officeDocument/2006/relationships" xmlns:a="http://schemas.openxmlformats.org/drawingml/2006/main" r:embed="Rd9a7c795b8f342e8"/>
+          <a:blip xmlns:r="http://schemas.openxmlformats.org/officeDocument/2006/relationships" xmlns:a="http://schemas.openxmlformats.org/drawingml/2006/main" r:embed="Re490f7c54a704fe3"/>
           <a:stretch xmlns:a="http://schemas.openxmlformats.org/drawingml/2006/main"/>
         </p:blipFill>
         <p:spPr>
@@ -16743,7 +17087,7 @@
           <p:cNvPr id="8" name="">
             <a:extLst xmlns:a="http://schemas.openxmlformats.org/drawingml/2006/main">
               <a:ext uri="{FF2B5EF4-FFF2-40B4-BE49-F238E27FC236}">
-                <a16:creationId xmlns:a16="http://schemas.microsoft.com/office/drawing/2014/main" id="{DF2638D8-1018-4A91-AE5D-0AB7B8C4F50B}"/>
+                <a16:creationId xmlns:a16="http://schemas.microsoft.com/office/drawing/2014/main" id="{7BC0D76B-E131-45CC-B137-182B25BB8077}"/>
               </a:ext>
             </a:extLst>
           </p:cNvPr>
@@ -16901,7 +17245,7 @@
           <p:cNvPr id="9" name="">
             <a:extLst xmlns:a="http://schemas.openxmlformats.org/drawingml/2006/main">
               <a:ext uri="{FF2B5EF4-FFF2-40B4-BE49-F238E27FC236}">
-                <a16:creationId xmlns:a16="http://schemas.microsoft.com/office/drawing/2014/main" id="{334FAA3B-0BE1-4B10-B507-4D7E9AF88919}"/>
+                <a16:creationId xmlns:a16="http://schemas.microsoft.com/office/drawing/2014/main" id="{52488F4D-FAC6-465A-9473-88DD51FF4F6A}"/>
               </a:ext>
             </a:extLst>
           </p:cNvPr>
@@ -17059,7 +17403,7 @@
           <p:cNvPr id="10" name="">
             <a:extLst xmlns:a="http://schemas.openxmlformats.org/drawingml/2006/main">
               <a:ext uri="{FF2B5EF4-FFF2-40B4-BE49-F238E27FC236}">
-                <a16:creationId xmlns:a16="http://schemas.microsoft.com/office/drawing/2014/main" id="{2D0E4A04-F610-43B1-AC2A-00FAFFD67635}"/>
+                <a16:creationId xmlns:a16="http://schemas.microsoft.com/office/drawing/2014/main" id="{B0749866-7D28-40D7-909E-C652C305677C}"/>
               </a:ext>
             </a:extLst>
           </p:cNvPr>
@@ -17217,7 +17561,7 @@
           <p:cNvPr id="11" name="">
             <a:extLst xmlns:a="http://schemas.openxmlformats.org/drawingml/2006/main">
               <a:ext uri="{FF2B5EF4-FFF2-40B4-BE49-F238E27FC236}">
-                <a16:creationId xmlns:a16="http://schemas.microsoft.com/office/drawing/2014/main" id="{7CCB2F72-0B6C-45E7-A90B-D20A6857D585}"/>
+                <a16:creationId xmlns:a16="http://schemas.microsoft.com/office/drawing/2014/main" id="{0DAF445E-DD6A-4095-BE2F-017D81374EA3}"/>
               </a:ext>
             </a:extLst>
           </p:cNvPr>
@@ -17375,7 +17719,7 @@
           <p:cNvPr id="12" name="">
             <a:extLst xmlns:a="http://schemas.openxmlformats.org/drawingml/2006/main">
               <a:ext uri="{FF2B5EF4-FFF2-40B4-BE49-F238E27FC236}">
-                <a16:creationId xmlns:a16="http://schemas.microsoft.com/office/drawing/2014/main" id="{FEBE62C3-45FC-4772-9D0C-C0D264158CDA}"/>
+                <a16:creationId xmlns:a16="http://schemas.microsoft.com/office/drawing/2014/main" id="{C7FEBD67-8C07-4E06-BE70-41299D331D4B}"/>
               </a:ext>
             </a:extLst>
           </p:cNvPr>
@@ -17579,7 +17923,7 @@
           <p:cNvPr id="13" name="">
             <a:extLst xmlns:a="http://schemas.openxmlformats.org/drawingml/2006/main">
               <a:ext uri="{FF2B5EF4-FFF2-40B4-BE49-F238E27FC236}">
-                <a16:creationId xmlns:a16="http://schemas.microsoft.com/office/drawing/2014/main" id="{5A1E419F-F9E9-41F1-87E8-A9652A2ADB5B}"/>
+                <a16:creationId xmlns:a16="http://schemas.microsoft.com/office/drawing/2014/main" id="{5A5C2715-A9C1-435B-AD95-72FE14958651}"/>
               </a:ext>
             </a:extLst>
           </p:cNvPr>
@@ -17735,7 +18079,7 @@
     </p:spTree>
     <p:extLst>
       <p:ext uri="{BB962C8B-B14F-4D97-AF65-F5344CB8AC3E}">
-        <p14:creationId xmlns:p14="http://schemas.microsoft.com/office/powerpoint/2010/main" val="1477634348"/>
+        <p14:creationId xmlns:p14="http://schemas.microsoft.com/office/powerpoint/2010/main" val="972504931"/>
       </p:ext>
     </p:extLst>
   </p:cSld>
@@ -17766,7 +18110,7 @@
           <p:cNvPr id="14" name="">
             <a:extLst xmlns:a="http://schemas.openxmlformats.org/drawingml/2006/main">
               <a:ext uri="{FF2B5EF4-FFF2-40B4-BE49-F238E27FC236}">
-                <a16:creationId xmlns:a16="http://schemas.microsoft.com/office/drawing/2014/main" id="{FC6328CE-5640-4F21-ADEF-9417DD1EB82F}"/>
+                <a16:creationId xmlns:a16="http://schemas.microsoft.com/office/drawing/2014/main" id="{07DD5DF1-DC9F-4C27-9D53-CC885F938289}"/>
               </a:ext>
             </a:extLst>
           </p:cNvPr>
@@ -17924,7 +18268,7 @@
           <p:cNvPr id="2" name="">
             <a:extLst xmlns:a="http://schemas.openxmlformats.org/drawingml/2006/main">
               <a:ext uri="{FF2B5EF4-FFF2-40B4-BE49-F238E27FC236}">
-                <a16:creationId xmlns:a16="http://schemas.microsoft.com/office/drawing/2014/main" id="{5B7BBD2B-5715-490C-9C35-8314C315A15A}"/>
+                <a16:creationId xmlns:a16="http://schemas.microsoft.com/office/drawing/2014/main" id="{DDA257FA-018D-448C-92C1-D1B5E744C80D}"/>
               </a:ext>
             </a:extLst>
           </p:cNvPr>
@@ -18082,7 +18426,7 @@
           <p:cNvPr id="3" name="">
             <a:extLst xmlns:a="http://schemas.openxmlformats.org/drawingml/2006/main">
               <a:ext uri="{FF2B5EF4-FFF2-40B4-BE49-F238E27FC236}">
-                <a16:creationId xmlns:a16="http://schemas.microsoft.com/office/drawing/2014/main" id="{01D4D27F-ADAC-47CD-898D-45E3AD15381B}"/>
+                <a16:creationId xmlns:a16="http://schemas.microsoft.com/office/drawing/2014/main" id="{A2CF2567-2F11-4231-9217-2335CF84493A}"/>
               </a:ext>
             </a:extLst>
           </p:cNvPr>
@@ -18230,7 +18574,7 @@
                 <a:ea typeface="Arial"/>
                 <a:cs typeface="Arial"/>
               </a:rPr>
-              <a:t>Kopja është ndihmë për lexim</a:t>
+              <a:t>E dhënë e ruajtur apo gjendje e tanishme?</a:t>
             </a:r>
           </a:p>
         </p:txBody>
@@ -18240,7 +18584,7 @@
           <p:cNvPr id="4" name="">
             <a:extLst xmlns:a="http://schemas.openxmlformats.org/drawingml/2006/main">
               <a:ext uri="{FF2B5EF4-FFF2-40B4-BE49-F238E27FC236}">
-                <a16:creationId xmlns:a16="http://schemas.microsoft.com/office/drawing/2014/main" id="{E667D471-2862-466C-80E7-3F3F42CC2A0F}"/>
+                <a16:creationId xmlns:a16="http://schemas.microsoft.com/office/drawing/2014/main" id="{D22988F0-1ACD-4A60-A1AF-986D7AA67B62}"/>
               </a:ext>
             </a:extLst>
           </p:cNvPr>
@@ -18250,7 +18594,7 @@
           <p:nvPr/>
         </p:nvPicPr>
         <p:blipFill>
-          <a:blip xmlns:r="http://schemas.openxmlformats.org/officeDocument/2006/relationships" xmlns:a="http://schemas.openxmlformats.org/drawingml/2006/main" r:embed="R8c05ca170a2b4390"/>
+          <a:blip xmlns:r="http://schemas.openxmlformats.org/officeDocument/2006/relationships" xmlns:a="http://schemas.openxmlformats.org/drawingml/2006/main" r:embed="Rb163d48cbb794b98"/>
           <a:stretch xmlns:a="http://schemas.openxmlformats.org/drawingml/2006/main"/>
         </p:blipFill>
         <p:spPr>
@@ -18268,7 +18612,7 @@
           <p:cNvPr id="5" name="">
             <a:extLst xmlns:a="http://schemas.openxmlformats.org/drawingml/2006/main">
               <a:ext uri="{FF2B5EF4-FFF2-40B4-BE49-F238E27FC236}">
-                <a16:creationId xmlns:a16="http://schemas.microsoft.com/office/drawing/2014/main" id="{A7C61B3A-2981-4303-8F76-3E06C8123E0D}"/>
+                <a16:creationId xmlns:a16="http://schemas.microsoft.com/office/drawing/2014/main" id="{92EC4779-9747-414C-93F0-9623A8F48CC5}"/>
               </a:ext>
             </a:extLst>
           </p:cNvPr>
@@ -18416,7 +18760,7 @@
                 <a:ea typeface="Arial"/>
                 <a:cs typeface="Arial"/>
               </a:rPr>
-              <a:t>Kopja</a:t>
+              <a:t>Çfarë dimë?</a:t>
             </a:r>
           </a:p>
         </p:txBody>
@@ -18426,7 +18770,7 @@
           <p:cNvPr id="6" name="">
             <a:extLst xmlns:a="http://schemas.openxmlformats.org/drawingml/2006/main">
               <a:ext uri="{FF2B5EF4-FFF2-40B4-BE49-F238E27FC236}">
-                <a16:creationId xmlns:a16="http://schemas.microsoft.com/office/drawing/2014/main" id="{A13C2237-F7EC-4702-8BA2-EFA5B740BFE6}"/>
+                <a16:creationId xmlns:a16="http://schemas.microsoft.com/office/drawing/2014/main" id="{54DB3D79-E033-40F7-A126-6DEBCAF17950}"/>
               </a:ext>
             </a:extLst>
           </p:cNvPr>
@@ -18574,7 +18918,7 @@
                 <a:ea typeface="Arial"/>
                 <a:cs typeface="Arial"/>
               </a:rPr>
-              <a:t>Mund të jetë e vjetër</a:t>
+              <a:t>Vlerën në kohën e ruajtjes</a:t>
             </a:r>
           </a:p>
         </p:txBody>
@@ -18584,7 +18928,7 @@
           <p:cNvPr id="7" name="">
             <a:extLst xmlns:a="http://schemas.openxmlformats.org/drawingml/2006/main">
               <a:ext uri="{FF2B5EF4-FFF2-40B4-BE49-F238E27FC236}">
-                <a16:creationId xmlns:a16="http://schemas.microsoft.com/office/drawing/2014/main" id="{26F6FC6F-9738-4913-90B8-E2488799EC92}"/>
+                <a16:creationId xmlns:a16="http://schemas.microsoft.com/office/drawing/2014/main" id="{CF5D01C2-5C87-4745-9B30-D5606FE1713E}"/>
               </a:ext>
             </a:extLst>
           </p:cNvPr>
@@ -18594,7 +18938,7 @@
           <p:nvPr/>
         </p:nvPicPr>
         <p:blipFill>
-          <a:blip xmlns:r="http://schemas.openxmlformats.org/officeDocument/2006/relationships" xmlns:a="http://schemas.openxmlformats.org/drawingml/2006/main" r:embed="R2b3572fee3ba49de"/>
+          <a:blip xmlns:r="http://schemas.openxmlformats.org/officeDocument/2006/relationships" xmlns:a="http://schemas.openxmlformats.org/drawingml/2006/main" r:embed="R81c2ec8da0644954"/>
           <a:stretch xmlns:a="http://schemas.openxmlformats.org/drawingml/2006/main"/>
         </p:blipFill>
         <p:spPr>
@@ -18612,7 +18956,7 @@
           <p:cNvPr id="8" name="">
             <a:extLst xmlns:a="http://schemas.openxmlformats.org/drawingml/2006/main">
               <a:ext uri="{FF2B5EF4-FFF2-40B4-BE49-F238E27FC236}">
-                <a16:creationId xmlns:a16="http://schemas.microsoft.com/office/drawing/2014/main" id="{C3441F2A-0CBB-4E83-B913-0EBCD520B079}"/>
+                <a16:creationId xmlns:a16="http://schemas.microsoft.com/office/drawing/2014/main" id="{50197AB2-3782-4059-BDC1-D470DBCC49D5}"/>
               </a:ext>
             </a:extLst>
           </p:cNvPr>
@@ -18760,7 +19104,7 @@
                 <a:ea typeface="Arial"/>
                 <a:cs typeface="Arial"/>
               </a:rPr>
-              <a:t>Përditësimi</a:t>
+              <a:t>Çfarë duhet të verifikojmë?</a:t>
             </a:r>
           </a:p>
         </p:txBody>
@@ -18770,7 +19114,7 @@
           <p:cNvPr id="9" name="">
             <a:extLst xmlns:a="http://schemas.openxmlformats.org/drawingml/2006/main">
               <a:ext uri="{FF2B5EF4-FFF2-40B4-BE49-F238E27FC236}">
-                <a16:creationId xmlns:a16="http://schemas.microsoft.com/office/drawing/2014/main" id="{91912B2A-896F-4C1D-9A73-FD96FC582EFE}"/>
+                <a16:creationId xmlns:a16="http://schemas.microsoft.com/office/drawing/2014/main" id="{C21AC81A-F638-4602-89E9-354B610A32F1}"/>
               </a:ext>
             </a:extLst>
           </p:cNvPr>
@@ -18918,7 +19262,7 @@
                 <a:ea typeface="Arial"/>
                 <a:cs typeface="Arial"/>
               </a:rPr>
-              <a:t>Pasi përgjigjet serveri</a:t>
+              <a:t>Vlerën aktuale në server</a:t>
             </a:r>
           </a:p>
         </p:txBody>
@@ -18928,7 +19272,7 @@
           <p:cNvPr id="10" name="">
             <a:extLst xmlns:a="http://schemas.openxmlformats.org/drawingml/2006/main">
               <a:ext uri="{FF2B5EF4-FFF2-40B4-BE49-F238E27FC236}">
-                <a16:creationId xmlns:a16="http://schemas.microsoft.com/office/drawing/2014/main" id="{E9539F9A-CAA7-4D35-87A6-BEF6B6CACCDC}"/>
+                <a16:creationId xmlns:a16="http://schemas.microsoft.com/office/drawing/2014/main" id="{F78F5C6D-9FCD-46E6-84E0-128BE2820701}"/>
               </a:ext>
             </a:extLst>
           </p:cNvPr>
@@ -19076,7 +19420,7 @@
                 <a:ea typeface="Arial"/>
                 <a:cs typeface="Arial"/>
               </a:rPr>
-              <a:t>Shfaq kohën e ruajtjes dhe paralajmërimin për të dhënat e vjetra.</a:t>
+              <a:t>Kopja thotë: “Në 07:00 kishte 1 vend”. Kjo nuk do të thotë: “Tani ka 1 vend”.</a:t>
             </a:r>
           </a:p>
           <a:p xmlns:a="http://schemas.openxmlformats.org/drawingml/2006/main">
@@ -19104,7 +19448,7 @@
                 <a:ea typeface="Arial"/>
                 <a:cs typeface="Arial"/>
               </a:rPr>
-              <a:t>Rikthimi i lidhjes lejon një kërkesë të re. Vetëm përgjigjja e suksesshme sjell të dhëna të reja.</a:t>
+              <a:t>Rrjeti mund të rikthehet ndërsa serveri ende nuk përgjigjet. Gjendjen e re e njohim pasi marrim përgjigjen e suksesshme.</a:t>
             </a:r>
           </a:p>
         </p:txBody>
@@ -19114,7 +19458,7 @@
           <p:cNvPr id="11" name="">
             <a:extLst xmlns:a="http://schemas.openxmlformats.org/drawingml/2006/main">
               <a:ext uri="{FF2B5EF4-FFF2-40B4-BE49-F238E27FC236}">
-                <a16:creationId xmlns:a16="http://schemas.microsoft.com/office/drawing/2014/main" id="{CF4FB6C3-370E-419B-B5FC-0055AAC585B9}"/>
+                <a16:creationId xmlns:a16="http://schemas.microsoft.com/office/drawing/2014/main" id="{41E00931-1BB9-40F3-9CF3-DBEE44351998}"/>
               </a:ext>
             </a:extLst>
           </p:cNvPr>
@@ -19262,7 +19606,7 @@
                 <a:ea typeface="Arial"/>
                 <a:cs typeface="Arial"/>
               </a:rPr>
-              <a:t>A mjafton që një faqe e hapur të mbetet në ekran për të provuar offline?</a:t>
+              <a:t>Çfarë i duhet Artës që të mos e ngatërrojë kopjen me të dhënat e reja?</a:t>
             </a:r>
           </a:p>
         </p:txBody>
@@ -19272,7 +19616,7 @@
           <p:cNvPr id="12" name="">
             <a:extLst xmlns:a="http://schemas.openxmlformats.org/drawingml/2006/main">
               <a:ext uri="{FF2B5EF4-FFF2-40B4-BE49-F238E27FC236}">
-                <a16:creationId xmlns:a16="http://schemas.microsoft.com/office/drawing/2014/main" id="{80381472-1B83-427C-849A-0FBA5DD52511}"/>
+                <a16:creationId xmlns:a16="http://schemas.microsoft.com/office/drawing/2014/main" id="{0B8DB290-91E8-4D17-8231-E089E4E211B1}"/>
               </a:ext>
             </a:extLst>
           </p:cNvPr>
@@ -19420,7 +19764,7 @@
                 <a:ea typeface="Arial"/>
                 <a:cs typeface="Arial"/>
               </a:rPr>
-              <a:t>Jo. Hape online, ndalo rrjetin e atij tab-i dhe rifresko faqen e listës. Vëzhgo çfarë ngarkohet sërish.</a:t>
+              <a:t>Koha e ruajtjes, shënimi që kopja mund të jetë e vjetër dhe mesazh i qartë kur përditësimi nuk arrihet.</a:t>
             </a:r>
           </a:p>
         </p:txBody>
@@ -19430,7 +19774,7 @@
           <p:cNvPr id="13" name="">
             <a:extLst xmlns:a="http://schemas.openxmlformats.org/drawingml/2006/main">
               <a:ext uri="{FF2B5EF4-FFF2-40B4-BE49-F238E27FC236}">
-                <a16:creationId xmlns:a16="http://schemas.microsoft.com/office/drawing/2014/main" id="{1976B0D2-D6DC-4F9C-A037-55FEAA6656BA}"/>
+                <a16:creationId xmlns:a16="http://schemas.microsoft.com/office/drawing/2014/main" id="{BDD39678-CB9F-45A1-9D89-DE3CF8B5BB91}"/>
               </a:ext>
             </a:extLst>
           </p:cNvPr>
@@ -19586,7 +19930,7 @@
     </p:spTree>
     <p:extLst>
       <p:ext uri="{BB962C8B-B14F-4D97-AF65-F5344CB8AC3E}">
-        <p14:creationId xmlns:p14="http://schemas.microsoft.com/office/powerpoint/2010/main" val="1743802353"/>
+        <p14:creationId xmlns:p14="http://schemas.microsoft.com/office/powerpoint/2010/main" val="1413892229"/>
       </p:ext>
     </p:extLst>
   </p:cSld>
@@ -19617,7 +19961,7 @@
           <p:cNvPr id="13" name="">
             <a:extLst xmlns:a="http://schemas.openxmlformats.org/drawingml/2006/main">
               <a:ext uri="{FF2B5EF4-FFF2-40B4-BE49-F238E27FC236}">
-                <a16:creationId xmlns:a16="http://schemas.microsoft.com/office/drawing/2014/main" id="{78D0057D-85EB-45B9-AA83-058741D1614F}"/>
+                <a16:creationId xmlns:a16="http://schemas.microsoft.com/office/drawing/2014/main" id="{16EAC933-130E-42C2-8460-E87D869F04F8}"/>
               </a:ext>
             </a:extLst>
           </p:cNvPr>
@@ -19775,7 +20119,7 @@
           <p:cNvPr id="2" name="">
             <a:extLst xmlns:a="http://schemas.openxmlformats.org/drawingml/2006/main">
               <a:ext uri="{FF2B5EF4-FFF2-40B4-BE49-F238E27FC236}">
-                <a16:creationId xmlns:a16="http://schemas.microsoft.com/office/drawing/2014/main" id="{9E5EC455-14E4-4ACF-8CC5-672D8896C5B7}"/>
+                <a16:creationId xmlns:a16="http://schemas.microsoft.com/office/drawing/2014/main" id="{D694111E-BFCB-4E5D-8F78-E7A6D6607D96}"/>
               </a:ext>
             </a:extLst>
           </p:cNvPr>
@@ -19933,7 +20277,7 @@
           <p:cNvPr id="3" name="">
             <a:extLst xmlns:a="http://schemas.openxmlformats.org/drawingml/2006/main">
               <a:ext uri="{FF2B5EF4-FFF2-40B4-BE49-F238E27FC236}">
-                <a16:creationId xmlns:a16="http://schemas.microsoft.com/office/drawing/2014/main" id="{0E541F23-9E22-46D9-969F-F9DCD17B57DA}"/>
+                <a16:creationId xmlns:a16="http://schemas.microsoft.com/office/drawing/2014/main" id="{60308F52-4EB3-41E6-A106-72C5FC6ABE42}"/>
               </a:ext>
             </a:extLst>
           </p:cNvPr>
@@ -20081,7 +20425,7 @@
                 <a:ea typeface="Arial"/>
                 <a:cs typeface="Arial"/>
               </a:rPr>
-              <a:t>Dy probleme, një korrigjim i vogël</a:t>
+              <a:t>Cilin problem korrigjojmë së pari?</a:t>
             </a:r>
           </a:p>
         </p:txBody>
@@ -20091,7 +20435,7 @@
           <p:cNvPr id="4" name="">
             <a:extLst xmlns:a="http://schemas.openxmlformats.org/drawingml/2006/main">
               <a:ext uri="{FF2B5EF4-FFF2-40B4-BE49-F238E27FC236}">
-                <a16:creationId xmlns:a16="http://schemas.microsoft.com/office/drawing/2014/main" id="{545F4B2F-2A6C-4F68-983B-1E3FE1E27727}"/>
+                <a16:creationId xmlns:a16="http://schemas.microsoft.com/office/drawing/2014/main" id="{2E20F116-58F3-4B40-9A82-59E143A8754E}"/>
               </a:ext>
             </a:extLst>
           </p:cNvPr>
@@ -20101,7 +20445,7 @@
           <p:nvPr/>
         </p:nvPicPr>
         <p:blipFill>
-          <a:blip xmlns:r="http://schemas.openxmlformats.org/officeDocument/2006/relationships" xmlns:a="http://schemas.openxmlformats.org/drawingml/2006/main" r:embed="R37c985ccaa124a9b"/>
+          <a:blip xmlns:r="http://schemas.openxmlformats.org/officeDocument/2006/relationships" xmlns:a="http://schemas.openxmlformats.org/drawingml/2006/main" r:embed="Ra4cd4189332b4fbb"/>
           <a:stretch xmlns:a="http://schemas.openxmlformats.org/drawingml/2006/main"/>
         </p:blipFill>
         <p:spPr>
@@ -20119,7 +20463,7 @@
           <p:cNvPr id="5" name="">
             <a:extLst xmlns:a="http://schemas.openxmlformats.org/drawingml/2006/main">
               <a:ext uri="{FF2B5EF4-FFF2-40B4-BE49-F238E27FC236}">
-                <a16:creationId xmlns:a16="http://schemas.microsoft.com/office/drawing/2014/main" id="{B4858F87-CAC9-4333-BE14-3C65A660C928}"/>
+                <a16:creationId xmlns:a16="http://schemas.microsoft.com/office/drawing/2014/main" id="{633CBD9F-9C8E-4870-BE2B-28E8404C3B9D}"/>
               </a:ext>
             </a:extLst>
           </p:cNvPr>
@@ -20267,7 +20611,7 @@
                 <a:ea typeface="Arial"/>
                 <a:cs typeface="Arial"/>
               </a:rPr>
-              <a:t>Shkaku</a:t>
+              <a:t>Sa e pengon?</a:t>
             </a:r>
           </a:p>
         </p:txBody>
@@ -20277,7 +20621,7 @@
           <p:cNvPr id="6" name="">
             <a:extLst xmlns:a="http://schemas.openxmlformats.org/drawingml/2006/main">
               <a:ext uri="{FF2B5EF4-FFF2-40B4-BE49-F238E27FC236}">
-                <a16:creationId xmlns:a16="http://schemas.microsoft.com/office/drawing/2014/main" id="{A0F7AED8-E842-4459-874D-843E4F93C85A}"/>
+                <a16:creationId xmlns:a16="http://schemas.microsoft.com/office/drawing/2014/main" id="{3B27D61D-9A1A-45FF-9579-2CB1D50923B8}"/>
               </a:ext>
             </a:extLst>
           </p:cNvPr>
@@ -20425,7 +20769,7 @@
                 <a:ea typeface="Arial"/>
                 <a:cs typeface="Arial"/>
               </a:rPr>
-              <a:t>Rruga ose kushti</a:t>
+              <a:t>A e kupton përdoruesi veprimin?</a:t>
             </a:r>
           </a:p>
         </p:txBody>
@@ -20435,7 +20779,7 @@
           <p:cNvPr id="7" name="">
             <a:extLst xmlns:a="http://schemas.openxmlformats.org/drawingml/2006/main">
               <a:ext uri="{FF2B5EF4-FFF2-40B4-BE49-F238E27FC236}">
-                <a16:creationId xmlns:a16="http://schemas.microsoft.com/office/drawing/2014/main" id="{93B911C8-F91F-49FF-BC9D-A4857BD7A64D}"/>
+                <a16:creationId xmlns:a16="http://schemas.microsoft.com/office/drawing/2014/main" id="{1301CE92-0262-435A-97BB-CB1422118741}"/>
               </a:ext>
             </a:extLst>
           </p:cNvPr>
@@ -20445,7 +20789,7 @@
           <p:nvPr/>
         </p:nvPicPr>
         <p:blipFill>
-          <a:blip xmlns:r="http://schemas.openxmlformats.org/officeDocument/2006/relationships" xmlns:a="http://schemas.openxmlformats.org/drawingml/2006/main" r:embed="R50db3b55abd94713"/>
+          <a:blip xmlns:r="http://schemas.openxmlformats.org/officeDocument/2006/relationships" xmlns:a="http://schemas.openxmlformats.org/drawingml/2006/main" r:embed="Rc06d1a133e8349fe"/>
           <a:stretch xmlns:a="http://schemas.openxmlformats.org/drawingml/2006/main"/>
         </p:blipFill>
         <p:spPr>
@@ -20463,7 +20807,7 @@
           <p:cNvPr id="8" name="">
             <a:extLst xmlns:a="http://schemas.openxmlformats.org/drawingml/2006/main">
               <a:ext uri="{FF2B5EF4-FFF2-40B4-BE49-F238E27FC236}">
-                <a16:creationId xmlns:a16="http://schemas.microsoft.com/office/drawing/2014/main" id="{F0DC4181-9ED8-4373-804D-4352024BCC7F}"/>
+                <a16:creationId xmlns:a16="http://schemas.microsoft.com/office/drawing/2014/main" id="{6F30BD3F-3873-4922-8462-7573AEBA1F5B}"/>
               </a:ext>
             </a:extLst>
           </p:cNvPr>
@@ -20611,7 +20955,7 @@
                 <a:ea typeface="Arial"/>
                 <a:cs typeface="Arial"/>
               </a:rPr>
-              <a:t>Korrigjimi</a:t>
+              <a:t>Çfarë mund të dëmtojë?</a:t>
             </a:r>
           </a:p>
         </p:txBody>
@@ -20621,7 +20965,7 @@
           <p:cNvPr id="9" name="">
             <a:extLst xmlns:a="http://schemas.openxmlformats.org/drawingml/2006/main">
               <a:ext uri="{FF2B5EF4-FFF2-40B4-BE49-F238E27FC236}">
-                <a16:creationId xmlns:a16="http://schemas.microsoft.com/office/drawing/2014/main" id="{33E19101-15E1-48BE-8AF6-2399C615562B}"/>
+                <a16:creationId xmlns:a16="http://schemas.microsoft.com/office/drawing/2014/main" id="{4643A6BE-DA6E-4E58-BC21-61FF854D414A}"/>
               </a:ext>
             </a:extLst>
           </p:cNvPr>
@@ -20769,7 +21113,7 @@
                 <a:ea typeface="Arial"/>
                 <a:cs typeface="Arial"/>
               </a:rPr>
-              <a:t>Një ndryshim i kuptueshëm</a:t>
+              <a:t>A ndryshon të dhënat e tjetrit?</a:t>
             </a:r>
           </a:p>
         </p:txBody>
@@ -20779,7 +21123,7 @@
           <p:cNvPr id="10" name="">
             <a:extLst xmlns:a="http://schemas.openxmlformats.org/drawingml/2006/main">
               <a:ext uri="{FF2B5EF4-FFF2-40B4-BE49-F238E27FC236}">
-                <a16:creationId xmlns:a16="http://schemas.microsoft.com/office/drawing/2014/main" id="{8E171420-2B26-4813-9521-C5A34326B651}"/>
+                <a16:creationId xmlns:a16="http://schemas.microsoft.com/office/drawing/2014/main" id="{4B90234E-69B3-4359-89D4-C72E4B61AA9D}"/>
               </a:ext>
             </a:extLst>
           </p:cNvPr>
@@ -20927,7 +21271,7 @@
                 <a:ea typeface="Arial"/>
                 <a:cs typeface="Arial"/>
               </a:rPr>
-              <a:t>Shembull vëzhgimi: ID i panjohur hap të njëjtat detaje. Pasoja: Arta mund të zgjedhë udhëtimin e gabuar.</a:t>
+              <a:t>Dy vëzhgime: ngjyra e kartës nuk dallohet mirë; Arta mund të ndryshojë udhëtimin e Dritonit.</a:t>
             </a:r>
           </a:p>
           <a:p xmlns:a="http://schemas.openxmlformats.org/drawingml/2006/main">
@@ -20955,7 +21299,7 @@
                 <a:ea typeface="Arial"/>
                 <a:cs typeface="Arial"/>
               </a:rPr>
-              <a:t>Zgjidh një problem të riprodhueshëm në projektin tënd. Ndrysho pjesën më të vogël që e korrigjon.</a:t>
+              <a:t>Diskutoni 30 sekonda në çift: cilin zgjidhni së pari dhe çfarë pasoje shmangni për përdoruesin?</a:t>
             </a:r>
           </a:p>
         </p:txBody>
@@ -20965,7 +21309,7 @@
           <p:cNvPr id="11" name="">
             <a:extLst xmlns:a="http://schemas.openxmlformats.org/drawingml/2006/main">
               <a:ext uri="{FF2B5EF4-FFF2-40B4-BE49-F238E27FC236}">
-                <a16:creationId xmlns:a16="http://schemas.microsoft.com/office/drawing/2014/main" id="{7BF4F82A-BAEB-4A02-B8CB-7CD247EE0E5A}"/>
+                <a16:creationId xmlns:a16="http://schemas.microsoft.com/office/drawing/2014/main" id="{B3BE100C-D81F-4915-8DAE-125BC342F7C9}"/>
               </a:ext>
             </a:extLst>
           </p:cNvPr>
@@ -21113,7 +21457,7 @@
                 <a:ea typeface="Arial"/>
                 <a:cs typeface="Arial"/>
               </a:rPr>
-              <a:t>Nëse aplikacioni yt nuk ka këtë gabim, çfarë bën?</a:t>
+              <a:t>Pse në këtë shembull kontrollojmë lejen përpara ngjyrës?</a:t>
             </a:r>
           </a:p>
         </p:txBody>
@@ -21123,7 +21467,7 @@
           <p:cNvPr id="12" name="">
             <a:extLst xmlns:a="http://schemas.openxmlformats.org/drawingml/2006/main">
               <a:ext uri="{FF2B5EF4-FFF2-40B4-BE49-F238E27FC236}">
-                <a16:creationId xmlns:a16="http://schemas.microsoft.com/office/drawing/2014/main" id="{E703C7FF-A2FE-4DD8-A3D9-DA37E25E2104}"/>
+                <a16:creationId xmlns:a16="http://schemas.microsoft.com/office/drawing/2014/main" id="{52930664-0922-48AA-87B3-7C7CBA75E003}"/>
               </a:ext>
             </a:extLst>
           </p:cNvPr>
@@ -21271,7 +21615,7 @@
                 <a:ea typeface="Arial"/>
                 <a:cs typeface="Arial"/>
               </a:rPr>
-              <a:t>Zgjedh një problem tjetër real ose përmirëson një kufi të vogël, p.sh. mesazhin e listës bosh. Mos e prish qëllimisht projektin.</a:t>
+              <a:t>Ndryshimi pa leje prek të dhënat e një personi tjetër. Të dy problemet vlejnë, por pasoja na ndihmon të vendosim rendin.</a:t>
             </a:r>
           </a:p>
         </p:txBody>
@@ -21279,7 +21623,7 @@
     </p:spTree>
     <p:extLst>
       <p:ext uri="{BB962C8B-B14F-4D97-AF65-F5344CB8AC3E}">
-        <p14:creationId xmlns:p14="http://schemas.microsoft.com/office/powerpoint/2010/main" val="207992934"/>
+        <p14:creationId xmlns:p14="http://schemas.microsoft.com/office/powerpoint/2010/main" val="587271581"/>
       </p:ext>
     </p:extLst>
   </p:cSld>
@@ -21307,10 +21651,10 @@
       </p:grpSpPr>
       <p:sp>
         <p:nvSpPr>
-          <p:cNvPr id="13" name="">
+          <p:cNvPr id="16" name="">
             <a:extLst xmlns:a="http://schemas.openxmlformats.org/drawingml/2006/main">
               <a:ext uri="{FF2B5EF4-FFF2-40B4-BE49-F238E27FC236}">
-                <a16:creationId xmlns:a16="http://schemas.microsoft.com/office/drawing/2014/main" id="{891C855F-1E11-41B5-97B1-39794BCE0023}"/>
+                <a16:creationId xmlns:a16="http://schemas.microsoft.com/office/drawing/2014/main" id="{C8E4E020-64A0-4AB2-A89E-997F28FA5273}"/>
               </a:ext>
             </a:extLst>
           </p:cNvPr>
@@ -21468,7 +21812,7 @@
           <p:cNvPr id="2" name="">
             <a:extLst xmlns:a="http://schemas.openxmlformats.org/drawingml/2006/main">
               <a:ext uri="{FF2B5EF4-FFF2-40B4-BE49-F238E27FC236}">
-                <a16:creationId xmlns:a16="http://schemas.microsoft.com/office/drawing/2014/main" id="{8E9CC0E4-81EC-46F2-9A5B-FEE403B21FC2}"/>
+                <a16:creationId xmlns:a16="http://schemas.microsoft.com/office/drawing/2014/main" id="{0D332810-42E4-4709-92F8-7BCA3B4DA6EE}"/>
               </a:ext>
             </a:extLst>
           </p:cNvPr>
@@ -21626,7 +21970,7 @@
           <p:cNvPr id="3" name="">
             <a:extLst xmlns:a="http://schemas.openxmlformats.org/drawingml/2006/main">
               <a:ext uri="{FF2B5EF4-FFF2-40B4-BE49-F238E27FC236}">
-                <a16:creationId xmlns:a16="http://schemas.microsoft.com/office/drawing/2014/main" id="{9D769813-0C3F-43E2-8851-5C7B4301BB85}"/>
+                <a16:creationId xmlns:a16="http://schemas.microsoft.com/office/drawing/2014/main" id="{35809C7A-6D60-46C5-AD67-C442D4453D98}"/>
               </a:ext>
             </a:extLst>
           </p:cNvPr>
@@ -21774,7 +22118,7 @@
                 <a:ea typeface="Arial"/>
                 <a:cs typeface="Arial"/>
               </a:rPr>
-              <a:t>Prova para dhe pas ndryshimit</a:t>
+              <a:t>Një provë kaloi. Çfarë kemi vërtetuar?</a:t>
             </a:r>
           </a:p>
         </p:txBody>
@@ -21784,7 +22128,7 @@
           <p:cNvPr id="4" name="">
             <a:extLst xmlns:a="http://schemas.openxmlformats.org/drawingml/2006/main">
               <a:ext uri="{FF2B5EF4-FFF2-40B4-BE49-F238E27FC236}">
-                <a16:creationId xmlns:a16="http://schemas.microsoft.com/office/drawing/2014/main" id="{E18369F6-0517-49FF-8E50-1E58C0EFAC63}"/>
+                <a16:creationId xmlns:a16="http://schemas.microsoft.com/office/drawing/2014/main" id="{7B9B34F4-9C2F-4299-A0ED-71750AE3BD25}"/>
               </a:ext>
             </a:extLst>
           </p:cNvPr>
@@ -21794,7 +22138,7 @@
           <p:nvPr/>
         </p:nvPicPr>
         <p:blipFill>
-          <a:blip xmlns:r="http://schemas.openxmlformats.org/officeDocument/2006/relationships" xmlns:a="http://schemas.openxmlformats.org/drawingml/2006/main" r:embed="Rb36e54c6307e4a28"/>
+          <a:blip xmlns:r="http://schemas.openxmlformats.org/officeDocument/2006/relationships" xmlns:a="http://schemas.openxmlformats.org/drawingml/2006/main" r:embed="Re6703c48ea6f426e"/>
           <a:stretch xmlns:a="http://schemas.openxmlformats.org/drawingml/2006/main"/>
         </p:blipFill>
         <p:spPr>
@@ -21812,7 +22156,7 @@
           <p:cNvPr id="5" name="">
             <a:extLst xmlns:a="http://schemas.openxmlformats.org/drawingml/2006/main">
               <a:ext uri="{FF2B5EF4-FFF2-40B4-BE49-F238E27FC236}">
-                <a16:creationId xmlns:a16="http://schemas.microsoft.com/office/drawing/2014/main" id="{20ACCA41-4FED-4F4E-A1C7-ECF8FB42E2E9}"/>
+                <a16:creationId xmlns:a16="http://schemas.microsoft.com/office/drawing/2014/main" id="{0E1C9096-6F68-4921-9197-6F431888E751}"/>
               </a:ext>
             </a:extLst>
           </p:cNvPr>
@@ -21824,7 +22168,7 @@
         <p:spPr>
           <a:xfrm xmlns:a="http://schemas.openxmlformats.org/drawingml/2006/main">
             <a:off x="609600" y="2667000"/>
-            <a:ext cx="5295900" cy="495300"/>
+            <a:ext cx="3409950" cy="495300"/>
           </a:xfrm>
           <a:prstGeom xmlns:a="http://schemas.openxmlformats.org/drawingml/2006/main" prst="rect">
             <a:avLst/>
@@ -21960,7 +22304,7 @@
                 <a:ea typeface="Arial"/>
                 <a:cs typeface="Arial"/>
               </a:rPr>
-              <a:t>Para</a:t>
+              <a:t>Rasti normal</a:t>
             </a:r>
           </a:p>
         </p:txBody>
@@ -21970,7 +22314,7 @@
           <p:cNvPr id="6" name="">
             <a:extLst xmlns:a="http://schemas.openxmlformats.org/drawingml/2006/main">
               <a:ext uri="{FF2B5EF4-FFF2-40B4-BE49-F238E27FC236}">
-                <a16:creationId xmlns:a16="http://schemas.microsoft.com/office/drawing/2014/main" id="{355FA383-354B-43F4-9D8D-791B57E305F9}"/>
+                <a16:creationId xmlns:a16="http://schemas.microsoft.com/office/drawing/2014/main" id="{049CDF7F-FE9B-4E91-ACE3-AF4F94FB5744}"/>
               </a:ext>
             </a:extLst>
           </p:cNvPr>
@@ -21982,7 +22326,7 @@
         <p:spPr>
           <a:xfrm xmlns:a="http://schemas.openxmlformats.org/drawingml/2006/main">
             <a:off x="609600" y="3219450"/>
-            <a:ext cx="5295900" cy="571500"/>
+            <a:ext cx="3409950" cy="571500"/>
           </a:xfrm>
           <a:prstGeom xmlns:a="http://schemas.openxmlformats.org/drawingml/2006/main" prst="rect">
             <a:avLst/>
@@ -22118,7 +22462,7 @@
                 <a:ea typeface="Arial"/>
                 <a:cs typeface="Arial"/>
               </a:rPr>
-              <a:t>Gjendja fillestare</a:t>
+              <a:t>Udhëtimi ekziston</a:t>
             </a:r>
           </a:p>
         </p:txBody>
@@ -22128,7 +22472,7 @@
           <p:cNvPr id="7" name="">
             <a:extLst xmlns:a="http://schemas.openxmlformats.org/drawingml/2006/main">
               <a:ext uri="{FF2B5EF4-FFF2-40B4-BE49-F238E27FC236}">
-                <a16:creationId xmlns:a16="http://schemas.microsoft.com/office/drawing/2014/main" id="{D42180F3-3D1C-414C-BEE9-F61E5191027E}"/>
+                <a16:creationId xmlns:a16="http://schemas.microsoft.com/office/drawing/2014/main" id="{6F3E7ED1-625E-41F7-92C7-CF46F9AFB942}"/>
               </a:ext>
             </a:extLst>
           </p:cNvPr>
@@ -22138,12 +22482,12 @@
           <p:nvPr/>
         </p:nvPicPr>
         <p:blipFill>
-          <a:blip xmlns:r="http://schemas.openxmlformats.org/officeDocument/2006/relationships" xmlns:a="http://schemas.openxmlformats.org/drawingml/2006/main" r:embed="R2737bd7080a74132"/>
+          <a:blip xmlns:r="http://schemas.openxmlformats.org/officeDocument/2006/relationships" xmlns:a="http://schemas.openxmlformats.org/drawingml/2006/main" r:embed="R817ca436f94d45c8"/>
           <a:stretch xmlns:a="http://schemas.openxmlformats.org/drawingml/2006/main"/>
         </p:blipFill>
         <p:spPr>
           <a:xfrm xmlns:a="http://schemas.openxmlformats.org/drawingml/2006/main">
-            <a:off x="6267450" y="1952625"/>
+            <a:off x="4381500" y="1952625"/>
             <a:ext cx="571500" cy="571500"/>
           </a:xfrm>
           <a:prstGeom xmlns:a="http://schemas.openxmlformats.org/drawingml/2006/main" prst="rect">
@@ -22156,7 +22500,7 @@
           <p:cNvPr id="8" name="">
             <a:extLst xmlns:a="http://schemas.openxmlformats.org/drawingml/2006/main">
               <a:ext uri="{FF2B5EF4-FFF2-40B4-BE49-F238E27FC236}">
-                <a16:creationId xmlns:a16="http://schemas.microsoft.com/office/drawing/2014/main" id="{D3F43183-1FBA-4BA9-B0B5-2E5E024B8764}"/>
+                <a16:creationId xmlns:a16="http://schemas.microsoft.com/office/drawing/2014/main" id="{3FA339CF-1012-4886-9FDD-98C7A39F08EB}"/>
               </a:ext>
             </a:extLst>
           </p:cNvPr>
@@ -22167,8 +22511,8 @@
         </p:nvSpPr>
         <p:spPr>
           <a:xfrm xmlns:a="http://schemas.openxmlformats.org/drawingml/2006/main">
-            <a:off x="6267450" y="2667000"/>
-            <a:ext cx="5295900" cy="495300"/>
+            <a:off x="4381500" y="2667000"/>
+            <a:ext cx="3409950" cy="495300"/>
           </a:xfrm>
           <a:prstGeom xmlns:a="http://schemas.openxmlformats.org/drawingml/2006/main" prst="rect">
             <a:avLst/>
@@ -22304,7 +22648,7 @@
                 <a:ea typeface="Arial"/>
                 <a:cs typeface="Arial"/>
               </a:rPr>
-              <a:t>Pas</a:t>
+              <a:t>Rasti kufitar</a:t>
             </a:r>
           </a:p>
         </p:txBody>
@@ -22314,7 +22658,7 @@
           <p:cNvPr id="9" name="">
             <a:extLst xmlns:a="http://schemas.openxmlformats.org/drawingml/2006/main">
               <a:ext uri="{FF2B5EF4-FFF2-40B4-BE49-F238E27FC236}">
-                <a16:creationId xmlns:a16="http://schemas.microsoft.com/office/drawing/2014/main" id="{F9FA84A7-10FA-4FE6-AF93-628830528E4D}"/>
+                <a16:creationId xmlns:a16="http://schemas.microsoft.com/office/drawing/2014/main" id="{8985188B-8730-4DFA-8CC4-B609AF3D161D}"/>
               </a:ext>
             </a:extLst>
           </p:cNvPr>
@@ -22325,8 +22669,8 @@
         </p:nvSpPr>
         <p:spPr>
           <a:xfrm xmlns:a="http://schemas.openxmlformats.org/drawingml/2006/main">
-            <a:off x="6267450" y="3219450"/>
-            <a:ext cx="5295900" cy="571500"/>
+            <a:off x="4381500" y="3219450"/>
+            <a:ext cx="3409950" cy="571500"/>
           </a:xfrm>
           <a:prstGeom xmlns:a="http://schemas.openxmlformats.org/drawingml/2006/main" prst="rect">
             <a:avLst/>
@@ -22462,17 +22806,361 @@
                 <a:ea typeface="Arial"/>
                 <a:cs typeface="Arial"/>
               </a:rPr>
-              <a:t>Kodi i korrigjuar</a:t>
+              <a:t>ID mungon ose nuk ka vende</a:t>
+            </a:r>
+          </a:p>
+        </p:txBody>
+      </p:sp>
+      <p:pic>
+        <p:nvPicPr>
+          <p:cNvPr id="10" name="">
+            <a:extLst xmlns:a="http://schemas.openxmlformats.org/drawingml/2006/main">
+              <a:ext uri="{FF2B5EF4-FFF2-40B4-BE49-F238E27FC236}">
+                <a16:creationId xmlns:a16="http://schemas.microsoft.com/office/drawing/2014/main" id="{2ADCB9FF-54E7-478F-B528-BEFB135A2CA2}"/>
+              </a:ext>
+            </a:extLst>
+          </p:cNvPr>
+          <p:cNvPicPr>
+            <a:picLocks xmlns:a="http://schemas.openxmlformats.org/drawingml/2006/main" noChangeAspect="1"/>
+          </p:cNvPicPr>
+          <p:nvPr/>
+        </p:nvPicPr>
+        <p:blipFill>
+          <a:blip xmlns:r="http://schemas.openxmlformats.org/officeDocument/2006/relationships" xmlns:a="http://schemas.openxmlformats.org/drawingml/2006/main" r:embed="R07ec6b4122534eb0"/>
+          <a:stretch xmlns:a="http://schemas.openxmlformats.org/drawingml/2006/main"/>
+        </p:blipFill>
+        <p:spPr>
+          <a:xfrm xmlns:a="http://schemas.openxmlformats.org/drawingml/2006/main">
+            <a:off x="8153400" y="1952625"/>
+            <a:ext cx="571500" cy="571500"/>
+          </a:xfrm>
+          <a:prstGeom xmlns:a="http://schemas.openxmlformats.org/drawingml/2006/main" prst="rect">
+            <a:avLst/>
+          </a:prstGeom>
+        </p:spPr>
+      </p:pic>
+      <p:sp>
+        <p:nvSpPr>
+          <p:cNvPr id="11" name="">
+            <a:extLst xmlns:a="http://schemas.openxmlformats.org/drawingml/2006/main">
+              <a:ext uri="{FF2B5EF4-FFF2-40B4-BE49-F238E27FC236}">
+                <a16:creationId xmlns:a16="http://schemas.microsoft.com/office/drawing/2014/main" id="{801B3A49-63BB-407E-A0F7-AB95C8E26B33}"/>
+              </a:ext>
+            </a:extLst>
+          </p:cNvPr>
+          <p:cNvSpPr>
+            <a:spLocks xmlns:a="http://schemas.openxmlformats.org/drawingml/2006/main" noGrp="1"/>
+          </p:cNvSpPr>
+          <p:nvPr/>
+        </p:nvSpPr>
+        <p:spPr>
+          <a:xfrm xmlns:a="http://schemas.openxmlformats.org/drawingml/2006/main">
+            <a:off x="8153400" y="2667000"/>
+            <a:ext cx="3409950" cy="495300"/>
+          </a:xfrm>
+          <a:prstGeom xmlns:a="http://schemas.openxmlformats.org/drawingml/2006/main" prst="rect">
+            <a:avLst/>
+          </a:prstGeom>
+          <a:noFill xmlns:a="http://schemas.openxmlformats.org/drawingml/2006/main"/>
+          <a:ln xmlns:a="http://schemas.openxmlformats.org/drawingml/2006/main" w="0">
+            <a:noFill/>
+          </a:ln>
+        </p:spPr>
+        <p:txBody>
+          <a:bodyPr xmlns:a="http://schemas.openxmlformats.org/drawingml/2006/main">
+            <a:noAutofit/>
+          </a:bodyPr>
+          <a:lstStyle xmlns:a="http://schemas.openxmlformats.org/drawingml/2006/main">
+            <a:defPPr>
+              <a:defRPr sz="2025" b="1">
+                <a:solidFill>
+                  <a:srgbClr val="FFFFFF"/>
+                </a:solidFill>
+                <a:latin typeface="Arial"/>
+                <a:ea typeface="Arial"/>
+                <a:cs typeface="Arial"/>
+              </a:defRPr>
+            </a:defPPr>
+            <a:lvl1pPr>
+              <a:defRPr sz="2025" b="1">
+                <a:solidFill>
+                  <a:srgbClr val="FFFFFF"/>
+                </a:solidFill>
+                <a:latin typeface="Arial"/>
+                <a:ea typeface="Arial"/>
+                <a:cs typeface="Arial"/>
+              </a:defRPr>
+            </a:lvl1pPr>
+            <a:lvl2pPr>
+              <a:defRPr sz="2025" b="1">
+                <a:solidFill>
+                  <a:srgbClr val="FFFFFF"/>
+                </a:solidFill>
+                <a:latin typeface="Arial"/>
+                <a:ea typeface="Arial"/>
+                <a:cs typeface="Arial"/>
+              </a:defRPr>
+            </a:lvl2pPr>
+            <a:lvl3pPr>
+              <a:defRPr sz="2025" b="1">
+                <a:solidFill>
+                  <a:srgbClr val="FFFFFF"/>
+                </a:solidFill>
+                <a:latin typeface="Arial"/>
+                <a:ea typeface="Arial"/>
+                <a:cs typeface="Arial"/>
+              </a:defRPr>
+            </a:lvl3pPr>
+            <a:lvl4pPr>
+              <a:defRPr sz="2025" b="1">
+                <a:solidFill>
+                  <a:srgbClr val="FFFFFF"/>
+                </a:solidFill>
+                <a:latin typeface="Arial"/>
+                <a:ea typeface="Arial"/>
+                <a:cs typeface="Arial"/>
+              </a:defRPr>
+            </a:lvl4pPr>
+            <a:lvl5pPr>
+              <a:defRPr sz="2025" b="1">
+                <a:solidFill>
+                  <a:srgbClr val="FFFFFF"/>
+                </a:solidFill>
+                <a:latin typeface="Arial"/>
+                <a:ea typeface="Arial"/>
+                <a:cs typeface="Arial"/>
+              </a:defRPr>
+            </a:lvl5pPr>
+            <a:lvl6pPr>
+              <a:defRPr sz="2025" b="1">
+                <a:solidFill>
+                  <a:srgbClr val="FFFFFF"/>
+                </a:solidFill>
+                <a:latin typeface="Arial"/>
+                <a:ea typeface="Arial"/>
+                <a:cs typeface="Arial"/>
+              </a:defRPr>
+            </a:lvl6pPr>
+            <a:lvl7pPr>
+              <a:defRPr sz="2025" b="1">
+                <a:solidFill>
+                  <a:srgbClr val="FFFFFF"/>
+                </a:solidFill>
+                <a:latin typeface="Arial"/>
+                <a:ea typeface="Arial"/>
+                <a:cs typeface="Arial"/>
+              </a:defRPr>
+            </a:lvl7pPr>
+            <a:lvl8pPr>
+              <a:defRPr sz="2025" b="1">
+                <a:solidFill>
+                  <a:srgbClr val="FFFFFF"/>
+                </a:solidFill>
+                <a:latin typeface="Arial"/>
+                <a:ea typeface="Arial"/>
+                <a:cs typeface="Arial"/>
+              </a:defRPr>
+            </a:lvl8pPr>
+            <a:lvl9pPr>
+              <a:defRPr sz="2025" b="1">
+                <a:solidFill>
+                  <a:srgbClr val="FFFFFF"/>
+                </a:solidFill>
+                <a:latin typeface="Arial"/>
+                <a:ea typeface="Arial"/>
+                <a:cs typeface="Arial"/>
+              </a:defRPr>
+            </a:lvl9pPr>
+          </a:lstStyle>
+          <a:p xmlns:a="http://schemas.openxmlformats.org/drawingml/2006/main">
+            <a:pPr>
+              <a:defRPr sz="2025" b="1">
+                <a:solidFill>
+                  <a:srgbClr val="FFFFFF"/>
+                </a:solidFill>
+                <a:latin typeface="Arial"/>
+                <a:ea typeface="Arial"/>
+                <a:cs typeface="Arial"/>
+              </a:defRPr>
+            </a:pPr>
+            <a:r>
+              <a:rPr sz="2025" b="1">
+                <a:solidFill>
+                  <a:srgbClr val="FFFFFF"/>
+                </a:solidFill>
+                <a:latin typeface="Arial"/>
+                <a:ea typeface="Arial"/>
+                <a:cs typeface="Arial"/>
+              </a:rPr>
+              <a:t>Rasti pas korrigjimit</a:t>
             </a:r>
           </a:p>
         </p:txBody>
       </p:sp>
       <p:sp>
         <p:nvSpPr>
-          <p:cNvPr id="10" name="">
+          <p:cNvPr id="12" name="">
             <a:extLst xmlns:a="http://schemas.openxmlformats.org/drawingml/2006/main">
               <a:ext uri="{FF2B5EF4-FFF2-40B4-BE49-F238E27FC236}">
-                <a16:creationId xmlns:a16="http://schemas.microsoft.com/office/drawing/2014/main" id="{6FA344F5-148E-42FF-8C08-6532E41B25E7}"/>
+                <a16:creationId xmlns:a16="http://schemas.microsoft.com/office/drawing/2014/main" id="{1E31C853-CE03-417C-82D7-8880516D057E}"/>
+              </a:ext>
+            </a:extLst>
+          </p:cNvPr>
+          <p:cNvSpPr>
+            <a:spLocks xmlns:a="http://schemas.openxmlformats.org/drawingml/2006/main" noGrp="1"/>
+          </p:cNvSpPr>
+          <p:nvPr/>
+        </p:nvSpPr>
+        <p:spPr>
+          <a:xfrm xmlns:a="http://schemas.openxmlformats.org/drawingml/2006/main">
+            <a:off x="8153400" y="3219450"/>
+            <a:ext cx="3409950" cy="571500"/>
+          </a:xfrm>
+          <a:prstGeom xmlns:a="http://schemas.openxmlformats.org/drawingml/2006/main" prst="rect">
+            <a:avLst/>
+          </a:prstGeom>
+          <a:noFill xmlns:a="http://schemas.openxmlformats.org/drawingml/2006/main"/>
+          <a:ln xmlns:a="http://schemas.openxmlformats.org/drawingml/2006/main" w="0">
+            <a:noFill/>
+          </a:ln>
+        </p:spPr>
+        <p:txBody>
+          <a:bodyPr xmlns:a="http://schemas.openxmlformats.org/drawingml/2006/main">
+            <a:noAutofit/>
+          </a:bodyPr>
+          <a:lstStyle xmlns:a="http://schemas.openxmlformats.org/drawingml/2006/main">
+            <a:defPPr>
+              <a:defRPr sz="1650" b="0">
+                <a:solidFill>
+                  <a:srgbClr val="C8D3E6"/>
+                </a:solidFill>
+                <a:latin typeface="Arial"/>
+                <a:ea typeface="Arial"/>
+                <a:cs typeface="Arial"/>
+              </a:defRPr>
+            </a:defPPr>
+            <a:lvl1pPr>
+              <a:defRPr sz="1650" b="0">
+                <a:solidFill>
+                  <a:srgbClr val="C8D3E6"/>
+                </a:solidFill>
+                <a:latin typeface="Arial"/>
+                <a:ea typeface="Arial"/>
+                <a:cs typeface="Arial"/>
+              </a:defRPr>
+            </a:lvl1pPr>
+            <a:lvl2pPr>
+              <a:defRPr sz="1650" b="0">
+                <a:solidFill>
+                  <a:srgbClr val="C8D3E6"/>
+                </a:solidFill>
+                <a:latin typeface="Arial"/>
+                <a:ea typeface="Arial"/>
+                <a:cs typeface="Arial"/>
+              </a:defRPr>
+            </a:lvl2pPr>
+            <a:lvl3pPr>
+              <a:defRPr sz="1650" b="0">
+                <a:solidFill>
+                  <a:srgbClr val="C8D3E6"/>
+                </a:solidFill>
+                <a:latin typeface="Arial"/>
+                <a:ea typeface="Arial"/>
+                <a:cs typeface="Arial"/>
+              </a:defRPr>
+            </a:lvl3pPr>
+            <a:lvl4pPr>
+              <a:defRPr sz="1650" b="0">
+                <a:solidFill>
+                  <a:srgbClr val="C8D3E6"/>
+                </a:solidFill>
+                <a:latin typeface="Arial"/>
+                <a:ea typeface="Arial"/>
+                <a:cs typeface="Arial"/>
+              </a:defRPr>
+            </a:lvl4pPr>
+            <a:lvl5pPr>
+              <a:defRPr sz="1650" b="0">
+                <a:solidFill>
+                  <a:srgbClr val="C8D3E6"/>
+                </a:solidFill>
+                <a:latin typeface="Arial"/>
+                <a:ea typeface="Arial"/>
+                <a:cs typeface="Arial"/>
+              </a:defRPr>
+            </a:lvl5pPr>
+            <a:lvl6pPr>
+              <a:defRPr sz="1650" b="0">
+                <a:solidFill>
+                  <a:srgbClr val="C8D3E6"/>
+                </a:solidFill>
+                <a:latin typeface="Arial"/>
+                <a:ea typeface="Arial"/>
+                <a:cs typeface="Arial"/>
+              </a:defRPr>
+            </a:lvl6pPr>
+            <a:lvl7pPr>
+              <a:defRPr sz="1650" b="0">
+                <a:solidFill>
+                  <a:srgbClr val="C8D3E6"/>
+                </a:solidFill>
+                <a:latin typeface="Arial"/>
+                <a:ea typeface="Arial"/>
+                <a:cs typeface="Arial"/>
+              </a:defRPr>
+            </a:lvl7pPr>
+            <a:lvl8pPr>
+              <a:defRPr sz="1650" b="0">
+                <a:solidFill>
+                  <a:srgbClr val="C8D3E6"/>
+                </a:solidFill>
+                <a:latin typeface="Arial"/>
+                <a:ea typeface="Arial"/>
+                <a:cs typeface="Arial"/>
+              </a:defRPr>
+            </a:lvl8pPr>
+            <a:lvl9pPr>
+              <a:defRPr sz="1650" b="0">
+                <a:solidFill>
+                  <a:srgbClr val="C8D3E6"/>
+                </a:solidFill>
+                <a:latin typeface="Arial"/>
+                <a:ea typeface="Arial"/>
+                <a:cs typeface="Arial"/>
+              </a:defRPr>
+            </a:lvl9pPr>
+          </a:lstStyle>
+          <a:p xmlns:a="http://schemas.openxmlformats.org/drawingml/2006/main">
+            <a:pPr>
+              <a:defRPr sz="1650" b="0">
+                <a:solidFill>
+                  <a:srgbClr val="C8D3E6"/>
+                </a:solidFill>
+                <a:latin typeface="Arial"/>
+                <a:ea typeface="Arial"/>
+                <a:cs typeface="Arial"/>
+              </a:defRPr>
+            </a:pPr>
+            <a:r>
+              <a:rPr sz="1650" b="0">
+                <a:solidFill>
+                  <a:srgbClr val="C8D3E6"/>
+                </a:solidFill>
+                <a:latin typeface="Arial"/>
+                <a:ea typeface="Arial"/>
+                <a:cs typeface="Arial"/>
+              </a:rPr>
+              <a:t>Funksioni i mëparshëm ende punon</a:t>
+            </a:r>
+          </a:p>
+        </p:txBody>
+      </p:sp>
+      <p:sp>
+        <p:nvSpPr>
+          <p:cNvPr id="13" name="">
+            <a:extLst xmlns:a="http://schemas.openxmlformats.org/drawingml/2006/main">
+              <a:ext uri="{FF2B5EF4-FFF2-40B4-BE49-F238E27FC236}">
+                <a16:creationId xmlns:a16="http://schemas.microsoft.com/office/drawing/2014/main" id="{A3F64F29-8DC0-48E5-9BD5-272FC2C45B92}"/>
               </a:ext>
             </a:extLst>
           </p:cNvPr>
@@ -22620,7 +23308,7 @@
                 <a:ea typeface="Arial"/>
                 <a:cs typeface="Arial"/>
               </a:rPr>
-              <a:t>Commit-i i parë ruan parashikimin dhe gjendjen fillestare. Commit-i pas korrigjimit ruan ndryshimin e kodit.</a:t>
+              <a:t>Detajet hapen saktë për ID 2. Kjo vërteton vetëm atë rast, me ato të dhëna, në atë version.</a:t>
             </a:r>
           </a:p>
           <a:p xmlns:a="http://schemas.openxmlformats.org/drawingml/2006/main">
@@ -22648,17 +23336,17 @@
                 <a:ea typeface="Arial"/>
                 <a:cs typeface="Arial"/>
               </a:rPr>
-              <a:t>Raporti lidh të dy versionet me rezultatet. Lidhjet na ndihmojnë të diskutojmë punën konkrete.</a:t>
+              <a:t>ID 999, lista bosh ose 0 vende mund të zbulojnë një sjellje tjetër. Provat duhet të përfshijnë edhe kufijtë.</a:t>
             </a:r>
           </a:p>
         </p:txBody>
       </p:sp>
       <p:sp>
         <p:nvSpPr>
-          <p:cNvPr id="11" name="">
+          <p:cNvPr id="14" name="">
             <a:extLst xmlns:a="http://schemas.openxmlformats.org/drawingml/2006/main">
               <a:ext uri="{FF2B5EF4-FFF2-40B4-BE49-F238E27FC236}">
-                <a16:creationId xmlns:a16="http://schemas.microsoft.com/office/drawing/2014/main" id="{D87E63DB-D3B8-4B53-8E7D-6FD8ADB21C42}"/>
+                <a16:creationId xmlns:a16="http://schemas.microsoft.com/office/drawing/2014/main" id="{D9F7FB53-6EAA-4959-B336-FFBEA08D4066}"/>
               </a:ext>
             </a:extLst>
           </p:cNvPr>
@@ -22806,17 +23494,17 @@
                 <a:ea typeface="Arial"/>
                 <a:cs typeface="Arial"/>
               </a:rPr>
-              <a:t>A provon një histori commit-esh se studenti e kupton kodin?</a:t>
+              <a:t>A mjafton një ekran i saktë për të thënë “aplikacioni punon gjithmonë”?</a:t>
             </a:r>
           </a:p>
         </p:txBody>
       </p:sp>
       <p:sp>
         <p:nvSpPr>
-          <p:cNvPr id="12" name="">
+          <p:cNvPr id="15" name="">
             <a:extLst xmlns:a="http://schemas.openxmlformats.org/drawingml/2006/main">
               <a:ext uri="{FF2B5EF4-FFF2-40B4-BE49-F238E27FC236}">
-                <a16:creationId xmlns:a16="http://schemas.microsoft.com/office/drawing/2014/main" id="{C11C8B22-B040-4592-BB2E-D013C6D720B5}"/>
+                <a16:creationId xmlns:a16="http://schemas.microsoft.com/office/drawing/2014/main" id="{39BBF0A1-0ECF-4442-810B-F4E9BE1F451A}"/>
               </a:ext>
             </a:extLst>
           </p:cNvPr>
@@ -22964,7 +23652,7 @@
                 <a:ea typeface="Arial"/>
                 <a:cs typeface="Arial"/>
               </a:rPr>
-              <a:t>Jo. Historia tregon versione. Studenti e demonstron kuptimin duke shpjeguar dhe ndryshuar sjelljen në projektin e vet.</a:t>
+              <a:t>Jo. Një provë jep besim për rastin e provuar. Zgjedhim edhe raste që mund ta nxjerrin gabimin në pah.</a:t>
             </a:r>
           </a:p>
         </p:txBody>
@@ -22972,7 +23660,7 @@
     </p:spTree>
     <p:extLst>
       <p:ext uri="{BB962C8B-B14F-4D97-AF65-F5344CB8AC3E}">
-        <p14:creationId xmlns:p14="http://schemas.microsoft.com/office/powerpoint/2010/main" val="72284383"/>
+        <p14:creationId xmlns:p14="http://schemas.microsoft.com/office/powerpoint/2010/main" val="1795022138"/>
       </p:ext>
     </p:extLst>
   </p:cSld>
@@ -23003,7 +23691,7 @@
           <p:cNvPr id="14" name="">
             <a:extLst xmlns:a="http://schemas.openxmlformats.org/drawingml/2006/main">
               <a:ext uri="{FF2B5EF4-FFF2-40B4-BE49-F238E27FC236}">
-                <a16:creationId xmlns:a16="http://schemas.microsoft.com/office/drawing/2014/main" id="{58246E1E-E37A-4A67-99BF-06E99A57331F}"/>
+                <a16:creationId xmlns:a16="http://schemas.microsoft.com/office/drawing/2014/main" id="{B2878F4C-3AF4-4516-AB43-8B47AAEA056B}"/>
               </a:ext>
             </a:extLst>
           </p:cNvPr>
@@ -23161,7 +23849,7 @@
           <p:cNvPr id="2" name="">
             <a:extLst xmlns:a="http://schemas.openxmlformats.org/drawingml/2006/main">
               <a:ext uri="{FF2B5EF4-FFF2-40B4-BE49-F238E27FC236}">
-                <a16:creationId xmlns:a16="http://schemas.microsoft.com/office/drawing/2014/main" id="{134F5BA8-3CF2-4F8A-A7E7-3BB7DA385697}"/>
+                <a16:creationId xmlns:a16="http://schemas.microsoft.com/office/drawing/2014/main" id="{9A7845D1-605B-4E9F-BEF5-7FCFDE55807B}"/>
               </a:ext>
             </a:extLst>
           </p:cNvPr>
@@ -23319,7 +24007,7 @@
           <p:cNvPr id="3" name="">
             <a:extLst xmlns:a="http://schemas.openxmlformats.org/drawingml/2006/main">
               <a:ext uri="{FF2B5EF4-FFF2-40B4-BE49-F238E27FC236}">
-                <a16:creationId xmlns:a16="http://schemas.microsoft.com/office/drawing/2014/main" id="{EB593846-74A3-4095-9AE3-6751B857F5BC}"/>
+                <a16:creationId xmlns:a16="http://schemas.microsoft.com/office/drawing/2014/main" id="{5EE4DE06-F248-4437-8076-3D604077E3D9}"/>
               </a:ext>
             </a:extLst>
           </p:cNvPr>
@@ -23467,7 +24155,7 @@
                 <a:ea typeface="Arial"/>
                 <a:cs typeface="Arial"/>
               </a:rPr>
-              <a:t>Çfarë kemi ndërtuar deri tani</a:t>
+              <a:t>Pjesët duhet të punojnë së bashku</a:t>
             </a:r>
           </a:p>
         </p:txBody>
@@ -23477,7 +24165,7 @@
           <p:cNvPr id="4" name="">
             <a:extLst xmlns:a="http://schemas.openxmlformats.org/drawingml/2006/main">
               <a:ext uri="{FF2B5EF4-FFF2-40B4-BE49-F238E27FC236}">
-                <a16:creationId xmlns:a16="http://schemas.microsoft.com/office/drawing/2014/main" id="{62B0671C-60C8-4D72-80DB-A5C4DB5E3658}"/>
+                <a16:creationId xmlns:a16="http://schemas.microsoft.com/office/drawing/2014/main" id="{D45291D6-AA5B-4821-B3BD-88F6D8A199F9}"/>
               </a:ext>
             </a:extLst>
           </p:cNvPr>
@@ -23487,7 +24175,7 @@
           <p:nvPr/>
         </p:nvPicPr>
         <p:blipFill>
-          <a:blip xmlns:r="http://schemas.openxmlformats.org/officeDocument/2006/relationships" xmlns:a="http://schemas.openxmlformats.org/drawingml/2006/main" r:embed="R36b4567e4bd74da0"/>
+          <a:blip xmlns:r="http://schemas.openxmlformats.org/officeDocument/2006/relationships" xmlns:a="http://schemas.openxmlformats.org/drawingml/2006/main" r:embed="R9bbce73e09484926"/>
           <a:stretch xmlns:a="http://schemas.openxmlformats.org/drawingml/2006/main"/>
         </p:blipFill>
         <p:spPr>
@@ -23505,7 +24193,7 @@
           <p:cNvPr id="5" name="">
             <a:extLst xmlns:a="http://schemas.openxmlformats.org/drawingml/2006/main">
               <a:ext uri="{FF2B5EF4-FFF2-40B4-BE49-F238E27FC236}">
-                <a16:creationId xmlns:a16="http://schemas.microsoft.com/office/drawing/2014/main" id="{7D4EEA83-5478-4BE1-ABA8-C74EC71A9DFB}"/>
+                <a16:creationId xmlns:a16="http://schemas.microsoft.com/office/drawing/2014/main" id="{B6A01DA0-E374-48EB-800A-9D4668CB1941}"/>
               </a:ext>
             </a:extLst>
           </p:cNvPr>
@@ -23653,7 +24341,7 @@
                 <a:ea typeface="Arial"/>
                 <a:cs typeface="Arial"/>
               </a:rPr>
-              <a:t>Ekranet</a:t>
+              <a:t>Zgjedh një udhëtim</a:t>
             </a:r>
           </a:p>
         </p:txBody>
@@ -23663,7 +24351,7 @@
           <p:cNvPr id="6" name="">
             <a:extLst xmlns:a="http://schemas.openxmlformats.org/drawingml/2006/main">
               <a:ext uri="{FF2B5EF4-FFF2-40B4-BE49-F238E27FC236}">
-                <a16:creationId xmlns:a16="http://schemas.microsoft.com/office/drawing/2014/main" id="{602EBFDA-44CB-4B28-9E91-605979386A82}"/>
+                <a16:creationId xmlns:a16="http://schemas.microsoft.com/office/drawing/2014/main" id="{C71318D1-056C-4656-A4A9-E4336D64B627}"/>
               </a:ext>
             </a:extLst>
           </p:cNvPr>
@@ -23811,7 +24499,7 @@
                 <a:ea typeface="Arial"/>
                 <a:cs typeface="Arial"/>
               </a:rPr>
-              <a:t>Lista, detajet dhe kërkesa</a:t>
+              <a:t>Lista dhe detajet lidhen me ID</a:t>
             </a:r>
           </a:p>
         </p:txBody>
@@ -23821,7 +24509,7 @@
           <p:cNvPr id="7" name="">
             <a:extLst xmlns:a="http://schemas.openxmlformats.org/drawingml/2006/main">
               <a:ext uri="{FF2B5EF4-FFF2-40B4-BE49-F238E27FC236}">
-                <a16:creationId xmlns:a16="http://schemas.microsoft.com/office/drawing/2014/main" id="{FD304947-A909-4E62-8905-279BEF0D0E75}"/>
+                <a16:creationId xmlns:a16="http://schemas.microsoft.com/office/drawing/2014/main" id="{804A352B-B1C7-4F52-8427-14F4CA04E182}"/>
               </a:ext>
             </a:extLst>
           </p:cNvPr>
@@ -23831,7 +24519,7 @@
           <p:nvPr/>
         </p:nvPicPr>
         <p:blipFill>
-          <a:blip xmlns:r="http://schemas.openxmlformats.org/officeDocument/2006/relationships" xmlns:a="http://schemas.openxmlformats.org/drawingml/2006/main" r:embed="R6c9c19760bed419e"/>
+          <a:blip xmlns:r="http://schemas.openxmlformats.org/officeDocument/2006/relationships" xmlns:a="http://schemas.openxmlformats.org/drawingml/2006/main" r:embed="R8f8f3e11735c4a6e"/>
           <a:stretch xmlns:a="http://schemas.openxmlformats.org/drawingml/2006/main"/>
         </p:blipFill>
         <p:spPr>
@@ -23849,7 +24537,7 @@
           <p:cNvPr id="8" name="">
             <a:extLst xmlns:a="http://schemas.openxmlformats.org/drawingml/2006/main">
               <a:ext uri="{FF2B5EF4-FFF2-40B4-BE49-F238E27FC236}">
-                <a16:creationId xmlns:a16="http://schemas.microsoft.com/office/drawing/2014/main" id="{1B9DA1EE-4E28-4B01-B088-F1EB6E4598C0}"/>
+                <a16:creationId xmlns:a16="http://schemas.microsoft.com/office/drawing/2014/main" id="{3138FEAA-A4D0-47A1-846E-DFF91EF3545D}"/>
               </a:ext>
             </a:extLst>
           </p:cNvPr>
@@ -23997,7 +24685,7 @@
                 <a:ea typeface="Arial"/>
                 <a:cs typeface="Arial"/>
               </a:rPr>
-              <a:t>Të dhënat</a:t>
+              <a:t>Lexon të dhënat</a:t>
             </a:r>
           </a:p>
         </p:txBody>
@@ -24007,7 +24695,7 @@
           <p:cNvPr id="9" name="">
             <a:extLst xmlns:a="http://schemas.openxmlformats.org/drawingml/2006/main">
               <a:ext uri="{FF2B5EF4-FFF2-40B4-BE49-F238E27FC236}">
-                <a16:creationId xmlns:a16="http://schemas.microsoft.com/office/drawing/2014/main" id="{5377BC39-E743-4788-9D7E-789858248856}"/>
+                <a16:creationId xmlns:a16="http://schemas.microsoft.com/office/drawing/2014/main" id="{9CCCEBF3-253E-43D8-AE70-BD1B5A32BFEC}"/>
               </a:ext>
             </a:extLst>
           </p:cNvPr>
@@ -24155,7 +24843,7 @@
                 <a:ea typeface="Arial"/>
                 <a:cs typeface="Arial"/>
               </a:rPr>
-              <a:t>Neon PostgreSQL</a:t>
+              <a:t>Dallon serverin nga kopja</a:t>
             </a:r>
           </a:p>
         </p:txBody>
@@ -24165,7 +24853,7 @@
           <p:cNvPr id="10" name="">
             <a:extLst xmlns:a="http://schemas.openxmlformats.org/drawingml/2006/main">
               <a:ext uri="{FF2B5EF4-FFF2-40B4-BE49-F238E27FC236}">
-                <a16:creationId xmlns:a16="http://schemas.microsoft.com/office/drawing/2014/main" id="{2618DAB1-AAFD-484B-8481-63D2C60B52F7}"/>
+                <a16:creationId xmlns:a16="http://schemas.microsoft.com/office/drawing/2014/main" id="{144344F4-B1E3-4504-9F82-10FA30F268E2}"/>
               </a:ext>
             </a:extLst>
           </p:cNvPr>
@@ -24175,7 +24863,7 @@
           <p:nvPr/>
         </p:nvPicPr>
         <p:blipFill>
-          <a:blip xmlns:r="http://schemas.openxmlformats.org/officeDocument/2006/relationships" xmlns:a="http://schemas.openxmlformats.org/drawingml/2006/main" r:embed="Rf3d082ee4c6d4fd8"/>
+          <a:blip xmlns:r="http://schemas.openxmlformats.org/officeDocument/2006/relationships" xmlns:a="http://schemas.openxmlformats.org/drawingml/2006/main" r:embed="R56134e7ad8984893"/>
           <a:stretch xmlns:a="http://schemas.openxmlformats.org/drawingml/2006/main"/>
         </p:blipFill>
         <p:spPr>
@@ -24193,7 +24881,7 @@
           <p:cNvPr id="11" name="">
             <a:extLst xmlns:a="http://schemas.openxmlformats.org/drawingml/2006/main">
               <a:ext uri="{FF2B5EF4-FFF2-40B4-BE49-F238E27FC236}">
-                <a16:creationId xmlns:a16="http://schemas.microsoft.com/office/drawing/2014/main" id="{9824C8A9-6920-44D5-A476-9DE2E8C384A5}"/>
+                <a16:creationId xmlns:a16="http://schemas.microsoft.com/office/drawing/2014/main" id="{981CF799-D866-4851-B106-03FB6DB485F5}"/>
               </a:ext>
             </a:extLst>
           </p:cNvPr>
@@ -24341,7 +25029,7 @@
                 <a:ea typeface="Arial"/>
                 <a:cs typeface="Arial"/>
               </a:rPr>
-              <a:t>Besimi</a:t>
+              <a:t>Kupton çfarë lejohet</a:t>
             </a:r>
           </a:p>
         </p:txBody>
@@ -24351,7 +25039,7 @@
           <p:cNvPr id="12" name="">
             <a:extLst xmlns:a="http://schemas.openxmlformats.org/drawingml/2006/main">
               <a:ext uri="{FF2B5EF4-FFF2-40B4-BE49-F238E27FC236}">
-                <a16:creationId xmlns:a16="http://schemas.microsoft.com/office/drawing/2014/main" id="{9C406AA9-EB12-441E-A812-672BA1C9E5C2}"/>
+                <a16:creationId xmlns:a16="http://schemas.microsoft.com/office/drawing/2014/main" id="{D9B14882-782C-4200-B91A-11D8B507F365}"/>
               </a:ext>
             </a:extLst>
           </p:cNvPr>
@@ -24499,7 +25187,7 @@
                 <a:ea typeface="Arial"/>
                 <a:cs typeface="Arial"/>
               </a:rPr>
-              <a:t>Lejet dhe kufijtë offline</a:t>
+              <a:t>Hyrja nuk jep çdo të drejtë</a:t>
             </a:r>
           </a:p>
         </p:txBody>
@@ -24509,7 +25197,7 @@
           <p:cNvPr id="13" name="">
             <a:extLst xmlns:a="http://schemas.openxmlformats.org/drawingml/2006/main">
               <a:ext uri="{FF2B5EF4-FFF2-40B4-BE49-F238E27FC236}">
-                <a16:creationId xmlns:a16="http://schemas.microsoft.com/office/drawing/2014/main" id="{3FBF882C-59D4-48C3-B806-08A0FB75C4A3}"/>
+                <a16:creationId xmlns:a16="http://schemas.microsoft.com/office/drawing/2014/main" id="{D507E0D6-48A2-40CA-82E4-AC5093B452BA}"/>
               </a:ext>
             </a:extLst>
           </p:cNvPr>
@@ -24657,7 +25345,7 @@
                 <a:ea typeface="Arial"/>
                 <a:cs typeface="Arial"/>
               </a:rPr>
-              <a:t>Java 3 lidhi listën me detajet. Java 4 solli të dhënat nga Neon.</a:t>
+              <a:t>Javët 3–4: lista → detajet → të dhënat në Neon. Javët 5–6: kush lejohet të veprojë dhe çfarë shohim pa internet.</a:t>
             </a:r>
           </a:p>
           <a:p xmlns:a="http://schemas.openxmlformats.org/drawingml/2006/main">
@@ -24685,7 +25373,7 @@
                 <a:ea typeface="Arial"/>
                 <a:cs typeface="Arial"/>
               </a:rPr>
-              <a:t>Java 5 shtoi hyrjen dhe lejet. Java 6 na mësoi të lexojmë një kopje pa internet.</a:t>
+              <a:t>Një MVP nuk ka nevojë t’i ketë të gjitha funksionet. Rrjedha që ofron duhet të jetë e kuptueshme dhe kufijtë të jenë të qartë.</a:t>
             </a:r>
           </a:p>
         </p:txBody>
@@ -24693,7 +25381,7 @@
     </p:spTree>
     <p:extLst>
       <p:ext uri="{BB962C8B-B14F-4D97-AF65-F5344CB8AC3E}">
-        <p14:creationId xmlns:p14="http://schemas.microsoft.com/office/powerpoint/2010/main" val="1341923820"/>
+        <p14:creationId xmlns:p14="http://schemas.microsoft.com/office/powerpoint/2010/main" val="1952500290"/>
       </p:ext>
     </p:extLst>
   </p:cSld>
@@ -24724,7 +25412,7 @@
           <p:cNvPr id="14" name="">
             <a:extLst xmlns:a="http://schemas.openxmlformats.org/drawingml/2006/main">
               <a:ext uri="{FF2B5EF4-FFF2-40B4-BE49-F238E27FC236}">
-                <a16:creationId xmlns:a16="http://schemas.microsoft.com/office/drawing/2014/main" id="{8F7784F0-C85D-4A5E-B192-D41319B4576C}"/>
+                <a16:creationId xmlns:a16="http://schemas.microsoft.com/office/drawing/2014/main" id="{399CDB2A-7245-4A4B-AC62-1BE5BF06DDA3}"/>
               </a:ext>
             </a:extLst>
           </p:cNvPr>
@@ -24882,7 +25570,7 @@
           <p:cNvPr id="2" name="">
             <a:extLst xmlns:a="http://schemas.openxmlformats.org/drawingml/2006/main">
               <a:ext uri="{FF2B5EF4-FFF2-40B4-BE49-F238E27FC236}">
-                <a16:creationId xmlns:a16="http://schemas.microsoft.com/office/drawing/2014/main" id="{92AB20CD-F2D3-42C7-B03A-8CBA2CC10DEE}"/>
+                <a16:creationId xmlns:a16="http://schemas.microsoft.com/office/drawing/2014/main" id="{92AF5906-949A-4259-865F-547FCCCF7CC2}"/>
               </a:ext>
             </a:extLst>
           </p:cNvPr>
@@ -25040,7 +25728,7 @@
           <p:cNvPr id="3" name="">
             <a:extLst xmlns:a="http://schemas.openxmlformats.org/drawingml/2006/main">
               <a:ext uri="{FF2B5EF4-FFF2-40B4-BE49-F238E27FC236}">
-                <a16:creationId xmlns:a16="http://schemas.microsoft.com/office/drawing/2014/main" id="{B3F5A2F4-43E9-4FCE-8B9D-3D445E9E09C6}"/>
+                <a16:creationId xmlns:a16="http://schemas.microsoft.com/office/drawing/2014/main" id="{BE2A0B4E-17E7-4A1E-92DF-11134768D1E0}"/>
               </a:ext>
             </a:extLst>
           </p:cNvPr>
@@ -25198,7 +25886,7 @@
           <p:cNvPr id="4" name="">
             <a:extLst xmlns:a="http://schemas.openxmlformats.org/drawingml/2006/main">
               <a:ext uri="{FF2B5EF4-FFF2-40B4-BE49-F238E27FC236}">
-                <a16:creationId xmlns:a16="http://schemas.microsoft.com/office/drawing/2014/main" id="{7EE56FB2-89D1-4ADD-BDEF-CE8524E20E49}"/>
+                <a16:creationId xmlns:a16="http://schemas.microsoft.com/office/drawing/2014/main" id="{A6B8593A-B241-4B4D-8C97-71813472300A}"/>
               </a:ext>
             </a:extLst>
           </p:cNvPr>
@@ -25208,7 +25896,7 @@
           <p:nvPr/>
         </p:nvPicPr>
         <p:blipFill>
-          <a:blip xmlns:r="http://schemas.openxmlformats.org/officeDocument/2006/relationships" xmlns:a="http://schemas.openxmlformats.org/drawingml/2006/main" r:embed="R94f116a1699847b8"/>
+          <a:blip xmlns:r="http://schemas.openxmlformats.org/officeDocument/2006/relationships" xmlns:a="http://schemas.openxmlformats.org/drawingml/2006/main" r:embed="R05b4435a75a849f2"/>
           <a:stretch xmlns:a="http://schemas.openxmlformats.org/drawingml/2006/main"/>
         </p:blipFill>
         <p:spPr>
@@ -25226,7 +25914,7 @@
           <p:cNvPr id="5" name="">
             <a:extLst xmlns:a="http://schemas.openxmlformats.org/drawingml/2006/main">
               <a:ext uri="{FF2B5EF4-FFF2-40B4-BE49-F238E27FC236}">
-                <a16:creationId xmlns:a16="http://schemas.microsoft.com/office/drawing/2014/main" id="{F77C351A-2912-466B-BF5F-5B0DFF55C814}"/>
+                <a16:creationId xmlns:a16="http://schemas.microsoft.com/office/drawing/2014/main" id="{EC36ECA5-53A7-4C46-8FBA-C81F0D611312}"/>
               </a:ext>
             </a:extLst>
           </p:cNvPr>
@@ -25384,7 +26072,7 @@
           <p:cNvPr id="6" name="">
             <a:extLst xmlns:a="http://schemas.openxmlformats.org/drawingml/2006/main">
               <a:ext uri="{FF2B5EF4-FFF2-40B4-BE49-F238E27FC236}">
-                <a16:creationId xmlns:a16="http://schemas.microsoft.com/office/drawing/2014/main" id="{6E451504-8539-48B3-8B69-3DDCAABD3E15}"/>
+                <a16:creationId xmlns:a16="http://schemas.microsoft.com/office/drawing/2014/main" id="{EFC0AB67-E7D7-4DC1-A2E0-204BEFDDFB53}"/>
               </a:ext>
             </a:extLst>
           </p:cNvPr>
@@ -25542,7 +26230,7 @@
           <p:cNvPr id="7" name="">
             <a:extLst xmlns:a="http://schemas.openxmlformats.org/drawingml/2006/main">
               <a:ext uri="{FF2B5EF4-FFF2-40B4-BE49-F238E27FC236}">
-                <a16:creationId xmlns:a16="http://schemas.microsoft.com/office/drawing/2014/main" id="{035C71EB-27E6-4A41-8210-82F5AE54987C}"/>
+                <a16:creationId xmlns:a16="http://schemas.microsoft.com/office/drawing/2014/main" id="{4AA9EE42-6092-401B-BD7A-456842CEDEBB}"/>
               </a:ext>
             </a:extLst>
           </p:cNvPr>
@@ -25700,7 +26388,7 @@
           <p:cNvPr id="8" name="">
             <a:extLst xmlns:a="http://schemas.openxmlformats.org/drawingml/2006/main">
               <a:ext uri="{FF2B5EF4-FFF2-40B4-BE49-F238E27FC236}">
-                <a16:creationId xmlns:a16="http://schemas.microsoft.com/office/drawing/2014/main" id="{B25DB100-0866-4AB7-B08B-9FCFE16DEADE}"/>
+                <a16:creationId xmlns:a16="http://schemas.microsoft.com/office/drawing/2014/main" id="{F39B7D48-F516-4A46-94D2-A8DCEF501296}"/>
               </a:ext>
             </a:extLst>
           </p:cNvPr>
@@ -25858,7 +26546,7 @@
           <p:cNvPr id="9" name="">
             <a:extLst xmlns:a="http://schemas.openxmlformats.org/drawingml/2006/main">
               <a:ext uri="{FF2B5EF4-FFF2-40B4-BE49-F238E27FC236}">
-                <a16:creationId xmlns:a16="http://schemas.microsoft.com/office/drawing/2014/main" id="{15C65CB8-CCA0-4ECF-96F0-A612B271688B}"/>
+                <a16:creationId xmlns:a16="http://schemas.microsoft.com/office/drawing/2014/main" id="{25C06A7A-3FE5-45BF-A379-78444F6A2630}"/>
               </a:ext>
             </a:extLst>
           </p:cNvPr>
@@ -26016,7 +26704,7 @@
           <p:cNvPr id="10" name="">
             <a:extLst xmlns:a="http://schemas.openxmlformats.org/drawingml/2006/main">
               <a:ext uri="{FF2B5EF4-FFF2-40B4-BE49-F238E27FC236}">
-                <a16:creationId xmlns:a16="http://schemas.microsoft.com/office/drawing/2014/main" id="{2B8B3813-D818-44C1-82D4-A9660494FBDF}"/>
+                <a16:creationId xmlns:a16="http://schemas.microsoft.com/office/drawing/2014/main" id="{30839AA7-843F-462D-B424-E36AB706A164}"/>
               </a:ext>
             </a:extLst>
           </p:cNvPr>
@@ -26174,7 +26862,7 @@
           <p:cNvPr id="11" name="">
             <a:extLst xmlns:a="http://schemas.openxmlformats.org/drawingml/2006/main">
               <a:ext uri="{FF2B5EF4-FFF2-40B4-BE49-F238E27FC236}">
-                <a16:creationId xmlns:a16="http://schemas.microsoft.com/office/drawing/2014/main" id="{22DA7C4D-89C8-4FC5-97AB-E76985FF4CA6}"/>
+                <a16:creationId xmlns:a16="http://schemas.microsoft.com/office/drawing/2014/main" id="{67BB0B1D-B9B9-4A1B-8829-999C52B1D26F}"/>
               </a:ext>
             </a:extLst>
           </p:cNvPr>
@@ -26332,7 +27020,7 @@
           <p:cNvPr id="12" name="">
             <a:extLst xmlns:a="http://schemas.openxmlformats.org/drawingml/2006/main">
               <a:ext uri="{FF2B5EF4-FFF2-40B4-BE49-F238E27FC236}">
-                <a16:creationId xmlns:a16="http://schemas.microsoft.com/office/drawing/2014/main" id="{55D099B6-8791-4514-8044-D9D0825FABD0}"/>
+                <a16:creationId xmlns:a16="http://schemas.microsoft.com/office/drawing/2014/main" id="{42339A45-E9A2-4776-AA53-663A2878AA67}"/>
               </a:ext>
             </a:extLst>
           </p:cNvPr>
@@ -26490,7 +27178,7 @@
           <p:cNvPr id="13" name="">
             <a:extLst xmlns:a="http://schemas.openxmlformats.org/drawingml/2006/main">
               <a:ext uri="{FF2B5EF4-FFF2-40B4-BE49-F238E27FC236}">
-                <a16:creationId xmlns:a16="http://schemas.microsoft.com/office/drawing/2014/main" id="{D92332D6-5E22-4DDF-A60D-A8CB23B3A8B2}"/>
+                <a16:creationId xmlns:a16="http://schemas.microsoft.com/office/drawing/2014/main" id="{F82B46A6-30B7-4089-BE5F-D515699770FB}"/>
               </a:ext>
             </a:extLst>
           </p:cNvPr>
@@ -26646,7 +27334,7 @@
     </p:spTree>
     <p:extLst>
       <p:ext uri="{BB962C8B-B14F-4D97-AF65-F5344CB8AC3E}">
-        <p14:creationId xmlns:p14="http://schemas.microsoft.com/office/powerpoint/2010/main" val="991488869"/>
+        <p14:creationId xmlns:p14="http://schemas.microsoft.com/office/powerpoint/2010/main" val="2111467623"/>
       </p:ext>
     </p:extLst>
   </p:cSld>
@@ -26677,7 +27365,7 @@
           <p:cNvPr id="14" name="">
             <a:extLst xmlns:a="http://schemas.openxmlformats.org/drawingml/2006/main">
               <a:ext uri="{FF2B5EF4-FFF2-40B4-BE49-F238E27FC236}">
-                <a16:creationId xmlns:a16="http://schemas.microsoft.com/office/drawing/2014/main" id="{7EE20F96-F139-411A-9169-300F450644AE}"/>
+                <a16:creationId xmlns:a16="http://schemas.microsoft.com/office/drawing/2014/main" id="{37BA49C9-E490-4B6B-A015-55A0489F0BFA}"/>
               </a:ext>
             </a:extLst>
           </p:cNvPr>
@@ -26835,7 +27523,7 @@
           <p:cNvPr id="2" name="">
             <a:extLst xmlns:a="http://schemas.openxmlformats.org/drawingml/2006/main">
               <a:ext uri="{FF2B5EF4-FFF2-40B4-BE49-F238E27FC236}">
-                <a16:creationId xmlns:a16="http://schemas.microsoft.com/office/drawing/2014/main" id="{76A9975C-D4E6-41D9-B538-EBA9103795CC}"/>
+                <a16:creationId xmlns:a16="http://schemas.microsoft.com/office/drawing/2014/main" id="{A5429993-5B3E-4BC0-9BF5-30199C0AED60}"/>
               </a:ext>
             </a:extLst>
           </p:cNvPr>
@@ -26993,7 +27681,7 @@
           <p:cNvPr id="3" name="">
             <a:extLst xmlns:a="http://schemas.openxmlformats.org/drawingml/2006/main">
               <a:ext uri="{FF2B5EF4-FFF2-40B4-BE49-F238E27FC236}">
-                <a16:creationId xmlns:a16="http://schemas.microsoft.com/office/drawing/2014/main" id="{184B7055-FDF7-4DAC-9E03-469F7247FB60}"/>
+                <a16:creationId xmlns:a16="http://schemas.microsoft.com/office/drawing/2014/main" id="{3BD31D59-A16C-4E9B-AF82-1C4C28097542}"/>
               </a:ext>
             </a:extLst>
           </p:cNvPr>
@@ -27151,7 +27839,7 @@
           <p:cNvPr id="4" name="">
             <a:extLst xmlns:a="http://schemas.openxmlformats.org/drawingml/2006/main">
               <a:ext uri="{FF2B5EF4-FFF2-40B4-BE49-F238E27FC236}">
-                <a16:creationId xmlns:a16="http://schemas.microsoft.com/office/drawing/2014/main" id="{EA60E754-819E-42A6-9378-297C5CEEE55A}"/>
+                <a16:creationId xmlns:a16="http://schemas.microsoft.com/office/drawing/2014/main" id="{8A6AE9C1-4A03-4F48-B8EA-EB932A8AD8C0}"/>
               </a:ext>
             </a:extLst>
           </p:cNvPr>
@@ -27161,7 +27849,7 @@
           <p:nvPr/>
         </p:nvPicPr>
         <p:blipFill>
-          <a:blip xmlns:r="http://schemas.openxmlformats.org/officeDocument/2006/relationships" xmlns:a="http://schemas.openxmlformats.org/drawingml/2006/main" r:embed="R487b19a734b94876"/>
+          <a:blip xmlns:r="http://schemas.openxmlformats.org/officeDocument/2006/relationships" xmlns:a="http://schemas.openxmlformats.org/drawingml/2006/main" r:embed="Re71a62fcb2eb4dcd"/>
           <a:stretch xmlns:a="http://schemas.openxmlformats.org/drawingml/2006/main"/>
         </p:blipFill>
         <p:spPr>
@@ -27179,7 +27867,7 @@
           <p:cNvPr id="5" name="">
             <a:extLst xmlns:a="http://schemas.openxmlformats.org/drawingml/2006/main">
               <a:ext uri="{FF2B5EF4-FFF2-40B4-BE49-F238E27FC236}">
-                <a16:creationId xmlns:a16="http://schemas.microsoft.com/office/drawing/2014/main" id="{E1461C8D-E710-42DB-9DB6-10A830F902B5}"/>
+                <a16:creationId xmlns:a16="http://schemas.microsoft.com/office/drawing/2014/main" id="{24FCAD32-BED7-4603-A0B1-0579D939ED9E}"/>
               </a:ext>
             </a:extLst>
           </p:cNvPr>
@@ -27337,7 +28025,7 @@
           <p:cNvPr id="6" name="">
             <a:extLst xmlns:a="http://schemas.openxmlformats.org/drawingml/2006/main">
               <a:ext uri="{FF2B5EF4-FFF2-40B4-BE49-F238E27FC236}">
-                <a16:creationId xmlns:a16="http://schemas.microsoft.com/office/drawing/2014/main" id="{A2BD4F25-C954-4EE6-A23B-2FFEC9D2C7BE}"/>
+                <a16:creationId xmlns:a16="http://schemas.microsoft.com/office/drawing/2014/main" id="{FE9FA76A-8641-4F8B-8B54-ADAA919FC9A3}"/>
               </a:ext>
             </a:extLst>
           </p:cNvPr>
@@ -27495,7 +28183,7 @@
           <p:cNvPr id="7" name="">
             <a:extLst xmlns:a="http://schemas.openxmlformats.org/drawingml/2006/main">
               <a:ext uri="{FF2B5EF4-FFF2-40B4-BE49-F238E27FC236}">
-                <a16:creationId xmlns:a16="http://schemas.microsoft.com/office/drawing/2014/main" id="{88DD9B4E-5FDE-422D-8B56-F112F90C61A9}"/>
+                <a16:creationId xmlns:a16="http://schemas.microsoft.com/office/drawing/2014/main" id="{912CC3F6-5364-4422-AFA9-084A47540513}"/>
               </a:ext>
             </a:extLst>
           </p:cNvPr>
@@ -27653,7 +28341,7 @@
           <p:cNvPr id="8" name="">
             <a:extLst xmlns:a="http://schemas.openxmlformats.org/drawingml/2006/main">
               <a:ext uri="{FF2B5EF4-FFF2-40B4-BE49-F238E27FC236}">
-                <a16:creationId xmlns:a16="http://schemas.microsoft.com/office/drawing/2014/main" id="{06842B5B-A9FB-4399-BA2B-4BF6254BD7C4}"/>
+                <a16:creationId xmlns:a16="http://schemas.microsoft.com/office/drawing/2014/main" id="{C55F7210-0DDA-479D-BF40-7D236F900A22}"/>
               </a:ext>
             </a:extLst>
           </p:cNvPr>
@@ -27811,7 +28499,7 @@
           <p:cNvPr id="9" name="">
             <a:extLst xmlns:a="http://schemas.openxmlformats.org/drawingml/2006/main">
               <a:ext uri="{FF2B5EF4-FFF2-40B4-BE49-F238E27FC236}">
-                <a16:creationId xmlns:a16="http://schemas.microsoft.com/office/drawing/2014/main" id="{AEE16793-2B54-4AB0-910B-BBED0CAA5DB0}"/>
+                <a16:creationId xmlns:a16="http://schemas.microsoft.com/office/drawing/2014/main" id="{EE19E495-0542-4989-9450-BD817405A6BA}"/>
               </a:ext>
             </a:extLst>
           </p:cNvPr>
@@ -27969,7 +28657,7 @@
           <p:cNvPr id="10" name="">
             <a:extLst xmlns:a="http://schemas.openxmlformats.org/drawingml/2006/main">
               <a:ext uri="{FF2B5EF4-FFF2-40B4-BE49-F238E27FC236}">
-                <a16:creationId xmlns:a16="http://schemas.microsoft.com/office/drawing/2014/main" id="{5104D7D6-DE97-4F83-841A-E15B3D2B4197}"/>
+                <a16:creationId xmlns:a16="http://schemas.microsoft.com/office/drawing/2014/main" id="{775E9F71-A980-4186-B040-C6D664B68758}"/>
               </a:ext>
             </a:extLst>
           </p:cNvPr>
@@ -28127,7 +28815,7 @@
           <p:cNvPr id="11" name="">
             <a:extLst xmlns:a="http://schemas.openxmlformats.org/drawingml/2006/main">
               <a:ext uri="{FF2B5EF4-FFF2-40B4-BE49-F238E27FC236}">
-                <a16:creationId xmlns:a16="http://schemas.microsoft.com/office/drawing/2014/main" id="{1C89B12C-4C3A-455D-85E1-79E40E796289}"/>
+                <a16:creationId xmlns:a16="http://schemas.microsoft.com/office/drawing/2014/main" id="{289B7C93-745E-4619-87FA-3E067B478115}"/>
               </a:ext>
             </a:extLst>
           </p:cNvPr>
@@ -28285,7 +28973,7 @@
           <p:cNvPr id="12" name="">
             <a:extLst xmlns:a="http://schemas.openxmlformats.org/drawingml/2006/main">
               <a:ext uri="{FF2B5EF4-FFF2-40B4-BE49-F238E27FC236}">
-                <a16:creationId xmlns:a16="http://schemas.microsoft.com/office/drawing/2014/main" id="{FF5303FA-6AD6-48FE-AFB7-43175577C68C}"/>
+                <a16:creationId xmlns:a16="http://schemas.microsoft.com/office/drawing/2014/main" id="{0BC2A6BA-D581-437D-A3FD-63B7A5A788CE}"/>
               </a:ext>
             </a:extLst>
           </p:cNvPr>
@@ -28443,7 +29131,7 @@
           <p:cNvPr id="13" name="">
             <a:extLst xmlns:a="http://schemas.openxmlformats.org/drawingml/2006/main">
               <a:ext uri="{FF2B5EF4-FFF2-40B4-BE49-F238E27FC236}">
-                <a16:creationId xmlns:a16="http://schemas.microsoft.com/office/drawing/2014/main" id="{0725FD9B-5600-4326-96ED-297F123E9D51}"/>
+                <a16:creationId xmlns:a16="http://schemas.microsoft.com/office/drawing/2014/main" id="{FD8CED5A-65C7-4DBE-A57B-37B830C86838}"/>
               </a:ext>
             </a:extLst>
           </p:cNvPr>
@@ -28599,7 +29287,7 @@
     </p:spTree>
     <p:extLst>
       <p:ext uri="{BB962C8B-B14F-4D97-AF65-F5344CB8AC3E}">
-        <p14:creationId xmlns:p14="http://schemas.microsoft.com/office/powerpoint/2010/main" val="544695102"/>
+        <p14:creationId xmlns:p14="http://schemas.microsoft.com/office/powerpoint/2010/main" val="1562163347"/>
       </p:ext>
     </p:extLst>
   </p:cSld>
@@ -28630,7 +29318,7 @@
           <p:cNvPr id="14" name="">
             <a:extLst xmlns:a="http://schemas.openxmlformats.org/drawingml/2006/main">
               <a:ext uri="{FF2B5EF4-FFF2-40B4-BE49-F238E27FC236}">
-                <a16:creationId xmlns:a16="http://schemas.microsoft.com/office/drawing/2014/main" id="{50DD3034-98D1-4ECB-BAFC-C11D1C252FC4}"/>
+                <a16:creationId xmlns:a16="http://schemas.microsoft.com/office/drawing/2014/main" id="{395150D7-2D33-4575-AD42-98A800FBF948}"/>
               </a:ext>
             </a:extLst>
           </p:cNvPr>
@@ -28788,7 +29476,7 @@
           <p:cNvPr id="2" name="">
             <a:extLst xmlns:a="http://schemas.openxmlformats.org/drawingml/2006/main">
               <a:ext uri="{FF2B5EF4-FFF2-40B4-BE49-F238E27FC236}">
-                <a16:creationId xmlns:a16="http://schemas.microsoft.com/office/drawing/2014/main" id="{E53723ED-1E9B-4643-8319-D59C11873F05}"/>
+                <a16:creationId xmlns:a16="http://schemas.microsoft.com/office/drawing/2014/main" id="{DED3CF4A-2134-4EA1-B059-244B23781897}"/>
               </a:ext>
             </a:extLst>
           </p:cNvPr>
@@ -28946,7 +29634,7 @@
           <p:cNvPr id="3" name="">
             <a:extLst xmlns:a="http://schemas.openxmlformats.org/drawingml/2006/main">
               <a:ext uri="{FF2B5EF4-FFF2-40B4-BE49-F238E27FC236}">
-                <a16:creationId xmlns:a16="http://schemas.microsoft.com/office/drawing/2014/main" id="{41DA67E6-BB66-4FE6-9649-831801A08CD1}"/>
+                <a16:creationId xmlns:a16="http://schemas.microsoft.com/office/drawing/2014/main" id="{1DDBE9B1-DC48-4076-AC03-A1915599EC7E}"/>
               </a:ext>
             </a:extLst>
           </p:cNvPr>
@@ -29104,7 +29792,7 @@
           <p:cNvPr id="4" name="">
             <a:extLst xmlns:a="http://schemas.openxmlformats.org/drawingml/2006/main">
               <a:ext uri="{FF2B5EF4-FFF2-40B4-BE49-F238E27FC236}">
-                <a16:creationId xmlns:a16="http://schemas.microsoft.com/office/drawing/2014/main" id="{E2FE1005-0FAA-44FF-B7FD-2D918EE0815F}"/>
+                <a16:creationId xmlns:a16="http://schemas.microsoft.com/office/drawing/2014/main" id="{83B65324-6B31-4E65-9370-7FCF2AE6B9ED}"/>
               </a:ext>
             </a:extLst>
           </p:cNvPr>
@@ -29114,7 +29802,7 @@
           <p:nvPr/>
         </p:nvPicPr>
         <p:blipFill>
-          <a:blip xmlns:r="http://schemas.openxmlformats.org/officeDocument/2006/relationships" xmlns:a="http://schemas.openxmlformats.org/drawingml/2006/main" r:embed="Ra8fa3c33ee8e40ae"/>
+          <a:blip xmlns:r="http://schemas.openxmlformats.org/officeDocument/2006/relationships" xmlns:a="http://schemas.openxmlformats.org/drawingml/2006/main" r:embed="Rba55f88d806448a0"/>
           <a:stretch xmlns:a="http://schemas.openxmlformats.org/drawingml/2006/main"/>
         </p:blipFill>
         <p:spPr>
@@ -29132,7 +29820,7 @@
           <p:cNvPr id="5" name="">
             <a:extLst xmlns:a="http://schemas.openxmlformats.org/drawingml/2006/main">
               <a:ext uri="{FF2B5EF4-FFF2-40B4-BE49-F238E27FC236}">
-                <a16:creationId xmlns:a16="http://schemas.microsoft.com/office/drawing/2014/main" id="{11273A50-FA3F-4FD5-9BF2-A0F4B484CA42}"/>
+                <a16:creationId xmlns:a16="http://schemas.microsoft.com/office/drawing/2014/main" id="{B4449A05-05A2-4AE1-90C4-D40E7943BAC3}"/>
               </a:ext>
             </a:extLst>
           </p:cNvPr>
@@ -29290,7 +29978,7 @@
           <p:cNvPr id="6" name="">
             <a:extLst xmlns:a="http://schemas.openxmlformats.org/drawingml/2006/main">
               <a:ext uri="{FF2B5EF4-FFF2-40B4-BE49-F238E27FC236}">
-                <a16:creationId xmlns:a16="http://schemas.microsoft.com/office/drawing/2014/main" id="{F8493CB9-A9A8-4580-A7C8-3527D6F0021F}"/>
+                <a16:creationId xmlns:a16="http://schemas.microsoft.com/office/drawing/2014/main" id="{3F8684C9-13A8-4469-9E4D-AEDA94AB1F3F}"/>
               </a:ext>
             </a:extLst>
           </p:cNvPr>
@@ -29448,7 +30136,7 @@
           <p:cNvPr id="7" name="">
             <a:extLst xmlns:a="http://schemas.openxmlformats.org/drawingml/2006/main">
               <a:ext uri="{FF2B5EF4-FFF2-40B4-BE49-F238E27FC236}">
-                <a16:creationId xmlns:a16="http://schemas.microsoft.com/office/drawing/2014/main" id="{B7678DD4-45AB-4C8F-83FD-ACDEB3B66C23}"/>
+                <a16:creationId xmlns:a16="http://schemas.microsoft.com/office/drawing/2014/main" id="{6596B98E-E57B-484F-8F09-09D5BDDD49B6}"/>
               </a:ext>
             </a:extLst>
           </p:cNvPr>
@@ -29458,7 +30146,7 @@
           <p:nvPr/>
         </p:nvPicPr>
         <p:blipFill>
-          <a:blip xmlns:r="http://schemas.openxmlformats.org/officeDocument/2006/relationships" xmlns:a="http://schemas.openxmlformats.org/drawingml/2006/main" r:embed="R26a3401029564dac"/>
+          <a:blip xmlns:r="http://schemas.openxmlformats.org/officeDocument/2006/relationships" xmlns:a="http://schemas.openxmlformats.org/drawingml/2006/main" r:embed="Rffa1d680d2754f85"/>
           <a:stretch xmlns:a="http://schemas.openxmlformats.org/drawingml/2006/main"/>
         </p:blipFill>
         <p:spPr>
@@ -29476,7 +30164,7 @@
           <p:cNvPr id="8" name="">
             <a:extLst xmlns:a="http://schemas.openxmlformats.org/drawingml/2006/main">
               <a:ext uri="{FF2B5EF4-FFF2-40B4-BE49-F238E27FC236}">
-                <a16:creationId xmlns:a16="http://schemas.microsoft.com/office/drawing/2014/main" id="{62A0A021-F50A-41C9-A43C-D032D99B7AE8}"/>
+                <a16:creationId xmlns:a16="http://schemas.microsoft.com/office/drawing/2014/main" id="{83CC220B-DBB1-4C32-8309-7D13F6FA10C7}"/>
               </a:ext>
             </a:extLst>
           </p:cNvPr>
@@ -29634,7 +30322,7 @@
           <p:cNvPr id="9" name="">
             <a:extLst xmlns:a="http://schemas.openxmlformats.org/drawingml/2006/main">
               <a:ext uri="{FF2B5EF4-FFF2-40B4-BE49-F238E27FC236}">
-                <a16:creationId xmlns:a16="http://schemas.microsoft.com/office/drawing/2014/main" id="{F5AAF794-AC54-4AFB-ABD0-656B7BD441B9}"/>
+                <a16:creationId xmlns:a16="http://schemas.microsoft.com/office/drawing/2014/main" id="{AA2AC99B-D8B6-4F13-ACF3-5E97A71B99F6}"/>
               </a:ext>
             </a:extLst>
           </p:cNvPr>
@@ -29792,7 +30480,7 @@
           <p:cNvPr id="10" name="">
             <a:extLst xmlns:a="http://schemas.openxmlformats.org/drawingml/2006/main">
               <a:ext uri="{FF2B5EF4-FFF2-40B4-BE49-F238E27FC236}">
-                <a16:creationId xmlns:a16="http://schemas.microsoft.com/office/drawing/2014/main" id="{C33DA011-2E3B-4303-97AC-674194FCB700}"/>
+                <a16:creationId xmlns:a16="http://schemas.microsoft.com/office/drawing/2014/main" id="{DFC2FD94-B085-4589-B5C3-95D264D1CC33}"/>
               </a:ext>
             </a:extLst>
           </p:cNvPr>
@@ -29950,7 +30638,7 @@
           <p:cNvPr id="11" name="">
             <a:extLst xmlns:a="http://schemas.openxmlformats.org/drawingml/2006/main">
               <a:ext uri="{FF2B5EF4-FFF2-40B4-BE49-F238E27FC236}">
-                <a16:creationId xmlns:a16="http://schemas.microsoft.com/office/drawing/2014/main" id="{A9D2C773-AA35-48A4-8DD3-7C581D74589F}"/>
+                <a16:creationId xmlns:a16="http://schemas.microsoft.com/office/drawing/2014/main" id="{1766F2B7-9926-4F2D-B288-428003B4C35C}"/>
               </a:ext>
             </a:extLst>
           </p:cNvPr>
@@ -30108,7 +30796,7 @@
           <p:cNvPr id="12" name="">
             <a:extLst xmlns:a="http://schemas.openxmlformats.org/drawingml/2006/main">
               <a:ext uri="{FF2B5EF4-FFF2-40B4-BE49-F238E27FC236}">
-                <a16:creationId xmlns:a16="http://schemas.microsoft.com/office/drawing/2014/main" id="{EE5CC3A2-71A8-46E1-9B0B-FCADFAE800B8}"/>
+                <a16:creationId xmlns:a16="http://schemas.microsoft.com/office/drawing/2014/main" id="{05BF7725-51F5-479D-B640-5FA1362167D4}"/>
               </a:ext>
             </a:extLst>
           </p:cNvPr>
@@ -30312,7 +31000,7 @@
           <p:cNvPr id="13" name="">
             <a:extLst xmlns:a="http://schemas.openxmlformats.org/drawingml/2006/main">
               <a:ext uri="{FF2B5EF4-FFF2-40B4-BE49-F238E27FC236}">
-                <a16:creationId xmlns:a16="http://schemas.microsoft.com/office/drawing/2014/main" id="{CE56743B-1B16-4801-9FC6-471AE69F910B}"/>
+                <a16:creationId xmlns:a16="http://schemas.microsoft.com/office/drawing/2014/main" id="{6DFB0C04-D748-4F1B-8EE3-384E9AEA9EDF}"/>
               </a:ext>
             </a:extLst>
           </p:cNvPr>
@@ -30468,7 +31156,7 @@
     </p:spTree>
     <p:extLst>
       <p:ext uri="{BB962C8B-B14F-4D97-AF65-F5344CB8AC3E}">
-        <p14:creationId xmlns:p14="http://schemas.microsoft.com/office/powerpoint/2010/main" val="1346187414"/>
+        <p14:creationId xmlns:p14="http://schemas.microsoft.com/office/powerpoint/2010/main" val="1597593599"/>
       </p:ext>
     </p:extLst>
   </p:cSld>
@@ -30499,7 +31187,7 @@
           <p:cNvPr id="14" name="">
             <a:extLst xmlns:a="http://schemas.openxmlformats.org/drawingml/2006/main">
               <a:ext uri="{FF2B5EF4-FFF2-40B4-BE49-F238E27FC236}">
-                <a16:creationId xmlns:a16="http://schemas.microsoft.com/office/drawing/2014/main" id="{A1103F8A-C0BE-4C31-A23F-8AA500AB3FEA}"/>
+                <a16:creationId xmlns:a16="http://schemas.microsoft.com/office/drawing/2014/main" id="{4C60436A-A267-47D3-8A5C-F06E160B9C1A}"/>
               </a:ext>
             </a:extLst>
           </p:cNvPr>
@@ -30657,7 +31345,7 @@
           <p:cNvPr id="2" name="">
             <a:extLst xmlns:a="http://schemas.openxmlformats.org/drawingml/2006/main">
               <a:ext uri="{FF2B5EF4-FFF2-40B4-BE49-F238E27FC236}">
-                <a16:creationId xmlns:a16="http://schemas.microsoft.com/office/drawing/2014/main" id="{0B710EE3-B06E-4798-A281-DA39394661B1}"/>
+                <a16:creationId xmlns:a16="http://schemas.microsoft.com/office/drawing/2014/main" id="{AA5A18A9-3913-4535-A37F-447DDC292438}"/>
               </a:ext>
             </a:extLst>
           </p:cNvPr>
@@ -30815,7 +31503,7 @@
           <p:cNvPr id="3" name="">
             <a:extLst xmlns:a="http://schemas.openxmlformats.org/drawingml/2006/main">
               <a:ext uri="{FF2B5EF4-FFF2-40B4-BE49-F238E27FC236}">
-                <a16:creationId xmlns:a16="http://schemas.microsoft.com/office/drawing/2014/main" id="{1F8D1C1D-BB89-489C-83C5-E7ED3E5A95D2}"/>
+                <a16:creationId xmlns:a16="http://schemas.microsoft.com/office/drawing/2014/main" id="{6CAAB52E-2C14-4A7A-95E8-EAD519AD8512}"/>
               </a:ext>
             </a:extLst>
           </p:cNvPr>
@@ -30963,7 +31651,7 @@
                 <a:ea typeface="Arial"/>
                 <a:cs typeface="Arial"/>
               </a:rPr>
-              <a:t>Kufijtë e MVP-së që ruajmë</a:t>
+              <a:t>Çfarë premton MVP-ja jonë?</a:t>
             </a:r>
           </a:p>
         </p:txBody>
@@ -30973,7 +31661,7 @@
           <p:cNvPr id="4" name="">
             <a:extLst xmlns:a="http://schemas.openxmlformats.org/drawingml/2006/main">
               <a:ext uri="{FF2B5EF4-FFF2-40B4-BE49-F238E27FC236}">
-                <a16:creationId xmlns:a16="http://schemas.microsoft.com/office/drawing/2014/main" id="{EB1CFE9B-8F56-4F4B-AE53-07D13E20BB12}"/>
+                <a16:creationId xmlns:a16="http://schemas.microsoft.com/office/drawing/2014/main" id="{A253703B-4226-4DBF-9C87-638C218BDCA2}"/>
               </a:ext>
             </a:extLst>
           </p:cNvPr>
@@ -30983,7 +31671,7 @@
           <p:nvPr/>
         </p:nvPicPr>
         <p:blipFill>
-          <a:blip xmlns:r="http://schemas.openxmlformats.org/officeDocument/2006/relationships" xmlns:a="http://schemas.openxmlformats.org/drawingml/2006/main" r:embed="Rb24a3f60106a4fc4"/>
+          <a:blip xmlns:r="http://schemas.openxmlformats.org/officeDocument/2006/relationships" xmlns:a="http://schemas.openxmlformats.org/drawingml/2006/main" r:embed="R1822bee9cad743f6"/>
           <a:stretch xmlns:a="http://schemas.openxmlformats.org/drawingml/2006/main"/>
         </p:blipFill>
         <p:spPr>
@@ -31001,7 +31689,7 @@
           <p:cNvPr id="5" name="">
             <a:extLst xmlns:a="http://schemas.openxmlformats.org/drawingml/2006/main">
               <a:ext uri="{FF2B5EF4-FFF2-40B4-BE49-F238E27FC236}">
-                <a16:creationId xmlns:a16="http://schemas.microsoft.com/office/drawing/2014/main" id="{14426E5B-C78F-48D8-A0E1-F432194FA75B}"/>
+                <a16:creationId xmlns:a16="http://schemas.microsoft.com/office/drawing/2014/main" id="{B7C49B49-C73F-411C-9CDF-7A8226064E9E}"/>
               </a:ext>
             </a:extLst>
           </p:cNvPr>
@@ -31149,7 +31837,7 @@
                 <a:ea typeface="Arial"/>
                 <a:cs typeface="Arial"/>
               </a:rPr>
-              <a:t>Lejet</a:t>
+              <a:t>Rrjedha që ofrojmë</a:t>
             </a:r>
           </a:p>
         </p:txBody>
@@ -31159,7 +31847,7 @@
           <p:cNvPr id="6" name="">
             <a:extLst xmlns:a="http://schemas.openxmlformats.org/drawingml/2006/main">
               <a:ext uri="{FF2B5EF4-FFF2-40B4-BE49-F238E27FC236}">
-                <a16:creationId xmlns:a16="http://schemas.microsoft.com/office/drawing/2014/main" id="{1A1985AE-F4A0-43A8-86FA-8C164539D7B0}"/>
+                <a16:creationId xmlns:a16="http://schemas.microsoft.com/office/drawing/2014/main" id="{9B7BDB4E-75CC-46C4-A6B0-819B53E95B64}"/>
               </a:ext>
             </a:extLst>
           </p:cNvPr>
@@ -31307,7 +31995,7 @@
                 <a:ea typeface="Arial"/>
                 <a:cs typeface="Arial"/>
               </a:rPr>
-              <a:t>Mbeten në server</a:t>
+              <a:t>Zgjedhje dhe detaje të kuptueshme</a:t>
             </a:r>
           </a:p>
         </p:txBody>
@@ -31317,7 +32005,7 @@
           <p:cNvPr id="7" name="">
             <a:extLst xmlns:a="http://schemas.openxmlformats.org/drawingml/2006/main">
               <a:ext uri="{FF2B5EF4-FFF2-40B4-BE49-F238E27FC236}">
-                <a16:creationId xmlns:a16="http://schemas.microsoft.com/office/drawing/2014/main" id="{41BF077D-C941-40E0-AECD-4431440266BC}"/>
+                <a16:creationId xmlns:a16="http://schemas.microsoft.com/office/drawing/2014/main" id="{ED6A609E-6D59-483D-BE72-EA134338A17C}"/>
               </a:ext>
             </a:extLst>
           </p:cNvPr>
@@ -31327,7 +32015,7 @@
           <p:nvPr/>
         </p:nvPicPr>
         <p:blipFill>
-          <a:blip xmlns:r="http://schemas.openxmlformats.org/officeDocument/2006/relationships" xmlns:a="http://schemas.openxmlformats.org/drawingml/2006/main" r:embed="Rc9d91a4bf5684317"/>
+          <a:blip xmlns:r="http://schemas.openxmlformats.org/officeDocument/2006/relationships" xmlns:a="http://schemas.openxmlformats.org/drawingml/2006/main" r:embed="Ra63f56df52b84d71"/>
           <a:stretch xmlns:a="http://schemas.openxmlformats.org/drawingml/2006/main"/>
         </p:blipFill>
         <p:spPr>
@@ -31345,7 +32033,7 @@
           <p:cNvPr id="8" name="">
             <a:extLst xmlns:a="http://schemas.openxmlformats.org/drawingml/2006/main">
               <a:ext uri="{FF2B5EF4-FFF2-40B4-BE49-F238E27FC236}">
-                <a16:creationId xmlns:a16="http://schemas.microsoft.com/office/drawing/2014/main" id="{8395E2F2-5350-4B8E-BF36-4E49CFADFD20}"/>
+                <a16:creationId xmlns:a16="http://schemas.microsoft.com/office/drawing/2014/main" id="{2A110A63-2530-4BEF-84F3-33106C76E782}"/>
               </a:ext>
             </a:extLst>
           </p:cNvPr>
@@ -31493,7 +32181,7 @@
                 <a:ea typeface="Arial"/>
                 <a:cs typeface="Arial"/>
               </a:rPr>
-              <a:t>MVP-ja</a:t>
+              <a:t>Kufijtë që shpjegojmë</a:t>
             </a:r>
           </a:p>
         </p:txBody>
@@ -31503,7 +32191,7 @@
           <p:cNvPr id="9" name="">
             <a:extLst xmlns:a="http://schemas.openxmlformats.org/drawingml/2006/main">
               <a:ext uri="{FF2B5EF4-FFF2-40B4-BE49-F238E27FC236}">
-                <a16:creationId xmlns:a16="http://schemas.microsoft.com/office/drawing/2014/main" id="{AC8D3AAC-E6D3-498A-8C41-159688F1FC8D}"/>
+                <a16:creationId xmlns:a16="http://schemas.microsoft.com/office/drawing/2014/main" id="{E428041F-5071-4782-B082-C9454FB96B24}"/>
               </a:ext>
             </a:extLst>
           </p:cNvPr>
@@ -31651,7 +32339,7 @@
                 <a:ea typeface="Arial"/>
                 <a:cs typeface="Arial"/>
               </a:rPr>
-              <a:t>Një rrjedhë e demonstrueshme</a:t>
+              <a:t>Lejet, kopja dhe simulimi</a:t>
             </a:r>
           </a:p>
         </p:txBody>
@@ -31661,7 +32349,7 @@
           <p:cNvPr id="10" name="">
             <a:extLst xmlns:a="http://schemas.openxmlformats.org/drawingml/2006/main">
               <a:ext uri="{FF2B5EF4-FFF2-40B4-BE49-F238E27FC236}">
-                <a16:creationId xmlns:a16="http://schemas.microsoft.com/office/drawing/2014/main" id="{F3EBF658-B4F5-4480-86D1-424AF037C9C3}"/>
+                <a16:creationId xmlns:a16="http://schemas.microsoft.com/office/drawing/2014/main" id="{DDF3B941-4812-4CB8-8301-D123EBBDFC71}"/>
               </a:ext>
             </a:extLst>
           </p:cNvPr>
@@ -31809,7 +32497,7 @@
                 <a:ea typeface="Arial"/>
                 <a:cs typeface="Arial"/>
               </a:rPr>
-              <a:t>Lista publike mund të lexohet pa hyrje. Veprimi i pronarit kërkon verifikimin e serverit të Javës 5.</a:t>
+              <a:t>Puna që provojmë: Arta gjen një udhëtim dhe kupton nisjen e vendet. Veprimet e pronarit kërkojnë lejen e serverit.</a:t>
             </a:r>
           </a:p>
           <a:p xmlns:a="http://schemas.openxmlformats.org/drawingml/2006/main">
@@ -31837,7 +32525,7 @@
                 <a:ea typeface="Arial"/>
                 <a:cs typeface="Arial"/>
               </a:rPr>
-              <a:t>Sot nuk ndërtojmë pagesa, rezervime reale ose sinkronizim të ri. Provojmë pjesët që kemi dhe shpjegojmë kufijtë.</a:t>
+              <a:t>Kërkesa demonstrative nuk garanton rezervim. Një MVP e deklaron qartë këtë kufi dhe nuk e quan simulimin funksion të përfunduar.</a:t>
             </a:r>
           </a:p>
         </p:txBody>
@@ -31847,7 +32535,7 @@
           <p:cNvPr id="11" name="">
             <a:extLst xmlns:a="http://schemas.openxmlformats.org/drawingml/2006/main">
               <a:ext uri="{FF2B5EF4-FFF2-40B4-BE49-F238E27FC236}">
-                <a16:creationId xmlns:a16="http://schemas.microsoft.com/office/drawing/2014/main" id="{492DE793-2EB8-4EB0-9E82-53DE6DB5109B}"/>
+                <a16:creationId xmlns:a16="http://schemas.microsoft.com/office/drawing/2014/main" id="{99E84B5F-7CE0-42F2-BF71-CA3705ADA597}"/>
               </a:ext>
             </a:extLst>
           </p:cNvPr>
@@ -31995,7 +32683,7 @@
                 <a:ea typeface="Arial"/>
                 <a:cs typeface="Arial"/>
               </a:rPr>
-              <a:t>Çfarë bën nëse hyrja reale nuk të funksionon ende?</a:t>
+              <a:t>A është një MVP aplikacion me çdo funksion, por me premtime të pasakta?</a:t>
             </a:r>
           </a:p>
         </p:txBody>
@@ -32005,7 +32693,7 @@
           <p:cNvPr id="12" name="">
             <a:extLst xmlns:a="http://schemas.openxmlformats.org/drawingml/2006/main">
               <a:ext uri="{FF2B5EF4-FFF2-40B4-BE49-F238E27FC236}">
-                <a16:creationId xmlns:a16="http://schemas.microsoft.com/office/drawing/2014/main" id="{A42DC3D0-180E-4DDA-A686-BC9380E2B5CB}"/>
+                <a16:creationId xmlns:a16="http://schemas.microsoft.com/office/drawing/2014/main" id="{172AFEC4-3844-4E38-BF65-D82675FD0E61}"/>
               </a:ext>
             </a:extLst>
           </p:cNvPr>
@@ -32153,7 +32841,7 @@
                 <a:ea typeface="Arial"/>
                 <a:cs typeface="Arial"/>
               </a:rPr>
-              <a:t>Shënoje si pengesë dhe kërko ndihmë. Mund të punosh te lista dhe detajet, por nuk raporton që prova e lejeve kaloi.</a:t>
+              <a:t>Jo. Ka pak funksione me qëllim të qartë. Përdoruesi duhet ta kuptojë çfarë mund të bëjë dhe çfarë nuk është realizuar ende.</a:t>
             </a:r>
           </a:p>
         </p:txBody>
@@ -32163,7 +32851,7 @@
           <p:cNvPr id="13" name="">
             <a:extLst xmlns:a="http://schemas.openxmlformats.org/drawingml/2006/main">
               <a:ext uri="{FF2B5EF4-FFF2-40B4-BE49-F238E27FC236}">
-                <a16:creationId xmlns:a16="http://schemas.microsoft.com/office/drawing/2014/main" id="{D9AFBBE7-9ECB-44F8-8E70-A358CC1A5585}"/>
+                <a16:creationId xmlns:a16="http://schemas.microsoft.com/office/drawing/2014/main" id="{91630EE7-51BC-4178-A897-6572A162A8A4}"/>
               </a:ext>
             </a:extLst>
           </p:cNvPr>
@@ -32319,7 +33007,7 @@
     </p:spTree>
     <p:extLst>
       <p:ext uri="{BB962C8B-B14F-4D97-AF65-F5344CB8AC3E}">
-        <p14:creationId xmlns:p14="http://schemas.microsoft.com/office/powerpoint/2010/main" val="669921710"/>
+        <p14:creationId xmlns:p14="http://schemas.microsoft.com/office/powerpoint/2010/main" val="42487297"/>
       </p:ext>
     </p:extLst>
   </p:cSld>
@@ -32347,10 +33035,10 @@
       </p:grpSpPr>
       <p:sp>
         <p:nvSpPr>
-          <p:cNvPr id="13" name="">
+          <p:cNvPr id="16" name="">
             <a:extLst xmlns:a="http://schemas.openxmlformats.org/drawingml/2006/main">
               <a:ext uri="{FF2B5EF4-FFF2-40B4-BE49-F238E27FC236}">
-                <a16:creationId xmlns:a16="http://schemas.microsoft.com/office/drawing/2014/main" id="{DD09A621-CD39-459A-B0F1-1C5B4C41B6ED}"/>
+                <a16:creationId xmlns:a16="http://schemas.microsoft.com/office/drawing/2014/main" id="{E920A9E1-F7E1-4F26-A55F-D47C9E019984}"/>
               </a:ext>
             </a:extLst>
           </p:cNvPr>
@@ -32508,7 +33196,7 @@
           <p:cNvPr id="2" name="">
             <a:extLst xmlns:a="http://schemas.openxmlformats.org/drawingml/2006/main">
               <a:ext uri="{FF2B5EF4-FFF2-40B4-BE49-F238E27FC236}">
-                <a16:creationId xmlns:a16="http://schemas.microsoft.com/office/drawing/2014/main" id="{B7695082-207E-4713-A4FF-3A9B8BE5EFA3}"/>
+                <a16:creationId xmlns:a16="http://schemas.microsoft.com/office/drawing/2014/main" id="{CD49A71B-17A6-4C22-92F1-059C43E9C2B5}"/>
               </a:ext>
             </a:extLst>
           </p:cNvPr>
@@ -32666,7 +33354,7 @@
           <p:cNvPr id="3" name="">
             <a:extLst xmlns:a="http://schemas.openxmlformats.org/drawingml/2006/main">
               <a:ext uri="{FF2B5EF4-FFF2-40B4-BE49-F238E27FC236}">
-                <a16:creationId xmlns:a16="http://schemas.microsoft.com/office/drawing/2014/main" id="{FAC8B501-3435-438C-A734-561D8526420C}"/>
+                <a16:creationId xmlns:a16="http://schemas.microsoft.com/office/drawing/2014/main" id="{CB318BB8-13CC-41A9-BACD-6EEAC4219D90}"/>
               </a:ext>
             </a:extLst>
           </p:cNvPr>
@@ -32814,7 +33502,7 @@
                 <a:ea typeface="Arial"/>
                 <a:cs typeface="Arial"/>
               </a:rPr>
-              <a:t>Rasti yt, në projektin tënd</a:t>
+              <a:t>Një vend, dy udhëtarë</a:t>
             </a:r>
           </a:p>
         </p:txBody>
@@ -32824,7 +33512,7 @@
           <p:cNvPr id="4" name="">
             <a:extLst xmlns:a="http://schemas.openxmlformats.org/drawingml/2006/main">
               <a:ext uri="{FF2B5EF4-FFF2-40B4-BE49-F238E27FC236}">
-                <a16:creationId xmlns:a16="http://schemas.microsoft.com/office/drawing/2014/main" id="{D76B04A7-3A46-4EB8-940A-7CF8937988D8}"/>
+                <a16:creationId xmlns:a16="http://schemas.microsoft.com/office/drawing/2014/main" id="{048B2024-B4A0-4F68-B415-5A6C7BA5FA50}"/>
               </a:ext>
             </a:extLst>
           </p:cNvPr>
@@ -32834,7 +33522,7 @@
           <p:nvPr/>
         </p:nvPicPr>
         <p:blipFill>
-          <a:blip xmlns:r="http://schemas.openxmlformats.org/officeDocument/2006/relationships" xmlns:a="http://schemas.openxmlformats.org/drawingml/2006/main" r:embed="R271f98ff7a0f4f11"/>
+          <a:blip xmlns:r="http://schemas.openxmlformats.org/officeDocument/2006/relationships" xmlns:a="http://schemas.openxmlformats.org/drawingml/2006/main" r:embed="Ref7c889ef8954290"/>
           <a:stretch xmlns:a="http://schemas.openxmlformats.org/drawingml/2006/main"/>
         </p:blipFill>
         <p:spPr>
@@ -32852,7 +33540,7 @@
           <p:cNvPr id="5" name="">
             <a:extLst xmlns:a="http://schemas.openxmlformats.org/drawingml/2006/main">
               <a:ext uri="{FF2B5EF4-FFF2-40B4-BE49-F238E27FC236}">
-                <a16:creationId xmlns:a16="http://schemas.microsoft.com/office/drawing/2014/main" id="{56DB8C12-680C-4829-A8C7-FE55D505912B}"/>
+                <a16:creationId xmlns:a16="http://schemas.microsoft.com/office/drawing/2014/main" id="{5F4BD07A-16DD-48CD-B2E7-E2B5ED1A9615}"/>
               </a:ext>
             </a:extLst>
           </p:cNvPr>
@@ -32864,7 +33552,7 @@
         <p:spPr>
           <a:xfrm xmlns:a="http://schemas.openxmlformats.org/drawingml/2006/main">
             <a:off x="609600" y="2667000"/>
-            <a:ext cx="5295900" cy="495300"/>
+            <a:ext cx="3409950" cy="495300"/>
           </a:xfrm>
           <a:prstGeom xmlns:a="http://schemas.openxmlformats.org/drawingml/2006/main" prst="rect">
             <a:avLst/>
@@ -33000,7 +33688,7 @@
                 <a:ea typeface="Arial"/>
                 <a:cs typeface="Arial"/>
               </a:rPr>
-              <a:t>Të dhëna fiktive</a:t>
+              <a:t>Arta: 1 vend</a:t>
             </a:r>
           </a:p>
         </p:txBody>
@@ -33010,7 +33698,7 @@
           <p:cNvPr id="6" name="">
             <a:extLst xmlns:a="http://schemas.openxmlformats.org/drawingml/2006/main">
               <a:ext uri="{FF2B5EF4-FFF2-40B4-BE49-F238E27FC236}">
-                <a16:creationId xmlns:a16="http://schemas.microsoft.com/office/drawing/2014/main" id="{25AB1FF5-E252-4EEF-8C95-561AC05722E7}"/>
+                <a16:creationId xmlns:a16="http://schemas.microsoft.com/office/drawing/2014/main" id="{6CD44E1A-F5BD-4B31-BD6F-A11C4D2C9191}"/>
               </a:ext>
             </a:extLst>
           </p:cNvPr>
@@ -33022,7 +33710,7 @@
         <p:spPr>
           <a:xfrm xmlns:a="http://schemas.openxmlformats.org/drawingml/2006/main">
             <a:off x="609600" y="3219450"/>
-            <a:ext cx="5295900" cy="571500"/>
+            <a:ext cx="3409950" cy="571500"/>
           </a:xfrm>
           <a:prstGeom xmlns:a="http://schemas.openxmlformats.org/drawingml/2006/main" prst="rect">
             <a:avLst/>
@@ -33158,7 +33846,7 @@
                 <a:ea typeface="Arial"/>
                 <a:cs typeface="Arial"/>
               </a:rPr>
-              <a:t>Ora dhe vendet e provës</a:t>
+              <a:t>E dhëna që pa në telefon</a:t>
             </a:r>
           </a:p>
         </p:txBody>
@@ -33168,7 +33856,7 @@
           <p:cNvPr id="7" name="">
             <a:extLst xmlns:a="http://schemas.openxmlformats.org/drawingml/2006/main">
               <a:ext uri="{FF2B5EF4-FFF2-40B4-BE49-F238E27FC236}">
-                <a16:creationId xmlns:a16="http://schemas.microsoft.com/office/drawing/2014/main" id="{FF1A8878-9F79-4A06-B537-751D3D5288D5}"/>
+                <a16:creationId xmlns:a16="http://schemas.microsoft.com/office/drawing/2014/main" id="{9E403172-9D67-44C7-81E4-739E41A0E98C}"/>
               </a:ext>
             </a:extLst>
           </p:cNvPr>
@@ -33178,12 +33866,12 @@
           <p:nvPr/>
         </p:nvPicPr>
         <p:blipFill>
-          <a:blip xmlns:r="http://schemas.openxmlformats.org/officeDocument/2006/relationships" xmlns:a="http://schemas.openxmlformats.org/drawingml/2006/main" r:embed="R7a8fcf39c4d647b1"/>
+          <a:blip xmlns:r="http://schemas.openxmlformats.org/officeDocument/2006/relationships" xmlns:a="http://schemas.openxmlformats.org/drawingml/2006/main" r:embed="Rcdbd3a77e35d4387"/>
           <a:stretch xmlns:a="http://schemas.openxmlformats.org/drawingml/2006/main"/>
         </p:blipFill>
         <p:spPr>
           <a:xfrm xmlns:a="http://schemas.openxmlformats.org/drawingml/2006/main">
-            <a:off x="6267450" y="1952625"/>
+            <a:off x="4381500" y="1952625"/>
             <a:ext cx="571500" cy="571500"/>
           </a:xfrm>
           <a:prstGeom xmlns:a="http://schemas.openxmlformats.org/drawingml/2006/main" prst="rect">
@@ -33196,7 +33884,7 @@
           <p:cNvPr id="8" name="">
             <a:extLst xmlns:a="http://schemas.openxmlformats.org/drawingml/2006/main">
               <a:ext uri="{FF2B5EF4-FFF2-40B4-BE49-F238E27FC236}">
-                <a16:creationId xmlns:a16="http://schemas.microsoft.com/office/drawing/2014/main" id="{42A13248-2C6C-4380-9489-2C2D2441B12B}"/>
+                <a16:creationId xmlns:a16="http://schemas.microsoft.com/office/drawing/2014/main" id="{590A9014-4A1C-4DDC-ADA7-8D10AF0AF1F5}"/>
               </a:ext>
             </a:extLst>
           </p:cNvPr>
@@ -33207,8 +33895,8 @@
         </p:nvSpPr>
         <p:spPr>
           <a:xfrm xmlns:a="http://schemas.openxmlformats.org/drawingml/2006/main">
-            <a:off x="6267450" y="2667000"/>
-            <a:ext cx="5295900" cy="495300"/>
+            <a:off x="4381500" y="2667000"/>
+            <a:ext cx="3409950" cy="495300"/>
           </a:xfrm>
           <a:prstGeom xmlns:a="http://schemas.openxmlformats.org/drawingml/2006/main" prst="rect">
             <a:avLst/>
@@ -33344,7 +34032,7 @@
                 <a:ea typeface="Arial"/>
                 <a:cs typeface="Arial"/>
               </a:rPr>
-              <a:t>I njëjti ID</a:t>
+              <a:t>Besa: 1 vend</a:t>
             </a:r>
           </a:p>
         </p:txBody>
@@ -33354,7 +34042,7 @@
           <p:cNvPr id="9" name="">
             <a:extLst xmlns:a="http://schemas.openxmlformats.org/drawingml/2006/main">
               <a:ext uri="{FF2B5EF4-FFF2-40B4-BE49-F238E27FC236}">
-                <a16:creationId xmlns:a16="http://schemas.microsoft.com/office/drawing/2014/main" id="{15559E5E-EA73-4835-A75D-221879E29999}"/>
+                <a16:creationId xmlns:a16="http://schemas.microsoft.com/office/drawing/2014/main" id="{FD7F6580-F1BF-4F54-84AE-947570C8D39B}"/>
               </a:ext>
             </a:extLst>
           </p:cNvPr>
@@ -33365,8 +34053,8 @@
         </p:nvSpPr>
         <p:spPr>
           <a:xfrm xmlns:a="http://schemas.openxmlformats.org/drawingml/2006/main">
-            <a:off x="6267450" y="3219450"/>
-            <a:ext cx="5295900" cy="571500"/>
+            <a:off x="4381500" y="3219450"/>
+            <a:ext cx="3409950" cy="571500"/>
           </a:xfrm>
           <a:prstGeom xmlns:a="http://schemas.openxmlformats.org/drawingml/2006/main" prst="rect">
             <a:avLst/>
@@ -33502,17 +34190,45 @@
                 <a:ea typeface="Arial"/>
                 <a:cs typeface="Arial"/>
               </a:rPr>
-              <a:t>Ndiqe në të gjitha ekranet</a:t>
+              <a:t>Lexim në një telefon tjetër</a:t>
             </a:r>
           </a:p>
         </p:txBody>
       </p:sp>
-      <p:sp>
-        <p:nvSpPr>
+      <p:pic>
+        <p:nvPicPr>
           <p:cNvPr id="10" name="">
             <a:extLst xmlns:a="http://schemas.openxmlformats.org/drawingml/2006/main">
               <a:ext uri="{FF2B5EF4-FFF2-40B4-BE49-F238E27FC236}">
-                <a16:creationId xmlns:a16="http://schemas.microsoft.com/office/drawing/2014/main" id="{625FF997-9A38-47F7-8972-96541C3A8631}"/>
+                <a16:creationId xmlns:a16="http://schemas.microsoft.com/office/drawing/2014/main" id="{B67688B2-6D1F-4A9B-BB28-431EF9BD3953}"/>
+              </a:ext>
+            </a:extLst>
+          </p:cNvPr>
+          <p:cNvPicPr>
+            <a:picLocks xmlns:a="http://schemas.openxmlformats.org/drawingml/2006/main" noChangeAspect="1"/>
+          </p:cNvPicPr>
+          <p:nvPr/>
+        </p:nvPicPr>
+        <p:blipFill>
+          <a:blip xmlns:r="http://schemas.openxmlformats.org/officeDocument/2006/relationships" xmlns:a="http://schemas.openxmlformats.org/drawingml/2006/main" r:embed="Rb10db11856564666"/>
+          <a:stretch xmlns:a="http://schemas.openxmlformats.org/drawingml/2006/main"/>
+        </p:blipFill>
+        <p:spPr>
+          <a:xfrm xmlns:a="http://schemas.openxmlformats.org/drawingml/2006/main">
+            <a:off x="8153400" y="1952625"/>
+            <a:ext cx="571500" cy="571500"/>
+          </a:xfrm>
+          <a:prstGeom xmlns:a="http://schemas.openxmlformats.org/drawingml/2006/main" prst="rect">
+            <a:avLst/>
+          </a:prstGeom>
+        </p:spPr>
+      </p:pic>
+      <p:sp>
+        <p:nvSpPr>
+          <p:cNvPr id="11" name="">
+            <a:extLst xmlns:a="http://schemas.openxmlformats.org/drawingml/2006/main">
+              <a:ext uri="{FF2B5EF4-FFF2-40B4-BE49-F238E27FC236}">
+                <a16:creationId xmlns:a16="http://schemas.microsoft.com/office/drawing/2014/main" id="{53650724-2ADC-406E-86DD-87285C86361B}"/>
               </a:ext>
             </a:extLst>
           </p:cNvPr>
@@ -33523,8 +34239,8 @@
         </p:nvSpPr>
         <p:spPr>
           <a:xfrm xmlns:a="http://schemas.openxmlformats.org/drawingml/2006/main">
-            <a:off x="609600" y="4048125"/>
-            <a:ext cx="10953750" cy="1285875"/>
+            <a:off x="8153400" y="2667000"/>
+            <a:ext cx="3409950" cy="495300"/>
           </a:xfrm>
           <a:prstGeom xmlns:a="http://schemas.openxmlformats.org/drawingml/2006/main" prst="rect">
             <a:avLst/>
@@ -33540,9 +34256,9 @@
           </a:bodyPr>
           <a:lstStyle xmlns:a="http://schemas.openxmlformats.org/drawingml/2006/main">
             <a:defPPr>
-              <a:defRPr sz="1950" b="0">
-                <a:solidFill>
-                  <a:srgbClr val="EDF2FF"/>
+              <a:defRPr sz="2025" b="1">
+                <a:solidFill>
+                  <a:srgbClr val="FFFFFF"/>
                 </a:solidFill>
                 <a:latin typeface="Arial"/>
                 <a:ea typeface="Arial"/>
@@ -33550,9 +34266,9 @@
               </a:defRPr>
             </a:defPPr>
             <a:lvl1pPr>
-              <a:defRPr sz="1950" b="0">
-                <a:solidFill>
-                  <a:srgbClr val="EDF2FF"/>
+              <a:defRPr sz="2025" b="1">
+                <a:solidFill>
+                  <a:srgbClr val="FFFFFF"/>
                 </a:solidFill>
                 <a:latin typeface="Arial"/>
                 <a:ea typeface="Arial"/>
@@ -33560,9 +34276,9 @@
               </a:defRPr>
             </a:lvl1pPr>
             <a:lvl2pPr>
-              <a:defRPr sz="1950" b="0">
-                <a:solidFill>
-                  <a:srgbClr val="EDF2FF"/>
+              <a:defRPr sz="2025" b="1">
+                <a:solidFill>
+                  <a:srgbClr val="FFFFFF"/>
                 </a:solidFill>
                 <a:latin typeface="Arial"/>
                 <a:ea typeface="Arial"/>
@@ -33570,9 +34286,9 @@
               </a:defRPr>
             </a:lvl2pPr>
             <a:lvl3pPr>
-              <a:defRPr sz="1950" b="0">
-                <a:solidFill>
-                  <a:srgbClr val="EDF2FF"/>
+              <a:defRPr sz="2025" b="1">
+                <a:solidFill>
+                  <a:srgbClr val="FFFFFF"/>
                 </a:solidFill>
                 <a:latin typeface="Arial"/>
                 <a:ea typeface="Arial"/>
@@ -33580,9 +34296,9 @@
               </a:defRPr>
             </a:lvl3pPr>
             <a:lvl4pPr>
-              <a:defRPr sz="1950" b="0">
-                <a:solidFill>
-                  <a:srgbClr val="EDF2FF"/>
+              <a:defRPr sz="2025" b="1">
+                <a:solidFill>
+                  <a:srgbClr val="FFFFFF"/>
                 </a:solidFill>
                 <a:latin typeface="Arial"/>
                 <a:ea typeface="Arial"/>
@@ -33590,9 +34306,9 @@
               </a:defRPr>
             </a:lvl4pPr>
             <a:lvl5pPr>
-              <a:defRPr sz="1950" b="0">
-                <a:solidFill>
-                  <a:srgbClr val="EDF2FF"/>
+              <a:defRPr sz="2025" b="1">
+                <a:solidFill>
+                  <a:srgbClr val="FFFFFF"/>
                 </a:solidFill>
                 <a:latin typeface="Arial"/>
                 <a:ea typeface="Arial"/>
@@ -33600,9 +34316,9 @@
               </a:defRPr>
             </a:lvl5pPr>
             <a:lvl6pPr>
-              <a:defRPr sz="1950" b="0">
-                <a:solidFill>
-                  <a:srgbClr val="EDF2FF"/>
+              <a:defRPr sz="2025" b="1">
+                <a:solidFill>
+                  <a:srgbClr val="FFFFFF"/>
                 </a:solidFill>
                 <a:latin typeface="Arial"/>
                 <a:ea typeface="Arial"/>
@@ -33610,9 +34326,9 @@
               </a:defRPr>
             </a:lvl6pPr>
             <a:lvl7pPr>
-              <a:defRPr sz="1950" b="0">
-                <a:solidFill>
-                  <a:srgbClr val="EDF2FF"/>
+              <a:defRPr sz="2025" b="1">
+                <a:solidFill>
+                  <a:srgbClr val="FFFFFF"/>
                 </a:solidFill>
                 <a:latin typeface="Arial"/>
                 <a:ea typeface="Arial"/>
@@ -33620,9 +34336,9 @@
               </a:defRPr>
             </a:lvl7pPr>
             <a:lvl8pPr>
-              <a:defRPr sz="1950" b="0">
-                <a:solidFill>
-                  <a:srgbClr val="EDF2FF"/>
+              <a:defRPr sz="2025" b="1">
+                <a:solidFill>
+                  <a:srgbClr val="FFFFFF"/>
                 </a:solidFill>
                 <a:latin typeface="Arial"/>
                 <a:ea typeface="Arial"/>
@@ -33630,9 +34346,9 @@
               </a:defRPr>
             </a:lvl8pPr>
             <a:lvl9pPr>
-              <a:defRPr sz="1950" b="0">
-                <a:solidFill>
-                  <a:srgbClr val="EDF2FF"/>
+              <a:defRPr sz="2025" b="1">
+                <a:solidFill>
+                  <a:srgbClr val="FFFFFF"/>
                 </a:solidFill>
                 <a:latin typeface="Arial"/>
                 <a:ea typeface="Arial"/>
@@ -33642,9 +34358,9 @@
           </a:lstStyle>
           <a:p xmlns:a="http://schemas.openxmlformats.org/drawingml/2006/main">
             <a:pPr>
-              <a:defRPr sz="1950" b="0">
-                <a:solidFill>
-                  <a:srgbClr val="EDF2FF"/>
+              <a:defRPr sz="2025" b="1">
+                <a:solidFill>
+                  <a:srgbClr val="FFFFFF"/>
                 </a:solidFill>
                 <a:latin typeface="Arial"/>
                 <a:ea typeface="Arial"/>
@@ -33652,53 +34368,25 @@
               </a:defRPr>
             </a:pPr>
             <a:r>
-              <a:rPr sz="1950" b="0">
-                <a:solidFill>
-                  <a:srgbClr val="EDF2FF"/>
+              <a:rPr sz="2025" b="1">
+                <a:solidFill>
+                  <a:srgbClr val="FFFFFF"/>
                 </a:solidFill>
                 <a:latin typeface="Arial"/>
                 <a:ea typeface="Arial"/>
                 <a:cs typeface="Arial"/>
               </a:rPr>
-              <a:t>Gjenero rastin nga emri yt GitHub. Përdor të dhëna fiktive dhe një udhëtim që ekziston në projekt.</a:t>
-            </a:r>
-          </a:p>
-          <a:p xmlns:a="http://schemas.openxmlformats.org/drawingml/2006/main">
-            <a:r>
-              <a:t/>
-            </a:r>
-          </a:p>
-          <a:p xmlns:a="http://schemas.openxmlformats.org/drawingml/2006/main">
-            <a:pPr>
-              <a:defRPr sz="1950" b="0">
-                <a:solidFill>
-                  <a:srgbClr val="EDF2FF"/>
-                </a:solidFill>
-                <a:latin typeface="Arial"/>
-                <a:ea typeface="Arial"/>
-                <a:cs typeface="Arial"/>
-              </a:defRPr>
-            </a:pPr>
-            <a:r>
-              <a:rPr sz="1950" b="0">
-                <a:solidFill>
-                  <a:srgbClr val="EDF2FF"/>
-                </a:solidFill>
-                <a:latin typeface="Arial"/>
-                <a:ea typeface="Arial"/>
-                <a:cs typeface="Arial"/>
-              </a:rPr>
-              <a:t>Kodi i rastit organizon variantin e provës. Ai është publik dhe nuk provon autorësinë.</a:t>
+              <a:t>Serveri vendos</a:t>
             </a:r>
           </a:p>
         </p:txBody>
       </p:sp>
       <p:sp>
         <p:nvSpPr>
-          <p:cNvPr id="11" name="">
+          <p:cNvPr id="12" name="">
             <a:extLst xmlns:a="http://schemas.openxmlformats.org/drawingml/2006/main">
               <a:ext uri="{FF2B5EF4-FFF2-40B4-BE49-F238E27FC236}">
-                <a16:creationId xmlns:a16="http://schemas.microsoft.com/office/drawing/2014/main" id="{EF1645FE-176C-410B-AC62-C4AF212F744B}"/>
+                <a16:creationId xmlns:a16="http://schemas.microsoft.com/office/drawing/2014/main" id="{F9D775B4-8A0D-4DF0-9765-0D1B0585D044}"/>
               </a:ext>
             </a:extLst>
           </p:cNvPr>
@@ -33709,8 +34397,8 @@
         </p:nvSpPr>
         <p:spPr>
           <a:xfrm xmlns:a="http://schemas.openxmlformats.org/drawingml/2006/main">
-            <a:off x="609600" y="5715000"/>
-            <a:ext cx="10953750" cy="304800"/>
+            <a:off x="8153400" y="3219450"/>
+            <a:ext cx="3409950" cy="571500"/>
           </a:xfrm>
           <a:prstGeom xmlns:a="http://schemas.openxmlformats.org/drawingml/2006/main" prst="rect">
             <a:avLst/>
@@ -33726,9 +34414,9 @@
           </a:bodyPr>
           <a:lstStyle xmlns:a="http://schemas.openxmlformats.org/drawingml/2006/main">
             <a:defPPr>
-              <a:defRPr sz="1725" b="1">
-                <a:solidFill>
-                  <a:srgbClr val="FDBA74"/>
+              <a:defRPr sz="1650" b="0">
+                <a:solidFill>
+                  <a:srgbClr val="C8D3E6"/>
                 </a:solidFill>
                 <a:latin typeface="Arial"/>
                 <a:ea typeface="Arial"/>
@@ -33736,9 +34424,9 @@
               </a:defRPr>
             </a:defPPr>
             <a:lvl1pPr>
-              <a:defRPr sz="1725" b="1">
-                <a:solidFill>
-                  <a:srgbClr val="FDBA74"/>
+              <a:defRPr sz="1650" b="0">
+                <a:solidFill>
+                  <a:srgbClr val="C8D3E6"/>
                 </a:solidFill>
                 <a:latin typeface="Arial"/>
                 <a:ea typeface="Arial"/>
@@ -33746,9 +34434,9 @@
               </a:defRPr>
             </a:lvl1pPr>
             <a:lvl2pPr>
-              <a:defRPr sz="1725" b="1">
-                <a:solidFill>
-                  <a:srgbClr val="FDBA74"/>
+              <a:defRPr sz="1650" b="0">
+                <a:solidFill>
+                  <a:srgbClr val="C8D3E6"/>
                 </a:solidFill>
                 <a:latin typeface="Arial"/>
                 <a:ea typeface="Arial"/>
@@ -33756,9 +34444,9 @@
               </a:defRPr>
             </a:lvl2pPr>
             <a:lvl3pPr>
-              <a:defRPr sz="1725" b="1">
-                <a:solidFill>
-                  <a:srgbClr val="FDBA74"/>
+              <a:defRPr sz="1650" b="0">
+                <a:solidFill>
+                  <a:srgbClr val="C8D3E6"/>
                 </a:solidFill>
                 <a:latin typeface="Arial"/>
                 <a:ea typeface="Arial"/>
@@ -33766,9 +34454,9 @@
               </a:defRPr>
             </a:lvl3pPr>
             <a:lvl4pPr>
-              <a:defRPr sz="1725" b="1">
-                <a:solidFill>
-                  <a:srgbClr val="FDBA74"/>
+              <a:defRPr sz="1650" b="0">
+                <a:solidFill>
+                  <a:srgbClr val="C8D3E6"/>
                 </a:solidFill>
                 <a:latin typeface="Arial"/>
                 <a:ea typeface="Arial"/>
@@ -33776,9 +34464,9 @@
               </a:defRPr>
             </a:lvl4pPr>
             <a:lvl5pPr>
-              <a:defRPr sz="1725" b="1">
-                <a:solidFill>
-                  <a:srgbClr val="FDBA74"/>
+              <a:defRPr sz="1650" b="0">
+                <a:solidFill>
+                  <a:srgbClr val="C8D3E6"/>
                 </a:solidFill>
                 <a:latin typeface="Arial"/>
                 <a:ea typeface="Arial"/>
@@ -33786,9 +34474,9 @@
               </a:defRPr>
             </a:lvl5pPr>
             <a:lvl6pPr>
-              <a:defRPr sz="1725" b="1">
-                <a:solidFill>
-                  <a:srgbClr val="FDBA74"/>
+              <a:defRPr sz="1650" b="0">
+                <a:solidFill>
+                  <a:srgbClr val="C8D3E6"/>
                 </a:solidFill>
                 <a:latin typeface="Arial"/>
                 <a:ea typeface="Arial"/>
@@ -33796,9 +34484,9 @@
               </a:defRPr>
             </a:lvl6pPr>
             <a:lvl7pPr>
-              <a:defRPr sz="1725" b="1">
-                <a:solidFill>
-                  <a:srgbClr val="FDBA74"/>
+              <a:defRPr sz="1650" b="0">
+                <a:solidFill>
+                  <a:srgbClr val="C8D3E6"/>
                 </a:solidFill>
                 <a:latin typeface="Arial"/>
                 <a:ea typeface="Arial"/>
@@ -33806,9 +34494,9 @@
               </a:defRPr>
             </a:lvl7pPr>
             <a:lvl8pPr>
-              <a:defRPr sz="1725" b="1">
-                <a:solidFill>
-                  <a:srgbClr val="FDBA74"/>
+              <a:defRPr sz="1650" b="0">
+                <a:solidFill>
+                  <a:srgbClr val="C8D3E6"/>
                 </a:solidFill>
                 <a:latin typeface="Arial"/>
                 <a:ea typeface="Arial"/>
@@ -33816,9 +34504,9 @@
               </a:defRPr>
             </a:lvl8pPr>
             <a:lvl9pPr>
-              <a:defRPr sz="1725" b="1">
-                <a:solidFill>
-                  <a:srgbClr val="FDBA74"/>
+              <a:defRPr sz="1650" b="0">
+                <a:solidFill>
+                  <a:srgbClr val="C8D3E6"/>
                 </a:solidFill>
                 <a:latin typeface="Arial"/>
                 <a:ea typeface="Arial"/>
@@ -33828,9 +34516,9 @@
           </a:lstStyle>
           <a:p xmlns:a="http://schemas.openxmlformats.org/drawingml/2006/main">
             <a:pPr>
-              <a:defRPr sz="1725" b="1">
-                <a:solidFill>
-                  <a:srgbClr val="FDBA74"/>
+              <a:defRPr sz="1650" b="0">
+                <a:solidFill>
+                  <a:srgbClr val="C8D3E6"/>
                 </a:solidFill>
                 <a:latin typeface="Arial"/>
                 <a:ea typeface="Arial"/>
@@ -33838,25 +34526,25 @@
               </a:defRPr>
             </a:pPr>
             <a:r>
-              <a:rPr sz="1725" b="1">
-                <a:solidFill>
-                  <a:srgbClr val="FDBA74"/>
+              <a:rPr sz="1650" b="0">
+                <a:solidFill>
+                  <a:srgbClr val="C8D3E6"/>
                 </a:solidFill>
                 <a:latin typeface="Arial"/>
                 <a:ea typeface="Arial"/>
                 <a:cs typeface="Arial"/>
               </a:rPr>
-              <a:t>Vazhdo në faqen e ushtrimeve:</a:t>
+              <a:t>Në një proces real rezervimi</a:t>
             </a:r>
           </a:p>
         </p:txBody>
       </p:sp>
       <p:sp>
         <p:nvSpPr>
-          <p:cNvPr id="12" name="">
+          <p:cNvPr id="13" name="">
             <a:extLst xmlns:a="http://schemas.openxmlformats.org/drawingml/2006/main">
               <a:ext uri="{FF2B5EF4-FFF2-40B4-BE49-F238E27FC236}">
-                <a16:creationId xmlns:a16="http://schemas.microsoft.com/office/drawing/2014/main" id="{59FCCDD8-C197-42ED-8C6D-6E30E8EAA393}"/>
+                <a16:creationId xmlns:a16="http://schemas.microsoft.com/office/drawing/2014/main" id="{D37EC507-B4B1-4D74-8431-719225CFBE13}"/>
               </a:ext>
             </a:extLst>
           </p:cNvPr>
@@ -33867,8 +34555,8 @@
         </p:nvSpPr>
         <p:spPr>
           <a:xfrm xmlns:a="http://schemas.openxmlformats.org/drawingml/2006/main">
-            <a:off x="609600" y="6105525"/>
-            <a:ext cx="10953750" cy="333375"/>
+            <a:off x="609600" y="3857625"/>
+            <a:ext cx="10953750" cy="1476375"/>
           </a:xfrm>
           <a:prstGeom xmlns:a="http://schemas.openxmlformats.org/drawingml/2006/main" prst="rect">
             <a:avLst/>
@@ -33884,9 +34572,9 @@
           </a:bodyPr>
           <a:lstStyle xmlns:a="http://schemas.openxmlformats.org/drawingml/2006/main">
             <a:defPPr>
-              <a:defRPr sz="1500" b="0">
-                <a:solidFill>
-                  <a:srgbClr val="FDBA74"/>
+              <a:defRPr sz="1875" b="0">
+                <a:solidFill>
+                  <a:srgbClr val="EDF2FF"/>
                 </a:solidFill>
                 <a:latin typeface="Arial"/>
                 <a:ea typeface="Arial"/>
@@ -33894,9 +34582,9 @@
               </a:defRPr>
             </a:defPPr>
             <a:lvl1pPr>
-              <a:defRPr sz="1500" b="0">
-                <a:solidFill>
-                  <a:srgbClr val="FDBA74"/>
+              <a:defRPr sz="1875" b="0">
+                <a:solidFill>
+                  <a:srgbClr val="EDF2FF"/>
                 </a:solidFill>
                 <a:latin typeface="Arial"/>
                 <a:ea typeface="Arial"/>
@@ -33904,9 +34592,9 @@
               </a:defRPr>
             </a:lvl1pPr>
             <a:lvl2pPr>
-              <a:defRPr sz="1500" b="0">
-                <a:solidFill>
-                  <a:srgbClr val="FDBA74"/>
+              <a:defRPr sz="1875" b="0">
+                <a:solidFill>
+                  <a:srgbClr val="EDF2FF"/>
                 </a:solidFill>
                 <a:latin typeface="Arial"/>
                 <a:ea typeface="Arial"/>
@@ -33914,9 +34602,9 @@
               </a:defRPr>
             </a:lvl2pPr>
             <a:lvl3pPr>
-              <a:defRPr sz="1500" b="0">
-                <a:solidFill>
-                  <a:srgbClr val="FDBA74"/>
+              <a:defRPr sz="1875" b="0">
+                <a:solidFill>
+                  <a:srgbClr val="EDF2FF"/>
                 </a:solidFill>
                 <a:latin typeface="Arial"/>
                 <a:ea typeface="Arial"/>
@@ -33924,9 +34612,9 @@
               </a:defRPr>
             </a:lvl3pPr>
             <a:lvl4pPr>
-              <a:defRPr sz="1500" b="0">
-                <a:solidFill>
-                  <a:srgbClr val="FDBA74"/>
+              <a:defRPr sz="1875" b="0">
+                <a:solidFill>
+                  <a:srgbClr val="EDF2FF"/>
                 </a:solidFill>
                 <a:latin typeface="Arial"/>
                 <a:ea typeface="Arial"/>
@@ -33934,9 +34622,9 @@
               </a:defRPr>
             </a:lvl4pPr>
             <a:lvl5pPr>
-              <a:defRPr sz="1500" b="0">
-                <a:solidFill>
-                  <a:srgbClr val="FDBA74"/>
+              <a:defRPr sz="1875" b="0">
+                <a:solidFill>
+                  <a:srgbClr val="EDF2FF"/>
                 </a:solidFill>
                 <a:latin typeface="Arial"/>
                 <a:ea typeface="Arial"/>
@@ -33944,9 +34632,9 @@
               </a:defRPr>
             </a:lvl5pPr>
             <a:lvl6pPr>
-              <a:defRPr sz="1500" b="0">
-                <a:solidFill>
-                  <a:srgbClr val="FDBA74"/>
+              <a:defRPr sz="1875" b="0">
+                <a:solidFill>
+                  <a:srgbClr val="EDF2FF"/>
                 </a:solidFill>
                 <a:latin typeface="Arial"/>
                 <a:ea typeface="Arial"/>
@@ -33954,9 +34642,9 @@
               </a:defRPr>
             </a:lvl6pPr>
             <a:lvl7pPr>
-              <a:defRPr sz="1500" b="0">
-                <a:solidFill>
-                  <a:srgbClr val="FDBA74"/>
+              <a:defRPr sz="1875" b="0">
+                <a:solidFill>
+                  <a:srgbClr val="EDF2FF"/>
                 </a:solidFill>
                 <a:latin typeface="Arial"/>
                 <a:ea typeface="Arial"/>
@@ -33964,9 +34652,9 @@
               </a:defRPr>
             </a:lvl7pPr>
             <a:lvl8pPr>
-              <a:defRPr sz="1500" b="0">
-                <a:solidFill>
-                  <a:srgbClr val="FDBA74"/>
+              <a:defRPr sz="1875" b="0">
+                <a:solidFill>
+                  <a:srgbClr val="EDF2FF"/>
                 </a:solidFill>
                 <a:latin typeface="Arial"/>
                 <a:ea typeface="Arial"/>
@@ -33974,9 +34662,9 @@
               </a:defRPr>
             </a:lvl8pPr>
             <a:lvl9pPr>
-              <a:defRPr sz="1500" b="0">
-                <a:solidFill>
-                  <a:srgbClr val="FDBA74"/>
+              <a:defRPr sz="1875" b="0">
+                <a:solidFill>
+                  <a:srgbClr val="EDF2FF"/>
                 </a:solidFill>
                 <a:latin typeface="Arial"/>
                 <a:ea typeface="Arial"/>
@@ -33986,9 +34674,9 @@
           </a:lstStyle>
           <a:p xmlns:a="http://schemas.openxmlformats.org/drawingml/2006/main">
             <a:pPr>
-              <a:defRPr sz="1500" b="0">
-                <a:solidFill>
-                  <a:srgbClr val="FDBA74"/>
+              <a:defRPr sz="1875" b="0">
+                <a:solidFill>
+                  <a:srgbClr val="EDF2FF"/>
                 </a:solidFill>
                 <a:latin typeface="Arial"/>
                 <a:ea typeface="Arial"/>
@@ -33996,16 +34684,359 @@
               </a:defRPr>
             </a:pPr>
             <a:r>
-              <a:rPr sz="1500" b="0">
-                <a:solidFill>
-                  <a:srgbClr val="FDBA74"/>
-                </a:solidFill>
-                <a:latin typeface="Arial"/>
-                <a:ea typeface="Arial"/>
-                <a:cs typeface="Arial"/>
-                <a:hlinkClick xmlns:ns0="http://schemas.openxmlformats.org/officeDocument/2006/relationships" ns0:id="rIdCourseUrl4"/>
+              <a:rPr sz="1875" b="0">
+                <a:solidFill>
+                  <a:srgbClr val="EDF2FF"/>
+                </a:solidFill>
+                <a:latin typeface="Arial"/>
+                <a:ea typeface="Arial"/>
+                <a:cs typeface="Arial"/>
               </a:rPr>
-              <a:t>https://arbenl.github.io/lendet/2026-2027/mobile/java-07/ushtrimet.html</a:t>
+              <a:t>Skenar për një version të ardhshëm: Arta dhe Besa shohin njëkohësisht vendin e fundit. Të dyja klikojnë.</a:t>
+            </a:r>
+          </a:p>
+          <a:p xmlns:a="http://schemas.openxmlformats.org/drawingml/2006/main">
+            <a:r>
+              <a:t/>
+            </a:r>
+          </a:p>
+          <a:p xmlns:a="http://schemas.openxmlformats.org/drawingml/2006/main">
+            <a:pPr>
+              <a:defRPr sz="1875" b="0">
+                <a:solidFill>
+                  <a:srgbClr val="EDF2FF"/>
+                </a:solidFill>
+                <a:latin typeface="Arial"/>
+                <a:ea typeface="Arial"/>
+                <a:cs typeface="Arial"/>
+              </a:defRPr>
+            </a:pPr>
+            <a:r>
+              <a:rPr sz="1875" b="0">
+                <a:solidFill>
+                  <a:srgbClr val="EDF2FF"/>
+                </a:solidFill>
+                <a:latin typeface="Arial"/>
+                <a:ea typeface="Arial"/>
+                <a:cs typeface="Arial"/>
+              </a:rPr>
+              <a:t>Të dy telefonat e panë të lirë. A do të thotë kjo se të dyja mund ta marrin? Arsyetoni pa shkruar kod.</a:t>
+            </a:r>
+          </a:p>
+        </p:txBody>
+      </p:sp>
+      <p:sp>
+        <p:nvSpPr>
+          <p:cNvPr id="14" name="">
+            <a:extLst xmlns:a="http://schemas.openxmlformats.org/drawingml/2006/main">
+              <a:ext uri="{FF2B5EF4-FFF2-40B4-BE49-F238E27FC236}">
+                <a16:creationId xmlns:a16="http://schemas.microsoft.com/office/drawing/2014/main" id="{0E5913C2-DA09-48D0-9209-0CD2670C63A2}"/>
+              </a:ext>
+            </a:extLst>
+          </p:cNvPr>
+          <p:cNvSpPr>
+            <a:spLocks xmlns:a="http://schemas.openxmlformats.org/drawingml/2006/main" noGrp="1"/>
+          </p:cNvSpPr>
+          <p:nvPr/>
+        </p:nvSpPr>
+        <p:spPr>
+          <a:xfrm xmlns:a="http://schemas.openxmlformats.org/drawingml/2006/main">
+            <a:off x="609600" y="5429250"/>
+            <a:ext cx="10953750" cy="523875"/>
+          </a:xfrm>
+          <a:prstGeom xmlns:a="http://schemas.openxmlformats.org/drawingml/2006/main" prst="rect">
+            <a:avLst/>
+          </a:prstGeom>
+          <a:noFill xmlns:a="http://schemas.openxmlformats.org/drawingml/2006/main"/>
+          <a:ln xmlns:a="http://schemas.openxmlformats.org/drawingml/2006/main" w="0">
+            <a:noFill/>
+          </a:ln>
+        </p:spPr>
+        <p:txBody>
+          <a:bodyPr xmlns:a="http://schemas.openxmlformats.org/drawingml/2006/main">
+            <a:noAutofit/>
+          </a:bodyPr>
+          <a:lstStyle xmlns:a="http://schemas.openxmlformats.org/drawingml/2006/main">
+            <a:defPPr>
+              <a:defRPr sz="1800" b="1">
+                <a:solidFill>
+                  <a:srgbClr val="FDBA74"/>
+                </a:solidFill>
+                <a:latin typeface="Arial"/>
+                <a:ea typeface="Arial"/>
+                <a:cs typeface="Arial"/>
+              </a:defRPr>
+            </a:defPPr>
+            <a:lvl1pPr>
+              <a:defRPr sz="1800" b="1">
+                <a:solidFill>
+                  <a:srgbClr val="FDBA74"/>
+                </a:solidFill>
+                <a:latin typeface="Arial"/>
+                <a:ea typeface="Arial"/>
+                <a:cs typeface="Arial"/>
+              </a:defRPr>
+            </a:lvl1pPr>
+            <a:lvl2pPr>
+              <a:defRPr sz="1800" b="1">
+                <a:solidFill>
+                  <a:srgbClr val="FDBA74"/>
+                </a:solidFill>
+                <a:latin typeface="Arial"/>
+                <a:ea typeface="Arial"/>
+                <a:cs typeface="Arial"/>
+              </a:defRPr>
+            </a:lvl2pPr>
+            <a:lvl3pPr>
+              <a:defRPr sz="1800" b="1">
+                <a:solidFill>
+                  <a:srgbClr val="FDBA74"/>
+                </a:solidFill>
+                <a:latin typeface="Arial"/>
+                <a:ea typeface="Arial"/>
+                <a:cs typeface="Arial"/>
+              </a:defRPr>
+            </a:lvl3pPr>
+            <a:lvl4pPr>
+              <a:defRPr sz="1800" b="1">
+                <a:solidFill>
+                  <a:srgbClr val="FDBA74"/>
+                </a:solidFill>
+                <a:latin typeface="Arial"/>
+                <a:ea typeface="Arial"/>
+                <a:cs typeface="Arial"/>
+              </a:defRPr>
+            </a:lvl4pPr>
+            <a:lvl5pPr>
+              <a:defRPr sz="1800" b="1">
+                <a:solidFill>
+                  <a:srgbClr val="FDBA74"/>
+                </a:solidFill>
+                <a:latin typeface="Arial"/>
+                <a:ea typeface="Arial"/>
+                <a:cs typeface="Arial"/>
+              </a:defRPr>
+            </a:lvl5pPr>
+            <a:lvl6pPr>
+              <a:defRPr sz="1800" b="1">
+                <a:solidFill>
+                  <a:srgbClr val="FDBA74"/>
+                </a:solidFill>
+                <a:latin typeface="Arial"/>
+                <a:ea typeface="Arial"/>
+                <a:cs typeface="Arial"/>
+              </a:defRPr>
+            </a:lvl6pPr>
+            <a:lvl7pPr>
+              <a:defRPr sz="1800" b="1">
+                <a:solidFill>
+                  <a:srgbClr val="FDBA74"/>
+                </a:solidFill>
+                <a:latin typeface="Arial"/>
+                <a:ea typeface="Arial"/>
+                <a:cs typeface="Arial"/>
+              </a:defRPr>
+            </a:lvl7pPr>
+            <a:lvl8pPr>
+              <a:defRPr sz="1800" b="1">
+                <a:solidFill>
+                  <a:srgbClr val="FDBA74"/>
+                </a:solidFill>
+                <a:latin typeface="Arial"/>
+                <a:ea typeface="Arial"/>
+                <a:cs typeface="Arial"/>
+              </a:defRPr>
+            </a:lvl8pPr>
+            <a:lvl9pPr>
+              <a:defRPr sz="1800" b="1">
+                <a:solidFill>
+                  <a:srgbClr val="FDBA74"/>
+                </a:solidFill>
+                <a:latin typeface="Arial"/>
+                <a:ea typeface="Arial"/>
+                <a:cs typeface="Arial"/>
+              </a:defRPr>
+            </a:lvl9pPr>
+          </a:lstStyle>
+          <a:p xmlns:a="http://schemas.openxmlformats.org/drawingml/2006/main">
+            <a:pPr>
+              <a:defRPr sz="1800" b="1">
+                <a:solidFill>
+                  <a:srgbClr val="FDBA74"/>
+                </a:solidFill>
+                <a:latin typeface="Arial"/>
+                <a:ea typeface="Arial"/>
+                <a:cs typeface="Arial"/>
+              </a:defRPr>
+            </a:pPr>
+            <a:r>
+              <a:rPr sz="1800" b="1">
+                <a:solidFill>
+                  <a:srgbClr val="FDBA74"/>
+                </a:solidFill>
+                <a:latin typeface="Arial"/>
+                <a:ea typeface="Arial"/>
+                <a:cs typeface="Arial"/>
+              </a:rPr>
+              <a:t>Ku duhet të merret vendimi përfundimtar në një rezervim real?</a:t>
+            </a:r>
+          </a:p>
+        </p:txBody>
+      </p:sp>
+      <p:sp>
+        <p:nvSpPr>
+          <p:cNvPr id="15" name="">
+            <a:extLst xmlns:a="http://schemas.openxmlformats.org/drawingml/2006/main">
+              <a:ext uri="{FF2B5EF4-FFF2-40B4-BE49-F238E27FC236}">
+                <a16:creationId xmlns:a16="http://schemas.microsoft.com/office/drawing/2014/main" id="{461C2878-E4A1-4DDE-B561-A008DCDF57C1}"/>
+              </a:ext>
+            </a:extLst>
+          </p:cNvPr>
+          <p:cNvSpPr>
+            <a:spLocks xmlns:a="http://schemas.openxmlformats.org/drawingml/2006/main" noGrp="1"/>
+          </p:cNvSpPr>
+          <p:nvPr/>
+        </p:nvSpPr>
+        <p:spPr>
+          <a:xfrm xmlns:a="http://schemas.openxmlformats.org/drawingml/2006/main">
+            <a:off x="609600" y="6010275"/>
+            <a:ext cx="10953750" cy="628650"/>
+          </a:xfrm>
+          <a:prstGeom xmlns:a="http://schemas.openxmlformats.org/drawingml/2006/main" prst="rect">
+            <a:avLst/>
+          </a:prstGeom>
+          <a:noFill xmlns:a="http://schemas.openxmlformats.org/drawingml/2006/main"/>
+          <a:ln xmlns:a="http://schemas.openxmlformats.org/drawingml/2006/main" w="0">
+            <a:noFill/>
+          </a:ln>
+        </p:spPr>
+        <p:txBody>
+          <a:bodyPr xmlns:a="http://schemas.openxmlformats.org/drawingml/2006/main">
+            <a:noAutofit/>
+          </a:bodyPr>
+          <a:lstStyle xmlns:a="http://schemas.openxmlformats.org/drawingml/2006/main">
+            <a:defPPr>
+              <a:defRPr sz="1650" b="0">
+                <a:solidFill>
+                  <a:srgbClr val="B8EDDB"/>
+                </a:solidFill>
+                <a:latin typeface="Arial"/>
+                <a:ea typeface="Arial"/>
+                <a:cs typeface="Arial"/>
+              </a:defRPr>
+            </a:defPPr>
+            <a:lvl1pPr>
+              <a:defRPr sz="1650" b="0">
+                <a:solidFill>
+                  <a:srgbClr val="B8EDDB"/>
+                </a:solidFill>
+                <a:latin typeface="Arial"/>
+                <a:ea typeface="Arial"/>
+                <a:cs typeface="Arial"/>
+              </a:defRPr>
+            </a:lvl1pPr>
+            <a:lvl2pPr>
+              <a:defRPr sz="1650" b="0">
+                <a:solidFill>
+                  <a:srgbClr val="B8EDDB"/>
+                </a:solidFill>
+                <a:latin typeface="Arial"/>
+                <a:ea typeface="Arial"/>
+                <a:cs typeface="Arial"/>
+              </a:defRPr>
+            </a:lvl2pPr>
+            <a:lvl3pPr>
+              <a:defRPr sz="1650" b="0">
+                <a:solidFill>
+                  <a:srgbClr val="B8EDDB"/>
+                </a:solidFill>
+                <a:latin typeface="Arial"/>
+                <a:ea typeface="Arial"/>
+                <a:cs typeface="Arial"/>
+              </a:defRPr>
+            </a:lvl3pPr>
+            <a:lvl4pPr>
+              <a:defRPr sz="1650" b="0">
+                <a:solidFill>
+                  <a:srgbClr val="B8EDDB"/>
+                </a:solidFill>
+                <a:latin typeface="Arial"/>
+                <a:ea typeface="Arial"/>
+                <a:cs typeface="Arial"/>
+              </a:defRPr>
+            </a:lvl4pPr>
+            <a:lvl5pPr>
+              <a:defRPr sz="1650" b="0">
+                <a:solidFill>
+                  <a:srgbClr val="B8EDDB"/>
+                </a:solidFill>
+                <a:latin typeface="Arial"/>
+                <a:ea typeface="Arial"/>
+                <a:cs typeface="Arial"/>
+              </a:defRPr>
+            </a:lvl5pPr>
+            <a:lvl6pPr>
+              <a:defRPr sz="1650" b="0">
+                <a:solidFill>
+                  <a:srgbClr val="B8EDDB"/>
+                </a:solidFill>
+                <a:latin typeface="Arial"/>
+                <a:ea typeface="Arial"/>
+                <a:cs typeface="Arial"/>
+              </a:defRPr>
+            </a:lvl6pPr>
+            <a:lvl7pPr>
+              <a:defRPr sz="1650" b="0">
+                <a:solidFill>
+                  <a:srgbClr val="B8EDDB"/>
+                </a:solidFill>
+                <a:latin typeface="Arial"/>
+                <a:ea typeface="Arial"/>
+                <a:cs typeface="Arial"/>
+              </a:defRPr>
+            </a:lvl7pPr>
+            <a:lvl8pPr>
+              <a:defRPr sz="1650" b="0">
+                <a:solidFill>
+                  <a:srgbClr val="B8EDDB"/>
+                </a:solidFill>
+                <a:latin typeface="Arial"/>
+                <a:ea typeface="Arial"/>
+                <a:cs typeface="Arial"/>
+              </a:defRPr>
+            </a:lvl8pPr>
+            <a:lvl9pPr>
+              <a:defRPr sz="1650" b="0">
+                <a:solidFill>
+                  <a:srgbClr val="B8EDDB"/>
+                </a:solidFill>
+                <a:latin typeface="Arial"/>
+                <a:ea typeface="Arial"/>
+                <a:cs typeface="Arial"/>
+              </a:defRPr>
+            </a:lvl9pPr>
+          </a:lstStyle>
+          <a:p xmlns:a="http://schemas.openxmlformats.org/drawingml/2006/main">
+            <a:pPr>
+              <a:defRPr sz="1650" b="0">
+                <a:solidFill>
+                  <a:srgbClr val="B8EDDB"/>
+                </a:solidFill>
+                <a:latin typeface="Arial"/>
+                <a:ea typeface="Arial"/>
+                <a:cs typeface="Arial"/>
+              </a:defRPr>
+            </a:pPr>
+            <a:r>
+              <a:rPr sz="1650" b="0">
+                <a:solidFill>
+                  <a:srgbClr val="B8EDDB"/>
+                </a:solidFill>
+                <a:latin typeface="Arial"/>
+                <a:ea typeface="Arial"/>
+                <a:cs typeface="Arial"/>
+              </a:rPr>
+              <a:t>Në server, me një veprim të sigurt mbi të dhënat. Telefoni mund të shfaqë informacion të vjetër. Sot vetëm e kuptojmë kufirin; nuk ndërtojmë rezervime.</a:t>
             </a:r>
           </a:p>
         </p:txBody>
@@ -34013,7 +35044,7 @@
     </p:spTree>
     <p:extLst>
       <p:ext uri="{BB962C8B-B14F-4D97-AF65-F5344CB8AC3E}">
-        <p14:creationId xmlns:p14="http://schemas.microsoft.com/office/powerpoint/2010/main" val="325109193"/>
+        <p14:creationId xmlns:p14="http://schemas.microsoft.com/office/powerpoint/2010/main" val="1901303896"/>
       </p:ext>
     </p:extLst>
   </p:cSld>
@@ -34041,10 +35072,10 @@
       </p:grpSpPr>
       <p:sp>
         <p:nvSpPr>
-          <p:cNvPr id="13" name="">
+          <p:cNvPr id="16" name="">
             <a:extLst xmlns:a="http://schemas.openxmlformats.org/drawingml/2006/main">
               <a:ext uri="{FF2B5EF4-FFF2-40B4-BE49-F238E27FC236}">
-                <a16:creationId xmlns:a16="http://schemas.microsoft.com/office/drawing/2014/main" id="{A6E0114F-18AC-41A4-A360-354D816D732A}"/>
+                <a16:creationId xmlns:a16="http://schemas.microsoft.com/office/drawing/2014/main" id="{E73CC555-95C7-4B33-9877-A7A38748E64A}"/>
               </a:ext>
             </a:extLst>
           </p:cNvPr>
@@ -34202,7 +35233,7 @@
           <p:cNvPr id="2" name="">
             <a:extLst xmlns:a="http://schemas.openxmlformats.org/drawingml/2006/main">
               <a:ext uri="{FF2B5EF4-FFF2-40B4-BE49-F238E27FC236}">
-                <a16:creationId xmlns:a16="http://schemas.microsoft.com/office/drawing/2014/main" id="{8CD1EAE8-F628-4C95-A40C-5291B813AFE0}"/>
+                <a16:creationId xmlns:a16="http://schemas.microsoft.com/office/drawing/2014/main" id="{F20A9A27-2C78-40B7-B66A-32D27895A192}"/>
               </a:ext>
             </a:extLst>
           </p:cNvPr>
@@ -34360,7 +35391,7 @@
           <p:cNvPr id="3" name="">
             <a:extLst xmlns:a="http://schemas.openxmlformats.org/drawingml/2006/main">
               <a:ext uri="{FF2B5EF4-FFF2-40B4-BE49-F238E27FC236}">
-                <a16:creationId xmlns:a16="http://schemas.microsoft.com/office/drawing/2014/main" id="{9CB763B9-F853-41A3-9740-9E2520AD616E}"/>
+                <a16:creationId xmlns:a16="http://schemas.microsoft.com/office/drawing/2014/main" id="{B45D9B48-725D-4C07-9277-805CB99D4E3B}"/>
               </a:ext>
             </a:extLst>
           </p:cNvPr>
@@ -34508,7 +35539,7 @@
                 <a:ea typeface="Arial"/>
                 <a:cs typeface="Arial"/>
               </a:rPr>
-              <a:t>Shpjegimi që tregon kuptim</a:t>
+              <a:t>I njëjti mendim te një biznes tjetër</a:t>
             </a:r>
           </a:p>
         </p:txBody>
@@ -34518,7 +35549,7 @@
           <p:cNvPr id="4" name="">
             <a:extLst xmlns:a="http://schemas.openxmlformats.org/drawingml/2006/main">
               <a:ext uri="{FF2B5EF4-FFF2-40B4-BE49-F238E27FC236}">
-                <a16:creationId xmlns:a16="http://schemas.microsoft.com/office/drawing/2014/main" id="{ED34AF37-1C83-4F3C-AF21-8C8F3E50BF01}"/>
+                <a16:creationId xmlns:a16="http://schemas.microsoft.com/office/drawing/2014/main" id="{6DE13786-A258-40C5-895A-A9D70C340B4B}"/>
               </a:ext>
             </a:extLst>
           </p:cNvPr>
@@ -34528,7 +35559,7 @@
           <p:nvPr/>
         </p:nvPicPr>
         <p:blipFill>
-          <a:blip xmlns:r="http://schemas.openxmlformats.org/officeDocument/2006/relationships" xmlns:a="http://schemas.openxmlformats.org/drawingml/2006/main" r:embed="R08cbb01183dc4fae"/>
+          <a:blip xmlns:r="http://schemas.openxmlformats.org/officeDocument/2006/relationships" xmlns:a="http://schemas.openxmlformats.org/drawingml/2006/main" r:embed="R5136ecc228b4466f"/>
           <a:stretch xmlns:a="http://schemas.openxmlformats.org/drawingml/2006/main"/>
         </p:blipFill>
         <p:spPr>
@@ -34546,7 +35577,7 @@
           <p:cNvPr id="5" name="">
             <a:extLst xmlns:a="http://schemas.openxmlformats.org/drawingml/2006/main">
               <a:ext uri="{FF2B5EF4-FFF2-40B4-BE49-F238E27FC236}">
-                <a16:creationId xmlns:a16="http://schemas.microsoft.com/office/drawing/2014/main" id="{368BB63E-72CD-44A9-AD4C-1EDDEB2C4F23}"/>
+                <a16:creationId xmlns:a16="http://schemas.microsoft.com/office/drawing/2014/main" id="{F45DD7A6-B73A-4108-AC33-5869D0F08C14}"/>
               </a:ext>
             </a:extLst>
           </p:cNvPr>
@@ -34558,7 +35589,7 @@
         <p:spPr>
           <a:xfrm xmlns:a="http://schemas.openxmlformats.org/drawingml/2006/main">
             <a:off x="609600" y="2667000"/>
-            <a:ext cx="5295900" cy="495300"/>
+            <a:ext cx="3409950" cy="495300"/>
           </a:xfrm>
           <a:prstGeom xmlns:a="http://schemas.openxmlformats.org/drawingml/2006/main" prst="rect">
             <a:avLst/>
@@ -34694,7 +35725,7 @@
                 <a:ea typeface="Arial"/>
                 <a:cs typeface="Arial"/>
               </a:rPr>
-              <a:t>Pse?</a:t>
+              <a:t>Udhëtim</a:t>
             </a:r>
           </a:p>
         </p:txBody>
@@ -34704,7 +35735,7 @@
           <p:cNvPr id="6" name="">
             <a:extLst xmlns:a="http://schemas.openxmlformats.org/drawingml/2006/main">
               <a:ext uri="{FF2B5EF4-FFF2-40B4-BE49-F238E27FC236}">
-                <a16:creationId xmlns:a16="http://schemas.microsoft.com/office/drawing/2014/main" id="{B95C7591-4691-4FA6-803F-CA19652DC0E9}"/>
+                <a16:creationId xmlns:a16="http://schemas.microsoft.com/office/drawing/2014/main" id="{CA02FC0F-4FDF-4075-97A4-8223B1EAD135}"/>
               </a:ext>
             </a:extLst>
           </p:cNvPr>
@@ -34716,7 +35747,7 @@
         <p:spPr>
           <a:xfrm xmlns:a="http://schemas.openxmlformats.org/drawingml/2006/main">
             <a:off x="609600" y="3219450"/>
-            <a:ext cx="5295900" cy="571500"/>
+            <a:ext cx="3409950" cy="571500"/>
           </a:xfrm>
           <a:prstGeom xmlns:a="http://schemas.openxmlformats.org/drawingml/2006/main" prst="rect">
             <a:avLst/>
@@ -34852,7 +35883,7 @@
                 <a:ea typeface="Arial"/>
                 <a:cs typeface="Arial"/>
               </a:rPr>
-              <a:t>Shpjego arsyen</a:t>
+              <a:t>ID i udhëtimit</a:t>
             </a:r>
           </a:p>
         </p:txBody>
@@ -34862,7 +35893,7 @@
           <p:cNvPr id="7" name="">
             <a:extLst xmlns:a="http://schemas.openxmlformats.org/drawingml/2006/main">
               <a:ext uri="{FF2B5EF4-FFF2-40B4-BE49-F238E27FC236}">
-                <a16:creationId xmlns:a16="http://schemas.microsoft.com/office/drawing/2014/main" id="{C28F453E-6C0B-4CDF-80DA-D603E06E5529}"/>
+                <a16:creationId xmlns:a16="http://schemas.microsoft.com/office/drawing/2014/main" id="{28A5AD23-A96D-4EF1-92B2-7634DE61C833}"/>
               </a:ext>
             </a:extLst>
           </p:cNvPr>
@@ -34872,12 +35903,12 @@
           <p:nvPr/>
         </p:nvPicPr>
         <p:blipFill>
-          <a:blip xmlns:r="http://schemas.openxmlformats.org/officeDocument/2006/relationships" xmlns:a="http://schemas.openxmlformats.org/drawingml/2006/main" r:embed="R3aca900e48e44132"/>
+          <a:blip xmlns:r="http://schemas.openxmlformats.org/officeDocument/2006/relationships" xmlns:a="http://schemas.openxmlformats.org/drawingml/2006/main" r:embed="Rfab5b803a4fe431f"/>
           <a:stretch xmlns:a="http://schemas.openxmlformats.org/drawingml/2006/main"/>
         </p:blipFill>
         <p:spPr>
           <a:xfrm xmlns:a="http://schemas.openxmlformats.org/drawingml/2006/main">
-            <a:off x="6267450" y="1952625"/>
+            <a:off x="4381500" y="1952625"/>
             <a:ext cx="571500" cy="571500"/>
           </a:xfrm>
           <a:prstGeom xmlns:a="http://schemas.openxmlformats.org/drawingml/2006/main" prst="rect">
@@ -34890,7 +35921,7 @@
           <p:cNvPr id="8" name="">
             <a:extLst xmlns:a="http://schemas.openxmlformats.org/drawingml/2006/main">
               <a:ext uri="{FF2B5EF4-FFF2-40B4-BE49-F238E27FC236}">
-                <a16:creationId xmlns:a16="http://schemas.microsoft.com/office/drawing/2014/main" id="{666BB5BC-170F-4869-A980-EFA0AE1F831F}"/>
+                <a16:creationId xmlns:a16="http://schemas.microsoft.com/office/drawing/2014/main" id="{0604C997-8DA3-487C-A0BB-06C142A2C5AE}"/>
               </a:ext>
             </a:extLst>
           </p:cNvPr>
@@ -34901,8 +35932,8 @@
         </p:nvSpPr>
         <p:spPr>
           <a:xfrm xmlns:a="http://schemas.openxmlformats.org/drawingml/2006/main">
-            <a:off x="6267450" y="2667000"/>
-            <a:ext cx="5295900" cy="495300"/>
+            <a:off x="4381500" y="2667000"/>
+            <a:ext cx="3409950" cy="495300"/>
           </a:xfrm>
           <a:prstGeom xmlns:a="http://schemas.openxmlformats.org/drawingml/2006/main" prst="rect">
             <a:avLst/>
@@ -35038,7 +36069,7 @@
                 <a:ea typeface="Arial"/>
                 <a:cs typeface="Arial"/>
               </a:rPr>
-              <a:t>Po sikur?</a:t>
+              <a:t>Termin</a:t>
             </a:r>
           </a:p>
         </p:txBody>
@@ -35048,7 +36079,7 @@
           <p:cNvPr id="9" name="">
             <a:extLst xmlns:a="http://schemas.openxmlformats.org/drawingml/2006/main">
               <a:ext uri="{FF2B5EF4-FFF2-40B4-BE49-F238E27FC236}">
-                <a16:creationId xmlns:a16="http://schemas.microsoft.com/office/drawing/2014/main" id="{05EC70C5-B72D-46AD-A3D1-37B30C42A4C2}"/>
+                <a16:creationId xmlns:a16="http://schemas.microsoft.com/office/drawing/2014/main" id="{0D122D51-7592-47A9-AE92-AA277BA14920}"/>
               </a:ext>
             </a:extLst>
           </p:cNvPr>
@@ -35059,8 +36090,8 @@
         </p:nvSpPr>
         <p:spPr>
           <a:xfrm xmlns:a="http://schemas.openxmlformats.org/drawingml/2006/main">
-            <a:off x="6267450" y="3219450"/>
-            <a:ext cx="5295900" cy="571500"/>
+            <a:off x="4381500" y="3219450"/>
+            <a:ext cx="3409950" cy="571500"/>
           </a:xfrm>
           <a:prstGeom xmlns:a="http://schemas.openxmlformats.org/drawingml/2006/main" prst="rect">
             <a:avLst/>
@@ -35196,17 +36227,361 @@
                 <a:ea typeface="Arial"/>
                 <a:cs typeface="Arial"/>
               </a:rPr>
-              <a:t>Një hyrje e re</a:t>
+              <a:t>ID dhe koha e terminit</a:t>
+            </a:r>
+          </a:p>
+        </p:txBody>
+      </p:sp>
+      <p:pic>
+        <p:nvPicPr>
+          <p:cNvPr id="10" name="">
+            <a:extLst xmlns:a="http://schemas.openxmlformats.org/drawingml/2006/main">
+              <a:ext uri="{FF2B5EF4-FFF2-40B4-BE49-F238E27FC236}">
+                <a16:creationId xmlns:a16="http://schemas.microsoft.com/office/drawing/2014/main" id="{FD45A2D8-5E46-47C5-B13C-8B738845088C}"/>
+              </a:ext>
+            </a:extLst>
+          </p:cNvPr>
+          <p:cNvPicPr>
+            <a:picLocks xmlns:a="http://schemas.openxmlformats.org/drawingml/2006/main" noChangeAspect="1"/>
+          </p:cNvPicPr>
+          <p:nvPr/>
+        </p:nvPicPr>
+        <p:blipFill>
+          <a:blip xmlns:r="http://schemas.openxmlformats.org/officeDocument/2006/relationships" xmlns:a="http://schemas.openxmlformats.org/drawingml/2006/main" r:embed="R6663021717794fe8"/>
+          <a:stretch xmlns:a="http://schemas.openxmlformats.org/drawingml/2006/main"/>
+        </p:blipFill>
+        <p:spPr>
+          <a:xfrm xmlns:a="http://schemas.openxmlformats.org/drawingml/2006/main">
+            <a:off x="8153400" y="1952625"/>
+            <a:ext cx="571500" cy="571500"/>
+          </a:xfrm>
+          <a:prstGeom xmlns:a="http://schemas.openxmlformats.org/drawingml/2006/main" prst="rect">
+            <a:avLst/>
+          </a:prstGeom>
+        </p:spPr>
+      </p:pic>
+      <p:sp>
+        <p:nvSpPr>
+          <p:cNvPr id="11" name="">
+            <a:extLst xmlns:a="http://schemas.openxmlformats.org/drawingml/2006/main">
+              <a:ext uri="{FF2B5EF4-FFF2-40B4-BE49-F238E27FC236}">
+                <a16:creationId xmlns:a16="http://schemas.microsoft.com/office/drawing/2014/main" id="{BBE70337-10A5-421C-939C-D4B1FCE426F9}"/>
+              </a:ext>
+            </a:extLst>
+          </p:cNvPr>
+          <p:cNvSpPr>
+            <a:spLocks xmlns:a="http://schemas.openxmlformats.org/drawingml/2006/main" noGrp="1"/>
+          </p:cNvSpPr>
+          <p:nvPr/>
+        </p:nvSpPr>
+        <p:spPr>
+          <a:xfrm xmlns:a="http://schemas.openxmlformats.org/drawingml/2006/main">
+            <a:off x="8153400" y="2667000"/>
+            <a:ext cx="3409950" cy="495300"/>
+          </a:xfrm>
+          <a:prstGeom xmlns:a="http://schemas.openxmlformats.org/drawingml/2006/main" prst="rect">
+            <a:avLst/>
+          </a:prstGeom>
+          <a:noFill xmlns:a="http://schemas.openxmlformats.org/drawingml/2006/main"/>
+          <a:ln xmlns:a="http://schemas.openxmlformats.org/drawingml/2006/main" w="0">
+            <a:noFill/>
+          </a:ln>
+        </p:spPr>
+        <p:txBody>
+          <a:bodyPr xmlns:a="http://schemas.openxmlformats.org/drawingml/2006/main">
+            <a:noAutofit/>
+          </a:bodyPr>
+          <a:lstStyle xmlns:a="http://schemas.openxmlformats.org/drawingml/2006/main">
+            <a:defPPr>
+              <a:defRPr sz="2025" b="1">
+                <a:solidFill>
+                  <a:srgbClr val="FFFFFF"/>
+                </a:solidFill>
+                <a:latin typeface="Arial"/>
+                <a:ea typeface="Arial"/>
+                <a:cs typeface="Arial"/>
+              </a:defRPr>
+            </a:defPPr>
+            <a:lvl1pPr>
+              <a:defRPr sz="2025" b="1">
+                <a:solidFill>
+                  <a:srgbClr val="FFFFFF"/>
+                </a:solidFill>
+                <a:latin typeface="Arial"/>
+                <a:ea typeface="Arial"/>
+                <a:cs typeface="Arial"/>
+              </a:defRPr>
+            </a:lvl1pPr>
+            <a:lvl2pPr>
+              <a:defRPr sz="2025" b="1">
+                <a:solidFill>
+                  <a:srgbClr val="FFFFFF"/>
+                </a:solidFill>
+                <a:latin typeface="Arial"/>
+                <a:ea typeface="Arial"/>
+                <a:cs typeface="Arial"/>
+              </a:defRPr>
+            </a:lvl2pPr>
+            <a:lvl3pPr>
+              <a:defRPr sz="2025" b="1">
+                <a:solidFill>
+                  <a:srgbClr val="FFFFFF"/>
+                </a:solidFill>
+                <a:latin typeface="Arial"/>
+                <a:ea typeface="Arial"/>
+                <a:cs typeface="Arial"/>
+              </a:defRPr>
+            </a:lvl3pPr>
+            <a:lvl4pPr>
+              <a:defRPr sz="2025" b="1">
+                <a:solidFill>
+                  <a:srgbClr val="FFFFFF"/>
+                </a:solidFill>
+                <a:latin typeface="Arial"/>
+                <a:ea typeface="Arial"/>
+                <a:cs typeface="Arial"/>
+              </a:defRPr>
+            </a:lvl4pPr>
+            <a:lvl5pPr>
+              <a:defRPr sz="2025" b="1">
+                <a:solidFill>
+                  <a:srgbClr val="FFFFFF"/>
+                </a:solidFill>
+                <a:latin typeface="Arial"/>
+                <a:ea typeface="Arial"/>
+                <a:cs typeface="Arial"/>
+              </a:defRPr>
+            </a:lvl5pPr>
+            <a:lvl6pPr>
+              <a:defRPr sz="2025" b="1">
+                <a:solidFill>
+                  <a:srgbClr val="FFFFFF"/>
+                </a:solidFill>
+                <a:latin typeface="Arial"/>
+                <a:ea typeface="Arial"/>
+                <a:cs typeface="Arial"/>
+              </a:defRPr>
+            </a:lvl6pPr>
+            <a:lvl7pPr>
+              <a:defRPr sz="2025" b="1">
+                <a:solidFill>
+                  <a:srgbClr val="FFFFFF"/>
+                </a:solidFill>
+                <a:latin typeface="Arial"/>
+                <a:ea typeface="Arial"/>
+                <a:cs typeface="Arial"/>
+              </a:defRPr>
+            </a:lvl7pPr>
+            <a:lvl8pPr>
+              <a:defRPr sz="2025" b="1">
+                <a:solidFill>
+                  <a:srgbClr val="FFFFFF"/>
+                </a:solidFill>
+                <a:latin typeface="Arial"/>
+                <a:ea typeface="Arial"/>
+                <a:cs typeface="Arial"/>
+              </a:defRPr>
+            </a:lvl8pPr>
+            <a:lvl9pPr>
+              <a:defRPr sz="2025" b="1">
+                <a:solidFill>
+                  <a:srgbClr val="FFFFFF"/>
+                </a:solidFill>
+                <a:latin typeface="Arial"/>
+                <a:ea typeface="Arial"/>
+                <a:cs typeface="Arial"/>
+              </a:defRPr>
+            </a:lvl9pPr>
+          </a:lstStyle>
+          <a:p xmlns:a="http://schemas.openxmlformats.org/drawingml/2006/main">
+            <a:pPr>
+              <a:defRPr sz="2025" b="1">
+                <a:solidFill>
+                  <a:srgbClr val="FFFFFF"/>
+                </a:solidFill>
+                <a:latin typeface="Arial"/>
+                <a:ea typeface="Arial"/>
+                <a:cs typeface="Arial"/>
+              </a:defRPr>
+            </a:pPr>
+            <a:r>
+              <a:rPr sz="2025" b="1">
+                <a:solidFill>
+                  <a:srgbClr val="FFFFFF"/>
+                </a:solidFill>
+                <a:latin typeface="Arial"/>
+                <a:ea typeface="Arial"/>
+                <a:cs typeface="Arial"/>
+              </a:rPr>
+              <a:t>Porosi</a:t>
             </a:r>
           </a:p>
         </p:txBody>
       </p:sp>
       <p:sp>
         <p:nvSpPr>
-          <p:cNvPr id="10" name="">
+          <p:cNvPr id="12" name="">
             <a:extLst xmlns:a="http://schemas.openxmlformats.org/drawingml/2006/main">
               <a:ext uri="{FF2B5EF4-FFF2-40B4-BE49-F238E27FC236}">
-                <a16:creationId xmlns:a16="http://schemas.microsoft.com/office/drawing/2014/main" id="{D55779A0-B85D-413D-B12E-5C34DF0389AF}"/>
+                <a16:creationId xmlns:a16="http://schemas.microsoft.com/office/drawing/2014/main" id="{E51CB5AA-DF97-4922-8678-AE5932D72048}"/>
+              </a:ext>
+            </a:extLst>
+          </p:cNvPr>
+          <p:cNvSpPr>
+            <a:spLocks xmlns:a="http://schemas.openxmlformats.org/drawingml/2006/main" noGrp="1"/>
+          </p:cNvSpPr>
+          <p:nvPr/>
+        </p:nvSpPr>
+        <p:spPr>
+          <a:xfrm xmlns:a="http://schemas.openxmlformats.org/drawingml/2006/main">
+            <a:off x="8153400" y="3219450"/>
+            <a:ext cx="3409950" cy="571500"/>
+          </a:xfrm>
+          <a:prstGeom xmlns:a="http://schemas.openxmlformats.org/drawingml/2006/main" prst="rect">
+            <a:avLst/>
+          </a:prstGeom>
+          <a:noFill xmlns:a="http://schemas.openxmlformats.org/drawingml/2006/main"/>
+          <a:ln xmlns:a="http://schemas.openxmlformats.org/drawingml/2006/main" w="0">
+            <a:noFill/>
+          </a:ln>
+        </p:spPr>
+        <p:txBody>
+          <a:bodyPr xmlns:a="http://schemas.openxmlformats.org/drawingml/2006/main">
+            <a:noAutofit/>
+          </a:bodyPr>
+          <a:lstStyle xmlns:a="http://schemas.openxmlformats.org/drawingml/2006/main">
+            <a:defPPr>
+              <a:defRPr sz="1650" b="0">
+                <a:solidFill>
+                  <a:srgbClr val="C8D3E6"/>
+                </a:solidFill>
+                <a:latin typeface="Arial"/>
+                <a:ea typeface="Arial"/>
+                <a:cs typeface="Arial"/>
+              </a:defRPr>
+            </a:defPPr>
+            <a:lvl1pPr>
+              <a:defRPr sz="1650" b="0">
+                <a:solidFill>
+                  <a:srgbClr val="C8D3E6"/>
+                </a:solidFill>
+                <a:latin typeface="Arial"/>
+                <a:ea typeface="Arial"/>
+                <a:cs typeface="Arial"/>
+              </a:defRPr>
+            </a:lvl1pPr>
+            <a:lvl2pPr>
+              <a:defRPr sz="1650" b="0">
+                <a:solidFill>
+                  <a:srgbClr val="C8D3E6"/>
+                </a:solidFill>
+                <a:latin typeface="Arial"/>
+                <a:ea typeface="Arial"/>
+                <a:cs typeface="Arial"/>
+              </a:defRPr>
+            </a:lvl2pPr>
+            <a:lvl3pPr>
+              <a:defRPr sz="1650" b="0">
+                <a:solidFill>
+                  <a:srgbClr val="C8D3E6"/>
+                </a:solidFill>
+                <a:latin typeface="Arial"/>
+                <a:ea typeface="Arial"/>
+                <a:cs typeface="Arial"/>
+              </a:defRPr>
+            </a:lvl3pPr>
+            <a:lvl4pPr>
+              <a:defRPr sz="1650" b="0">
+                <a:solidFill>
+                  <a:srgbClr val="C8D3E6"/>
+                </a:solidFill>
+                <a:latin typeface="Arial"/>
+                <a:ea typeface="Arial"/>
+                <a:cs typeface="Arial"/>
+              </a:defRPr>
+            </a:lvl4pPr>
+            <a:lvl5pPr>
+              <a:defRPr sz="1650" b="0">
+                <a:solidFill>
+                  <a:srgbClr val="C8D3E6"/>
+                </a:solidFill>
+                <a:latin typeface="Arial"/>
+                <a:ea typeface="Arial"/>
+                <a:cs typeface="Arial"/>
+              </a:defRPr>
+            </a:lvl5pPr>
+            <a:lvl6pPr>
+              <a:defRPr sz="1650" b="0">
+                <a:solidFill>
+                  <a:srgbClr val="C8D3E6"/>
+                </a:solidFill>
+                <a:latin typeface="Arial"/>
+                <a:ea typeface="Arial"/>
+                <a:cs typeface="Arial"/>
+              </a:defRPr>
+            </a:lvl6pPr>
+            <a:lvl7pPr>
+              <a:defRPr sz="1650" b="0">
+                <a:solidFill>
+                  <a:srgbClr val="C8D3E6"/>
+                </a:solidFill>
+                <a:latin typeface="Arial"/>
+                <a:ea typeface="Arial"/>
+                <a:cs typeface="Arial"/>
+              </a:defRPr>
+            </a:lvl7pPr>
+            <a:lvl8pPr>
+              <a:defRPr sz="1650" b="0">
+                <a:solidFill>
+                  <a:srgbClr val="C8D3E6"/>
+                </a:solidFill>
+                <a:latin typeface="Arial"/>
+                <a:ea typeface="Arial"/>
+                <a:cs typeface="Arial"/>
+              </a:defRPr>
+            </a:lvl8pPr>
+            <a:lvl9pPr>
+              <a:defRPr sz="1650" b="0">
+                <a:solidFill>
+                  <a:srgbClr val="C8D3E6"/>
+                </a:solidFill>
+                <a:latin typeface="Arial"/>
+                <a:ea typeface="Arial"/>
+                <a:cs typeface="Arial"/>
+              </a:defRPr>
+            </a:lvl9pPr>
+          </a:lstStyle>
+          <a:p xmlns:a="http://schemas.openxmlformats.org/drawingml/2006/main">
+            <a:pPr>
+              <a:defRPr sz="1650" b="0">
+                <a:solidFill>
+                  <a:srgbClr val="C8D3E6"/>
+                </a:solidFill>
+                <a:latin typeface="Arial"/>
+                <a:ea typeface="Arial"/>
+                <a:cs typeface="Arial"/>
+              </a:defRPr>
+            </a:pPr>
+            <a:r>
+              <a:rPr sz="1650" b="0">
+                <a:solidFill>
+                  <a:srgbClr val="C8D3E6"/>
+                </a:solidFill>
+                <a:latin typeface="Arial"/>
+                <a:ea typeface="Arial"/>
+                <a:cs typeface="Arial"/>
+              </a:rPr>
+              <a:t>ID dhe gjendja e porosisë</a:t>
+            </a:r>
+          </a:p>
+        </p:txBody>
+      </p:sp>
+      <p:sp>
+        <p:nvSpPr>
+          <p:cNvPr id="13" name="">
+            <a:extLst xmlns:a="http://schemas.openxmlformats.org/drawingml/2006/main">
+              <a:ext uri="{FF2B5EF4-FFF2-40B4-BE49-F238E27FC236}">
+                <a16:creationId xmlns:a16="http://schemas.microsoft.com/office/drawing/2014/main" id="{9AC5DA80-6BA2-4F54-8174-51A51DDE7E67}"/>
               </a:ext>
             </a:extLst>
           </p:cNvPr>
@@ -35354,7 +36729,7 @@
                 <a:ea typeface="Arial"/>
                 <a:cs typeface="Arial"/>
               </a:rPr>
-              <a:t>Në çift: studenti tregon skedarin, shpjegon një kusht dhe parashikon rezultatin kur ndryshon hyrja.</a:t>
+              <a:t>RideShare: zgjidh udhëtimin. Salloni: zgjidh terminin. Restoranti: zgjidh porosinë.</a:t>
             </a:r>
           </a:p>
           <a:p xmlns:a="http://schemas.openxmlformats.org/drawingml/2006/main">
@@ -35382,17 +36757,17 @@
                 <a:ea typeface="Arial"/>
                 <a:cs typeface="Arial"/>
               </a:rPr>
-              <a:t>Kolegu ndryshon vetëm një vlerë. Studenti e provon dhe shpjegon ndryshimin pa përdorur AI në këtë kontroll.</a:t>
+              <a:t>Në secilin rast pyesim: cili objekt u zgjodh, kush lejohet të veprojë dhe a është veprimi vërtet i konfirmuar?</a:t>
             </a:r>
           </a:p>
         </p:txBody>
       </p:sp>
       <p:sp>
         <p:nvSpPr>
-          <p:cNvPr id="11" name="">
+          <p:cNvPr id="14" name="">
             <a:extLst xmlns:a="http://schemas.openxmlformats.org/drawingml/2006/main">
               <a:ext uri="{FF2B5EF4-FFF2-40B4-BE49-F238E27FC236}">
-                <a16:creationId xmlns:a16="http://schemas.microsoft.com/office/drawing/2014/main" id="{AA3362A1-98B7-49DF-B96C-C0A39B0CE8B0}"/>
+                <a16:creationId xmlns:a16="http://schemas.microsoft.com/office/drawing/2014/main" id="{D76DDC38-7D2E-4CAE-A379-ED716839511F}"/>
               </a:ext>
             </a:extLst>
           </p:cNvPr>
@@ -35540,17 +36915,17 @@
                 <a:ea typeface="Arial"/>
                 <a:cs typeface="Arial"/>
               </a:rPr>
-              <a:t>Çfarë bën profesori kur shpjegimi mbetet i paqartë?</a:t>
+              <a:t>Cili është premtimi që duhet të shpjegojë çdo aplikacion shërbimi?</a:t>
             </a:r>
           </a:p>
         </p:txBody>
       </p:sp>
       <p:sp>
         <p:nvSpPr>
-          <p:cNvPr id="12" name="">
+          <p:cNvPr id="15" name="">
             <a:extLst xmlns:a="http://schemas.openxmlformats.org/drawingml/2006/main">
               <a:ext uri="{FF2B5EF4-FFF2-40B4-BE49-F238E27FC236}">
-                <a16:creationId xmlns:a16="http://schemas.microsoft.com/office/drawing/2014/main" id="{8FDD373A-7329-4787-8FFA-FC37563B5130}"/>
+                <a16:creationId xmlns:a16="http://schemas.microsoft.com/office/drawing/2014/main" id="{434DCA84-40BE-4588-9F05-29C66064EC96}"/>
               </a:ext>
             </a:extLst>
           </p:cNvPr>
@@ -35698,7 +37073,7 @@
                 <a:ea typeface="Arial"/>
                 <a:cs typeface="Arial"/>
               </a:rPr>
-              <a:t>Kërkon një demonstrim të shkurtër me hyrje tjetër. Fotografia, raporti dhe kontrolli automatik nuk mjaftojnë për të vërtetuar kuptimin.</a:t>
+              <a:t>Çfarë veprimi ka përfunduar realisht dhe çfarë ende pret konfirmim. “U shfaq në ekran” nuk do të thotë domosdoshmërisht “u ruajt”.</a:t>
             </a:r>
           </a:p>
         </p:txBody>
@@ -35706,7 +37081,7 @@
     </p:spTree>
     <p:extLst>
       <p:ext uri="{BB962C8B-B14F-4D97-AF65-F5344CB8AC3E}">
-        <p14:creationId xmlns:p14="http://schemas.microsoft.com/office/powerpoint/2010/main" val="1508457178"/>
+        <p14:creationId xmlns:p14="http://schemas.microsoft.com/office/powerpoint/2010/main" val="220559869"/>
       </p:ext>
     </p:extLst>
   </p:cSld>
@@ -35734,10 +37109,10 @@
       </p:grpSpPr>
       <p:sp>
         <p:nvSpPr>
-          <p:cNvPr id="13" name="">
+          <p:cNvPr id="16" name="">
             <a:extLst xmlns:a="http://schemas.openxmlformats.org/drawingml/2006/main">
               <a:ext uri="{FF2B5EF4-FFF2-40B4-BE49-F238E27FC236}">
-                <a16:creationId xmlns:a16="http://schemas.microsoft.com/office/drawing/2014/main" id="{106DF912-42CB-4F0A-A36B-8BA25BCA325F}"/>
+                <a16:creationId xmlns:a16="http://schemas.microsoft.com/office/drawing/2014/main" id="{03F934C3-CFF8-4F51-B217-8C850F15B7E6}"/>
               </a:ext>
             </a:extLst>
           </p:cNvPr>
@@ -35895,7 +37270,7 @@
           <p:cNvPr id="2" name="">
             <a:extLst xmlns:a="http://schemas.openxmlformats.org/drawingml/2006/main">
               <a:ext uri="{FF2B5EF4-FFF2-40B4-BE49-F238E27FC236}">
-                <a16:creationId xmlns:a16="http://schemas.microsoft.com/office/drawing/2014/main" id="{43EF7301-06BE-4E6C-9B3F-571394C254BA}"/>
+                <a16:creationId xmlns:a16="http://schemas.microsoft.com/office/drawing/2014/main" id="{CB21180E-A0BF-4E68-B47C-FD076DB08B05}"/>
               </a:ext>
             </a:extLst>
           </p:cNvPr>
@@ -36053,7 +37428,7 @@
           <p:cNvPr id="3" name="">
             <a:extLst xmlns:a="http://schemas.openxmlformats.org/drawingml/2006/main">
               <a:ext uri="{FF2B5EF4-FFF2-40B4-BE49-F238E27FC236}">
-                <a16:creationId xmlns:a16="http://schemas.microsoft.com/office/drawing/2014/main" id="{B7ACD5CE-ECED-4928-9B23-657D13CCDB04}"/>
+                <a16:creationId xmlns:a16="http://schemas.microsoft.com/office/drawing/2014/main" id="{FA5BA3C2-B01A-4D92-AC50-83FB29C88475}"/>
               </a:ext>
             </a:extLst>
           </p:cNvPr>
@@ -36201,7 +37576,7 @@
                 <a:ea typeface="Arial"/>
                 <a:cs typeface="Arial"/>
               </a:rPr>
-              <a:t>A do t’ia tregoje një klienti?</a:t>
+              <a:t>Çfarë duhet të dish pas javës 7?</a:t>
             </a:r>
           </a:p>
         </p:txBody>
@@ -36211,7 +37586,7 @@
           <p:cNvPr id="4" name="">
             <a:extLst xmlns:a="http://schemas.openxmlformats.org/drawingml/2006/main">
               <a:ext uri="{FF2B5EF4-FFF2-40B4-BE49-F238E27FC236}">
-                <a16:creationId xmlns:a16="http://schemas.microsoft.com/office/drawing/2014/main" id="{B45F2D69-33DC-4CC7-8256-D6441779EC47}"/>
+                <a16:creationId xmlns:a16="http://schemas.microsoft.com/office/drawing/2014/main" id="{CF503EFC-69A5-473F-B56E-A0962C8BA780}"/>
               </a:ext>
             </a:extLst>
           </p:cNvPr>
@@ -36221,7 +37596,7 @@
           <p:nvPr/>
         </p:nvPicPr>
         <p:blipFill>
-          <a:blip xmlns:r="http://schemas.openxmlformats.org/officeDocument/2006/relationships" xmlns:a="http://schemas.openxmlformats.org/drawingml/2006/main" r:embed="R88b17e7163fb4c47"/>
+          <a:blip xmlns:r="http://schemas.openxmlformats.org/officeDocument/2006/relationships" xmlns:a="http://schemas.openxmlformats.org/drawingml/2006/main" r:embed="Rb33552fb35b449be"/>
           <a:stretch xmlns:a="http://schemas.openxmlformats.org/drawingml/2006/main"/>
         </p:blipFill>
         <p:spPr>
@@ -36239,7 +37614,7 @@
           <p:cNvPr id="5" name="">
             <a:extLst xmlns:a="http://schemas.openxmlformats.org/drawingml/2006/main">
               <a:ext uri="{FF2B5EF4-FFF2-40B4-BE49-F238E27FC236}">
-                <a16:creationId xmlns:a16="http://schemas.microsoft.com/office/drawing/2014/main" id="{BF3048F9-4A36-443A-82DB-30CAE6675266}"/>
+                <a16:creationId xmlns:a16="http://schemas.microsoft.com/office/drawing/2014/main" id="{A99F3AEC-A5CA-42DE-B596-035EDFBE9AC4}"/>
               </a:ext>
             </a:extLst>
           </p:cNvPr>
@@ -36251,7 +37626,7 @@
         <p:spPr>
           <a:xfrm xmlns:a="http://schemas.openxmlformats.org/drawingml/2006/main">
             <a:off x="609600" y="2667000"/>
-            <a:ext cx="5295900" cy="495300"/>
+            <a:ext cx="3409950" cy="495300"/>
           </a:xfrm>
           <a:prstGeom xmlns:a="http://schemas.openxmlformats.org/drawingml/2006/main" prst="rect">
             <a:avLst/>
@@ -36387,7 +37762,7 @@
                 <a:ea typeface="Arial"/>
                 <a:cs typeface="Arial"/>
               </a:rPr>
-              <a:t>Demonstrimi</a:t>
+              <a:t>Lidhe rrjedhën</a:t>
             </a:r>
           </a:p>
         </p:txBody>
@@ -36397,7 +37772,7 @@
           <p:cNvPr id="6" name="">
             <a:extLst xmlns:a="http://schemas.openxmlformats.org/drawingml/2006/main">
               <a:ext uri="{FF2B5EF4-FFF2-40B4-BE49-F238E27FC236}">
-                <a16:creationId xmlns:a16="http://schemas.microsoft.com/office/drawing/2014/main" id="{A5FBA39D-0B7C-495B-95CC-F2B6F4A130DC}"/>
+                <a16:creationId xmlns:a16="http://schemas.microsoft.com/office/drawing/2014/main" id="{AE72181F-6497-4C9F-B840-1A8A4CE5F31A}"/>
               </a:ext>
             </a:extLst>
           </p:cNvPr>
@@ -36409,7 +37784,7 @@
         <p:spPr>
           <a:xfrm xmlns:a="http://schemas.openxmlformats.org/drawingml/2006/main">
             <a:off x="609600" y="3219450"/>
-            <a:ext cx="5295900" cy="571500"/>
+            <a:ext cx="3409950" cy="571500"/>
           </a:xfrm>
           <a:prstGeom xmlns:a="http://schemas.openxmlformats.org/drawingml/2006/main" prst="rect">
             <a:avLst/>
@@ -36545,7 +37920,7 @@
                 <a:ea typeface="Arial"/>
                 <a:cs typeface="Arial"/>
               </a:rPr>
-              <a:t>Veprim dhe rezultat</a:t>
+              <a:t>Cila pjesë i shërben përdoruesit?</a:t>
             </a:r>
           </a:p>
         </p:txBody>
@@ -36555,7 +37930,7 @@
           <p:cNvPr id="7" name="">
             <a:extLst xmlns:a="http://schemas.openxmlformats.org/drawingml/2006/main">
               <a:ext uri="{FF2B5EF4-FFF2-40B4-BE49-F238E27FC236}">
-                <a16:creationId xmlns:a16="http://schemas.microsoft.com/office/drawing/2014/main" id="{8FE9090B-7CB4-41D3-A9AF-EE9C7DC6B819}"/>
+                <a16:creationId xmlns:a16="http://schemas.microsoft.com/office/drawing/2014/main" id="{87F7D011-1623-460C-8768-A9A621485BA2}"/>
               </a:ext>
             </a:extLst>
           </p:cNvPr>
@@ -36565,12 +37940,12 @@
           <p:nvPr/>
         </p:nvPicPr>
         <p:blipFill>
-          <a:blip xmlns:r="http://schemas.openxmlformats.org/officeDocument/2006/relationships" xmlns:a="http://schemas.openxmlformats.org/drawingml/2006/main" r:embed="Re6dcc1da7eab48b1"/>
+          <a:blip xmlns:r="http://schemas.openxmlformats.org/officeDocument/2006/relationships" xmlns:a="http://schemas.openxmlformats.org/drawingml/2006/main" r:embed="Rcc5c30313f574271"/>
           <a:stretch xmlns:a="http://schemas.openxmlformats.org/drawingml/2006/main"/>
         </p:blipFill>
         <p:spPr>
           <a:xfrm xmlns:a="http://schemas.openxmlformats.org/drawingml/2006/main">
-            <a:off x="6267450" y="1952625"/>
+            <a:off x="4381500" y="1952625"/>
             <a:ext cx="571500" cy="571500"/>
           </a:xfrm>
           <a:prstGeom xmlns:a="http://schemas.openxmlformats.org/drawingml/2006/main" prst="rect">
@@ -36583,7 +37958,7 @@
           <p:cNvPr id="8" name="">
             <a:extLst xmlns:a="http://schemas.openxmlformats.org/drawingml/2006/main">
               <a:ext uri="{FF2B5EF4-FFF2-40B4-BE49-F238E27FC236}">
-                <a16:creationId xmlns:a16="http://schemas.microsoft.com/office/drawing/2014/main" id="{E9816B60-C9E8-4114-8AC4-EA7C772AEF4B}"/>
+                <a16:creationId xmlns:a16="http://schemas.microsoft.com/office/drawing/2014/main" id="{1B894F88-9E76-4474-8CBE-D341603E026F}"/>
               </a:ext>
             </a:extLst>
           </p:cNvPr>
@@ -36594,8 +37969,8 @@
         </p:nvSpPr>
         <p:spPr>
           <a:xfrm xmlns:a="http://schemas.openxmlformats.org/drawingml/2006/main">
-            <a:off x="6267450" y="2667000"/>
-            <a:ext cx="5295900" cy="495300"/>
+            <a:off x="4381500" y="2667000"/>
+            <a:ext cx="3409950" cy="495300"/>
           </a:xfrm>
           <a:prstGeom xmlns:a="http://schemas.openxmlformats.org/drawingml/2006/main" prst="rect">
             <a:avLst/>
@@ -36731,7 +38106,7 @@
                 <a:ea typeface="Arial"/>
                 <a:cs typeface="Arial"/>
               </a:rPr>
-              <a:t>Biznesi yt</a:t>
+              <a:t>Shpjego problemin</a:t>
             </a:r>
           </a:p>
         </p:txBody>
@@ -36741,7 +38116,7 @@
           <p:cNvPr id="9" name="">
             <a:extLst xmlns:a="http://schemas.openxmlformats.org/drawingml/2006/main">
               <a:ext uri="{FF2B5EF4-FFF2-40B4-BE49-F238E27FC236}">
-                <a16:creationId xmlns:a16="http://schemas.microsoft.com/office/drawing/2014/main" id="{3DF4EF4A-D25E-4781-A87D-BC40A0A646F7}"/>
+                <a16:creationId xmlns:a16="http://schemas.microsoft.com/office/drawing/2014/main" id="{3459DE36-E36C-4B0F-9439-8F14107DF01C}"/>
               </a:ext>
             </a:extLst>
           </p:cNvPr>
@@ -36752,8 +38127,8 @@
         </p:nvSpPr>
         <p:spPr>
           <a:xfrm xmlns:a="http://schemas.openxmlformats.org/drawingml/2006/main">
-            <a:off x="6267450" y="3219450"/>
-            <a:ext cx="5295900" cy="571500"/>
+            <a:off x="4381500" y="3219450"/>
+            <a:ext cx="3409950" cy="571500"/>
           </a:xfrm>
           <a:prstGeom xmlns:a="http://schemas.openxmlformats.org/drawingml/2006/main" prst="rect">
             <a:avLst/>
@@ -36889,17 +38264,361 @@
                 <a:ea typeface="Arial"/>
                 <a:cs typeface="Arial"/>
               </a:rPr>
-              <a:t>I njëjti mendim, problem tjetër</a:t>
+              <a:t>Çfarë prove mbështet shkakun?</a:t>
+            </a:r>
+          </a:p>
+        </p:txBody>
+      </p:sp>
+      <p:pic>
+        <p:nvPicPr>
+          <p:cNvPr id="10" name="">
+            <a:extLst xmlns:a="http://schemas.openxmlformats.org/drawingml/2006/main">
+              <a:ext uri="{FF2B5EF4-FFF2-40B4-BE49-F238E27FC236}">
+                <a16:creationId xmlns:a16="http://schemas.microsoft.com/office/drawing/2014/main" id="{5404A4D2-8A39-4A17-B5E3-824921DCCEA7}"/>
+              </a:ext>
+            </a:extLst>
+          </p:cNvPr>
+          <p:cNvPicPr>
+            <a:picLocks xmlns:a="http://schemas.openxmlformats.org/drawingml/2006/main" noChangeAspect="1"/>
+          </p:cNvPicPr>
+          <p:nvPr/>
+        </p:nvPicPr>
+        <p:blipFill>
+          <a:blip xmlns:r="http://schemas.openxmlformats.org/officeDocument/2006/relationships" xmlns:a="http://schemas.openxmlformats.org/drawingml/2006/main" r:embed="Rc1b464435abe434f"/>
+          <a:stretch xmlns:a="http://schemas.openxmlformats.org/drawingml/2006/main"/>
+        </p:blipFill>
+        <p:spPr>
+          <a:xfrm xmlns:a="http://schemas.openxmlformats.org/drawingml/2006/main">
+            <a:off x="8153400" y="1952625"/>
+            <a:ext cx="571500" cy="571500"/>
+          </a:xfrm>
+          <a:prstGeom xmlns:a="http://schemas.openxmlformats.org/drawingml/2006/main" prst="rect">
+            <a:avLst/>
+          </a:prstGeom>
+        </p:spPr>
+      </p:pic>
+      <p:sp>
+        <p:nvSpPr>
+          <p:cNvPr id="11" name="">
+            <a:extLst xmlns:a="http://schemas.openxmlformats.org/drawingml/2006/main">
+              <a:ext uri="{FF2B5EF4-FFF2-40B4-BE49-F238E27FC236}">
+                <a16:creationId xmlns:a16="http://schemas.microsoft.com/office/drawing/2014/main" id="{041DD733-9150-44C8-90FA-FB4E6201B38B}"/>
+              </a:ext>
+            </a:extLst>
+          </p:cNvPr>
+          <p:cNvSpPr>
+            <a:spLocks xmlns:a="http://schemas.openxmlformats.org/drawingml/2006/main" noGrp="1"/>
+          </p:cNvSpPr>
+          <p:nvPr/>
+        </p:nvSpPr>
+        <p:spPr>
+          <a:xfrm xmlns:a="http://schemas.openxmlformats.org/drawingml/2006/main">
+            <a:off x="8153400" y="2667000"/>
+            <a:ext cx="3409950" cy="495300"/>
+          </a:xfrm>
+          <a:prstGeom xmlns:a="http://schemas.openxmlformats.org/drawingml/2006/main" prst="rect">
+            <a:avLst/>
+          </a:prstGeom>
+          <a:noFill xmlns:a="http://schemas.openxmlformats.org/drawingml/2006/main"/>
+          <a:ln xmlns:a="http://schemas.openxmlformats.org/drawingml/2006/main" w="0">
+            <a:noFill/>
+          </a:ln>
+        </p:spPr>
+        <p:txBody>
+          <a:bodyPr xmlns:a="http://schemas.openxmlformats.org/drawingml/2006/main">
+            <a:noAutofit/>
+          </a:bodyPr>
+          <a:lstStyle xmlns:a="http://schemas.openxmlformats.org/drawingml/2006/main">
+            <a:defPPr>
+              <a:defRPr sz="2025" b="1">
+                <a:solidFill>
+                  <a:srgbClr val="FFFFFF"/>
+                </a:solidFill>
+                <a:latin typeface="Arial"/>
+                <a:ea typeface="Arial"/>
+                <a:cs typeface="Arial"/>
+              </a:defRPr>
+            </a:defPPr>
+            <a:lvl1pPr>
+              <a:defRPr sz="2025" b="1">
+                <a:solidFill>
+                  <a:srgbClr val="FFFFFF"/>
+                </a:solidFill>
+                <a:latin typeface="Arial"/>
+                <a:ea typeface="Arial"/>
+                <a:cs typeface="Arial"/>
+              </a:defRPr>
+            </a:lvl1pPr>
+            <a:lvl2pPr>
+              <a:defRPr sz="2025" b="1">
+                <a:solidFill>
+                  <a:srgbClr val="FFFFFF"/>
+                </a:solidFill>
+                <a:latin typeface="Arial"/>
+                <a:ea typeface="Arial"/>
+                <a:cs typeface="Arial"/>
+              </a:defRPr>
+            </a:lvl2pPr>
+            <a:lvl3pPr>
+              <a:defRPr sz="2025" b="1">
+                <a:solidFill>
+                  <a:srgbClr val="FFFFFF"/>
+                </a:solidFill>
+                <a:latin typeface="Arial"/>
+                <a:ea typeface="Arial"/>
+                <a:cs typeface="Arial"/>
+              </a:defRPr>
+            </a:lvl3pPr>
+            <a:lvl4pPr>
+              <a:defRPr sz="2025" b="1">
+                <a:solidFill>
+                  <a:srgbClr val="FFFFFF"/>
+                </a:solidFill>
+                <a:latin typeface="Arial"/>
+                <a:ea typeface="Arial"/>
+                <a:cs typeface="Arial"/>
+              </a:defRPr>
+            </a:lvl4pPr>
+            <a:lvl5pPr>
+              <a:defRPr sz="2025" b="1">
+                <a:solidFill>
+                  <a:srgbClr val="FFFFFF"/>
+                </a:solidFill>
+                <a:latin typeface="Arial"/>
+                <a:ea typeface="Arial"/>
+                <a:cs typeface="Arial"/>
+              </a:defRPr>
+            </a:lvl5pPr>
+            <a:lvl6pPr>
+              <a:defRPr sz="2025" b="1">
+                <a:solidFill>
+                  <a:srgbClr val="FFFFFF"/>
+                </a:solidFill>
+                <a:latin typeface="Arial"/>
+                <a:ea typeface="Arial"/>
+                <a:cs typeface="Arial"/>
+              </a:defRPr>
+            </a:lvl6pPr>
+            <a:lvl7pPr>
+              <a:defRPr sz="2025" b="1">
+                <a:solidFill>
+                  <a:srgbClr val="FFFFFF"/>
+                </a:solidFill>
+                <a:latin typeface="Arial"/>
+                <a:ea typeface="Arial"/>
+                <a:cs typeface="Arial"/>
+              </a:defRPr>
+            </a:lvl7pPr>
+            <a:lvl8pPr>
+              <a:defRPr sz="2025" b="1">
+                <a:solidFill>
+                  <a:srgbClr val="FFFFFF"/>
+                </a:solidFill>
+                <a:latin typeface="Arial"/>
+                <a:ea typeface="Arial"/>
+                <a:cs typeface="Arial"/>
+              </a:defRPr>
+            </a:lvl8pPr>
+            <a:lvl9pPr>
+              <a:defRPr sz="2025" b="1">
+                <a:solidFill>
+                  <a:srgbClr val="FFFFFF"/>
+                </a:solidFill>
+                <a:latin typeface="Arial"/>
+                <a:ea typeface="Arial"/>
+                <a:cs typeface="Arial"/>
+              </a:defRPr>
+            </a:lvl9pPr>
+          </a:lstStyle>
+          <a:p xmlns:a="http://schemas.openxmlformats.org/drawingml/2006/main">
+            <a:pPr>
+              <a:defRPr sz="2025" b="1">
+                <a:solidFill>
+                  <a:srgbClr val="FFFFFF"/>
+                </a:solidFill>
+                <a:latin typeface="Arial"/>
+                <a:ea typeface="Arial"/>
+                <a:cs typeface="Arial"/>
+              </a:defRPr>
+            </a:pPr>
+            <a:r>
+              <a:rPr sz="2025" b="1">
+                <a:solidFill>
+                  <a:srgbClr val="FFFFFF"/>
+                </a:solidFill>
+                <a:latin typeface="Arial"/>
+                <a:ea typeface="Arial"/>
+                <a:cs typeface="Arial"/>
+              </a:rPr>
+              <a:t>Thuaj kufirin</a:t>
             </a:r>
           </a:p>
         </p:txBody>
       </p:sp>
       <p:sp>
         <p:nvSpPr>
-          <p:cNvPr id="10" name="">
+          <p:cNvPr id="12" name="">
             <a:extLst xmlns:a="http://schemas.openxmlformats.org/drawingml/2006/main">
               <a:ext uri="{FF2B5EF4-FFF2-40B4-BE49-F238E27FC236}">
-                <a16:creationId xmlns:a16="http://schemas.microsoft.com/office/drawing/2014/main" id="{85E710F0-2122-4AB9-BE1C-4C89C5349228}"/>
+                <a16:creationId xmlns:a16="http://schemas.microsoft.com/office/drawing/2014/main" id="{EF4DDFF3-0FE9-431E-819F-500D56E5C51C}"/>
+              </a:ext>
+            </a:extLst>
+          </p:cNvPr>
+          <p:cNvSpPr>
+            <a:spLocks xmlns:a="http://schemas.openxmlformats.org/drawingml/2006/main" noGrp="1"/>
+          </p:cNvSpPr>
+          <p:nvPr/>
+        </p:nvSpPr>
+        <p:spPr>
+          <a:xfrm xmlns:a="http://schemas.openxmlformats.org/drawingml/2006/main">
+            <a:off x="8153400" y="3219450"/>
+            <a:ext cx="3409950" cy="571500"/>
+          </a:xfrm>
+          <a:prstGeom xmlns:a="http://schemas.openxmlformats.org/drawingml/2006/main" prst="rect">
+            <a:avLst/>
+          </a:prstGeom>
+          <a:noFill xmlns:a="http://schemas.openxmlformats.org/drawingml/2006/main"/>
+          <a:ln xmlns:a="http://schemas.openxmlformats.org/drawingml/2006/main" w="0">
+            <a:noFill/>
+          </a:ln>
+        </p:spPr>
+        <p:txBody>
+          <a:bodyPr xmlns:a="http://schemas.openxmlformats.org/drawingml/2006/main">
+            <a:noAutofit/>
+          </a:bodyPr>
+          <a:lstStyle xmlns:a="http://schemas.openxmlformats.org/drawingml/2006/main">
+            <a:defPPr>
+              <a:defRPr sz="1650" b="0">
+                <a:solidFill>
+                  <a:srgbClr val="C8D3E6"/>
+                </a:solidFill>
+                <a:latin typeface="Arial"/>
+                <a:ea typeface="Arial"/>
+                <a:cs typeface="Arial"/>
+              </a:defRPr>
+            </a:defPPr>
+            <a:lvl1pPr>
+              <a:defRPr sz="1650" b="0">
+                <a:solidFill>
+                  <a:srgbClr val="C8D3E6"/>
+                </a:solidFill>
+                <a:latin typeface="Arial"/>
+                <a:ea typeface="Arial"/>
+                <a:cs typeface="Arial"/>
+              </a:defRPr>
+            </a:lvl1pPr>
+            <a:lvl2pPr>
+              <a:defRPr sz="1650" b="0">
+                <a:solidFill>
+                  <a:srgbClr val="C8D3E6"/>
+                </a:solidFill>
+                <a:latin typeface="Arial"/>
+                <a:ea typeface="Arial"/>
+                <a:cs typeface="Arial"/>
+              </a:defRPr>
+            </a:lvl2pPr>
+            <a:lvl3pPr>
+              <a:defRPr sz="1650" b="0">
+                <a:solidFill>
+                  <a:srgbClr val="C8D3E6"/>
+                </a:solidFill>
+                <a:latin typeface="Arial"/>
+                <a:ea typeface="Arial"/>
+                <a:cs typeface="Arial"/>
+              </a:defRPr>
+            </a:lvl3pPr>
+            <a:lvl4pPr>
+              <a:defRPr sz="1650" b="0">
+                <a:solidFill>
+                  <a:srgbClr val="C8D3E6"/>
+                </a:solidFill>
+                <a:latin typeface="Arial"/>
+                <a:ea typeface="Arial"/>
+                <a:cs typeface="Arial"/>
+              </a:defRPr>
+            </a:lvl4pPr>
+            <a:lvl5pPr>
+              <a:defRPr sz="1650" b="0">
+                <a:solidFill>
+                  <a:srgbClr val="C8D3E6"/>
+                </a:solidFill>
+                <a:latin typeface="Arial"/>
+                <a:ea typeface="Arial"/>
+                <a:cs typeface="Arial"/>
+              </a:defRPr>
+            </a:lvl5pPr>
+            <a:lvl6pPr>
+              <a:defRPr sz="1650" b="0">
+                <a:solidFill>
+                  <a:srgbClr val="C8D3E6"/>
+                </a:solidFill>
+                <a:latin typeface="Arial"/>
+                <a:ea typeface="Arial"/>
+                <a:cs typeface="Arial"/>
+              </a:defRPr>
+            </a:lvl6pPr>
+            <a:lvl7pPr>
+              <a:defRPr sz="1650" b="0">
+                <a:solidFill>
+                  <a:srgbClr val="C8D3E6"/>
+                </a:solidFill>
+                <a:latin typeface="Arial"/>
+                <a:ea typeface="Arial"/>
+                <a:cs typeface="Arial"/>
+              </a:defRPr>
+            </a:lvl7pPr>
+            <a:lvl8pPr>
+              <a:defRPr sz="1650" b="0">
+                <a:solidFill>
+                  <a:srgbClr val="C8D3E6"/>
+                </a:solidFill>
+                <a:latin typeface="Arial"/>
+                <a:ea typeface="Arial"/>
+                <a:cs typeface="Arial"/>
+              </a:defRPr>
+            </a:lvl8pPr>
+            <a:lvl9pPr>
+              <a:defRPr sz="1650" b="0">
+                <a:solidFill>
+                  <a:srgbClr val="C8D3E6"/>
+                </a:solidFill>
+                <a:latin typeface="Arial"/>
+                <a:ea typeface="Arial"/>
+                <a:cs typeface="Arial"/>
+              </a:defRPr>
+            </a:lvl9pPr>
+          </a:lstStyle>
+          <a:p xmlns:a="http://schemas.openxmlformats.org/drawingml/2006/main">
+            <a:pPr>
+              <a:defRPr sz="1650" b="0">
+                <a:solidFill>
+                  <a:srgbClr val="C8D3E6"/>
+                </a:solidFill>
+                <a:latin typeface="Arial"/>
+                <a:ea typeface="Arial"/>
+                <a:cs typeface="Arial"/>
+              </a:defRPr>
+            </a:pPr>
+            <a:r>
+              <a:rPr sz="1650" b="0">
+                <a:solidFill>
+                  <a:srgbClr val="C8D3E6"/>
+                </a:solidFill>
+                <a:latin typeface="Arial"/>
+                <a:ea typeface="Arial"/>
+                <a:cs typeface="Arial"/>
+              </a:rPr>
+              <a:t>Çfarë mund të premtojë MVP-ja?</a:t>
+            </a:r>
+          </a:p>
+        </p:txBody>
+      </p:sp>
+      <p:sp>
+        <p:nvSpPr>
+          <p:cNvPr id="13" name="">
+            <a:extLst xmlns:a="http://schemas.openxmlformats.org/drawingml/2006/main">
+              <a:ext uri="{FF2B5EF4-FFF2-40B4-BE49-F238E27FC236}">
+                <a16:creationId xmlns:a16="http://schemas.microsoft.com/office/drawing/2014/main" id="{0A3B948C-A788-4224-91FD-392529B11CAA}"/>
               </a:ext>
             </a:extLst>
           </p:cNvPr>
@@ -37047,7 +38766,7 @@
                 <a:ea typeface="Arial"/>
                 <a:cs typeface="Arial"/>
               </a:rPr>
-              <a:t>Trego rrjedhën e Artës në 60 sekonda. Emërto një gjë që punon dhe një kufi që duhet ta dijë përdoruesi.</a:t>
+              <a:t>Shpjego rrugën lista → ID → detajet → veprimi. Dallo punën e telefonit, serverit dhe databazës.</a:t>
             </a:r>
           </a:p>
           <a:p xmlns:a="http://schemas.openxmlformats.org/drawingml/2006/main">
@@ -37075,17 +38794,17 @@
                 <a:ea typeface="Arial"/>
                 <a:cs typeface="Arial"/>
               </a:rPr>
-              <a:t>Te një biznes shërbimesh, e njëjta provë vlen për zgjedhjen e një termini ose dërgimin e një porosie.</a:t>
+              <a:t>Arsyeto një problem, zgjidh korrigjimin sipas pasojës dhe thuaj çfarë provojnë testet. Në laborator këtë do ta zbatosh në projektin tënd.</a:t>
             </a:r>
           </a:p>
         </p:txBody>
       </p:sp>
       <p:sp>
         <p:nvSpPr>
-          <p:cNvPr id="11" name="">
+          <p:cNvPr id="14" name="">
             <a:extLst xmlns:a="http://schemas.openxmlformats.org/drawingml/2006/main">
               <a:ext uri="{FF2B5EF4-FFF2-40B4-BE49-F238E27FC236}">
-                <a16:creationId xmlns:a16="http://schemas.microsoft.com/office/drawing/2014/main" id="{DFCF50EC-A0A0-48FA-BC35-E943D6F23C95}"/>
+                <a16:creationId xmlns:a16="http://schemas.microsoft.com/office/drawing/2014/main" id="{BBC23ABE-ADCD-4DAB-A668-40F5AAD0096B}"/>
               </a:ext>
             </a:extLst>
           </p:cNvPr>
@@ -37233,17 +38952,17 @@
                 <a:ea typeface="Arial"/>
                 <a:cs typeface="Arial"/>
               </a:rPr>
-              <a:t>Cilën provë do ta përsërisje para se t’ia jepje aplikacionin një përdoruesi?</a:t>
+              <a:t>Arta sheh 1 vend në kopjen e ruajtur. A e ka ajo të siguruar atë vend?</a:t>
             </a:r>
           </a:p>
         </p:txBody>
       </p:sp>
       <p:sp>
         <p:nvSpPr>
-          <p:cNvPr id="12" name="">
+          <p:cNvPr id="15" name="">
             <a:extLst xmlns:a="http://schemas.openxmlformats.org/drawingml/2006/main">
               <a:ext uri="{FF2B5EF4-FFF2-40B4-BE49-F238E27FC236}">
-                <a16:creationId xmlns:a16="http://schemas.microsoft.com/office/drawing/2014/main" id="{61BA1465-B440-4469-87B8-48CBB39043BC}"/>
+                <a16:creationId xmlns:a16="http://schemas.microsoft.com/office/drawing/2014/main" id="{4A42AAA4-AA40-44B2-944E-4041480AF4E4}"/>
               </a:ext>
             </a:extLst>
           </p:cNvPr>
@@ -37391,7 +39110,7 @@
                 <a:ea typeface="Arial"/>
                 <a:cs typeface="Arial"/>
               </a:rPr>
-              <a:t>Zgjidh një rast që mund ta mashtrojë përdoruesin dhe shpjego rezultatin e pritur. Në laborator do ta provosh në projektin tënd.</a:t>
+              <a:t>Jo. Kopja tregon të dhënën e ruajtur, jo vendin aktual. Pa të dhëna të reja dhe pa proces real konfirmimi, nuk premtojmë rezervim.</a:t>
             </a:r>
           </a:p>
         </p:txBody>
@@ -37399,7 +39118,7 @@
     </p:spTree>
     <p:extLst>
       <p:ext uri="{BB962C8B-B14F-4D97-AF65-F5344CB8AC3E}">
-        <p14:creationId xmlns:p14="http://schemas.microsoft.com/office/powerpoint/2010/main" val="395052729"/>
+        <p14:creationId xmlns:p14="http://schemas.microsoft.com/office/powerpoint/2010/main" val="1001811599"/>
       </p:ext>
     </p:extLst>
   </p:cSld>
@@ -37430,7 +39149,7 @@
           <p:cNvPr id="14" name="">
             <a:extLst xmlns:a="http://schemas.openxmlformats.org/drawingml/2006/main">
               <a:ext uri="{FF2B5EF4-FFF2-40B4-BE49-F238E27FC236}">
-                <a16:creationId xmlns:a16="http://schemas.microsoft.com/office/drawing/2014/main" id="{13EE2C4B-6D0A-4EF0-8184-EDEA84C3D95A}"/>
+                <a16:creationId xmlns:a16="http://schemas.microsoft.com/office/drawing/2014/main" id="{AECA32DF-45E0-4582-9FE7-5DEACF6E3FBD}"/>
               </a:ext>
             </a:extLst>
           </p:cNvPr>
@@ -37588,7 +39307,7 @@
           <p:cNvPr id="2" name="">
             <a:extLst xmlns:a="http://schemas.openxmlformats.org/drawingml/2006/main">
               <a:ext uri="{FF2B5EF4-FFF2-40B4-BE49-F238E27FC236}">
-                <a16:creationId xmlns:a16="http://schemas.microsoft.com/office/drawing/2014/main" id="{1B75409A-46CE-449F-A2BD-B6599164EC29}"/>
+                <a16:creationId xmlns:a16="http://schemas.microsoft.com/office/drawing/2014/main" id="{2297A00F-FA0F-47FC-A257-5A70F55A02AC}"/>
               </a:ext>
             </a:extLst>
           </p:cNvPr>
@@ -37746,7 +39465,7 @@
           <p:cNvPr id="3" name="">
             <a:extLst xmlns:a="http://schemas.openxmlformats.org/drawingml/2006/main">
               <a:ext uri="{FF2B5EF4-FFF2-40B4-BE49-F238E27FC236}">
-                <a16:creationId xmlns:a16="http://schemas.microsoft.com/office/drawing/2014/main" id="{22D4DDDE-1A24-4AC1-8A0B-5A6A532A9DC6}"/>
+                <a16:creationId xmlns:a16="http://schemas.microsoft.com/office/drawing/2014/main" id="{2CCEE3FB-9A9E-45FA-8F45-0503E1A89A32}"/>
               </a:ext>
             </a:extLst>
           </p:cNvPr>
@@ -37904,7 +39623,7 @@
           <p:cNvPr id="4" name="">
             <a:extLst xmlns:a="http://schemas.openxmlformats.org/drawingml/2006/main">
               <a:ext uri="{FF2B5EF4-FFF2-40B4-BE49-F238E27FC236}">
-                <a16:creationId xmlns:a16="http://schemas.microsoft.com/office/drawing/2014/main" id="{5906E136-D49B-4B1F-99B5-93839EB1BB0D}"/>
+                <a16:creationId xmlns:a16="http://schemas.microsoft.com/office/drawing/2014/main" id="{C40ABDB3-4A2A-4CAB-B8BC-24C385EA07B5}"/>
               </a:ext>
             </a:extLst>
           </p:cNvPr>
@@ -37914,7 +39633,7 @@
           <p:nvPr/>
         </p:nvPicPr>
         <p:blipFill>
-          <a:blip xmlns:r="http://schemas.openxmlformats.org/officeDocument/2006/relationships" xmlns:a="http://schemas.openxmlformats.org/drawingml/2006/main" r:embed="Rc61ad7b8648f4c04"/>
+          <a:blip xmlns:r="http://schemas.openxmlformats.org/officeDocument/2006/relationships" xmlns:a="http://schemas.openxmlformats.org/drawingml/2006/main" r:embed="R4449b9aa587149b8"/>
           <a:stretch xmlns:a="http://schemas.openxmlformats.org/drawingml/2006/main"/>
         </p:blipFill>
         <p:spPr>
@@ -37932,7 +39651,7 @@
           <p:cNvPr id="5" name="">
             <a:extLst xmlns:a="http://schemas.openxmlformats.org/drawingml/2006/main">
               <a:ext uri="{FF2B5EF4-FFF2-40B4-BE49-F238E27FC236}">
-                <a16:creationId xmlns:a16="http://schemas.microsoft.com/office/drawing/2014/main" id="{2E500FAC-1DE9-4BCA-8429-5327E8A82F48}"/>
+                <a16:creationId xmlns:a16="http://schemas.microsoft.com/office/drawing/2014/main" id="{4C78565A-8D23-4B80-B5E7-B4B49172DA3F}"/>
               </a:ext>
             </a:extLst>
           </p:cNvPr>
@@ -38090,7 +39809,7 @@
           <p:cNvPr id="6" name="">
             <a:extLst xmlns:a="http://schemas.openxmlformats.org/drawingml/2006/main">
               <a:ext uri="{FF2B5EF4-FFF2-40B4-BE49-F238E27FC236}">
-                <a16:creationId xmlns:a16="http://schemas.microsoft.com/office/drawing/2014/main" id="{F1E8F392-7B2E-4079-A9F9-DC31D1FBAD8A}"/>
+                <a16:creationId xmlns:a16="http://schemas.microsoft.com/office/drawing/2014/main" id="{5CFE0073-0F94-4831-89B4-ADC5C2EFE347}"/>
               </a:ext>
             </a:extLst>
           </p:cNvPr>
@@ -38248,7 +39967,7 @@
           <p:cNvPr id="7" name="">
             <a:extLst xmlns:a="http://schemas.openxmlformats.org/drawingml/2006/main">
               <a:ext uri="{FF2B5EF4-FFF2-40B4-BE49-F238E27FC236}">
-                <a16:creationId xmlns:a16="http://schemas.microsoft.com/office/drawing/2014/main" id="{2E501A0F-70C9-425C-94CF-E17A3097080A}"/>
+                <a16:creationId xmlns:a16="http://schemas.microsoft.com/office/drawing/2014/main" id="{8250A1B4-C950-42B7-A080-8E3096C73E89}"/>
               </a:ext>
             </a:extLst>
           </p:cNvPr>
@@ -38406,7 +40125,7 @@
           <p:cNvPr id="8" name="">
             <a:extLst xmlns:a="http://schemas.openxmlformats.org/drawingml/2006/main">
               <a:ext uri="{FF2B5EF4-FFF2-40B4-BE49-F238E27FC236}">
-                <a16:creationId xmlns:a16="http://schemas.microsoft.com/office/drawing/2014/main" id="{4C5C469E-8515-4B54-8EC4-EA9FC547D813}"/>
+                <a16:creationId xmlns:a16="http://schemas.microsoft.com/office/drawing/2014/main" id="{18549A45-B94A-43E0-BE24-2FFF4DBCDD5F}"/>
               </a:ext>
             </a:extLst>
           </p:cNvPr>
@@ -38564,7 +40283,7 @@
           <p:cNvPr id="9" name="">
             <a:extLst xmlns:a="http://schemas.openxmlformats.org/drawingml/2006/main">
               <a:ext uri="{FF2B5EF4-FFF2-40B4-BE49-F238E27FC236}">
-                <a16:creationId xmlns:a16="http://schemas.microsoft.com/office/drawing/2014/main" id="{1B810F4C-5D7D-474F-948D-1D70CDC0EC2F}"/>
+                <a16:creationId xmlns:a16="http://schemas.microsoft.com/office/drawing/2014/main" id="{C1035061-011E-4376-A896-BBF2D990EDFE}"/>
               </a:ext>
             </a:extLst>
           </p:cNvPr>
@@ -38722,7 +40441,7 @@
           <p:cNvPr id="10" name="">
             <a:extLst xmlns:a="http://schemas.openxmlformats.org/drawingml/2006/main">
               <a:ext uri="{FF2B5EF4-FFF2-40B4-BE49-F238E27FC236}">
-                <a16:creationId xmlns:a16="http://schemas.microsoft.com/office/drawing/2014/main" id="{2347EC54-07B2-496E-8935-6782FA7A78CD}"/>
+                <a16:creationId xmlns:a16="http://schemas.microsoft.com/office/drawing/2014/main" id="{58D80280-2907-465E-8B9D-1FA638A35311}"/>
               </a:ext>
             </a:extLst>
           </p:cNvPr>
@@ -38880,7 +40599,7 @@
           <p:cNvPr id="11" name="">
             <a:extLst xmlns:a="http://schemas.openxmlformats.org/drawingml/2006/main">
               <a:ext uri="{FF2B5EF4-FFF2-40B4-BE49-F238E27FC236}">
-                <a16:creationId xmlns:a16="http://schemas.microsoft.com/office/drawing/2014/main" id="{42BFAE99-8F45-4C81-B7D0-F6D0458BC538}"/>
+                <a16:creationId xmlns:a16="http://schemas.microsoft.com/office/drawing/2014/main" id="{65B1BCC4-24FA-4899-9DC0-6BA3C83A8D39}"/>
               </a:ext>
             </a:extLst>
           </p:cNvPr>
@@ -39038,7 +40757,7 @@
           <p:cNvPr id="12" name="">
             <a:extLst xmlns:a="http://schemas.openxmlformats.org/drawingml/2006/main">
               <a:ext uri="{FF2B5EF4-FFF2-40B4-BE49-F238E27FC236}">
-                <a16:creationId xmlns:a16="http://schemas.microsoft.com/office/drawing/2014/main" id="{FE321C42-804A-411C-B428-1795A08A0676}"/>
+                <a16:creationId xmlns:a16="http://schemas.microsoft.com/office/drawing/2014/main" id="{0547DBF0-06F5-4B7F-A02E-8879DEEC8595}"/>
               </a:ext>
             </a:extLst>
           </p:cNvPr>
@@ -39196,7 +40915,7 @@
           <p:cNvPr id="13" name="">
             <a:extLst xmlns:a="http://schemas.openxmlformats.org/drawingml/2006/main">
               <a:ext uri="{FF2B5EF4-FFF2-40B4-BE49-F238E27FC236}">
-                <a16:creationId xmlns:a16="http://schemas.microsoft.com/office/drawing/2014/main" id="{A64495F5-9370-4D31-AA75-B4E2FFAF1BCE}"/>
+                <a16:creationId xmlns:a16="http://schemas.microsoft.com/office/drawing/2014/main" id="{85B33E58-C1E7-4168-8C7A-2C1B8A058CA6}"/>
               </a:ext>
             </a:extLst>
           </p:cNvPr>
@@ -39352,7 +41071,7 @@
     </p:spTree>
     <p:extLst>
       <p:ext uri="{BB962C8B-B14F-4D97-AF65-F5344CB8AC3E}">
-        <p14:creationId xmlns:p14="http://schemas.microsoft.com/office/powerpoint/2010/main" val="1191950332"/>
+        <p14:creationId xmlns:p14="http://schemas.microsoft.com/office/powerpoint/2010/main" val="2129802835"/>
       </p:ext>
     </p:extLst>
   </p:cSld>
@@ -39383,7 +41102,7 @@
           <p:cNvPr id="14" name="">
             <a:extLst xmlns:a="http://schemas.openxmlformats.org/drawingml/2006/main">
               <a:ext uri="{FF2B5EF4-FFF2-40B4-BE49-F238E27FC236}">
-                <a16:creationId xmlns:a16="http://schemas.microsoft.com/office/drawing/2014/main" id="{FCB1498F-BCA8-4C4D-8D79-3713A2FDC412}"/>
+                <a16:creationId xmlns:a16="http://schemas.microsoft.com/office/drawing/2014/main" id="{44FD813C-B4F7-411D-BDD0-ADC91F056A86}"/>
               </a:ext>
             </a:extLst>
           </p:cNvPr>
@@ -39541,7 +41260,7 @@
           <p:cNvPr id="2" name="">
             <a:extLst xmlns:a="http://schemas.openxmlformats.org/drawingml/2006/main">
               <a:ext uri="{FF2B5EF4-FFF2-40B4-BE49-F238E27FC236}">
-                <a16:creationId xmlns:a16="http://schemas.microsoft.com/office/drawing/2014/main" id="{2FB8F0FC-7462-4B84-832B-71CC544AF471}"/>
+                <a16:creationId xmlns:a16="http://schemas.microsoft.com/office/drawing/2014/main" id="{ABD7F0A8-894B-42FC-92E4-9E971977D758}"/>
               </a:ext>
             </a:extLst>
           </p:cNvPr>
@@ -39699,7 +41418,7 @@
           <p:cNvPr id="3" name="">
             <a:extLst xmlns:a="http://schemas.openxmlformats.org/drawingml/2006/main">
               <a:ext uri="{FF2B5EF4-FFF2-40B4-BE49-F238E27FC236}">
-                <a16:creationId xmlns:a16="http://schemas.microsoft.com/office/drawing/2014/main" id="{AB385C34-2283-42FA-ADD5-BE20F200D1DB}"/>
+                <a16:creationId xmlns:a16="http://schemas.microsoft.com/office/drawing/2014/main" id="{5F2C6682-EF93-4622-9D24-A09D2FE9B0A3}"/>
               </a:ext>
             </a:extLst>
           </p:cNvPr>
@@ -39857,7 +41576,7 @@
           <p:cNvPr id="4" name="">
             <a:extLst xmlns:a="http://schemas.openxmlformats.org/drawingml/2006/main">
               <a:ext uri="{FF2B5EF4-FFF2-40B4-BE49-F238E27FC236}">
-                <a16:creationId xmlns:a16="http://schemas.microsoft.com/office/drawing/2014/main" id="{945A8CC8-3BBF-4E4E-9FAE-270A8C1F0268}"/>
+                <a16:creationId xmlns:a16="http://schemas.microsoft.com/office/drawing/2014/main" id="{AAE9746D-25DC-444F-A685-4A1BBADEDFD3}"/>
               </a:ext>
             </a:extLst>
           </p:cNvPr>
@@ -39867,7 +41586,7 @@
           <p:nvPr/>
         </p:nvPicPr>
         <p:blipFill>
-          <a:blip xmlns:r="http://schemas.openxmlformats.org/officeDocument/2006/relationships" xmlns:a="http://schemas.openxmlformats.org/drawingml/2006/main" r:embed="R07817938ffbb4296"/>
+          <a:blip xmlns:r="http://schemas.openxmlformats.org/officeDocument/2006/relationships" xmlns:a="http://schemas.openxmlformats.org/drawingml/2006/main" r:embed="Rf0ad5cd567024fdc"/>
           <a:stretch xmlns:a="http://schemas.openxmlformats.org/drawingml/2006/main"/>
         </p:blipFill>
         <p:spPr>
@@ -39885,7 +41604,7 @@
           <p:cNvPr id="5" name="">
             <a:extLst xmlns:a="http://schemas.openxmlformats.org/drawingml/2006/main">
               <a:ext uri="{FF2B5EF4-FFF2-40B4-BE49-F238E27FC236}">
-                <a16:creationId xmlns:a16="http://schemas.microsoft.com/office/drawing/2014/main" id="{A1490BF2-02C4-4449-A2FA-62C94F9C9A7F}"/>
+                <a16:creationId xmlns:a16="http://schemas.microsoft.com/office/drawing/2014/main" id="{1C0B2957-0726-41EE-B5A9-FC3EBAB872F5}"/>
               </a:ext>
             </a:extLst>
           </p:cNvPr>
@@ -40043,7 +41762,7 @@
           <p:cNvPr id="6" name="">
             <a:extLst xmlns:a="http://schemas.openxmlformats.org/drawingml/2006/main">
               <a:ext uri="{FF2B5EF4-FFF2-40B4-BE49-F238E27FC236}">
-                <a16:creationId xmlns:a16="http://schemas.microsoft.com/office/drawing/2014/main" id="{7B659C7E-A521-4A8B-8F39-7FEBF9EF3AF7}"/>
+                <a16:creationId xmlns:a16="http://schemas.microsoft.com/office/drawing/2014/main" id="{834B7E31-AC8B-4B71-96F9-307B4F5547E4}"/>
               </a:ext>
             </a:extLst>
           </p:cNvPr>
@@ -40201,7 +41920,7 @@
           <p:cNvPr id="7" name="">
             <a:extLst xmlns:a="http://schemas.openxmlformats.org/drawingml/2006/main">
               <a:ext uri="{FF2B5EF4-FFF2-40B4-BE49-F238E27FC236}">
-                <a16:creationId xmlns:a16="http://schemas.microsoft.com/office/drawing/2014/main" id="{17B2EB9C-059B-459F-BB88-D692CFF005B6}"/>
+                <a16:creationId xmlns:a16="http://schemas.microsoft.com/office/drawing/2014/main" id="{94C91394-2695-4208-B699-267720E1A573}"/>
               </a:ext>
             </a:extLst>
           </p:cNvPr>
@@ -40359,7 +42078,7 @@
           <p:cNvPr id="8" name="">
             <a:extLst xmlns:a="http://schemas.openxmlformats.org/drawingml/2006/main">
               <a:ext uri="{FF2B5EF4-FFF2-40B4-BE49-F238E27FC236}">
-                <a16:creationId xmlns:a16="http://schemas.microsoft.com/office/drawing/2014/main" id="{46597DE7-929D-4EF4-960B-63ADC88D41CC}"/>
+                <a16:creationId xmlns:a16="http://schemas.microsoft.com/office/drawing/2014/main" id="{4F4E8ACA-90AD-49DF-9373-2DBBD7ACB2BC}"/>
               </a:ext>
             </a:extLst>
           </p:cNvPr>
@@ -40517,7 +42236,7 @@
           <p:cNvPr id="9" name="">
             <a:extLst xmlns:a="http://schemas.openxmlformats.org/drawingml/2006/main">
               <a:ext uri="{FF2B5EF4-FFF2-40B4-BE49-F238E27FC236}">
-                <a16:creationId xmlns:a16="http://schemas.microsoft.com/office/drawing/2014/main" id="{7CB39041-F57B-43ED-8CBC-1C63D512496F}"/>
+                <a16:creationId xmlns:a16="http://schemas.microsoft.com/office/drawing/2014/main" id="{2D9DAA24-E2EA-428B-B58B-8350D2403CFE}"/>
               </a:ext>
             </a:extLst>
           </p:cNvPr>
@@ -40675,7 +42394,7 @@
           <p:cNvPr id="10" name="">
             <a:extLst xmlns:a="http://schemas.openxmlformats.org/drawingml/2006/main">
               <a:ext uri="{FF2B5EF4-FFF2-40B4-BE49-F238E27FC236}">
-                <a16:creationId xmlns:a16="http://schemas.microsoft.com/office/drawing/2014/main" id="{352A70D4-B91E-491B-9A0B-67F520855EB2}"/>
+                <a16:creationId xmlns:a16="http://schemas.microsoft.com/office/drawing/2014/main" id="{4BAE2722-750B-44A1-980A-9BFB4B731151}"/>
               </a:ext>
             </a:extLst>
           </p:cNvPr>
@@ -40833,7 +42552,7 @@
           <p:cNvPr id="11" name="">
             <a:extLst xmlns:a="http://schemas.openxmlformats.org/drawingml/2006/main">
               <a:ext uri="{FF2B5EF4-FFF2-40B4-BE49-F238E27FC236}">
-                <a16:creationId xmlns:a16="http://schemas.microsoft.com/office/drawing/2014/main" id="{E9A1C836-C2BC-4433-A9DE-2770E14C1689}"/>
+                <a16:creationId xmlns:a16="http://schemas.microsoft.com/office/drawing/2014/main" id="{745E7B6A-0025-4562-BBB0-D6481009FB98}"/>
               </a:ext>
             </a:extLst>
           </p:cNvPr>
@@ -40991,7 +42710,7 @@
           <p:cNvPr id="12" name="">
             <a:extLst xmlns:a="http://schemas.openxmlformats.org/drawingml/2006/main">
               <a:ext uri="{FF2B5EF4-FFF2-40B4-BE49-F238E27FC236}">
-                <a16:creationId xmlns:a16="http://schemas.microsoft.com/office/drawing/2014/main" id="{96652879-E4DD-431E-A91C-A63787DA36A4}"/>
+                <a16:creationId xmlns:a16="http://schemas.microsoft.com/office/drawing/2014/main" id="{06275641-CCC6-46A3-9F01-36BD773AFA8A}"/>
               </a:ext>
             </a:extLst>
           </p:cNvPr>
@@ -41149,7 +42868,7 @@
           <p:cNvPr id="13" name="">
             <a:extLst xmlns:a="http://schemas.openxmlformats.org/drawingml/2006/main">
               <a:ext uri="{FF2B5EF4-FFF2-40B4-BE49-F238E27FC236}">
-                <a16:creationId xmlns:a16="http://schemas.microsoft.com/office/drawing/2014/main" id="{18E3C945-A9E4-4274-B1EA-67B9F50C4F6B}"/>
+                <a16:creationId xmlns:a16="http://schemas.microsoft.com/office/drawing/2014/main" id="{8447B21A-1BBC-43DD-A747-0CD9DCE06A4F}"/>
               </a:ext>
             </a:extLst>
           </p:cNvPr>
@@ -41305,7 +43024,7 @@
     </p:spTree>
     <p:extLst>
       <p:ext uri="{BB962C8B-B14F-4D97-AF65-F5344CB8AC3E}">
-        <p14:creationId xmlns:p14="http://schemas.microsoft.com/office/powerpoint/2010/main" val="1582003628"/>
+        <p14:creationId xmlns:p14="http://schemas.microsoft.com/office/powerpoint/2010/main" val="726476099"/>
       </p:ext>
     </p:extLst>
   </p:cSld>
@@ -41336,7 +43055,7 @@
           <p:cNvPr id="14" name="">
             <a:extLst xmlns:a="http://schemas.openxmlformats.org/drawingml/2006/main">
               <a:ext uri="{FF2B5EF4-FFF2-40B4-BE49-F238E27FC236}">
-                <a16:creationId xmlns:a16="http://schemas.microsoft.com/office/drawing/2014/main" id="{2CFCF1B3-AE94-4603-926E-D33C31F5ED39}"/>
+                <a16:creationId xmlns:a16="http://schemas.microsoft.com/office/drawing/2014/main" id="{2FD51421-0B08-4289-8118-EFE39C27AA75}"/>
               </a:ext>
             </a:extLst>
           </p:cNvPr>
@@ -41494,7 +43213,7 @@
           <p:cNvPr id="2" name="">
             <a:extLst xmlns:a="http://schemas.openxmlformats.org/drawingml/2006/main">
               <a:ext uri="{FF2B5EF4-FFF2-40B4-BE49-F238E27FC236}">
-                <a16:creationId xmlns:a16="http://schemas.microsoft.com/office/drawing/2014/main" id="{54929865-2606-487B-AFE0-FD9BD9273CF7}"/>
+                <a16:creationId xmlns:a16="http://schemas.microsoft.com/office/drawing/2014/main" id="{A6477197-B33C-4455-BF20-0919900A3393}"/>
               </a:ext>
             </a:extLst>
           </p:cNvPr>
@@ -41652,7 +43371,7 @@
           <p:cNvPr id="3" name="">
             <a:extLst xmlns:a="http://schemas.openxmlformats.org/drawingml/2006/main">
               <a:ext uri="{FF2B5EF4-FFF2-40B4-BE49-F238E27FC236}">
-                <a16:creationId xmlns:a16="http://schemas.microsoft.com/office/drawing/2014/main" id="{E48AB38F-3563-4E15-97EF-D45E01D99A6B}"/>
+                <a16:creationId xmlns:a16="http://schemas.microsoft.com/office/drawing/2014/main" id="{1C97D5C3-F030-4AAB-828A-083D548D606E}"/>
               </a:ext>
             </a:extLst>
           </p:cNvPr>
@@ -41810,7 +43529,7 @@
           <p:cNvPr id="4" name="">
             <a:extLst xmlns:a="http://schemas.openxmlformats.org/drawingml/2006/main">
               <a:ext uri="{FF2B5EF4-FFF2-40B4-BE49-F238E27FC236}">
-                <a16:creationId xmlns:a16="http://schemas.microsoft.com/office/drawing/2014/main" id="{D520A351-D3F6-456B-8D5E-97EF7F173D47}"/>
+                <a16:creationId xmlns:a16="http://schemas.microsoft.com/office/drawing/2014/main" id="{C077E972-3F43-4293-AF28-4BC7123ECF25}"/>
               </a:ext>
             </a:extLst>
           </p:cNvPr>
@@ -41820,7 +43539,7 @@
           <p:nvPr/>
         </p:nvPicPr>
         <p:blipFill>
-          <a:blip xmlns:r="http://schemas.openxmlformats.org/officeDocument/2006/relationships" xmlns:a="http://schemas.openxmlformats.org/drawingml/2006/main" r:embed="R98d76edbc51b45db"/>
+          <a:blip xmlns:r="http://schemas.openxmlformats.org/officeDocument/2006/relationships" xmlns:a="http://schemas.openxmlformats.org/drawingml/2006/main" r:embed="R64074d3e2acd4b61"/>
           <a:stretch xmlns:a="http://schemas.openxmlformats.org/drawingml/2006/main"/>
         </p:blipFill>
         <p:spPr>
@@ -41838,7 +43557,7 @@
           <p:cNvPr id="5" name="">
             <a:extLst xmlns:a="http://schemas.openxmlformats.org/drawingml/2006/main">
               <a:ext uri="{FF2B5EF4-FFF2-40B4-BE49-F238E27FC236}">
-                <a16:creationId xmlns:a16="http://schemas.microsoft.com/office/drawing/2014/main" id="{E60A3324-BB33-4B42-A901-6BF04C793C53}"/>
+                <a16:creationId xmlns:a16="http://schemas.microsoft.com/office/drawing/2014/main" id="{DD4BBEB4-71CF-4F4D-92F4-5B3297C83A00}"/>
               </a:ext>
             </a:extLst>
           </p:cNvPr>
@@ -41996,7 +43715,7 @@
           <p:cNvPr id="6" name="">
             <a:extLst xmlns:a="http://schemas.openxmlformats.org/drawingml/2006/main">
               <a:ext uri="{FF2B5EF4-FFF2-40B4-BE49-F238E27FC236}">
-                <a16:creationId xmlns:a16="http://schemas.microsoft.com/office/drawing/2014/main" id="{3475E6E3-BA1A-4880-B1BB-4564C6C090B8}"/>
+                <a16:creationId xmlns:a16="http://schemas.microsoft.com/office/drawing/2014/main" id="{A5F7C166-E7B6-4AE5-BE5C-040D7290B796}"/>
               </a:ext>
             </a:extLst>
           </p:cNvPr>
@@ -42154,7 +43873,7 @@
           <p:cNvPr id="7" name="">
             <a:extLst xmlns:a="http://schemas.openxmlformats.org/drawingml/2006/main">
               <a:ext uri="{FF2B5EF4-FFF2-40B4-BE49-F238E27FC236}">
-                <a16:creationId xmlns:a16="http://schemas.microsoft.com/office/drawing/2014/main" id="{7BA63224-C306-4C47-9C81-87196D454B01}"/>
+                <a16:creationId xmlns:a16="http://schemas.microsoft.com/office/drawing/2014/main" id="{FD4A0E7A-AC1C-4934-A593-3ADC716D98CB}"/>
               </a:ext>
             </a:extLst>
           </p:cNvPr>
@@ -42164,7 +43883,7 @@
           <p:nvPr/>
         </p:nvPicPr>
         <p:blipFill>
-          <a:blip xmlns:r="http://schemas.openxmlformats.org/officeDocument/2006/relationships" xmlns:a="http://schemas.openxmlformats.org/drawingml/2006/main" r:embed="R55b6c9485f2f4869"/>
+          <a:blip xmlns:r="http://schemas.openxmlformats.org/officeDocument/2006/relationships" xmlns:a="http://schemas.openxmlformats.org/drawingml/2006/main" r:embed="Rfaef16d52bc145b4"/>
           <a:stretch xmlns:a="http://schemas.openxmlformats.org/drawingml/2006/main"/>
         </p:blipFill>
         <p:spPr>
@@ -42182,7 +43901,7 @@
           <p:cNvPr id="8" name="">
             <a:extLst xmlns:a="http://schemas.openxmlformats.org/drawingml/2006/main">
               <a:ext uri="{FF2B5EF4-FFF2-40B4-BE49-F238E27FC236}">
-                <a16:creationId xmlns:a16="http://schemas.microsoft.com/office/drawing/2014/main" id="{45DC2BFB-C848-4CC0-81F4-A4D8E70E66D3}"/>
+                <a16:creationId xmlns:a16="http://schemas.microsoft.com/office/drawing/2014/main" id="{6073D385-64BA-4007-888F-CEA529D3A1DD}"/>
               </a:ext>
             </a:extLst>
           </p:cNvPr>
@@ -42340,7 +44059,7 @@
           <p:cNvPr id="9" name="">
             <a:extLst xmlns:a="http://schemas.openxmlformats.org/drawingml/2006/main">
               <a:ext uri="{FF2B5EF4-FFF2-40B4-BE49-F238E27FC236}">
-                <a16:creationId xmlns:a16="http://schemas.microsoft.com/office/drawing/2014/main" id="{D3B45416-CDC3-438F-AADA-7FA6D81B977B}"/>
+                <a16:creationId xmlns:a16="http://schemas.microsoft.com/office/drawing/2014/main" id="{36D640EA-2C91-42D3-968E-9AB728AAFC75}"/>
               </a:ext>
             </a:extLst>
           </p:cNvPr>
@@ -42498,7 +44217,7 @@
           <p:cNvPr id="10" name="">
             <a:extLst xmlns:a="http://schemas.openxmlformats.org/drawingml/2006/main">
               <a:ext uri="{FF2B5EF4-FFF2-40B4-BE49-F238E27FC236}">
-                <a16:creationId xmlns:a16="http://schemas.microsoft.com/office/drawing/2014/main" id="{CB3C78DA-B816-4B47-9C76-9EFCEFC21723}"/>
+                <a16:creationId xmlns:a16="http://schemas.microsoft.com/office/drawing/2014/main" id="{CCEACF89-E15C-439A-B257-553C1410BD2E}"/>
               </a:ext>
             </a:extLst>
           </p:cNvPr>
@@ -42679,7 +44398,7 @@
           <p:cNvPr id="11" name="">
             <a:extLst xmlns:a="http://schemas.openxmlformats.org/drawingml/2006/main">
               <a:ext uri="{FF2B5EF4-FFF2-40B4-BE49-F238E27FC236}">
-                <a16:creationId xmlns:a16="http://schemas.microsoft.com/office/drawing/2014/main" id="{D89D626D-93F2-47B1-8E16-5E48DFA9A9DA}"/>
+                <a16:creationId xmlns:a16="http://schemas.microsoft.com/office/drawing/2014/main" id="{D7D5C9D8-5F70-4902-8A60-AEBD1E0F8937}"/>
               </a:ext>
             </a:extLst>
           </p:cNvPr>
@@ -42837,7 +44556,7 @@
           <p:cNvPr id="12" name="">
             <a:extLst xmlns:a="http://schemas.openxmlformats.org/drawingml/2006/main">
               <a:ext uri="{FF2B5EF4-FFF2-40B4-BE49-F238E27FC236}">
-                <a16:creationId xmlns:a16="http://schemas.microsoft.com/office/drawing/2014/main" id="{2651B568-E86E-45A0-8251-ED73FED2B72F}"/>
+                <a16:creationId xmlns:a16="http://schemas.microsoft.com/office/drawing/2014/main" id="{3FEF1FEA-4846-4D30-9A60-0C4062715A8E}"/>
               </a:ext>
             </a:extLst>
           </p:cNvPr>
@@ -43041,7 +44760,7 @@
           <p:cNvPr id="13" name="">
             <a:extLst xmlns:a="http://schemas.openxmlformats.org/drawingml/2006/main">
               <a:ext uri="{FF2B5EF4-FFF2-40B4-BE49-F238E27FC236}">
-                <a16:creationId xmlns:a16="http://schemas.microsoft.com/office/drawing/2014/main" id="{550B6BFD-BE23-42C1-ADAC-3144A1433106}"/>
+                <a16:creationId xmlns:a16="http://schemas.microsoft.com/office/drawing/2014/main" id="{DBB44F0F-084D-43BD-A5E0-DDF3500EB74E}"/>
               </a:ext>
             </a:extLst>
           </p:cNvPr>
@@ -43197,7 +44916,7 @@
     </p:spTree>
     <p:extLst>
       <p:ext uri="{BB962C8B-B14F-4D97-AF65-F5344CB8AC3E}">
-        <p14:creationId xmlns:p14="http://schemas.microsoft.com/office/powerpoint/2010/main" val="1629740784"/>
+        <p14:creationId xmlns:p14="http://schemas.microsoft.com/office/powerpoint/2010/main" val="2118586454"/>
       </p:ext>
     </p:extLst>
   </p:cSld>
@@ -43228,7 +44947,7 @@
           <p:cNvPr id="13" name="">
             <a:extLst xmlns:a="http://schemas.openxmlformats.org/drawingml/2006/main">
               <a:ext uri="{FF2B5EF4-FFF2-40B4-BE49-F238E27FC236}">
-                <a16:creationId xmlns:a16="http://schemas.microsoft.com/office/drawing/2014/main" id="{D0FAE61E-E2EB-4F79-AB4F-221FEDE4ADFD}"/>
+                <a16:creationId xmlns:a16="http://schemas.microsoft.com/office/drawing/2014/main" id="{F6C3D916-BE65-4D17-B051-6AC9CA515B10}"/>
               </a:ext>
             </a:extLst>
           </p:cNvPr>
@@ -43386,7 +45105,7 @@
           <p:cNvPr id="2" name="">
             <a:extLst xmlns:a="http://schemas.openxmlformats.org/drawingml/2006/main">
               <a:ext uri="{FF2B5EF4-FFF2-40B4-BE49-F238E27FC236}">
-                <a16:creationId xmlns:a16="http://schemas.microsoft.com/office/drawing/2014/main" id="{96261536-95D7-4A89-98D3-6AA450BB87B3}"/>
+                <a16:creationId xmlns:a16="http://schemas.microsoft.com/office/drawing/2014/main" id="{4E147D3F-F35A-4765-ADBC-DD3502D454F2}"/>
               </a:ext>
             </a:extLst>
           </p:cNvPr>
@@ -43544,7 +45263,7 @@
           <p:cNvPr id="3" name="">
             <a:extLst xmlns:a="http://schemas.openxmlformats.org/drawingml/2006/main">
               <a:ext uri="{FF2B5EF4-FFF2-40B4-BE49-F238E27FC236}">
-                <a16:creationId xmlns:a16="http://schemas.microsoft.com/office/drawing/2014/main" id="{2694127E-AE2C-4C6E-86FF-D9E0644FF46E}"/>
+                <a16:creationId xmlns:a16="http://schemas.microsoft.com/office/drawing/2014/main" id="{1E218C30-B78B-45E3-8859-D59459A0DEEA}"/>
               </a:ext>
             </a:extLst>
           </p:cNvPr>
@@ -43702,7 +45421,7 @@
           <p:cNvPr id="4" name="">
             <a:extLst xmlns:a="http://schemas.openxmlformats.org/drawingml/2006/main">
               <a:ext uri="{FF2B5EF4-FFF2-40B4-BE49-F238E27FC236}">
-                <a16:creationId xmlns:a16="http://schemas.microsoft.com/office/drawing/2014/main" id="{1AFFCE2D-80D4-4C8D-8CF3-DEAD31996D10}"/>
+                <a16:creationId xmlns:a16="http://schemas.microsoft.com/office/drawing/2014/main" id="{98BFC8F4-08AE-4C9A-BA2D-02E1BB5BA2F5}"/>
               </a:ext>
             </a:extLst>
           </p:cNvPr>
@@ -43712,7 +45431,7 @@
           <p:nvPr/>
         </p:nvPicPr>
         <p:blipFill>
-          <a:blip xmlns:r="http://schemas.openxmlformats.org/officeDocument/2006/relationships" xmlns:a="http://schemas.openxmlformats.org/drawingml/2006/main" r:embed="R93f01dfce2cc4066"/>
+          <a:blip xmlns:r="http://schemas.openxmlformats.org/officeDocument/2006/relationships" xmlns:a="http://schemas.openxmlformats.org/drawingml/2006/main" r:embed="R49464c2da1dc4db6"/>
           <a:stretch xmlns:a="http://schemas.openxmlformats.org/drawingml/2006/main"/>
         </p:blipFill>
         <p:spPr>
@@ -43730,7 +45449,7 @@
           <p:cNvPr id="5" name="">
             <a:extLst xmlns:a="http://schemas.openxmlformats.org/drawingml/2006/main">
               <a:ext uri="{FF2B5EF4-FFF2-40B4-BE49-F238E27FC236}">
-                <a16:creationId xmlns:a16="http://schemas.microsoft.com/office/drawing/2014/main" id="{EB6EBB5A-FEB7-494A-B735-945CE25C0FA1}"/>
+                <a16:creationId xmlns:a16="http://schemas.microsoft.com/office/drawing/2014/main" id="{1F28C09C-A287-43BF-B3E2-58CFE0324FC8}"/>
               </a:ext>
             </a:extLst>
           </p:cNvPr>
@@ -43888,7 +45607,7 @@
           <p:cNvPr id="6" name="">
             <a:extLst xmlns:a="http://schemas.openxmlformats.org/drawingml/2006/main">
               <a:ext uri="{FF2B5EF4-FFF2-40B4-BE49-F238E27FC236}">
-                <a16:creationId xmlns:a16="http://schemas.microsoft.com/office/drawing/2014/main" id="{057F2896-4533-4172-822C-751E396942F5}"/>
+                <a16:creationId xmlns:a16="http://schemas.microsoft.com/office/drawing/2014/main" id="{B1105AB9-27B1-45A2-81F3-96E5D24E187C}"/>
               </a:ext>
             </a:extLst>
           </p:cNvPr>
@@ -44046,7 +45765,7 @@
           <p:cNvPr id="7" name="">
             <a:extLst xmlns:a="http://schemas.openxmlformats.org/drawingml/2006/main">
               <a:ext uri="{FF2B5EF4-FFF2-40B4-BE49-F238E27FC236}">
-                <a16:creationId xmlns:a16="http://schemas.microsoft.com/office/drawing/2014/main" id="{B5C5BED0-0B9A-4044-83BE-F66D97A061FF}"/>
+                <a16:creationId xmlns:a16="http://schemas.microsoft.com/office/drawing/2014/main" id="{9D4A6A01-479F-43A2-8469-D8796717324A}"/>
               </a:ext>
             </a:extLst>
           </p:cNvPr>
@@ -44056,7 +45775,7 @@
           <p:nvPr/>
         </p:nvPicPr>
         <p:blipFill>
-          <a:blip xmlns:r="http://schemas.openxmlformats.org/officeDocument/2006/relationships" xmlns:a="http://schemas.openxmlformats.org/drawingml/2006/main" r:embed="R729cc2ba9c914877"/>
+          <a:blip xmlns:r="http://schemas.openxmlformats.org/officeDocument/2006/relationships" xmlns:a="http://schemas.openxmlformats.org/drawingml/2006/main" r:embed="R6d1ad862941640a8"/>
           <a:stretch xmlns:a="http://schemas.openxmlformats.org/drawingml/2006/main"/>
         </p:blipFill>
         <p:spPr>
@@ -44074,7 +45793,7 @@
           <p:cNvPr id="8" name="">
             <a:extLst xmlns:a="http://schemas.openxmlformats.org/drawingml/2006/main">
               <a:ext uri="{FF2B5EF4-FFF2-40B4-BE49-F238E27FC236}">
-                <a16:creationId xmlns:a16="http://schemas.microsoft.com/office/drawing/2014/main" id="{10662718-795D-406C-BA75-61D138217AAA}"/>
+                <a16:creationId xmlns:a16="http://schemas.microsoft.com/office/drawing/2014/main" id="{3A12C779-144A-496C-BF12-C56B6B7AA2E2}"/>
               </a:ext>
             </a:extLst>
           </p:cNvPr>
@@ -44232,7 +45951,7 @@
           <p:cNvPr id="9" name="">
             <a:extLst xmlns:a="http://schemas.openxmlformats.org/drawingml/2006/main">
               <a:ext uri="{FF2B5EF4-FFF2-40B4-BE49-F238E27FC236}">
-                <a16:creationId xmlns:a16="http://schemas.microsoft.com/office/drawing/2014/main" id="{75627EDC-B3F7-4676-BBD5-FC6F111DC01E}"/>
+                <a16:creationId xmlns:a16="http://schemas.microsoft.com/office/drawing/2014/main" id="{7C19A084-C13E-45B1-83D8-C9CB7021C473}"/>
               </a:ext>
             </a:extLst>
           </p:cNvPr>
@@ -44390,7 +46109,7 @@
           <p:cNvPr id="10" name="">
             <a:extLst xmlns:a="http://schemas.openxmlformats.org/drawingml/2006/main">
               <a:ext uri="{FF2B5EF4-FFF2-40B4-BE49-F238E27FC236}">
-                <a16:creationId xmlns:a16="http://schemas.microsoft.com/office/drawing/2014/main" id="{9454EF4D-AE40-4EED-9B24-240B05B71B2F}"/>
+                <a16:creationId xmlns:a16="http://schemas.microsoft.com/office/drawing/2014/main" id="{0A3AB741-A847-46A3-A04B-367BA664C685}"/>
               </a:ext>
             </a:extLst>
           </p:cNvPr>
@@ -44538,7 +46257,7 @@
                 <a:ea typeface="Arial"/>
                 <a:cs typeface="Arial"/>
               </a:rPr>
-              <a:t>Kontrollojmë ID-në në link dhe në të dhëna. Pastaj kontrollojmë nëse pamja vjen nga serveri ose nga kopja.</a:t>
+              <a:t>Simptoma: dy orë të ndryshme. Shkaqet e mundshme: ID i gabuar, tekst i shkruar në kod ose kopje e vjetër.</a:t>
             </a:r>
           </a:p>
           <a:p xmlns:a="http://schemas.openxmlformats.org/drawingml/2006/main">
@@ -44566,7 +46285,7 @@
                 <a:ea typeface="Arial"/>
                 <a:cs typeface="Arial"/>
               </a:rPr>
-              <a:t>Nëse të dhënat kanë ndryshuar mes leximeve, e shpjegojmë dhe rifreskojmë. Nuk premtojmë që dy lexime janë gjithmonë identike.</a:t>
+              <a:t>Nëse të dhënat ndryshuan mes leximeve, shpjegojmë kohën dhe burimin. Së pari kërkojmë provë për shkakun.</a:t>
             </a:r>
           </a:p>
         </p:txBody>
@@ -44576,7 +46295,7 @@
           <p:cNvPr id="11" name="">
             <a:extLst xmlns:a="http://schemas.openxmlformats.org/drawingml/2006/main">
               <a:ext uri="{FF2B5EF4-FFF2-40B4-BE49-F238E27FC236}">
-                <a16:creationId xmlns:a16="http://schemas.microsoft.com/office/drawing/2014/main" id="{DDCD4418-871E-42A6-A7E3-DA3145B7E6A9}"/>
+                <a16:creationId xmlns:a16="http://schemas.microsoft.com/office/drawing/2014/main" id="{19531C1A-03F9-494B-AA43-36EBE8FF0186}"/>
               </a:ext>
             </a:extLst>
           </p:cNvPr>
@@ -44724,7 +46443,7 @@
                 <a:ea typeface="Arial"/>
                 <a:cs typeface="Arial"/>
               </a:rPr>
-              <a:t>Pse ndryshimi i tekstit në kartë mund ta fshehë gabimin?</a:t>
+              <a:t>Çfarë mëson klasa nëse i shkruajmë të dyja orët 08:15?</a:t>
             </a:r>
           </a:p>
         </p:txBody>
@@ -44734,7 +46453,7 @@
           <p:cNvPr id="12" name="">
             <a:extLst xmlns:a="http://schemas.openxmlformats.org/drawingml/2006/main">
               <a:ext uri="{FF2B5EF4-FFF2-40B4-BE49-F238E27FC236}">
-                <a16:creationId xmlns:a16="http://schemas.microsoft.com/office/drawing/2014/main" id="{0A9A0E5B-9C56-4058-A06E-1A0B0A0207E1}"/>
+                <a16:creationId xmlns:a16="http://schemas.microsoft.com/office/drawing/2014/main" id="{20A5AA84-CE5A-4C68-AACA-0DB802B440A2}"/>
               </a:ext>
             </a:extLst>
           </p:cNvPr>
@@ -44882,7 +46601,7 @@
                 <a:ea typeface="Arial"/>
                 <a:cs typeface="Arial"/>
               </a:rPr>
-              <a:t>Detajet mund të lexojnë udhëtimin e gabuar ose një version tjetër. Ndryshimi i tekstit nuk korrigjon shkakun.</a:t>
+              <a:t>Vetëm e mbulojmë simptomën. Pa kontrolluar ID-në dhe burimin, gabimi mund të shfaqet sërish te udhëtimi tjetër.</a:t>
             </a:r>
           </a:p>
         </p:txBody>
@@ -44890,7 +46609,7 @@
     </p:spTree>
     <p:extLst>
       <p:ext uri="{BB962C8B-B14F-4D97-AF65-F5344CB8AC3E}">
-        <p14:creationId xmlns:p14="http://schemas.microsoft.com/office/powerpoint/2010/main" val="2098103427"/>
+        <p14:creationId xmlns:p14="http://schemas.microsoft.com/office/powerpoint/2010/main" val="114625447"/>
       </p:ext>
     </p:extLst>
   </p:cSld>
@@ -44921,7 +46640,7 @@
           <p:cNvPr id="11" name="">
             <a:extLst xmlns:a="http://schemas.openxmlformats.org/drawingml/2006/main">
               <a:ext uri="{FF2B5EF4-FFF2-40B4-BE49-F238E27FC236}">
-                <a16:creationId xmlns:a16="http://schemas.microsoft.com/office/drawing/2014/main" id="{B7507C2B-AFF4-46DB-A91A-5CA768250C2C}"/>
+                <a16:creationId xmlns:a16="http://schemas.microsoft.com/office/drawing/2014/main" id="{884ABFF0-883D-43B3-A365-C197490DFDAF}"/>
               </a:ext>
             </a:extLst>
           </p:cNvPr>
@@ -45079,7 +46798,7 @@
           <p:cNvPr id="2" name="">
             <a:extLst xmlns:a="http://schemas.openxmlformats.org/drawingml/2006/main">
               <a:ext uri="{FF2B5EF4-FFF2-40B4-BE49-F238E27FC236}">
-                <a16:creationId xmlns:a16="http://schemas.microsoft.com/office/drawing/2014/main" id="{0DC1AA24-ECF1-4213-87C3-FC1313C179D9}"/>
+                <a16:creationId xmlns:a16="http://schemas.microsoft.com/office/drawing/2014/main" id="{BAA32489-8251-426F-985E-058B4A4DFAE2}"/>
               </a:ext>
             </a:extLst>
           </p:cNvPr>
@@ -45237,7 +46956,7 @@
           <p:cNvPr id="3" name="">
             <a:extLst xmlns:a="http://schemas.openxmlformats.org/drawingml/2006/main">
               <a:ext uri="{FF2B5EF4-FFF2-40B4-BE49-F238E27FC236}">
-                <a16:creationId xmlns:a16="http://schemas.microsoft.com/office/drawing/2014/main" id="{2A320DE9-96E6-4BF9-8ADD-EA02C7E92626}"/>
+                <a16:creationId xmlns:a16="http://schemas.microsoft.com/office/drawing/2014/main" id="{2AC1A776-AE0A-47F3-9549-5241F10790FE}"/>
               </a:ext>
             </a:extLst>
           </p:cNvPr>
@@ -45395,7 +47114,7 @@
           <p:cNvPr id="4" name="">
             <a:extLst xmlns:a="http://schemas.openxmlformats.org/drawingml/2006/main">
               <a:ext uri="{FF2B5EF4-FFF2-40B4-BE49-F238E27FC236}">
-                <a16:creationId xmlns:a16="http://schemas.microsoft.com/office/drawing/2014/main" id="{E7251B3F-D029-46F6-9318-50048A63C9E7}"/>
+                <a16:creationId xmlns:a16="http://schemas.microsoft.com/office/drawing/2014/main" id="{83ACF81D-B197-4EC1-8F8F-51A375CC6E0C}"/>
               </a:ext>
             </a:extLst>
           </p:cNvPr>
@@ -45553,7 +47272,7 @@
           <p:cNvPr id="5" name="">
             <a:extLst xmlns:a="http://schemas.openxmlformats.org/drawingml/2006/main">
               <a:ext uri="{FF2B5EF4-FFF2-40B4-BE49-F238E27FC236}">
-                <a16:creationId xmlns:a16="http://schemas.microsoft.com/office/drawing/2014/main" id="{4C38C1C2-55DF-4C3D-8F1D-54DEC99A0E64}"/>
+                <a16:creationId xmlns:a16="http://schemas.microsoft.com/office/drawing/2014/main" id="{13604C80-DEF8-413B-8D53-1F7E2D06CEED}"/>
               </a:ext>
             </a:extLst>
           </p:cNvPr>
@@ -45711,7 +47430,7 @@
           <p:cNvPr id="6" name="">
             <a:extLst xmlns:a="http://schemas.openxmlformats.org/drawingml/2006/main">
               <a:ext uri="{FF2B5EF4-FFF2-40B4-BE49-F238E27FC236}">
-                <a16:creationId xmlns:a16="http://schemas.microsoft.com/office/drawing/2014/main" id="{437FD21F-E19A-43C5-897A-7C1F637FCAF4}"/>
+                <a16:creationId xmlns:a16="http://schemas.microsoft.com/office/drawing/2014/main" id="{FFB3DE6F-3969-4E5E-B84F-179881CCEDA3}"/>
               </a:ext>
             </a:extLst>
           </p:cNvPr>
@@ -45869,7 +47588,7 @@
           <p:cNvPr id="7" name="">
             <a:extLst xmlns:a="http://schemas.openxmlformats.org/drawingml/2006/main">
               <a:ext uri="{FF2B5EF4-FFF2-40B4-BE49-F238E27FC236}">
-                <a16:creationId xmlns:a16="http://schemas.microsoft.com/office/drawing/2014/main" id="{21BD0626-C244-4655-8F2E-16F0B2910BD4}"/>
+                <a16:creationId xmlns:a16="http://schemas.microsoft.com/office/drawing/2014/main" id="{400790B2-2BC1-42CC-A0B7-0AE7F7E616A7}"/>
               </a:ext>
             </a:extLst>
           </p:cNvPr>
@@ -46027,7 +47746,7 @@
           <p:cNvPr id="8" name="">
             <a:extLst xmlns:a="http://schemas.openxmlformats.org/drawingml/2006/main">
               <a:ext uri="{FF2B5EF4-FFF2-40B4-BE49-F238E27FC236}">
-                <a16:creationId xmlns:a16="http://schemas.microsoft.com/office/drawing/2014/main" id="{3D86F091-01FE-4A07-9D6E-DA845B9404EC}"/>
+                <a16:creationId xmlns:a16="http://schemas.microsoft.com/office/drawing/2014/main" id="{BF560164-1AF6-4B2E-A39F-2FB054B4F98B}"/>
               </a:ext>
             </a:extLst>
           </p:cNvPr>
@@ -46185,7 +47904,7 @@
           <p:cNvPr id="9" name="">
             <a:extLst xmlns:a="http://schemas.openxmlformats.org/drawingml/2006/main">
               <a:ext uri="{FF2B5EF4-FFF2-40B4-BE49-F238E27FC236}">
-                <a16:creationId xmlns:a16="http://schemas.microsoft.com/office/drawing/2014/main" id="{E5AD761B-60E4-4017-B6E6-5963EE05E007}"/>
+                <a16:creationId xmlns:a16="http://schemas.microsoft.com/office/drawing/2014/main" id="{F71A2009-57A1-4FC3-B381-CB213BDAE4E5}"/>
               </a:ext>
             </a:extLst>
           </p:cNvPr>
@@ -46371,7 +48090,7 @@
           <p:cNvPr id="10" name="">
             <a:extLst xmlns:a="http://schemas.openxmlformats.org/drawingml/2006/main">
               <a:ext uri="{FF2B5EF4-FFF2-40B4-BE49-F238E27FC236}">
-                <a16:creationId xmlns:a16="http://schemas.microsoft.com/office/drawing/2014/main" id="{71229957-F437-4711-AE08-62712369F1D0}"/>
+                <a16:creationId xmlns:a16="http://schemas.microsoft.com/office/drawing/2014/main" id="{CEDF92EF-0869-4483-8681-D5C813E3CEA2}"/>
               </a:ext>
             </a:extLst>
           </p:cNvPr>
@@ -46527,7 +48246,7 @@
     </p:spTree>
     <p:extLst>
       <p:ext uri="{BB962C8B-B14F-4D97-AF65-F5344CB8AC3E}">
-        <p14:creationId xmlns:p14="http://schemas.microsoft.com/office/powerpoint/2010/main" val="1728945141"/>
+        <p14:creationId xmlns:p14="http://schemas.microsoft.com/office/powerpoint/2010/main" val="1571714377"/>
       </p:ext>
     </p:extLst>
   </p:cSld>
@@ -46558,7 +48277,7 @@
           <p:cNvPr id="13" name="">
             <a:extLst xmlns:a="http://schemas.openxmlformats.org/drawingml/2006/main">
               <a:ext uri="{FF2B5EF4-FFF2-40B4-BE49-F238E27FC236}">
-                <a16:creationId xmlns:a16="http://schemas.microsoft.com/office/drawing/2014/main" id="{D6AAE870-A0C4-4711-BD14-5D1D81120F86}"/>
+                <a16:creationId xmlns:a16="http://schemas.microsoft.com/office/drawing/2014/main" id="{2948B2FD-82FD-41DC-8062-F7F132E16E27}"/>
               </a:ext>
             </a:extLst>
           </p:cNvPr>
@@ -46716,7 +48435,7 @@
           <p:cNvPr id="2" name="">
             <a:extLst xmlns:a="http://schemas.openxmlformats.org/drawingml/2006/main">
               <a:ext uri="{FF2B5EF4-FFF2-40B4-BE49-F238E27FC236}">
-                <a16:creationId xmlns:a16="http://schemas.microsoft.com/office/drawing/2014/main" id="{40189699-7BD7-4A1B-9D21-5FB917F9739A}"/>
+                <a16:creationId xmlns:a16="http://schemas.microsoft.com/office/drawing/2014/main" id="{557F38B1-3255-4331-9836-BF4F127A118E}"/>
               </a:ext>
             </a:extLst>
           </p:cNvPr>
@@ -46874,7 +48593,7 @@
           <p:cNvPr id="3" name="">
             <a:extLst xmlns:a="http://schemas.openxmlformats.org/drawingml/2006/main">
               <a:ext uri="{FF2B5EF4-FFF2-40B4-BE49-F238E27FC236}">
-                <a16:creationId xmlns:a16="http://schemas.microsoft.com/office/drawing/2014/main" id="{2B9D9324-AAED-45DE-86A7-8C5A7E16FB6B}"/>
+                <a16:creationId xmlns:a16="http://schemas.microsoft.com/office/drawing/2014/main" id="{0C762CDE-C613-4A52-B163-77AAB71F8279}"/>
               </a:ext>
             </a:extLst>
           </p:cNvPr>
@@ -47022,7 +48741,7 @@
                 <a:ea typeface="Arial"/>
                 <a:cs typeface="Arial"/>
               </a:rPr>
-              <a:t>Demo: vendoseni aplikacionin në vështirësi</a:t>
+              <a:t>Klasa vendos: çfarë duhet të ndodhë?</a:t>
             </a:r>
           </a:p>
         </p:txBody>
@@ -47032,7 +48751,7 @@
           <p:cNvPr id="4" name="">
             <a:extLst xmlns:a="http://schemas.openxmlformats.org/drawingml/2006/main">
               <a:ext uri="{FF2B5EF4-FFF2-40B4-BE49-F238E27FC236}">
-                <a16:creationId xmlns:a16="http://schemas.microsoft.com/office/drawing/2014/main" id="{B7D7E189-7A81-45B6-A8B2-73246D4681B6}"/>
+                <a16:creationId xmlns:a16="http://schemas.microsoft.com/office/drawing/2014/main" id="{76B51907-7262-472D-9330-7E88FF44E02E}"/>
               </a:ext>
             </a:extLst>
           </p:cNvPr>
@@ -47042,7 +48761,7 @@
           <p:nvPr/>
         </p:nvPicPr>
         <p:blipFill>
-          <a:blip xmlns:r="http://schemas.openxmlformats.org/officeDocument/2006/relationships" xmlns:a="http://schemas.openxmlformats.org/drawingml/2006/main" r:embed="R7765702e1b56452e"/>
+          <a:blip xmlns:r="http://schemas.openxmlformats.org/officeDocument/2006/relationships" xmlns:a="http://schemas.openxmlformats.org/drawingml/2006/main" r:embed="R6a8782f2539c40ef"/>
           <a:stretch xmlns:a="http://schemas.openxmlformats.org/drawingml/2006/main"/>
         </p:blipFill>
         <p:spPr>
@@ -47060,7 +48779,7 @@
           <p:cNvPr id="5" name="">
             <a:extLst xmlns:a="http://schemas.openxmlformats.org/drawingml/2006/main">
               <a:ext uri="{FF2B5EF4-FFF2-40B4-BE49-F238E27FC236}">
-                <a16:creationId xmlns:a16="http://schemas.microsoft.com/office/drawing/2014/main" id="{45E2D60D-30DE-40C7-94BB-21580FFEBA50}"/>
+                <a16:creationId xmlns:a16="http://schemas.microsoft.com/office/drawing/2014/main" id="{D18A2004-6F33-44F7-9DB2-D8AF119C1F64}"/>
               </a:ext>
             </a:extLst>
           </p:cNvPr>
@@ -47208,7 +48927,7 @@
                 <a:ea typeface="Arial"/>
                 <a:cs typeface="Arial"/>
               </a:rPr>
-              <a:t>Parashiko</a:t>
+              <a:t>Parashiko mesazhin</a:t>
             </a:r>
           </a:p>
         </p:txBody>
@@ -47218,7 +48937,7 @@
           <p:cNvPr id="6" name="">
             <a:extLst xmlns:a="http://schemas.openxmlformats.org/drawingml/2006/main">
               <a:ext uri="{FF2B5EF4-FFF2-40B4-BE49-F238E27FC236}">
-                <a16:creationId xmlns:a16="http://schemas.microsoft.com/office/drawing/2014/main" id="{169906BA-5FBF-40A3-A034-4C51862192F6}"/>
+                <a16:creationId xmlns:a16="http://schemas.microsoft.com/office/drawing/2014/main" id="{71A825B2-C410-4888-9DDE-CD87712E4831}"/>
               </a:ext>
             </a:extLst>
           </p:cNvPr>
@@ -47366,7 +49085,7 @@
                 <a:ea typeface="Arial"/>
                 <a:cs typeface="Arial"/>
               </a:rPr>
-              <a:t>Para klikimit</a:t>
+              <a:t>Çfarë mund t’i premtojmë Artës?</a:t>
             </a:r>
           </a:p>
         </p:txBody>
@@ -47376,7 +49095,7 @@
           <p:cNvPr id="7" name="">
             <a:extLst xmlns:a="http://schemas.openxmlformats.org/drawingml/2006/main">
               <a:ext uri="{FF2B5EF4-FFF2-40B4-BE49-F238E27FC236}">
-                <a16:creationId xmlns:a16="http://schemas.microsoft.com/office/drawing/2014/main" id="{E7C5955A-DA72-4960-9344-968269B1824D}"/>
+                <a16:creationId xmlns:a16="http://schemas.microsoft.com/office/drawing/2014/main" id="{1B6BE394-A629-45DB-B865-5D19FE1CFB54}"/>
               </a:ext>
             </a:extLst>
           </p:cNvPr>
@@ -47386,7 +49105,7 @@
           <p:nvPr/>
         </p:nvPicPr>
         <p:blipFill>
-          <a:blip xmlns:r="http://schemas.openxmlformats.org/officeDocument/2006/relationships" xmlns:a="http://schemas.openxmlformats.org/drawingml/2006/main" r:embed="R5a45b3099d4948ae"/>
+          <a:blip xmlns:r="http://schemas.openxmlformats.org/officeDocument/2006/relationships" xmlns:a="http://schemas.openxmlformats.org/drawingml/2006/main" r:embed="Ra3169922bb114283"/>
           <a:stretch xmlns:a="http://schemas.openxmlformats.org/drawingml/2006/main"/>
         </p:blipFill>
         <p:spPr>
@@ -47404,7 +49123,7 @@
           <p:cNvPr id="8" name="">
             <a:extLst xmlns:a="http://schemas.openxmlformats.org/drawingml/2006/main">
               <a:ext uri="{FF2B5EF4-FFF2-40B4-BE49-F238E27FC236}">
-                <a16:creationId xmlns:a16="http://schemas.microsoft.com/office/drawing/2014/main" id="{865CE65A-9997-403D-8F7B-374551FF5152}"/>
+                <a16:creationId xmlns:a16="http://schemas.microsoft.com/office/drawing/2014/main" id="{10F31E58-AB13-41F8-ABA8-C0DE7122D311}"/>
               </a:ext>
             </a:extLst>
           </p:cNvPr>
@@ -47552,7 +49271,7 @@
                 <a:ea typeface="Arial"/>
                 <a:cs typeface="Arial"/>
               </a:rPr>
-              <a:t>Provo</a:t>
+              <a:t>Mbro përgjigjen</a:t>
             </a:r>
           </a:p>
         </p:txBody>
@@ -47562,7 +49281,7 @@
           <p:cNvPr id="9" name="">
             <a:extLst xmlns:a="http://schemas.openxmlformats.org/drawingml/2006/main">
               <a:ext uri="{FF2B5EF4-FFF2-40B4-BE49-F238E27FC236}">
-                <a16:creationId xmlns:a16="http://schemas.microsoft.com/office/drawing/2014/main" id="{D4F3A925-F2F1-4274-84D2-8C114AC29B6C}"/>
+                <a16:creationId xmlns:a16="http://schemas.microsoft.com/office/drawing/2014/main" id="{D339551E-0308-465E-A4BC-C6A979F5EB5B}"/>
               </a:ext>
             </a:extLst>
           </p:cNvPr>
@@ -47710,7 +49429,7 @@
                 <a:ea typeface="Arial"/>
                 <a:cs typeface="Arial"/>
               </a:rPr>
-              <a:t>Ndrysho vetëm një kusht</a:t>
+              <a:t>Cila e dhënë e justifikon?</a:t>
             </a:r>
           </a:p>
         </p:txBody>
@@ -47720,7 +49439,7 @@
           <p:cNvPr id="10" name="">
             <a:extLst xmlns:a="http://schemas.openxmlformats.org/drawingml/2006/main">
               <a:ext uri="{FF2B5EF4-FFF2-40B4-BE49-F238E27FC236}">
-                <a16:creationId xmlns:a16="http://schemas.microsoft.com/office/drawing/2014/main" id="{07453172-692D-4306-B1FC-C58D39201A40}"/>
+                <a16:creationId xmlns:a16="http://schemas.microsoft.com/office/drawing/2014/main" id="{5D80C9A3-8F3C-4034-B025-2E53E4090EC1}"/>
               </a:ext>
             </a:extLst>
           </p:cNvPr>
@@ -47868,7 +49587,7 @@
                 <a:ea typeface="Arial"/>
                 <a:cs typeface="Arial"/>
               </a:rPr>
-              <a:t>Klasa zgjedh një rast: funksionim normal, pa vende, ID i gabuar ose kopje offline.</a:t>
+              <a:t>Zgjidhni një rast: pa vende, ID i panjohur ose kopje offline. Para klikimit, thoni çfarë duhet të kuptojë Arta.</a:t>
             </a:r>
           </a:p>
           <a:p xmlns:a="http://schemas.openxmlformats.org/drawingml/2006/main">
@@ -47896,7 +49615,7 @@
                 <a:ea typeface="Arial"/>
                 <a:cs typeface="Arial"/>
               </a:rPr>
-              <a:t>Parashikoni mesazhin. Pastaj hapni demonstrimin dhe ndiqni hapat e infrastrukturës.</a:t>
+              <a:t>Profesori hap demonstrimin. Klasa krahason rezultatin me parashikimin dhe shpjegon arsyen.</a:t>
             </a:r>
           </a:p>
         </p:txBody>
@@ -47906,7 +49625,7 @@
           <p:cNvPr id="11" name="">
             <a:extLst xmlns:a="http://schemas.openxmlformats.org/drawingml/2006/main">
               <a:ext uri="{FF2B5EF4-FFF2-40B4-BE49-F238E27FC236}">
-                <a16:creationId xmlns:a16="http://schemas.microsoft.com/office/drawing/2014/main" id="{EB108891-8650-4A97-A0F9-AB3752B36DDC}"/>
+                <a16:creationId xmlns:a16="http://schemas.microsoft.com/office/drawing/2014/main" id="{8DCC18B0-8A22-49A8-928E-2AB54B826644}"/>
               </a:ext>
             </a:extLst>
           </p:cNvPr>
@@ -48064,7 +49783,7 @@
           <p:cNvPr id="12" name="">
             <a:extLst xmlns:a="http://schemas.openxmlformats.org/drawingml/2006/main">
               <a:ext uri="{FF2B5EF4-FFF2-40B4-BE49-F238E27FC236}">
-                <a16:creationId xmlns:a16="http://schemas.microsoft.com/office/drawing/2014/main" id="{985CABA7-1343-4257-BD12-3ABDD1CC1E36}"/>
+                <a16:creationId xmlns:a16="http://schemas.microsoft.com/office/drawing/2014/main" id="{90146718-95ED-446A-B59C-E33A05A3E5C7}"/>
               </a:ext>
             </a:extLst>
           </p:cNvPr>
@@ -48221,7 +49940,7 @@
     </p:spTree>
     <p:extLst>
       <p:ext uri="{BB962C8B-B14F-4D97-AF65-F5344CB8AC3E}">
-        <p14:creationId xmlns:p14="http://schemas.microsoft.com/office/powerpoint/2010/main" val="932242522"/>
+        <p14:creationId xmlns:p14="http://schemas.microsoft.com/office/powerpoint/2010/main" val="557263604"/>
       </p:ext>
     </p:extLst>
   </p:cSld>
@@ -48252,7 +49971,7 @@
           <p:cNvPr id="14" name="">
             <a:extLst xmlns:a="http://schemas.openxmlformats.org/drawingml/2006/main">
               <a:ext uri="{FF2B5EF4-FFF2-40B4-BE49-F238E27FC236}">
-                <a16:creationId xmlns:a16="http://schemas.microsoft.com/office/drawing/2014/main" id="{F5ED3652-B3F7-4F7A-AF9B-61EBCB98FAAC}"/>
+                <a16:creationId xmlns:a16="http://schemas.microsoft.com/office/drawing/2014/main" id="{48069102-7742-470A-A01E-54F27C28B024}"/>
               </a:ext>
             </a:extLst>
           </p:cNvPr>
@@ -48410,7 +50129,7 @@
           <p:cNvPr id="2" name="">
             <a:extLst xmlns:a="http://schemas.openxmlformats.org/drawingml/2006/main">
               <a:ext uri="{FF2B5EF4-FFF2-40B4-BE49-F238E27FC236}">
-                <a16:creationId xmlns:a16="http://schemas.microsoft.com/office/drawing/2014/main" id="{1FDBE4BE-F4F8-4940-B010-98838F96FCB8}"/>
+                <a16:creationId xmlns:a16="http://schemas.microsoft.com/office/drawing/2014/main" id="{6C65BB94-4E8A-4374-A425-57BF4C5F96B0}"/>
               </a:ext>
             </a:extLst>
           </p:cNvPr>
@@ -48568,7 +50287,7 @@
           <p:cNvPr id="3" name="">
             <a:extLst xmlns:a="http://schemas.openxmlformats.org/drawingml/2006/main">
               <a:ext uri="{FF2B5EF4-FFF2-40B4-BE49-F238E27FC236}">
-                <a16:creationId xmlns:a16="http://schemas.microsoft.com/office/drawing/2014/main" id="{10C283C5-4D61-429D-BF7B-B8610D337EC5}"/>
+                <a16:creationId xmlns:a16="http://schemas.microsoft.com/office/drawing/2014/main" id="{19808E4B-7EB9-424A-866C-41B78007C7C1}"/>
               </a:ext>
             </a:extLst>
           </p:cNvPr>
@@ -48726,7 +50445,7 @@
           <p:cNvPr id="4" name="">
             <a:extLst xmlns:a="http://schemas.openxmlformats.org/drawingml/2006/main">
               <a:ext uri="{FF2B5EF4-FFF2-40B4-BE49-F238E27FC236}">
-                <a16:creationId xmlns:a16="http://schemas.microsoft.com/office/drawing/2014/main" id="{EB179765-08B8-4BDC-872D-7B5E49F0AE6C}"/>
+                <a16:creationId xmlns:a16="http://schemas.microsoft.com/office/drawing/2014/main" id="{822B03B0-0800-4A7F-BA81-06085D091728}"/>
               </a:ext>
             </a:extLst>
           </p:cNvPr>
@@ -48736,7 +50455,7 @@
           <p:nvPr/>
         </p:nvPicPr>
         <p:blipFill>
-          <a:blip xmlns:r="http://schemas.openxmlformats.org/officeDocument/2006/relationships" xmlns:a="http://schemas.openxmlformats.org/drawingml/2006/main" r:embed="R1e1e7c4489754339"/>
+          <a:blip xmlns:r="http://schemas.openxmlformats.org/officeDocument/2006/relationships" xmlns:a="http://schemas.openxmlformats.org/drawingml/2006/main" r:embed="R8c809b7c021c4058"/>
           <a:stretch xmlns:a="http://schemas.openxmlformats.org/drawingml/2006/main"/>
         </p:blipFill>
         <p:spPr>
@@ -48754,7 +50473,7 @@
           <p:cNvPr id="5" name="">
             <a:extLst xmlns:a="http://schemas.openxmlformats.org/drawingml/2006/main">
               <a:ext uri="{FF2B5EF4-FFF2-40B4-BE49-F238E27FC236}">
-                <a16:creationId xmlns:a16="http://schemas.microsoft.com/office/drawing/2014/main" id="{2E9780B6-573D-4C09-BD91-A0AA1B9C87F8}"/>
+                <a16:creationId xmlns:a16="http://schemas.microsoft.com/office/drawing/2014/main" id="{ACAC85F7-8C8E-40E1-8653-7512622C110A}"/>
               </a:ext>
             </a:extLst>
           </p:cNvPr>
@@ -48912,7 +50631,7 @@
           <p:cNvPr id="6" name="">
             <a:extLst xmlns:a="http://schemas.openxmlformats.org/drawingml/2006/main">
               <a:ext uri="{FF2B5EF4-FFF2-40B4-BE49-F238E27FC236}">
-                <a16:creationId xmlns:a16="http://schemas.microsoft.com/office/drawing/2014/main" id="{0D75DF73-5639-4FB8-BA86-95EB017BE240}"/>
+                <a16:creationId xmlns:a16="http://schemas.microsoft.com/office/drawing/2014/main" id="{D2C0937F-8B88-4681-904F-475BA17269FE}"/>
               </a:ext>
             </a:extLst>
           </p:cNvPr>
@@ -49070,7 +50789,7 @@
           <p:cNvPr id="7" name="">
             <a:extLst xmlns:a="http://schemas.openxmlformats.org/drawingml/2006/main">
               <a:ext uri="{FF2B5EF4-FFF2-40B4-BE49-F238E27FC236}">
-                <a16:creationId xmlns:a16="http://schemas.microsoft.com/office/drawing/2014/main" id="{02EAE274-B14C-41BF-B79F-17F3404C6738}"/>
+                <a16:creationId xmlns:a16="http://schemas.microsoft.com/office/drawing/2014/main" id="{04D781FF-CAAC-4D69-8D7B-EF0EF720F523}"/>
               </a:ext>
             </a:extLst>
           </p:cNvPr>
@@ -49228,7 +50947,7 @@
           <p:cNvPr id="8" name="">
             <a:extLst xmlns:a="http://schemas.openxmlformats.org/drawingml/2006/main">
               <a:ext uri="{FF2B5EF4-FFF2-40B4-BE49-F238E27FC236}">
-                <a16:creationId xmlns:a16="http://schemas.microsoft.com/office/drawing/2014/main" id="{B1BD2EBA-D11B-4821-8F1E-51292E5B6434}"/>
+                <a16:creationId xmlns:a16="http://schemas.microsoft.com/office/drawing/2014/main" id="{42762100-600F-4C91-A528-77263F11B751}"/>
               </a:ext>
             </a:extLst>
           </p:cNvPr>
@@ -49386,7 +51105,7 @@
           <p:cNvPr id="9" name="">
             <a:extLst xmlns:a="http://schemas.openxmlformats.org/drawingml/2006/main">
               <a:ext uri="{FF2B5EF4-FFF2-40B4-BE49-F238E27FC236}">
-                <a16:creationId xmlns:a16="http://schemas.microsoft.com/office/drawing/2014/main" id="{82898DDD-4AE7-4B80-9C91-0E779301D7D3}"/>
+                <a16:creationId xmlns:a16="http://schemas.microsoft.com/office/drawing/2014/main" id="{5737CF0B-596D-4C62-B7D9-A9055A00C8BC}"/>
               </a:ext>
             </a:extLst>
           </p:cNvPr>
@@ -49544,7 +51263,7 @@
           <p:cNvPr id="10" name="">
             <a:extLst xmlns:a="http://schemas.openxmlformats.org/drawingml/2006/main">
               <a:ext uri="{FF2B5EF4-FFF2-40B4-BE49-F238E27FC236}">
-                <a16:creationId xmlns:a16="http://schemas.microsoft.com/office/drawing/2014/main" id="{D00CDDAB-6D7C-483E-8A2C-7451D0454763}"/>
+                <a16:creationId xmlns:a16="http://schemas.microsoft.com/office/drawing/2014/main" id="{03245595-9536-4502-9EE7-705A92268A2E}"/>
               </a:ext>
             </a:extLst>
           </p:cNvPr>
@@ -49702,7 +51421,7 @@
           <p:cNvPr id="11" name="">
             <a:extLst xmlns:a="http://schemas.openxmlformats.org/drawingml/2006/main">
               <a:ext uri="{FF2B5EF4-FFF2-40B4-BE49-F238E27FC236}">
-                <a16:creationId xmlns:a16="http://schemas.microsoft.com/office/drawing/2014/main" id="{5A493397-FC9D-4CCD-8882-59020B399ACE}"/>
+                <a16:creationId xmlns:a16="http://schemas.microsoft.com/office/drawing/2014/main" id="{12E8C6F2-E43D-4258-BD9E-813286113255}"/>
               </a:ext>
             </a:extLst>
           </p:cNvPr>
@@ -49860,7 +51579,7 @@
           <p:cNvPr id="12" name="">
             <a:extLst xmlns:a="http://schemas.openxmlformats.org/drawingml/2006/main">
               <a:ext uri="{FF2B5EF4-FFF2-40B4-BE49-F238E27FC236}">
-                <a16:creationId xmlns:a16="http://schemas.microsoft.com/office/drawing/2014/main" id="{8B7DF659-F64A-4D7A-9D4B-5C04093A2A36}"/>
+                <a16:creationId xmlns:a16="http://schemas.microsoft.com/office/drawing/2014/main" id="{F6B9F987-A8D1-4D13-ADCE-0D07B6F1DA51}"/>
               </a:ext>
             </a:extLst>
           </p:cNvPr>
@@ -50018,7 +51737,7 @@
           <p:cNvPr id="13" name="">
             <a:extLst xmlns:a="http://schemas.openxmlformats.org/drawingml/2006/main">
               <a:ext uri="{FF2B5EF4-FFF2-40B4-BE49-F238E27FC236}">
-                <a16:creationId xmlns:a16="http://schemas.microsoft.com/office/drawing/2014/main" id="{00B8A0F8-E26E-4211-91D6-00510EFE7B67}"/>
+                <a16:creationId xmlns:a16="http://schemas.microsoft.com/office/drawing/2014/main" id="{A64C4F08-BABD-44CE-AFB4-7D81E2B70342}"/>
               </a:ext>
             </a:extLst>
           </p:cNvPr>
@@ -50174,7 +51893,7 @@
     </p:spTree>
     <p:extLst>
       <p:ext uri="{BB962C8B-B14F-4D97-AF65-F5344CB8AC3E}">
-        <p14:creationId xmlns:p14="http://schemas.microsoft.com/office/powerpoint/2010/main" val="2049788244"/>
+        <p14:creationId xmlns:p14="http://schemas.microsoft.com/office/powerpoint/2010/main" val="1307865442"/>
       </p:ext>
     </p:extLst>
   </p:cSld>

--- a/lendet/2026-2027/mobile/lectures/ligjerata-07-kontrolli-mvp-rideshare-2026.pptx
+++ b/lendet/2026-2027/mobile/lectures/ligjerata-07-kontrolli-mvp-rideshare-2026.pptx
@@ -2,35 +2,35 @@
 <file path=ppt/presentation.xml><?xml version="1.0" encoding="utf-8"?>
 <p:presentation xmlns:p="http://schemas.openxmlformats.org/presentationml/2006/main">
   <p:sldMasterIdLst>
-    <p:sldMasterId xmlns:r="http://schemas.openxmlformats.org/officeDocument/2006/relationships" id="2147483648" r:id="Reae7f1c8315b4505"/>
+    <p:sldMasterId xmlns:r="http://schemas.openxmlformats.org/officeDocument/2006/relationships" id="2147483648" r:id="R9ecfd53f73db485c"/>
   </p:sldMasterIdLst>
   <p:sldIdLst>
-    <p:sldId xmlns:r="http://schemas.openxmlformats.org/officeDocument/2006/relationships" id="256" r:id="Rd34778afc006456f"/>
-    <p:sldId xmlns:r="http://schemas.openxmlformats.org/officeDocument/2006/relationships" id="257" r:id="Rcc0b57e9cd6946ee"/>
-    <p:sldId xmlns:r="http://schemas.openxmlformats.org/officeDocument/2006/relationships" id="258" r:id="R45b7a600c6954b67"/>
-    <p:sldId xmlns:r="http://schemas.openxmlformats.org/officeDocument/2006/relationships" id="259" r:id="R690f5f9f27a44b1c"/>
-    <p:sldId xmlns:r="http://schemas.openxmlformats.org/officeDocument/2006/relationships" id="260" r:id="R4b3dd44e1e104d75"/>
-    <p:sldId xmlns:r="http://schemas.openxmlformats.org/officeDocument/2006/relationships" id="261" r:id="R0dd0c3de3dae480e"/>
-    <p:sldId xmlns:r="http://schemas.openxmlformats.org/officeDocument/2006/relationships" id="262" r:id="Rcb9e5146843246ba"/>
-    <p:sldId xmlns:r="http://schemas.openxmlformats.org/officeDocument/2006/relationships" id="263" r:id="R8890a8820dda40e4"/>
-    <p:sldId xmlns:r="http://schemas.openxmlformats.org/officeDocument/2006/relationships" id="264" r:id="Re43c2c8531cb46aa"/>
-    <p:sldId xmlns:r="http://schemas.openxmlformats.org/officeDocument/2006/relationships" id="265" r:id="R088238a11f694369"/>
-    <p:sldId xmlns:r="http://schemas.openxmlformats.org/officeDocument/2006/relationships" id="266" r:id="R7b2b360dce1b43c0"/>
-    <p:sldId xmlns:r="http://schemas.openxmlformats.org/officeDocument/2006/relationships" id="267" r:id="Rd896cf5226664b02"/>
-    <p:sldId xmlns:r="http://schemas.openxmlformats.org/officeDocument/2006/relationships" id="268" r:id="Rba0400967b6c4bc6"/>
-    <p:sldId xmlns:r="http://schemas.openxmlformats.org/officeDocument/2006/relationships" id="269" r:id="R2eacc7c61fac4380"/>
-    <p:sldId xmlns:r="http://schemas.openxmlformats.org/officeDocument/2006/relationships" id="270" r:id="R754469c7ebcb4340"/>
-    <p:sldId xmlns:r="http://schemas.openxmlformats.org/officeDocument/2006/relationships" id="271" r:id="R1da0f65f5be945f8"/>
-    <p:sldId xmlns:r="http://schemas.openxmlformats.org/officeDocument/2006/relationships" id="272" r:id="Re8915cc7f7444e28"/>
-    <p:sldId xmlns:r="http://schemas.openxmlformats.org/officeDocument/2006/relationships" id="273" r:id="R195b89831e994d0c"/>
-    <p:sldId xmlns:r="http://schemas.openxmlformats.org/officeDocument/2006/relationships" id="274" r:id="R29d57445e1c54ad2"/>
-    <p:sldId xmlns:r="http://schemas.openxmlformats.org/officeDocument/2006/relationships" id="275" r:id="R6736ce76eb8745c8"/>
-    <p:sldId xmlns:r="http://schemas.openxmlformats.org/officeDocument/2006/relationships" id="276" r:id="R8f1e0c08fcd64b17"/>
-    <p:sldId xmlns:r="http://schemas.openxmlformats.org/officeDocument/2006/relationships" id="277" r:id="Re660de4f07fb46f6"/>
-    <p:sldId xmlns:r="http://schemas.openxmlformats.org/officeDocument/2006/relationships" id="278" r:id="Reb9b4fce210a477b"/>
-    <p:sldId xmlns:r="http://schemas.openxmlformats.org/officeDocument/2006/relationships" id="279" r:id="Re08d5ac479384f04"/>
-    <p:sldId xmlns:r="http://schemas.openxmlformats.org/officeDocument/2006/relationships" id="280" r:id="Rb7d25723e65f403f"/>
-    <p:sldId xmlns:r="http://schemas.openxmlformats.org/officeDocument/2006/relationships" id="281" r:id="R28432506a38a4c96"/>
+    <p:sldId xmlns:r="http://schemas.openxmlformats.org/officeDocument/2006/relationships" id="256" r:id="R5af369145faa43b7"/>
+    <p:sldId xmlns:r="http://schemas.openxmlformats.org/officeDocument/2006/relationships" id="257" r:id="R60767fd420eb4994"/>
+    <p:sldId xmlns:r="http://schemas.openxmlformats.org/officeDocument/2006/relationships" id="258" r:id="R8cfcf1c9bded43a2"/>
+    <p:sldId xmlns:r="http://schemas.openxmlformats.org/officeDocument/2006/relationships" id="259" r:id="R0f9f73246c954f77"/>
+    <p:sldId xmlns:r="http://schemas.openxmlformats.org/officeDocument/2006/relationships" id="260" r:id="R04c0cef51c2b4a96"/>
+    <p:sldId xmlns:r="http://schemas.openxmlformats.org/officeDocument/2006/relationships" id="261" r:id="R18d92deb33b84bba"/>
+    <p:sldId xmlns:r="http://schemas.openxmlformats.org/officeDocument/2006/relationships" id="262" r:id="R65f9bb67e2664b45"/>
+    <p:sldId xmlns:r="http://schemas.openxmlformats.org/officeDocument/2006/relationships" id="263" r:id="Rd607a62e515044e1"/>
+    <p:sldId xmlns:r="http://schemas.openxmlformats.org/officeDocument/2006/relationships" id="264" r:id="R81d970d65601476f"/>
+    <p:sldId xmlns:r="http://schemas.openxmlformats.org/officeDocument/2006/relationships" id="265" r:id="R0721710c53be4d54"/>
+    <p:sldId xmlns:r="http://schemas.openxmlformats.org/officeDocument/2006/relationships" id="266" r:id="R5b4f55d498e14b50"/>
+    <p:sldId xmlns:r="http://schemas.openxmlformats.org/officeDocument/2006/relationships" id="267" r:id="R01df290f056b4d85"/>
+    <p:sldId xmlns:r="http://schemas.openxmlformats.org/officeDocument/2006/relationships" id="268" r:id="R01b64555e0534051"/>
+    <p:sldId xmlns:r="http://schemas.openxmlformats.org/officeDocument/2006/relationships" id="269" r:id="R81a42f6881a54a92"/>
+    <p:sldId xmlns:r="http://schemas.openxmlformats.org/officeDocument/2006/relationships" id="270" r:id="R61f46b774ae7486a"/>
+    <p:sldId xmlns:r="http://schemas.openxmlformats.org/officeDocument/2006/relationships" id="271" r:id="R7919e30919774087"/>
+    <p:sldId xmlns:r="http://schemas.openxmlformats.org/officeDocument/2006/relationships" id="272" r:id="Rf2b5783a5f9d45d4"/>
+    <p:sldId xmlns:r="http://schemas.openxmlformats.org/officeDocument/2006/relationships" id="273" r:id="R414814e950ad4273"/>
+    <p:sldId xmlns:r="http://schemas.openxmlformats.org/officeDocument/2006/relationships" id="274" r:id="Rdd887a374c7c4c84"/>
+    <p:sldId xmlns:r="http://schemas.openxmlformats.org/officeDocument/2006/relationships" id="275" r:id="R657d74b631ea4792"/>
+    <p:sldId xmlns:r="http://schemas.openxmlformats.org/officeDocument/2006/relationships" id="276" r:id="R060ff97b273d4865"/>
+    <p:sldId xmlns:r="http://schemas.openxmlformats.org/officeDocument/2006/relationships" id="277" r:id="Rc22d01004dcf417b"/>
+    <p:sldId xmlns:r="http://schemas.openxmlformats.org/officeDocument/2006/relationships" id="278" r:id="R9d54db79598b4d95"/>
+    <p:sldId xmlns:r="http://schemas.openxmlformats.org/officeDocument/2006/relationships" id="279" r:id="Ra8c19e0057f64847"/>
+    <p:sldId xmlns:r="http://schemas.openxmlformats.org/officeDocument/2006/relationships" id="280" r:id="Rc7f8755e432547df"/>
+    <p:sldId xmlns:r="http://schemas.openxmlformats.org/officeDocument/2006/relationships" id="281" r:id="R92ae32441b7e46b2"/>
   </p:sldIdLst>
   <p:sldSz cx="12192000" cy="6858000"/>
   <p:notesSz cx="6858000" cy="9144000"/>
@@ -54,7 +54,7 @@
           <p:cNvPr id="3" name="Title">
             <a:extLst xmlns:a="http://schemas.openxmlformats.org/drawingml/2006/main">
               <a:ext uri="{FF2B5EF4-FFF2-40B4-BE49-F238E27FC236}">
-                <a16:creationId xmlns:a16="http://schemas.microsoft.com/office/drawing/2014/main" id="{13973903-4D62-408D-9CD5-A8CF01598326}"/>
+                <a16:creationId xmlns:a16="http://schemas.microsoft.com/office/drawing/2014/main" id="{10DC3217-0E1F-443F-9191-C5BA623B4E8C}"/>
               </a:ext>
             </a:extLst>
           </p:cNvPr>
@@ -283,7 +283,7 @@
           <p:cNvPr id="2" name="Subtitle">
             <a:extLst xmlns:a="http://schemas.openxmlformats.org/drawingml/2006/main">
               <a:ext uri="{FF2B5EF4-FFF2-40B4-BE49-F238E27FC236}">
-                <a16:creationId xmlns:a16="http://schemas.microsoft.com/office/drawing/2014/main" id="{471BD2C2-A075-4560-8B06-71AD98C27FDF}"/>
+                <a16:creationId xmlns:a16="http://schemas.microsoft.com/office/drawing/2014/main" id="{1DC0A70C-B2B4-4ADB-84E6-E489ABB4CBD1}"/>
               </a:ext>
             </a:extLst>
           </p:cNvPr>
@@ -529,7 +529,7 @@
           <p:cNvPr id="2" name="Section title">
             <a:extLst xmlns:a="http://schemas.openxmlformats.org/drawingml/2006/main">
               <a:ext uri="{FF2B5EF4-FFF2-40B4-BE49-F238E27FC236}">
-                <a16:creationId xmlns:a16="http://schemas.microsoft.com/office/drawing/2014/main" id="{A857707F-5E5F-4892-BFEE-D0ACDF952EE3}"/>
+                <a16:creationId xmlns:a16="http://schemas.microsoft.com/office/drawing/2014/main" id="{2611831E-B565-446D-8D16-390BF241D7AC}"/>
               </a:ext>
             </a:extLst>
           </p:cNvPr>
@@ -775,7 +775,7 @@
           <p:cNvPr id="3" name="Title">
             <a:extLst xmlns:a="http://schemas.openxmlformats.org/drawingml/2006/main">
               <a:ext uri="{FF2B5EF4-FFF2-40B4-BE49-F238E27FC236}">
-                <a16:creationId xmlns:a16="http://schemas.microsoft.com/office/drawing/2014/main" id="{A08592CD-8C82-41F5-9DB8-A81979961DDB}"/>
+                <a16:creationId xmlns:a16="http://schemas.microsoft.com/office/drawing/2014/main" id="{2074F796-B737-430E-9C14-09C53C6C80A9}"/>
               </a:ext>
             </a:extLst>
           </p:cNvPr>
@@ -1004,7 +1004,7 @@
           <p:cNvPr id="2" name="Body">
             <a:extLst xmlns:a="http://schemas.openxmlformats.org/drawingml/2006/main">
               <a:ext uri="{FF2B5EF4-FFF2-40B4-BE49-F238E27FC236}">
-                <a16:creationId xmlns:a16="http://schemas.microsoft.com/office/drawing/2014/main" id="{F110BAA1-63EC-4DCD-8D46-19E8A9BE0F11}"/>
+                <a16:creationId xmlns:a16="http://schemas.microsoft.com/office/drawing/2014/main" id="{E7321C23-4605-463D-85AA-94F0CA4E1CCF}"/>
               </a:ext>
             </a:extLst>
           </p:cNvPr>
@@ -1250,7 +1250,7 @@
           <p:cNvPr id="4" name="Title">
             <a:extLst xmlns:a="http://schemas.openxmlformats.org/drawingml/2006/main">
               <a:ext uri="{FF2B5EF4-FFF2-40B4-BE49-F238E27FC236}">
-                <a16:creationId xmlns:a16="http://schemas.microsoft.com/office/drawing/2014/main" id="{96E19230-E2C4-493A-8434-DB6177897953}"/>
+                <a16:creationId xmlns:a16="http://schemas.microsoft.com/office/drawing/2014/main" id="{ECCA8379-FD22-474E-9B6B-10345AC9B601}"/>
               </a:ext>
             </a:extLst>
           </p:cNvPr>
@@ -1479,7 +1479,7 @@
           <p:cNvPr id="2" name="Left column">
             <a:extLst xmlns:a="http://schemas.openxmlformats.org/drawingml/2006/main">
               <a:ext uri="{FF2B5EF4-FFF2-40B4-BE49-F238E27FC236}">
-                <a16:creationId xmlns:a16="http://schemas.microsoft.com/office/drawing/2014/main" id="{5C904A23-6DB9-453D-9C14-0ED374000765}"/>
+                <a16:creationId xmlns:a16="http://schemas.microsoft.com/office/drawing/2014/main" id="{D63D3C62-03CB-4062-93A2-920F9E8DD70D}"/>
               </a:ext>
             </a:extLst>
           </p:cNvPr>
@@ -1708,7 +1708,7 @@
           <p:cNvPr id="3" name="Right column">
             <a:extLst xmlns:a="http://schemas.openxmlformats.org/drawingml/2006/main">
               <a:ext uri="{FF2B5EF4-FFF2-40B4-BE49-F238E27FC236}">
-                <a16:creationId xmlns:a16="http://schemas.microsoft.com/office/drawing/2014/main" id="{5539DF80-39D7-4C3D-AEBA-3337D7BF1481}"/>
+                <a16:creationId xmlns:a16="http://schemas.microsoft.com/office/drawing/2014/main" id="{907E5201-70A7-4B96-9476-B480F1B1B605}"/>
               </a:ext>
             </a:extLst>
           </p:cNvPr>
@@ -1954,7 +1954,7 @@
           <p:cNvPr id="3" name="Title">
             <a:extLst xmlns:a="http://schemas.openxmlformats.org/drawingml/2006/main">
               <a:ext uri="{FF2B5EF4-FFF2-40B4-BE49-F238E27FC236}">
-                <a16:creationId xmlns:a16="http://schemas.microsoft.com/office/drawing/2014/main" id="{A2F92925-1C42-4FD2-85AC-396F8DBD31ED}"/>
+                <a16:creationId xmlns:a16="http://schemas.microsoft.com/office/drawing/2014/main" id="{A360CC13-0154-499C-9F1F-5EE9A0D61A45}"/>
               </a:ext>
             </a:extLst>
           </p:cNvPr>
@@ -2183,7 +2183,7 @@
           <p:cNvPr id="2" name="Left column">
             <a:extLst xmlns:a="http://schemas.openxmlformats.org/drawingml/2006/main">
               <a:ext uri="{FF2B5EF4-FFF2-40B4-BE49-F238E27FC236}">
-                <a16:creationId xmlns:a16="http://schemas.microsoft.com/office/drawing/2014/main" id="{70F9AC71-A005-42E6-B657-061FE014FF54}"/>
+                <a16:creationId xmlns:a16="http://schemas.microsoft.com/office/drawing/2014/main" id="{04425080-35A9-45E5-86D4-B114579C6205}"/>
               </a:ext>
             </a:extLst>
           </p:cNvPr>
@@ -2450,12 +2450,12 @@
   </p:cSld>
   <p:clrMap bg1="lt1" tx1="dk1" bg2="lt2" tx2="dk2" accent1="accent1" accent2="accent2" accent3="accent3" accent4="accent4" accent5="accent5" accent6="accent6" hlink="hlink" folHlink="folHlink"/>
   <p:sldLayoutIdLst>
-    <p:sldLayoutId xmlns:r="http://schemas.openxmlformats.org/officeDocument/2006/relationships" id="2147483649" r:id="R13248a3504124b2e"/>
-    <p:sldLayoutId xmlns:r="http://schemas.openxmlformats.org/officeDocument/2006/relationships" id="2147483650" r:id="R6ced2f46f7984d7a"/>
-    <p:sldLayoutId xmlns:r="http://schemas.openxmlformats.org/officeDocument/2006/relationships" id="2147483651" r:id="Rf9cca6914dc74b9e"/>
-    <p:sldLayoutId xmlns:r="http://schemas.openxmlformats.org/officeDocument/2006/relationships" id="2147483652" r:id="Rae7f9a2a75d848a2"/>
-    <p:sldLayoutId xmlns:r="http://schemas.openxmlformats.org/officeDocument/2006/relationships" id="2147483653" r:id="R039413e912e045d8"/>
-    <p:sldLayoutId xmlns:r="http://schemas.openxmlformats.org/officeDocument/2006/relationships" id="2147483654" r:id="R754db82f368d4dac"/>
+    <p:sldLayoutId xmlns:r="http://schemas.openxmlformats.org/officeDocument/2006/relationships" id="2147483649" r:id="R4806c50ea8c74a24"/>
+    <p:sldLayoutId xmlns:r="http://schemas.openxmlformats.org/officeDocument/2006/relationships" id="2147483650" r:id="R1fc3e7ffb9384406"/>
+    <p:sldLayoutId xmlns:r="http://schemas.openxmlformats.org/officeDocument/2006/relationships" id="2147483651" r:id="R69eaf9f145034ca3"/>
+    <p:sldLayoutId xmlns:r="http://schemas.openxmlformats.org/officeDocument/2006/relationships" id="2147483652" r:id="R2ae14e7ee06d4f9a"/>
+    <p:sldLayoutId xmlns:r="http://schemas.openxmlformats.org/officeDocument/2006/relationships" id="2147483653" r:id="R13717c8016394171"/>
+    <p:sldLayoutId xmlns:r="http://schemas.openxmlformats.org/officeDocument/2006/relationships" id="2147483654" r:id="Rf426c85bc5c94c26"/>
   </p:sldLayoutIdLst>
   <p:txStyles>
     <p:titleStyle>
@@ -3006,7 +3006,7 @@
           <p:cNvPr id="15" name="">
             <a:extLst xmlns:a="http://schemas.openxmlformats.org/drawingml/2006/main">
               <a:ext uri="{FF2B5EF4-FFF2-40B4-BE49-F238E27FC236}">
-                <a16:creationId xmlns:a16="http://schemas.microsoft.com/office/drawing/2014/main" id="{F9917A7A-24BC-4FE0-B19B-2E7D2D9D0E85}"/>
+                <a16:creationId xmlns:a16="http://schemas.microsoft.com/office/drawing/2014/main" id="{95745FB2-3B23-478B-8163-6CDA5C8A81A8}"/>
               </a:ext>
             </a:extLst>
           </p:cNvPr>
@@ -3164,7 +3164,7 @@
           <p:cNvPr id="2" name="">
             <a:extLst xmlns:a="http://schemas.openxmlformats.org/drawingml/2006/main">
               <a:ext uri="{FF2B5EF4-FFF2-40B4-BE49-F238E27FC236}">
-                <a16:creationId xmlns:a16="http://schemas.microsoft.com/office/drawing/2014/main" id="{52FE4502-35A4-4308-84EF-6070BFB2E404}"/>
+                <a16:creationId xmlns:a16="http://schemas.microsoft.com/office/drawing/2014/main" id="{E0F92094-34CE-472D-A157-7E2A1EC77E45}"/>
               </a:ext>
             </a:extLst>
           </p:cNvPr>
@@ -3322,7 +3322,7 @@
           <p:cNvPr id="3" name="">
             <a:extLst xmlns:a="http://schemas.openxmlformats.org/drawingml/2006/main">
               <a:ext uri="{FF2B5EF4-FFF2-40B4-BE49-F238E27FC236}">
-                <a16:creationId xmlns:a16="http://schemas.microsoft.com/office/drawing/2014/main" id="{CFFE454C-3997-40AA-98E1-A66056B963F1}"/>
+                <a16:creationId xmlns:a16="http://schemas.microsoft.com/office/drawing/2014/main" id="{331647B0-0308-4ED8-BEDF-3BBD11A5499B}"/>
               </a:ext>
             </a:extLst>
           </p:cNvPr>
@@ -3332,7 +3332,7 @@
           <p:nvPr/>
         </p:nvPicPr>
         <p:blipFill>
-          <a:blip xmlns:r="http://schemas.openxmlformats.org/officeDocument/2006/relationships" xmlns:a="http://schemas.openxmlformats.org/drawingml/2006/main" r:embed="R43ce024a12794811"/>
+          <a:blip xmlns:r="http://schemas.openxmlformats.org/officeDocument/2006/relationships" xmlns:a="http://schemas.openxmlformats.org/drawingml/2006/main" r:embed="R567fc19c5d1a4155"/>
           <a:stretch xmlns:a="http://schemas.openxmlformats.org/drawingml/2006/main"/>
         </p:blipFill>
         <p:spPr>
@@ -3350,7 +3350,7 @@
           <p:cNvPr id="4" name="">
             <a:extLst xmlns:a="http://schemas.openxmlformats.org/drawingml/2006/main">
               <a:ext uri="{FF2B5EF4-FFF2-40B4-BE49-F238E27FC236}">
-                <a16:creationId xmlns:a16="http://schemas.microsoft.com/office/drawing/2014/main" id="{685A0B36-FF73-4A08-BED8-0C6CE1BA7081}"/>
+                <a16:creationId xmlns:a16="http://schemas.microsoft.com/office/drawing/2014/main" id="{39C365CE-4FDF-4584-8584-C1055C3EBEEE}"/>
               </a:ext>
             </a:extLst>
           </p:cNvPr>
@@ -3508,7 +3508,7 @@
           <p:cNvPr id="5" name="">
             <a:extLst xmlns:a="http://schemas.openxmlformats.org/drawingml/2006/main">
               <a:ext uri="{FF2B5EF4-FFF2-40B4-BE49-F238E27FC236}">
-                <a16:creationId xmlns:a16="http://schemas.microsoft.com/office/drawing/2014/main" id="{BB5C93CC-E2DE-492B-8DC7-1D30DF9898A0}"/>
+                <a16:creationId xmlns:a16="http://schemas.microsoft.com/office/drawing/2014/main" id="{056BFCA0-10EC-4FA4-9EB7-A44088415C06}"/>
               </a:ext>
             </a:extLst>
           </p:cNvPr>
@@ -3518,7 +3518,7 @@
           <p:nvPr/>
         </p:nvPicPr>
         <p:blipFill>
-          <a:blip xmlns:r="http://schemas.openxmlformats.org/officeDocument/2006/relationships" xmlns:a="http://schemas.openxmlformats.org/drawingml/2006/main" r:embed="R368e0e5634934bc0"/>
+          <a:blip xmlns:r="http://schemas.openxmlformats.org/officeDocument/2006/relationships" xmlns:a="http://schemas.openxmlformats.org/drawingml/2006/main" r:embed="R9fc976fb28714679"/>
           <a:stretch xmlns:a="http://schemas.openxmlformats.org/drawingml/2006/main"/>
         </p:blipFill>
         <p:spPr>
@@ -3536,7 +3536,7 @@
           <p:cNvPr id="6" name="">
             <a:extLst xmlns:a="http://schemas.openxmlformats.org/drawingml/2006/main">
               <a:ext uri="{FF2B5EF4-FFF2-40B4-BE49-F238E27FC236}">
-                <a16:creationId xmlns:a16="http://schemas.microsoft.com/office/drawing/2014/main" id="{AD001DA1-4630-4378-B128-C05F17C96924}"/>
+                <a16:creationId xmlns:a16="http://schemas.microsoft.com/office/drawing/2014/main" id="{F7F58F8C-08C9-43DF-B918-3A8D1111020A}"/>
               </a:ext>
             </a:extLst>
           </p:cNvPr>
@@ -3694,7 +3694,7 @@
           <p:cNvPr id="7" name="">
             <a:extLst xmlns:a="http://schemas.openxmlformats.org/drawingml/2006/main">
               <a:ext uri="{FF2B5EF4-FFF2-40B4-BE49-F238E27FC236}">
-                <a16:creationId xmlns:a16="http://schemas.microsoft.com/office/drawing/2014/main" id="{BA94190F-55C0-45B5-A385-E97D5E2E15B6}"/>
+                <a16:creationId xmlns:a16="http://schemas.microsoft.com/office/drawing/2014/main" id="{2CBB3EB8-C423-4ACB-9DB8-DB7B186B8E4F}"/>
               </a:ext>
             </a:extLst>
           </p:cNvPr>
@@ -3852,7 +3852,7 @@
           <p:cNvPr id="8" name="">
             <a:extLst xmlns:a="http://schemas.openxmlformats.org/drawingml/2006/main">
               <a:ext uri="{FF2B5EF4-FFF2-40B4-BE49-F238E27FC236}">
-                <a16:creationId xmlns:a16="http://schemas.microsoft.com/office/drawing/2014/main" id="{C5F9E8C5-1676-4F59-A716-20CEF92A149A}"/>
+                <a16:creationId xmlns:a16="http://schemas.microsoft.com/office/drawing/2014/main" id="{A77827E1-20F4-4CDC-934A-3B90882C14B2}"/>
               </a:ext>
             </a:extLst>
           </p:cNvPr>
@@ -3862,7 +3862,7 @@
           <p:nvPr/>
         </p:nvPicPr>
         <p:blipFill>
-          <a:blip xmlns:r="http://schemas.openxmlformats.org/officeDocument/2006/relationships" xmlns:a="http://schemas.openxmlformats.org/drawingml/2006/main" r:embed="R6239bf4956154f7d"/>
+          <a:blip xmlns:r="http://schemas.openxmlformats.org/officeDocument/2006/relationships" xmlns:a="http://schemas.openxmlformats.org/drawingml/2006/main" r:embed="Rc156115ec0b34e5b"/>
           <a:stretch xmlns:a="http://schemas.openxmlformats.org/drawingml/2006/main"/>
         </p:blipFill>
         <p:spPr>
@@ -3880,7 +3880,7 @@
           <p:cNvPr id="9" name="">
             <a:extLst xmlns:a="http://schemas.openxmlformats.org/drawingml/2006/main">
               <a:ext uri="{FF2B5EF4-FFF2-40B4-BE49-F238E27FC236}">
-                <a16:creationId xmlns:a16="http://schemas.microsoft.com/office/drawing/2014/main" id="{2E1264FA-FCA6-4CC1-BD6C-F11341864AC8}"/>
+                <a16:creationId xmlns:a16="http://schemas.microsoft.com/office/drawing/2014/main" id="{02DED3A1-7851-4743-A5E1-986200CAE5C4}"/>
               </a:ext>
             </a:extLst>
           </p:cNvPr>
@@ -4038,7 +4038,7 @@
           <p:cNvPr id="10" name="">
             <a:extLst xmlns:a="http://schemas.openxmlformats.org/drawingml/2006/main">
               <a:ext uri="{FF2B5EF4-FFF2-40B4-BE49-F238E27FC236}">
-                <a16:creationId xmlns:a16="http://schemas.microsoft.com/office/drawing/2014/main" id="{95071F7B-FFE3-4FB1-BC51-B3D4B5ACBB54}"/>
+                <a16:creationId xmlns:a16="http://schemas.microsoft.com/office/drawing/2014/main" id="{50C7139D-3E90-4DCE-B604-D0BC65FFEBD9}"/>
               </a:ext>
             </a:extLst>
           </p:cNvPr>
@@ -4196,7 +4196,7 @@
           <p:cNvPr id="11" name="">
             <a:extLst xmlns:a="http://schemas.openxmlformats.org/drawingml/2006/main">
               <a:ext uri="{FF2B5EF4-FFF2-40B4-BE49-F238E27FC236}">
-                <a16:creationId xmlns:a16="http://schemas.microsoft.com/office/drawing/2014/main" id="{2FFDC33A-FC69-4796-999A-B46DF21A8280}"/>
+                <a16:creationId xmlns:a16="http://schemas.microsoft.com/office/drawing/2014/main" id="{B6386A22-03B4-4A79-AA1B-B120CB82EDF3}"/>
               </a:ext>
             </a:extLst>
           </p:cNvPr>
@@ -4206,7 +4206,7 @@
           <p:nvPr/>
         </p:nvPicPr>
         <p:blipFill>
-          <a:blip xmlns:r="http://schemas.openxmlformats.org/officeDocument/2006/relationships" xmlns:a="http://schemas.openxmlformats.org/drawingml/2006/main" r:embed="R8e21fb55dddf4850"/>
+          <a:blip xmlns:r="http://schemas.openxmlformats.org/officeDocument/2006/relationships" xmlns:a="http://schemas.openxmlformats.org/drawingml/2006/main" r:embed="R715a143fe8ed4bf1"/>
           <a:stretch xmlns:a="http://schemas.openxmlformats.org/drawingml/2006/main"/>
         </p:blipFill>
         <p:spPr>
@@ -4224,7 +4224,7 @@
           <p:cNvPr id="12" name="">
             <a:extLst xmlns:a="http://schemas.openxmlformats.org/drawingml/2006/main">
               <a:ext uri="{FF2B5EF4-FFF2-40B4-BE49-F238E27FC236}">
-                <a16:creationId xmlns:a16="http://schemas.microsoft.com/office/drawing/2014/main" id="{106396E1-BC70-4D38-8DBF-15E824878E78}"/>
+                <a16:creationId xmlns:a16="http://schemas.microsoft.com/office/drawing/2014/main" id="{85498BC7-A366-498F-8E73-B7F182C4DCDB}"/>
               </a:ext>
             </a:extLst>
           </p:cNvPr>
@@ -4382,7 +4382,7 @@
           <p:cNvPr id="13" name="">
             <a:extLst xmlns:a="http://schemas.openxmlformats.org/drawingml/2006/main">
               <a:ext uri="{FF2B5EF4-FFF2-40B4-BE49-F238E27FC236}">
-                <a16:creationId xmlns:a16="http://schemas.microsoft.com/office/drawing/2014/main" id="{68DD2CAF-3236-445E-96C5-CE71AFC90856}"/>
+                <a16:creationId xmlns:a16="http://schemas.microsoft.com/office/drawing/2014/main" id="{4DC9BA20-5704-4D0F-935A-607EDCAB0FD4}"/>
               </a:ext>
             </a:extLst>
           </p:cNvPr>
@@ -4540,7 +4540,7 @@
           <p:cNvPr id="14" name="">
             <a:extLst xmlns:a="http://schemas.openxmlformats.org/drawingml/2006/main">
               <a:ext uri="{FF2B5EF4-FFF2-40B4-BE49-F238E27FC236}">
-                <a16:creationId xmlns:a16="http://schemas.microsoft.com/office/drawing/2014/main" id="{428DA86F-54FF-4DDE-8580-10290416CAE5}"/>
+                <a16:creationId xmlns:a16="http://schemas.microsoft.com/office/drawing/2014/main" id="{38ECFFAD-DFC6-40AF-9DDC-428D880F648C}"/>
               </a:ext>
             </a:extLst>
           </p:cNvPr>
@@ -4724,7 +4724,7 @@
     </p:spTree>
     <p:extLst>
       <p:ext uri="{BB962C8B-B14F-4D97-AF65-F5344CB8AC3E}">
-        <p14:creationId xmlns:p14="http://schemas.microsoft.com/office/powerpoint/2010/main" val="545945583"/>
+        <p14:creationId xmlns:p14="http://schemas.microsoft.com/office/powerpoint/2010/main" val="1315493315"/>
       </p:ext>
     </p:extLst>
   </p:cSld>
@@ -4755,7 +4755,7 @@
           <p:cNvPr id="14" name="">
             <a:extLst xmlns:a="http://schemas.openxmlformats.org/drawingml/2006/main">
               <a:ext uri="{FF2B5EF4-FFF2-40B4-BE49-F238E27FC236}">
-                <a16:creationId xmlns:a16="http://schemas.microsoft.com/office/drawing/2014/main" id="{8F37770F-D40E-4EBC-91EA-6FC1E2A4BA93}"/>
+                <a16:creationId xmlns:a16="http://schemas.microsoft.com/office/drawing/2014/main" id="{E9DC91C7-D888-4D0D-AB45-0BF6B8DE880A}"/>
               </a:ext>
             </a:extLst>
           </p:cNvPr>
@@ -4913,7 +4913,7 @@
           <p:cNvPr id="2" name="">
             <a:extLst xmlns:a="http://schemas.openxmlformats.org/drawingml/2006/main">
               <a:ext uri="{FF2B5EF4-FFF2-40B4-BE49-F238E27FC236}">
-                <a16:creationId xmlns:a16="http://schemas.microsoft.com/office/drawing/2014/main" id="{9E094D0F-B810-443E-8AA6-4BA1F578812B}"/>
+                <a16:creationId xmlns:a16="http://schemas.microsoft.com/office/drawing/2014/main" id="{2FA9A182-6C00-4B49-82C2-A841B7F52564}"/>
               </a:ext>
             </a:extLst>
           </p:cNvPr>
@@ -5071,7 +5071,7 @@
           <p:cNvPr id="3" name="">
             <a:extLst xmlns:a="http://schemas.openxmlformats.org/drawingml/2006/main">
               <a:ext uri="{FF2B5EF4-FFF2-40B4-BE49-F238E27FC236}">
-                <a16:creationId xmlns:a16="http://schemas.microsoft.com/office/drawing/2014/main" id="{1569F632-25AA-4387-829E-DAA23A9A1223}"/>
+                <a16:creationId xmlns:a16="http://schemas.microsoft.com/office/drawing/2014/main" id="{29F67C09-25A6-417F-8680-6A46F3C21323}"/>
               </a:ext>
             </a:extLst>
           </p:cNvPr>
@@ -5219,7 +5219,7 @@
                 <a:ea typeface="Arial"/>
                 <a:cs typeface="Arial"/>
               </a:rPr>
-              <a:t>Butoni u shtyp. A u rezervua vendi?</a:t>
+              <a:t>Rasti 3 · Klikim apo rezervim</a:t>
             </a:r>
           </a:p>
         </p:txBody>
@@ -5229,7 +5229,7 @@
           <p:cNvPr id="4" name="">
             <a:extLst xmlns:a="http://schemas.openxmlformats.org/drawingml/2006/main">
               <a:ext uri="{FF2B5EF4-FFF2-40B4-BE49-F238E27FC236}">
-                <a16:creationId xmlns:a16="http://schemas.microsoft.com/office/drawing/2014/main" id="{A2D6B3C4-6FBD-47A9-91F7-D4061DE1ED79}"/>
+                <a16:creationId xmlns:a16="http://schemas.microsoft.com/office/drawing/2014/main" id="{D4CE0430-932F-4C42-87F5-7DC1A5769E57}"/>
               </a:ext>
             </a:extLst>
           </p:cNvPr>
@@ -5239,7 +5239,7 @@
           <p:nvPr/>
         </p:nvPicPr>
         <p:blipFill>
-          <a:blip xmlns:r="http://schemas.openxmlformats.org/officeDocument/2006/relationships" xmlns:a="http://schemas.openxmlformats.org/drawingml/2006/main" r:embed="Rb049be8cca734d19"/>
+          <a:blip xmlns:r="http://schemas.openxmlformats.org/officeDocument/2006/relationships" xmlns:a="http://schemas.openxmlformats.org/drawingml/2006/main" r:embed="R515a334a4dd64997"/>
           <a:stretch xmlns:a="http://schemas.openxmlformats.org/drawingml/2006/main"/>
         </p:blipFill>
         <p:spPr>
@@ -5257,7 +5257,7 @@
           <p:cNvPr id="5" name="">
             <a:extLst xmlns:a="http://schemas.openxmlformats.org/drawingml/2006/main">
               <a:ext uri="{FF2B5EF4-FFF2-40B4-BE49-F238E27FC236}">
-                <a16:creationId xmlns:a16="http://schemas.microsoft.com/office/drawing/2014/main" id="{93A83BBC-11B9-4EBC-AED7-748A82B0F030}"/>
+                <a16:creationId xmlns:a16="http://schemas.microsoft.com/office/drawing/2014/main" id="{98B762BA-2533-415F-95E9-56651AAAA9A0}"/>
               </a:ext>
             </a:extLst>
           </p:cNvPr>
@@ -5415,7 +5415,7 @@
           <p:cNvPr id="6" name="">
             <a:extLst xmlns:a="http://schemas.openxmlformats.org/drawingml/2006/main">
               <a:ext uri="{FF2B5EF4-FFF2-40B4-BE49-F238E27FC236}">
-                <a16:creationId xmlns:a16="http://schemas.microsoft.com/office/drawing/2014/main" id="{91F9CB87-1963-48FF-9697-5CED2A7223FD}"/>
+                <a16:creationId xmlns:a16="http://schemas.microsoft.com/office/drawing/2014/main" id="{F1F1773B-4E60-4036-B67A-6AEDFEBCC925}"/>
               </a:ext>
             </a:extLst>
           </p:cNvPr>
@@ -5573,7 +5573,7 @@
           <p:cNvPr id="7" name="">
             <a:extLst xmlns:a="http://schemas.openxmlformats.org/drawingml/2006/main">
               <a:ext uri="{FF2B5EF4-FFF2-40B4-BE49-F238E27FC236}">
-                <a16:creationId xmlns:a16="http://schemas.microsoft.com/office/drawing/2014/main" id="{0C15A295-0C4F-46B3-9BA0-8CECD99BEA02}"/>
+                <a16:creationId xmlns:a16="http://schemas.microsoft.com/office/drawing/2014/main" id="{1665836D-FC3E-48AD-85E1-26C15420F01B}"/>
               </a:ext>
             </a:extLst>
           </p:cNvPr>
@@ -5731,7 +5731,7 @@
           <p:cNvPr id="8" name="">
             <a:extLst xmlns:a="http://schemas.openxmlformats.org/drawingml/2006/main">
               <a:ext uri="{FF2B5EF4-FFF2-40B4-BE49-F238E27FC236}">
-                <a16:creationId xmlns:a16="http://schemas.microsoft.com/office/drawing/2014/main" id="{C72F7287-D540-4419-977F-A1A6CA9C173D}"/>
+                <a16:creationId xmlns:a16="http://schemas.microsoft.com/office/drawing/2014/main" id="{6FDF59E7-674E-4785-A9D9-B27FC37A6EC1}"/>
               </a:ext>
             </a:extLst>
           </p:cNvPr>
@@ -5889,7 +5889,7 @@
           <p:cNvPr id="9" name="">
             <a:extLst xmlns:a="http://schemas.openxmlformats.org/drawingml/2006/main">
               <a:ext uri="{FF2B5EF4-FFF2-40B4-BE49-F238E27FC236}">
-                <a16:creationId xmlns:a16="http://schemas.microsoft.com/office/drawing/2014/main" id="{1C157C36-E8DF-4FF2-B505-9E8F906690A7}"/>
+                <a16:creationId xmlns:a16="http://schemas.microsoft.com/office/drawing/2014/main" id="{1EAB3828-334C-41E8-AC12-36FE6F0F9BCE}"/>
               </a:ext>
             </a:extLst>
           </p:cNvPr>
@@ -6047,7 +6047,7 @@
           <p:cNvPr id="10" name="">
             <a:extLst xmlns:a="http://schemas.openxmlformats.org/drawingml/2006/main">
               <a:ext uri="{FF2B5EF4-FFF2-40B4-BE49-F238E27FC236}">
-                <a16:creationId xmlns:a16="http://schemas.microsoft.com/office/drawing/2014/main" id="{D48F3AF6-B598-481F-8637-057003ADB779}"/>
+                <a16:creationId xmlns:a16="http://schemas.microsoft.com/office/drawing/2014/main" id="{9E59F7EC-F1F7-4A80-B447-BF48EFEFBD93}"/>
               </a:ext>
             </a:extLst>
           </p:cNvPr>
@@ -6205,7 +6205,7 @@
           <p:cNvPr id="11" name="">
             <a:extLst xmlns:a="http://schemas.openxmlformats.org/drawingml/2006/main">
               <a:ext uri="{FF2B5EF4-FFF2-40B4-BE49-F238E27FC236}">
-                <a16:creationId xmlns:a16="http://schemas.microsoft.com/office/drawing/2014/main" id="{F92785E3-7DA1-4246-B3D2-BBC2CEC83AE6}"/>
+                <a16:creationId xmlns:a16="http://schemas.microsoft.com/office/drawing/2014/main" id="{F945856F-44D0-4416-BE65-D43CF1030687}"/>
               </a:ext>
             </a:extLst>
           </p:cNvPr>
@@ -6363,7 +6363,7 @@
           <p:cNvPr id="12" name="">
             <a:extLst xmlns:a="http://schemas.openxmlformats.org/drawingml/2006/main">
               <a:ext uri="{FF2B5EF4-FFF2-40B4-BE49-F238E27FC236}">
-                <a16:creationId xmlns:a16="http://schemas.microsoft.com/office/drawing/2014/main" id="{44B3725E-7D40-480D-A5A4-F700AC5252E9}"/>
+                <a16:creationId xmlns:a16="http://schemas.microsoft.com/office/drawing/2014/main" id="{9FDC7402-A803-4519-86CB-542AA4317A84}"/>
               </a:ext>
             </a:extLst>
           </p:cNvPr>
@@ -6521,7 +6521,7 @@
           <p:cNvPr id="13" name="">
             <a:extLst xmlns:a="http://schemas.openxmlformats.org/drawingml/2006/main">
               <a:ext uri="{FF2B5EF4-FFF2-40B4-BE49-F238E27FC236}">
-                <a16:creationId xmlns:a16="http://schemas.microsoft.com/office/drawing/2014/main" id="{CFAE69FD-66E8-4623-A97E-5AAE96CF6D4A}"/>
+                <a16:creationId xmlns:a16="http://schemas.microsoft.com/office/drawing/2014/main" id="{833D8F84-59E5-4C50-B07B-7833D540687B}"/>
               </a:ext>
             </a:extLst>
           </p:cNvPr>
@@ -6677,7 +6677,7 @@
     </p:spTree>
     <p:extLst>
       <p:ext uri="{BB962C8B-B14F-4D97-AF65-F5344CB8AC3E}">
-        <p14:creationId xmlns:p14="http://schemas.microsoft.com/office/powerpoint/2010/main" val="203445185"/>
+        <p14:creationId xmlns:p14="http://schemas.microsoft.com/office/powerpoint/2010/main" val="323227487"/>
       </p:ext>
     </p:extLst>
   </p:cSld>
@@ -6708,7 +6708,7 @@
           <p:cNvPr id="14" name="">
             <a:extLst xmlns:a="http://schemas.openxmlformats.org/drawingml/2006/main">
               <a:ext uri="{FF2B5EF4-FFF2-40B4-BE49-F238E27FC236}">
-                <a16:creationId xmlns:a16="http://schemas.microsoft.com/office/drawing/2014/main" id="{129911DF-F26C-4063-B251-FEC5D8A296BA}"/>
+                <a16:creationId xmlns:a16="http://schemas.microsoft.com/office/drawing/2014/main" id="{EA7B71F0-0A6E-481C-AEEA-1746BE03CB79}"/>
               </a:ext>
             </a:extLst>
           </p:cNvPr>
@@ -6866,7 +6866,7 @@
           <p:cNvPr id="2" name="">
             <a:extLst xmlns:a="http://schemas.openxmlformats.org/drawingml/2006/main">
               <a:ext uri="{FF2B5EF4-FFF2-40B4-BE49-F238E27FC236}">
-                <a16:creationId xmlns:a16="http://schemas.microsoft.com/office/drawing/2014/main" id="{51AFD2EC-8DAE-4A02-AE36-25A2D84D2BAE}"/>
+                <a16:creationId xmlns:a16="http://schemas.microsoft.com/office/drawing/2014/main" id="{81A708DD-35D4-40CE-BA17-2C8FAD5FD8B3}"/>
               </a:ext>
             </a:extLst>
           </p:cNvPr>
@@ -7024,7 +7024,7 @@
           <p:cNvPr id="3" name="">
             <a:extLst xmlns:a="http://schemas.openxmlformats.org/drawingml/2006/main">
               <a:ext uri="{FF2B5EF4-FFF2-40B4-BE49-F238E27FC236}">
-                <a16:creationId xmlns:a16="http://schemas.microsoft.com/office/drawing/2014/main" id="{BD6C0040-56EB-4CE0-A535-7715E6488E1D}"/>
+                <a16:creationId xmlns:a16="http://schemas.microsoft.com/office/drawing/2014/main" id="{D8DDF026-CE50-4B5B-9897-49A42AD94772}"/>
               </a:ext>
             </a:extLst>
           </p:cNvPr>
@@ -7172,7 +7172,7 @@
                 <a:ea typeface="Arial"/>
                 <a:cs typeface="Arial"/>
               </a:rPr>
-              <a:t>Butoni u shtyp. A u rezervua vendi?</a:t>
+              <a:t>Rasti 3 · Klikim apo rezervim</a:t>
             </a:r>
           </a:p>
         </p:txBody>
@@ -7182,7 +7182,7 @@
           <p:cNvPr id="4" name="">
             <a:extLst xmlns:a="http://schemas.openxmlformats.org/drawingml/2006/main">
               <a:ext uri="{FF2B5EF4-FFF2-40B4-BE49-F238E27FC236}">
-                <a16:creationId xmlns:a16="http://schemas.microsoft.com/office/drawing/2014/main" id="{4C14607B-2010-4AF5-AD91-9056C2F1D0D6}"/>
+                <a16:creationId xmlns:a16="http://schemas.microsoft.com/office/drawing/2014/main" id="{993C939C-0B5B-4616-A957-FFAE73B2BBEC}"/>
               </a:ext>
             </a:extLst>
           </p:cNvPr>
@@ -7192,7 +7192,7 @@
           <p:nvPr/>
         </p:nvPicPr>
         <p:blipFill>
-          <a:blip xmlns:r="http://schemas.openxmlformats.org/officeDocument/2006/relationships" xmlns:a="http://schemas.openxmlformats.org/drawingml/2006/main" r:embed="Rb37ce0545aac4b78"/>
+          <a:blip xmlns:r="http://schemas.openxmlformats.org/officeDocument/2006/relationships" xmlns:a="http://schemas.openxmlformats.org/drawingml/2006/main" r:embed="R20fd52aeb99b45fb"/>
           <a:stretch xmlns:a="http://schemas.openxmlformats.org/drawingml/2006/main"/>
         </p:blipFill>
         <p:spPr>
@@ -7210,7 +7210,7 @@
           <p:cNvPr id="5" name="">
             <a:extLst xmlns:a="http://schemas.openxmlformats.org/drawingml/2006/main">
               <a:ext uri="{FF2B5EF4-FFF2-40B4-BE49-F238E27FC236}">
-                <a16:creationId xmlns:a16="http://schemas.microsoft.com/office/drawing/2014/main" id="{FAC3F144-D65D-4CD9-9F86-329CC15F5C9A}"/>
+                <a16:creationId xmlns:a16="http://schemas.microsoft.com/office/drawing/2014/main" id="{EEBC3675-CA9F-40DE-916A-E5174266FFE1}"/>
               </a:ext>
             </a:extLst>
           </p:cNvPr>
@@ -7368,7 +7368,7 @@
           <p:cNvPr id="6" name="">
             <a:extLst xmlns:a="http://schemas.openxmlformats.org/drawingml/2006/main">
               <a:ext uri="{FF2B5EF4-FFF2-40B4-BE49-F238E27FC236}">
-                <a16:creationId xmlns:a16="http://schemas.microsoft.com/office/drawing/2014/main" id="{61EA25B2-8C55-4DCA-9016-7D87C4A93FAA}"/>
+                <a16:creationId xmlns:a16="http://schemas.microsoft.com/office/drawing/2014/main" id="{1455CCD2-E0C7-4EE6-9CB5-18511CC67C15}"/>
               </a:ext>
             </a:extLst>
           </p:cNvPr>
@@ -7526,7 +7526,7 @@
           <p:cNvPr id="7" name="">
             <a:extLst xmlns:a="http://schemas.openxmlformats.org/drawingml/2006/main">
               <a:ext uri="{FF2B5EF4-FFF2-40B4-BE49-F238E27FC236}">
-                <a16:creationId xmlns:a16="http://schemas.microsoft.com/office/drawing/2014/main" id="{D2D72CBB-173C-4B69-B95B-31AFBC9D9FEA}"/>
+                <a16:creationId xmlns:a16="http://schemas.microsoft.com/office/drawing/2014/main" id="{EDB9E669-0C62-4D14-9ECC-D0D3277A104D}"/>
               </a:ext>
             </a:extLst>
           </p:cNvPr>
@@ -7536,7 +7536,7 @@
           <p:nvPr/>
         </p:nvPicPr>
         <p:blipFill>
-          <a:blip xmlns:r="http://schemas.openxmlformats.org/officeDocument/2006/relationships" xmlns:a="http://schemas.openxmlformats.org/drawingml/2006/main" r:embed="Ra3acdd5c70b44755"/>
+          <a:blip xmlns:r="http://schemas.openxmlformats.org/officeDocument/2006/relationships" xmlns:a="http://schemas.openxmlformats.org/drawingml/2006/main" r:embed="R42d8cadf474743a3"/>
           <a:stretch xmlns:a="http://schemas.openxmlformats.org/drawingml/2006/main"/>
         </p:blipFill>
         <p:spPr>
@@ -7554,7 +7554,7 @@
           <p:cNvPr id="8" name="">
             <a:extLst xmlns:a="http://schemas.openxmlformats.org/drawingml/2006/main">
               <a:ext uri="{FF2B5EF4-FFF2-40B4-BE49-F238E27FC236}">
-                <a16:creationId xmlns:a16="http://schemas.microsoft.com/office/drawing/2014/main" id="{DC09FD28-D566-49F7-A2F3-DDAE220EA3A4}"/>
+                <a16:creationId xmlns:a16="http://schemas.microsoft.com/office/drawing/2014/main" id="{B4D93B0C-B96B-4B08-B4C1-C5993D00A17C}"/>
               </a:ext>
             </a:extLst>
           </p:cNvPr>
@@ -7712,7 +7712,7 @@
           <p:cNvPr id="9" name="">
             <a:extLst xmlns:a="http://schemas.openxmlformats.org/drawingml/2006/main">
               <a:ext uri="{FF2B5EF4-FFF2-40B4-BE49-F238E27FC236}">
-                <a16:creationId xmlns:a16="http://schemas.microsoft.com/office/drawing/2014/main" id="{DACF8CBC-8F61-4D8A-8F67-BC219DB06076}"/>
+                <a16:creationId xmlns:a16="http://schemas.microsoft.com/office/drawing/2014/main" id="{565BD6E1-FFD8-4844-9819-B0D72B66CFB6}"/>
               </a:ext>
             </a:extLst>
           </p:cNvPr>
@@ -7870,7 +7870,7 @@
           <p:cNvPr id="10" name="">
             <a:extLst xmlns:a="http://schemas.openxmlformats.org/drawingml/2006/main">
               <a:ext uri="{FF2B5EF4-FFF2-40B4-BE49-F238E27FC236}">
-                <a16:creationId xmlns:a16="http://schemas.microsoft.com/office/drawing/2014/main" id="{3FBBEB34-A4E6-47DE-8A45-8056201BEA58}"/>
+                <a16:creationId xmlns:a16="http://schemas.microsoft.com/office/drawing/2014/main" id="{5F4D569A-3311-499C-BB8A-16695060DA5F}"/>
               </a:ext>
             </a:extLst>
           </p:cNvPr>
@@ -8028,7 +8028,7 @@
           <p:cNvPr id="11" name="">
             <a:extLst xmlns:a="http://schemas.openxmlformats.org/drawingml/2006/main">
               <a:ext uri="{FF2B5EF4-FFF2-40B4-BE49-F238E27FC236}">
-                <a16:creationId xmlns:a16="http://schemas.microsoft.com/office/drawing/2014/main" id="{BE1659E6-9EEF-4C4A-B2B0-A70BBAD47DBA}"/>
+                <a16:creationId xmlns:a16="http://schemas.microsoft.com/office/drawing/2014/main" id="{CF9E6C9E-6BDA-47D5-9220-8F37FA1989DA}"/>
               </a:ext>
             </a:extLst>
           </p:cNvPr>
@@ -8186,7 +8186,7 @@
           <p:cNvPr id="12" name="">
             <a:extLst xmlns:a="http://schemas.openxmlformats.org/drawingml/2006/main">
               <a:ext uri="{FF2B5EF4-FFF2-40B4-BE49-F238E27FC236}">
-                <a16:creationId xmlns:a16="http://schemas.microsoft.com/office/drawing/2014/main" id="{1FB80FB7-6770-4E5D-8EF2-5A9A1EBE2E8D}"/>
+                <a16:creationId xmlns:a16="http://schemas.microsoft.com/office/drawing/2014/main" id="{D3829120-D6E0-4B6E-BF15-F71DA3A468B8}"/>
               </a:ext>
             </a:extLst>
           </p:cNvPr>
@@ -8390,7 +8390,7 @@
           <p:cNvPr id="13" name="">
             <a:extLst xmlns:a="http://schemas.openxmlformats.org/drawingml/2006/main">
               <a:ext uri="{FF2B5EF4-FFF2-40B4-BE49-F238E27FC236}">
-                <a16:creationId xmlns:a16="http://schemas.microsoft.com/office/drawing/2014/main" id="{69E35005-3A60-4B93-8500-2A1262ACD519}"/>
+                <a16:creationId xmlns:a16="http://schemas.microsoft.com/office/drawing/2014/main" id="{84776C19-F0CF-411F-A076-4830A588CF5B}"/>
               </a:ext>
             </a:extLst>
           </p:cNvPr>
@@ -8546,7 +8546,7 @@
     </p:spTree>
     <p:extLst>
       <p:ext uri="{BB962C8B-B14F-4D97-AF65-F5344CB8AC3E}">
-        <p14:creationId xmlns:p14="http://schemas.microsoft.com/office/powerpoint/2010/main" val="1152078858"/>
+        <p14:creationId xmlns:p14="http://schemas.microsoft.com/office/powerpoint/2010/main" val="1439221406"/>
       </p:ext>
     </p:extLst>
   </p:cSld>
@@ -8577,7 +8577,7 @@
           <p:cNvPr id="16" name="">
             <a:extLst xmlns:a="http://schemas.openxmlformats.org/drawingml/2006/main">
               <a:ext uri="{FF2B5EF4-FFF2-40B4-BE49-F238E27FC236}">
-                <a16:creationId xmlns:a16="http://schemas.microsoft.com/office/drawing/2014/main" id="{3B7F1217-5F5E-4360-9FCC-86FB3BB0C16A}"/>
+                <a16:creationId xmlns:a16="http://schemas.microsoft.com/office/drawing/2014/main" id="{55066C95-2304-44CB-93B7-F14F6FB22E2B}"/>
               </a:ext>
             </a:extLst>
           </p:cNvPr>
@@ -8735,7 +8735,7 @@
           <p:cNvPr id="2" name="">
             <a:extLst xmlns:a="http://schemas.openxmlformats.org/drawingml/2006/main">
               <a:ext uri="{FF2B5EF4-FFF2-40B4-BE49-F238E27FC236}">
-                <a16:creationId xmlns:a16="http://schemas.microsoft.com/office/drawing/2014/main" id="{69E64F46-701F-4B3A-BF8F-6CEEE7B6A9A0}"/>
+                <a16:creationId xmlns:a16="http://schemas.microsoft.com/office/drawing/2014/main" id="{DA91AE5B-7D31-4349-AB39-791FEB440290}"/>
               </a:ext>
             </a:extLst>
           </p:cNvPr>
@@ -8893,7 +8893,7 @@
           <p:cNvPr id="3" name="">
             <a:extLst xmlns:a="http://schemas.openxmlformats.org/drawingml/2006/main">
               <a:ext uri="{FF2B5EF4-FFF2-40B4-BE49-F238E27FC236}">
-                <a16:creationId xmlns:a16="http://schemas.microsoft.com/office/drawing/2014/main" id="{D7DDCBCD-28F6-4FB8-8746-EBE6C4D1F528}"/>
+                <a16:creationId xmlns:a16="http://schemas.microsoft.com/office/drawing/2014/main" id="{C8E6E137-A13D-4823-ABC8-A34D3D992B76}"/>
               </a:ext>
             </a:extLst>
           </p:cNvPr>
@@ -9041,7 +9041,7 @@
                 <a:ea typeface="Arial"/>
                 <a:cs typeface="Arial"/>
               </a:rPr>
-              <a:t>Një klikim dhe tri kuptime</a:t>
+              <a:t>Rasti 3 · Klikim apo rezervim</a:t>
             </a:r>
           </a:p>
         </p:txBody>
@@ -9051,7 +9051,7 @@
           <p:cNvPr id="4" name="">
             <a:extLst xmlns:a="http://schemas.openxmlformats.org/drawingml/2006/main">
               <a:ext uri="{FF2B5EF4-FFF2-40B4-BE49-F238E27FC236}">
-                <a16:creationId xmlns:a16="http://schemas.microsoft.com/office/drawing/2014/main" id="{F25951C5-7A25-4F84-8249-392CE6D798B6}"/>
+                <a16:creationId xmlns:a16="http://schemas.microsoft.com/office/drawing/2014/main" id="{ED03EAF6-B77A-4EBD-97E7-BE72AE5DA466}"/>
               </a:ext>
             </a:extLst>
           </p:cNvPr>
@@ -9061,7 +9061,7 @@
           <p:nvPr/>
         </p:nvPicPr>
         <p:blipFill>
-          <a:blip xmlns:r="http://schemas.openxmlformats.org/officeDocument/2006/relationships" xmlns:a="http://schemas.openxmlformats.org/drawingml/2006/main" r:embed="R7c386e1938ef403f"/>
+          <a:blip xmlns:r="http://schemas.openxmlformats.org/officeDocument/2006/relationships" xmlns:a="http://schemas.openxmlformats.org/drawingml/2006/main" r:embed="R7e8982cf284b46ba"/>
           <a:stretch xmlns:a="http://schemas.openxmlformats.org/drawingml/2006/main"/>
         </p:blipFill>
         <p:spPr>
@@ -9079,7 +9079,7 @@
           <p:cNvPr id="5" name="">
             <a:extLst xmlns:a="http://schemas.openxmlformats.org/drawingml/2006/main">
               <a:ext uri="{FF2B5EF4-FFF2-40B4-BE49-F238E27FC236}">
-                <a16:creationId xmlns:a16="http://schemas.microsoft.com/office/drawing/2014/main" id="{0D916325-0874-4F85-9365-F86722601CEB}"/>
+                <a16:creationId xmlns:a16="http://schemas.microsoft.com/office/drawing/2014/main" id="{EE79F9DE-9497-4D5B-A999-221AB65E3564}"/>
               </a:ext>
             </a:extLst>
           </p:cNvPr>
@@ -9237,7 +9237,7 @@
           <p:cNvPr id="6" name="">
             <a:extLst xmlns:a="http://schemas.openxmlformats.org/drawingml/2006/main">
               <a:ext uri="{FF2B5EF4-FFF2-40B4-BE49-F238E27FC236}">
-                <a16:creationId xmlns:a16="http://schemas.microsoft.com/office/drawing/2014/main" id="{ADA65900-1BA4-42FC-805C-DA657525DA2B}"/>
+                <a16:creationId xmlns:a16="http://schemas.microsoft.com/office/drawing/2014/main" id="{90A7AD6B-0F33-445A-BA26-1787A94E85FE}"/>
               </a:ext>
             </a:extLst>
           </p:cNvPr>
@@ -9395,7 +9395,7 @@
           <p:cNvPr id="7" name="">
             <a:extLst xmlns:a="http://schemas.openxmlformats.org/drawingml/2006/main">
               <a:ext uri="{FF2B5EF4-FFF2-40B4-BE49-F238E27FC236}">
-                <a16:creationId xmlns:a16="http://schemas.microsoft.com/office/drawing/2014/main" id="{8EA19215-93C4-4223-921D-35C47A7DBA66}"/>
+                <a16:creationId xmlns:a16="http://schemas.microsoft.com/office/drawing/2014/main" id="{D2BF75C4-B31A-4D1E-8A4B-4A4FB86E52E3}"/>
               </a:ext>
             </a:extLst>
           </p:cNvPr>
@@ -9405,7 +9405,7 @@
           <p:nvPr/>
         </p:nvPicPr>
         <p:blipFill>
-          <a:blip xmlns:r="http://schemas.openxmlformats.org/officeDocument/2006/relationships" xmlns:a="http://schemas.openxmlformats.org/drawingml/2006/main" r:embed="R752fae869f494c4b"/>
+          <a:blip xmlns:r="http://schemas.openxmlformats.org/officeDocument/2006/relationships" xmlns:a="http://schemas.openxmlformats.org/drawingml/2006/main" r:embed="Ra34f9a024bcf48b7"/>
           <a:stretch xmlns:a="http://schemas.openxmlformats.org/drawingml/2006/main"/>
         </p:blipFill>
         <p:spPr>
@@ -9423,7 +9423,7 @@
           <p:cNvPr id="8" name="">
             <a:extLst xmlns:a="http://schemas.openxmlformats.org/drawingml/2006/main">
               <a:ext uri="{FF2B5EF4-FFF2-40B4-BE49-F238E27FC236}">
-                <a16:creationId xmlns:a16="http://schemas.microsoft.com/office/drawing/2014/main" id="{2F9AA48E-5424-47A3-9A13-7FEB47E40F9C}"/>
+                <a16:creationId xmlns:a16="http://schemas.microsoft.com/office/drawing/2014/main" id="{5E0FC45B-2C07-4688-99C4-D7F6724498CE}"/>
               </a:ext>
             </a:extLst>
           </p:cNvPr>
@@ -9581,7 +9581,7 @@
           <p:cNvPr id="9" name="">
             <a:extLst xmlns:a="http://schemas.openxmlformats.org/drawingml/2006/main">
               <a:ext uri="{FF2B5EF4-FFF2-40B4-BE49-F238E27FC236}">
-                <a16:creationId xmlns:a16="http://schemas.microsoft.com/office/drawing/2014/main" id="{2B889295-F5D1-453E-9B5E-DEA499F6852F}"/>
+                <a16:creationId xmlns:a16="http://schemas.microsoft.com/office/drawing/2014/main" id="{F2F4929E-AF82-4754-BD92-16605518F919}"/>
               </a:ext>
             </a:extLst>
           </p:cNvPr>
@@ -9739,7 +9739,7 @@
           <p:cNvPr id="10" name="">
             <a:extLst xmlns:a="http://schemas.openxmlformats.org/drawingml/2006/main">
               <a:ext uri="{FF2B5EF4-FFF2-40B4-BE49-F238E27FC236}">
-                <a16:creationId xmlns:a16="http://schemas.microsoft.com/office/drawing/2014/main" id="{4A22B751-6B04-452E-A45C-8D6A98A3687E}"/>
+                <a16:creationId xmlns:a16="http://schemas.microsoft.com/office/drawing/2014/main" id="{20387C1A-95A4-4829-AF3E-0978108CEA5D}"/>
               </a:ext>
             </a:extLst>
           </p:cNvPr>
@@ -9749,7 +9749,7 @@
           <p:nvPr/>
         </p:nvPicPr>
         <p:blipFill>
-          <a:blip xmlns:r="http://schemas.openxmlformats.org/officeDocument/2006/relationships" xmlns:a="http://schemas.openxmlformats.org/drawingml/2006/main" r:embed="Rb5111d6db8d34d85"/>
+          <a:blip xmlns:r="http://schemas.openxmlformats.org/officeDocument/2006/relationships" xmlns:a="http://schemas.openxmlformats.org/drawingml/2006/main" r:embed="R24bb838110484a11"/>
           <a:stretch xmlns:a="http://schemas.openxmlformats.org/drawingml/2006/main"/>
         </p:blipFill>
         <p:spPr>
@@ -9767,7 +9767,7 @@
           <p:cNvPr id="11" name="">
             <a:extLst xmlns:a="http://schemas.openxmlformats.org/drawingml/2006/main">
               <a:ext uri="{FF2B5EF4-FFF2-40B4-BE49-F238E27FC236}">
-                <a16:creationId xmlns:a16="http://schemas.microsoft.com/office/drawing/2014/main" id="{17AB108B-0480-4E9F-A7AB-28D03EBA79CF}"/>
+                <a16:creationId xmlns:a16="http://schemas.microsoft.com/office/drawing/2014/main" id="{EEE0D0E7-EAAE-4219-A1EA-5F663424F230}"/>
               </a:ext>
             </a:extLst>
           </p:cNvPr>
@@ -9925,7 +9925,7 @@
           <p:cNvPr id="12" name="">
             <a:extLst xmlns:a="http://schemas.openxmlformats.org/drawingml/2006/main">
               <a:ext uri="{FF2B5EF4-FFF2-40B4-BE49-F238E27FC236}">
-                <a16:creationId xmlns:a16="http://schemas.microsoft.com/office/drawing/2014/main" id="{13F0F4B0-903A-4C9C-9016-1A9DE2E99716}"/>
+                <a16:creationId xmlns:a16="http://schemas.microsoft.com/office/drawing/2014/main" id="{7E0F64E9-CDE3-46C8-AD03-1C944D035E5C}"/>
               </a:ext>
             </a:extLst>
           </p:cNvPr>
@@ -10083,7 +10083,7 @@
           <p:cNvPr id="13" name="">
             <a:extLst xmlns:a="http://schemas.openxmlformats.org/drawingml/2006/main">
               <a:ext uri="{FF2B5EF4-FFF2-40B4-BE49-F238E27FC236}">
-                <a16:creationId xmlns:a16="http://schemas.microsoft.com/office/drawing/2014/main" id="{8BE2765B-4C65-4276-A94B-348067CBF1C5}"/>
+                <a16:creationId xmlns:a16="http://schemas.microsoft.com/office/drawing/2014/main" id="{75BC385E-4851-4EA2-BE2B-02235872010C}"/>
               </a:ext>
             </a:extLst>
           </p:cNvPr>
@@ -10269,7 +10269,7 @@
           <p:cNvPr id="14" name="">
             <a:extLst xmlns:a="http://schemas.openxmlformats.org/drawingml/2006/main">
               <a:ext uri="{FF2B5EF4-FFF2-40B4-BE49-F238E27FC236}">
-                <a16:creationId xmlns:a16="http://schemas.microsoft.com/office/drawing/2014/main" id="{AD47DB2C-D76F-463B-9CBD-9B94AFC240B4}"/>
+                <a16:creationId xmlns:a16="http://schemas.microsoft.com/office/drawing/2014/main" id="{F154988D-99F6-41A0-9130-E88EB91F0E84}"/>
               </a:ext>
             </a:extLst>
           </p:cNvPr>
@@ -10427,7 +10427,7 @@
           <p:cNvPr id="15" name="">
             <a:extLst xmlns:a="http://schemas.openxmlformats.org/drawingml/2006/main">
               <a:ext uri="{FF2B5EF4-FFF2-40B4-BE49-F238E27FC236}">
-                <a16:creationId xmlns:a16="http://schemas.microsoft.com/office/drawing/2014/main" id="{8BD2511F-4C05-48A8-9DAD-32EFE9DBD600}"/>
+                <a16:creationId xmlns:a16="http://schemas.microsoft.com/office/drawing/2014/main" id="{A53BEEE5-A21E-4EDA-93E9-D11FC9E5F252}"/>
               </a:ext>
             </a:extLst>
           </p:cNvPr>
@@ -10583,7 +10583,7 @@
     </p:spTree>
     <p:extLst>
       <p:ext uri="{BB962C8B-B14F-4D97-AF65-F5344CB8AC3E}">
-        <p14:creationId xmlns:p14="http://schemas.microsoft.com/office/powerpoint/2010/main" val="89007771"/>
+        <p14:creationId xmlns:p14="http://schemas.microsoft.com/office/powerpoint/2010/main" val="922961122"/>
       </p:ext>
     </p:extLst>
   </p:cSld>
@@ -10614,7 +10614,7 @@
           <p:cNvPr id="14" name="">
             <a:extLst xmlns:a="http://schemas.openxmlformats.org/drawingml/2006/main">
               <a:ext uri="{FF2B5EF4-FFF2-40B4-BE49-F238E27FC236}">
-                <a16:creationId xmlns:a16="http://schemas.microsoft.com/office/drawing/2014/main" id="{A8AC9282-BE6A-4BB7-B03A-5D30A988299F}"/>
+                <a16:creationId xmlns:a16="http://schemas.microsoft.com/office/drawing/2014/main" id="{F604D4EC-AC01-4CA5-BE41-21362AB960BE}"/>
               </a:ext>
             </a:extLst>
           </p:cNvPr>
@@ -10772,7 +10772,7 @@
           <p:cNvPr id="2" name="">
             <a:extLst xmlns:a="http://schemas.openxmlformats.org/drawingml/2006/main">
               <a:ext uri="{FF2B5EF4-FFF2-40B4-BE49-F238E27FC236}">
-                <a16:creationId xmlns:a16="http://schemas.microsoft.com/office/drawing/2014/main" id="{1F3F8DC2-1B80-433A-BD24-9168973EC3E6}"/>
+                <a16:creationId xmlns:a16="http://schemas.microsoft.com/office/drawing/2014/main" id="{55C214CB-0245-4AE1-A9FB-D6D57B6C8310}"/>
               </a:ext>
             </a:extLst>
           </p:cNvPr>
@@ -10930,7 +10930,7 @@
           <p:cNvPr id="3" name="">
             <a:extLst xmlns:a="http://schemas.openxmlformats.org/drawingml/2006/main">
               <a:ext uri="{FF2B5EF4-FFF2-40B4-BE49-F238E27FC236}">
-                <a16:creationId xmlns:a16="http://schemas.microsoft.com/office/drawing/2014/main" id="{07DA20FF-4628-4C78-9797-878D36331E28}"/>
+                <a16:creationId xmlns:a16="http://schemas.microsoft.com/office/drawing/2014/main" id="{0957E0D1-CEF7-4067-9406-F2F0F270CC17}"/>
               </a:ext>
             </a:extLst>
           </p:cNvPr>
@@ -11078,7 +11078,7 @@
                 <a:ea typeface="Arial"/>
                 <a:cs typeface="Arial"/>
               </a:rPr>
-              <a:t>Nga simptoma te shkaku</a:t>
+              <a:t>Rasti 1 · Lista dhe detajet</a:t>
             </a:r>
           </a:p>
         </p:txBody>
@@ -11088,7 +11088,7 @@
           <p:cNvPr id="4" name="">
             <a:extLst xmlns:a="http://schemas.openxmlformats.org/drawingml/2006/main">
               <a:ext uri="{FF2B5EF4-FFF2-40B4-BE49-F238E27FC236}">
-                <a16:creationId xmlns:a16="http://schemas.microsoft.com/office/drawing/2014/main" id="{495B911A-2F1C-45F5-80EF-81F0B28A39B4}"/>
+                <a16:creationId xmlns:a16="http://schemas.microsoft.com/office/drawing/2014/main" id="{30ABD4F3-CF86-439D-B2E6-BEFF97DA9C81}"/>
               </a:ext>
             </a:extLst>
           </p:cNvPr>
@@ -11098,7 +11098,7 @@
           <p:nvPr/>
         </p:nvPicPr>
         <p:blipFill>
-          <a:blip xmlns:r="http://schemas.openxmlformats.org/officeDocument/2006/relationships" xmlns:a="http://schemas.openxmlformats.org/drawingml/2006/main" r:embed="Refa721cfdeaa4214"/>
+          <a:blip xmlns:r="http://schemas.openxmlformats.org/officeDocument/2006/relationships" xmlns:a="http://schemas.openxmlformats.org/drawingml/2006/main" r:embed="Rd336007735984a90"/>
           <a:stretch xmlns:a="http://schemas.openxmlformats.org/drawingml/2006/main"/>
         </p:blipFill>
         <p:spPr>
@@ -11116,7 +11116,7 @@
           <p:cNvPr id="5" name="">
             <a:extLst xmlns:a="http://schemas.openxmlformats.org/drawingml/2006/main">
               <a:ext uri="{FF2B5EF4-FFF2-40B4-BE49-F238E27FC236}">
-                <a16:creationId xmlns:a16="http://schemas.microsoft.com/office/drawing/2014/main" id="{C853C07C-B86A-4C50-9CE7-24BD57F4F385}"/>
+                <a16:creationId xmlns:a16="http://schemas.microsoft.com/office/drawing/2014/main" id="{786FC273-0F95-4319-A39C-9CFFFFBE0397}"/>
               </a:ext>
             </a:extLst>
           </p:cNvPr>
@@ -11274,7 +11274,7 @@
           <p:cNvPr id="6" name="">
             <a:extLst xmlns:a="http://schemas.openxmlformats.org/drawingml/2006/main">
               <a:ext uri="{FF2B5EF4-FFF2-40B4-BE49-F238E27FC236}">
-                <a16:creationId xmlns:a16="http://schemas.microsoft.com/office/drawing/2014/main" id="{644907D1-8B26-42C2-AC29-068E58E7687F}"/>
+                <a16:creationId xmlns:a16="http://schemas.microsoft.com/office/drawing/2014/main" id="{459F01A8-7C37-4943-85C4-5D99C9F6F2A0}"/>
               </a:ext>
             </a:extLst>
           </p:cNvPr>
@@ -11432,7 +11432,7 @@
           <p:cNvPr id="7" name="">
             <a:extLst xmlns:a="http://schemas.openxmlformats.org/drawingml/2006/main">
               <a:ext uri="{FF2B5EF4-FFF2-40B4-BE49-F238E27FC236}">
-                <a16:creationId xmlns:a16="http://schemas.microsoft.com/office/drawing/2014/main" id="{C932D2DF-6CE9-46C2-960D-72E6DEBF0E6B}"/>
+                <a16:creationId xmlns:a16="http://schemas.microsoft.com/office/drawing/2014/main" id="{034E520E-15BA-41AB-9CF6-60D10B9CB729}"/>
               </a:ext>
             </a:extLst>
           </p:cNvPr>
@@ -11442,7 +11442,7 @@
           <p:nvPr/>
         </p:nvPicPr>
         <p:blipFill>
-          <a:blip xmlns:r="http://schemas.openxmlformats.org/officeDocument/2006/relationships" xmlns:a="http://schemas.openxmlformats.org/drawingml/2006/main" r:embed="R41454f69246f4067"/>
+          <a:blip xmlns:r="http://schemas.openxmlformats.org/officeDocument/2006/relationships" xmlns:a="http://schemas.openxmlformats.org/drawingml/2006/main" r:embed="R3b769e02426b4316"/>
           <a:stretch xmlns:a="http://schemas.openxmlformats.org/drawingml/2006/main"/>
         </p:blipFill>
         <p:spPr>
@@ -11460,7 +11460,7 @@
           <p:cNvPr id="8" name="">
             <a:extLst xmlns:a="http://schemas.openxmlformats.org/drawingml/2006/main">
               <a:ext uri="{FF2B5EF4-FFF2-40B4-BE49-F238E27FC236}">
-                <a16:creationId xmlns:a16="http://schemas.microsoft.com/office/drawing/2014/main" id="{5DF87871-331D-41E1-9CD0-BB1ED55CA38C}"/>
+                <a16:creationId xmlns:a16="http://schemas.microsoft.com/office/drawing/2014/main" id="{AFE6D13B-DEDD-4B32-B5E2-9C071A62FC1A}"/>
               </a:ext>
             </a:extLst>
           </p:cNvPr>
@@ -11618,7 +11618,7 @@
           <p:cNvPr id="9" name="">
             <a:extLst xmlns:a="http://schemas.openxmlformats.org/drawingml/2006/main">
               <a:ext uri="{FF2B5EF4-FFF2-40B4-BE49-F238E27FC236}">
-                <a16:creationId xmlns:a16="http://schemas.microsoft.com/office/drawing/2014/main" id="{F63A940E-2C5C-4E90-A0C4-81FC3989A6BB}"/>
+                <a16:creationId xmlns:a16="http://schemas.microsoft.com/office/drawing/2014/main" id="{786C8270-862D-42ED-A53D-1F3751A6BC68}"/>
               </a:ext>
             </a:extLst>
           </p:cNvPr>
@@ -11776,7 +11776,7 @@
           <p:cNvPr id="10" name="">
             <a:extLst xmlns:a="http://schemas.openxmlformats.org/drawingml/2006/main">
               <a:ext uri="{FF2B5EF4-FFF2-40B4-BE49-F238E27FC236}">
-                <a16:creationId xmlns:a16="http://schemas.microsoft.com/office/drawing/2014/main" id="{3BF8206E-C40C-458B-8531-57A5C0D5E7D4}"/>
+                <a16:creationId xmlns:a16="http://schemas.microsoft.com/office/drawing/2014/main" id="{902E7163-8249-4ADE-93AA-DC2121979B89}"/>
               </a:ext>
             </a:extLst>
           </p:cNvPr>
@@ -11786,7 +11786,7 @@
           <p:nvPr/>
         </p:nvPicPr>
         <p:blipFill>
-          <a:blip xmlns:r="http://schemas.openxmlformats.org/officeDocument/2006/relationships" xmlns:a="http://schemas.openxmlformats.org/drawingml/2006/main" r:embed="R9c2ab4b2c51247b0"/>
+          <a:blip xmlns:r="http://schemas.openxmlformats.org/officeDocument/2006/relationships" xmlns:a="http://schemas.openxmlformats.org/drawingml/2006/main" r:embed="R8d8525cad1d14921"/>
           <a:stretch xmlns:a="http://schemas.openxmlformats.org/drawingml/2006/main"/>
         </p:blipFill>
         <p:spPr>
@@ -11804,7 +11804,7 @@
           <p:cNvPr id="11" name="">
             <a:extLst xmlns:a="http://schemas.openxmlformats.org/drawingml/2006/main">
               <a:ext uri="{FF2B5EF4-FFF2-40B4-BE49-F238E27FC236}">
-                <a16:creationId xmlns:a16="http://schemas.microsoft.com/office/drawing/2014/main" id="{9801C76C-376B-45BA-B7C3-9FEA77495164}"/>
+                <a16:creationId xmlns:a16="http://schemas.microsoft.com/office/drawing/2014/main" id="{D48F606F-E6F1-4EB4-BF69-02AC6B49D1AC}"/>
               </a:ext>
             </a:extLst>
           </p:cNvPr>
@@ -11962,7 +11962,7 @@
           <p:cNvPr id="12" name="">
             <a:extLst xmlns:a="http://schemas.openxmlformats.org/drawingml/2006/main">
               <a:ext uri="{FF2B5EF4-FFF2-40B4-BE49-F238E27FC236}">
-                <a16:creationId xmlns:a16="http://schemas.microsoft.com/office/drawing/2014/main" id="{EB0CDA24-AAE4-4FFF-BDB2-0B7064731591}"/>
+                <a16:creationId xmlns:a16="http://schemas.microsoft.com/office/drawing/2014/main" id="{85A34662-3324-4F9D-82A8-30E747FCEE10}"/>
               </a:ext>
             </a:extLst>
           </p:cNvPr>
@@ -12120,7 +12120,7 @@
           <p:cNvPr id="13" name="">
             <a:extLst xmlns:a="http://schemas.openxmlformats.org/drawingml/2006/main">
               <a:ext uri="{FF2B5EF4-FFF2-40B4-BE49-F238E27FC236}">
-                <a16:creationId xmlns:a16="http://schemas.microsoft.com/office/drawing/2014/main" id="{271B2C55-8685-4D24-80C7-C187BE1AB645}"/>
+                <a16:creationId xmlns:a16="http://schemas.microsoft.com/office/drawing/2014/main" id="{476D122A-685E-41F8-9D8C-5CB53A366B9D}"/>
               </a:ext>
             </a:extLst>
           </p:cNvPr>
@@ -12304,7 +12304,7 @@
     </p:spTree>
     <p:extLst>
       <p:ext uri="{BB962C8B-B14F-4D97-AF65-F5344CB8AC3E}">
-        <p14:creationId xmlns:p14="http://schemas.microsoft.com/office/powerpoint/2010/main" val="1789410645"/>
+        <p14:creationId xmlns:p14="http://schemas.microsoft.com/office/powerpoint/2010/main" val="621368719"/>
       </p:ext>
     </p:extLst>
   </p:cSld>
@@ -12335,7 +12335,7 @@
           <p:cNvPr id="14" name="">
             <a:extLst xmlns:a="http://schemas.openxmlformats.org/drawingml/2006/main">
               <a:ext uri="{FF2B5EF4-FFF2-40B4-BE49-F238E27FC236}">
-                <a16:creationId xmlns:a16="http://schemas.microsoft.com/office/drawing/2014/main" id="{A0888FFF-C3A9-4C2E-BCA8-0880BECB49E7}"/>
+                <a16:creationId xmlns:a16="http://schemas.microsoft.com/office/drawing/2014/main" id="{04AA8764-D56F-44C7-B9B5-A53DF1A8733B}"/>
               </a:ext>
             </a:extLst>
           </p:cNvPr>
@@ -12493,7 +12493,7 @@
           <p:cNvPr id="2" name="">
             <a:extLst xmlns:a="http://schemas.openxmlformats.org/drawingml/2006/main">
               <a:ext uri="{FF2B5EF4-FFF2-40B4-BE49-F238E27FC236}">
-                <a16:creationId xmlns:a16="http://schemas.microsoft.com/office/drawing/2014/main" id="{7117CAC7-596F-4D80-8E76-0F28E7E542E8}"/>
+                <a16:creationId xmlns:a16="http://schemas.microsoft.com/office/drawing/2014/main" id="{909B1944-247F-470A-A7C5-7F0C1F8C3A12}"/>
               </a:ext>
             </a:extLst>
           </p:cNvPr>
@@ -12651,7 +12651,7 @@
           <p:cNvPr id="3" name="">
             <a:extLst xmlns:a="http://schemas.openxmlformats.org/drawingml/2006/main">
               <a:ext uri="{FF2B5EF4-FFF2-40B4-BE49-F238E27FC236}">
-                <a16:creationId xmlns:a16="http://schemas.microsoft.com/office/drawing/2014/main" id="{0B9DBBED-3E98-4628-9594-7CD3C182575E}"/>
+                <a16:creationId xmlns:a16="http://schemas.microsoft.com/office/drawing/2014/main" id="{AEE10CB3-6349-46F2-AEF7-91F65B609845}"/>
               </a:ext>
             </a:extLst>
           </p:cNvPr>
@@ -12799,7 +12799,7 @@
                 <a:ea typeface="Arial"/>
                 <a:cs typeface="Arial"/>
               </a:rPr>
-              <a:t>Ikona online është ndezur</a:t>
+              <a:t>Rasti 4 · Kopja pa internet</a:t>
             </a:r>
           </a:p>
         </p:txBody>
@@ -12809,7 +12809,7 @@
           <p:cNvPr id="4" name="">
             <a:extLst xmlns:a="http://schemas.openxmlformats.org/drawingml/2006/main">
               <a:ext uri="{FF2B5EF4-FFF2-40B4-BE49-F238E27FC236}">
-                <a16:creationId xmlns:a16="http://schemas.microsoft.com/office/drawing/2014/main" id="{8D55725E-26FF-4D74-B47B-C175C64080BA}"/>
+                <a16:creationId xmlns:a16="http://schemas.microsoft.com/office/drawing/2014/main" id="{7C1BF272-D127-49A7-853C-059C8D8406C9}"/>
               </a:ext>
             </a:extLst>
           </p:cNvPr>
@@ -12819,7 +12819,7 @@
           <p:nvPr/>
         </p:nvPicPr>
         <p:blipFill>
-          <a:blip xmlns:r="http://schemas.openxmlformats.org/officeDocument/2006/relationships" xmlns:a="http://schemas.openxmlformats.org/drawingml/2006/main" r:embed="R91a9b5f16ce340bb"/>
+          <a:blip xmlns:r="http://schemas.openxmlformats.org/officeDocument/2006/relationships" xmlns:a="http://schemas.openxmlformats.org/drawingml/2006/main" r:embed="R0e54dd6b3e2d4914"/>
           <a:stretch xmlns:a="http://schemas.openxmlformats.org/drawingml/2006/main"/>
         </p:blipFill>
         <p:spPr>
@@ -12837,7 +12837,7 @@
           <p:cNvPr id="5" name="">
             <a:extLst xmlns:a="http://schemas.openxmlformats.org/drawingml/2006/main">
               <a:ext uri="{FF2B5EF4-FFF2-40B4-BE49-F238E27FC236}">
-                <a16:creationId xmlns:a16="http://schemas.microsoft.com/office/drawing/2014/main" id="{C5F2DBF4-DB0A-4E4B-AC24-D8DCA306CB97}"/>
+                <a16:creationId xmlns:a16="http://schemas.microsoft.com/office/drawing/2014/main" id="{6469CFC4-1380-4259-BDE0-1BC85591D351}"/>
               </a:ext>
             </a:extLst>
           </p:cNvPr>
@@ -12995,7 +12995,7 @@
           <p:cNvPr id="6" name="">
             <a:extLst xmlns:a="http://schemas.openxmlformats.org/drawingml/2006/main">
               <a:ext uri="{FF2B5EF4-FFF2-40B4-BE49-F238E27FC236}">
-                <a16:creationId xmlns:a16="http://schemas.microsoft.com/office/drawing/2014/main" id="{B6424F7B-CA52-404D-9F4E-001FD9F8C79E}"/>
+                <a16:creationId xmlns:a16="http://schemas.microsoft.com/office/drawing/2014/main" id="{446B2CBE-10A3-47FC-AC47-F2EBD3DBC2DD}"/>
               </a:ext>
             </a:extLst>
           </p:cNvPr>
@@ -13153,7 +13153,7 @@
           <p:cNvPr id="7" name="">
             <a:extLst xmlns:a="http://schemas.openxmlformats.org/drawingml/2006/main">
               <a:ext uri="{FF2B5EF4-FFF2-40B4-BE49-F238E27FC236}">
-                <a16:creationId xmlns:a16="http://schemas.microsoft.com/office/drawing/2014/main" id="{CFCFD3CB-8FD9-4D92-8C5B-3A5C29CEF905}"/>
+                <a16:creationId xmlns:a16="http://schemas.microsoft.com/office/drawing/2014/main" id="{132BB83E-E254-47FC-BA5D-23DF96F513E1}"/>
               </a:ext>
             </a:extLst>
           </p:cNvPr>
@@ -13311,7 +13311,7 @@
           <p:cNvPr id="8" name="">
             <a:extLst xmlns:a="http://schemas.openxmlformats.org/drawingml/2006/main">
               <a:ext uri="{FF2B5EF4-FFF2-40B4-BE49-F238E27FC236}">
-                <a16:creationId xmlns:a16="http://schemas.microsoft.com/office/drawing/2014/main" id="{62FE5679-FD42-402C-8C51-4E69FB502F30}"/>
+                <a16:creationId xmlns:a16="http://schemas.microsoft.com/office/drawing/2014/main" id="{FE992EAE-71EC-481F-8A18-40C26DFCD571}"/>
               </a:ext>
             </a:extLst>
           </p:cNvPr>
@@ -13469,7 +13469,7 @@
           <p:cNvPr id="9" name="">
             <a:extLst xmlns:a="http://schemas.openxmlformats.org/drawingml/2006/main">
               <a:ext uri="{FF2B5EF4-FFF2-40B4-BE49-F238E27FC236}">
-                <a16:creationId xmlns:a16="http://schemas.microsoft.com/office/drawing/2014/main" id="{1286AA5E-B8AD-406F-A5AD-2B9237DEFA7F}"/>
+                <a16:creationId xmlns:a16="http://schemas.microsoft.com/office/drawing/2014/main" id="{D0B2559A-C647-44E4-8459-F411FC307BA9}"/>
               </a:ext>
             </a:extLst>
           </p:cNvPr>
@@ -13627,7 +13627,7 @@
           <p:cNvPr id="10" name="">
             <a:extLst xmlns:a="http://schemas.openxmlformats.org/drawingml/2006/main">
               <a:ext uri="{FF2B5EF4-FFF2-40B4-BE49-F238E27FC236}">
-                <a16:creationId xmlns:a16="http://schemas.microsoft.com/office/drawing/2014/main" id="{1DB562EF-5228-4E6E-AE00-09A7B4073BF1}"/>
+                <a16:creationId xmlns:a16="http://schemas.microsoft.com/office/drawing/2014/main" id="{EF0576E1-6CF2-4109-B289-183FBEF31D36}"/>
               </a:ext>
             </a:extLst>
           </p:cNvPr>
@@ -13785,7 +13785,7 @@
           <p:cNvPr id="11" name="">
             <a:extLst xmlns:a="http://schemas.openxmlformats.org/drawingml/2006/main">
               <a:ext uri="{FF2B5EF4-FFF2-40B4-BE49-F238E27FC236}">
-                <a16:creationId xmlns:a16="http://schemas.microsoft.com/office/drawing/2014/main" id="{79C08952-B675-4573-8D16-9D969449AE74}"/>
+                <a16:creationId xmlns:a16="http://schemas.microsoft.com/office/drawing/2014/main" id="{E35B07A6-FC11-4B1E-84B3-B4FB3E6C05CF}"/>
               </a:ext>
             </a:extLst>
           </p:cNvPr>
@@ -13943,7 +13943,7 @@
           <p:cNvPr id="12" name="">
             <a:extLst xmlns:a="http://schemas.openxmlformats.org/drawingml/2006/main">
               <a:ext uri="{FF2B5EF4-FFF2-40B4-BE49-F238E27FC236}">
-                <a16:creationId xmlns:a16="http://schemas.microsoft.com/office/drawing/2014/main" id="{3F1614D8-F8EB-435A-8ACE-95A07CB8F006}"/>
+                <a16:creationId xmlns:a16="http://schemas.microsoft.com/office/drawing/2014/main" id="{BFE60B18-1019-4127-B316-4F99200FD537}"/>
               </a:ext>
             </a:extLst>
           </p:cNvPr>
@@ -14101,7 +14101,7 @@
           <p:cNvPr id="13" name="">
             <a:extLst xmlns:a="http://schemas.openxmlformats.org/drawingml/2006/main">
               <a:ext uri="{FF2B5EF4-FFF2-40B4-BE49-F238E27FC236}">
-                <a16:creationId xmlns:a16="http://schemas.microsoft.com/office/drawing/2014/main" id="{14D849A6-727B-43D7-86D5-33AC3251AA22}"/>
+                <a16:creationId xmlns:a16="http://schemas.microsoft.com/office/drawing/2014/main" id="{B5D6777B-E004-4393-9FEE-C60C1E701F4E}"/>
               </a:ext>
             </a:extLst>
           </p:cNvPr>
@@ -14257,7 +14257,7 @@
     </p:spTree>
     <p:extLst>
       <p:ext uri="{BB962C8B-B14F-4D97-AF65-F5344CB8AC3E}">
-        <p14:creationId xmlns:p14="http://schemas.microsoft.com/office/powerpoint/2010/main" val="625887381"/>
+        <p14:creationId xmlns:p14="http://schemas.microsoft.com/office/powerpoint/2010/main" val="368083471"/>
       </p:ext>
     </p:extLst>
   </p:cSld>
@@ -14288,7 +14288,7 @@
           <p:cNvPr id="14" name="">
             <a:extLst xmlns:a="http://schemas.openxmlformats.org/drawingml/2006/main">
               <a:ext uri="{FF2B5EF4-FFF2-40B4-BE49-F238E27FC236}">
-                <a16:creationId xmlns:a16="http://schemas.microsoft.com/office/drawing/2014/main" id="{29D4B85F-9CE8-41FD-AB03-1899D6DA3179}"/>
+                <a16:creationId xmlns:a16="http://schemas.microsoft.com/office/drawing/2014/main" id="{498F4EAD-17F7-42AF-9E8D-E2DA06F3270B}"/>
               </a:ext>
             </a:extLst>
           </p:cNvPr>
@@ -14446,7 +14446,7 @@
           <p:cNvPr id="2" name="">
             <a:extLst xmlns:a="http://schemas.openxmlformats.org/drawingml/2006/main">
               <a:ext uri="{FF2B5EF4-FFF2-40B4-BE49-F238E27FC236}">
-                <a16:creationId xmlns:a16="http://schemas.microsoft.com/office/drawing/2014/main" id="{DD356299-6B22-4F39-99A4-78DB468556FA}"/>
+                <a16:creationId xmlns:a16="http://schemas.microsoft.com/office/drawing/2014/main" id="{8504BA62-48F1-4802-AC68-55DE57082EFD}"/>
               </a:ext>
             </a:extLst>
           </p:cNvPr>
@@ -14604,7 +14604,7 @@
           <p:cNvPr id="3" name="">
             <a:extLst xmlns:a="http://schemas.openxmlformats.org/drawingml/2006/main">
               <a:ext uri="{FF2B5EF4-FFF2-40B4-BE49-F238E27FC236}">
-                <a16:creationId xmlns:a16="http://schemas.microsoft.com/office/drawing/2014/main" id="{5BDF7E39-4061-4C1A-B618-1D630D1FFC22}"/>
+                <a16:creationId xmlns:a16="http://schemas.microsoft.com/office/drawing/2014/main" id="{ABA44248-E95D-44C7-BB72-9547F8BF120A}"/>
               </a:ext>
             </a:extLst>
           </p:cNvPr>
@@ -14752,7 +14752,7 @@
                 <a:ea typeface="Arial"/>
                 <a:cs typeface="Arial"/>
               </a:rPr>
-              <a:t>Ikona online është ndezur</a:t>
+              <a:t>Rasti 4 · Kopja pa internet</a:t>
             </a:r>
           </a:p>
         </p:txBody>
@@ -14762,7 +14762,7 @@
           <p:cNvPr id="4" name="">
             <a:extLst xmlns:a="http://schemas.openxmlformats.org/drawingml/2006/main">
               <a:ext uri="{FF2B5EF4-FFF2-40B4-BE49-F238E27FC236}">
-                <a16:creationId xmlns:a16="http://schemas.microsoft.com/office/drawing/2014/main" id="{F110FECF-BC2E-49A7-A15A-3D5E3F3C5B23}"/>
+                <a16:creationId xmlns:a16="http://schemas.microsoft.com/office/drawing/2014/main" id="{091F3C29-A94B-4E5E-83C2-61FCB02293EC}"/>
               </a:ext>
             </a:extLst>
           </p:cNvPr>
@@ -14772,7 +14772,7 @@
           <p:nvPr/>
         </p:nvPicPr>
         <p:blipFill>
-          <a:blip xmlns:r="http://schemas.openxmlformats.org/officeDocument/2006/relationships" xmlns:a="http://schemas.openxmlformats.org/drawingml/2006/main" r:embed="Rd17fa663290d447c"/>
+          <a:blip xmlns:r="http://schemas.openxmlformats.org/officeDocument/2006/relationships" xmlns:a="http://schemas.openxmlformats.org/drawingml/2006/main" r:embed="Rb5a9d0e52bc345b9"/>
           <a:stretch xmlns:a="http://schemas.openxmlformats.org/drawingml/2006/main"/>
         </p:blipFill>
         <p:spPr>
@@ -14790,7 +14790,7 @@
           <p:cNvPr id="5" name="">
             <a:extLst xmlns:a="http://schemas.openxmlformats.org/drawingml/2006/main">
               <a:ext uri="{FF2B5EF4-FFF2-40B4-BE49-F238E27FC236}">
-                <a16:creationId xmlns:a16="http://schemas.microsoft.com/office/drawing/2014/main" id="{5A3F8793-6851-44E1-929A-C3F1A9FBFCB0}"/>
+                <a16:creationId xmlns:a16="http://schemas.microsoft.com/office/drawing/2014/main" id="{7615DAA7-69C1-4832-BAF7-8AFBCA7DAC60}"/>
               </a:ext>
             </a:extLst>
           </p:cNvPr>
@@ -14948,7 +14948,7 @@
           <p:cNvPr id="6" name="">
             <a:extLst xmlns:a="http://schemas.openxmlformats.org/drawingml/2006/main">
               <a:ext uri="{FF2B5EF4-FFF2-40B4-BE49-F238E27FC236}">
-                <a16:creationId xmlns:a16="http://schemas.microsoft.com/office/drawing/2014/main" id="{5254C597-C9FA-4CAD-9682-EAF6F69F1661}"/>
+                <a16:creationId xmlns:a16="http://schemas.microsoft.com/office/drawing/2014/main" id="{46D69733-AAE2-4B62-B31F-39BE6F545912}"/>
               </a:ext>
             </a:extLst>
           </p:cNvPr>
@@ -15106,7 +15106,7 @@
           <p:cNvPr id="7" name="">
             <a:extLst xmlns:a="http://schemas.openxmlformats.org/drawingml/2006/main">
               <a:ext uri="{FF2B5EF4-FFF2-40B4-BE49-F238E27FC236}">
-                <a16:creationId xmlns:a16="http://schemas.microsoft.com/office/drawing/2014/main" id="{D2982D38-79D0-450A-A275-ABD499413761}"/>
+                <a16:creationId xmlns:a16="http://schemas.microsoft.com/office/drawing/2014/main" id="{E89E6420-498E-42E6-8C4D-1F2B7806F4B1}"/>
               </a:ext>
             </a:extLst>
           </p:cNvPr>
@@ -15264,7 +15264,7 @@
           <p:cNvPr id="8" name="">
             <a:extLst xmlns:a="http://schemas.openxmlformats.org/drawingml/2006/main">
               <a:ext uri="{FF2B5EF4-FFF2-40B4-BE49-F238E27FC236}">
-                <a16:creationId xmlns:a16="http://schemas.microsoft.com/office/drawing/2014/main" id="{18981F87-2E94-43D3-9C81-517A59BA4F8C}"/>
+                <a16:creationId xmlns:a16="http://schemas.microsoft.com/office/drawing/2014/main" id="{E4CBFB0E-4302-448B-9BD1-DE3992B40EEE}"/>
               </a:ext>
             </a:extLst>
           </p:cNvPr>
@@ -15422,7 +15422,7 @@
           <p:cNvPr id="9" name="">
             <a:extLst xmlns:a="http://schemas.openxmlformats.org/drawingml/2006/main">
               <a:ext uri="{FF2B5EF4-FFF2-40B4-BE49-F238E27FC236}">
-                <a16:creationId xmlns:a16="http://schemas.microsoft.com/office/drawing/2014/main" id="{5816E9D1-DFCF-4AD9-AE6D-71005735CFFC}"/>
+                <a16:creationId xmlns:a16="http://schemas.microsoft.com/office/drawing/2014/main" id="{E1129AF2-E6D8-408C-A9E8-0270DE74965A}"/>
               </a:ext>
             </a:extLst>
           </p:cNvPr>
@@ -15580,7 +15580,7 @@
           <p:cNvPr id="10" name="">
             <a:extLst xmlns:a="http://schemas.openxmlformats.org/drawingml/2006/main">
               <a:ext uri="{FF2B5EF4-FFF2-40B4-BE49-F238E27FC236}">
-                <a16:creationId xmlns:a16="http://schemas.microsoft.com/office/drawing/2014/main" id="{16940052-8E66-4983-9180-39F93992E719}"/>
+                <a16:creationId xmlns:a16="http://schemas.microsoft.com/office/drawing/2014/main" id="{7B60406A-E621-4E99-B842-67675DA34A5D}"/>
               </a:ext>
             </a:extLst>
           </p:cNvPr>
@@ -15738,7 +15738,7 @@
           <p:cNvPr id="11" name="">
             <a:extLst xmlns:a="http://schemas.openxmlformats.org/drawingml/2006/main">
               <a:ext uri="{FF2B5EF4-FFF2-40B4-BE49-F238E27FC236}">
-                <a16:creationId xmlns:a16="http://schemas.microsoft.com/office/drawing/2014/main" id="{487A0465-EDBE-4252-8375-9752C889463C}"/>
+                <a16:creationId xmlns:a16="http://schemas.microsoft.com/office/drawing/2014/main" id="{87698E23-5801-4335-8521-44E290C6892A}"/>
               </a:ext>
             </a:extLst>
           </p:cNvPr>
@@ -15896,7 +15896,7 @@
           <p:cNvPr id="12" name="">
             <a:extLst xmlns:a="http://schemas.openxmlformats.org/drawingml/2006/main">
               <a:ext uri="{FF2B5EF4-FFF2-40B4-BE49-F238E27FC236}">
-                <a16:creationId xmlns:a16="http://schemas.microsoft.com/office/drawing/2014/main" id="{17ECFA45-9704-4A78-A2E6-324711991C7F}"/>
+                <a16:creationId xmlns:a16="http://schemas.microsoft.com/office/drawing/2014/main" id="{06B0A900-8A95-47E9-B553-E7E3F45C2BCC}"/>
               </a:ext>
             </a:extLst>
           </p:cNvPr>
@@ -16054,7 +16054,7 @@
           <p:cNvPr id="13" name="">
             <a:extLst xmlns:a="http://schemas.openxmlformats.org/drawingml/2006/main">
               <a:ext uri="{FF2B5EF4-FFF2-40B4-BE49-F238E27FC236}">
-                <a16:creationId xmlns:a16="http://schemas.microsoft.com/office/drawing/2014/main" id="{66A161D0-7355-42C3-ABAA-B8DF1FEA5951}"/>
+                <a16:creationId xmlns:a16="http://schemas.microsoft.com/office/drawing/2014/main" id="{7F732E9A-E44F-4C00-8CBC-CE7CB78BD70D}"/>
               </a:ext>
             </a:extLst>
           </p:cNvPr>
@@ -16210,7 +16210,7 @@
     </p:spTree>
     <p:extLst>
       <p:ext uri="{BB962C8B-B14F-4D97-AF65-F5344CB8AC3E}">
-        <p14:creationId xmlns:p14="http://schemas.microsoft.com/office/powerpoint/2010/main" val="780951234"/>
+        <p14:creationId xmlns:p14="http://schemas.microsoft.com/office/powerpoint/2010/main" val="736042293"/>
       </p:ext>
     </p:extLst>
   </p:cSld>
@@ -16241,7 +16241,7 @@
           <p:cNvPr id="14" name="">
             <a:extLst xmlns:a="http://schemas.openxmlformats.org/drawingml/2006/main">
               <a:ext uri="{FF2B5EF4-FFF2-40B4-BE49-F238E27FC236}">
-                <a16:creationId xmlns:a16="http://schemas.microsoft.com/office/drawing/2014/main" id="{CAAF476F-922D-486C-B686-A73D13338AAF}"/>
+                <a16:creationId xmlns:a16="http://schemas.microsoft.com/office/drawing/2014/main" id="{964ECB42-45BB-45C0-B164-0323970A2E13}"/>
               </a:ext>
             </a:extLst>
           </p:cNvPr>
@@ -16399,7 +16399,7 @@
           <p:cNvPr id="2" name="">
             <a:extLst xmlns:a="http://schemas.openxmlformats.org/drawingml/2006/main">
               <a:ext uri="{FF2B5EF4-FFF2-40B4-BE49-F238E27FC236}">
-                <a16:creationId xmlns:a16="http://schemas.microsoft.com/office/drawing/2014/main" id="{1A05AF06-AABB-4C38-B1E5-974764A573BD}"/>
+                <a16:creationId xmlns:a16="http://schemas.microsoft.com/office/drawing/2014/main" id="{84258869-5DB0-46EC-8FB3-A17FB8E3EA83}"/>
               </a:ext>
             </a:extLst>
           </p:cNvPr>
@@ -16557,7 +16557,7 @@
           <p:cNvPr id="3" name="">
             <a:extLst xmlns:a="http://schemas.openxmlformats.org/drawingml/2006/main">
               <a:ext uri="{FF2B5EF4-FFF2-40B4-BE49-F238E27FC236}">
-                <a16:creationId xmlns:a16="http://schemas.microsoft.com/office/drawing/2014/main" id="{57EA4238-4066-4E0B-A772-8314E44B3E16}"/>
+                <a16:creationId xmlns:a16="http://schemas.microsoft.com/office/drawing/2014/main" id="{845EAE0D-8611-4F41-90A4-C1C237650B21}"/>
               </a:ext>
             </a:extLst>
           </p:cNvPr>
@@ -16705,7 +16705,7 @@
                 <a:ea typeface="Arial"/>
                 <a:cs typeface="Arial"/>
               </a:rPr>
-              <a:t>Ikona online është ndezur</a:t>
+              <a:t>Rasti 4 · Kopja pa internet</a:t>
             </a:r>
           </a:p>
         </p:txBody>
@@ -16715,7 +16715,7 @@
           <p:cNvPr id="4" name="">
             <a:extLst xmlns:a="http://schemas.openxmlformats.org/drawingml/2006/main">
               <a:ext uri="{FF2B5EF4-FFF2-40B4-BE49-F238E27FC236}">
-                <a16:creationId xmlns:a16="http://schemas.microsoft.com/office/drawing/2014/main" id="{0DF07C2B-6DFE-4195-8424-8DF60CE94854}"/>
+                <a16:creationId xmlns:a16="http://schemas.microsoft.com/office/drawing/2014/main" id="{EF65E06C-7580-4378-B0E8-D98717E4277D}"/>
               </a:ext>
             </a:extLst>
           </p:cNvPr>
@@ -16725,7 +16725,7 @@
           <p:nvPr/>
         </p:nvPicPr>
         <p:blipFill>
-          <a:blip xmlns:r="http://schemas.openxmlformats.org/officeDocument/2006/relationships" xmlns:a="http://schemas.openxmlformats.org/drawingml/2006/main" r:embed="R4fffeb41fb714cea"/>
+          <a:blip xmlns:r="http://schemas.openxmlformats.org/officeDocument/2006/relationships" xmlns:a="http://schemas.openxmlformats.org/drawingml/2006/main" r:embed="R44991370ab9f4c0c"/>
           <a:stretch xmlns:a="http://schemas.openxmlformats.org/drawingml/2006/main"/>
         </p:blipFill>
         <p:spPr>
@@ -16743,7 +16743,7 @@
           <p:cNvPr id="5" name="">
             <a:extLst xmlns:a="http://schemas.openxmlformats.org/drawingml/2006/main">
               <a:ext uri="{FF2B5EF4-FFF2-40B4-BE49-F238E27FC236}">
-                <a16:creationId xmlns:a16="http://schemas.microsoft.com/office/drawing/2014/main" id="{DFDF09A2-F8F5-49D2-BCF1-C1526D2B4D14}"/>
+                <a16:creationId xmlns:a16="http://schemas.microsoft.com/office/drawing/2014/main" id="{A65A2AC6-688B-4541-A5BC-9FFB8A85C1FD}"/>
               </a:ext>
             </a:extLst>
           </p:cNvPr>
@@ -16901,7 +16901,7 @@
           <p:cNvPr id="6" name="">
             <a:extLst xmlns:a="http://schemas.openxmlformats.org/drawingml/2006/main">
               <a:ext uri="{FF2B5EF4-FFF2-40B4-BE49-F238E27FC236}">
-                <a16:creationId xmlns:a16="http://schemas.microsoft.com/office/drawing/2014/main" id="{6ED0A91C-A518-4359-A46F-52D614F63F37}"/>
+                <a16:creationId xmlns:a16="http://schemas.microsoft.com/office/drawing/2014/main" id="{1837077B-E89B-4F3C-9A63-5E3CEC99FA23}"/>
               </a:ext>
             </a:extLst>
           </p:cNvPr>
@@ -17059,7 +17059,7 @@
           <p:cNvPr id="7" name="">
             <a:extLst xmlns:a="http://schemas.openxmlformats.org/drawingml/2006/main">
               <a:ext uri="{FF2B5EF4-FFF2-40B4-BE49-F238E27FC236}">
-                <a16:creationId xmlns:a16="http://schemas.microsoft.com/office/drawing/2014/main" id="{1C82FE35-DE83-4E35-995A-A449A43BBD3B}"/>
+                <a16:creationId xmlns:a16="http://schemas.microsoft.com/office/drawing/2014/main" id="{28E9C8A6-E9B2-4D4A-BDAD-383BBCCA22AC}"/>
               </a:ext>
             </a:extLst>
           </p:cNvPr>
@@ -17069,7 +17069,7 @@
           <p:nvPr/>
         </p:nvPicPr>
         <p:blipFill>
-          <a:blip xmlns:r="http://schemas.openxmlformats.org/officeDocument/2006/relationships" xmlns:a="http://schemas.openxmlformats.org/drawingml/2006/main" r:embed="Re490f7c54a704fe3"/>
+          <a:blip xmlns:r="http://schemas.openxmlformats.org/officeDocument/2006/relationships" xmlns:a="http://schemas.openxmlformats.org/drawingml/2006/main" r:embed="R669541c0b0a74b84"/>
           <a:stretch xmlns:a="http://schemas.openxmlformats.org/drawingml/2006/main"/>
         </p:blipFill>
         <p:spPr>
@@ -17087,7 +17087,7 @@
           <p:cNvPr id="8" name="">
             <a:extLst xmlns:a="http://schemas.openxmlformats.org/drawingml/2006/main">
               <a:ext uri="{FF2B5EF4-FFF2-40B4-BE49-F238E27FC236}">
-                <a16:creationId xmlns:a16="http://schemas.microsoft.com/office/drawing/2014/main" id="{7BC0D76B-E131-45CC-B137-182B25BB8077}"/>
+                <a16:creationId xmlns:a16="http://schemas.microsoft.com/office/drawing/2014/main" id="{DA3953D0-464C-4BD5-B063-ACA2A8D44FDD}"/>
               </a:ext>
             </a:extLst>
           </p:cNvPr>
@@ -17245,7 +17245,7 @@
           <p:cNvPr id="9" name="">
             <a:extLst xmlns:a="http://schemas.openxmlformats.org/drawingml/2006/main">
               <a:ext uri="{FF2B5EF4-FFF2-40B4-BE49-F238E27FC236}">
-                <a16:creationId xmlns:a16="http://schemas.microsoft.com/office/drawing/2014/main" id="{52488F4D-FAC6-465A-9473-88DD51FF4F6A}"/>
+                <a16:creationId xmlns:a16="http://schemas.microsoft.com/office/drawing/2014/main" id="{6E6EAF6C-3153-46E5-9AF2-4BF4C161EC41}"/>
               </a:ext>
             </a:extLst>
           </p:cNvPr>
@@ -17403,7 +17403,7 @@
           <p:cNvPr id="10" name="">
             <a:extLst xmlns:a="http://schemas.openxmlformats.org/drawingml/2006/main">
               <a:ext uri="{FF2B5EF4-FFF2-40B4-BE49-F238E27FC236}">
-                <a16:creationId xmlns:a16="http://schemas.microsoft.com/office/drawing/2014/main" id="{B0749866-7D28-40D7-909E-C652C305677C}"/>
+                <a16:creationId xmlns:a16="http://schemas.microsoft.com/office/drawing/2014/main" id="{A4C916B1-04A2-4749-9B6F-71B61043548B}"/>
               </a:ext>
             </a:extLst>
           </p:cNvPr>
@@ -17561,7 +17561,7 @@
           <p:cNvPr id="11" name="">
             <a:extLst xmlns:a="http://schemas.openxmlformats.org/drawingml/2006/main">
               <a:ext uri="{FF2B5EF4-FFF2-40B4-BE49-F238E27FC236}">
-                <a16:creationId xmlns:a16="http://schemas.microsoft.com/office/drawing/2014/main" id="{0DAF445E-DD6A-4095-BE2F-017D81374EA3}"/>
+                <a16:creationId xmlns:a16="http://schemas.microsoft.com/office/drawing/2014/main" id="{A1EF6B03-B0A5-4120-8897-BAA6C4FE294B}"/>
               </a:ext>
             </a:extLst>
           </p:cNvPr>
@@ -17719,7 +17719,7 @@
           <p:cNvPr id="12" name="">
             <a:extLst xmlns:a="http://schemas.openxmlformats.org/drawingml/2006/main">
               <a:ext uri="{FF2B5EF4-FFF2-40B4-BE49-F238E27FC236}">
-                <a16:creationId xmlns:a16="http://schemas.microsoft.com/office/drawing/2014/main" id="{C7FEBD67-8C07-4E06-BE70-41299D331D4B}"/>
+                <a16:creationId xmlns:a16="http://schemas.microsoft.com/office/drawing/2014/main" id="{8A0B54F5-50C0-4121-BFDC-AE62DBA15868}"/>
               </a:ext>
             </a:extLst>
           </p:cNvPr>
@@ -17923,7 +17923,7 @@
           <p:cNvPr id="13" name="">
             <a:extLst xmlns:a="http://schemas.openxmlformats.org/drawingml/2006/main">
               <a:ext uri="{FF2B5EF4-FFF2-40B4-BE49-F238E27FC236}">
-                <a16:creationId xmlns:a16="http://schemas.microsoft.com/office/drawing/2014/main" id="{5A5C2715-A9C1-435B-AD95-72FE14958651}"/>
+                <a16:creationId xmlns:a16="http://schemas.microsoft.com/office/drawing/2014/main" id="{40E01E8B-BB14-49B3-83F3-CE9B52D33002}"/>
               </a:ext>
             </a:extLst>
           </p:cNvPr>
@@ -18079,7 +18079,7 @@
     </p:spTree>
     <p:extLst>
       <p:ext uri="{BB962C8B-B14F-4D97-AF65-F5344CB8AC3E}">
-        <p14:creationId xmlns:p14="http://schemas.microsoft.com/office/powerpoint/2010/main" val="972504931"/>
+        <p14:creationId xmlns:p14="http://schemas.microsoft.com/office/powerpoint/2010/main" val="1051181568"/>
       </p:ext>
     </p:extLst>
   </p:cSld>
@@ -18110,7 +18110,7 @@
           <p:cNvPr id="14" name="">
             <a:extLst xmlns:a="http://schemas.openxmlformats.org/drawingml/2006/main">
               <a:ext uri="{FF2B5EF4-FFF2-40B4-BE49-F238E27FC236}">
-                <a16:creationId xmlns:a16="http://schemas.microsoft.com/office/drawing/2014/main" id="{07DD5DF1-DC9F-4C27-9D53-CC885F938289}"/>
+                <a16:creationId xmlns:a16="http://schemas.microsoft.com/office/drawing/2014/main" id="{FD042EEC-8CA5-44B3-BD13-582B1EAEDC4A}"/>
               </a:ext>
             </a:extLst>
           </p:cNvPr>
@@ -18268,7 +18268,7 @@
           <p:cNvPr id="2" name="">
             <a:extLst xmlns:a="http://schemas.openxmlformats.org/drawingml/2006/main">
               <a:ext uri="{FF2B5EF4-FFF2-40B4-BE49-F238E27FC236}">
-                <a16:creationId xmlns:a16="http://schemas.microsoft.com/office/drawing/2014/main" id="{DDA257FA-018D-448C-92C1-D1B5E744C80D}"/>
+                <a16:creationId xmlns:a16="http://schemas.microsoft.com/office/drawing/2014/main" id="{BEA10F28-4BDC-44FD-98E9-296475122B10}"/>
               </a:ext>
             </a:extLst>
           </p:cNvPr>
@@ -18426,7 +18426,7 @@
           <p:cNvPr id="3" name="">
             <a:extLst xmlns:a="http://schemas.openxmlformats.org/drawingml/2006/main">
               <a:ext uri="{FF2B5EF4-FFF2-40B4-BE49-F238E27FC236}">
-                <a16:creationId xmlns:a16="http://schemas.microsoft.com/office/drawing/2014/main" id="{A2CF2567-2F11-4231-9217-2335CF84493A}"/>
+                <a16:creationId xmlns:a16="http://schemas.microsoft.com/office/drawing/2014/main" id="{5F4324F7-7D92-4BFF-B232-65846BB2307C}"/>
               </a:ext>
             </a:extLst>
           </p:cNvPr>
@@ -18574,7 +18574,7 @@
                 <a:ea typeface="Arial"/>
                 <a:cs typeface="Arial"/>
               </a:rPr>
-              <a:t>E dhënë e ruajtur apo gjendje e tanishme?</a:t>
+              <a:t>Rasti 4 · Kopja pa internet</a:t>
             </a:r>
           </a:p>
         </p:txBody>
@@ -18584,7 +18584,7 @@
           <p:cNvPr id="4" name="">
             <a:extLst xmlns:a="http://schemas.openxmlformats.org/drawingml/2006/main">
               <a:ext uri="{FF2B5EF4-FFF2-40B4-BE49-F238E27FC236}">
-                <a16:creationId xmlns:a16="http://schemas.microsoft.com/office/drawing/2014/main" id="{D22988F0-1ACD-4A60-A1AF-986D7AA67B62}"/>
+                <a16:creationId xmlns:a16="http://schemas.microsoft.com/office/drawing/2014/main" id="{38289626-A7C7-4172-968D-F53FC772D68A}"/>
               </a:ext>
             </a:extLst>
           </p:cNvPr>
@@ -18594,7 +18594,7 @@
           <p:nvPr/>
         </p:nvPicPr>
         <p:blipFill>
-          <a:blip xmlns:r="http://schemas.openxmlformats.org/officeDocument/2006/relationships" xmlns:a="http://schemas.openxmlformats.org/drawingml/2006/main" r:embed="Rb163d48cbb794b98"/>
+          <a:blip xmlns:r="http://schemas.openxmlformats.org/officeDocument/2006/relationships" xmlns:a="http://schemas.openxmlformats.org/drawingml/2006/main" r:embed="R72fcb057a19342a6"/>
           <a:stretch xmlns:a="http://schemas.openxmlformats.org/drawingml/2006/main"/>
         </p:blipFill>
         <p:spPr>
@@ -18612,7 +18612,7 @@
           <p:cNvPr id="5" name="">
             <a:extLst xmlns:a="http://schemas.openxmlformats.org/drawingml/2006/main">
               <a:ext uri="{FF2B5EF4-FFF2-40B4-BE49-F238E27FC236}">
-                <a16:creationId xmlns:a16="http://schemas.microsoft.com/office/drawing/2014/main" id="{92EC4779-9747-414C-93F0-9623A8F48CC5}"/>
+                <a16:creationId xmlns:a16="http://schemas.microsoft.com/office/drawing/2014/main" id="{8A2FE79D-3A53-497D-88A7-D7E821D486DA}"/>
               </a:ext>
             </a:extLst>
           </p:cNvPr>
@@ -18770,7 +18770,7 @@
           <p:cNvPr id="6" name="">
             <a:extLst xmlns:a="http://schemas.openxmlformats.org/drawingml/2006/main">
               <a:ext uri="{FF2B5EF4-FFF2-40B4-BE49-F238E27FC236}">
-                <a16:creationId xmlns:a16="http://schemas.microsoft.com/office/drawing/2014/main" id="{54DB3D79-E033-40F7-A126-6DEBCAF17950}"/>
+                <a16:creationId xmlns:a16="http://schemas.microsoft.com/office/drawing/2014/main" id="{80EAB891-C10B-424C-899B-5501F9C5037A}"/>
               </a:ext>
             </a:extLst>
           </p:cNvPr>
@@ -18928,7 +18928,7 @@
           <p:cNvPr id="7" name="">
             <a:extLst xmlns:a="http://schemas.openxmlformats.org/drawingml/2006/main">
               <a:ext uri="{FF2B5EF4-FFF2-40B4-BE49-F238E27FC236}">
-                <a16:creationId xmlns:a16="http://schemas.microsoft.com/office/drawing/2014/main" id="{CF5D01C2-5C87-4745-9B30-D5606FE1713E}"/>
+                <a16:creationId xmlns:a16="http://schemas.microsoft.com/office/drawing/2014/main" id="{15B8CBE1-48C7-4D3D-8738-8ED0C0388D78}"/>
               </a:ext>
             </a:extLst>
           </p:cNvPr>
@@ -18938,7 +18938,7 @@
           <p:nvPr/>
         </p:nvPicPr>
         <p:blipFill>
-          <a:blip xmlns:r="http://schemas.openxmlformats.org/officeDocument/2006/relationships" xmlns:a="http://schemas.openxmlformats.org/drawingml/2006/main" r:embed="R81c2ec8da0644954"/>
+          <a:blip xmlns:r="http://schemas.openxmlformats.org/officeDocument/2006/relationships" xmlns:a="http://schemas.openxmlformats.org/drawingml/2006/main" r:embed="Rfa55eed18b6540b9"/>
           <a:stretch xmlns:a="http://schemas.openxmlformats.org/drawingml/2006/main"/>
         </p:blipFill>
         <p:spPr>
@@ -18956,7 +18956,7 @@
           <p:cNvPr id="8" name="">
             <a:extLst xmlns:a="http://schemas.openxmlformats.org/drawingml/2006/main">
               <a:ext uri="{FF2B5EF4-FFF2-40B4-BE49-F238E27FC236}">
-                <a16:creationId xmlns:a16="http://schemas.microsoft.com/office/drawing/2014/main" id="{50197AB2-3782-4059-BDC1-D470DBCC49D5}"/>
+                <a16:creationId xmlns:a16="http://schemas.microsoft.com/office/drawing/2014/main" id="{B95C31FA-22EB-454C-B975-B25B7A1C06E2}"/>
               </a:ext>
             </a:extLst>
           </p:cNvPr>
@@ -19114,7 +19114,7 @@
           <p:cNvPr id="9" name="">
             <a:extLst xmlns:a="http://schemas.openxmlformats.org/drawingml/2006/main">
               <a:ext uri="{FF2B5EF4-FFF2-40B4-BE49-F238E27FC236}">
-                <a16:creationId xmlns:a16="http://schemas.microsoft.com/office/drawing/2014/main" id="{C21AC81A-F638-4602-89E9-354B610A32F1}"/>
+                <a16:creationId xmlns:a16="http://schemas.microsoft.com/office/drawing/2014/main" id="{CDEDEBEA-028C-4CB5-98F2-47E27D238225}"/>
               </a:ext>
             </a:extLst>
           </p:cNvPr>
@@ -19272,7 +19272,7 @@
           <p:cNvPr id="10" name="">
             <a:extLst xmlns:a="http://schemas.openxmlformats.org/drawingml/2006/main">
               <a:ext uri="{FF2B5EF4-FFF2-40B4-BE49-F238E27FC236}">
-                <a16:creationId xmlns:a16="http://schemas.microsoft.com/office/drawing/2014/main" id="{F78F5C6D-9FCD-46E6-84E0-128BE2820701}"/>
+                <a16:creationId xmlns:a16="http://schemas.microsoft.com/office/drawing/2014/main" id="{3A8823D9-4EC0-460F-BB36-25F9B182FAE3}"/>
               </a:ext>
             </a:extLst>
           </p:cNvPr>
@@ -19458,7 +19458,7 @@
           <p:cNvPr id="11" name="">
             <a:extLst xmlns:a="http://schemas.openxmlformats.org/drawingml/2006/main">
               <a:ext uri="{FF2B5EF4-FFF2-40B4-BE49-F238E27FC236}">
-                <a16:creationId xmlns:a16="http://schemas.microsoft.com/office/drawing/2014/main" id="{41E00931-1BB9-40F3-9CF3-DBEE44351998}"/>
+                <a16:creationId xmlns:a16="http://schemas.microsoft.com/office/drawing/2014/main" id="{667D49C5-99DB-4245-A2B8-5B178274172E}"/>
               </a:ext>
             </a:extLst>
           </p:cNvPr>
@@ -19616,7 +19616,7 @@
           <p:cNvPr id="12" name="">
             <a:extLst xmlns:a="http://schemas.openxmlformats.org/drawingml/2006/main">
               <a:ext uri="{FF2B5EF4-FFF2-40B4-BE49-F238E27FC236}">
-                <a16:creationId xmlns:a16="http://schemas.microsoft.com/office/drawing/2014/main" id="{0B8DB290-91E8-4D17-8231-E089E4E211B1}"/>
+                <a16:creationId xmlns:a16="http://schemas.microsoft.com/office/drawing/2014/main" id="{27FF9F02-785D-421D-9476-239A491C3437}"/>
               </a:ext>
             </a:extLst>
           </p:cNvPr>
@@ -19774,7 +19774,7 @@
           <p:cNvPr id="13" name="">
             <a:extLst xmlns:a="http://schemas.openxmlformats.org/drawingml/2006/main">
               <a:ext uri="{FF2B5EF4-FFF2-40B4-BE49-F238E27FC236}">
-                <a16:creationId xmlns:a16="http://schemas.microsoft.com/office/drawing/2014/main" id="{BDD39678-CB9F-45A1-9D89-DE3CF8B5BB91}"/>
+                <a16:creationId xmlns:a16="http://schemas.microsoft.com/office/drawing/2014/main" id="{BB62B55D-BE22-4916-B11E-9B1767E66042}"/>
               </a:ext>
             </a:extLst>
           </p:cNvPr>
@@ -19930,7 +19930,7 @@
     </p:spTree>
     <p:extLst>
       <p:ext uri="{BB962C8B-B14F-4D97-AF65-F5344CB8AC3E}">
-        <p14:creationId xmlns:p14="http://schemas.microsoft.com/office/powerpoint/2010/main" val="1413892229"/>
+        <p14:creationId xmlns:p14="http://schemas.microsoft.com/office/powerpoint/2010/main" val="301472776"/>
       </p:ext>
     </p:extLst>
   </p:cSld>
@@ -19961,7 +19961,7 @@
           <p:cNvPr id="13" name="">
             <a:extLst xmlns:a="http://schemas.openxmlformats.org/drawingml/2006/main">
               <a:ext uri="{FF2B5EF4-FFF2-40B4-BE49-F238E27FC236}">
-                <a16:creationId xmlns:a16="http://schemas.microsoft.com/office/drawing/2014/main" id="{16EAC933-130E-42C2-8460-E87D869F04F8}"/>
+                <a16:creationId xmlns:a16="http://schemas.microsoft.com/office/drawing/2014/main" id="{EEB5B321-F953-437E-B1DA-3C0349D7BB5C}"/>
               </a:ext>
             </a:extLst>
           </p:cNvPr>
@@ -20119,7 +20119,7 @@
           <p:cNvPr id="2" name="">
             <a:extLst xmlns:a="http://schemas.openxmlformats.org/drawingml/2006/main">
               <a:ext uri="{FF2B5EF4-FFF2-40B4-BE49-F238E27FC236}">
-                <a16:creationId xmlns:a16="http://schemas.microsoft.com/office/drawing/2014/main" id="{D694111E-BFCB-4E5D-8F78-E7A6D6607D96}"/>
+                <a16:creationId xmlns:a16="http://schemas.microsoft.com/office/drawing/2014/main" id="{01B2E400-1DD6-4B6A-BD17-507EFB1F739C}"/>
               </a:ext>
             </a:extLst>
           </p:cNvPr>
@@ -20277,7 +20277,7 @@
           <p:cNvPr id="3" name="">
             <a:extLst xmlns:a="http://schemas.openxmlformats.org/drawingml/2006/main">
               <a:ext uri="{FF2B5EF4-FFF2-40B4-BE49-F238E27FC236}">
-                <a16:creationId xmlns:a16="http://schemas.microsoft.com/office/drawing/2014/main" id="{60308F52-4EB3-41E6-A106-72C5FC6ABE42}"/>
+                <a16:creationId xmlns:a16="http://schemas.microsoft.com/office/drawing/2014/main" id="{AE0BA953-D1B2-4A06-AC42-1EB1D6F0A615}"/>
               </a:ext>
             </a:extLst>
           </p:cNvPr>
@@ -20435,7 +20435,7 @@
           <p:cNvPr id="4" name="">
             <a:extLst xmlns:a="http://schemas.openxmlformats.org/drawingml/2006/main">
               <a:ext uri="{FF2B5EF4-FFF2-40B4-BE49-F238E27FC236}">
-                <a16:creationId xmlns:a16="http://schemas.microsoft.com/office/drawing/2014/main" id="{2E20F116-58F3-4B40-9A82-59E143A8754E}"/>
+                <a16:creationId xmlns:a16="http://schemas.microsoft.com/office/drawing/2014/main" id="{4510445F-196B-4606-9F78-C80A053706F3}"/>
               </a:ext>
             </a:extLst>
           </p:cNvPr>
@@ -20445,7 +20445,7 @@
           <p:nvPr/>
         </p:nvPicPr>
         <p:blipFill>
-          <a:blip xmlns:r="http://schemas.openxmlformats.org/officeDocument/2006/relationships" xmlns:a="http://schemas.openxmlformats.org/drawingml/2006/main" r:embed="Ra4cd4189332b4fbb"/>
+          <a:blip xmlns:r="http://schemas.openxmlformats.org/officeDocument/2006/relationships" xmlns:a="http://schemas.openxmlformats.org/drawingml/2006/main" r:embed="R6a47e5f8a74447b7"/>
           <a:stretch xmlns:a="http://schemas.openxmlformats.org/drawingml/2006/main"/>
         </p:blipFill>
         <p:spPr>
@@ -20463,7 +20463,7 @@
           <p:cNvPr id="5" name="">
             <a:extLst xmlns:a="http://schemas.openxmlformats.org/drawingml/2006/main">
               <a:ext uri="{FF2B5EF4-FFF2-40B4-BE49-F238E27FC236}">
-                <a16:creationId xmlns:a16="http://schemas.microsoft.com/office/drawing/2014/main" id="{633CBD9F-9C8E-4870-BE2B-28E8404C3B9D}"/>
+                <a16:creationId xmlns:a16="http://schemas.microsoft.com/office/drawing/2014/main" id="{60E2CEB2-5F4F-4F56-B39F-B18C86A9F565}"/>
               </a:ext>
             </a:extLst>
           </p:cNvPr>
@@ -20621,7 +20621,7 @@
           <p:cNvPr id="6" name="">
             <a:extLst xmlns:a="http://schemas.openxmlformats.org/drawingml/2006/main">
               <a:ext uri="{FF2B5EF4-FFF2-40B4-BE49-F238E27FC236}">
-                <a16:creationId xmlns:a16="http://schemas.microsoft.com/office/drawing/2014/main" id="{3B27D61D-9A1A-45FF-9579-2CB1D50923B8}"/>
+                <a16:creationId xmlns:a16="http://schemas.microsoft.com/office/drawing/2014/main" id="{01AEAC0D-E3DF-487C-9E38-DD3D4D693337}"/>
               </a:ext>
             </a:extLst>
           </p:cNvPr>
@@ -20779,7 +20779,7 @@
           <p:cNvPr id="7" name="">
             <a:extLst xmlns:a="http://schemas.openxmlformats.org/drawingml/2006/main">
               <a:ext uri="{FF2B5EF4-FFF2-40B4-BE49-F238E27FC236}">
-                <a16:creationId xmlns:a16="http://schemas.microsoft.com/office/drawing/2014/main" id="{1301CE92-0262-435A-97BB-CB1422118741}"/>
+                <a16:creationId xmlns:a16="http://schemas.microsoft.com/office/drawing/2014/main" id="{94A0F55F-35E1-4996-9955-22672A7E47FB}"/>
               </a:ext>
             </a:extLst>
           </p:cNvPr>
@@ -20789,7 +20789,7 @@
           <p:nvPr/>
         </p:nvPicPr>
         <p:blipFill>
-          <a:blip xmlns:r="http://schemas.openxmlformats.org/officeDocument/2006/relationships" xmlns:a="http://schemas.openxmlformats.org/drawingml/2006/main" r:embed="Rc06d1a133e8349fe"/>
+          <a:blip xmlns:r="http://schemas.openxmlformats.org/officeDocument/2006/relationships" xmlns:a="http://schemas.openxmlformats.org/drawingml/2006/main" r:embed="R31a79fb65219467d"/>
           <a:stretch xmlns:a="http://schemas.openxmlformats.org/drawingml/2006/main"/>
         </p:blipFill>
         <p:spPr>
@@ -20807,7 +20807,7 @@
           <p:cNvPr id="8" name="">
             <a:extLst xmlns:a="http://schemas.openxmlformats.org/drawingml/2006/main">
               <a:ext uri="{FF2B5EF4-FFF2-40B4-BE49-F238E27FC236}">
-                <a16:creationId xmlns:a16="http://schemas.microsoft.com/office/drawing/2014/main" id="{6F30BD3F-3873-4922-8462-7573AEBA1F5B}"/>
+                <a16:creationId xmlns:a16="http://schemas.microsoft.com/office/drawing/2014/main" id="{27390677-28C2-4230-9D08-B8583EC6E83F}"/>
               </a:ext>
             </a:extLst>
           </p:cNvPr>
@@ -20965,7 +20965,7 @@
           <p:cNvPr id="9" name="">
             <a:extLst xmlns:a="http://schemas.openxmlformats.org/drawingml/2006/main">
               <a:ext uri="{FF2B5EF4-FFF2-40B4-BE49-F238E27FC236}">
-                <a16:creationId xmlns:a16="http://schemas.microsoft.com/office/drawing/2014/main" id="{4643A6BE-DA6E-4E58-BC21-61FF854D414A}"/>
+                <a16:creationId xmlns:a16="http://schemas.microsoft.com/office/drawing/2014/main" id="{8539E724-2745-4EFB-9FAE-77F3025BD115}"/>
               </a:ext>
             </a:extLst>
           </p:cNvPr>
@@ -21123,7 +21123,7 @@
           <p:cNvPr id="10" name="">
             <a:extLst xmlns:a="http://schemas.openxmlformats.org/drawingml/2006/main">
               <a:ext uri="{FF2B5EF4-FFF2-40B4-BE49-F238E27FC236}">
-                <a16:creationId xmlns:a16="http://schemas.microsoft.com/office/drawing/2014/main" id="{4B90234E-69B3-4359-89D4-C72E4B61AA9D}"/>
+                <a16:creationId xmlns:a16="http://schemas.microsoft.com/office/drawing/2014/main" id="{F2BC0C0A-752E-484A-B4E6-4B13CC8904FF}"/>
               </a:ext>
             </a:extLst>
           </p:cNvPr>
@@ -21309,7 +21309,7 @@
           <p:cNvPr id="11" name="">
             <a:extLst xmlns:a="http://schemas.openxmlformats.org/drawingml/2006/main">
               <a:ext uri="{FF2B5EF4-FFF2-40B4-BE49-F238E27FC236}">
-                <a16:creationId xmlns:a16="http://schemas.microsoft.com/office/drawing/2014/main" id="{B3BE100C-D81F-4915-8DAE-125BC342F7C9}"/>
+                <a16:creationId xmlns:a16="http://schemas.microsoft.com/office/drawing/2014/main" id="{87CAFF53-CEFE-4510-AB21-5F559A05816A}"/>
               </a:ext>
             </a:extLst>
           </p:cNvPr>
@@ -21467,7 +21467,7 @@
           <p:cNvPr id="12" name="">
             <a:extLst xmlns:a="http://schemas.openxmlformats.org/drawingml/2006/main">
               <a:ext uri="{FF2B5EF4-FFF2-40B4-BE49-F238E27FC236}">
-                <a16:creationId xmlns:a16="http://schemas.microsoft.com/office/drawing/2014/main" id="{52930664-0922-48AA-87B3-7C7CBA75E003}"/>
+                <a16:creationId xmlns:a16="http://schemas.microsoft.com/office/drawing/2014/main" id="{0E60A6DE-FC76-4AEE-BBAB-52442008F84F}"/>
               </a:ext>
             </a:extLst>
           </p:cNvPr>
@@ -21623,7 +21623,7 @@
     </p:spTree>
     <p:extLst>
       <p:ext uri="{BB962C8B-B14F-4D97-AF65-F5344CB8AC3E}">
-        <p14:creationId xmlns:p14="http://schemas.microsoft.com/office/powerpoint/2010/main" val="587271581"/>
+        <p14:creationId xmlns:p14="http://schemas.microsoft.com/office/powerpoint/2010/main" val="460466536"/>
       </p:ext>
     </p:extLst>
   </p:cSld>
@@ -21654,7 +21654,7 @@
           <p:cNvPr id="16" name="">
             <a:extLst xmlns:a="http://schemas.openxmlformats.org/drawingml/2006/main">
               <a:ext uri="{FF2B5EF4-FFF2-40B4-BE49-F238E27FC236}">
-                <a16:creationId xmlns:a16="http://schemas.microsoft.com/office/drawing/2014/main" id="{C8E4E020-64A0-4AB2-A89E-997F28FA5273}"/>
+                <a16:creationId xmlns:a16="http://schemas.microsoft.com/office/drawing/2014/main" id="{5178630D-A264-4436-9173-46B63F957E3B}"/>
               </a:ext>
             </a:extLst>
           </p:cNvPr>
@@ -21812,7 +21812,7 @@
           <p:cNvPr id="2" name="">
             <a:extLst xmlns:a="http://schemas.openxmlformats.org/drawingml/2006/main">
               <a:ext uri="{FF2B5EF4-FFF2-40B4-BE49-F238E27FC236}">
-                <a16:creationId xmlns:a16="http://schemas.microsoft.com/office/drawing/2014/main" id="{0D332810-42E4-4709-92F8-7BCA3B4DA6EE}"/>
+                <a16:creationId xmlns:a16="http://schemas.microsoft.com/office/drawing/2014/main" id="{8C17F4AA-BF6A-4FBE-8D20-868061C9002C}"/>
               </a:ext>
             </a:extLst>
           </p:cNvPr>
@@ -21970,7 +21970,7 @@
           <p:cNvPr id="3" name="">
             <a:extLst xmlns:a="http://schemas.openxmlformats.org/drawingml/2006/main">
               <a:ext uri="{FF2B5EF4-FFF2-40B4-BE49-F238E27FC236}">
-                <a16:creationId xmlns:a16="http://schemas.microsoft.com/office/drawing/2014/main" id="{35809C7A-6D60-46C5-AD67-C442D4453D98}"/>
+                <a16:creationId xmlns:a16="http://schemas.microsoft.com/office/drawing/2014/main" id="{1C320BBC-24C5-4F9D-A164-4D9509AC0533}"/>
               </a:ext>
             </a:extLst>
           </p:cNvPr>
@@ -22128,7 +22128,7 @@
           <p:cNvPr id="4" name="">
             <a:extLst xmlns:a="http://schemas.openxmlformats.org/drawingml/2006/main">
               <a:ext uri="{FF2B5EF4-FFF2-40B4-BE49-F238E27FC236}">
-                <a16:creationId xmlns:a16="http://schemas.microsoft.com/office/drawing/2014/main" id="{7B9B34F4-9C2F-4299-A0ED-71750AE3BD25}"/>
+                <a16:creationId xmlns:a16="http://schemas.microsoft.com/office/drawing/2014/main" id="{009FB7BE-3876-4E06-AEBF-F8F1DBCF154E}"/>
               </a:ext>
             </a:extLst>
           </p:cNvPr>
@@ -22138,7 +22138,7 @@
           <p:nvPr/>
         </p:nvPicPr>
         <p:blipFill>
-          <a:blip xmlns:r="http://schemas.openxmlformats.org/officeDocument/2006/relationships" xmlns:a="http://schemas.openxmlformats.org/drawingml/2006/main" r:embed="Re6703c48ea6f426e"/>
+          <a:blip xmlns:r="http://schemas.openxmlformats.org/officeDocument/2006/relationships" xmlns:a="http://schemas.openxmlformats.org/drawingml/2006/main" r:embed="R45c921a0f96f4a6d"/>
           <a:stretch xmlns:a="http://schemas.openxmlformats.org/drawingml/2006/main"/>
         </p:blipFill>
         <p:spPr>
@@ -22156,7 +22156,7 @@
           <p:cNvPr id="5" name="">
             <a:extLst xmlns:a="http://schemas.openxmlformats.org/drawingml/2006/main">
               <a:ext uri="{FF2B5EF4-FFF2-40B4-BE49-F238E27FC236}">
-                <a16:creationId xmlns:a16="http://schemas.microsoft.com/office/drawing/2014/main" id="{0E1C9096-6F68-4921-9197-6F431888E751}"/>
+                <a16:creationId xmlns:a16="http://schemas.microsoft.com/office/drawing/2014/main" id="{520E3458-39E0-419D-A195-2E6915EA2341}"/>
               </a:ext>
             </a:extLst>
           </p:cNvPr>
@@ -22314,7 +22314,7 @@
           <p:cNvPr id="6" name="">
             <a:extLst xmlns:a="http://schemas.openxmlformats.org/drawingml/2006/main">
               <a:ext uri="{FF2B5EF4-FFF2-40B4-BE49-F238E27FC236}">
-                <a16:creationId xmlns:a16="http://schemas.microsoft.com/office/drawing/2014/main" id="{049CDF7F-FE9B-4E91-ACE3-AF4F94FB5744}"/>
+                <a16:creationId xmlns:a16="http://schemas.microsoft.com/office/drawing/2014/main" id="{D9270EA9-8BF7-4F6B-BE2A-F587BC699C20}"/>
               </a:ext>
             </a:extLst>
           </p:cNvPr>
@@ -22472,7 +22472,7 @@
           <p:cNvPr id="7" name="">
             <a:extLst xmlns:a="http://schemas.openxmlformats.org/drawingml/2006/main">
               <a:ext uri="{FF2B5EF4-FFF2-40B4-BE49-F238E27FC236}">
-                <a16:creationId xmlns:a16="http://schemas.microsoft.com/office/drawing/2014/main" id="{6F3E7ED1-625E-41F7-92C7-CF46F9AFB942}"/>
+                <a16:creationId xmlns:a16="http://schemas.microsoft.com/office/drawing/2014/main" id="{24412F4A-5508-4691-87AC-2FC550F372FD}"/>
               </a:ext>
             </a:extLst>
           </p:cNvPr>
@@ -22482,7 +22482,7 @@
           <p:nvPr/>
         </p:nvPicPr>
         <p:blipFill>
-          <a:blip xmlns:r="http://schemas.openxmlformats.org/officeDocument/2006/relationships" xmlns:a="http://schemas.openxmlformats.org/drawingml/2006/main" r:embed="R817ca436f94d45c8"/>
+          <a:blip xmlns:r="http://schemas.openxmlformats.org/officeDocument/2006/relationships" xmlns:a="http://schemas.openxmlformats.org/drawingml/2006/main" r:embed="Ref7425da60b1404e"/>
           <a:stretch xmlns:a="http://schemas.openxmlformats.org/drawingml/2006/main"/>
         </p:blipFill>
         <p:spPr>
@@ -22500,7 +22500,7 @@
           <p:cNvPr id="8" name="">
             <a:extLst xmlns:a="http://schemas.openxmlformats.org/drawingml/2006/main">
               <a:ext uri="{FF2B5EF4-FFF2-40B4-BE49-F238E27FC236}">
-                <a16:creationId xmlns:a16="http://schemas.microsoft.com/office/drawing/2014/main" id="{3FA339CF-1012-4886-9FDD-98C7A39F08EB}"/>
+                <a16:creationId xmlns:a16="http://schemas.microsoft.com/office/drawing/2014/main" id="{20771170-B052-430D-8F42-356C02317E3E}"/>
               </a:ext>
             </a:extLst>
           </p:cNvPr>
@@ -22658,7 +22658,7 @@
           <p:cNvPr id="9" name="">
             <a:extLst xmlns:a="http://schemas.openxmlformats.org/drawingml/2006/main">
               <a:ext uri="{FF2B5EF4-FFF2-40B4-BE49-F238E27FC236}">
-                <a16:creationId xmlns:a16="http://schemas.microsoft.com/office/drawing/2014/main" id="{8985188B-8730-4DFA-8CC4-B609AF3D161D}"/>
+                <a16:creationId xmlns:a16="http://schemas.microsoft.com/office/drawing/2014/main" id="{39D257E0-E579-4A68-BB00-0178DE2E6EE2}"/>
               </a:ext>
             </a:extLst>
           </p:cNvPr>
@@ -22816,7 +22816,7 @@
           <p:cNvPr id="10" name="">
             <a:extLst xmlns:a="http://schemas.openxmlformats.org/drawingml/2006/main">
               <a:ext uri="{FF2B5EF4-FFF2-40B4-BE49-F238E27FC236}">
-                <a16:creationId xmlns:a16="http://schemas.microsoft.com/office/drawing/2014/main" id="{2ADCB9FF-54E7-478F-B528-BEFB135A2CA2}"/>
+                <a16:creationId xmlns:a16="http://schemas.microsoft.com/office/drawing/2014/main" id="{205D7CE2-DDB9-4334-9A5E-AC6E7B9B8E8D}"/>
               </a:ext>
             </a:extLst>
           </p:cNvPr>
@@ -22826,7 +22826,7 @@
           <p:nvPr/>
         </p:nvPicPr>
         <p:blipFill>
-          <a:blip xmlns:r="http://schemas.openxmlformats.org/officeDocument/2006/relationships" xmlns:a="http://schemas.openxmlformats.org/drawingml/2006/main" r:embed="R07ec6b4122534eb0"/>
+          <a:blip xmlns:r="http://schemas.openxmlformats.org/officeDocument/2006/relationships" xmlns:a="http://schemas.openxmlformats.org/drawingml/2006/main" r:embed="R20e12b9b77cf4d9a"/>
           <a:stretch xmlns:a="http://schemas.openxmlformats.org/drawingml/2006/main"/>
         </p:blipFill>
         <p:spPr>
@@ -22844,7 +22844,7 @@
           <p:cNvPr id="11" name="">
             <a:extLst xmlns:a="http://schemas.openxmlformats.org/drawingml/2006/main">
               <a:ext uri="{FF2B5EF4-FFF2-40B4-BE49-F238E27FC236}">
-                <a16:creationId xmlns:a16="http://schemas.microsoft.com/office/drawing/2014/main" id="{801B3A49-63BB-407E-A0F7-AB95C8E26B33}"/>
+                <a16:creationId xmlns:a16="http://schemas.microsoft.com/office/drawing/2014/main" id="{E8922316-BBEE-43DB-8FB0-7FD6A9C6638F}"/>
               </a:ext>
             </a:extLst>
           </p:cNvPr>
@@ -23002,7 +23002,7 @@
           <p:cNvPr id="12" name="">
             <a:extLst xmlns:a="http://schemas.openxmlformats.org/drawingml/2006/main">
               <a:ext uri="{FF2B5EF4-FFF2-40B4-BE49-F238E27FC236}">
-                <a16:creationId xmlns:a16="http://schemas.microsoft.com/office/drawing/2014/main" id="{1E31C853-CE03-417C-82D7-8880516D057E}"/>
+                <a16:creationId xmlns:a16="http://schemas.microsoft.com/office/drawing/2014/main" id="{9FDD3912-AE3B-416B-8EC6-F0A374C87CEA}"/>
               </a:ext>
             </a:extLst>
           </p:cNvPr>
@@ -23160,7 +23160,7 @@
           <p:cNvPr id="13" name="">
             <a:extLst xmlns:a="http://schemas.openxmlformats.org/drawingml/2006/main">
               <a:ext uri="{FF2B5EF4-FFF2-40B4-BE49-F238E27FC236}">
-                <a16:creationId xmlns:a16="http://schemas.microsoft.com/office/drawing/2014/main" id="{A3F64F29-8DC0-48E5-9BD5-272FC2C45B92}"/>
+                <a16:creationId xmlns:a16="http://schemas.microsoft.com/office/drawing/2014/main" id="{3D9C0A25-8626-4AAA-BD29-C2205E71EFB7}"/>
               </a:ext>
             </a:extLst>
           </p:cNvPr>
@@ -23346,7 +23346,7 @@
           <p:cNvPr id="14" name="">
             <a:extLst xmlns:a="http://schemas.openxmlformats.org/drawingml/2006/main">
               <a:ext uri="{FF2B5EF4-FFF2-40B4-BE49-F238E27FC236}">
-                <a16:creationId xmlns:a16="http://schemas.microsoft.com/office/drawing/2014/main" id="{D9F7FB53-6EAA-4959-B336-FFBEA08D4066}"/>
+                <a16:creationId xmlns:a16="http://schemas.microsoft.com/office/drawing/2014/main" id="{63D36331-6CF5-442A-86DB-3CD4F36BAAEF}"/>
               </a:ext>
             </a:extLst>
           </p:cNvPr>
@@ -23504,7 +23504,7 @@
           <p:cNvPr id="15" name="">
             <a:extLst xmlns:a="http://schemas.openxmlformats.org/drawingml/2006/main">
               <a:ext uri="{FF2B5EF4-FFF2-40B4-BE49-F238E27FC236}">
-                <a16:creationId xmlns:a16="http://schemas.microsoft.com/office/drawing/2014/main" id="{39BBF0A1-0ECF-4442-810B-F4E9BE1F451A}"/>
+                <a16:creationId xmlns:a16="http://schemas.microsoft.com/office/drawing/2014/main" id="{B9429F14-59D7-40CE-85F2-18EEEE5F49F3}"/>
               </a:ext>
             </a:extLst>
           </p:cNvPr>
@@ -23660,7 +23660,7 @@
     </p:spTree>
     <p:extLst>
       <p:ext uri="{BB962C8B-B14F-4D97-AF65-F5344CB8AC3E}">
-        <p14:creationId xmlns:p14="http://schemas.microsoft.com/office/powerpoint/2010/main" val="1795022138"/>
+        <p14:creationId xmlns:p14="http://schemas.microsoft.com/office/powerpoint/2010/main" val="2109609197"/>
       </p:ext>
     </p:extLst>
   </p:cSld>
@@ -23688,10 +23688,10 @@
       </p:grpSpPr>
       <p:sp>
         <p:nvSpPr>
-          <p:cNvPr id="14" name="">
+          <p:cNvPr id="17" name="">
             <a:extLst xmlns:a="http://schemas.openxmlformats.org/drawingml/2006/main">
               <a:ext uri="{FF2B5EF4-FFF2-40B4-BE49-F238E27FC236}">
-                <a16:creationId xmlns:a16="http://schemas.microsoft.com/office/drawing/2014/main" id="{B2878F4C-3AF4-4516-AB43-8B47AAEA056B}"/>
+                <a16:creationId xmlns:a16="http://schemas.microsoft.com/office/drawing/2014/main" id="{2EB9B0F5-9AF0-441D-9366-4F4C84C908D0}"/>
               </a:ext>
             </a:extLst>
           </p:cNvPr>
@@ -23849,7 +23849,7 @@
           <p:cNvPr id="2" name="">
             <a:extLst xmlns:a="http://schemas.openxmlformats.org/drawingml/2006/main">
               <a:ext uri="{FF2B5EF4-FFF2-40B4-BE49-F238E27FC236}">
-                <a16:creationId xmlns:a16="http://schemas.microsoft.com/office/drawing/2014/main" id="{9A7845D1-605B-4E9F-BEF5-7FCFDE55807B}"/>
+                <a16:creationId xmlns:a16="http://schemas.microsoft.com/office/drawing/2014/main" id="{AE74AD4E-E3AE-49FB-A547-7AF8B845D372}"/>
               </a:ext>
             </a:extLst>
           </p:cNvPr>
@@ -24007,7 +24007,7 @@
           <p:cNvPr id="3" name="">
             <a:extLst xmlns:a="http://schemas.openxmlformats.org/drawingml/2006/main">
               <a:ext uri="{FF2B5EF4-FFF2-40B4-BE49-F238E27FC236}">
-                <a16:creationId xmlns:a16="http://schemas.microsoft.com/office/drawing/2014/main" id="{5EE4DE06-F248-4437-8076-3D604077E3D9}"/>
+                <a16:creationId xmlns:a16="http://schemas.microsoft.com/office/drawing/2014/main" id="{68546EEE-21D7-4FFD-B188-60581F9A2446}"/>
               </a:ext>
             </a:extLst>
           </p:cNvPr>
@@ -24155,45 +24155,17 @@
                 <a:ea typeface="Arial"/>
                 <a:cs typeface="Arial"/>
               </a:rPr>
-              <a:t>Pjesët duhet të punojnë së bashku</a:t>
+              <a:t>Rastet që trajtojmë në javën 7</a:t>
             </a:r>
           </a:p>
         </p:txBody>
       </p:sp>
-      <p:pic>
-        <p:nvPicPr>
+      <p:sp>
+        <p:nvSpPr>
           <p:cNvPr id="4" name="">
             <a:extLst xmlns:a="http://schemas.openxmlformats.org/drawingml/2006/main">
               <a:ext uri="{FF2B5EF4-FFF2-40B4-BE49-F238E27FC236}">
-                <a16:creationId xmlns:a16="http://schemas.microsoft.com/office/drawing/2014/main" id="{D45291D6-AA5B-4821-B3BD-88F6D8A199F9}"/>
-              </a:ext>
-            </a:extLst>
-          </p:cNvPr>
-          <p:cNvPicPr>
-            <a:picLocks xmlns:a="http://schemas.openxmlformats.org/drawingml/2006/main" noChangeAspect="1"/>
-          </p:cNvPicPr>
-          <p:nvPr/>
-        </p:nvPicPr>
-        <p:blipFill>
-          <a:blip xmlns:r="http://schemas.openxmlformats.org/officeDocument/2006/relationships" xmlns:a="http://schemas.openxmlformats.org/drawingml/2006/main" r:embed="R9bbce73e09484926"/>
-          <a:stretch xmlns:a="http://schemas.openxmlformats.org/drawingml/2006/main"/>
-        </p:blipFill>
-        <p:spPr>
-          <a:xfrm xmlns:a="http://schemas.openxmlformats.org/drawingml/2006/main">
-            <a:off x="609600" y="1952625"/>
-            <a:ext cx="571500" cy="571500"/>
-          </a:xfrm>
-          <a:prstGeom xmlns:a="http://schemas.openxmlformats.org/drawingml/2006/main" prst="rect">
-            <a:avLst/>
-          </a:prstGeom>
-        </p:spPr>
-      </p:pic>
-      <p:sp>
-        <p:nvSpPr>
-          <p:cNvPr id="5" name="">
-            <a:extLst xmlns:a="http://schemas.openxmlformats.org/drawingml/2006/main">
-              <a:ext uri="{FF2B5EF4-FFF2-40B4-BE49-F238E27FC236}">
-                <a16:creationId xmlns:a16="http://schemas.microsoft.com/office/drawing/2014/main" id="{B6A01DA0-E374-48EB-800A-9D4668CB1941}"/>
+                <a16:creationId xmlns:a16="http://schemas.microsoft.com/office/drawing/2014/main" id="{9F3D72FB-06B8-45F1-8FC7-889D319433B3}"/>
               </a:ext>
             </a:extLst>
           </p:cNvPr>
@@ -24204,8 +24176,8 @@
         </p:nvSpPr>
         <p:spPr>
           <a:xfrm xmlns:a="http://schemas.openxmlformats.org/drawingml/2006/main">
-            <a:off x="609600" y="2667000"/>
-            <a:ext cx="3409950" cy="495300"/>
+            <a:off x="609600" y="2000250"/>
+            <a:ext cx="5238750" cy="428625"/>
           </a:xfrm>
           <a:prstGeom xmlns:a="http://schemas.openxmlformats.org/drawingml/2006/main" prst="rect">
             <a:avLst/>
@@ -24341,17 +24313,17 @@
                 <a:ea typeface="Arial"/>
                 <a:cs typeface="Arial"/>
               </a:rPr>
-              <a:t>Zgjedh një udhëtim</a:t>
+              <a:t>Rasti 1 · Lista dhe detajet</a:t>
             </a:r>
           </a:p>
         </p:txBody>
       </p:sp>
       <p:sp>
         <p:nvSpPr>
-          <p:cNvPr id="6" name="">
+          <p:cNvPr id="5" name="">
             <a:extLst xmlns:a="http://schemas.openxmlformats.org/drawingml/2006/main">
               <a:ext uri="{FF2B5EF4-FFF2-40B4-BE49-F238E27FC236}">
-                <a16:creationId xmlns:a16="http://schemas.microsoft.com/office/drawing/2014/main" id="{C71318D1-056C-4656-A4A9-E4336D64B627}"/>
+                <a16:creationId xmlns:a16="http://schemas.microsoft.com/office/drawing/2014/main" id="{7CD11044-682A-4B31-B663-62ED03F26AC8}"/>
               </a:ext>
             </a:extLst>
           </p:cNvPr>
@@ -24362,8 +24334,8 @@
         </p:nvSpPr>
         <p:spPr>
           <a:xfrm xmlns:a="http://schemas.openxmlformats.org/drawingml/2006/main">
-            <a:off x="609600" y="3219450"/>
-            <a:ext cx="3409950" cy="571500"/>
+            <a:off x="609600" y="2438400"/>
+            <a:ext cx="5238750" cy="552450"/>
           </a:xfrm>
           <a:prstGeom xmlns:a="http://schemas.openxmlformats.org/drawingml/2006/main" prst="rect">
             <a:avLst/>
@@ -24499,45 +24471,17 @@
                 <a:ea typeface="Arial"/>
                 <a:cs typeface="Arial"/>
               </a:rPr>
-              <a:t>Lista dhe detajet lidhen me ID</a:t>
+              <a:t>I njëjti ID dhe të dhëna të kuptueshme.</a:t>
             </a:r>
           </a:p>
         </p:txBody>
       </p:sp>
-      <p:pic>
-        <p:nvPicPr>
-          <p:cNvPr id="7" name="">
+      <p:sp>
+        <p:nvSpPr>
+          <p:cNvPr id="6" name="">
             <a:extLst xmlns:a="http://schemas.openxmlformats.org/drawingml/2006/main">
               <a:ext uri="{FF2B5EF4-FFF2-40B4-BE49-F238E27FC236}">
-                <a16:creationId xmlns:a16="http://schemas.microsoft.com/office/drawing/2014/main" id="{804A352B-B1C7-4F52-8427-14F4CA04E182}"/>
-              </a:ext>
-            </a:extLst>
-          </p:cNvPr>
-          <p:cNvPicPr>
-            <a:picLocks xmlns:a="http://schemas.openxmlformats.org/drawingml/2006/main" noChangeAspect="1"/>
-          </p:cNvPicPr>
-          <p:nvPr/>
-        </p:nvPicPr>
-        <p:blipFill>
-          <a:blip xmlns:r="http://schemas.openxmlformats.org/officeDocument/2006/relationships" xmlns:a="http://schemas.openxmlformats.org/drawingml/2006/main" r:embed="R8f8f3e11735c4a6e"/>
-          <a:stretch xmlns:a="http://schemas.openxmlformats.org/drawingml/2006/main"/>
-        </p:blipFill>
-        <p:spPr>
-          <a:xfrm xmlns:a="http://schemas.openxmlformats.org/drawingml/2006/main">
-            <a:off x="4381500" y="1952625"/>
-            <a:ext cx="571500" cy="571500"/>
-          </a:xfrm>
-          <a:prstGeom xmlns:a="http://schemas.openxmlformats.org/drawingml/2006/main" prst="rect">
-            <a:avLst/>
-          </a:prstGeom>
-        </p:spPr>
-      </p:pic>
-      <p:sp>
-        <p:nvSpPr>
-          <p:cNvPr id="8" name="">
-            <a:extLst xmlns:a="http://schemas.openxmlformats.org/drawingml/2006/main">
-              <a:ext uri="{FF2B5EF4-FFF2-40B4-BE49-F238E27FC236}">
-                <a16:creationId xmlns:a16="http://schemas.microsoft.com/office/drawing/2014/main" id="{3138FEAA-A4D0-47A1-846E-DFF91EF3545D}"/>
+                <a16:creationId xmlns:a16="http://schemas.microsoft.com/office/drawing/2014/main" id="{CDAA639C-2773-4EE5-AD69-80D2F707AA82}"/>
               </a:ext>
             </a:extLst>
           </p:cNvPr>
@@ -24548,8 +24492,8 @@
         </p:nvSpPr>
         <p:spPr>
           <a:xfrm xmlns:a="http://schemas.openxmlformats.org/drawingml/2006/main">
-            <a:off x="4381500" y="2667000"/>
-            <a:ext cx="3409950" cy="495300"/>
+            <a:off x="6324600" y="2000250"/>
+            <a:ext cx="5238750" cy="428625"/>
           </a:xfrm>
           <a:prstGeom xmlns:a="http://schemas.openxmlformats.org/drawingml/2006/main" prst="rect">
             <a:avLst/>
@@ -24685,17 +24629,17 @@
                 <a:ea typeface="Arial"/>
                 <a:cs typeface="Arial"/>
               </a:rPr>
-              <a:t>Lexon të dhënat</a:t>
+              <a:t>Rasti 2 · Pa vende</a:t>
             </a:r>
           </a:p>
         </p:txBody>
       </p:sp>
       <p:sp>
         <p:nvSpPr>
-          <p:cNvPr id="9" name="">
+          <p:cNvPr id="7" name="">
             <a:extLst xmlns:a="http://schemas.openxmlformats.org/drawingml/2006/main">
               <a:ext uri="{FF2B5EF4-FFF2-40B4-BE49-F238E27FC236}">
-                <a16:creationId xmlns:a16="http://schemas.microsoft.com/office/drawing/2014/main" id="{9CCCEBF3-253E-43D8-AE70-BD1B5A32BFEC}"/>
+                <a16:creationId xmlns:a16="http://schemas.microsoft.com/office/drawing/2014/main" id="{F35AA0BD-46C3-495B-BFD8-EF7A0BE79993}"/>
               </a:ext>
             </a:extLst>
           </p:cNvPr>
@@ -24706,8 +24650,8 @@
         </p:nvSpPr>
         <p:spPr>
           <a:xfrm xmlns:a="http://schemas.openxmlformats.org/drawingml/2006/main">
-            <a:off x="4381500" y="3219450"/>
-            <a:ext cx="3409950" cy="571500"/>
+            <a:off x="6324600" y="2438400"/>
+            <a:ext cx="5238750" cy="552450"/>
           </a:xfrm>
           <a:prstGeom xmlns:a="http://schemas.openxmlformats.org/drawingml/2006/main" prst="rect">
             <a:avLst/>
@@ -24843,45 +24787,17 @@
                 <a:ea typeface="Arial"/>
                 <a:cs typeface="Arial"/>
               </a:rPr>
-              <a:t>Dallon serverin nga kopja</a:t>
+              <a:t>0 vende nuk duhet të premtojë rezervim.</a:t>
             </a:r>
           </a:p>
         </p:txBody>
       </p:sp>
-      <p:pic>
-        <p:nvPicPr>
-          <p:cNvPr id="10" name="">
+      <p:sp>
+        <p:nvSpPr>
+          <p:cNvPr id="8" name="">
             <a:extLst xmlns:a="http://schemas.openxmlformats.org/drawingml/2006/main">
               <a:ext uri="{FF2B5EF4-FFF2-40B4-BE49-F238E27FC236}">
-                <a16:creationId xmlns:a16="http://schemas.microsoft.com/office/drawing/2014/main" id="{144344F4-B1E3-4504-9F82-10FA30F268E2}"/>
-              </a:ext>
-            </a:extLst>
-          </p:cNvPr>
-          <p:cNvPicPr>
-            <a:picLocks xmlns:a="http://schemas.openxmlformats.org/drawingml/2006/main" noChangeAspect="1"/>
-          </p:cNvPicPr>
-          <p:nvPr/>
-        </p:nvPicPr>
-        <p:blipFill>
-          <a:blip xmlns:r="http://schemas.openxmlformats.org/officeDocument/2006/relationships" xmlns:a="http://schemas.openxmlformats.org/drawingml/2006/main" r:embed="R56134e7ad8984893"/>
-          <a:stretch xmlns:a="http://schemas.openxmlformats.org/drawingml/2006/main"/>
-        </p:blipFill>
-        <p:spPr>
-          <a:xfrm xmlns:a="http://schemas.openxmlformats.org/drawingml/2006/main">
-            <a:off x="8153400" y="1952625"/>
-            <a:ext cx="571500" cy="571500"/>
-          </a:xfrm>
-          <a:prstGeom xmlns:a="http://schemas.openxmlformats.org/drawingml/2006/main" prst="rect">
-            <a:avLst/>
-          </a:prstGeom>
-        </p:spPr>
-      </p:pic>
-      <p:sp>
-        <p:nvSpPr>
-          <p:cNvPr id="11" name="">
-            <a:extLst xmlns:a="http://schemas.openxmlformats.org/drawingml/2006/main">
-              <a:ext uri="{FF2B5EF4-FFF2-40B4-BE49-F238E27FC236}">
-                <a16:creationId xmlns:a16="http://schemas.microsoft.com/office/drawing/2014/main" id="{981CF799-D866-4851-B106-03FB6DB485F5}"/>
+                <a16:creationId xmlns:a16="http://schemas.microsoft.com/office/drawing/2014/main" id="{6C67C57F-AB4F-4D1D-96AC-58A200F803DD}"/>
               </a:ext>
             </a:extLst>
           </p:cNvPr>
@@ -24892,8 +24808,8 @@
         </p:nvSpPr>
         <p:spPr>
           <a:xfrm xmlns:a="http://schemas.openxmlformats.org/drawingml/2006/main">
-            <a:off x="8153400" y="2667000"/>
-            <a:ext cx="3409950" cy="495300"/>
+            <a:off x="609600" y="3067050"/>
+            <a:ext cx="5238750" cy="428625"/>
           </a:xfrm>
           <a:prstGeom xmlns:a="http://schemas.openxmlformats.org/drawingml/2006/main" prst="rect">
             <a:avLst/>
@@ -25029,17 +24945,17 @@
                 <a:ea typeface="Arial"/>
                 <a:cs typeface="Arial"/>
               </a:rPr>
-              <a:t>Kupton çfarë lejohet</a:t>
+              <a:t>Rasti 3 · Klikim apo rezervim</a:t>
             </a:r>
           </a:p>
         </p:txBody>
       </p:sp>
       <p:sp>
         <p:nvSpPr>
-          <p:cNvPr id="12" name="">
+          <p:cNvPr id="9" name="">
             <a:extLst xmlns:a="http://schemas.openxmlformats.org/drawingml/2006/main">
               <a:ext uri="{FF2B5EF4-FFF2-40B4-BE49-F238E27FC236}">
-                <a16:creationId xmlns:a16="http://schemas.microsoft.com/office/drawing/2014/main" id="{D9B14882-782C-4200-B91A-11D8B507F365}"/>
+                <a16:creationId xmlns:a16="http://schemas.microsoft.com/office/drawing/2014/main" id="{8465C455-ABCB-4174-8208-1EBED392E198}"/>
               </a:ext>
             </a:extLst>
           </p:cNvPr>
@@ -25050,8 +24966,8 @@
         </p:nvSpPr>
         <p:spPr>
           <a:xfrm xmlns:a="http://schemas.openxmlformats.org/drawingml/2006/main">
-            <a:off x="8153400" y="3219450"/>
-            <a:ext cx="3409950" cy="571500"/>
+            <a:off x="609600" y="3505200"/>
+            <a:ext cx="5238750" cy="552450"/>
           </a:xfrm>
           <a:prstGeom xmlns:a="http://schemas.openxmlformats.org/drawingml/2006/main" prst="rect">
             <a:avLst/>
@@ -25187,17 +25103,17 @@
                 <a:ea typeface="Arial"/>
                 <a:cs typeface="Arial"/>
               </a:rPr>
-              <a:t>Hyrja nuk jep çdo të drejtë</a:t>
+              <a:t>Reagimi në ekran nuk provon ruajtjen.</a:t>
             </a:r>
           </a:p>
         </p:txBody>
       </p:sp>
       <p:sp>
         <p:nvSpPr>
-          <p:cNvPr id="13" name="">
+          <p:cNvPr id="10" name="">
             <a:extLst xmlns:a="http://schemas.openxmlformats.org/drawingml/2006/main">
               <a:ext uri="{FF2B5EF4-FFF2-40B4-BE49-F238E27FC236}">
-                <a16:creationId xmlns:a16="http://schemas.microsoft.com/office/drawing/2014/main" id="{D507E0D6-48A2-40CA-82E4-AC5093B452BA}"/>
+                <a16:creationId xmlns:a16="http://schemas.microsoft.com/office/drawing/2014/main" id="{DF30167B-B713-4440-AC18-3C2D7E8B59DD}"/>
               </a:ext>
             </a:extLst>
           </p:cNvPr>
@@ -25208,8 +25124,8 @@
         </p:nvSpPr>
         <p:spPr>
           <a:xfrm xmlns:a="http://schemas.openxmlformats.org/drawingml/2006/main">
-            <a:off x="609600" y="4048125"/>
-            <a:ext cx="10953750" cy="1285875"/>
+            <a:off x="6324600" y="3067050"/>
+            <a:ext cx="5238750" cy="428625"/>
           </a:xfrm>
           <a:prstGeom xmlns:a="http://schemas.openxmlformats.org/drawingml/2006/main" prst="rect">
             <a:avLst/>
@@ -25225,9 +25141,9 @@
           </a:bodyPr>
           <a:lstStyle xmlns:a="http://schemas.openxmlformats.org/drawingml/2006/main">
             <a:defPPr>
-              <a:defRPr sz="1950" b="0">
-                <a:solidFill>
-                  <a:srgbClr val="EDF2FF"/>
+              <a:defRPr sz="2025" b="1">
+                <a:solidFill>
+                  <a:srgbClr val="FFFFFF"/>
                 </a:solidFill>
                 <a:latin typeface="Arial"/>
                 <a:ea typeface="Arial"/>
@@ -25235,9 +25151,9 @@
               </a:defRPr>
             </a:defPPr>
             <a:lvl1pPr>
-              <a:defRPr sz="1950" b="0">
-                <a:solidFill>
-                  <a:srgbClr val="EDF2FF"/>
+              <a:defRPr sz="2025" b="1">
+                <a:solidFill>
+                  <a:srgbClr val="FFFFFF"/>
                 </a:solidFill>
                 <a:latin typeface="Arial"/>
                 <a:ea typeface="Arial"/>
@@ -25245,9 +25161,9 @@
               </a:defRPr>
             </a:lvl1pPr>
             <a:lvl2pPr>
-              <a:defRPr sz="1950" b="0">
-                <a:solidFill>
-                  <a:srgbClr val="EDF2FF"/>
+              <a:defRPr sz="2025" b="1">
+                <a:solidFill>
+                  <a:srgbClr val="FFFFFF"/>
                 </a:solidFill>
                 <a:latin typeface="Arial"/>
                 <a:ea typeface="Arial"/>
@@ -25255,9 +25171,9 @@
               </a:defRPr>
             </a:lvl2pPr>
             <a:lvl3pPr>
-              <a:defRPr sz="1950" b="0">
-                <a:solidFill>
-                  <a:srgbClr val="EDF2FF"/>
+              <a:defRPr sz="2025" b="1">
+                <a:solidFill>
+                  <a:srgbClr val="FFFFFF"/>
                 </a:solidFill>
                 <a:latin typeface="Arial"/>
                 <a:ea typeface="Arial"/>
@@ -25265,9 +25181,9 @@
               </a:defRPr>
             </a:lvl3pPr>
             <a:lvl4pPr>
-              <a:defRPr sz="1950" b="0">
-                <a:solidFill>
-                  <a:srgbClr val="EDF2FF"/>
+              <a:defRPr sz="2025" b="1">
+                <a:solidFill>
+                  <a:srgbClr val="FFFFFF"/>
                 </a:solidFill>
                 <a:latin typeface="Arial"/>
                 <a:ea typeface="Arial"/>
@@ -25275,9 +25191,9 @@
               </a:defRPr>
             </a:lvl4pPr>
             <a:lvl5pPr>
-              <a:defRPr sz="1950" b="0">
-                <a:solidFill>
-                  <a:srgbClr val="EDF2FF"/>
+              <a:defRPr sz="2025" b="1">
+                <a:solidFill>
+                  <a:srgbClr val="FFFFFF"/>
                 </a:solidFill>
                 <a:latin typeface="Arial"/>
                 <a:ea typeface="Arial"/>
@@ -25285,9 +25201,9 @@
               </a:defRPr>
             </a:lvl5pPr>
             <a:lvl6pPr>
-              <a:defRPr sz="1950" b="0">
-                <a:solidFill>
-                  <a:srgbClr val="EDF2FF"/>
+              <a:defRPr sz="2025" b="1">
+                <a:solidFill>
+                  <a:srgbClr val="FFFFFF"/>
                 </a:solidFill>
                 <a:latin typeface="Arial"/>
                 <a:ea typeface="Arial"/>
@@ -25295,9 +25211,9 @@
               </a:defRPr>
             </a:lvl6pPr>
             <a:lvl7pPr>
-              <a:defRPr sz="1950" b="0">
-                <a:solidFill>
-                  <a:srgbClr val="EDF2FF"/>
+              <a:defRPr sz="2025" b="1">
+                <a:solidFill>
+                  <a:srgbClr val="FFFFFF"/>
                 </a:solidFill>
                 <a:latin typeface="Arial"/>
                 <a:ea typeface="Arial"/>
@@ -25305,9 +25221,9 @@
               </a:defRPr>
             </a:lvl7pPr>
             <a:lvl8pPr>
-              <a:defRPr sz="1950" b="0">
-                <a:solidFill>
-                  <a:srgbClr val="EDF2FF"/>
+              <a:defRPr sz="2025" b="1">
+                <a:solidFill>
+                  <a:srgbClr val="FFFFFF"/>
                 </a:solidFill>
                 <a:latin typeface="Arial"/>
                 <a:ea typeface="Arial"/>
@@ -25315,9 +25231,9 @@
               </a:defRPr>
             </a:lvl8pPr>
             <a:lvl9pPr>
-              <a:defRPr sz="1950" b="0">
-                <a:solidFill>
-                  <a:srgbClr val="EDF2FF"/>
+              <a:defRPr sz="2025" b="1">
+                <a:solidFill>
+                  <a:srgbClr val="FFFFFF"/>
                 </a:solidFill>
                 <a:latin typeface="Arial"/>
                 <a:ea typeface="Arial"/>
@@ -25327,9 +25243,9 @@
           </a:lstStyle>
           <a:p xmlns:a="http://schemas.openxmlformats.org/drawingml/2006/main">
             <a:pPr>
-              <a:defRPr sz="1950" b="0">
-                <a:solidFill>
-                  <a:srgbClr val="EDF2FF"/>
+              <a:defRPr sz="2025" b="1">
+                <a:solidFill>
+                  <a:srgbClr val="FFFFFF"/>
                 </a:solidFill>
                 <a:latin typeface="Arial"/>
                 <a:ea typeface="Arial"/>
@@ -25337,15 +25253,963 @@
               </a:defRPr>
             </a:pPr>
             <a:r>
-              <a:rPr sz="1950" b="0">
+              <a:rPr sz="2025" b="1">
+                <a:solidFill>
+                  <a:srgbClr val="FFFFFF"/>
+                </a:solidFill>
+                <a:latin typeface="Arial"/>
+                <a:ea typeface="Arial"/>
+                <a:cs typeface="Arial"/>
+              </a:rPr>
+              <a:t>Rasti 4 · Kopja pa internet</a:t>
+            </a:r>
+          </a:p>
+        </p:txBody>
+      </p:sp>
+      <p:sp>
+        <p:nvSpPr>
+          <p:cNvPr id="11" name="">
+            <a:extLst xmlns:a="http://schemas.openxmlformats.org/drawingml/2006/main">
+              <a:ext uri="{FF2B5EF4-FFF2-40B4-BE49-F238E27FC236}">
+                <a16:creationId xmlns:a16="http://schemas.microsoft.com/office/drawing/2014/main" id="{E0D11904-1964-4ED5-AF00-83A36D6236B1}"/>
+              </a:ext>
+            </a:extLst>
+          </p:cNvPr>
+          <p:cNvSpPr>
+            <a:spLocks xmlns:a="http://schemas.openxmlformats.org/drawingml/2006/main" noGrp="1"/>
+          </p:cNvSpPr>
+          <p:nvPr/>
+        </p:nvSpPr>
+        <p:spPr>
+          <a:xfrm xmlns:a="http://schemas.openxmlformats.org/drawingml/2006/main">
+            <a:off x="6324600" y="3505200"/>
+            <a:ext cx="5238750" cy="552450"/>
+          </a:xfrm>
+          <a:prstGeom xmlns:a="http://schemas.openxmlformats.org/drawingml/2006/main" prst="rect">
+            <a:avLst/>
+          </a:prstGeom>
+          <a:noFill xmlns:a="http://schemas.openxmlformats.org/drawingml/2006/main"/>
+          <a:ln xmlns:a="http://schemas.openxmlformats.org/drawingml/2006/main" w="0">
+            <a:noFill/>
+          </a:ln>
+        </p:spPr>
+        <p:txBody>
+          <a:bodyPr xmlns:a="http://schemas.openxmlformats.org/drawingml/2006/main">
+            <a:noAutofit/>
+          </a:bodyPr>
+          <a:lstStyle xmlns:a="http://schemas.openxmlformats.org/drawingml/2006/main">
+            <a:defPPr>
+              <a:defRPr sz="1650" b="0">
+                <a:solidFill>
+                  <a:srgbClr val="C8D3E6"/>
+                </a:solidFill>
+                <a:latin typeface="Arial"/>
+                <a:ea typeface="Arial"/>
+                <a:cs typeface="Arial"/>
+              </a:defRPr>
+            </a:defPPr>
+            <a:lvl1pPr>
+              <a:defRPr sz="1650" b="0">
+                <a:solidFill>
+                  <a:srgbClr val="C8D3E6"/>
+                </a:solidFill>
+                <a:latin typeface="Arial"/>
+                <a:ea typeface="Arial"/>
+                <a:cs typeface="Arial"/>
+              </a:defRPr>
+            </a:lvl1pPr>
+            <a:lvl2pPr>
+              <a:defRPr sz="1650" b="0">
+                <a:solidFill>
+                  <a:srgbClr val="C8D3E6"/>
+                </a:solidFill>
+                <a:latin typeface="Arial"/>
+                <a:ea typeface="Arial"/>
+                <a:cs typeface="Arial"/>
+              </a:defRPr>
+            </a:lvl2pPr>
+            <a:lvl3pPr>
+              <a:defRPr sz="1650" b="0">
+                <a:solidFill>
+                  <a:srgbClr val="C8D3E6"/>
+                </a:solidFill>
+                <a:latin typeface="Arial"/>
+                <a:ea typeface="Arial"/>
+                <a:cs typeface="Arial"/>
+              </a:defRPr>
+            </a:lvl3pPr>
+            <a:lvl4pPr>
+              <a:defRPr sz="1650" b="0">
+                <a:solidFill>
+                  <a:srgbClr val="C8D3E6"/>
+                </a:solidFill>
+                <a:latin typeface="Arial"/>
+                <a:ea typeface="Arial"/>
+                <a:cs typeface="Arial"/>
+              </a:defRPr>
+            </a:lvl4pPr>
+            <a:lvl5pPr>
+              <a:defRPr sz="1650" b="0">
+                <a:solidFill>
+                  <a:srgbClr val="C8D3E6"/>
+                </a:solidFill>
+                <a:latin typeface="Arial"/>
+                <a:ea typeface="Arial"/>
+                <a:cs typeface="Arial"/>
+              </a:defRPr>
+            </a:lvl5pPr>
+            <a:lvl6pPr>
+              <a:defRPr sz="1650" b="0">
+                <a:solidFill>
+                  <a:srgbClr val="C8D3E6"/>
+                </a:solidFill>
+                <a:latin typeface="Arial"/>
+                <a:ea typeface="Arial"/>
+                <a:cs typeface="Arial"/>
+              </a:defRPr>
+            </a:lvl6pPr>
+            <a:lvl7pPr>
+              <a:defRPr sz="1650" b="0">
+                <a:solidFill>
+                  <a:srgbClr val="C8D3E6"/>
+                </a:solidFill>
+                <a:latin typeface="Arial"/>
+                <a:ea typeface="Arial"/>
+                <a:cs typeface="Arial"/>
+              </a:defRPr>
+            </a:lvl7pPr>
+            <a:lvl8pPr>
+              <a:defRPr sz="1650" b="0">
+                <a:solidFill>
+                  <a:srgbClr val="C8D3E6"/>
+                </a:solidFill>
+                <a:latin typeface="Arial"/>
+                <a:ea typeface="Arial"/>
+                <a:cs typeface="Arial"/>
+              </a:defRPr>
+            </a:lvl8pPr>
+            <a:lvl9pPr>
+              <a:defRPr sz="1650" b="0">
+                <a:solidFill>
+                  <a:srgbClr val="C8D3E6"/>
+                </a:solidFill>
+                <a:latin typeface="Arial"/>
+                <a:ea typeface="Arial"/>
+                <a:cs typeface="Arial"/>
+              </a:defRPr>
+            </a:lvl9pPr>
+          </a:lstStyle>
+          <a:p xmlns:a="http://schemas.openxmlformats.org/drawingml/2006/main">
+            <a:pPr>
+              <a:defRPr sz="1650" b="0">
+                <a:solidFill>
+                  <a:srgbClr val="C8D3E6"/>
+                </a:solidFill>
+                <a:latin typeface="Arial"/>
+                <a:ea typeface="Arial"/>
+                <a:cs typeface="Arial"/>
+              </a:defRPr>
+            </a:pPr>
+            <a:r>
+              <a:rPr sz="1650" b="0">
+                <a:solidFill>
+                  <a:srgbClr val="C8D3E6"/>
+                </a:solidFill>
+                <a:latin typeface="Arial"/>
+                <a:ea typeface="Arial"/>
+                <a:cs typeface="Arial"/>
+              </a:rPr>
+              <a:t>E dhëna e ruajtur mund të jetë e vjetër.</a:t>
+            </a:r>
+          </a:p>
+        </p:txBody>
+      </p:sp>
+      <p:sp>
+        <p:nvSpPr>
+          <p:cNvPr id="12" name="">
+            <a:extLst xmlns:a="http://schemas.openxmlformats.org/drawingml/2006/main">
+              <a:ext uri="{FF2B5EF4-FFF2-40B4-BE49-F238E27FC236}">
+                <a16:creationId xmlns:a16="http://schemas.microsoft.com/office/drawing/2014/main" id="{A748BA7C-74CE-4CBF-A02A-4A72D2DA946C}"/>
+              </a:ext>
+            </a:extLst>
+          </p:cNvPr>
+          <p:cNvSpPr>
+            <a:spLocks xmlns:a="http://schemas.openxmlformats.org/drawingml/2006/main" noGrp="1"/>
+          </p:cNvSpPr>
+          <p:nvPr/>
+        </p:nvSpPr>
+        <p:spPr>
+          <a:xfrm xmlns:a="http://schemas.openxmlformats.org/drawingml/2006/main">
+            <a:off x="609600" y="4133850"/>
+            <a:ext cx="5238750" cy="428625"/>
+          </a:xfrm>
+          <a:prstGeom xmlns:a="http://schemas.openxmlformats.org/drawingml/2006/main" prst="rect">
+            <a:avLst/>
+          </a:prstGeom>
+          <a:noFill xmlns:a="http://schemas.openxmlformats.org/drawingml/2006/main"/>
+          <a:ln xmlns:a="http://schemas.openxmlformats.org/drawingml/2006/main" w="0">
+            <a:noFill/>
+          </a:ln>
+        </p:spPr>
+        <p:txBody>
+          <a:bodyPr xmlns:a="http://schemas.openxmlformats.org/drawingml/2006/main">
+            <a:noAutofit/>
+          </a:bodyPr>
+          <a:lstStyle xmlns:a="http://schemas.openxmlformats.org/drawingml/2006/main">
+            <a:defPPr>
+              <a:defRPr sz="2025" b="1">
+                <a:solidFill>
+                  <a:srgbClr val="FFFFFF"/>
+                </a:solidFill>
+                <a:latin typeface="Arial"/>
+                <a:ea typeface="Arial"/>
+                <a:cs typeface="Arial"/>
+              </a:defRPr>
+            </a:defPPr>
+            <a:lvl1pPr>
+              <a:defRPr sz="2025" b="1">
+                <a:solidFill>
+                  <a:srgbClr val="FFFFFF"/>
+                </a:solidFill>
+                <a:latin typeface="Arial"/>
+                <a:ea typeface="Arial"/>
+                <a:cs typeface="Arial"/>
+              </a:defRPr>
+            </a:lvl1pPr>
+            <a:lvl2pPr>
+              <a:defRPr sz="2025" b="1">
+                <a:solidFill>
+                  <a:srgbClr val="FFFFFF"/>
+                </a:solidFill>
+                <a:latin typeface="Arial"/>
+                <a:ea typeface="Arial"/>
+                <a:cs typeface="Arial"/>
+              </a:defRPr>
+            </a:lvl2pPr>
+            <a:lvl3pPr>
+              <a:defRPr sz="2025" b="1">
+                <a:solidFill>
+                  <a:srgbClr val="FFFFFF"/>
+                </a:solidFill>
+                <a:latin typeface="Arial"/>
+                <a:ea typeface="Arial"/>
+                <a:cs typeface="Arial"/>
+              </a:defRPr>
+            </a:lvl3pPr>
+            <a:lvl4pPr>
+              <a:defRPr sz="2025" b="1">
+                <a:solidFill>
+                  <a:srgbClr val="FFFFFF"/>
+                </a:solidFill>
+                <a:latin typeface="Arial"/>
+                <a:ea typeface="Arial"/>
+                <a:cs typeface="Arial"/>
+              </a:defRPr>
+            </a:lvl4pPr>
+            <a:lvl5pPr>
+              <a:defRPr sz="2025" b="1">
+                <a:solidFill>
+                  <a:srgbClr val="FFFFFF"/>
+                </a:solidFill>
+                <a:latin typeface="Arial"/>
+                <a:ea typeface="Arial"/>
+                <a:cs typeface="Arial"/>
+              </a:defRPr>
+            </a:lvl5pPr>
+            <a:lvl6pPr>
+              <a:defRPr sz="2025" b="1">
+                <a:solidFill>
+                  <a:srgbClr val="FFFFFF"/>
+                </a:solidFill>
+                <a:latin typeface="Arial"/>
+                <a:ea typeface="Arial"/>
+                <a:cs typeface="Arial"/>
+              </a:defRPr>
+            </a:lvl6pPr>
+            <a:lvl7pPr>
+              <a:defRPr sz="2025" b="1">
+                <a:solidFill>
+                  <a:srgbClr val="FFFFFF"/>
+                </a:solidFill>
+                <a:latin typeface="Arial"/>
+                <a:ea typeface="Arial"/>
+                <a:cs typeface="Arial"/>
+              </a:defRPr>
+            </a:lvl7pPr>
+            <a:lvl8pPr>
+              <a:defRPr sz="2025" b="1">
+                <a:solidFill>
+                  <a:srgbClr val="FFFFFF"/>
+                </a:solidFill>
+                <a:latin typeface="Arial"/>
+                <a:ea typeface="Arial"/>
+                <a:cs typeface="Arial"/>
+              </a:defRPr>
+            </a:lvl8pPr>
+            <a:lvl9pPr>
+              <a:defRPr sz="2025" b="1">
+                <a:solidFill>
+                  <a:srgbClr val="FFFFFF"/>
+                </a:solidFill>
+                <a:latin typeface="Arial"/>
+                <a:ea typeface="Arial"/>
+                <a:cs typeface="Arial"/>
+              </a:defRPr>
+            </a:lvl9pPr>
+          </a:lstStyle>
+          <a:p xmlns:a="http://schemas.openxmlformats.org/drawingml/2006/main">
+            <a:pPr>
+              <a:defRPr sz="2025" b="1">
+                <a:solidFill>
+                  <a:srgbClr val="FFFFFF"/>
+                </a:solidFill>
+                <a:latin typeface="Arial"/>
+                <a:ea typeface="Arial"/>
+                <a:cs typeface="Arial"/>
+              </a:defRPr>
+            </a:pPr>
+            <a:r>
+              <a:rPr sz="2025" b="1">
+                <a:solidFill>
+                  <a:srgbClr val="FFFFFF"/>
+                </a:solidFill>
+                <a:latin typeface="Arial"/>
+                <a:ea typeface="Arial"/>
+                <a:cs typeface="Arial"/>
+              </a:rPr>
+              <a:t>Rasti 5 · Lejet e ndryshimit</a:t>
+            </a:r>
+          </a:p>
+        </p:txBody>
+      </p:sp>
+      <p:sp>
+        <p:nvSpPr>
+          <p:cNvPr id="13" name="">
+            <a:extLst xmlns:a="http://schemas.openxmlformats.org/drawingml/2006/main">
+              <a:ext uri="{FF2B5EF4-FFF2-40B4-BE49-F238E27FC236}">
+                <a16:creationId xmlns:a16="http://schemas.microsoft.com/office/drawing/2014/main" id="{D2128EEF-DE64-4002-99B8-D0E38245DB07}"/>
+              </a:ext>
+            </a:extLst>
+          </p:cNvPr>
+          <p:cNvSpPr>
+            <a:spLocks xmlns:a="http://schemas.openxmlformats.org/drawingml/2006/main" noGrp="1"/>
+          </p:cNvSpPr>
+          <p:nvPr/>
+        </p:nvSpPr>
+        <p:spPr>
+          <a:xfrm xmlns:a="http://schemas.openxmlformats.org/drawingml/2006/main">
+            <a:off x="609600" y="4572000"/>
+            <a:ext cx="5238750" cy="552450"/>
+          </a:xfrm>
+          <a:prstGeom xmlns:a="http://schemas.openxmlformats.org/drawingml/2006/main" prst="rect">
+            <a:avLst/>
+          </a:prstGeom>
+          <a:noFill xmlns:a="http://schemas.openxmlformats.org/drawingml/2006/main"/>
+          <a:ln xmlns:a="http://schemas.openxmlformats.org/drawingml/2006/main" w="0">
+            <a:noFill/>
+          </a:ln>
+        </p:spPr>
+        <p:txBody>
+          <a:bodyPr xmlns:a="http://schemas.openxmlformats.org/drawingml/2006/main">
+            <a:noAutofit/>
+          </a:bodyPr>
+          <a:lstStyle xmlns:a="http://schemas.openxmlformats.org/drawingml/2006/main">
+            <a:defPPr>
+              <a:defRPr sz="1650" b="0">
+                <a:solidFill>
+                  <a:srgbClr val="C8D3E6"/>
+                </a:solidFill>
+                <a:latin typeface="Arial"/>
+                <a:ea typeface="Arial"/>
+                <a:cs typeface="Arial"/>
+              </a:defRPr>
+            </a:defPPr>
+            <a:lvl1pPr>
+              <a:defRPr sz="1650" b="0">
+                <a:solidFill>
+                  <a:srgbClr val="C8D3E6"/>
+                </a:solidFill>
+                <a:latin typeface="Arial"/>
+                <a:ea typeface="Arial"/>
+                <a:cs typeface="Arial"/>
+              </a:defRPr>
+            </a:lvl1pPr>
+            <a:lvl2pPr>
+              <a:defRPr sz="1650" b="0">
+                <a:solidFill>
+                  <a:srgbClr val="C8D3E6"/>
+                </a:solidFill>
+                <a:latin typeface="Arial"/>
+                <a:ea typeface="Arial"/>
+                <a:cs typeface="Arial"/>
+              </a:defRPr>
+            </a:lvl2pPr>
+            <a:lvl3pPr>
+              <a:defRPr sz="1650" b="0">
+                <a:solidFill>
+                  <a:srgbClr val="C8D3E6"/>
+                </a:solidFill>
+                <a:latin typeface="Arial"/>
+                <a:ea typeface="Arial"/>
+                <a:cs typeface="Arial"/>
+              </a:defRPr>
+            </a:lvl3pPr>
+            <a:lvl4pPr>
+              <a:defRPr sz="1650" b="0">
+                <a:solidFill>
+                  <a:srgbClr val="C8D3E6"/>
+                </a:solidFill>
+                <a:latin typeface="Arial"/>
+                <a:ea typeface="Arial"/>
+                <a:cs typeface="Arial"/>
+              </a:defRPr>
+            </a:lvl4pPr>
+            <a:lvl5pPr>
+              <a:defRPr sz="1650" b="0">
+                <a:solidFill>
+                  <a:srgbClr val="C8D3E6"/>
+                </a:solidFill>
+                <a:latin typeface="Arial"/>
+                <a:ea typeface="Arial"/>
+                <a:cs typeface="Arial"/>
+              </a:defRPr>
+            </a:lvl5pPr>
+            <a:lvl6pPr>
+              <a:defRPr sz="1650" b="0">
+                <a:solidFill>
+                  <a:srgbClr val="C8D3E6"/>
+                </a:solidFill>
+                <a:latin typeface="Arial"/>
+                <a:ea typeface="Arial"/>
+                <a:cs typeface="Arial"/>
+              </a:defRPr>
+            </a:lvl6pPr>
+            <a:lvl7pPr>
+              <a:defRPr sz="1650" b="0">
+                <a:solidFill>
+                  <a:srgbClr val="C8D3E6"/>
+                </a:solidFill>
+                <a:latin typeface="Arial"/>
+                <a:ea typeface="Arial"/>
+                <a:cs typeface="Arial"/>
+              </a:defRPr>
+            </a:lvl7pPr>
+            <a:lvl8pPr>
+              <a:defRPr sz="1650" b="0">
+                <a:solidFill>
+                  <a:srgbClr val="C8D3E6"/>
+                </a:solidFill>
+                <a:latin typeface="Arial"/>
+                <a:ea typeface="Arial"/>
+                <a:cs typeface="Arial"/>
+              </a:defRPr>
+            </a:lvl8pPr>
+            <a:lvl9pPr>
+              <a:defRPr sz="1650" b="0">
+                <a:solidFill>
+                  <a:srgbClr val="C8D3E6"/>
+                </a:solidFill>
+                <a:latin typeface="Arial"/>
+                <a:ea typeface="Arial"/>
+                <a:cs typeface="Arial"/>
+              </a:defRPr>
+            </a:lvl9pPr>
+          </a:lstStyle>
+          <a:p xmlns:a="http://schemas.openxmlformats.org/drawingml/2006/main">
+            <a:pPr>
+              <a:defRPr sz="1650" b="0">
+                <a:solidFill>
+                  <a:srgbClr val="C8D3E6"/>
+                </a:solidFill>
+                <a:latin typeface="Arial"/>
+                <a:ea typeface="Arial"/>
+                <a:cs typeface="Arial"/>
+              </a:defRPr>
+            </a:pPr>
+            <a:r>
+              <a:rPr sz="1650" b="0">
+                <a:solidFill>
+                  <a:srgbClr val="C8D3E6"/>
+                </a:solidFill>
+                <a:latin typeface="Arial"/>
+                <a:ea typeface="Arial"/>
+                <a:cs typeface="Arial"/>
+              </a:rPr>
+              <a:t>Serveri verifikon sesionin dhe pronarin.</a:t>
+            </a:r>
+          </a:p>
+        </p:txBody>
+      </p:sp>
+      <p:sp>
+        <p:nvSpPr>
+          <p:cNvPr id="14" name="">
+            <a:extLst xmlns:a="http://schemas.openxmlformats.org/drawingml/2006/main">
+              <a:ext uri="{FF2B5EF4-FFF2-40B4-BE49-F238E27FC236}">
+                <a16:creationId xmlns:a16="http://schemas.microsoft.com/office/drawing/2014/main" id="{D9752AA9-1BBD-4507-AF86-C796698EF84F}"/>
+              </a:ext>
+            </a:extLst>
+          </p:cNvPr>
+          <p:cNvSpPr>
+            <a:spLocks xmlns:a="http://schemas.openxmlformats.org/drawingml/2006/main" noGrp="1"/>
+          </p:cNvSpPr>
+          <p:nvPr/>
+        </p:nvSpPr>
+        <p:spPr>
+          <a:xfrm xmlns:a="http://schemas.openxmlformats.org/drawingml/2006/main">
+            <a:off x="6324600" y="4133850"/>
+            <a:ext cx="5238750" cy="428625"/>
+          </a:xfrm>
+          <a:prstGeom xmlns:a="http://schemas.openxmlformats.org/drawingml/2006/main" prst="rect">
+            <a:avLst/>
+          </a:prstGeom>
+          <a:noFill xmlns:a="http://schemas.openxmlformats.org/drawingml/2006/main"/>
+          <a:ln xmlns:a="http://schemas.openxmlformats.org/drawingml/2006/main" w="0">
+            <a:noFill/>
+          </a:ln>
+        </p:spPr>
+        <p:txBody>
+          <a:bodyPr xmlns:a="http://schemas.openxmlformats.org/drawingml/2006/main">
+            <a:noAutofit/>
+          </a:bodyPr>
+          <a:lstStyle xmlns:a="http://schemas.openxmlformats.org/drawingml/2006/main">
+            <a:defPPr>
+              <a:defRPr sz="2025" b="1">
+                <a:solidFill>
+                  <a:srgbClr val="FFFFFF"/>
+                </a:solidFill>
+                <a:latin typeface="Arial"/>
+                <a:ea typeface="Arial"/>
+                <a:cs typeface="Arial"/>
+              </a:defRPr>
+            </a:defPPr>
+            <a:lvl1pPr>
+              <a:defRPr sz="2025" b="1">
+                <a:solidFill>
+                  <a:srgbClr val="FFFFFF"/>
+                </a:solidFill>
+                <a:latin typeface="Arial"/>
+                <a:ea typeface="Arial"/>
+                <a:cs typeface="Arial"/>
+              </a:defRPr>
+            </a:lvl1pPr>
+            <a:lvl2pPr>
+              <a:defRPr sz="2025" b="1">
+                <a:solidFill>
+                  <a:srgbClr val="FFFFFF"/>
+                </a:solidFill>
+                <a:latin typeface="Arial"/>
+                <a:ea typeface="Arial"/>
+                <a:cs typeface="Arial"/>
+              </a:defRPr>
+            </a:lvl2pPr>
+            <a:lvl3pPr>
+              <a:defRPr sz="2025" b="1">
+                <a:solidFill>
+                  <a:srgbClr val="FFFFFF"/>
+                </a:solidFill>
+                <a:latin typeface="Arial"/>
+                <a:ea typeface="Arial"/>
+                <a:cs typeface="Arial"/>
+              </a:defRPr>
+            </a:lvl3pPr>
+            <a:lvl4pPr>
+              <a:defRPr sz="2025" b="1">
+                <a:solidFill>
+                  <a:srgbClr val="FFFFFF"/>
+                </a:solidFill>
+                <a:latin typeface="Arial"/>
+                <a:ea typeface="Arial"/>
+                <a:cs typeface="Arial"/>
+              </a:defRPr>
+            </a:lvl4pPr>
+            <a:lvl5pPr>
+              <a:defRPr sz="2025" b="1">
+                <a:solidFill>
+                  <a:srgbClr val="FFFFFF"/>
+                </a:solidFill>
+                <a:latin typeface="Arial"/>
+                <a:ea typeface="Arial"/>
+                <a:cs typeface="Arial"/>
+              </a:defRPr>
+            </a:lvl5pPr>
+            <a:lvl6pPr>
+              <a:defRPr sz="2025" b="1">
+                <a:solidFill>
+                  <a:srgbClr val="FFFFFF"/>
+                </a:solidFill>
+                <a:latin typeface="Arial"/>
+                <a:ea typeface="Arial"/>
+                <a:cs typeface="Arial"/>
+              </a:defRPr>
+            </a:lvl6pPr>
+            <a:lvl7pPr>
+              <a:defRPr sz="2025" b="1">
+                <a:solidFill>
+                  <a:srgbClr val="FFFFFF"/>
+                </a:solidFill>
+                <a:latin typeface="Arial"/>
+                <a:ea typeface="Arial"/>
+                <a:cs typeface="Arial"/>
+              </a:defRPr>
+            </a:lvl7pPr>
+            <a:lvl8pPr>
+              <a:defRPr sz="2025" b="1">
+                <a:solidFill>
+                  <a:srgbClr val="FFFFFF"/>
+                </a:solidFill>
+                <a:latin typeface="Arial"/>
+                <a:ea typeface="Arial"/>
+                <a:cs typeface="Arial"/>
+              </a:defRPr>
+            </a:lvl8pPr>
+            <a:lvl9pPr>
+              <a:defRPr sz="2025" b="1">
+                <a:solidFill>
+                  <a:srgbClr val="FFFFFF"/>
+                </a:solidFill>
+                <a:latin typeface="Arial"/>
+                <a:ea typeface="Arial"/>
+                <a:cs typeface="Arial"/>
+              </a:defRPr>
+            </a:lvl9pPr>
+          </a:lstStyle>
+          <a:p xmlns:a="http://schemas.openxmlformats.org/drawingml/2006/main">
+            <a:pPr>
+              <a:defRPr sz="2025" b="1">
+                <a:solidFill>
+                  <a:srgbClr val="FFFFFF"/>
+                </a:solidFill>
+                <a:latin typeface="Arial"/>
+                <a:ea typeface="Arial"/>
+                <a:cs typeface="Arial"/>
+              </a:defRPr>
+            </a:pPr>
+            <a:r>
+              <a:rPr sz="2025" b="1">
+                <a:solidFill>
+                  <a:srgbClr val="FFFFFF"/>
+                </a:solidFill>
+                <a:latin typeface="Arial"/>
+                <a:ea typeface="Arial"/>
+                <a:cs typeface="Arial"/>
+              </a:rPr>
+              <a:t>Rasti 6 · Një vend, dy udhëtarë</a:t>
+            </a:r>
+          </a:p>
+        </p:txBody>
+      </p:sp>
+      <p:sp>
+        <p:nvSpPr>
+          <p:cNvPr id="15" name="">
+            <a:extLst xmlns:a="http://schemas.openxmlformats.org/drawingml/2006/main">
+              <a:ext uri="{FF2B5EF4-FFF2-40B4-BE49-F238E27FC236}">
+                <a16:creationId xmlns:a16="http://schemas.microsoft.com/office/drawing/2014/main" id="{DD61BB27-E146-4CD2-8474-D889F4FB87CA}"/>
+              </a:ext>
+            </a:extLst>
+          </p:cNvPr>
+          <p:cNvSpPr>
+            <a:spLocks xmlns:a="http://schemas.openxmlformats.org/drawingml/2006/main" noGrp="1"/>
+          </p:cNvSpPr>
+          <p:nvPr/>
+        </p:nvSpPr>
+        <p:spPr>
+          <a:xfrm xmlns:a="http://schemas.openxmlformats.org/drawingml/2006/main">
+            <a:off x="6324600" y="4572000"/>
+            <a:ext cx="5238750" cy="552450"/>
+          </a:xfrm>
+          <a:prstGeom xmlns:a="http://schemas.openxmlformats.org/drawingml/2006/main" prst="rect">
+            <a:avLst/>
+          </a:prstGeom>
+          <a:noFill xmlns:a="http://schemas.openxmlformats.org/drawingml/2006/main"/>
+          <a:ln xmlns:a="http://schemas.openxmlformats.org/drawingml/2006/main" w="0">
+            <a:noFill/>
+          </a:ln>
+        </p:spPr>
+        <p:txBody>
+          <a:bodyPr xmlns:a="http://schemas.openxmlformats.org/drawingml/2006/main">
+            <a:noAutofit/>
+          </a:bodyPr>
+          <a:lstStyle xmlns:a="http://schemas.openxmlformats.org/drawingml/2006/main">
+            <a:defPPr>
+              <a:defRPr sz="1650" b="0">
+                <a:solidFill>
+                  <a:srgbClr val="FDBA74"/>
+                </a:solidFill>
+                <a:latin typeface="Arial"/>
+                <a:ea typeface="Arial"/>
+                <a:cs typeface="Arial"/>
+              </a:defRPr>
+            </a:defPPr>
+            <a:lvl1pPr>
+              <a:defRPr sz="1650" b="0">
+                <a:solidFill>
+                  <a:srgbClr val="FDBA74"/>
+                </a:solidFill>
+                <a:latin typeface="Arial"/>
+                <a:ea typeface="Arial"/>
+                <a:cs typeface="Arial"/>
+              </a:defRPr>
+            </a:lvl1pPr>
+            <a:lvl2pPr>
+              <a:defRPr sz="1650" b="0">
+                <a:solidFill>
+                  <a:srgbClr val="FDBA74"/>
+                </a:solidFill>
+                <a:latin typeface="Arial"/>
+                <a:ea typeface="Arial"/>
+                <a:cs typeface="Arial"/>
+              </a:defRPr>
+            </a:lvl2pPr>
+            <a:lvl3pPr>
+              <a:defRPr sz="1650" b="0">
+                <a:solidFill>
+                  <a:srgbClr val="FDBA74"/>
+                </a:solidFill>
+                <a:latin typeface="Arial"/>
+                <a:ea typeface="Arial"/>
+                <a:cs typeface="Arial"/>
+              </a:defRPr>
+            </a:lvl3pPr>
+            <a:lvl4pPr>
+              <a:defRPr sz="1650" b="0">
+                <a:solidFill>
+                  <a:srgbClr val="FDBA74"/>
+                </a:solidFill>
+                <a:latin typeface="Arial"/>
+                <a:ea typeface="Arial"/>
+                <a:cs typeface="Arial"/>
+              </a:defRPr>
+            </a:lvl4pPr>
+            <a:lvl5pPr>
+              <a:defRPr sz="1650" b="0">
+                <a:solidFill>
+                  <a:srgbClr val="FDBA74"/>
+                </a:solidFill>
+                <a:latin typeface="Arial"/>
+                <a:ea typeface="Arial"/>
+                <a:cs typeface="Arial"/>
+              </a:defRPr>
+            </a:lvl5pPr>
+            <a:lvl6pPr>
+              <a:defRPr sz="1650" b="0">
+                <a:solidFill>
+                  <a:srgbClr val="FDBA74"/>
+                </a:solidFill>
+                <a:latin typeface="Arial"/>
+                <a:ea typeface="Arial"/>
+                <a:cs typeface="Arial"/>
+              </a:defRPr>
+            </a:lvl6pPr>
+            <a:lvl7pPr>
+              <a:defRPr sz="1650" b="0">
+                <a:solidFill>
+                  <a:srgbClr val="FDBA74"/>
+                </a:solidFill>
+                <a:latin typeface="Arial"/>
+                <a:ea typeface="Arial"/>
+                <a:cs typeface="Arial"/>
+              </a:defRPr>
+            </a:lvl7pPr>
+            <a:lvl8pPr>
+              <a:defRPr sz="1650" b="0">
+                <a:solidFill>
+                  <a:srgbClr val="FDBA74"/>
+                </a:solidFill>
+                <a:latin typeface="Arial"/>
+                <a:ea typeface="Arial"/>
+                <a:cs typeface="Arial"/>
+              </a:defRPr>
+            </a:lvl8pPr>
+            <a:lvl9pPr>
+              <a:defRPr sz="1650" b="0">
+                <a:solidFill>
+                  <a:srgbClr val="FDBA74"/>
+                </a:solidFill>
+                <a:latin typeface="Arial"/>
+                <a:ea typeface="Arial"/>
+                <a:cs typeface="Arial"/>
+              </a:defRPr>
+            </a:lvl9pPr>
+          </a:lstStyle>
+          <a:p xmlns:a="http://schemas.openxmlformats.org/drawingml/2006/main">
+            <a:pPr>
+              <a:defRPr sz="1650" b="0">
+                <a:solidFill>
+                  <a:srgbClr val="FDBA74"/>
+                </a:solidFill>
+                <a:latin typeface="Arial"/>
+                <a:ea typeface="Arial"/>
+                <a:cs typeface="Arial"/>
+              </a:defRPr>
+            </a:pPr>
+            <a:r>
+              <a:rPr sz="1650" b="0">
+                <a:solidFill>
+                  <a:srgbClr val="FDBA74"/>
+                </a:solidFill>
+                <a:latin typeface="Arial"/>
+                <a:ea typeface="Arial"/>
+                <a:cs typeface="Arial"/>
+              </a:rPr>
+              <a:t>Vetëm diskutim për një version të ardhshëm.</a:t>
+            </a:r>
+          </a:p>
+        </p:txBody>
+      </p:sp>
+      <p:sp>
+        <p:nvSpPr>
+          <p:cNvPr id="16" name="">
+            <a:extLst xmlns:a="http://schemas.openxmlformats.org/drawingml/2006/main">
+              <a:ext uri="{FF2B5EF4-FFF2-40B4-BE49-F238E27FC236}">
+                <a16:creationId xmlns:a16="http://schemas.microsoft.com/office/drawing/2014/main" id="{A6EEB113-73B4-4DEC-9E2B-7DEC11D1CD59}"/>
+              </a:ext>
+            </a:extLst>
+          </p:cNvPr>
+          <p:cNvSpPr>
+            <a:spLocks xmlns:a="http://schemas.openxmlformats.org/drawingml/2006/main" noGrp="1"/>
+          </p:cNvSpPr>
+          <p:nvPr/>
+        </p:nvSpPr>
+        <p:spPr>
+          <a:xfrm xmlns:a="http://schemas.openxmlformats.org/drawingml/2006/main">
+            <a:off x="609600" y="5438775"/>
+            <a:ext cx="10953750" cy="1190625"/>
+          </a:xfrm>
+          <a:prstGeom xmlns:a="http://schemas.openxmlformats.org/drawingml/2006/main" prst="rect">
+            <a:avLst/>
+          </a:prstGeom>
+          <a:noFill xmlns:a="http://schemas.openxmlformats.org/drawingml/2006/main"/>
+          <a:ln xmlns:a="http://schemas.openxmlformats.org/drawingml/2006/main" w="0">
+            <a:noFill/>
+          </a:ln>
+        </p:spPr>
+        <p:txBody>
+          <a:bodyPr xmlns:a="http://schemas.openxmlformats.org/drawingml/2006/main">
+            <a:noAutofit/>
+          </a:bodyPr>
+          <a:lstStyle xmlns:a="http://schemas.openxmlformats.org/drawingml/2006/main">
+            <a:defPPr>
+              <a:defRPr sz="1875" b="0">
                 <a:solidFill>
                   <a:srgbClr val="EDF2FF"/>
                 </a:solidFill>
                 <a:latin typeface="Arial"/>
                 <a:ea typeface="Arial"/>
                 <a:cs typeface="Arial"/>
+              </a:defRPr>
+            </a:defPPr>
+            <a:lvl1pPr>
+              <a:defRPr sz="1875" b="0">
+                <a:solidFill>
+                  <a:srgbClr val="EDF2FF"/>
+                </a:solidFill>
+                <a:latin typeface="Arial"/>
+                <a:ea typeface="Arial"/>
+                <a:cs typeface="Arial"/>
+              </a:defRPr>
+            </a:lvl1pPr>
+            <a:lvl2pPr>
+              <a:defRPr sz="1875" b="0">
+                <a:solidFill>
+                  <a:srgbClr val="EDF2FF"/>
+                </a:solidFill>
+                <a:latin typeface="Arial"/>
+                <a:ea typeface="Arial"/>
+                <a:cs typeface="Arial"/>
+              </a:defRPr>
+            </a:lvl2pPr>
+            <a:lvl3pPr>
+              <a:defRPr sz="1875" b="0">
+                <a:solidFill>
+                  <a:srgbClr val="EDF2FF"/>
+                </a:solidFill>
+                <a:latin typeface="Arial"/>
+                <a:ea typeface="Arial"/>
+                <a:cs typeface="Arial"/>
+              </a:defRPr>
+            </a:lvl3pPr>
+            <a:lvl4pPr>
+              <a:defRPr sz="1875" b="0">
+                <a:solidFill>
+                  <a:srgbClr val="EDF2FF"/>
+                </a:solidFill>
+                <a:latin typeface="Arial"/>
+                <a:ea typeface="Arial"/>
+                <a:cs typeface="Arial"/>
+              </a:defRPr>
+            </a:lvl4pPr>
+            <a:lvl5pPr>
+              <a:defRPr sz="1875" b="0">
+                <a:solidFill>
+                  <a:srgbClr val="EDF2FF"/>
+                </a:solidFill>
+                <a:latin typeface="Arial"/>
+                <a:ea typeface="Arial"/>
+                <a:cs typeface="Arial"/>
+              </a:defRPr>
+            </a:lvl5pPr>
+            <a:lvl6pPr>
+              <a:defRPr sz="1875" b="0">
+                <a:solidFill>
+                  <a:srgbClr val="EDF2FF"/>
+                </a:solidFill>
+                <a:latin typeface="Arial"/>
+                <a:ea typeface="Arial"/>
+                <a:cs typeface="Arial"/>
+              </a:defRPr>
+            </a:lvl6pPr>
+            <a:lvl7pPr>
+              <a:defRPr sz="1875" b="0">
+                <a:solidFill>
+                  <a:srgbClr val="EDF2FF"/>
+                </a:solidFill>
+                <a:latin typeface="Arial"/>
+                <a:ea typeface="Arial"/>
+                <a:cs typeface="Arial"/>
+              </a:defRPr>
+            </a:lvl7pPr>
+            <a:lvl8pPr>
+              <a:defRPr sz="1875" b="0">
+                <a:solidFill>
+                  <a:srgbClr val="EDF2FF"/>
+                </a:solidFill>
+                <a:latin typeface="Arial"/>
+                <a:ea typeface="Arial"/>
+                <a:cs typeface="Arial"/>
+              </a:defRPr>
+            </a:lvl8pPr>
+            <a:lvl9pPr>
+              <a:defRPr sz="1875" b="0">
+                <a:solidFill>
+                  <a:srgbClr val="EDF2FF"/>
+                </a:solidFill>
+                <a:latin typeface="Arial"/>
+                <a:ea typeface="Arial"/>
+                <a:cs typeface="Arial"/>
+              </a:defRPr>
+            </a:lvl9pPr>
+          </a:lstStyle>
+          <a:p xmlns:a="http://schemas.openxmlformats.org/drawingml/2006/main">
+            <a:pPr>
+              <a:defRPr sz="1875" b="0">
+                <a:solidFill>
+                  <a:srgbClr val="EDF2FF"/>
+                </a:solidFill>
+                <a:latin typeface="Arial"/>
+                <a:ea typeface="Arial"/>
+                <a:cs typeface="Arial"/>
+              </a:defRPr>
+            </a:pPr>
+            <a:r>
+              <a:rPr sz="1875" b="0">
+                <a:solidFill>
+                  <a:srgbClr val="EDF2FF"/>
+                </a:solidFill>
+                <a:latin typeface="Arial"/>
+                <a:ea typeface="Arial"/>
+                <a:cs typeface="Arial"/>
               </a:rPr>
-              <a:t>Javët 3–4: lista → detajet → të dhënat në Neon. Javët 5–6: kush lejohet të veprojë dhe çfarë shohim pa internet.</a:t>
+              <a:t>Rastet 1–5 lidhin ekranet, të dhënat dhe lejet. Parashikojmë rezultatin, pastaj shpjegojmë arsyen.</a:t>
             </a:r>
           </a:p>
           <a:p xmlns:a="http://schemas.openxmlformats.org/drawingml/2006/main">
@@ -25355,7 +26219,7 @@
           </a:p>
           <a:p xmlns:a="http://schemas.openxmlformats.org/drawingml/2006/main">
             <a:pPr>
-              <a:defRPr sz="1950" b="0">
+              <a:defRPr sz="1875" b="0">
                 <a:solidFill>
                   <a:srgbClr val="EDF2FF"/>
                 </a:solidFill>
@@ -25365,7 +26229,7 @@
               </a:defRPr>
             </a:pPr>
             <a:r>
-              <a:rPr sz="1950" b="0">
+              <a:rPr sz="1875" b="0">
                 <a:solidFill>
                   <a:srgbClr val="EDF2FF"/>
                 </a:solidFill>
@@ -25373,7 +26237,7 @@
                 <a:ea typeface="Arial"/>
                 <a:cs typeface="Arial"/>
               </a:rPr>
-              <a:t>Një MVP nuk ka nevojë t’i ketë të gjitha funksionet. Rrjedha që ofron duhet të jetë e kuptueshme dhe kufijtë të jenë të qartë.</a:t>
+              <a:t>Rasti 6 është vetëm diskutim. Në ushtrime zgjedh një rast të zbatueshëm; nuk ndërton gjashtë funksione.</a:t>
             </a:r>
           </a:p>
         </p:txBody>
@@ -25381,7 +26245,7 @@
     </p:spTree>
     <p:extLst>
       <p:ext uri="{BB962C8B-B14F-4D97-AF65-F5344CB8AC3E}">
-        <p14:creationId xmlns:p14="http://schemas.microsoft.com/office/powerpoint/2010/main" val="1952500290"/>
+        <p14:creationId xmlns:p14="http://schemas.microsoft.com/office/powerpoint/2010/main" val="420608733"/>
       </p:ext>
     </p:extLst>
   </p:cSld>
@@ -25412,7 +26276,7 @@
           <p:cNvPr id="14" name="">
             <a:extLst xmlns:a="http://schemas.openxmlformats.org/drawingml/2006/main">
               <a:ext uri="{FF2B5EF4-FFF2-40B4-BE49-F238E27FC236}">
-                <a16:creationId xmlns:a16="http://schemas.microsoft.com/office/drawing/2014/main" id="{399CDB2A-7245-4A4B-AC62-1BE5BF06DDA3}"/>
+                <a16:creationId xmlns:a16="http://schemas.microsoft.com/office/drawing/2014/main" id="{F03AA3E4-0AAD-4F7E-A47E-E6F8688D312B}"/>
               </a:ext>
             </a:extLst>
           </p:cNvPr>
@@ -25570,7 +26434,7 @@
           <p:cNvPr id="2" name="">
             <a:extLst xmlns:a="http://schemas.openxmlformats.org/drawingml/2006/main">
               <a:ext uri="{FF2B5EF4-FFF2-40B4-BE49-F238E27FC236}">
-                <a16:creationId xmlns:a16="http://schemas.microsoft.com/office/drawing/2014/main" id="{92AF5906-949A-4259-865F-547FCCCF7CC2}"/>
+                <a16:creationId xmlns:a16="http://schemas.microsoft.com/office/drawing/2014/main" id="{6D3B8E10-04A7-4670-8B40-82655D5BBCBC}"/>
               </a:ext>
             </a:extLst>
           </p:cNvPr>
@@ -25728,7 +26592,7 @@
           <p:cNvPr id="3" name="">
             <a:extLst xmlns:a="http://schemas.openxmlformats.org/drawingml/2006/main">
               <a:ext uri="{FF2B5EF4-FFF2-40B4-BE49-F238E27FC236}">
-                <a16:creationId xmlns:a16="http://schemas.microsoft.com/office/drawing/2014/main" id="{BE2A0B4E-17E7-4A1E-92DF-11134768D1E0}"/>
+                <a16:creationId xmlns:a16="http://schemas.microsoft.com/office/drawing/2014/main" id="{71377E2D-E742-4BF8-AC0B-5CE56FA26C72}"/>
               </a:ext>
             </a:extLst>
           </p:cNvPr>
@@ -25876,7 +26740,7 @@
                 <a:ea typeface="Arial"/>
                 <a:cs typeface="Arial"/>
               </a:rPr>
-              <a:t>Butoni i fshehur dhe leja në server</a:t>
+              <a:t>Rasti 5 · Lejet e ndryshimit</a:t>
             </a:r>
           </a:p>
         </p:txBody>
@@ -25886,7 +26750,7 @@
           <p:cNvPr id="4" name="">
             <a:extLst xmlns:a="http://schemas.openxmlformats.org/drawingml/2006/main">
               <a:ext uri="{FF2B5EF4-FFF2-40B4-BE49-F238E27FC236}">
-                <a16:creationId xmlns:a16="http://schemas.microsoft.com/office/drawing/2014/main" id="{A6B8593A-B241-4B4D-8C97-71813472300A}"/>
+                <a16:creationId xmlns:a16="http://schemas.microsoft.com/office/drawing/2014/main" id="{02DB0342-FBB0-4606-B2FB-41D5CFE15C56}"/>
               </a:ext>
             </a:extLst>
           </p:cNvPr>
@@ -25896,7 +26760,7 @@
           <p:nvPr/>
         </p:nvPicPr>
         <p:blipFill>
-          <a:blip xmlns:r="http://schemas.openxmlformats.org/officeDocument/2006/relationships" xmlns:a="http://schemas.openxmlformats.org/drawingml/2006/main" r:embed="R05b4435a75a849f2"/>
+          <a:blip xmlns:r="http://schemas.openxmlformats.org/officeDocument/2006/relationships" xmlns:a="http://schemas.openxmlformats.org/drawingml/2006/main" r:embed="Rfc0f95363b9540d8"/>
           <a:stretch xmlns:a="http://schemas.openxmlformats.org/drawingml/2006/main"/>
         </p:blipFill>
         <p:spPr>
@@ -25914,7 +26778,7 @@
           <p:cNvPr id="5" name="">
             <a:extLst xmlns:a="http://schemas.openxmlformats.org/drawingml/2006/main">
               <a:ext uri="{FF2B5EF4-FFF2-40B4-BE49-F238E27FC236}">
-                <a16:creationId xmlns:a16="http://schemas.microsoft.com/office/drawing/2014/main" id="{EC36ECA5-53A7-4C46-8FBA-C81F0D611312}"/>
+                <a16:creationId xmlns:a16="http://schemas.microsoft.com/office/drawing/2014/main" id="{2D92791B-C279-42C7-8667-BA2FD850DA3A}"/>
               </a:ext>
             </a:extLst>
           </p:cNvPr>
@@ -26072,7 +26936,7 @@
           <p:cNvPr id="6" name="">
             <a:extLst xmlns:a="http://schemas.openxmlformats.org/drawingml/2006/main">
               <a:ext uri="{FF2B5EF4-FFF2-40B4-BE49-F238E27FC236}">
-                <a16:creationId xmlns:a16="http://schemas.microsoft.com/office/drawing/2014/main" id="{EFC0AB67-E7D7-4DC1-A2E0-204BEFDDFB53}"/>
+                <a16:creationId xmlns:a16="http://schemas.microsoft.com/office/drawing/2014/main" id="{F86C9CA3-2CCE-461E-8858-C65CCF4842D2}"/>
               </a:ext>
             </a:extLst>
           </p:cNvPr>
@@ -26230,7 +27094,7 @@
           <p:cNvPr id="7" name="">
             <a:extLst xmlns:a="http://schemas.openxmlformats.org/drawingml/2006/main">
               <a:ext uri="{FF2B5EF4-FFF2-40B4-BE49-F238E27FC236}">
-                <a16:creationId xmlns:a16="http://schemas.microsoft.com/office/drawing/2014/main" id="{4AA9EE42-6092-401B-BD7A-456842CEDEBB}"/>
+                <a16:creationId xmlns:a16="http://schemas.microsoft.com/office/drawing/2014/main" id="{E3D23BFC-D536-4024-AAE7-F6513A09D759}"/>
               </a:ext>
             </a:extLst>
           </p:cNvPr>
@@ -26388,7 +27252,7 @@
           <p:cNvPr id="8" name="">
             <a:extLst xmlns:a="http://schemas.openxmlformats.org/drawingml/2006/main">
               <a:ext uri="{FF2B5EF4-FFF2-40B4-BE49-F238E27FC236}">
-                <a16:creationId xmlns:a16="http://schemas.microsoft.com/office/drawing/2014/main" id="{F39B7D48-F516-4A46-94D2-A8DCEF501296}"/>
+                <a16:creationId xmlns:a16="http://schemas.microsoft.com/office/drawing/2014/main" id="{9EC22292-3941-44BA-B0AC-66AC2087193A}"/>
               </a:ext>
             </a:extLst>
           </p:cNvPr>
@@ -26546,7 +27410,7 @@
           <p:cNvPr id="9" name="">
             <a:extLst xmlns:a="http://schemas.openxmlformats.org/drawingml/2006/main">
               <a:ext uri="{FF2B5EF4-FFF2-40B4-BE49-F238E27FC236}">
-                <a16:creationId xmlns:a16="http://schemas.microsoft.com/office/drawing/2014/main" id="{25C06A7A-3FE5-45BF-A379-78444F6A2630}"/>
+                <a16:creationId xmlns:a16="http://schemas.microsoft.com/office/drawing/2014/main" id="{73A8A6CB-4747-4DDA-B5EC-E58A3D6A78AD}"/>
               </a:ext>
             </a:extLst>
           </p:cNvPr>
@@ -26704,7 +27568,7 @@
           <p:cNvPr id="10" name="">
             <a:extLst xmlns:a="http://schemas.openxmlformats.org/drawingml/2006/main">
               <a:ext uri="{FF2B5EF4-FFF2-40B4-BE49-F238E27FC236}">
-                <a16:creationId xmlns:a16="http://schemas.microsoft.com/office/drawing/2014/main" id="{30839AA7-843F-462D-B424-E36AB706A164}"/>
+                <a16:creationId xmlns:a16="http://schemas.microsoft.com/office/drawing/2014/main" id="{E73DA58A-4701-4C56-AF7D-4704FDCE25C0}"/>
               </a:ext>
             </a:extLst>
           </p:cNvPr>
@@ -26862,7 +27726,7 @@
           <p:cNvPr id="11" name="">
             <a:extLst xmlns:a="http://schemas.openxmlformats.org/drawingml/2006/main">
               <a:ext uri="{FF2B5EF4-FFF2-40B4-BE49-F238E27FC236}">
-                <a16:creationId xmlns:a16="http://schemas.microsoft.com/office/drawing/2014/main" id="{67BB0B1D-B9B9-4A1B-8829-999C52B1D26F}"/>
+                <a16:creationId xmlns:a16="http://schemas.microsoft.com/office/drawing/2014/main" id="{7921FCE7-1148-44EA-9C04-E9DAFB0731ED}"/>
               </a:ext>
             </a:extLst>
           </p:cNvPr>
@@ -27020,7 +27884,7 @@
           <p:cNvPr id="12" name="">
             <a:extLst xmlns:a="http://schemas.openxmlformats.org/drawingml/2006/main">
               <a:ext uri="{FF2B5EF4-FFF2-40B4-BE49-F238E27FC236}">
-                <a16:creationId xmlns:a16="http://schemas.microsoft.com/office/drawing/2014/main" id="{42339A45-E9A2-4776-AA53-663A2878AA67}"/>
+                <a16:creationId xmlns:a16="http://schemas.microsoft.com/office/drawing/2014/main" id="{DFE49547-FC87-448F-ACD8-3729E660C23D}"/>
               </a:ext>
             </a:extLst>
           </p:cNvPr>
@@ -27178,7 +28042,7 @@
           <p:cNvPr id="13" name="">
             <a:extLst xmlns:a="http://schemas.openxmlformats.org/drawingml/2006/main">
               <a:ext uri="{FF2B5EF4-FFF2-40B4-BE49-F238E27FC236}">
-                <a16:creationId xmlns:a16="http://schemas.microsoft.com/office/drawing/2014/main" id="{F82B46A6-30B7-4089-BE5F-D515699770FB}"/>
+                <a16:creationId xmlns:a16="http://schemas.microsoft.com/office/drawing/2014/main" id="{9C6EAEDA-A431-42D0-A237-3CCED5A61797}"/>
               </a:ext>
             </a:extLst>
           </p:cNvPr>
@@ -27334,7 +28198,7 @@
     </p:spTree>
     <p:extLst>
       <p:ext uri="{BB962C8B-B14F-4D97-AF65-F5344CB8AC3E}">
-        <p14:creationId xmlns:p14="http://schemas.microsoft.com/office/powerpoint/2010/main" val="2111467623"/>
+        <p14:creationId xmlns:p14="http://schemas.microsoft.com/office/powerpoint/2010/main" val="1064974258"/>
       </p:ext>
     </p:extLst>
   </p:cSld>
@@ -27365,7 +28229,7 @@
           <p:cNvPr id="14" name="">
             <a:extLst xmlns:a="http://schemas.openxmlformats.org/drawingml/2006/main">
               <a:ext uri="{FF2B5EF4-FFF2-40B4-BE49-F238E27FC236}">
-                <a16:creationId xmlns:a16="http://schemas.microsoft.com/office/drawing/2014/main" id="{37BA49C9-E490-4B6B-A015-55A0489F0BFA}"/>
+                <a16:creationId xmlns:a16="http://schemas.microsoft.com/office/drawing/2014/main" id="{82E86B9D-0E53-4F5C-9CE7-F4FB1385A3EE}"/>
               </a:ext>
             </a:extLst>
           </p:cNvPr>
@@ -27523,7 +28387,7 @@
           <p:cNvPr id="2" name="">
             <a:extLst xmlns:a="http://schemas.openxmlformats.org/drawingml/2006/main">
               <a:ext uri="{FF2B5EF4-FFF2-40B4-BE49-F238E27FC236}">
-                <a16:creationId xmlns:a16="http://schemas.microsoft.com/office/drawing/2014/main" id="{A5429993-5B3E-4BC0-9BF5-30199C0AED60}"/>
+                <a16:creationId xmlns:a16="http://schemas.microsoft.com/office/drawing/2014/main" id="{825AAF40-EE38-4FD2-914E-BC2D609B893C}"/>
               </a:ext>
             </a:extLst>
           </p:cNvPr>
@@ -27681,7 +28545,7 @@
           <p:cNvPr id="3" name="">
             <a:extLst xmlns:a="http://schemas.openxmlformats.org/drawingml/2006/main">
               <a:ext uri="{FF2B5EF4-FFF2-40B4-BE49-F238E27FC236}">
-                <a16:creationId xmlns:a16="http://schemas.microsoft.com/office/drawing/2014/main" id="{3BD31D59-A16C-4E9B-AF82-1C4C28097542}"/>
+                <a16:creationId xmlns:a16="http://schemas.microsoft.com/office/drawing/2014/main" id="{8C73007C-155E-490B-ABEC-606644DCB118}"/>
               </a:ext>
             </a:extLst>
           </p:cNvPr>
@@ -27829,7 +28693,7 @@
                 <a:ea typeface="Arial"/>
                 <a:cs typeface="Arial"/>
               </a:rPr>
-              <a:t>Butoni i fshehur dhe leja në server</a:t>
+              <a:t>Rasti 5 · Lejet e ndryshimit</a:t>
             </a:r>
           </a:p>
         </p:txBody>
@@ -27839,7 +28703,7 @@
           <p:cNvPr id="4" name="">
             <a:extLst xmlns:a="http://schemas.openxmlformats.org/drawingml/2006/main">
               <a:ext uri="{FF2B5EF4-FFF2-40B4-BE49-F238E27FC236}">
-                <a16:creationId xmlns:a16="http://schemas.microsoft.com/office/drawing/2014/main" id="{8A6AE9C1-4A03-4F48-B8EA-EB932A8AD8C0}"/>
+                <a16:creationId xmlns:a16="http://schemas.microsoft.com/office/drawing/2014/main" id="{48584A66-3F27-4932-84A7-7A9F43BFBDF4}"/>
               </a:ext>
             </a:extLst>
           </p:cNvPr>
@@ -27849,7 +28713,7 @@
           <p:nvPr/>
         </p:nvPicPr>
         <p:blipFill>
-          <a:blip xmlns:r="http://schemas.openxmlformats.org/officeDocument/2006/relationships" xmlns:a="http://schemas.openxmlformats.org/drawingml/2006/main" r:embed="Re71a62fcb2eb4dcd"/>
+          <a:blip xmlns:r="http://schemas.openxmlformats.org/officeDocument/2006/relationships" xmlns:a="http://schemas.openxmlformats.org/drawingml/2006/main" r:embed="Re538d17e8f2b446b"/>
           <a:stretch xmlns:a="http://schemas.openxmlformats.org/drawingml/2006/main"/>
         </p:blipFill>
         <p:spPr>
@@ -27867,7 +28731,7 @@
           <p:cNvPr id="5" name="">
             <a:extLst xmlns:a="http://schemas.openxmlformats.org/drawingml/2006/main">
               <a:ext uri="{FF2B5EF4-FFF2-40B4-BE49-F238E27FC236}">
-                <a16:creationId xmlns:a16="http://schemas.microsoft.com/office/drawing/2014/main" id="{24FCAD32-BED7-4603-A0B1-0579D939ED9E}"/>
+                <a16:creationId xmlns:a16="http://schemas.microsoft.com/office/drawing/2014/main" id="{B476DE4B-DDA8-403A-BA5E-6FE22B36C15C}"/>
               </a:ext>
             </a:extLst>
           </p:cNvPr>
@@ -28025,7 +28889,7 @@
           <p:cNvPr id="6" name="">
             <a:extLst xmlns:a="http://schemas.openxmlformats.org/drawingml/2006/main">
               <a:ext uri="{FF2B5EF4-FFF2-40B4-BE49-F238E27FC236}">
-                <a16:creationId xmlns:a16="http://schemas.microsoft.com/office/drawing/2014/main" id="{FE9FA76A-8641-4F8B-8B54-ADAA919FC9A3}"/>
+                <a16:creationId xmlns:a16="http://schemas.microsoft.com/office/drawing/2014/main" id="{035FC53F-60BD-46B9-9359-3464C29A8BAA}"/>
               </a:ext>
             </a:extLst>
           </p:cNvPr>
@@ -28183,7 +29047,7 @@
           <p:cNvPr id="7" name="">
             <a:extLst xmlns:a="http://schemas.openxmlformats.org/drawingml/2006/main">
               <a:ext uri="{FF2B5EF4-FFF2-40B4-BE49-F238E27FC236}">
-                <a16:creationId xmlns:a16="http://schemas.microsoft.com/office/drawing/2014/main" id="{912CC3F6-5364-4422-AFA9-084A47540513}"/>
+                <a16:creationId xmlns:a16="http://schemas.microsoft.com/office/drawing/2014/main" id="{01FE17D9-DDA8-4E66-A105-1F80401CC7E4}"/>
               </a:ext>
             </a:extLst>
           </p:cNvPr>
@@ -28341,7 +29205,7 @@
           <p:cNvPr id="8" name="">
             <a:extLst xmlns:a="http://schemas.openxmlformats.org/drawingml/2006/main">
               <a:ext uri="{FF2B5EF4-FFF2-40B4-BE49-F238E27FC236}">
-                <a16:creationId xmlns:a16="http://schemas.microsoft.com/office/drawing/2014/main" id="{C55F7210-0DDA-479D-BF40-7D236F900A22}"/>
+                <a16:creationId xmlns:a16="http://schemas.microsoft.com/office/drawing/2014/main" id="{8BC8A429-7B0B-47B7-88DD-AB6E32419F4C}"/>
               </a:ext>
             </a:extLst>
           </p:cNvPr>
@@ -28499,7 +29363,7 @@
           <p:cNvPr id="9" name="">
             <a:extLst xmlns:a="http://schemas.openxmlformats.org/drawingml/2006/main">
               <a:ext uri="{FF2B5EF4-FFF2-40B4-BE49-F238E27FC236}">
-                <a16:creationId xmlns:a16="http://schemas.microsoft.com/office/drawing/2014/main" id="{EE19E495-0542-4989-9450-BD817405A6BA}"/>
+                <a16:creationId xmlns:a16="http://schemas.microsoft.com/office/drawing/2014/main" id="{602C0601-EC5A-45F1-94C9-066022A89F35}"/>
               </a:ext>
             </a:extLst>
           </p:cNvPr>
@@ -28657,7 +29521,7 @@
           <p:cNvPr id="10" name="">
             <a:extLst xmlns:a="http://schemas.openxmlformats.org/drawingml/2006/main">
               <a:ext uri="{FF2B5EF4-FFF2-40B4-BE49-F238E27FC236}">
-                <a16:creationId xmlns:a16="http://schemas.microsoft.com/office/drawing/2014/main" id="{775E9F71-A980-4186-B040-C6D664B68758}"/>
+                <a16:creationId xmlns:a16="http://schemas.microsoft.com/office/drawing/2014/main" id="{D23B21A4-44A3-4E29-AFC3-4F06DBD9A82B}"/>
               </a:ext>
             </a:extLst>
           </p:cNvPr>
@@ -28815,7 +29679,7 @@
           <p:cNvPr id="11" name="">
             <a:extLst xmlns:a="http://schemas.openxmlformats.org/drawingml/2006/main">
               <a:ext uri="{FF2B5EF4-FFF2-40B4-BE49-F238E27FC236}">
-                <a16:creationId xmlns:a16="http://schemas.microsoft.com/office/drawing/2014/main" id="{289B7C93-745E-4619-87FA-3E067B478115}"/>
+                <a16:creationId xmlns:a16="http://schemas.microsoft.com/office/drawing/2014/main" id="{DE0D637B-3B34-452F-8E18-F3BB68B1042B}"/>
               </a:ext>
             </a:extLst>
           </p:cNvPr>
@@ -28973,7 +29837,7 @@
           <p:cNvPr id="12" name="">
             <a:extLst xmlns:a="http://schemas.openxmlformats.org/drawingml/2006/main">
               <a:ext uri="{FF2B5EF4-FFF2-40B4-BE49-F238E27FC236}">
-                <a16:creationId xmlns:a16="http://schemas.microsoft.com/office/drawing/2014/main" id="{0BC2A6BA-D581-437D-A3FD-63B7A5A788CE}"/>
+                <a16:creationId xmlns:a16="http://schemas.microsoft.com/office/drawing/2014/main" id="{A7455B75-C17D-4F4E-9F47-9685A25B2F97}"/>
               </a:ext>
             </a:extLst>
           </p:cNvPr>
@@ -29131,7 +29995,7 @@
           <p:cNvPr id="13" name="">
             <a:extLst xmlns:a="http://schemas.openxmlformats.org/drawingml/2006/main">
               <a:ext uri="{FF2B5EF4-FFF2-40B4-BE49-F238E27FC236}">
-                <a16:creationId xmlns:a16="http://schemas.microsoft.com/office/drawing/2014/main" id="{FD8CED5A-65C7-4DBE-A57B-37B830C86838}"/>
+                <a16:creationId xmlns:a16="http://schemas.microsoft.com/office/drawing/2014/main" id="{0E7BF6F0-799B-4DC7-83FC-9C0B5221AEA0}"/>
               </a:ext>
             </a:extLst>
           </p:cNvPr>
@@ -29287,7 +30151,7 @@
     </p:spTree>
     <p:extLst>
       <p:ext uri="{BB962C8B-B14F-4D97-AF65-F5344CB8AC3E}">
-        <p14:creationId xmlns:p14="http://schemas.microsoft.com/office/powerpoint/2010/main" val="1562163347"/>
+        <p14:creationId xmlns:p14="http://schemas.microsoft.com/office/powerpoint/2010/main" val="2055869807"/>
       </p:ext>
     </p:extLst>
   </p:cSld>
@@ -29318,7 +30182,7 @@
           <p:cNvPr id="14" name="">
             <a:extLst xmlns:a="http://schemas.openxmlformats.org/drawingml/2006/main">
               <a:ext uri="{FF2B5EF4-FFF2-40B4-BE49-F238E27FC236}">
-                <a16:creationId xmlns:a16="http://schemas.microsoft.com/office/drawing/2014/main" id="{395150D7-2D33-4575-AD42-98A800FBF948}"/>
+                <a16:creationId xmlns:a16="http://schemas.microsoft.com/office/drawing/2014/main" id="{1E4E3CF9-C49B-4C3D-B8CE-ADAF745B283B}"/>
               </a:ext>
             </a:extLst>
           </p:cNvPr>
@@ -29476,7 +30340,7 @@
           <p:cNvPr id="2" name="">
             <a:extLst xmlns:a="http://schemas.openxmlformats.org/drawingml/2006/main">
               <a:ext uri="{FF2B5EF4-FFF2-40B4-BE49-F238E27FC236}">
-                <a16:creationId xmlns:a16="http://schemas.microsoft.com/office/drawing/2014/main" id="{DED3CF4A-2134-4EA1-B059-244B23781897}"/>
+                <a16:creationId xmlns:a16="http://schemas.microsoft.com/office/drawing/2014/main" id="{BBA0ABB9-78F5-4ABC-9E5E-C675F70B9036}"/>
               </a:ext>
             </a:extLst>
           </p:cNvPr>
@@ -29634,7 +30498,7 @@
           <p:cNvPr id="3" name="">
             <a:extLst xmlns:a="http://schemas.openxmlformats.org/drawingml/2006/main">
               <a:ext uri="{FF2B5EF4-FFF2-40B4-BE49-F238E27FC236}">
-                <a16:creationId xmlns:a16="http://schemas.microsoft.com/office/drawing/2014/main" id="{1DDBE9B1-DC48-4076-AC03-A1915599EC7E}"/>
+                <a16:creationId xmlns:a16="http://schemas.microsoft.com/office/drawing/2014/main" id="{A2331C34-8809-434D-BFCC-CA16458CB8AB}"/>
               </a:ext>
             </a:extLst>
           </p:cNvPr>
@@ -29782,7 +30646,7 @@
                 <a:ea typeface="Arial"/>
                 <a:cs typeface="Arial"/>
               </a:rPr>
-              <a:t>Butoni i fshehur dhe leja në server</a:t>
+              <a:t>Rasti 5 · Lejet e ndryshimit</a:t>
             </a:r>
           </a:p>
         </p:txBody>
@@ -29792,7 +30656,7 @@
           <p:cNvPr id="4" name="">
             <a:extLst xmlns:a="http://schemas.openxmlformats.org/drawingml/2006/main">
               <a:ext uri="{FF2B5EF4-FFF2-40B4-BE49-F238E27FC236}">
-                <a16:creationId xmlns:a16="http://schemas.microsoft.com/office/drawing/2014/main" id="{83B65324-6B31-4E65-9370-7FCF2AE6B9ED}"/>
+                <a16:creationId xmlns:a16="http://schemas.microsoft.com/office/drawing/2014/main" id="{86F1A3DF-408A-4D96-8EF2-52E69631818E}"/>
               </a:ext>
             </a:extLst>
           </p:cNvPr>
@@ -29802,7 +30666,7 @@
           <p:nvPr/>
         </p:nvPicPr>
         <p:blipFill>
-          <a:blip xmlns:r="http://schemas.openxmlformats.org/officeDocument/2006/relationships" xmlns:a="http://schemas.openxmlformats.org/drawingml/2006/main" r:embed="Rba55f88d806448a0"/>
+          <a:blip xmlns:r="http://schemas.openxmlformats.org/officeDocument/2006/relationships" xmlns:a="http://schemas.openxmlformats.org/drawingml/2006/main" r:embed="R6ac38374de8546c3"/>
           <a:stretch xmlns:a="http://schemas.openxmlformats.org/drawingml/2006/main"/>
         </p:blipFill>
         <p:spPr>
@@ -29820,7 +30684,7 @@
           <p:cNvPr id="5" name="">
             <a:extLst xmlns:a="http://schemas.openxmlformats.org/drawingml/2006/main">
               <a:ext uri="{FF2B5EF4-FFF2-40B4-BE49-F238E27FC236}">
-                <a16:creationId xmlns:a16="http://schemas.microsoft.com/office/drawing/2014/main" id="{B4449A05-05A2-4AE1-90C4-D40E7943BAC3}"/>
+                <a16:creationId xmlns:a16="http://schemas.microsoft.com/office/drawing/2014/main" id="{A9DBCAD4-25F3-4BE3-B094-FCF873A30BA7}"/>
               </a:ext>
             </a:extLst>
           </p:cNvPr>
@@ -29978,7 +30842,7 @@
           <p:cNvPr id="6" name="">
             <a:extLst xmlns:a="http://schemas.openxmlformats.org/drawingml/2006/main">
               <a:ext uri="{FF2B5EF4-FFF2-40B4-BE49-F238E27FC236}">
-                <a16:creationId xmlns:a16="http://schemas.microsoft.com/office/drawing/2014/main" id="{3F8684C9-13A8-4469-9E4D-AEDA94AB1F3F}"/>
+                <a16:creationId xmlns:a16="http://schemas.microsoft.com/office/drawing/2014/main" id="{D86154DE-7506-411B-941D-C546CF84395E}"/>
               </a:ext>
             </a:extLst>
           </p:cNvPr>
@@ -30136,7 +31000,7 @@
           <p:cNvPr id="7" name="">
             <a:extLst xmlns:a="http://schemas.openxmlformats.org/drawingml/2006/main">
               <a:ext uri="{FF2B5EF4-FFF2-40B4-BE49-F238E27FC236}">
-                <a16:creationId xmlns:a16="http://schemas.microsoft.com/office/drawing/2014/main" id="{6596B98E-E57B-484F-8F09-09D5BDDD49B6}"/>
+                <a16:creationId xmlns:a16="http://schemas.microsoft.com/office/drawing/2014/main" id="{96820806-4434-41D8-9FC3-08FDE41EAFF0}"/>
               </a:ext>
             </a:extLst>
           </p:cNvPr>
@@ -30146,7 +31010,7 @@
           <p:nvPr/>
         </p:nvPicPr>
         <p:blipFill>
-          <a:blip xmlns:r="http://schemas.openxmlformats.org/officeDocument/2006/relationships" xmlns:a="http://schemas.openxmlformats.org/drawingml/2006/main" r:embed="Rffa1d680d2754f85"/>
+          <a:blip xmlns:r="http://schemas.openxmlformats.org/officeDocument/2006/relationships" xmlns:a="http://schemas.openxmlformats.org/drawingml/2006/main" r:embed="R740a59b4bd4f44cf"/>
           <a:stretch xmlns:a="http://schemas.openxmlformats.org/drawingml/2006/main"/>
         </p:blipFill>
         <p:spPr>
@@ -30164,7 +31028,7 @@
           <p:cNvPr id="8" name="">
             <a:extLst xmlns:a="http://schemas.openxmlformats.org/drawingml/2006/main">
               <a:ext uri="{FF2B5EF4-FFF2-40B4-BE49-F238E27FC236}">
-                <a16:creationId xmlns:a16="http://schemas.microsoft.com/office/drawing/2014/main" id="{83CC220B-DBB1-4C32-8309-7D13F6FA10C7}"/>
+                <a16:creationId xmlns:a16="http://schemas.microsoft.com/office/drawing/2014/main" id="{3EA0FB2D-85E4-43EA-8A72-D06C83F35C5A}"/>
               </a:ext>
             </a:extLst>
           </p:cNvPr>
@@ -30322,7 +31186,7 @@
           <p:cNvPr id="9" name="">
             <a:extLst xmlns:a="http://schemas.openxmlformats.org/drawingml/2006/main">
               <a:ext uri="{FF2B5EF4-FFF2-40B4-BE49-F238E27FC236}">
-                <a16:creationId xmlns:a16="http://schemas.microsoft.com/office/drawing/2014/main" id="{AA2AC99B-D8B6-4F13-ACF3-5E97A71B99F6}"/>
+                <a16:creationId xmlns:a16="http://schemas.microsoft.com/office/drawing/2014/main" id="{969CA8F1-3A6E-4A44-80C5-F64F8B4C474A}"/>
               </a:ext>
             </a:extLst>
           </p:cNvPr>
@@ -30480,7 +31344,7 @@
           <p:cNvPr id="10" name="">
             <a:extLst xmlns:a="http://schemas.openxmlformats.org/drawingml/2006/main">
               <a:ext uri="{FF2B5EF4-FFF2-40B4-BE49-F238E27FC236}">
-                <a16:creationId xmlns:a16="http://schemas.microsoft.com/office/drawing/2014/main" id="{DFC2FD94-B085-4589-B5C3-95D264D1CC33}"/>
+                <a16:creationId xmlns:a16="http://schemas.microsoft.com/office/drawing/2014/main" id="{2418CD7B-D853-4A5E-A1A8-136C8B1E0369}"/>
               </a:ext>
             </a:extLst>
           </p:cNvPr>
@@ -30638,7 +31502,7 @@
           <p:cNvPr id="11" name="">
             <a:extLst xmlns:a="http://schemas.openxmlformats.org/drawingml/2006/main">
               <a:ext uri="{FF2B5EF4-FFF2-40B4-BE49-F238E27FC236}">
-                <a16:creationId xmlns:a16="http://schemas.microsoft.com/office/drawing/2014/main" id="{1766F2B7-9926-4F2D-B288-428003B4C35C}"/>
+                <a16:creationId xmlns:a16="http://schemas.microsoft.com/office/drawing/2014/main" id="{08D5207E-F299-4876-958A-96A910E0DEC7}"/>
               </a:ext>
             </a:extLst>
           </p:cNvPr>
@@ -30796,7 +31660,7 @@
           <p:cNvPr id="12" name="">
             <a:extLst xmlns:a="http://schemas.openxmlformats.org/drawingml/2006/main">
               <a:ext uri="{FF2B5EF4-FFF2-40B4-BE49-F238E27FC236}">
-                <a16:creationId xmlns:a16="http://schemas.microsoft.com/office/drawing/2014/main" id="{05BF7725-51F5-479D-B640-5FA1362167D4}"/>
+                <a16:creationId xmlns:a16="http://schemas.microsoft.com/office/drawing/2014/main" id="{0A9ED6FD-0834-4105-BCF9-AB7A5AE4DB8B}"/>
               </a:ext>
             </a:extLst>
           </p:cNvPr>
@@ -31000,7 +31864,7 @@
           <p:cNvPr id="13" name="">
             <a:extLst xmlns:a="http://schemas.openxmlformats.org/drawingml/2006/main">
               <a:ext uri="{FF2B5EF4-FFF2-40B4-BE49-F238E27FC236}">
-                <a16:creationId xmlns:a16="http://schemas.microsoft.com/office/drawing/2014/main" id="{6DFB0C04-D748-4F1B-8EE3-384E9AEA9EDF}"/>
+                <a16:creationId xmlns:a16="http://schemas.microsoft.com/office/drawing/2014/main" id="{0BAC5DB0-6C9B-430D-85D9-5FFCEE54E62D}"/>
               </a:ext>
             </a:extLst>
           </p:cNvPr>
@@ -31156,7 +32020,7 @@
     </p:spTree>
     <p:extLst>
       <p:ext uri="{BB962C8B-B14F-4D97-AF65-F5344CB8AC3E}">
-        <p14:creationId xmlns:p14="http://schemas.microsoft.com/office/powerpoint/2010/main" val="1597593599"/>
+        <p14:creationId xmlns:p14="http://schemas.microsoft.com/office/powerpoint/2010/main" val="741443027"/>
       </p:ext>
     </p:extLst>
   </p:cSld>
@@ -31187,7 +32051,7 @@
           <p:cNvPr id="14" name="">
             <a:extLst xmlns:a="http://schemas.openxmlformats.org/drawingml/2006/main">
               <a:ext uri="{FF2B5EF4-FFF2-40B4-BE49-F238E27FC236}">
-                <a16:creationId xmlns:a16="http://schemas.microsoft.com/office/drawing/2014/main" id="{4C60436A-A267-47D3-8A5C-F06E160B9C1A}"/>
+                <a16:creationId xmlns:a16="http://schemas.microsoft.com/office/drawing/2014/main" id="{89490618-4DC5-49BA-86FE-13CC88FC73C5}"/>
               </a:ext>
             </a:extLst>
           </p:cNvPr>
@@ -31345,7 +32209,7 @@
           <p:cNvPr id="2" name="">
             <a:extLst xmlns:a="http://schemas.openxmlformats.org/drawingml/2006/main">
               <a:ext uri="{FF2B5EF4-FFF2-40B4-BE49-F238E27FC236}">
-                <a16:creationId xmlns:a16="http://schemas.microsoft.com/office/drawing/2014/main" id="{AA5A18A9-3913-4535-A37F-447DDC292438}"/>
+                <a16:creationId xmlns:a16="http://schemas.microsoft.com/office/drawing/2014/main" id="{53ED3E5A-66E8-4995-966D-37D9554AF85D}"/>
               </a:ext>
             </a:extLst>
           </p:cNvPr>
@@ -31503,7 +32367,7 @@
           <p:cNvPr id="3" name="">
             <a:extLst xmlns:a="http://schemas.openxmlformats.org/drawingml/2006/main">
               <a:ext uri="{FF2B5EF4-FFF2-40B4-BE49-F238E27FC236}">
-                <a16:creationId xmlns:a16="http://schemas.microsoft.com/office/drawing/2014/main" id="{6CAAB52E-2C14-4A7A-95E8-EAD519AD8512}"/>
+                <a16:creationId xmlns:a16="http://schemas.microsoft.com/office/drawing/2014/main" id="{50668014-4BC7-4009-9194-D901AD3847CF}"/>
               </a:ext>
             </a:extLst>
           </p:cNvPr>
@@ -31661,7 +32525,7 @@
           <p:cNvPr id="4" name="">
             <a:extLst xmlns:a="http://schemas.openxmlformats.org/drawingml/2006/main">
               <a:ext uri="{FF2B5EF4-FFF2-40B4-BE49-F238E27FC236}">
-                <a16:creationId xmlns:a16="http://schemas.microsoft.com/office/drawing/2014/main" id="{A253703B-4226-4DBF-9C87-638C218BDCA2}"/>
+                <a16:creationId xmlns:a16="http://schemas.microsoft.com/office/drawing/2014/main" id="{F96847FC-A46F-4213-AE24-F65562A6A378}"/>
               </a:ext>
             </a:extLst>
           </p:cNvPr>
@@ -31671,7 +32535,7 @@
           <p:nvPr/>
         </p:nvPicPr>
         <p:blipFill>
-          <a:blip xmlns:r="http://schemas.openxmlformats.org/officeDocument/2006/relationships" xmlns:a="http://schemas.openxmlformats.org/drawingml/2006/main" r:embed="R1822bee9cad743f6"/>
+          <a:blip xmlns:r="http://schemas.openxmlformats.org/officeDocument/2006/relationships" xmlns:a="http://schemas.openxmlformats.org/drawingml/2006/main" r:embed="R64fe99d0902e4c2e"/>
           <a:stretch xmlns:a="http://schemas.openxmlformats.org/drawingml/2006/main"/>
         </p:blipFill>
         <p:spPr>
@@ -31689,7 +32553,7 @@
           <p:cNvPr id="5" name="">
             <a:extLst xmlns:a="http://schemas.openxmlformats.org/drawingml/2006/main">
               <a:ext uri="{FF2B5EF4-FFF2-40B4-BE49-F238E27FC236}">
-                <a16:creationId xmlns:a16="http://schemas.microsoft.com/office/drawing/2014/main" id="{B7C49B49-C73F-411C-9CDF-7A8226064E9E}"/>
+                <a16:creationId xmlns:a16="http://schemas.microsoft.com/office/drawing/2014/main" id="{22EDF0F7-5256-4CE4-82FF-59E4063C17A7}"/>
               </a:ext>
             </a:extLst>
           </p:cNvPr>
@@ -31847,7 +32711,7 @@
           <p:cNvPr id="6" name="">
             <a:extLst xmlns:a="http://schemas.openxmlformats.org/drawingml/2006/main">
               <a:ext uri="{FF2B5EF4-FFF2-40B4-BE49-F238E27FC236}">
-                <a16:creationId xmlns:a16="http://schemas.microsoft.com/office/drawing/2014/main" id="{9B7BDB4E-75CC-46C4-A6B0-819B53E95B64}"/>
+                <a16:creationId xmlns:a16="http://schemas.microsoft.com/office/drawing/2014/main" id="{A20FF706-29B3-4CC7-BA85-1603A3B5BCE2}"/>
               </a:ext>
             </a:extLst>
           </p:cNvPr>
@@ -32005,7 +32869,7 @@
           <p:cNvPr id="7" name="">
             <a:extLst xmlns:a="http://schemas.openxmlformats.org/drawingml/2006/main">
               <a:ext uri="{FF2B5EF4-FFF2-40B4-BE49-F238E27FC236}">
-                <a16:creationId xmlns:a16="http://schemas.microsoft.com/office/drawing/2014/main" id="{ED6A609E-6D59-483D-BE72-EA134338A17C}"/>
+                <a16:creationId xmlns:a16="http://schemas.microsoft.com/office/drawing/2014/main" id="{843A5289-1C3B-4D32-8340-66C4778C8B66}"/>
               </a:ext>
             </a:extLst>
           </p:cNvPr>
@@ -32015,7 +32879,7 @@
           <p:nvPr/>
         </p:nvPicPr>
         <p:blipFill>
-          <a:blip xmlns:r="http://schemas.openxmlformats.org/officeDocument/2006/relationships" xmlns:a="http://schemas.openxmlformats.org/drawingml/2006/main" r:embed="Ra63f56df52b84d71"/>
+          <a:blip xmlns:r="http://schemas.openxmlformats.org/officeDocument/2006/relationships" xmlns:a="http://schemas.openxmlformats.org/drawingml/2006/main" r:embed="Rbcfc8ff1c1ad4067"/>
           <a:stretch xmlns:a="http://schemas.openxmlformats.org/drawingml/2006/main"/>
         </p:blipFill>
         <p:spPr>
@@ -32033,7 +32897,7 @@
           <p:cNvPr id="8" name="">
             <a:extLst xmlns:a="http://schemas.openxmlformats.org/drawingml/2006/main">
               <a:ext uri="{FF2B5EF4-FFF2-40B4-BE49-F238E27FC236}">
-                <a16:creationId xmlns:a16="http://schemas.microsoft.com/office/drawing/2014/main" id="{2A110A63-2530-4BEF-84F3-33106C76E782}"/>
+                <a16:creationId xmlns:a16="http://schemas.microsoft.com/office/drawing/2014/main" id="{30A26AFE-C359-4B9A-862F-099EFF652235}"/>
               </a:ext>
             </a:extLst>
           </p:cNvPr>
@@ -32191,7 +33055,7 @@
           <p:cNvPr id="9" name="">
             <a:extLst xmlns:a="http://schemas.openxmlformats.org/drawingml/2006/main">
               <a:ext uri="{FF2B5EF4-FFF2-40B4-BE49-F238E27FC236}">
-                <a16:creationId xmlns:a16="http://schemas.microsoft.com/office/drawing/2014/main" id="{E428041F-5071-4782-B082-C9454FB96B24}"/>
+                <a16:creationId xmlns:a16="http://schemas.microsoft.com/office/drawing/2014/main" id="{9133EDCB-262F-463D-8674-82B25991F419}"/>
               </a:ext>
             </a:extLst>
           </p:cNvPr>
@@ -32349,7 +33213,7 @@
           <p:cNvPr id="10" name="">
             <a:extLst xmlns:a="http://schemas.openxmlformats.org/drawingml/2006/main">
               <a:ext uri="{FF2B5EF4-FFF2-40B4-BE49-F238E27FC236}">
-                <a16:creationId xmlns:a16="http://schemas.microsoft.com/office/drawing/2014/main" id="{DDF3B941-4812-4CB8-8301-D123EBBDFC71}"/>
+                <a16:creationId xmlns:a16="http://schemas.microsoft.com/office/drawing/2014/main" id="{42710CF8-C501-4E89-9389-1F7ACD06B60C}"/>
               </a:ext>
             </a:extLst>
           </p:cNvPr>
@@ -32535,7 +33399,7 @@
           <p:cNvPr id="11" name="">
             <a:extLst xmlns:a="http://schemas.openxmlformats.org/drawingml/2006/main">
               <a:ext uri="{FF2B5EF4-FFF2-40B4-BE49-F238E27FC236}">
-                <a16:creationId xmlns:a16="http://schemas.microsoft.com/office/drawing/2014/main" id="{99E84B5F-7CE0-42F2-BF71-CA3705ADA597}"/>
+                <a16:creationId xmlns:a16="http://schemas.microsoft.com/office/drawing/2014/main" id="{96AD391B-7DB9-4DF8-853E-46F0A26E1B9E}"/>
               </a:ext>
             </a:extLst>
           </p:cNvPr>
@@ -32693,7 +33557,7 @@
           <p:cNvPr id="12" name="">
             <a:extLst xmlns:a="http://schemas.openxmlformats.org/drawingml/2006/main">
               <a:ext uri="{FF2B5EF4-FFF2-40B4-BE49-F238E27FC236}">
-                <a16:creationId xmlns:a16="http://schemas.microsoft.com/office/drawing/2014/main" id="{172AFEC4-3844-4E38-BF65-D82675FD0E61}"/>
+                <a16:creationId xmlns:a16="http://schemas.microsoft.com/office/drawing/2014/main" id="{D78682CD-0288-48AD-ACD6-0423D39605CC}"/>
               </a:ext>
             </a:extLst>
           </p:cNvPr>
@@ -32851,7 +33715,7 @@
           <p:cNvPr id="13" name="">
             <a:extLst xmlns:a="http://schemas.openxmlformats.org/drawingml/2006/main">
               <a:ext uri="{FF2B5EF4-FFF2-40B4-BE49-F238E27FC236}">
-                <a16:creationId xmlns:a16="http://schemas.microsoft.com/office/drawing/2014/main" id="{91630EE7-51BC-4178-A897-6572A162A8A4}"/>
+                <a16:creationId xmlns:a16="http://schemas.microsoft.com/office/drawing/2014/main" id="{A18DED84-537E-423C-A19B-1AF1792F2479}"/>
               </a:ext>
             </a:extLst>
           </p:cNvPr>
@@ -33007,7 +33871,7 @@
     </p:spTree>
     <p:extLst>
       <p:ext uri="{BB962C8B-B14F-4D97-AF65-F5344CB8AC3E}">
-        <p14:creationId xmlns:p14="http://schemas.microsoft.com/office/powerpoint/2010/main" val="42487297"/>
+        <p14:creationId xmlns:p14="http://schemas.microsoft.com/office/powerpoint/2010/main" val="335029386"/>
       </p:ext>
     </p:extLst>
   </p:cSld>
@@ -33038,7 +33902,7 @@
           <p:cNvPr id="16" name="">
             <a:extLst xmlns:a="http://schemas.openxmlformats.org/drawingml/2006/main">
               <a:ext uri="{FF2B5EF4-FFF2-40B4-BE49-F238E27FC236}">
-                <a16:creationId xmlns:a16="http://schemas.microsoft.com/office/drawing/2014/main" id="{E920A9E1-F7E1-4F26-A55F-D47C9E019984}"/>
+                <a16:creationId xmlns:a16="http://schemas.microsoft.com/office/drawing/2014/main" id="{7E3EB156-40E6-4ED7-A4B8-352C937E4BB5}"/>
               </a:ext>
             </a:extLst>
           </p:cNvPr>
@@ -33186,7 +34050,7 @@
                 <a:ea typeface="Arial"/>
                 <a:cs typeface="Arial"/>
               </a:rPr>
-              <a:t>JAVA 7 · 39–41 MIN</a:t>
+              <a:t>JAVA 7 · 39–41 MIN · VETËM DISKUTIM</a:t>
             </a:r>
           </a:p>
         </p:txBody>
@@ -33196,7 +34060,7 @@
           <p:cNvPr id="2" name="">
             <a:extLst xmlns:a="http://schemas.openxmlformats.org/drawingml/2006/main">
               <a:ext uri="{FF2B5EF4-FFF2-40B4-BE49-F238E27FC236}">
-                <a16:creationId xmlns:a16="http://schemas.microsoft.com/office/drawing/2014/main" id="{CD49A71B-17A6-4C22-92F1-059C43E9C2B5}"/>
+                <a16:creationId xmlns:a16="http://schemas.microsoft.com/office/drawing/2014/main" id="{1CC5DFCE-AF84-4D1A-B8DC-B9CFD9E17D2C}"/>
               </a:ext>
             </a:extLst>
           </p:cNvPr>
@@ -33354,7 +34218,7 @@
           <p:cNvPr id="3" name="">
             <a:extLst xmlns:a="http://schemas.openxmlformats.org/drawingml/2006/main">
               <a:ext uri="{FF2B5EF4-FFF2-40B4-BE49-F238E27FC236}">
-                <a16:creationId xmlns:a16="http://schemas.microsoft.com/office/drawing/2014/main" id="{CB318BB8-13CC-41A9-BACD-6EEAC4219D90}"/>
+                <a16:creationId xmlns:a16="http://schemas.microsoft.com/office/drawing/2014/main" id="{6B413E42-DAC6-4B30-B916-280CB7B98CBD}"/>
               </a:ext>
             </a:extLst>
           </p:cNvPr>
@@ -33502,7 +34366,7 @@
                 <a:ea typeface="Arial"/>
                 <a:cs typeface="Arial"/>
               </a:rPr>
-              <a:t>Një vend, dy udhëtarë</a:t>
+              <a:t>Rasti 6 · Një vend, dy udhëtarë</a:t>
             </a:r>
           </a:p>
         </p:txBody>
@@ -33512,7 +34376,7 @@
           <p:cNvPr id="4" name="">
             <a:extLst xmlns:a="http://schemas.openxmlformats.org/drawingml/2006/main">
               <a:ext uri="{FF2B5EF4-FFF2-40B4-BE49-F238E27FC236}">
-                <a16:creationId xmlns:a16="http://schemas.microsoft.com/office/drawing/2014/main" id="{048B2024-B4A0-4F68-B415-5A6C7BA5FA50}"/>
+                <a16:creationId xmlns:a16="http://schemas.microsoft.com/office/drawing/2014/main" id="{62C96F6A-5EFA-44B4-A02C-47E0FF7BD38C}"/>
               </a:ext>
             </a:extLst>
           </p:cNvPr>
@@ -33522,7 +34386,7 @@
           <p:nvPr/>
         </p:nvPicPr>
         <p:blipFill>
-          <a:blip xmlns:r="http://schemas.openxmlformats.org/officeDocument/2006/relationships" xmlns:a="http://schemas.openxmlformats.org/drawingml/2006/main" r:embed="Ref7c889ef8954290"/>
+          <a:blip xmlns:r="http://schemas.openxmlformats.org/officeDocument/2006/relationships" xmlns:a="http://schemas.openxmlformats.org/drawingml/2006/main" r:embed="Rb3e20c70db8247c4"/>
           <a:stretch xmlns:a="http://schemas.openxmlformats.org/drawingml/2006/main"/>
         </p:blipFill>
         <p:spPr>
@@ -33540,7 +34404,7 @@
           <p:cNvPr id="5" name="">
             <a:extLst xmlns:a="http://schemas.openxmlformats.org/drawingml/2006/main">
               <a:ext uri="{FF2B5EF4-FFF2-40B4-BE49-F238E27FC236}">
-                <a16:creationId xmlns:a16="http://schemas.microsoft.com/office/drawing/2014/main" id="{5F4BD07A-16DD-48CD-B2E7-E2B5ED1A9615}"/>
+                <a16:creationId xmlns:a16="http://schemas.microsoft.com/office/drawing/2014/main" id="{1122FB89-D6B3-4DED-906F-9FBA11494392}"/>
               </a:ext>
             </a:extLst>
           </p:cNvPr>
@@ -33698,7 +34562,7 @@
           <p:cNvPr id="6" name="">
             <a:extLst xmlns:a="http://schemas.openxmlformats.org/drawingml/2006/main">
               <a:ext uri="{FF2B5EF4-FFF2-40B4-BE49-F238E27FC236}">
-                <a16:creationId xmlns:a16="http://schemas.microsoft.com/office/drawing/2014/main" id="{6CD44E1A-F5BD-4B31-BD6F-A11C4D2C9191}"/>
+                <a16:creationId xmlns:a16="http://schemas.microsoft.com/office/drawing/2014/main" id="{20E211CB-7FA8-4A92-B92A-ED72B7585B2A}"/>
               </a:ext>
             </a:extLst>
           </p:cNvPr>
@@ -33856,7 +34720,7 @@
           <p:cNvPr id="7" name="">
             <a:extLst xmlns:a="http://schemas.openxmlformats.org/drawingml/2006/main">
               <a:ext uri="{FF2B5EF4-FFF2-40B4-BE49-F238E27FC236}">
-                <a16:creationId xmlns:a16="http://schemas.microsoft.com/office/drawing/2014/main" id="{9E403172-9D67-44C7-81E4-739E41A0E98C}"/>
+                <a16:creationId xmlns:a16="http://schemas.microsoft.com/office/drawing/2014/main" id="{A9A4BC9D-BA10-465A-9BB5-B7BF071D13DB}"/>
               </a:ext>
             </a:extLst>
           </p:cNvPr>
@@ -33866,7 +34730,7 @@
           <p:nvPr/>
         </p:nvPicPr>
         <p:blipFill>
-          <a:blip xmlns:r="http://schemas.openxmlformats.org/officeDocument/2006/relationships" xmlns:a="http://schemas.openxmlformats.org/drawingml/2006/main" r:embed="Rcdbd3a77e35d4387"/>
+          <a:blip xmlns:r="http://schemas.openxmlformats.org/officeDocument/2006/relationships" xmlns:a="http://schemas.openxmlformats.org/drawingml/2006/main" r:embed="R8ba031fbb8184702"/>
           <a:stretch xmlns:a="http://schemas.openxmlformats.org/drawingml/2006/main"/>
         </p:blipFill>
         <p:spPr>
@@ -33884,7 +34748,7 @@
           <p:cNvPr id="8" name="">
             <a:extLst xmlns:a="http://schemas.openxmlformats.org/drawingml/2006/main">
               <a:ext uri="{FF2B5EF4-FFF2-40B4-BE49-F238E27FC236}">
-                <a16:creationId xmlns:a16="http://schemas.microsoft.com/office/drawing/2014/main" id="{590A9014-4A1C-4DDC-ADA7-8D10AF0AF1F5}"/>
+                <a16:creationId xmlns:a16="http://schemas.microsoft.com/office/drawing/2014/main" id="{A7BAC7BB-0312-4A46-8D9B-EB37B0C13756}"/>
               </a:ext>
             </a:extLst>
           </p:cNvPr>
@@ -34042,7 +34906,7 @@
           <p:cNvPr id="9" name="">
             <a:extLst xmlns:a="http://schemas.openxmlformats.org/drawingml/2006/main">
               <a:ext uri="{FF2B5EF4-FFF2-40B4-BE49-F238E27FC236}">
-                <a16:creationId xmlns:a16="http://schemas.microsoft.com/office/drawing/2014/main" id="{FD7F6580-F1BF-4F54-84AE-947570C8D39B}"/>
+                <a16:creationId xmlns:a16="http://schemas.microsoft.com/office/drawing/2014/main" id="{4FCBB161-4FF7-47F2-AA60-A3CDE05C1779}"/>
               </a:ext>
             </a:extLst>
           </p:cNvPr>
@@ -34200,7 +35064,7 @@
           <p:cNvPr id="10" name="">
             <a:extLst xmlns:a="http://schemas.openxmlformats.org/drawingml/2006/main">
               <a:ext uri="{FF2B5EF4-FFF2-40B4-BE49-F238E27FC236}">
-                <a16:creationId xmlns:a16="http://schemas.microsoft.com/office/drawing/2014/main" id="{B67688B2-6D1F-4A9B-BB28-431EF9BD3953}"/>
+                <a16:creationId xmlns:a16="http://schemas.microsoft.com/office/drawing/2014/main" id="{BD2578B7-3D66-4716-86B1-16AA3C36FBCE}"/>
               </a:ext>
             </a:extLst>
           </p:cNvPr>
@@ -34210,7 +35074,7 @@
           <p:nvPr/>
         </p:nvPicPr>
         <p:blipFill>
-          <a:blip xmlns:r="http://schemas.openxmlformats.org/officeDocument/2006/relationships" xmlns:a="http://schemas.openxmlformats.org/drawingml/2006/main" r:embed="Rb10db11856564666"/>
+          <a:blip xmlns:r="http://schemas.openxmlformats.org/officeDocument/2006/relationships" xmlns:a="http://schemas.openxmlformats.org/drawingml/2006/main" r:embed="Ree2110e1e6654b81"/>
           <a:stretch xmlns:a="http://schemas.openxmlformats.org/drawingml/2006/main"/>
         </p:blipFill>
         <p:spPr>
@@ -34228,7 +35092,7 @@
           <p:cNvPr id="11" name="">
             <a:extLst xmlns:a="http://schemas.openxmlformats.org/drawingml/2006/main">
               <a:ext uri="{FF2B5EF4-FFF2-40B4-BE49-F238E27FC236}">
-                <a16:creationId xmlns:a16="http://schemas.microsoft.com/office/drawing/2014/main" id="{53650724-2ADC-406E-86DD-87285C86361B}"/>
+                <a16:creationId xmlns:a16="http://schemas.microsoft.com/office/drawing/2014/main" id="{D203D011-E5E1-44B2-B8B9-DD675DBD572E}"/>
               </a:ext>
             </a:extLst>
           </p:cNvPr>
@@ -34386,7 +35250,7 @@
           <p:cNvPr id="12" name="">
             <a:extLst xmlns:a="http://schemas.openxmlformats.org/drawingml/2006/main">
               <a:ext uri="{FF2B5EF4-FFF2-40B4-BE49-F238E27FC236}">
-                <a16:creationId xmlns:a16="http://schemas.microsoft.com/office/drawing/2014/main" id="{F9D775B4-8A0D-4DF0-9765-0D1B0585D044}"/>
+                <a16:creationId xmlns:a16="http://schemas.microsoft.com/office/drawing/2014/main" id="{619EDCDA-B3A8-4298-9345-063FA675E4D4}"/>
               </a:ext>
             </a:extLst>
           </p:cNvPr>
@@ -34544,7 +35408,7 @@
           <p:cNvPr id="13" name="">
             <a:extLst xmlns:a="http://schemas.openxmlformats.org/drawingml/2006/main">
               <a:ext uri="{FF2B5EF4-FFF2-40B4-BE49-F238E27FC236}">
-                <a16:creationId xmlns:a16="http://schemas.microsoft.com/office/drawing/2014/main" id="{D37EC507-B4B1-4D74-8431-719225CFBE13}"/>
+                <a16:creationId xmlns:a16="http://schemas.microsoft.com/office/drawing/2014/main" id="{986949EE-9AD8-4822-BF20-15BF6D6576A7}"/>
               </a:ext>
             </a:extLst>
           </p:cNvPr>
@@ -34730,7 +35594,7 @@
           <p:cNvPr id="14" name="">
             <a:extLst xmlns:a="http://schemas.openxmlformats.org/drawingml/2006/main">
               <a:ext uri="{FF2B5EF4-FFF2-40B4-BE49-F238E27FC236}">
-                <a16:creationId xmlns:a16="http://schemas.microsoft.com/office/drawing/2014/main" id="{0E5913C2-DA09-48D0-9209-0CD2670C63A2}"/>
+                <a16:creationId xmlns:a16="http://schemas.microsoft.com/office/drawing/2014/main" id="{17005700-52C7-49C8-B696-1D812E4E3A6A}"/>
               </a:ext>
             </a:extLst>
           </p:cNvPr>
@@ -34888,7 +35752,7 @@
           <p:cNvPr id="15" name="">
             <a:extLst xmlns:a="http://schemas.openxmlformats.org/drawingml/2006/main">
               <a:ext uri="{FF2B5EF4-FFF2-40B4-BE49-F238E27FC236}">
-                <a16:creationId xmlns:a16="http://schemas.microsoft.com/office/drawing/2014/main" id="{461C2878-E4A1-4DDE-B561-A008DCDF57C1}"/>
+                <a16:creationId xmlns:a16="http://schemas.microsoft.com/office/drawing/2014/main" id="{5A6CC334-4D69-40B6-9482-2F73DEEFF473}"/>
               </a:ext>
             </a:extLst>
           </p:cNvPr>
@@ -35044,7 +35908,7 @@
     </p:spTree>
     <p:extLst>
       <p:ext uri="{BB962C8B-B14F-4D97-AF65-F5344CB8AC3E}">
-        <p14:creationId xmlns:p14="http://schemas.microsoft.com/office/powerpoint/2010/main" val="1901303896"/>
+        <p14:creationId xmlns:p14="http://schemas.microsoft.com/office/powerpoint/2010/main" val="1267945192"/>
       </p:ext>
     </p:extLst>
   </p:cSld>
@@ -35075,7 +35939,7 @@
           <p:cNvPr id="16" name="">
             <a:extLst xmlns:a="http://schemas.openxmlformats.org/drawingml/2006/main">
               <a:ext uri="{FF2B5EF4-FFF2-40B4-BE49-F238E27FC236}">
-                <a16:creationId xmlns:a16="http://schemas.microsoft.com/office/drawing/2014/main" id="{E73CC555-95C7-4B33-9877-A7A38748E64A}"/>
+                <a16:creationId xmlns:a16="http://schemas.microsoft.com/office/drawing/2014/main" id="{1A4C3C05-9905-4090-9CB6-D6889459A758}"/>
               </a:ext>
             </a:extLst>
           </p:cNvPr>
@@ -35233,7 +36097,7 @@
           <p:cNvPr id="2" name="">
             <a:extLst xmlns:a="http://schemas.openxmlformats.org/drawingml/2006/main">
               <a:ext uri="{FF2B5EF4-FFF2-40B4-BE49-F238E27FC236}">
-                <a16:creationId xmlns:a16="http://schemas.microsoft.com/office/drawing/2014/main" id="{F20A9A27-2C78-40B7-B66A-32D27895A192}"/>
+                <a16:creationId xmlns:a16="http://schemas.microsoft.com/office/drawing/2014/main" id="{551A3B38-BA46-4C76-9891-7F09D9BC41FB}"/>
               </a:ext>
             </a:extLst>
           </p:cNvPr>
@@ -35391,7 +36255,7 @@
           <p:cNvPr id="3" name="">
             <a:extLst xmlns:a="http://schemas.openxmlformats.org/drawingml/2006/main">
               <a:ext uri="{FF2B5EF4-FFF2-40B4-BE49-F238E27FC236}">
-                <a16:creationId xmlns:a16="http://schemas.microsoft.com/office/drawing/2014/main" id="{B45D9B48-725D-4C07-9277-805CB99D4E3B}"/>
+                <a16:creationId xmlns:a16="http://schemas.microsoft.com/office/drawing/2014/main" id="{52FCDFB8-14CA-4683-BD5B-2C822004E327}"/>
               </a:ext>
             </a:extLst>
           </p:cNvPr>
@@ -35549,7 +36413,7 @@
           <p:cNvPr id="4" name="">
             <a:extLst xmlns:a="http://schemas.openxmlformats.org/drawingml/2006/main">
               <a:ext uri="{FF2B5EF4-FFF2-40B4-BE49-F238E27FC236}">
-                <a16:creationId xmlns:a16="http://schemas.microsoft.com/office/drawing/2014/main" id="{6DE13786-A258-40C5-895A-A9D70C340B4B}"/>
+                <a16:creationId xmlns:a16="http://schemas.microsoft.com/office/drawing/2014/main" id="{FF4AA239-5A65-4D42-B248-9052E2043FD3}"/>
               </a:ext>
             </a:extLst>
           </p:cNvPr>
@@ -35559,7 +36423,7 @@
           <p:nvPr/>
         </p:nvPicPr>
         <p:blipFill>
-          <a:blip xmlns:r="http://schemas.openxmlformats.org/officeDocument/2006/relationships" xmlns:a="http://schemas.openxmlformats.org/drawingml/2006/main" r:embed="R5136ecc228b4466f"/>
+          <a:blip xmlns:r="http://schemas.openxmlformats.org/officeDocument/2006/relationships" xmlns:a="http://schemas.openxmlformats.org/drawingml/2006/main" r:embed="R03498acb91b44bc4"/>
           <a:stretch xmlns:a="http://schemas.openxmlformats.org/drawingml/2006/main"/>
         </p:blipFill>
         <p:spPr>
@@ -35577,7 +36441,7 @@
           <p:cNvPr id="5" name="">
             <a:extLst xmlns:a="http://schemas.openxmlformats.org/drawingml/2006/main">
               <a:ext uri="{FF2B5EF4-FFF2-40B4-BE49-F238E27FC236}">
-                <a16:creationId xmlns:a16="http://schemas.microsoft.com/office/drawing/2014/main" id="{F45DD7A6-B73A-4108-AC33-5869D0F08C14}"/>
+                <a16:creationId xmlns:a16="http://schemas.microsoft.com/office/drawing/2014/main" id="{6E652EE0-2B5D-4A78-A95F-05AFA7670883}"/>
               </a:ext>
             </a:extLst>
           </p:cNvPr>
@@ -35735,7 +36599,7 @@
           <p:cNvPr id="6" name="">
             <a:extLst xmlns:a="http://schemas.openxmlformats.org/drawingml/2006/main">
               <a:ext uri="{FF2B5EF4-FFF2-40B4-BE49-F238E27FC236}">
-                <a16:creationId xmlns:a16="http://schemas.microsoft.com/office/drawing/2014/main" id="{CA02FC0F-4FDF-4075-97A4-8223B1EAD135}"/>
+                <a16:creationId xmlns:a16="http://schemas.microsoft.com/office/drawing/2014/main" id="{E1FD67B4-82DB-44DC-B1BF-24BC724A9944}"/>
               </a:ext>
             </a:extLst>
           </p:cNvPr>
@@ -35893,7 +36757,7 @@
           <p:cNvPr id="7" name="">
             <a:extLst xmlns:a="http://schemas.openxmlformats.org/drawingml/2006/main">
               <a:ext uri="{FF2B5EF4-FFF2-40B4-BE49-F238E27FC236}">
-                <a16:creationId xmlns:a16="http://schemas.microsoft.com/office/drawing/2014/main" id="{28A5AD23-A96D-4EF1-92B2-7634DE61C833}"/>
+                <a16:creationId xmlns:a16="http://schemas.microsoft.com/office/drawing/2014/main" id="{572C4D78-281A-4AF6-A2D8-D5FFE1D6DAAF}"/>
               </a:ext>
             </a:extLst>
           </p:cNvPr>
@@ -35903,7 +36767,7 @@
           <p:nvPr/>
         </p:nvPicPr>
         <p:blipFill>
-          <a:blip xmlns:r="http://schemas.openxmlformats.org/officeDocument/2006/relationships" xmlns:a="http://schemas.openxmlformats.org/drawingml/2006/main" r:embed="Rfab5b803a4fe431f"/>
+          <a:blip xmlns:r="http://schemas.openxmlformats.org/officeDocument/2006/relationships" xmlns:a="http://schemas.openxmlformats.org/drawingml/2006/main" r:embed="R9c1ebf3438d44fc2"/>
           <a:stretch xmlns:a="http://schemas.openxmlformats.org/drawingml/2006/main"/>
         </p:blipFill>
         <p:spPr>
@@ -35921,7 +36785,7 @@
           <p:cNvPr id="8" name="">
             <a:extLst xmlns:a="http://schemas.openxmlformats.org/drawingml/2006/main">
               <a:ext uri="{FF2B5EF4-FFF2-40B4-BE49-F238E27FC236}">
-                <a16:creationId xmlns:a16="http://schemas.microsoft.com/office/drawing/2014/main" id="{0604C997-8DA3-487C-A0BB-06C142A2C5AE}"/>
+                <a16:creationId xmlns:a16="http://schemas.microsoft.com/office/drawing/2014/main" id="{46660A75-76DF-457D-882C-A50BC4DDF8D6}"/>
               </a:ext>
             </a:extLst>
           </p:cNvPr>
@@ -36079,7 +36943,7 @@
           <p:cNvPr id="9" name="">
             <a:extLst xmlns:a="http://schemas.openxmlformats.org/drawingml/2006/main">
               <a:ext uri="{FF2B5EF4-FFF2-40B4-BE49-F238E27FC236}">
-                <a16:creationId xmlns:a16="http://schemas.microsoft.com/office/drawing/2014/main" id="{0D122D51-7592-47A9-AE92-AA277BA14920}"/>
+                <a16:creationId xmlns:a16="http://schemas.microsoft.com/office/drawing/2014/main" id="{3F31F809-52C9-4DA4-81AE-555DA086EFEA}"/>
               </a:ext>
             </a:extLst>
           </p:cNvPr>
@@ -36237,7 +37101,7 @@
           <p:cNvPr id="10" name="">
             <a:extLst xmlns:a="http://schemas.openxmlformats.org/drawingml/2006/main">
               <a:ext uri="{FF2B5EF4-FFF2-40B4-BE49-F238E27FC236}">
-                <a16:creationId xmlns:a16="http://schemas.microsoft.com/office/drawing/2014/main" id="{FD45A2D8-5E46-47C5-B13C-8B738845088C}"/>
+                <a16:creationId xmlns:a16="http://schemas.microsoft.com/office/drawing/2014/main" id="{B4BCDE40-FBC0-41B3-9376-878A74F3836B}"/>
               </a:ext>
             </a:extLst>
           </p:cNvPr>
@@ -36247,7 +37111,7 @@
           <p:nvPr/>
         </p:nvPicPr>
         <p:blipFill>
-          <a:blip xmlns:r="http://schemas.openxmlformats.org/officeDocument/2006/relationships" xmlns:a="http://schemas.openxmlformats.org/drawingml/2006/main" r:embed="R6663021717794fe8"/>
+          <a:blip xmlns:r="http://schemas.openxmlformats.org/officeDocument/2006/relationships" xmlns:a="http://schemas.openxmlformats.org/drawingml/2006/main" r:embed="R783fcde396734cce"/>
           <a:stretch xmlns:a="http://schemas.openxmlformats.org/drawingml/2006/main"/>
         </p:blipFill>
         <p:spPr>
@@ -36265,7 +37129,7 @@
           <p:cNvPr id="11" name="">
             <a:extLst xmlns:a="http://schemas.openxmlformats.org/drawingml/2006/main">
               <a:ext uri="{FF2B5EF4-FFF2-40B4-BE49-F238E27FC236}">
-                <a16:creationId xmlns:a16="http://schemas.microsoft.com/office/drawing/2014/main" id="{BBE70337-10A5-421C-939C-D4B1FCE426F9}"/>
+                <a16:creationId xmlns:a16="http://schemas.microsoft.com/office/drawing/2014/main" id="{EACB9383-D8B5-4B6C-91C8-6A0BECD9ADA0}"/>
               </a:ext>
             </a:extLst>
           </p:cNvPr>
@@ -36423,7 +37287,7 @@
           <p:cNvPr id="12" name="">
             <a:extLst xmlns:a="http://schemas.openxmlformats.org/drawingml/2006/main">
               <a:ext uri="{FF2B5EF4-FFF2-40B4-BE49-F238E27FC236}">
-                <a16:creationId xmlns:a16="http://schemas.microsoft.com/office/drawing/2014/main" id="{E51CB5AA-DF97-4922-8678-AE5932D72048}"/>
+                <a16:creationId xmlns:a16="http://schemas.microsoft.com/office/drawing/2014/main" id="{A161364C-134E-4034-8167-E4339EFA09C6}"/>
               </a:ext>
             </a:extLst>
           </p:cNvPr>
@@ -36581,7 +37445,7 @@
           <p:cNvPr id="13" name="">
             <a:extLst xmlns:a="http://schemas.openxmlformats.org/drawingml/2006/main">
               <a:ext uri="{FF2B5EF4-FFF2-40B4-BE49-F238E27FC236}">
-                <a16:creationId xmlns:a16="http://schemas.microsoft.com/office/drawing/2014/main" id="{9AC5DA80-6BA2-4F54-8174-51A51DDE7E67}"/>
+                <a16:creationId xmlns:a16="http://schemas.microsoft.com/office/drawing/2014/main" id="{16978289-1C64-4291-89C3-BEA7BA1A8FA8}"/>
               </a:ext>
             </a:extLst>
           </p:cNvPr>
@@ -36767,7 +37631,7 @@
           <p:cNvPr id="14" name="">
             <a:extLst xmlns:a="http://schemas.openxmlformats.org/drawingml/2006/main">
               <a:ext uri="{FF2B5EF4-FFF2-40B4-BE49-F238E27FC236}">
-                <a16:creationId xmlns:a16="http://schemas.microsoft.com/office/drawing/2014/main" id="{D76DDC38-7D2E-4CAE-A379-ED716839511F}"/>
+                <a16:creationId xmlns:a16="http://schemas.microsoft.com/office/drawing/2014/main" id="{AEED638E-CEA8-4630-B0B9-FC3D891BAF3B}"/>
               </a:ext>
             </a:extLst>
           </p:cNvPr>
@@ -36925,7 +37789,7 @@
           <p:cNvPr id="15" name="">
             <a:extLst xmlns:a="http://schemas.openxmlformats.org/drawingml/2006/main">
               <a:ext uri="{FF2B5EF4-FFF2-40B4-BE49-F238E27FC236}">
-                <a16:creationId xmlns:a16="http://schemas.microsoft.com/office/drawing/2014/main" id="{434DCA84-40BE-4588-9F05-29C66064EC96}"/>
+                <a16:creationId xmlns:a16="http://schemas.microsoft.com/office/drawing/2014/main" id="{CED863A2-AF9F-4E0B-A8E6-B360A1D41FD1}"/>
               </a:ext>
             </a:extLst>
           </p:cNvPr>
@@ -37081,7 +37945,7 @@
     </p:spTree>
     <p:extLst>
       <p:ext uri="{BB962C8B-B14F-4D97-AF65-F5344CB8AC3E}">
-        <p14:creationId xmlns:p14="http://schemas.microsoft.com/office/powerpoint/2010/main" val="220559869"/>
+        <p14:creationId xmlns:p14="http://schemas.microsoft.com/office/powerpoint/2010/main" val="764670443"/>
       </p:ext>
     </p:extLst>
   </p:cSld>
@@ -37112,7 +37976,7 @@
           <p:cNvPr id="16" name="">
             <a:extLst xmlns:a="http://schemas.openxmlformats.org/drawingml/2006/main">
               <a:ext uri="{FF2B5EF4-FFF2-40B4-BE49-F238E27FC236}">
-                <a16:creationId xmlns:a16="http://schemas.microsoft.com/office/drawing/2014/main" id="{03F934C3-CFF8-4F51-B217-8C850F15B7E6}"/>
+                <a16:creationId xmlns:a16="http://schemas.microsoft.com/office/drawing/2014/main" id="{F25A59BC-CAEC-4543-9D6B-A01C85CD194C}"/>
               </a:ext>
             </a:extLst>
           </p:cNvPr>
@@ -37270,7 +38134,7 @@
           <p:cNvPr id="2" name="">
             <a:extLst xmlns:a="http://schemas.openxmlformats.org/drawingml/2006/main">
               <a:ext uri="{FF2B5EF4-FFF2-40B4-BE49-F238E27FC236}">
-                <a16:creationId xmlns:a16="http://schemas.microsoft.com/office/drawing/2014/main" id="{CB21180E-A0BF-4E68-B47C-FD076DB08B05}"/>
+                <a16:creationId xmlns:a16="http://schemas.microsoft.com/office/drawing/2014/main" id="{5CF2BD24-9C23-4BAF-A8D2-518F3BDB35C1}"/>
               </a:ext>
             </a:extLst>
           </p:cNvPr>
@@ -37428,7 +38292,7 @@
           <p:cNvPr id="3" name="">
             <a:extLst xmlns:a="http://schemas.openxmlformats.org/drawingml/2006/main">
               <a:ext uri="{FF2B5EF4-FFF2-40B4-BE49-F238E27FC236}">
-                <a16:creationId xmlns:a16="http://schemas.microsoft.com/office/drawing/2014/main" id="{FA5BA3C2-B01A-4D92-AC50-83FB29C88475}"/>
+                <a16:creationId xmlns:a16="http://schemas.microsoft.com/office/drawing/2014/main" id="{BC2E22AC-6D7C-47F8-9CED-7BC1D7EDF616}"/>
               </a:ext>
             </a:extLst>
           </p:cNvPr>
@@ -37586,7 +38450,7 @@
           <p:cNvPr id="4" name="">
             <a:extLst xmlns:a="http://schemas.openxmlformats.org/drawingml/2006/main">
               <a:ext uri="{FF2B5EF4-FFF2-40B4-BE49-F238E27FC236}">
-                <a16:creationId xmlns:a16="http://schemas.microsoft.com/office/drawing/2014/main" id="{CF503EFC-69A5-473F-B56E-A0962C8BA780}"/>
+                <a16:creationId xmlns:a16="http://schemas.microsoft.com/office/drawing/2014/main" id="{9EEBE393-B906-41E8-BB46-73CAF9588FEB}"/>
               </a:ext>
             </a:extLst>
           </p:cNvPr>
@@ -37596,7 +38460,7 @@
           <p:nvPr/>
         </p:nvPicPr>
         <p:blipFill>
-          <a:blip xmlns:r="http://schemas.openxmlformats.org/officeDocument/2006/relationships" xmlns:a="http://schemas.openxmlformats.org/drawingml/2006/main" r:embed="Rb33552fb35b449be"/>
+          <a:blip xmlns:r="http://schemas.openxmlformats.org/officeDocument/2006/relationships" xmlns:a="http://schemas.openxmlformats.org/drawingml/2006/main" r:embed="Rab2e7a39ad9043fb"/>
           <a:stretch xmlns:a="http://schemas.openxmlformats.org/drawingml/2006/main"/>
         </p:blipFill>
         <p:spPr>
@@ -37614,7 +38478,7 @@
           <p:cNvPr id="5" name="">
             <a:extLst xmlns:a="http://schemas.openxmlformats.org/drawingml/2006/main">
               <a:ext uri="{FF2B5EF4-FFF2-40B4-BE49-F238E27FC236}">
-                <a16:creationId xmlns:a16="http://schemas.microsoft.com/office/drawing/2014/main" id="{A99F3AEC-A5CA-42DE-B596-035EDFBE9AC4}"/>
+                <a16:creationId xmlns:a16="http://schemas.microsoft.com/office/drawing/2014/main" id="{9275E721-7C34-4ED0-8D6E-87CEC9C132FE}"/>
               </a:ext>
             </a:extLst>
           </p:cNvPr>
@@ -37772,7 +38636,7 @@
           <p:cNvPr id="6" name="">
             <a:extLst xmlns:a="http://schemas.openxmlformats.org/drawingml/2006/main">
               <a:ext uri="{FF2B5EF4-FFF2-40B4-BE49-F238E27FC236}">
-                <a16:creationId xmlns:a16="http://schemas.microsoft.com/office/drawing/2014/main" id="{AE72181F-6497-4C9F-B840-1A8A4CE5F31A}"/>
+                <a16:creationId xmlns:a16="http://schemas.microsoft.com/office/drawing/2014/main" id="{DE92A665-0EB4-4759-8210-431AD0F603D7}"/>
               </a:ext>
             </a:extLst>
           </p:cNvPr>
@@ -37930,7 +38794,7 @@
           <p:cNvPr id="7" name="">
             <a:extLst xmlns:a="http://schemas.openxmlformats.org/drawingml/2006/main">
               <a:ext uri="{FF2B5EF4-FFF2-40B4-BE49-F238E27FC236}">
-                <a16:creationId xmlns:a16="http://schemas.microsoft.com/office/drawing/2014/main" id="{87F7D011-1623-460C-8768-A9A621485BA2}"/>
+                <a16:creationId xmlns:a16="http://schemas.microsoft.com/office/drawing/2014/main" id="{059D55DA-14BF-4740-A4F5-1859E1DC5089}"/>
               </a:ext>
             </a:extLst>
           </p:cNvPr>
@@ -37940,7 +38804,7 @@
           <p:nvPr/>
         </p:nvPicPr>
         <p:blipFill>
-          <a:blip xmlns:r="http://schemas.openxmlformats.org/officeDocument/2006/relationships" xmlns:a="http://schemas.openxmlformats.org/drawingml/2006/main" r:embed="Rcc5c30313f574271"/>
+          <a:blip xmlns:r="http://schemas.openxmlformats.org/officeDocument/2006/relationships" xmlns:a="http://schemas.openxmlformats.org/drawingml/2006/main" r:embed="Rb194fe0324d346ce"/>
           <a:stretch xmlns:a="http://schemas.openxmlformats.org/drawingml/2006/main"/>
         </p:blipFill>
         <p:spPr>
@@ -37958,7 +38822,7 @@
           <p:cNvPr id="8" name="">
             <a:extLst xmlns:a="http://schemas.openxmlformats.org/drawingml/2006/main">
               <a:ext uri="{FF2B5EF4-FFF2-40B4-BE49-F238E27FC236}">
-                <a16:creationId xmlns:a16="http://schemas.microsoft.com/office/drawing/2014/main" id="{1B894F88-9E76-4474-8CBE-D341603E026F}"/>
+                <a16:creationId xmlns:a16="http://schemas.microsoft.com/office/drawing/2014/main" id="{55654DC6-E3E8-4DCC-B376-BE4DFDF18E8C}"/>
               </a:ext>
             </a:extLst>
           </p:cNvPr>
@@ -38116,7 +38980,7 @@
           <p:cNvPr id="9" name="">
             <a:extLst xmlns:a="http://schemas.openxmlformats.org/drawingml/2006/main">
               <a:ext uri="{FF2B5EF4-FFF2-40B4-BE49-F238E27FC236}">
-                <a16:creationId xmlns:a16="http://schemas.microsoft.com/office/drawing/2014/main" id="{3459DE36-E36C-4B0F-9439-8F14107DF01C}"/>
+                <a16:creationId xmlns:a16="http://schemas.microsoft.com/office/drawing/2014/main" id="{4438DD8F-2322-4773-80E4-AC1FAFC41BF9}"/>
               </a:ext>
             </a:extLst>
           </p:cNvPr>
@@ -38274,7 +39138,7 @@
           <p:cNvPr id="10" name="">
             <a:extLst xmlns:a="http://schemas.openxmlformats.org/drawingml/2006/main">
               <a:ext uri="{FF2B5EF4-FFF2-40B4-BE49-F238E27FC236}">
-                <a16:creationId xmlns:a16="http://schemas.microsoft.com/office/drawing/2014/main" id="{5404A4D2-8A39-4A17-B5E3-824921DCCEA7}"/>
+                <a16:creationId xmlns:a16="http://schemas.microsoft.com/office/drawing/2014/main" id="{B1DBE62B-9624-48EB-B2B4-C2AFC5AE902F}"/>
               </a:ext>
             </a:extLst>
           </p:cNvPr>
@@ -38284,7 +39148,7 @@
           <p:nvPr/>
         </p:nvPicPr>
         <p:blipFill>
-          <a:blip xmlns:r="http://schemas.openxmlformats.org/officeDocument/2006/relationships" xmlns:a="http://schemas.openxmlformats.org/drawingml/2006/main" r:embed="Rc1b464435abe434f"/>
+          <a:blip xmlns:r="http://schemas.openxmlformats.org/officeDocument/2006/relationships" xmlns:a="http://schemas.openxmlformats.org/drawingml/2006/main" r:embed="R68b6ffbc074c4c9b"/>
           <a:stretch xmlns:a="http://schemas.openxmlformats.org/drawingml/2006/main"/>
         </p:blipFill>
         <p:spPr>
@@ -38302,7 +39166,7 @@
           <p:cNvPr id="11" name="">
             <a:extLst xmlns:a="http://schemas.openxmlformats.org/drawingml/2006/main">
               <a:ext uri="{FF2B5EF4-FFF2-40B4-BE49-F238E27FC236}">
-                <a16:creationId xmlns:a16="http://schemas.microsoft.com/office/drawing/2014/main" id="{041DD733-9150-44C8-90FA-FB4E6201B38B}"/>
+                <a16:creationId xmlns:a16="http://schemas.microsoft.com/office/drawing/2014/main" id="{FD4BEC97-D135-4BF0-A3A6-9C0BC57B6C9D}"/>
               </a:ext>
             </a:extLst>
           </p:cNvPr>
@@ -38460,7 +39324,7 @@
           <p:cNvPr id="12" name="">
             <a:extLst xmlns:a="http://schemas.openxmlformats.org/drawingml/2006/main">
               <a:ext uri="{FF2B5EF4-FFF2-40B4-BE49-F238E27FC236}">
-                <a16:creationId xmlns:a16="http://schemas.microsoft.com/office/drawing/2014/main" id="{EF4DDFF3-0FE9-431E-819F-500D56E5C51C}"/>
+                <a16:creationId xmlns:a16="http://schemas.microsoft.com/office/drawing/2014/main" id="{DD6B2A91-9286-4DBC-8B63-CDBE7B89919F}"/>
               </a:ext>
             </a:extLst>
           </p:cNvPr>
@@ -38618,7 +39482,7 @@
           <p:cNvPr id="13" name="">
             <a:extLst xmlns:a="http://schemas.openxmlformats.org/drawingml/2006/main">
               <a:ext uri="{FF2B5EF4-FFF2-40B4-BE49-F238E27FC236}">
-                <a16:creationId xmlns:a16="http://schemas.microsoft.com/office/drawing/2014/main" id="{0A3B948C-A788-4224-91FD-392529B11CAA}"/>
+                <a16:creationId xmlns:a16="http://schemas.microsoft.com/office/drawing/2014/main" id="{F0C7372D-075A-4B4D-855B-EC329D95AEF1}"/>
               </a:ext>
             </a:extLst>
           </p:cNvPr>
@@ -38794,7 +39658,7 @@
                 <a:ea typeface="Arial"/>
                 <a:cs typeface="Arial"/>
               </a:rPr>
-              <a:t>Arsyeto një problem, zgjidh korrigjimin sipas pasojës dhe thuaj çfarë provojnë testet. Në laborator këtë do ta zbatosh në projektin tënd.</a:t>
+              <a:t>Arsyeto problemin dhe kufijtë e MVP-së. Në laborator zgjedh një nga Rastet 1–5: dy probleme, një korrigjim dhe tri prova.</a:t>
             </a:r>
           </a:p>
         </p:txBody>
@@ -38804,7 +39668,7 @@
           <p:cNvPr id="14" name="">
             <a:extLst xmlns:a="http://schemas.openxmlformats.org/drawingml/2006/main">
               <a:ext uri="{FF2B5EF4-FFF2-40B4-BE49-F238E27FC236}">
-                <a16:creationId xmlns:a16="http://schemas.microsoft.com/office/drawing/2014/main" id="{BBC23ABE-ADCD-4DAB-A668-40F5AAD0096B}"/>
+                <a16:creationId xmlns:a16="http://schemas.microsoft.com/office/drawing/2014/main" id="{4D2FB0F3-5A89-4D6E-996A-24F43F41E3D6}"/>
               </a:ext>
             </a:extLst>
           </p:cNvPr>
@@ -38962,7 +39826,7 @@
           <p:cNvPr id="15" name="">
             <a:extLst xmlns:a="http://schemas.openxmlformats.org/drawingml/2006/main">
               <a:ext uri="{FF2B5EF4-FFF2-40B4-BE49-F238E27FC236}">
-                <a16:creationId xmlns:a16="http://schemas.microsoft.com/office/drawing/2014/main" id="{4A42AAA4-AA40-44B2-944E-4041480AF4E4}"/>
+                <a16:creationId xmlns:a16="http://schemas.microsoft.com/office/drawing/2014/main" id="{76142903-6BDC-4D61-9DA7-9EC60BCB4E61}"/>
               </a:ext>
             </a:extLst>
           </p:cNvPr>
@@ -39118,7 +39982,7 @@
     </p:spTree>
     <p:extLst>
       <p:ext uri="{BB962C8B-B14F-4D97-AF65-F5344CB8AC3E}">
-        <p14:creationId xmlns:p14="http://schemas.microsoft.com/office/powerpoint/2010/main" val="1001811599"/>
+        <p14:creationId xmlns:p14="http://schemas.microsoft.com/office/powerpoint/2010/main" val="264779731"/>
       </p:ext>
     </p:extLst>
   </p:cSld>
@@ -39149,7 +40013,7 @@
           <p:cNvPr id="14" name="">
             <a:extLst xmlns:a="http://schemas.openxmlformats.org/drawingml/2006/main">
               <a:ext uri="{FF2B5EF4-FFF2-40B4-BE49-F238E27FC236}">
-                <a16:creationId xmlns:a16="http://schemas.microsoft.com/office/drawing/2014/main" id="{AECA32DF-45E0-4582-9FE7-5DEACF6E3FBD}"/>
+                <a16:creationId xmlns:a16="http://schemas.microsoft.com/office/drawing/2014/main" id="{6276F304-B1CD-41C1-B517-71923B224390}"/>
               </a:ext>
             </a:extLst>
           </p:cNvPr>
@@ -39307,7 +40171,7 @@
           <p:cNvPr id="2" name="">
             <a:extLst xmlns:a="http://schemas.openxmlformats.org/drawingml/2006/main">
               <a:ext uri="{FF2B5EF4-FFF2-40B4-BE49-F238E27FC236}">
-                <a16:creationId xmlns:a16="http://schemas.microsoft.com/office/drawing/2014/main" id="{2297A00F-FA0F-47FC-A257-5A70F55A02AC}"/>
+                <a16:creationId xmlns:a16="http://schemas.microsoft.com/office/drawing/2014/main" id="{1832A5FA-1DC4-4213-B1EE-F9A3D556ED80}"/>
               </a:ext>
             </a:extLst>
           </p:cNvPr>
@@ -39465,7 +40329,7 @@
           <p:cNvPr id="3" name="">
             <a:extLst xmlns:a="http://schemas.openxmlformats.org/drawingml/2006/main">
               <a:ext uri="{FF2B5EF4-FFF2-40B4-BE49-F238E27FC236}">
-                <a16:creationId xmlns:a16="http://schemas.microsoft.com/office/drawing/2014/main" id="{2CCEE3FB-9A9E-45FA-8F45-0503E1A89A32}"/>
+                <a16:creationId xmlns:a16="http://schemas.microsoft.com/office/drawing/2014/main" id="{EF18C49C-2A84-416E-80F6-49BEB28DC6A1}"/>
               </a:ext>
             </a:extLst>
           </p:cNvPr>
@@ -39613,7 +40477,7 @@
                 <a:ea typeface="Arial"/>
                 <a:cs typeface="Arial"/>
               </a:rPr>
-              <a:t>Ora në dy ekrane</a:t>
+              <a:t>Rasti 1 · Lista dhe detajet</a:t>
             </a:r>
           </a:p>
         </p:txBody>
@@ -39623,7 +40487,7 @@
           <p:cNvPr id="4" name="">
             <a:extLst xmlns:a="http://schemas.openxmlformats.org/drawingml/2006/main">
               <a:ext uri="{FF2B5EF4-FFF2-40B4-BE49-F238E27FC236}">
-                <a16:creationId xmlns:a16="http://schemas.microsoft.com/office/drawing/2014/main" id="{C40ABDB3-4A2A-4CAB-B8BC-24C385EA07B5}"/>
+                <a16:creationId xmlns:a16="http://schemas.microsoft.com/office/drawing/2014/main" id="{5664BDB1-52D3-4676-A0AB-2C443C1EAB09}"/>
               </a:ext>
             </a:extLst>
           </p:cNvPr>
@@ -39633,7 +40497,7 @@
           <p:nvPr/>
         </p:nvPicPr>
         <p:blipFill>
-          <a:blip xmlns:r="http://schemas.openxmlformats.org/officeDocument/2006/relationships" xmlns:a="http://schemas.openxmlformats.org/drawingml/2006/main" r:embed="R4449b9aa587149b8"/>
+          <a:blip xmlns:r="http://schemas.openxmlformats.org/officeDocument/2006/relationships" xmlns:a="http://schemas.openxmlformats.org/drawingml/2006/main" r:embed="R52df72e196a349aa"/>
           <a:stretch xmlns:a="http://schemas.openxmlformats.org/drawingml/2006/main"/>
         </p:blipFill>
         <p:spPr>
@@ -39651,7 +40515,7 @@
           <p:cNvPr id="5" name="">
             <a:extLst xmlns:a="http://schemas.openxmlformats.org/drawingml/2006/main">
               <a:ext uri="{FF2B5EF4-FFF2-40B4-BE49-F238E27FC236}">
-                <a16:creationId xmlns:a16="http://schemas.microsoft.com/office/drawing/2014/main" id="{4C78565A-8D23-4B80-B5E7-B4B49172DA3F}"/>
+                <a16:creationId xmlns:a16="http://schemas.microsoft.com/office/drawing/2014/main" id="{1CE47EE4-AFCE-4008-9482-01212CDD6EBC}"/>
               </a:ext>
             </a:extLst>
           </p:cNvPr>
@@ -39809,7 +40673,7 @@
           <p:cNvPr id="6" name="">
             <a:extLst xmlns:a="http://schemas.openxmlformats.org/drawingml/2006/main">
               <a:ext uri="{FF2B5EF4-FFF2-40B4-BE49-F238E27FC236}">
-                <a16:creationId xmlns:a16="http://schemas.microsoft.com/office/drawing/2014/main" id="{5CFE0073-0F94-4831-89B4-ADC5C2EFE347}"/>
+                <a16:creationId xmlns:a16="http://schemas.microsoft.com/office/drawing/2014/main" id="{509BE846-D8F0-436A-B879-AAC695A89329}"/>
               </a:ext>
             </a:extLst>
           </p:cNvPr>
@@ -39967,7 +40831,7 @@
           <p:cNvPr id="7" name="">
             <a:extLst xmlns:a="http://schemas.openxmlformats.org/drawingml/2006/main">
               <a:ext uri="{FF2B5EF4-FFF2-40B4-BE49-F238E27FC236}">
-                <a16:creationId xmlns:a16="http://schemas.microsoft.com/office/drawing/2014/main" id="{8250A1B4-C950-42B7-A080-8E3096C73E89}"/>
+                <a16:creationId xmlns:a16="http://schemas.microsoft.com/office/drawing/2014/main" id="{E53DE7C0-9BE1-4723-80E3-7C1841EC0AA7}"/>
               </a:ext>
             </a:extLst>
           </p:cNvPr>
@@ -40125,7 +40989,7 @@
           <p:cNvPr id="8" name="">
             <a:extLst xmlns:a="http://schemas.openxmlformats.org/drawingml/2006/main">
               <a:ext uri="{FF2B5EF4-FFF2-40B4-BE49-F238E27FC236}">
-                <a16:creationId xmlns:a16="http://schemas.microsoft.com/office/drawing/2014/main" id="{18549A45-B94A-43E0-BE24-2FFF4DBCDD5F}"/>
+                <a16:creationId xmlns:a16="http://schemas.microsoft.com/office/drawing/2014/main" id="{042C8053-0E10-45DE-B4D3-FA4E23854718}"/>
               </a:ext>
             </a:extLst>
           </p:cNvPr>
@@ -40283,7 +41147,7 @@
           <p:cNvPr id="9" name="">
             <a:extLst xmlns:a="http://schemas.openxmlformats.org/drawingml/2006/main">
               <a:ext uri="{FF2B5EF4-FFF2-40B4-BE49-F238E27FC236}">
-                <a16:creationId xmlns:a16="http://schemas.microsoft.com/office/drawing/2014/main" id="{C1035061-011E-4376-A896-BBF2D990EDFE}"/>
+                <a16:creationId xmlns:a16="http://schemas.microsoft.com/office/drawing/2014/main" id="{A82DF81D-6FAF-4BD6-ADBB-BB4466C719F0}"/>
               </a:ext>
             </a:extLst>
           </p:cNvPr>
@@ -40441,7 +41305,7 @@
           <p:cNvPr id="10" name="">
             <a:extLst xmlns:a="http://schemas.openxmlformats.org/drawingml/2006/main">
               <a:ext uri="{FF2B5EF4-FFF2-40B4-BE49-F238E27FC236}">
-                <a16:creationId xmlns:a16="http://schemas.microsoft.com/office/drawing/2014/main" id="{58D80280-2907-465E-8B9D-1FA638A35311}"/>
+                <a16:creationId xmlns:a16="http://schemas.microsoft.com/office/drawing/2014/main" id="{255BC2F7-1CA3-485B-B63A-BF3C3A51B86E}"/>
               </a:ext>
             </a:extLst>
           </p:cNvPr>
@@ -40599,7 +41463,7 @@
           <p:cNvPr id="11" name="">
             <a:extLst xmlns:a="http://schemas.openxmlformats.org/drawingml/2006/main">
               <a:ext uri="{FF2B5EF4-FFF2-40B4-BE49-F238E27FC236}">
-                <a16:creationId xmlns:a16="http://schemas.microsoft.com/office/drawing/2014/main" id="{65B1BCC4-24FA-4899-9DC0-6BA3C83A8D39}"/>
+                <a16:creationId xmlns:a16="http://schemas.microsoft.com/office/drawing/2014/main" id="{F2D65376-3587-4F13-A007-548A4050B7C7}"/>
               </a:ext>
             </a:extLst>
           </p:cNvPr>
@@ -40757,7 +41621,7 @@
           <p:cNvPr id="12" name="">
             <a:extLst xmlns:a="http://schemas.openxmlformats.org/drawingml/2006/main">
               <a:ext uri="{FF2B5EF4-FFF2-40B4-BE49-F238E27FC236}">
-                <a16:creationId xmlns:a16="http://schemas.microsoft.com/office/drawing/2014/main" id="{0547DBF0-06F5-4B7F-A02E-8879DEEC8595}"/>
+                <a16:creationId xmlns:a16="http://schemas.microsoft.com/office/drawing/2014/main" id="{F4BCC741-CB30-4091-8D71-2357BD447A82}"/>
               </a:ext>
             </a:extLst>
           </p:cNvPr>
@@ -40915,7 +41779,7 @@
           <p:cNvPr id="13" name="">
             <a:extLst xmlns:a="http://schemas.openxmlformats.org/drawingml/2006/main">
               <a:ext uri="{FF2B5EF4-FFF2-40B4-BE49-F238E27FC236}">
-                <a16:creationId xmlns:a16="http://schemas.microsoft.com/office/drawing/2014/main" id="{85B33E58-C1E7-4168-8C7A-2C1B8A058CA6}"/>
+                <a16:creationId xmlns:a16="http://schemas.microsoft.com/office/drawing/2014/main" id="{0F151AE0-114D-46C9-9611-18DF7D1A3463}"/>
               </a:ext>
             </a:extLst>
           </p:cNvPr>
@@ -41071,7 +41935,7 @@
     </p:spTree>
     <p:extLst>
       <p:ext uri="{BB962C8B-B14F-4D97-AF65-F5344CB8AC3E}">
-        <p14:creationId xmlns:p14="http://schemas.microsoft.com/office/powerpoint/2010/main" val="2129802835"/>
+        <p14:creationId xmlns:p14="http://schemas.microsoft.com/office/powerpoint/2010/main" val="882229959"/>
       </p:ext>
     </p:extLst>
   </p:cSld>
@@ -41102,7 +41966,7 @@
           <p:cNvPr id="14" name="">
             <a:extLst xmlns:a="http://schemas.openxmlformats.org/drawingml/2006/main">
               <a:ext uri="{FF2B5EF4-FFF2-40B4-BE49-F238E27FC236}">
-                <a16:creationId xmlns:a16="http://schemas.microsoft.com/office/drawing/2014/main" id="{44FD813C-B4F7-411D-BDD0-ADC91F056A86}"/>
+                <a16:creationId xmlns:a16="http://schemas.microsoft.com/office/drawing/2014/main" id="{697E7225-FF30-42E7-8EE2-5E88F4B0FCC9}"/>
               </a:ext>
             </a:extLst>
           </p:cNvPr>
@@ -41260,7 +42124,7 @@
           <p:cNvPr id="2" name="">
             <a:extLst xmlns:a="http://schemas.openxmlformats.org/drawingml/2006/main">
               <a:ext uri="{FF2B5EF4-FFF2-40B4-BE49-F238E27FC236}">
-                <a16:creationId xmlns:a16="http://schemas.microsoft.com/office/drawing/2014/main" id="{ABD7F0A8-894B-42FC-92E4-9E971977D758}"/>
+                <a16:creationId xmlns:a16="http://schemas.microsoft.com/office/drawing/2014/main" id="{81EB77F2-B187-4B6E-871E-A5A69D83C662}"/>
               </a:ext>
             </a:extLst>
           </p:cNvPr>
@@ -41418,7 +42282,7 @@
           <p:cNvPr id="3" name="">
             <a:extLst xmlns:a="http://schemas.openxmlformats.org/drawingml/2006/main">
               <a:ext uri="{FF2B5EF4-FFF2-40B4-BE49-F238E27FC236}">
-                <a16:creationId xmlns:a16="http://schemas.microsoft.com/office/drawing/2014/main" id="{5F2C6682-EF93-4622-9D24-A09D2FE9B0A3}"/>
+                <a16:creationId xmlns:a16="http://schemas.microsoft.com/office/drawing/2014/main" id="{9E3CE4F5-71E3-4A90-8AEF-69B36DF6A02A}"/>
               </a:ext>
             </a:extLst>
           </p:cNvPr>
@@ -41566,7 +42430,7 @@
                 <a:ea typeface="Arial"/>
                 <a:cs typeface="Arial"/>
               </a:rPr>
-              <a:t>Ora në dy ekrane</a:t>
+              <a:t>Rasti 1 · Lista dhe detajet</a:t>
             </a:r>
           </a:p>
         </p:txBody>
@@ -41576,7 +42440,7 @@
           <p:cNvPr id="4" name="">
             <a:extLst xmlns:a="http://schemas.openxmlformats.org/drawingml/2006/main">
               <a:ext uri="{FF2B5EF4-FFF2-40B4-BE49-F238E27FC236}">
-                <a16:creationId xmlns:a16="http://schemas.microsoft.com/office/drawing/2014/main" id="{AAE9746D-25DC-444F-A685-4A1BBADEDFD3}"/>
+                <a16:creationId xmlns:a16="http://schemas.microsoft.com/office/drawing/2014/main" id="{E3FD4AFC-3B69-4E9E-B55C-C202AA8E3E24}"/>
               </a:ext>
             </a:extLst>
           </p:cNvPr>
@@ -41586,7 +42450,7 @@
           <p:nvPr/>
         </p:nvPicPr>
         <p:blipFill>
-          <a:blip xmlns:r="http://schemas.openxmlformats.org/officeDocument/2006/relationships" xmlns:a="http://schemas.openxmlformats.org/drawingml/2006/main" r:embed="Rf0ad5cd567024fdc"/>
+          <a:blip xmlns:r="http://schemas.openxmlformats.org/officeDocument/2006/relationships" xmlns:a="http://schemas.openxmlformats.org/drawingml/2006/main" r:embed="Rf19da9857194472c"/>
           <a:stretch xmlns:a="http://schemas.openxmlformats.org/drawingml/2006/main"/>
         </p:blipFill>
         <p:spPr>
@@ -41604,7 +42468,7 @@
           <p:cNvPr id="5" name="">
             <a:extLst xmlns:a="http://schemas.openxmlformats.org/drawingml/2006/main">
               <a:ext uri="{FF2B5EF4-FFF2-40B4-BE49-F238E27FC236}">
-                <a16:creationId xmlns:a16="http://schemas.microsoft.com/office/drawing/2014/main" id="{1C0B2957-0726-41EE-B5A9-FC3EBAB872F5}"/>
+                <a16:creationId xmlns:a16="http://schemas.microsoft.com/office/drawing/2014/main" id="{CEB9C9FD-52D1-4AB4-ABF3-B91D021E246A}"/>
               </a:ext>
             </a:extLst>
           </p:cNvPr>
@@ -41762,7 +42626,7 @@
           <p:cNvPr id="6" name="">
             <a:extLst xmlns:a="http://schemas.openxmlformats.org/drawingml/2006/main">
               <a:ext uri="{FF2B5EF4-FFF2-40B4-BE49-F238E27FC236}">
-                <a16:creationId xmlns:a16="http://schemas.microsoft.com/office/drawing/2014/main" id="{834B7E31-AC8B-4B71-96F9-307B4F5547E4}"/>
+                <a16:creationId xmlns:a16="http://schemas.microsoft.com/office/drawing/2014/main" id="{0EA8DDC2-7CA3-4DE0-88EC-A18F4F3A2ED6}"/>
               </a:ext>
             </a:extLst>
           </p:cNvPr>
@@ -41920,7 +42784,7 @@
           <p:cNvPr id="7" name="">
             <a:extLst xmlns:a="http://schemas.openxmlformats.org/drawingml/2006/main">
               <a:ext uri="{FF2B5EF4-FFF2-40B4-BE49-F238E27FC236}">
-                <a16:creationId xmlns:a16="http://schemas.microsoft.com/office/drawing/2014/main" id="{94C91394-2695-4208-B699-267720E1A573}"/>
+                <a16:creationId xmlns:a16="http://schemas.microsoft.com/office/drawing/2014/main" id="{F2045DB2-BE7C-4767-8605-6B59211D8DD9}"/>
               </a:ext>
             </a:extLst>
           </p:cNvPr>
@@ -42078,7 +42942,7 @@
           <p:cNvPr id="8" name="">
             <a:extLst xmlns:a="http://schemas.openxmlformats.org/drawingml/2006/main">
               <a:ext uri="{FF2B5EF4-FFF2-40B4-BE49-F238E27FC236}">
-                <a16:creationId xmlns:a16="http://schemas.microsoft.com/office/drawing/2014/main" id="{4F4E8ACA-90AD-49DF-9373-2DBBD7ACB2BC}"/>
+                <a16:creationId xmlns:a16="http://schemas.microsoft.com/office/drawing/2014/main" id="{EDFB4841-BD7D-49D0-90E9-D8120664BB07}"/>
               </a:ext>
             </a:extLst>
           </p:cNvPr>
@@ -42236,7 +43100,7 @@
           <p:cNvPr id="9" name="">
             <a:extLst xmlns:a="http://schemas.openxmlformats.org/drawingml/2006/main">
               <a:ext uri="{FF2B5EF4-FFF2-40B4-BE49-F238E27FC236}">
-                <a16:creationId xmlns:a16="http://schemas.microsoft.com/office/drawing/2014/main" id="{2D9DAA24-E2EA-428B-B58B-8350D2403CFE}"/>
+                <a16:creationId xmlns:a16="http://schemas.microsoft.com/office/drawing/2014/main" id="{ABA83F51-70D0-4D60-A0FA-0BD9A4FE31F6}"/>
               </a:ext>
             </a:extLst>
           </p:cNvPr>
@@ -42394,7 +43258,7 @@
           <p:cNvPr id="10" name="">
             <a:extLst xmlns:a="http://schemas.openxmlformats.org/drawingml/2006/main">
               <a:ext uri="{FF2B5EF4-FFF2-40B4-BE49-F238E27FC236}">
-                <a16:creationId xmlns:a16="http://schemas.microsoft.com/office/drawing/2014/main" id="{4BAE2722-750B-44A1-980A-9BFB4B731151}"/>
+                <a16:creationId xmlns:a16="http://schemas.microsoft.com/office/drawing/2014/main" id="{33C399E6-B8BB-4BB8-8160-69E98F4262B2}"/>
               </a:ext>
             </a:extLst>
           </p:cNvPr>
@@ -42552,7 +43416,7 @@
           <p:cNvPr id="11" name="">
             <a:extLst xmlns:a="http://schemas.openxmlformats.org/drawingml/2006/main">
               <a:ext uri="{FF2B5EF4-FFF2-40B4-BE49-F238E27FC236}">
-                <a16:creationId xmlns:a16="http://schemas.microsoft.com/office/drawing/2014/main" id="{745E7B6A-0025-4562-BBB0-D6481009FB98}"/>
+                <a16:creationId xmlns:a16="http://schemas.microsoft.com/office/drawing/2014/main" id="{49D2A88F-72DB-4603-9988-E7596E425AF0}"/>
               </a:ext>
             </a:extLst>
           </p:cNvPr>
@@ -42710,7 +43574,7 @@
           <p:cNvPr id="12" name="">
             <a:extLst xmlns:a="http://schemas.openxmlformats.org/drawingml/2006/main">
               <a:ext uri="{FF2B5EF4-FFF2-40B4-BE49-F238E27FC236}">
-                <a16:creationId xmlns:a16="http://schemas.microsoft.com/office/drawing/2014/main" id="{06275641-CCC6-46A3-9F01-36BD773AFA8A}"/>
+                <a16:creationId xmlns:a16="http://schemas.microsoft.com/office/drawing/2014/main" id="{325F40F5-571D-4CCB-AD0C-7EBF86B0F998}"/>
               </a:ext>
             </a:extLst>
           </p:cNvPr>
@@ -42868,7 +43732,7 @@
           <p:cNvPr id="13" name="">
             <a:extLst xmlns:a="http://schemas.openxmlformats.org/drawingml/2006/main">
               <a:ext uri="{FF2B5EF4-FFF2-40B4-BE49-F238E27FC236}">
-                <a16:creationId xmlns:a16="http://schemas.microsoft.com/office/drawing/2014/main" id="{8447B21A-1BBC-43DD-A747-0CD9DCE06A4F}"/>
+                <a16:creationId xmlns:a16="http://schemas.microsoft.com/office/drawing/2014/main" id="{D7DD7189-B246-4B59-9A55-6F6C6063F11D}"/>
               </a:ext>
             </a:extLst>
           </p:cNvPr>
@@ -43024,7 +43888,7 @@
     </p:spTree>
     <p:extLst>
       <p:ext uri="{BB962C8B-B14F-4D97-AF65-F5344CB8AC3E}">
-        <p14:creationId xmlns:p14="http://schemas.microsoft.com/office/powerpoint/2010/main" val="726476099"/>
+        <p14:creationId xmlns:p14="http://schemas.microsoft.com/office/powerpoint/2010/main" val="1530564076"/>
       </p:ext>
     </p:extLst>
   </p:cSld>
@@ -43055,7 +43919,7 @@
           <p:cNvPr id="14" name="">
             <a:extLst xmlns:a="http://schemas.openxmlformats.org/drawingml/2006/main">
               <a:ext uri="{FF2B5EF4-FFF2-40B4-BE49-F238E27FC236}">
-                <a16:creationId xmlns:a16="http://schemas.microsoft.com/office/drawing/2014/main" id="{2FD51421-0B08-4289-8118-EFE39C27AA75}"/>
+                <a16:creationId xmlns:a16="http://schemas.microsoft.com/office/drawing/2014/main" id="{50448164-55AF-4826-85C5-ACE482E478D4}"/>
               </a:ext>
             </a:extLst>
           </p:cNvPr>
@@ -43213,7 +44077,7 @@
           <p:cNvPr id="2" name="">
             <a:extLst xmlns:a="http://schemas.openxmlformats.org/drawingml/2006/main">
               <a:ext uri="{FF2B5EF4-FFF2-40B4-BE49-F238E27FC236}">
-                <a16:creationId xmlns:a16="http://schemas.microsoft.com/office/drawing/2014/main" id="{A6477197-B33C-4455-BF20-0919900A3393}"/>
+                <a16:creationId xmlns:a16="http://schemas.microsoft.com/office/drawing/2014/main" id="{D235B62B-236D-4E75-9A2E-B9ACC90CF499}"/>
               </a:ext>
             </a:extLst>
           </p:cNvPr>
@@ -43371,7 +44235,7 @@
           <p:cNvPr id="3" name="">
             <a:extLst xmlns:a="http://schemas.openxmlformats.org/drawingml/2006/main">
               <a:ext uri="{FF2B5EF4-FFF2-40B4-BE49-F238E27FC236}">
-                <a16:creationId xmlns:a16="http://schemas.microsoft.com/office/drawing/2014/main" id="{1C97D5C3-F030-4AAB-828A-083D548D606E}"/>
+                <a16:creationId xmlns:a16="http://schemas.microsoft.com/office/drawing/2014/main" id="{B52690A4-724C-49A8-BBF1-D245CC76FC72}"/>
               </a:ext>
             </a:extLst>
           </p:cNvPr>
@@ -43519,7 +44383,7 @@
                 <a:ea typeface="Arial"/>
                 <a:cs typeface="Arial"/>
               </a:rPr>
-              <a:t>Ora në dy ekrane</a:t>
+              <a:t>Rasti 1 · Lista dhe detajet</a:t>
             </a:r>
           </a:p>
         </p:txBody>
@@ -43529,7 +44393,7 @@
           <p:cNvPr id="4" name="">
             <a:extLst xmlns:a="http://schemas.openxmlformats.org/drawingml/2006/main">
               <a:ext uri="{FF2B5EF4-FFF2-40B4-BE49-F238E27FC236}">
-                <a16:creationId xmlns:a16="http://schemas.microsoft.com/office/drawing/2014/main" id="{C077E972-3F43-4293-AF28-4BC7123ECF25}"/>
+                <a16:creationId xmlns:a16="http://schemas.microsoft.com/office/drawing/2014/main" id="{B97752FE-2061-4F7C-9596-737CB8F0A10A}"/>
               </a:ext>
             </a:extLst>
           </p:cNvPr>
@@ -43539,7 +44403,7 @@
           <p:nvPr/>
         </p:nvPicPr>
         <p:blipFill>
-          <a:blip xmlns:r="http://schemas.openxmlformats.org/officeDocument/2006/relationships" xmlns:a="http://schemas.openxmlformats.org/drawingml/2006/main" r:embed="R64074d3e2acd4b61"/>
+          <a:blip xmlns:r="http://schemas.openxmlformats.org/officeDocument/2006/relationships" xmlns:a="http://schemas.openxmlformats.org/drawingml/2006/main" r:embed="R18c6ecdb8bec4a87"/>
           <a:stretch xmlns:a="http://schemas.openxmlformats.org/drawingml/2006/main"/>
         </p:blipFill>
         <p:spPr>
@@ -43557,7 +44421,7 @@
           <p:cNvPr id="5" name="">
             <a:extLst xmlns:a="http://schemas.openxmlformats.org/drawingml/2006/main">
               <a:ext uri="{FF2B5EF4-FFF2-40B4-BE49-F238E27FC236}">
-                <a16:creationId xmlns:a16="http://schemas.microsoft.com/office/drawing/2014/main" id="{DD4BBEB4-71CF-4F4D-92F4-5B3297C83A00}"/>
+                <a16:creationId xmlns:a16="http://schemas.microsoft.com/office/drawing/2014/main" id="{FA45C5CF-981B-4B95-9B2E-E1BDB6C03431}"/>
               </a:ext>
             </a:extLst>
           </p:cNvPr>
@@ -43715,7 +44579,7 @@
           <p:cNvPr id="6" name="">
             <a:extLst xmlns:a="http://schemas.openxmlformats.org/drawingml/2006/main">
               <a:ext uri="{FF2B5EF4-FFF2-40B4-BE49-F238E27FC236}">
-                <a16:creationId xmlns:a16="http://schemas.microsoft.com/office/drawing/2014/main" id="{A5F7C166-E7B6-4AE5-BE5C-040D7290B796}"/>
+                <a16:creationId xmlns:a16="http://schemas.microsoft.com/office/drawing/2014/main" id="{3DDECB0B-6835-401A-B70E-C8CFE693D678}"/>
               </a:ext>
             </a:extLst>
           </p:cNvPr>
@@ -43873,7 +44737,7 @@
           <p:cNvPr id="7" name="">
             <a:extLst xmlns:a="http://schemas.openxmlformats.org/drawingml/2006/main">
               <a:ext uri="{FF2B5EF4-FFF2-40B4-BE49-F238E27FC236}">
-                <a16:creationId xmlns:a16="http://schemas.microsoft.com/office/drawing/2014/main" id="{FD4A0E7A-AC1C-4934-A593-3ADC716D98CB}"/>
+                <a16:creationId xmlns:a16="http://schemas.microsoft.com/office/drawing/2014/main" id="{5F817FBB-6DDD-4173-A48B-FE8BACA0A7B5}"/>
               </a:ext>
             </a:extLst>
           </p:cNvPr>
@@ -43883,7 +44747,7 @@
           <p:nvPr/>
         </p:nvPicPr>
         <p:blipFill>
-          <a:blip xmlns:r="http://schemas.openxmlformats.org/officeDocument/2006/relationships" xmlns:a="http://schemas.openxmlformats.org/drawingml/2006/main" r:embed="Rfaef16d52bc145b4"/>
+          <a:blip xmlns:r="http://schemas.openxmlformats.org/officeDocument/2006/relationships" xmlns:a="http://schemas.openxmlformats.org/drawingml/2006/main" r:embed="Rf04676c8746741b9"/>
           <a:stretch xmlns:a="http://schemas.openxmlformats.org/drawingml/2006/main"/>
         </p:blipFill>
         <p:spPr>
@@ -43901,7 +44765,7 @@
           <p:cNvPr id="8" name="">
             <a:extLst xmlns:a="http://schemas.openxmlformats.org/drawingml/2006/main">
               <a:ext uri="{FF2B5EF4-FFF2-40B4-BE49-F238E27FC236}">
-                <a16:creationId xmlns:a16="http://schemas.microsoft.com/office/drawing/2014/main" id="{6073D385-64BA-4007-888F-CEA529D3A1DD}"/>
+                <a16:creationId xmlns:a16="http://schemas.microsoft.com/office/drawing/2014/main" id="{7BA802B3-166C-46A5-970D-7E4FF2E844ED}"/>
               </a:ext>
             </a:extLst>
           </p:cNvPr>
@@ -44059,7 +44923,7 @@
           <p:cNvPr id="9" name="">
             <a:extLst xmlns:a="http://schemas.openxmlformats.org/drawingml/2006/main">
               <a:ext uri="{FF2B5EF4-FFF2-40B4-BE49-F238E27FC236}">
-                <a16:creationId xmlns:a16="http://schemas.microsoft.com/office/drawing/2014/main" id="{36D640EA-2C91-42D3-968E-9AB728AAFC75}"/>
+                <a16:creationId xmlns:a16="http://schemas.microsoft.com/office/drawing/2014/main" id="{AB48B4DE-6D39-4BE7-A0E1-EBA749CF5983}"/>
               </a:ext>
             </a:extLst>
           </p:cNvPr>
@@ -44217,7 +45081,7 @@
           <p:cNvPr id="10" name="">
             <a:extLst xmlns:a="http://schemas.openxmlformats.org/drawingml/2006/main">
               <a:ext uri="{FF2B5EF4-FFF2-40B4-BE49-F238E27FC236}">
-                <a16:creationId xmlns:a16="http://schemas.microsoft.com/office/drawing/2014/main" id="{CCEACF89-E15C-439A-B257-553C1410BD2E}"/>
+                <a16:creationId xmlns:a16="http://schemas.microsoft.com/office/drawing/2014/main" id="{A0CA31C9-8F85-47A6-9713-7422BE36AD1A}"/>
               </a:ext>
             </a:extLst>
           </p:cNvPr>
@@ -44398,7 +45262,7 @@
           <p:cNvPr id="11" name="">
             <a:extLst xmlns:a="http://schemas.openxmlformats.org/drawingml/2006/main">
               <a:ext uri="{FF2B5EF4-FFF2-40B4-BE49-F238E27FC236}">
-                <a16:creationId xmlns:a16="http://schemas.microsoft.com/office/drawing/2014/main" id="{D7D5C9D8-5F70-4902-8A60-AEBD1E0F8937}"/>
+                <a16:creationId xmlns:a16="http://schemas.microsoft.com/office/drawing/2014/main" id="{C7A76935-4276-4BD3-865E-CF84BA179DF2}"/>
               </a:ext>
             </a:extLst>
           </p:cNvPr>
@@ -44556,7 +45420,7 @@
           <p:cNvPr id="12" name="">
             <a:extLst xmlns:a="http://schemas.openxmlformats.org/drawingml/2006/main">
               <a:ext uri="{FF2B5EF4-FFF2-40B4-BE49-F238E27FC236}">
-                <a16:creationId xmlns:a16="http://schemas.microsoft.com/office/drawing/2014/main" id="{3FEF1FEA-4846-4D30-9A60-0C4062715A8E}"/>
+                <a16:creationId xmlns:a16="http://schemas.microsoft.com/office/drawing/2014/main" id="{F3EE421D-27C5-479F-B702-4187FEA15A19}"/>
               </a:ext>
             </a:extLst>
           </p:cNvPr>
@@ -44760,7 +45624,7 @@
           <p:cNvPr id="13" name="">
             <a:extLst xmlns:a="http://schemas.openxmlformats.org/drawingml/2006/main">
               <a:ext uri="{FF2B5EF4-FFF2-40B4-BE49-F238E27FC236}">
-                <a16:creationId xmlns:a16="http://schemas.microsoft.com/office/drawing/2014/main" id="{DBB44F0F-084D-43BD-A5E0-DDF3500EB74E}"/>
+                <a16:creationId xmlns:a16="http://schemas.microsoft.com/office/drawing/2014/main" id="{58FAE527-FF76-4EDE-AB4D-332E88E295CF}"/>
               </a:ext>
             </a:extLst>
           </p:cNvPr>
@@ -44916,7 +45780,7 @@
     </p:spTree>
     <p:extLst>
       <p:ext uri="{BB962C8B-B14F-4D97-AF65-F5344CB8AC3E}">
-        <p14:creationId xmlns:p14="http://schemas.microsoft.com/office/powerpoint/2010/main" val="2118586454"/>
+        <p14:creationId xmlns:p14="http://schemas.microsoft.com/office/powerpoint/2010/main" val="331454200"/>
       </p:ext>
     </p:extLst>
   </p:cSld>
@@ -44947,7 +45811,7 @@
           <p:cNvPr id="13" name="">
             <a:extLst xmlns:a="http://schemas.openxmlformats.org/drawingml/2006/main">
               <a:ext uri="{FF2B5EF4-FFF2-40B4-BE49-F238E27FC236}">
-                <a16:creationId xmlns:a16="http://schemas.microsoft.com/office/drawing/2014/main" id="{F6C3D916-BE65-4D17-B051-6AC9CA515B10}"/>
+                <a16:creationId xmlns:a16="http://schemas.microsoft.com/office/drawing/2014/main" id="{E464EDE7-A905-4F72-B67C-8B1BB08D5967}"/>
               </a:ext>
             </a:extLst>
           </p:cNvPr>
@@ -45105,7 +45969,7 @@
           <p:cNvPr id="2" name="">
             <a:extLst xmlns:a="http://schemas.openxmlformats.org/drawingml/2006/main">
               <a:ext uri="{FF2B5EF4-FFF2-40B4-BE49-F238E27FC236}">
-                <a16:creationId xmlns:a16="http://schemas.microsoft.com/office/drawing/2014/main" id="{4E147D3F-F35A-4765-ADBC-DD3502D454F2}"/>
+                <a16:creationId xmlns:a16="http://schemas.microsoft.com/office/drawing/2014/main" id="{E85E8F15-22B1-401F-A6FB-6234894E4521}"/>
               </a:ext>
             </a:extLst>
           </p:cNvPr>
@@ -45263,7 +46127,7 @@
           <p:cNvPr id="3" name="">
             <a:extLst xmlns:a="http://schemas.openxmlformats.org/drawingml/2006/main">
               <a:ext uri="{FF2B5EF4-FFF2-40B4-BE49-F238E27FC236}">
-                <a16:creationId xmlns:a16="http://schemas.microsoft.com/office/drawing/2014/main" id="{1E218C30-B78B-45E3-8859-D59459A0DEEA}"/>
+                <a16:creationId xmlns:a16="http://schemas.microsoft.com/office/drawing/2014/main" id="{11033082-EADD-49A2-9070-FF1CF7696949}"/>
               </a:ext>
             </a:extLst>
           </p:cNvPr>
@@ -45411,7 +46275,7 @@
                 <a:ea typeface="Arial"/>
                 <a:cs typeface="Arial"/>
               </a:rPr>
-              <a:t>I njëjti udhëtim, një burim i qartë</a:t>
+              <a:t>Rasti 1 · Lista dhe detajet</a:t>
             </a:r>
           </a:p>
         </p:txBody>
@@ -45421,7 +46285,7 @@
           <p:cNvPr id="4" name="">
             <a:extLst xmlns:a="http://schemas.openxmlformats.org/drawingml/2006/main">
               <a:ext uri="{FF2B5EF4-FFF2-40B4-BE49-F238E27FC236}">
-                <a16:creationId xmlns:a16="http://schemas.microsoft.com/office/drawing/2014/main" id="{98BFC8F4-08AE-4C9A-BA2D-02E1BB5BA2F5}"/>
+                <a16:creationId xmlns:a16="http://schemas.microsoft.com/office/drawing/2014/main" id="{1481093F-205B-4FA3-BF93-6EC4EA0B8641}"/>
               </a:ext>
             </a:extLst>
           </p:cNvPr>
@@ -45431,7 +46295,7 @@
           <p:nvPr/>
         </p:nvPicPr>
         <p:blipFill>
-          <a:blip xmlns:r="http://schemas.openxmlformats.org/officeDocument/2006/relationships" xmlns:a="http://schemas.openxmlformats.org/drawingml/2006/main" r:embed="R49464c2da1dc4db6"/>
+          <a:blip xmlns:r="http://schemas.openxmlformats.org/officeDocument/2006/relationships" xmlns:a="http://schemas.openxmlformats.org/drawingml/2006/main" r:embed="R9b3511233197476d"/>
           <a:stretch xmlns:a="http://schemas.openxmlformats.org/drawingml/2006/main"/>
         </p:blipFill>
         <p:spPr>
@@ -45449,7 +46313,7 @@
           <p:cNvPr id="5" name="">
             <a:extLst xmlns:a="http://schemas.openxmlformats.org/drawingml/2006/main">
               <a:ext uri="{FF2B5EF4-FFF2-40B4-BE49-F238E27FC236}">
-                <a16:creationId xmlns:a16="http://schemas.microsoft.com/office/drawing/2014/main" id="{1F28C09C-A287-43BF-B3E2-58CFE0324FC8}"/>
+                <a16:creationId xmlns:a16="http://schemas.microsoft.com/office/drawing/2014/main" id="{61052A26-4004-4022-8C28-BC2EE3916D2F}"/>
               </a:ext>
             </a:extLst>
           </p:cNvPr>
@@ -45607,7 +46471,7 @@
           <p:cNvPr id="6" name="">
             <a:extLst xmlns:a="http://schemas.openxmlformats.org/drawingml/2006/main">
               <a:ext uri="{FF2B5EF4-FFF2-40B4-BE49-F238E27FC236}">
-                <a16:creationId xmlns:a16="http://schemas.microsoft.com/office/drawing/2014/main" id="{B1105AB9-27B1-45A2-81F3-96E5D24E187C}"/>
+                <a16:creationId xmlns:a16="http://schemas.microsoft.com/office/drawing/2014/main" id="{FCE7911C-9B49-4CFC-A0A3-757363E1DE7E}"/>
               </a:ext>
             </a:extLst>
           </p:cNvPr>
@@ -45765,7 +46629,7 @@
           <p:cNvPr id="7" name="">
             <a:extLst xmlns:a="http://schemas.openxmlformats.org/drawingml/2006/main">
               <a:ext uri="{FF2B5EF4-FFF2-40B4-BE49-F238E27FC236}">
-                <a16:creationId xmlns:a16="http://schemas.microsoft.com/office/drawing/2014/main" id="{9D4A6A01-479F-43A2-8469-D8796717324A}"/>
+                <a16:creationId xmlns:a16="http://schemas.microsoft.com/office/drawing/2014/main" id="{BC4B7FEA-99C8-4726-A818-C8AC846FDE69}"/>
               </a:ext>
             </a:extLst>
           </p:cNvPr>
@@ -45775,7 +46639,7 @@
           <p:nvPr/>
         </p:nvPicPr>
         <p:blipFill>
-          <a:blip xmlns:r="http://schemas.openxmlformats.org/officeDocument/2006/relationships" xmlns:a="http://schemas.openxmlformats.org/drawingml/2006/main" r:embed="R6d1ad862941640a8"/>
+          <a:blip xmlns:r="http://schemas.openxmlformats.org/officeDocument/2006/relationships" xmlns:a="http://schemas.openxmlformats.org/drawingml/2006/main" r:embed="R51002728396b48eb"/>
           <a:stretch xmlns:a="http://schemas.openxmlformats.org/drawingml/2006/main"/>
         </p:blipFill>
         <p:spPr>
@@ -45793,7 +46657,7 @@
           <p:cNvPr id="8" name="">
             <a:extLst xmlns:a="http://schemas.openxmlformats.org/drawingml/2006/main">
               <a:ext uri="{FF2B5EF4-FFF2-40B4-BE49-F238E27FC236}">
-                <a16:creationId xmlns:a16="http://schemas.microsoft.com/office/drawing/2014/main" id="{3A12C779-144A-496C-BF12-C56B6B7AA2E2}"/>
+                <a16:creationId xmlns:a16="http://schemas.microsoft.com/office/drawing/2014/main" id="{89A4070D-A3AC-4ACC-AC14-3CF17B8151C2}"/>
               </a:ext>
             </a:extLst>
           </p:cNvPr>
@@ -45951,7 +46815,7 @@
           <p:cNvPr id="9" name="">
             <a:extLst xmlns:a="http://schemas.openxmlformats.org/drawingml/2006/main">
               <a:ext uri="{FF2B5EF4-FFF2-40B4-BE49-F238E27FC236}">
-                <a16:creationId xmlns:a16="http://schemas.microsoft.com/office/drawing/2014/main" id="{7C19A084-C13E-45B1-83D8-C9CB7021C473}"/>
+                <a16:creationId xmlns:a16="http://schemas.microsoft.com/office/drawing/2014/main" id="{390E3CAF-8D68-442C-84A5-115F68DF6DF4}"/>
               </a:ext>
             </a:extLst>
           </p:cNvPr>
@@ -46109,7 +46973,7 @@
           <p:cNvPr id="10" name="">
             <a:extLst xmlns:a="http://schemas.openxmlformats.org/drawingml/2006/main">
               <a:ext uri="{FF2B5EF4-FFF2-40B4-BE49-F238E27FC236}">
-                <a16:creationId xmlns:a16="http://schemas.microsoft.com/office/drawing/2014/main" id="{0A3AB741-A847-46A3-A04B-367BA664C685}"/>
+                <a16:creationId xmlns:a16="http://schemas.microsoft.com/office/drawing/2014/main" id="{F703916C-B7A9-47AD-8BC5-162D78BFCDE2}"/>
               </a:ext>
             </a:extLst>
           </p:cNvPr>
@@ -46295,7 +47159,7 @@
           <p:cNvPr id="11" name="">
             <a:extLst xmlns:a="http://schemas.openxmlformats.org/drawingml/2006/main">
               <a:ext uri="{FF2B5EF4-FFF2-40B4-BE49-F238E27FC236}">
-                <a16:creationId xmlns:a16="http://schemas.microsoft.com/office/drawing/2014/main" id="{19531C1A-03F9-494B-AA43-36EBE8FF0186}"/>
+                <a16:creationId xmlns:a16="http://schemas.microsoft.com/office/drawing/2014/main" id="{2185A24D-A310-4C9E-BE89-84D1AC17B408}"/>
               </a:ext>
             </a:extLst>
           </p:cNvPr>
@@ -46453,7 +47317,7 @@
           <p:cNvPr id="12" name="">
             <a:extLst xmlns:a="http://schemas.openxmlformats.org/drawingml/2006/main">
               <a:ext uri="{FF2B5EF4-FFF2-40B4-BE49-F238E27FC236}">
-                <a16:creationId xmlns:a16="http://schemas.microsoft.com/office/drawing/2014/main" id="{20A5AA84-CE5A-4C68-AACA-0DB802B440A2}"/>
+                <a16:creationId xmlns:a16="http://schemas.microsoft.com/office/drawing/2014/main" id="{37FDD0FD-969C-447E-B231-EC22F28371F0}"/>
               </a:ext>
             </a:extLst>
           </p:cNvPr>
@@ -46609,7 +47473,7 @@
     </p:spTree>
     <p:extLst>
       <p:ext uri="{BB962C8B-B14F-4D97-AF65-F5344CB8AC3E}">
-        <p14:creationId xmlns:p14="http://schemas.microsoft.com/office/powerpoint/2010/main" val="114625447"/>
+        <p14:creationId xmlns:p14="http://schemas.microsoft.com/office/powerpoint/2010/main" val="481999784"/>
       </p:ext>
     </p:extLst>
   </p:cSld>
@@ -46640,7 +47504,7 @@
           <p:cNvPr id="11" name="">
             <a:extLst xmlns:a="http://schemas.openxmlformats.org/drawingml/2006/main">
               <a:ext uri="{FF2B5EF4-FFF2-40B4-BE49-F238E27FC236}">
-                <a16:creationId xmlns:a16="http://schemas.microsoft.com/office/drawing/2014/main" id="{884ABFF0-883D-43B3-A365-C197490DFDAF}"/>
+                <a16:creationId xmlns:a16="http://schemas.microsoft.com/office/drawing/2014/main" id="{A81B54D0-559C-4A0F-9291-E50514294E64}"/>
               </a:ext>
             </a:extLst>
           </p:cNvPr>
@@ -46798,7 +47662,7 @@
           <p:cNvPr id="2" name="">
             <a:extLst xmlns:a="http://schemas.openxmlformats.org/drawingml/2006/main">
               <a:ext uri="{FF2B5EF4-FFF2-40B4-BE49-F238E27FC236}">
-                <a16:creationId xmlns:a16="http://schemas.microsoft.com/office/drawing/2014/main" id="{BAA32489-8251-426F-985E-058B4A4DFAE2}"/>
+                <a16:creationId xmlns:a16="http://schemas.microsoft.com/office/drawing/2014/main" id="{DF812666-28FE-41FC-B357-5B9FA746D630}"/>
               </a:ext>
             </a:extLst>
           </p:cNvPr>
@@ -46956,7 +47820,7 @@
           <p:cNvPr id="3" name="">
             <a:extLst xmlns:a="http://schemas.openxmlformats.org/drawingml/2006/main">
               <a:ext uri="{FF2B5EF4-FFF2-40B4-BE49-F238E27FC236}">
-                <a16:creationId xmlns:a16="http://schemas.microsoft.com/office/drawing/2014/main" id="{2AC1A776-AE0A-47F3-9549-5241F10790FE}"/>
+                <a16:creationId xmlns:a16="http://schemas.microsoft.com/office/drawing/2014/main" id="{5D785C9C-49CD-47B0-8BA5-C481CAAA103A}"/>
               </a:ext>
             </a:extLst>
           </p:cNvPr>
@@ -47114,7 +47978,7 @@
           <p:cNvPr id="4" name="">
             <a:extLst xmlns:a="http://schemas.openxmlformats.org/drawingml/2006/main">
               <a:ext uri="{FF2B5EF4-FFF2-40B4-BE49-F238E27FC236}">
-                <a16:creationId xmlns:a16="http://schemas.microsoft.com/office/drawing/2014/main" id="{83ACF81D-B197-4EC1-8F8F-51A375CC6E0C}"/>
+                <a16:creationId xmlns:a16="http://schemas.microsoft.com/office/drawing/2014/main" id="{E9E947E8-6B01-49AE-9788-B140FC38E8E9}"/>
               </a:ext>
             </a:extLst>
           </p:cNvPr>
@@ -47272,7 +48136,7 @@
           <p:cNvPr id="5" name="">
             <a:extLst xmlns:a="http://schemas.openxmlformats.org/drawingml/2006/main">
               <a:ext uri="{FF2B5EF4-FFF2-40B4-BE49-F238E27FC236}">
-                <a16:creationId xmlns:a16="http://schemas.microsoft.com/office/drawing/2014/main" id="{13604C80-DEF8-413B-8D53-1F7E2D06CEED}"/>
+                <a16:creationId xmlns:a16="http://schemas.microsoft.com/office/drawing/2014/main" id="{48D41B66-DBC2-4B52-A60F-399DC68152A9}"/>
               </a:ext>
             </a:extLst>
           </p:cNvPr>
@@ -47430,7 +48294,7 @@
           <p:cNvPr id="6" name="">
             <a:extLst xmlns:a="http://schemas.openxmlformats.org/drawingml/2006/main">
               <a:ext uri="{FF2B5EF4-FFF2-40B4-BE49-F238E27FC236}">
-                <a16:creationId xmlns:a16="http://schemas.microsoft.com/office/drawing/2014/main" id="{FFB3DE6F-3969-4E5E-B84F-179881CCEDA3}"/>
+                <a16:creationId xmlns:a16="http://schemas.microsoft.com/office/drawing/2014/main" id="{DC71FD4B-8AE7-4962-87BD-DD917D526D7D}"/>
               </a:ext>
             </a:extLst>
           </p:cNvPr>
@@ -47588,7 +48452,7 @@
           <p:cNvPr id="7" name="">
             <a:extLst xmlns:a="http://schemas.openxmlformats.org/drawingml/2006/main">
               <a:ext uri="{FF2B5EF4-FFF2-40B4-BE49-F238E27FC236}">
-                <a16:creationId xmlns:a16="http://schemas.microsoft.com/office/drawing/2014/main" id="{400790B2-2BC1-42CC-A0B7-0AE7F7E616A7}"/>
+                <a16:creationId xmlns:a16="http://schemas.microsoft.com/office/drawing/2014/main" id="{4DB7A5B4-C108-4957-BA98-359C55285678}"/>
               </a:ext>
             </a:extLst>
           </p:cNvPr>
@@ -47746,7 +48610,7 @@
           <p:cNvPr id="8" name="">
             <a:extLst xmlns:a="http://schemas.openxmlformats.org/drawingml/2006/main">
               <a:ext uri="{FF2B5EF4-FFF2-40B4-BE49-F238E27FC236}">
-                <a16:creationId xmlns:a16="http://schemas.microsoft.com/office/drawing/2014/main" id="{BF560164-1AF6-4B2E-A39F-2FB054B4F98B}"/>
+                <a16:creationId xmlns:a16="http://schemas.microsoft.com/office/drawing/2014/main" id="{858D7792-80B2-492A-BCD4-37180F4D2024}"/>
               </a:ext>
             </a:extLst>
           </p:cNvPr>
@@ -47904,7 +48768,7 @@
           <p:cNvPr id="9" name="">
             <a:extLst xmlns:a="http://schemas.openxmlformats.org/drawingml/2006/main">
               <a:ext uri="{FF2B5EF4-FFF2-40B4-BE49-F238E27FC236}">
-                <a16:creationId xmlns:a16="http://schemas.microsoft.com/office/drawing/2014/main" id="{F71A2009-57A1-4FC3-B381-CB213BDAE4E5}"/>
+                <a16:creationId xmlns:a16="http://schemas.microsoft.com/office/drawing/2014/main" id="{E7C4466A-19A6-425F-8072-209C0DEB2EDF}"/>
               </a:ext>
             </a:extLst>
           </p:cNvPr>
@@ -48090,7 +48954,7 @@
           <p:cNvPr id="10" name="">
             <a:extLst xmlns:a="http://schemas.openxmlformats.org/drawingml/2006/main">
               <a:ext uri="{FF2B5EF4-FFF2-40B4-BE49-F238E27FC236}">
-                <a16:creationId xmlns:a16="http://schemas.microsoft.com/office/drawing/2014/main" id="{CEDF92EF-0869-4483-8681-D5C813E3CEA2}"/>
+                <a16:creationId xmlns:a16="http://schemas.microsoft.com/office/drawing/2014/main" id="{AC760178-F7A5-423B-8A08-9EFDCF4B71C4}"/>
               </a:ext>
             </a:extLst>
           </p:cNvPr>
@@ -48246,7 +49110,7 @@
     </p:spTree>
     <p:extLst>
       <p:ext uri="{BB962C8B-B14F-4D97-AF65-F5344CB8AC3E}">
-        <p14:creationId xmlns:p14="http://schemas.microsoft.com/office/powerpoint/2010/main" val="1571714377"/>
+        <p14:creationId xmlns:p14="http://schemas.microsoft.com/office/powerpoint/2010/main" val="2005110257"/>
       </p:ext>
     </p:extLst>
   </p:cSld>
@@ -48277,7 +49141,7 @@
           <p:cNvPr id="13" name="">
             <a:extLst xmlns:a="http://schemas.openxmlformats.org/drawingml/2006/main">
               <a:ext uri="{FF2B5EF4-FFF2-40B4-BE49-F238E27FC236}">
-                <a16:creationId xmlns:a16="http://schemas.microsoft.com/office/drawing/2014/main" id="{2948B2FD-82FD-41DC-8062-F7F132E16E27}"/>
+                <a16:creationId xmlns:a16="http://schemas.microsoft.com/office/drawing/2014/main" id="{39E8AF01-7B58-4282-AA45-6B0C5182E575}"/>
               </a:ext>
             </a:extLst>
           </p:cNvPr>
@@ -48435,7 +49299,7 @@
           <p:cNvPr id="2" name="">
             <a:extLst xmlns:a="http://schemas.openxmlformats.org/drawingml/2006/main">
               <a:ext uri="{FF2B5EF4-FFF2-40B4-BE49-F238E27FC236}">
-                <a16:creationId xmlns:a16="http://schemas.microsoft.com/office/drawing/2014/main" id="{557F38B1-3255-4331-9836-BF4F127A118E}"/>
+                <a16:creationId xmlns:a16="http://schemas.microsoft.com/office/drawing/2014/main" id="{148088A7-62FB-439E-A0FD-1FD7D2ED7C5D}"/>
               </a:ext>
             </a:extLst>
           </p:cNvPr>
@@ -48593,7 +49457,7 @@
           <p:cNvPr id="3" name="">
             <a:extLst xmlns:a="http://schemas.openxmlformats.org/drawingml/2006/main">
               <a:ext uri="{FF2B5EF4-FFF2-40B4-BE49-F238E27FC236}">
-                <a16:creationId xmlns:a16="http://schemas.microsoft.com/office/drawing/2014/main" id="{0C762CDE-C613-4A52-B163-77AAB71F8279}"/>
+                <a16:creationId xmlns:a16="http://schemas.microsoft.com/office/drawing/2014/main" id="{E783D690-8D09-4FC8-AE48-080781EF676D}"/>
               </a:ext>
             </a:extLst>
           </p:cNvPr>
@@ -48741,7 +49605,7 @@
                 <a:ea typeface="Arial"/>
                 <a:cs typeface="Arial"/>
               </a:rPr>
-              <a:t>Klasa vendos: çfarë duhet të ndodhë?</a:t>
+              <a:t>Rasti 2 · Pa vende</a:t>
             </a:r>
           </a:p>
         </p:txBody>
@@ -48751,7 +49615,7 @@
           <p:cNvPr id="4" name="">
             <a:extLst xmlns:a="http://schemas.openxmlformats.org/drawingml/2006/main">
               <a:ext uri="{FF2B5EF4-FFF2-40B4-BE49-F238E27FC236}">
-                <a16:creationId xmlns:a16="http://schemas.microsoft.com/office/drawing/2014/main" id="{76B51907-7262-472D-9330-7E88FF44E02E}"/>
+                <a16:creationId xmlns:a16="http://schemas.microsoft.com/office/drawing/2014/main" id="{383151D7-4E1E-4E37-8A13-5A6DF8F87168}"/>
               </a:ext>
             </a:extLst>
           </p:cNvPr>
@@ -48761,7 +49625,7 @@
           <p:nvPr/>
         </p:nvPicPr>
         <p:blipFill>
-          <a:blip xmlns:r="http://schemas.openxmlformats.org/officeDocument/2006/relationships" xmlns:a="http://schemas.openxmlformats.org/drawingml/2006/main" r:embed="R6a8782f2539c40ef"/>
+          <a:blip xmlns:r="http://schemas.openxmlformats.org/officeDocument/2006/relationships" xmlns:a="http://schemas.openxmlformats.org/drawingml/2006/main" r:embed="Rc6fe16985f5e485b"/>
           <a:stretch xmlns:a="http://schemas.openxmlformats.org/drawingml/2006/main"/>
         </p:blipFill>
         <p:spPr>
@@ -48779,7 +49643,7 @@
           <p:cNvPr id="5" name="">
             <a:extLst xmlns:a="http://schemas.openxmlformats.org/drawingml/2006/main">
               <a:ext uri="{FF2B5EF4-FFF2-40B4-BE49-F238E27FC236}">
-                <a16:creationId xmlns:a16="http://schemas.microsoft.com/office/drawing/2014/main" id="{D18A2004-6F33-44F7-9DB2-D8AF119C1F64}"/>
+                <a16:creationId xmlns:a16="http://schemas.microsoft.com/office/drawing/2014/main" id="{2969D48E-4EA2-4B1D-B2A6-5AB15C95F9A9}"/>
               </a:ext>
             </a:extLst>
           </p:cNvPr>
@@ -48937,7 +49801,7 @@
           <p:cNvPr id="6" name="">
             <a:extLst xmlns:a="http://schemas.openxmlformats.org/drawingml/2006/main">
               <a:ext uri="{FF2B5EF4-FFF2-40B4-BE49-F238E27FC236}">
-                <a16:creationId xmlns:a16="http://schemas.microsoft.com/office/drawing/2014/main" id="{71A825B2-C410-4888-9DDE-CD87712E4831}"/>
+                <a16:creationId xmlns:a16="http://schemas.microsoft.com/office/drawing/2014/main" id="{A397E263-DE10-4433-B114-7C0A7645D978}"/>
               </a:ext>
             </a:extLst>
           </p:cNvPr>
@@ -49085,7 +49949,7 @@
                 <a:ea typeface="Arial"/>
                 <a:cs typeface="Arial"/>
               </a:rPr>
-              <a:t>Çfarë mund t’i premtojmë Artës?</a:t>
+              <a:t>Çfarë i themi Artës kur ka 0 vende?</a:t>
             </a:r>
           </a:p>
         </p:txBody>
@@ -49095,7 +49959,7 @@
           <p:cNvPr id="7" name="">
             <a:extLst xmlns:a="http://schemas.openxmlformats.org/drawingml/2006/main">
               <a:ext uri="{FF2B5EF4-FFF2-40B4-BE49-F238E27FC236}">
-                <a16:creationId xmlns:a16="http://schemas.microsoft.com/office/drawing/2014/main" id="{1B6BE394-A629-45DB-B865-5D19FE1CFB54}"/>
+                <a16:creationId xmlns:a16="http://schemas.microsoft.com/office/drawing/2014/main" id="{2E8E42FD-4062-4831-9F17-88B20FBB45DB}"/>
               </a:ext>
             </a:extLst>
           </p:cNvPr>
@@ -49105,7 +49969,7 @@
           <p:nvPr/>
         </p:nvPicPr>
         <p:blipFill>
-          <a:blip xmlns:r="http://schemas.openxmlformats.org/officeDocument/2006/relationships" xmlns:a="http://schemas.openxmlformats.org/drawingml/2006/main" r:embed="Ra3169922bb114283"/>
+          <a:blip xmlns:r="http://schemas.openxmlformats.org/officeDocument/2006/relationships" xmlns:a="http://schemas.openxmlformats.org/drawingml/2006/main" r:embed="R464861ce426d44ea"/>
           <a:stretch xmlns:a="http://schemas.openxmlformats.org/drawingml/2006/main"/>
         </p:blipFill>
         <p:spPr>
@@ -49123,7 +49987,7 @@
           <p:cNvPr id="8" name="">
             <a:extLst xmlns:a="http://schemas.openxmlformats.org/drawingml/2006/main">
               <a:ext uri="{FF2B5EF4-FFF2-40B4-BE49-F238E27FC236}">
-                <a16:creationId xmlns:a16="http://schemas.microsoft.com/office/drawing/2014/main" id="{10F31E58-AB13-41F8-ABA8-C0DE7122D311}"/>
+                <a16:creationId xmlns:a16="http://schemas.microsoft.com/office/drawing/2014/main" id="{E94AA5CF-2F4E-4527-82F5-AD46BA47DC70}"/>
               </a:ext>
             </a:extLst>
           </p:cNvPr>
@@ -49281,7 +50145,7 @@
           <p:cNvPr id="9" name="">
             <a:extLst xmlns:a="http://schemas.openxmlformats.org/drawingml/2006/main">
               <a:ext uri="{FF2B5EF4-FFF2-40B4-BE49-F238E27FC236}">
-                <a16:creationId xmlns:a16="http://schemas.microsoft.com/office/drawing/2014/main" id="{D339551E-0308-465E-A4BC-C6A979F5EB5B}"/>
+                <a16:creationId xmlns:a16="http://schemas.microsoft.com/office/drawing/2014/main" id="{538CA238-B775-449D-8FA5-66162397C4E3}"/>
               </a:ext>
             </a:extLst>
           </p:cNvPr>
@@ -49439,7 +50303,7 @@
           <p:cNvPr id="10" name="">
             <a:extLst xmlns:a="http://schemas.openxmlformats.org/drawingml/2006/main">
               <a:ext uri="{FF2B5EF4-FFF2-40B4-BE49-F238E27FC236}">
-                <a16:creationId xmlns:a16="http://schemas.microsoft.com/office/drawing/2014/main" id="{5D80C9A3-8F3C-4034-B025-2E53E4090EC1}"/>
+                <a16:creationId xmlns:a16="http://schemas.microsoft.com/office/drawing/2014/main" id="{49E96A8B-9291-4792-8BCC-E0803A8E25C7}"/>
               </a:ext>
             </a:extLst>
           </p:cNvPr>
@@ -49587,7 +50451,7 @@
                 <a:ea typeface="Arial"/>
                 <a:cs typeface="Arial"/>
               </a:rPr>
-              <a:t>Zgjidhni një rast: pa vende, ID i panjohur ose kopje offline. Para klikimit, thoni çfarë duhet të kuptojë Arta.</a:t>
+              <a:t>Dritoni ka 0 vende. Para klikimit, parashikoni mesazhin që duhet të shohë Arta dhe gjendjen e butonit.</a:t>
             </a:r>
           </a:p>
           <a:p xmlns:a="http://schemas.openxmlformats.org/drawingml/2006/main">
@@ -49615,7 +50479,7 @@
                 <a:ea typeface="Arial"/>
                 <a:cs typeface="Arial"/>
               </a:rPr>
-              <a:t>Profesori hap demonstrimin. Klasa krahason rezultatin me parashikimin dhe shpjegon arsyen.</a:t>
+              <a:t>Profesori zgjedh “Pa vende · 0” në demonstrim. Klasa krahason rezultatin me parashikimin.</a:t>
             </a:r>
           </a:p>
         </p:txBody>
@@ -49625,7 +50489,7 @@
           <p:cNvPr id="11" name="">
             <a:extLst xmlns:a="http://schemas.openxmlformats.org/drawingml/2006/main">
               <a:ext uri="{FF2B5EF4-FFF2-40B4-BE49-F238E27FC236}">
-                <a16:creationId xmlns:a16="http://schemas.microsoft.com/office/drawing/2014/main" id="{8DCC18B0-8A22-49A8-928E-2AB54B826644}"/>
+                <a16:creationId xmlns:a16="http://schemas.microsoft.com/office/drawing/2014/main" id="{CE34E816-0C29-4249-BD7B-BBD181D50914}"/>
               </a:ext>
             </a:extLst>
           </p:cNvPr>
@@ -49783,7 +50647,7 @@
           <p:cNvPr id="12" name="">
             <a:extLst xmlns:a="http://schemas.openxmlformats.org/drawingml/2006/main">
               <a:ext uri="{FF2B5EF4-FFF2-40B4-BE49-F238E27FC236}">
-                <a16:creationId xmlns:a16="http://schemas.microsoft.com/office/drawing/2014/main" id="{90146718-95ED-446A-B59C-E33A05A3E5C7}"/>
+                <a16:creationId xmlns:a16="http://schemas.microsoft.com/office/drawing/2014/main" id="{BE6AE352-67CD-4B0B-930F-965809C2D308}"/>
               </a:ext>
             </a:extLst>
           </p:cNvPr>
@@ -49940,7 +50804,7 @@
     </p:spTree>
     <p:extLst>
       <p:ext uri="{BB962C8B-B14F-4D97-AF65-F5344CB8AC3E}">
-        <p14:creationId xmlns:p14="http://schemas.microsoft.com/office/powerpoint/2010/main" val="557263604"/>
+        <p14:creationId xmlns:p14="http://schemas.microsoft.com/office/powerpoint/2010/main" val="904570813"/>
       </p:ext>
     </p:extLst>
   </p:cSld>
@@ -49971,7 +50835,7 @@
           <p:cNvPr id="14" name="">
             <a:extLst xmlns:a="http://schemas.openxmlformats.org/drawingml/2006/main">
               <a:ext uri="{FF2B5EF4-FFF2-40B4-BE49-F238E27FC236}">
-                <a16:creationId xmlns:a16="http://schemas.microsoft.com/office/drawing/2014/main" id="{48069102-7742-470A-A01E-54F27C28B024}"/>
+                <a16:creationId xmlns:a16="http://schemas.microsoft.com/office/drawing/2014/main" id="{0D5789F8-4305-430B-8235-9C82D8DDA919}"/>
               </a:ext>
             </a:extLst>
           </p:cNvPr>
@@ -50129,7 +50993,7 @@
           <p:cNvPr id="2" name="">
             <a:extLst xmlns:a="http://schemas.openxmlformats.org/drawingml/2006/main">
               <a:ext uri="{FF2B5EF4-FFF2-40B4-BE49-F238E27FC236}">
-                <a16:creationId xmlns:a16="http://schemas.microsoft.com/office/drawing/2014/main" id="{6C65BB94-4E8A-4374-A425-57BF4C5F96B0}"/>
+                <a16:creationId xmlns:a16="http://schemas.microsoft.com/office/drawing/2014/main" id="{2B780AC3-861B-4E02-9AA3-47DC7314BF0F}"/>
               </a:ext>
             </a:extLst>
           </p:cNvPr>
@@ -50287,7 +51151,7 @@
           <p:cNvPr id="3" name="">
             <a:extLst xmlns:a="http://schemas.openxmlformats.org/drawingml/2006/main">
               <a:ext uri="{FF2B5EF4-FFF2-40B4-BE49-F238E27FC236}">
-                <a16:creationId xmlns:a16="http://schemas.microsoft.com/office/drawing/2014/main" id="{19808E4B-7EB9-424A-866C-41B78007C7C1}"/>
+                <a16:creationId xmlns:a16="http://schemas.microsoft.com/office/drawing/2014/main" id="{3B72662D-6D8F-4DEF-B944-45ADDC7F02EE}"/>
               </a:ext>
             </a:extLst>
           </p:cNvPr>
@@ -50435,7 +51299,7 @@
                 <a:ea typeface="Arial"/>
                 <a:cs typeface="Arial"/>
               </a:rPr>
-              <a:t>Butoni u shtyp. A u rezervua vendi?</a:t>
+              <a:t>Rasti 3 · Klikim apo rezervim</a:t>
             </a:r>
           </a:p>
         </p:txBody>
@@ -50445,7 +51309,7 @@
           <p:cNvPr id="4" name="">
             <a:extLst xmlns:a="http://schemas.openxmlformats.org/drawingml/2006/main">
               <a:ext uri="{FF2B5EF4-FFF2-40B4-BE49-F238E27FC236}">
-                <a16:creationId xmlns:a16="http://schemas.microsoft.com/office/drawing/2014/main" id="{822B03B0-0800-4A7F-BA81-06085D091728}"/>
+                <a16:creationId xmlns:a16="http://schemas.microsoft.com/office/drawing/2014/main" id="{CF98525C-8335-45D6-8B20-6DAF7523EEBB}"/>
               </a:ext>
             </a:extLst>
           </p:cNvPr>
@@ -50455,7 +51319,7 @@
           <p:nvPr/>
         </p:nvPicPr>
         <p:blipFill>
-          <a:blip xmlns:r="http://schemas.openxmlformats.org/officeDocument/2006/relationships" xmlns:a="http://schemas.openxmlformats.org/drawingml/2006/main" r:embed="R8c809b7c021c4058"/>
+          <a:blip xmlns:r="http://schemas.openxmlformats.org/officeDocument/2006/relationships" xmlns:a="http://schemas.openxmlformats.org/drawingml/2006/main" r:embed="Rbce66c7d3e2548c5"/>
           <a:stretch xmlns:a="http://schemas.openxmlformats.org/drawingml/2006/main"/>
         </p:blipFill>
         <p:spPr>
@@ -50473,7 +51337,7 @@
           <p:cNvPr id="5" name="">
             <a:extLst xmlns:a="http://schemas.openxmlformats.org/drawingml/2006/main">
               <a:ext uri="{FF2B5EF4-FFF2-40B4-BE49-F238E27FC236}">
-                <a16:creationId xmlns:a16="http://schemas.microsoft.com/office/drawing/2014/main" id="{ACAC85F7-8C8E-40E1-8653-7512622C110A}"/>
+                <a16:creationId xmlns:a16="http://schemas.microsoft.com/office/drawing/2014/main" id="{2DA5AADC-7079-4836-AE8C-BAC3DB07D293}"/>
               </a:ext>
             </a:extLst>
           </p:cNvPr>
@@ -50631,7 +51495,7 @@
           <p:cNvPr id="6" name="">
             <a:extLst xmlns:a="http://schemas.openxmlformats.org/drawingml/2006/main">
               <a:ext uri="{FF2B5EF4-FFF2-40B4-BE49-F238E27FC236}">
-                <a16:creationId xmlns:a16="http://schemas.microsoft.com/office/drawing/2014/main" id="{D2C0937F-8B88-4681-904F-475BA17269FE}"/>
+                <a16:creationId xmlns:a16="http://schemas.microsoft.com/office/drawing/2014/main" id="{953A222C-4C4D-4F0B-B8A1-86255D8AEF04}"/>
               </a:ext>
             </a:extLst>
           </p:cNvPr>
@@ -50789,7 +51653,7 @@
           <p:cNvPr id="7" name="">
             <a:extLst xmlns:a="http://schemas.openxmlformats.org/drawingml/2006/main">
               <a:ext uri="{FF2B5EF4-FFF2-40B4-BE49-F238E27FC236}">
-                <a16:creationId xmlns:a16="http://schemas.microsoft.com/office/drawing/2014/main" id="{04D781FF-CAAC-4D69-8D7B-EF0EF720F523}"/>
+                <a16:creationId xmlns:a16="http://schemas.microsoft.com/office/drawing/2014/main" id="{E1323528-41D0-4FC2-B608-DC69F27475F7}"/>
               </a:ext>
             </a:extLst>
           </p:cNvPr>
@@ -50947,7 +51811,7 @@
           <p:cNvPr id="8" name="">
             <a:extLst xmlns:a="http://schemas.openxmlformats.org/drawingml/2006/main">
               <a:ext uri="{FF2B5EF4-FFF2-40B4-BE49-F238E27FC236}">
-                <a16:creationId xmlns:a16="http://schemas.microsoft.com/office/drawing/2014/main" id="{42762100-600F-4C91-A528-77263F11B751}"/>
+                <a16:creationId xmlns:a16="http://schemas.microsoft.com/office/drawing/2014/main" id="{AC95B873-1911-403D-A9B0-97A40E11271B}"/>
               </a:ext>
             </a:extLst>
           </p:cNvPr>
@@ -51105,7 +51969,7 @@
           <p:cNvPr id="9" name="">
             <a:extLst xmlns:a="http://schemas.openxmlformats.org/drawingml/2006/main">
               <a:ext uri="{FF2B5EF4-FFF2-40B4-BE49-F238E27FC236}">
-                <a16:creationId xmlns:a16="http://schemas.microsoft.com/office/drawing/2014/main" id="{5737CF0B-596D-4C62-B7D9-A9055A00C8BC}"/>
+                <a16:creationId xmlns:a16="http://schemas.microsoft.com/office/drawing/2014/main" id="{200C0FAC-6B06-4746-BEC0-C226B661D6E3}"/>
               </a:ext>
             </a:extLst>
           </p:cNvPr>
@@ -51263,7 +52127,7 @@
           <p:cNvPr id="10" name="">
             <a:extLst xmlns:a="http://schemas.openxmlformats.org/drawingml/2006/main">
               <a:ext uri="{FF2B5EF4-FFF2-40B4-BE49-F238E27FC236}">
-                <a16:creationId xmlns:a16="http://schemas.microsoft.com/office/drawing/2014/main" id="{03245595-9536-4502-9EE7-705A92268A2E}"/>
+                <a16:creationId xmlns:a16="http://schemas.microsoft.com/office/drawing/2014/main" id="{DE7CA7C4-F2A7-4DCE-A361-787D5C3CAF0D}"/>
               </a:ext>
             </a:extLst>
           </p:cNvPr>
@@ -51421,7 +52285,7 @@
           <p:cNvPr id="11" name="">
             <a:extLst xmlns:a="http://schemas.openxmlformats.org/drawingml/2006/main">
               <a:ext uri="{FF2B5EF4-FFF2-40B4-BE49-F238E27FC236}">
-                <a16:creationId xmlns:a16="http://schemas.microsoft.com/office/drawing/2014/main" id="{12E8C6F2-E43D-4258-BD9E-813286113255}"/>
+                <a16:creationId xmlns:a16="http://schemas.microsoft.com/office/drawing/2014/main" id="{5BD72A3B-9097-4D00-8710-4F10FFDD4038}"/>
               </a:ext>
             </a:extLst>
           </p:cNvPr>
@@ -51579,7 +52443,7 @@
           <p:cNvPr id="12" name="">
             <a:extLst xmlns:a="http://schemas.openxmlformats.org/drawingml/2006/main">
               <a:ext uri="{FF2B5EF4-FFF2-40B4-BE49-F238E27FC236}">
-                <a16:creationId xmlns:a16="http://schemas.microsoft.com/office/drawing/2014/main" id="{F6B9F987-A8D1-4D13-ADCE-0D07B6F1DA51}"/>
+                <a16:creationId xmlns:a16="http://schemas.microsoft.com/office/drawing/2014/main" id="{2086DE55-ACAA-4ADE-8167-A117C0256C67}"/>
               </a:ext>
             </a:extLst>
           </p:cNvPr>
@@ -51737,7 +52601,7 @@
           <p:cNvPr id="13" name="">
             <a:extLst xmlns:a="http://schemas.openxmlformats.org/drawingml/2006/main">
               <a:ext uri="{FF2B5EF4-FFF2-40B4-BE49-F238E27FC236}">
-                <a16:creationId xmlns:a16="http://schemas.microsoft.com/office/drawing/2014/main" id="{A64C4F08-BABD-44CE-AFB4-7D81E2B70342}"/>
+                <a16:creationId xmlns:a16="http://schemas.microsoft.com/office/drawing/2014/main" id="{0C2BC2EC-255C-4725-B376-89A7DF1E8D17}"/>
               </a:ext>
             </a:extLst>
           </p:cNvPr>
@@ -51893,7 +52757,7 @@
     </p:spTree>
     <p:extLst>
       <p:ext uri="{BB962C8B-B14F-4D97-AF65-F5344CB8AC3E}">
-        <p14:creationId xmlns:p14="http://schemas.microsoft.com/office/powerpoint/2010/main" val="1307865442"/>
+        <p14:creationId xmlns:p14="http://schemas.microsoft.com/office/powerpoint/2010/main" val="152396182"/>
       </p:ext>
     </p:extLst>
   </p:cSld>
